--- a/deliverables/決賽海報_AI資安框架_A2.pptx
+++ b/deliverables/決賽海報_AI資安框架_A2.pptx
@@ -3197,7 +3197,7 @@
             <a:r>
               <a:rPr sz="1400" b="0">
                 <a:solidFill>
-                  <a:srgbClr val="0070D1"/>
+                  <a:srgbClr val="105186"/>
                 </a:solidFill>
                 <a:latin typeface="Times New Roman"/>
                 <a:ea typeface="DFKai-SB"/>
@@ -3244,7 +3244,7 @@
             <a:r>
               <a:rPr sz="3200" b="0">
                 <a:solidFill>
-                  <a:srgbClr val="121314"/>
+                  <a:srgbClr val="092B42"/>
                 </a:solidFill>
                 <a:latin typeface="Times New Roman"/>
                 <a:ea typeface="DFKai-SB"/>
@@ -3268,7 +3268,7 @@
             <a:r>
               <a:rPr sz="3200" b="0">
                 <a:solidFill>
-                  <a:srgbClr val="121314"/>
+                  <a:srgbClr val="092B42"/>
                 </a:solidFill>
                 <a:latin typeface="Times New Roman"/>
                 <a:ea typeface="DFKai-SB"/>
@@ -3292,7 +3292,7 @@
             <a:r>
               <a:rPr sz="3200" b="0">
                 <a:solidFill>
-                  <a:srgbClr val="121314"/>
+                  <a:srgbClr val="092B42"/>
                 </a:solidFill>
                 <a:latin typeface="Times New Roman"/>
                 <a:ea typeface="DFKai-SB"/>
@@ -3303,7 +3303,7 @@
             <a:r>
               <a:rPr sz="3200" b="0">
                 <a:solidFill>
-                  <a:srgbClr val="121314"/>
+                  <a:srgbClr val="092B42"/>
                 </a:solidFill>
                 <a:latin typeface="Times New Roman"/>
                 <a:ea typeface="DFKai-SB"/>
@@ -3314,7 +3314,7 @@
             <a:r>
               <a:rPr sz="3200" b="0">
                 <a:solidFill>
-                  <a:srgbClr val="121314"/>
+                  <a:srgbClr val="092B42"/>
                 </a:solidFill>
                 <a:latin typeface="Times New Roman"/>
                 <a:ea typeface="DFKai-SB"/>
@@ -3361,7 +3361,7 @@
             <a:r>
               <a:rPr sz="2200" b="0">
                 <a:solidFill>
-                  <a:srgbClr val="0070D1"/>
+                  <a:srgbClr val="105186"/>
                 </a:solidFill>
                 <a:latin typeface="Times New Roman"/>
                 <a:ea typeface="DFKai-SB"/>
@@ -3388,7 +3388,7 @@
           </a:prstGeom>
           <a:ln w="12700">
             <a:solidFill>
-              <a:srgbClr val="CCDCEB"/>
+              <a:srgbClr val="D6DDE0"/>
             </a:solidFill>
           </a:ln>
           <a:effectLst/>
@@ -3468,7 +3468,7 @@
             <a:r>
               <a:rPr sz="2300" b="0">
                 <a:solidFill>
-                  <a:srgbClr val="121314"/>
+                  <a:srgbClr val="171C1D"/>
                 </a:solidFill>
                 <a:latin typeface="Times New Roman"/>
                 <a:ea typeface="DFKai-SB"/>
@@ -3515,7 +3515,7 @@
             <a:r>
               <a:rPr sz="1700" b="0">
                 <a:solidFill>
-                  <a:srgbClr val="526477"/>
+                  <a:srgbClr val="53666E"/>
                 </a:solidFill>
                 <a:latin typeface="Times New Roman"/>
                 <a:ea typeface="DFKai-SB"/>
@@ -3562,7 +3562,7 @@
             <a:r>
               <a:rPr sz="2000" b="1">
                 <a:solidFill>
-                  <a:srgbClr val="0070D1"/>
+                  <a:srgbClr val="105186"/>
                 </a:solidFill>
                 <a:latin typeface="Times New Roman"/>
                 <a:ea typeface="DFKai-SB"/>
@@ -3609,7 +3609,7 @@
             <a:r>
               <a:rPr sz="2400" b="0">
                 <a:solidFill>
-                  <a:srgbClr val="121314"/>
+                  <a:srgbClr val="092B42"/>
                 </a:solidFill>
                 <a:latin typeface="Times New Roman"/>
                 <a:ea typeface="DFKai-SB"/>
@@ -3635,11 +3635,11 @@
             <a:avLst/>
           </a:prstGeom>
           <a:solidFill>
-            <a:srgbClr val="F5F8FC"/>
+            <a:srgbClr val="F0F2F3"/>
           </a:solidFill>
           <a:ln w="10160">
             <a:solidFill>
-              <a:srgbClr val="CCDCEB"/>
+              <a:srgbClr val="D6DDE0"/>
             </a:solidFill>
           </a:ln>
           <a:effectLst/>
@@ -3681,7 +3681,7 @@
             <a:avLst/>
           </a:prstGeom>
           <a:solidFill>
-            <a:srgbClr val="0070D1"/>
+            <a:srgbClr val="105186"/>
           </a:solidFill>
           <a:ln>
             <a:noFill/>
@@ -3746,7 +3746,7 @@
             <a:r>
               <a:rPr sz="1800" b="1">
                 <a:solidFill>
-                  <a:srgbClr val="0070D1"/>
+                  <a:srgbClr val="105186"/>
                 </a:solidFill>
                 <a:latin typeface="Times New Roman"/>
                 <a:ea typeface="DFKai-SB"/>
@@ -3793,7 +3793,7 @@
             <a:r>
               <a:rPr sz="2300" b="0">
                 <a:solidFill>
-                  <a:srgbClr val="121314"/>
+                  <a:srgbClr val="171C1D"/>
                 </a:solidFill>
                 <a:latin typeface="Times New Roman"/>
                 <a:ea typeface="DFKai-SB"/>
@@ -3864,7 +3864,7 @@
             <a:r>
               <a:rPr sz="1800" b="0">
                 <a:solidFill>
-                  <a:srgbClr val="121314"/>
+                  <a:srgbClr val="171C1D"/>
                 </a:solidFill>
                 <a:latin typeface="Times New Roman"/>
                 <a:ea typeface="DFKai-SB"/>
@@ -3875,7 +3875,7 @@
             <a:r>
               <a:rPr sz="1800" b="0">
                 <a:solidFill>
-                  <a:srgbClr val="121314"/>
+                  <a:srgbClr val="171C1D"/>
                 </a:solidFill>
                 <a:latin typeface="Times New Roman"/>
                 <a:ea typeface="DFKai-SB"/>
@@ -3922,7 +3922,7 @@
             <a:r>
               <a:rPr sz="1800" b="0">
                 <a:solidFill>
-                  <a:srgbClr val="121314"/>
+                  <a:srgbClr val="171C1D"/>
                 </a:solidFill>
                 <a:latin typeface="Times New Roman"/>
                 <a:ea typeface="DFKai-SB"/>
@@ -3933,7 +3933,7 @@
             <a:r>
               <a:rPr sz="1800" b="0">
                 <a:solidFill>
-                  <a:srgbClr val="121314"/>
+                  <a:srgbClr val="171C1D"/>
                 </a:solidFill>
                 <a:latin typeface="Times New Roman"/>
                 <a:ea typeface="DFKai-SB"/>
@@ -3959,7 +3959,7 @@
             <a:avLst/>
           </a:prstGeom>
           <a:solidFill>
-            <a:srgbClr val="0070D1"/>
+            <a:srgbClr val="105186"/>
           </a:solidFill>
           <a:ln>
             <a:noFill/>
@@ -4024,7 +4024,7 @@
             <a:r>
               <a:rPr sz="2000" b="1">
                 <a:solidFill>
-                  <a:srgbClr val="0070D1"/>
+                  <a:srgbClr val="105186"/>
                 </a:solidFill>
                 <a:latin typeface="Times New Roman"/>
                 <a:ea typeface="DFKai-SB"/>
@@ -4035,7 +4035,7 @@
             <a:r>
               <a:rPr sz="2000" b="1">
                 <a:solidFill>
-                  <a:srgbClr val="0070D1"/>
+                  <a:srgbClr val="105186"/>
                 </a:solidFill>
                 <a:latin typeface="Times New Roman"/>
                 <a:ea typeface="DFKai-SB"/>
@@ -4046,7 +4046,7 @@
             <a:r>
               <a:rPr sz="2000" b="1">
                 <a:solidFill>
-                  <a:srgbClr val="0070D1"/>
+                  <a:srgbClr val="105186"/>
                 </a:solidFill>
                 <a:latin typeface="Times New Roman"/>
                 <a:ea typeface="DFKai-SB"/>
@@ -4093,7 +4093,7 @@
             <a:r>
               <a:rPr sz="1500" b="0">
                 <a:solidFill>
-                  <a:srgbClr val="526477"/>
+                  <a:srgbClr val="53666E"/>
                 </a:solidFill>
                 <a:latin typeface="Times New Roman"/>
                 <a:ea typeface="DFKai-SB"/>
@@ -4104,7 +4104,7 @@
             <a:r>
               <a:rPr sz="1500" b="0">
                 <a:solidFill>
-                  <a:srgbClr val="526477"/>
+                  <a:srgbClr val="53666E"/>
                 </a:solidFill>
                 <a:latin typeface="Times New Roman"/>
                 <a:ea typeface="DFKai-SB"/>
@@ -4115,7 +4115,7 @@
             <a:r>
               <a:rPr sz="1500" b="0">
                 <a:solidFill>
-                  <a:srgbClr val="526477"/>
+                  <a:srgbClr val="53666E"/>
                 </a:solidFill>
                 <a:latin typeface="Times New Roman"/>
                 <a:ea typeface="DFKai-SB"/>
@@ -4126,7 +4126,7 @@
             <a:r>
               <a:rPr sz="1500" b="0">
                 <a:solidFill>
-                  <a:srgbClr val="526477"/>
+                  <a:srgbClr val="53666E"/>
                 </a:solidFill>
                 <a:latin typeface="Times New Roman"/>
                 <a:ea typeface="DFKai-SB"/>
@@ -4137,7 +4137,7 @@
             <a:r>
               <a:rPr sz="1500" b="0">
                 <a:solidFill>
-                  <a:srgbClr val="526477"/>
+                  <a:srgbClr val="53666E"/>
                 </a:solidFill>
                 <a:latin typeface="Times New Roman"/>
                 <a:ea typeface="DFKai-SB"/>
@@ -4163,11 +4163,11 @@
             <a:avLst/>
           </a:prstGeom>
           <a:solidFill>
-            <a:srgbClr val="F5F8FC"/>
+            <a:srgbClr val="F0F2F3"/>
           </a:solidFill>
           <a:ln w="10160">
             <a:solidFill>
-              <a:srgbClr val="CCDCEB"/>
+              <a:srgbClr val="D6DDE0"/>
             </a:solidFill>
           </a:ln>
           <a:effectLst/>
@@ -4209,7 +4209,7 @@
             <a:avLst/>
           </a:prstGeom>
           <a:solidFill>
-            <a:srgbClr val="0070D1"/>
+            <a:srgbClr val="105186"/>
           </a:solidFill>
           <a:ln>
             <a:noFill/>
@@ -4274,7 +4274,7 @@
             <a:r>
               <a:rPr sz="1800" b="1">
                 <a:solidFill>
-                  <a:srgbClr val="0070D1"/>
+                  <a:srgbClr val="105186"/>
                 </a:solidFill>
                 <a:latin typeface="Times New Roman"/>
                 <a:ea typeface="DFKai-SB"/>
@@ -4321,7 +4321,7 @@
             <a:r>
               <a:rPr sz="2300" b="0">
                 <a:solidFill>
-                  <a:srgbClr val="121314"/>
+                  <a:srgbClr val="171C1D"/>
                 </a:solidFill>
                 <a:latin typeface="Times New Roman"/>
                 <a:ea typeface="DFKai-SB"/>
@@ -4392,7 +4392,7 @@
             <a:r>
               <a:rPr sz="2000" b="0">
                 <a:solidFill>
-                  <a:srgbClr val="121314"/>
+                  <a:srgbClr val="171C1D"/>
                 </a:solidFill>
                 <a:latin typeface="Times New Roman"/>
                 <a:ea typeface="DFKai-SB"/>
@@ -4403,7 +4403,7 @@
             <a:r>
               <a:rPr sz="2000" b="0">
                 <a:solidFill>
-                  <a:srgbClr val="121314"/>
+                  <a:srgbClr val="171C1D"/>
                 </a:solidFill>
                 <a:latin typeface="Times New Roman"/>
                 <a:ea typeface="DFKai-SB"/>
@@ -4414,7 +4414,7 @@
             <a:r>
               <a:rPr sz="2000" b="0">
                 <a:solidFill>
-                  <a:srgbClr val="121314"/>
+                  <a:srgbClr val="171C1D"/>
                 </a:solidFill>
                 <a:latin typeface="Times New Roman"/>
                 <a:ea typeface="DFKai-SB"/>
@@ -4425,7 +4425,7 @@
             <a:r>
               <a:rPr sz="2000" b="0">
                 <a:solidFill>
-                  <a:srgbClr val="121314"/>
+                  <a:srgbClr val="171C1D"/>
                 </a:solidFill>
                 <a:latin typeface="Times New Roman"/>
                 <a:ea typeface="DFKai-SB"/>
@@ -4472,7 +4472,7 @@
             <a:r>
               <a:rPr sz="1800" b="0">
                 <a:solidFill>
-                  <a:srgbClr val="121314"/>
+                  <a:srgbClr val="171C1D"/>
                 </a:solidFill>
                 <a:latin typeface="Times New Roman"/>
                 <a:ea typeface="DFKai-SB"/>
@@ -4483,7 +4483,7 @@
             <a:r>
               <a:rPr sz="1800" b="0">
                 <a:solidFill>
-                  <a:srgbClr val="121314"/>
+                  <a:srgbClr val="171C1D"/>
                 </a:solidFill>
                 <a:latin typeface="Times New Roman"/>
                 <a:ea typeface="DFKai-SB"/>
@@ -4494,7 +4494,7 @@
             <a:r>
               <a:rPr sz="1800" b="0">
                 <a:solidFill>
-                  <a:srgbClr val="121314"/>
+                  <a:srgbClr val="171C1D"/>
                 </a:solidFill>
                 <a:latin typeface="Times New Roman"/>
                 <a:ea typeface="DFKai-SB"/>
@@ -4505,7 +4505,7 @@
             <a:r>
               <a:rPr sz="1800" b="0">
                 <a:solidFill>
-                  <a:srgbClr val="121314"/>
+                  <a:srgbClr val="171C1D"/>
                 </a:solidFill>
                 <a:latin typeface="Times New Roman"/>
                 <a:ea typeface="DFKai-SB"/>
@@ -4531,7 +4531,7 @@
             <a:avLst/>
           </a:prstGeom>
           <a:solidFill>
-            <a:srgbClr val="0070D1"/>
+            <a:srgbClr val="105186"/>
           </a:solidFill>
           <a:ln>
             <a:noFill/>
@@ -4596,7 +4596,7 @@
             <a:r>
               <a:rPr sz="2000" b="1">
                 <a:solidFill>
-                  <a:srgbClr val="0070D1"/>
+                  <a:srgbClr val="105186"/>
                 </a:solidFill>
                 <a:latin typeface="Times New Roman"/>
                 <a:ea typeface="DFKai-SB"/>
@@ -4607,7 +4607,7 @@
             <a:r>
               <a:rPr sz="2000" b="1">
                 <a:solidFill>
-                  <a:srgbClr val="0070D1"/>
+                  <a:srgbClr val="105186"/>
                 </a:solidFill>
                 <a:latin typeface="Times New Roman"/>
                 <a:ea typeface="DFKai-SB"/>
@@ -4654,7 +4654,7 @@
             <a:r>
               <a:rPr sz="1500" b="0">
                 <a:solidFill>
-                  <a:srgbClr val="526477"/>
+                  <a:srgbClr val="53666E"/>
                 </a:solidFill>
                 <a:latin typeface="Times New Roman"/>
                 <a:ea typeface="DFKai-SB"/>
@@ -4680,7 +4680,7 @@
             <a:avLst/>
           </a:prstGeom>
           <a:solidFill>
-            <a:srgbClr val="0070D1"/>
+            <a:srgbClr val="105186"/>
           </a:solidFill>
           <a:ln>
             <a:noFill/>
@@ -4724,7 +4724,7 @@
             <a:avLst/>
           </a:prstGeom>
           <a:solidFill>
-            <a:srgbClr val="0070D1"/>
+            <a:srgbClr val="105186"/>
           </a:solidFill>
           <a:ln>
             <a:noFill/>
@@ -4768,11 +4768,11 @@
             <a:avLst/>
           </a:prstGeom>
           <a:solidFill>
-            <a:srgbClr val="F5F8FC"/>
+            <a:srgbClr val="F0F2F3"/>
           </a:solidFill>
           <a:ln w="10160">
             <a:solidFill>
-              <a:srgbClr val="CCDCEB"/>
+              <a:srgbClr val="D6DDE0"/>
             </a:solidFill>
           </a:ln>
           <a:effectLst/>
@@ -4814,7 +4814,7 @@
             <a:avLst/>
           </a:prstGeom>
           <a:solidFill>
-            <a:srgbClr val="0070D1"/>
+            <a:srgbClr val="105186"/>
           </a:solidFill>
           <a:ln>
             <a:noFill/>
@@ -4879,7 +4879,7 @@
             <a:r>
               <a:rPr sz="1800" b="1">
                 <a:solidFill>
-                  <a:srgbClr val="0070D1"/>
+                  <a:srgbClr val="105186"/>
                 </a:solidFill>
                 <a:latin typeface="Times New Roman"/>
                 <a:ea typeface="DFKai-SB"/>
@@ -4926,7 +4926,7 @@
             <a:r>
               <a:rPr sz="2300" b="0">
                 <a:solidFill>
-                  <a:srgbClr val="121314"/>
+                  <a:srgbClr val="171C1D"/>
                 </a:solidFill>
                 <a:latin typeface="Times New Roman"/>
                 <a:ea typeface="DFKai-SB"/>
@@ -4937,7 +4937,7 @@
             <a:r>
               <a:rPr sz="2300" b="0">
                 <a:solidFill>
-                  <a:srgbClr val="121314"/>
+                  <a:srgbClr val="171C1D"/>
                 </a:solidFill>
                 <a:latin typeface="Times New Roman"/>
                 <a:ea typeface="DFKai-SB"/>
@@ -4948,7 +4948,7 @@
             <a:r>
               <a:rPr sz="2300" b="0">
                 <a:solidFill>
-                  <a:srgbClr val="121314"/>
+                  <a:srgbClr val="171C1D"/>
                 </a:solidFill>
                 <a:latin typeface="Times New Roman"/>
                 <a:ea typeface="DFKai-SB"/>
@@ -4978,7 +4978,7 @@
           </a:solidFill>
           <a:ln w="10160">
             <a:solidFill>
-              <a:srgbClr val="0070D1"/>
+              <a:srgbClr val="105186"/>
             </a:solidFill>
           </a:ln>
           <a:effectLst/>
@@ -5021,7 +5021,7 @@
           </a:prstGeom>
           <a:ln w="12700">
             <a:solidFill>
-              <a:srgbClr val="0070D1"/>
+              <a:srgbClr val="105186"/>
             </a:solidFill>
           </a:ln>
           <a:effectLst/>
@@ -5057,7 +5057,7 @@
           </a:prstGeom>
           <a:ln w="12700">
             <a:solidFill>
-              <a:srgbClr val="0070D1"/>
+              <a:srgbClr val="105186"/>
             </a:solidFill>
           </a:ln>
           <a:effectLst/>
@@ -5093,7 +5093,7 @@
           </a:prstGeom>
           <a:ln w="12700">
             <a:solidFill>
-              <a:srgbClr val="0070D1"/>
+              <a:srgbClr val="105186"/>
             </a:solidFill>
           </a:ln>
           <a:effectLst/>
@@ -5129,7 +5129,7 @@
           </a:prstGeom>
           <a:ln w="25400">
             <a:solidFill>
-              <a:srgbClr val="0070D1"/>
+              <a:srgbClr val="105186"/>
             </a:solidFill>
           </a:ln>
           <a:effectLst/>
@@ -5165,7 +5165,7 @@
           </a:prstGeom>
           <a:ln w="25400">
             <a:solidFill>
-              <a:srgbClr val="0070D1"/>
+              <a:srgbClr val="105186"/>
             </a:solidFill>
           </a:ln>
           <a:effectLst/>
@@ -5221,7 +5221,7 @@
             <a:r>
               <a:rPr sz="1900" b="0">
                 <a:solidFill>
-                  <a:srgbClr val="121314"/>
+                  <a:srgbClr val="171C1D"/>
                 </a:solidFill>
                 <a:latin typeface="Times New Roman"/>
                 <a:ea typeface="DFKai-SB"/>
@@ -5268,7 +5268,7 @@
             <a:r>
               <a:rPr sz="1900" b="0">
                 <a:solidFill>
-                  <a:srgbClr val="121314"/>
+                  <a:srgbClr val="171C1D"/>
                 </a:solidFill>
                 <a:latin typeface="Times New Roman"/>
                 <a:ea typeface="DFKai-SB"/>
@@ -5294,7 +5294,7 @@
             <a:avLst/>
           </a:prstGeom>
           <a:solidFill>
-            <a:srgbClr val="E2EDF8"/>
+            <a:srgbClr val="EAF0F4"/>
           </a:solidFill>
           <a:ln>
             <a:noFill/>
@@ -5359,7 +5359,7 @@
             <a:r>
               <a:rPr sz="2000" b="0">
                 <a:solidFill>
-                  <a:srgbClr val="0070D1"/>
+                  <a:srgbClr val="105186"/>
                 </a:solidFill>
                 <a:latin typeface="Times New Roman"/>
                 <a:ea typeface="DFKai-SB"/>
@@ -5385,7 +5385,7 @@
             <a:avLst/>
           </a:prstGeom>
           <a:solidFill>
-            <a:srgbClr val="E2EDF8"/>
+            <a:srgbClr val="EAF0F4"/>
           </a:solidFill>
           <a:ln>
             <a:noFill/>
@@ -5450,7 +5450,7 @@
             <a:r>
               <a:rPr sz="2000" b="0">
                 <a:solidFill>
-                  <a:srgbClr val="0070D1"/>
+                  <a:srgbClr val="105186"/>
                 </a:solidFill>
                 <a:latin typeface="Times New Roman"/>
                 <a:ea typeface="DFKai-SB"/>
@@ -5476,7 +5476,7 @@
             <a:avLst/>
           </a:prstGeom>
           <a:solidFill>
-            <a:srgbClr val="E2EDF8"/>
+            <a:srgbClr val="EAF0F4"/>
           </a:solidFill>
           <a:ln>
             <a:noFill/>
@@ -5541,7 +5541,7 @@
             <a:r>
               <a:rPr sz="2000" b="0">
                 <a:solidFill>
-                  <a:srgbClr val="0070D1"/>
+                  <a:srgbClr val="105186"/>
                 </a:solidFill>
                 <a:latin typeface="Times New Roman"/>
                 <a:ea typeface="DFKai-SB"/>
@@ -5588,7 +5588,7 @@
             <a:r>
               <a:rPr sz="1500" b="0">
                 <a:solidFill>
-                  <a:srgbClr val="526477"/>
+                  <a:srgbClr val="53666E"/>
                 </a:solidFill>
                 <a:latin typeface="Times New Roman"/>
                 <a:ea typeface="DFKai-SB"/>
@@ -5614,11 +5614,11 @@
             <a:avLst/>
           </a:prstGeom>
           <a:solidFill>
-            <a:srgbClr val="F5F8FC"/>
+            <a:srgbClr val="F0F2F3"/>
           </a:solidFill>
           <a:ln w="10160">
             <a:solidFill>
-              <a:srgbClr val="CCDCEB"/>
+              <a:srgbClr val="D6DDE0"/>
             </a:solidFill>
           </a:ln>
           <a:effectLst/>
@@ -5660,7 +5660,7 @@
             <a:avLst/>
           </a:prstGeom>
           <a:solidFill>
-            <a:srgbClr val="0070D1"/>
+            <a:srgbClr val="105186"/>
           </a:solidFill>
           <a:ln>
             <a:noFill/>
@@ -5725,7 +5725,7 @@
             <a:r>
               <a:rPr sz="1800" b="1">
                 <a:solidFill>
-                  <a:srgbClr val="0070D1"/>
+                  <a:srgbClr val="105186"/>
                 </a:solidFill>
                 <a:latin typeface="Times New Roman"/>
                 <a:ea typeface="DFKai-SB"/>
@@ -5772,7 +5772,7 @@
             <a:r>
               <a:rPr sz="2300" b="0">
                 <a:solidFill>
-                  <a:srgbClr val="121314"/>
+                  <a:srgbClr val="171C1D"/>
                 </a:solidFill>
                 <a:latin typeface="Times New Roman"/>
                 <a:ea typeface="DFKai-SB"/>
@@ -5843,7 +5843,7 @@
             <a:r>
               <a:rPr sz="1900" b="0">
                 <a:solidFill>
-                  <a:srgbClr val="121314"/>
+                  <a:srgbClr val="171C1D"/>
                 </a:solidFill>
                 <a:latin typeface="Times New Roman"/>
                 <a:ea typeface="DFKai-SB"/>
@@ -5890,7 +5890,7 @@
             <a:r>
               <a:rPr sz="1900" b="0">
                 <a:solidFill>
-                  <a:srgbClr val="121314"/>
+                  <a:srgbClr val="171C1D"/>
                 </a:solidFill>
                 <a:latin typeface="Times New Roman"/>
                 <a:ea typeface="DFKai-SB"/>
@@ -5937,7 +5937,7 @@
             <a:r>
               <a:rPr sz="2100" b="0">
                 <a:solidFill>
-                  <a:srgbClr val="0070D1"/>
+                  <a:srgbClr val="105186"/>
                 </a:solidFill>
                 <a:latin typeface="Times New Roman"/>
                 <a:ea typeface="DFKai-SB"/>
@@ -5963,7 +5963,7 @@
             <a:avLst/>
           </a:prstGeom>
           <a:solidFill>
-            <a:srgbClr val="0070D1"/>
+            <a:srgbClr val="105186"/>
           </a:solidFill>
           <a:ln>
             <a:noFill/>
@@ -6028,7 +6028,7 @@
             <a:r>
               <a:rPr sz="2100" b="0">
                 <a:solidFill>
-                  <a:srgbClr val="0070D1"/>
+                  <a:srgbClr val="105186"/>
                 </a:solidFill>
                 <a:latin typeface="Times New Roman"/>
                 <a:ea typeface="DFKai-SB"/>
@@ -6054,7 +6054,7 @@
             <a:avLst/>
           </a:prstGeom>
           <a:solidFill>
-            <a:srgbClr val="0070D1"/>
+            <a:srgbClr val="105186"/>
           </a:solidFill>
           <a:ln>
             <a:noFill/>
@@ -6119,7 +6119,7 @@
             <a:r>
               <a:rPr sz="2100" b="0">
                 <a:solidFill>
-                  <a:srgbClr val="0070D1"/>
+                  <a:srgbClr val="105186"/>
                 </a:solidFill>
                 <a:latin typeface="Times New Roman"/>
                 <a:ea typeface="DFKai-SB"/>
@@ -6166,7 +6166,7 @@
             <a:r>
               <a:rPr sz="1500" b="0">
                 <a:solidFill>
-                  <a:srgbClr val="526477"/>
+                  <a:srgbClr val="53666E"/>
                 </a:solidFill>
                 <a:latin typeface="Times New Roman"/>
                 <a:ea typeface="DFKai-SB"/>
@@ -6192,7 +6192,7 @@
             <a:avLst/>
           </a:prstGeom>
           <a:solidFill>
-            <a:srgbClr val="0070D1"/>
+            <a:srgbClr val="105186"/>
           </a:solidFill>
           <a:ln>
             <a:noFill/>
@@ -6236,7 +6236,7 @@
             <a:avLst/>
           </a:prstGeom>
           <a:solidFill>
-            <a:srgbClr val="EEF5FC"/>
+            <a:srgbClr val="FFF4DD"/>
           </a:solidFill>
           <a:ln>
             <a:noFill/>
@@ -6301,7 +6301,7 @@
             <a:r>
               <a:rPr sz="1800" b="0">
                 <a:solidFill>
-                  <a:srgbClr val="0070D1"/>
+                  <a:srgbClr val="092B42"/>
                 </a:solidFill>
                 <a:latin typeface="Times New Roman"/>
                 <a:ea typeface="DFKai-SB"/>
@@ -6348,7 +6348,7 @@
             <a:r>
               <a:rPr sz="2000" b="1">
                 <a:solidFill>
-                  <a:srgbClr val="0070D1"/>
+                  <a:srgbClr val="105186"/>
                 </a:solidFill>
                 <a:latin typeface="Times New Roman"/>
                 <a:ea typeface="DFKai-SB"/>
@@ -6395,7 +6395,7 @@
             <a:r>
               <a:rPr sz="2400" b="0">
                 <a:solidFill>
-                  <a:srgbClr val="121314"/>
+                  <a:srgbClr val="092B42"/>
                 </a:solidFill>
                 <a:latin typeface="Times New Roman"/>
                 <a:ea typeface="DFKai-SB"/>
@@ -6442,7 +6442,7 @@
             <a:r>
               <a:rPr sz="2300" b="0">
                 <a:solidFill>
-                  <a:srgbClr val="0070D1"/>
+                  <a:srgbClr val="105186"/>
                 </a:solidFill>
                 <a:latin typeface="Times New Roman"/>
                 <a:ea typeface="DFKai-SB"/>
@@ -6489,7 +6489,7 @@
             <a:r>
               <a:rPr sz="1600" b="0">
                 <a:solidFill>
-                  <a:srgbClr val="526477"/>
+                  <a:srgbClr val="53666E"/>
                 </a:solidFill>
                 <a:latin typeface="Times New Roman"/>
                 <a:ea typeface="DFKai-SB"/>
@@ -6513,7 +6513,7 @@
             <a:r>
               <a:rPr sz="1600" b="0">
                 <a:solidFill>
-                  <a:srgbClr val="526477"/>
+                  <a:srgbClr val="53666E"/>
                 </a:solidFill>
                 <a:latin typeface="Times New Roman"/>
                 <a:ea typeface="DFKai-SB"/>
@@ -6524,7 +6524,7 @@
             <a:r>
               <a:rPr sz="1600" b="0">
                 <a:solidFill>
-                  <a:srgbClr val="526477"/>
+                  <a:srgbClr val="53666E"/>
                 </a:solidFill>
                 <a:latin typeface="Times New Roman"/>
                 <a:ea typeface="DFKai-SB"/>
@@ -6535,7 +6535,7 @@
             <a:r>
               <a:rPr sz="1600" b="0">
                 <a:solidFill>
-                  <a:srgbClr val="526477"/>
+                  <a:srgbClr val="53666E"/>
                 </a:solidFill>
                 <a:latin typeface="Times New Roman"/>
                 <a:ea typeface="DFKai-SB"/>
@@ -6562,7 +6562,7 @@
           </a:prstGeom>
           <a:ln w="12700">
             <a:solidFill>
-              <a:srgbClr val="CCDCEB"/>
+              <a:srgbClr val="D6DDE0"/>
             </a:solidFill>
           </a:ln>
           <a:effectLst/>
@@ -6618,7 +6618,7 @@
             <a:r>
               <a:rPr sz="2300" b="0">
                 <a:solidFill>
-                  <a:srgbClr val="0070D1"/>
+                  <a:srgbClr val="105186"/>
                 </a:solidFill>
                 <a:latin typeface="Times New Roman"/>
                 <a:ea typeface="DFKai-SB"/>
@@ -6665,7 +6665,7 @@
             <a:r>
               <a:rPr sz="1600" b="0">
                 <a:solidFill>
-                  <a:srgbClr val="526477"/>
+                  <a:srgbClr val="53666E"/>
                 </a:solidFill>
                 <a:latin typeface="Times New Roman"/>
                 <a:ea typeface="DFKai-SB"/>
@@ -6689,7 +6689,7 @@
             <a:r>
               <a:rPr sz="1600" b="0">
                 <a:solidFill>
-                  <a:srgbClr val="526477"/>
+                  <a:srgbClr val="53666E"/>
                 </a:solidFill>
                 <a:latin typeface="Times New Roman"/>
                 <a:ea typeface="DFKai-SB"/>
@@ -6716,7 +6716,7 @@
           </a:prstGeom>
           <a:ln w="12700">
             <a:solidFill>
-              <a:srgbClr val="CCDCEB"/>
+              <a:srgbClr val="D6DDE0"/>
             </a:solidFill>
           </a:ln>
           <a:effectLst/>
@@ -6772,7 +6772,7 @@
             <a:r>
               <a:rPr sz="2300" b="0">
                 <a:solidFill>
-                  <a:srgbClr val="0070D1"/>
+                  <a:srgbClr val="105186"/>
                 </a:solidFill>
                 <a:latin typeface="Times New Roman"/>
                 <a:ea typeface="DFKai-SB"/>
@@ -6819,7 +6819,7 @@
             <a:r>
               <a:rPr sz="1600" b="0">
                 <a:solidFill>
-                  <a:srgbClr val="526477"/>
+                  <a:srgbClr val="53666E"/>
                 </a:solidFill>
                 <a:latin typeface="Times New Roman"/>
                 <a:ea typeface="DFKai-SB"/>
@@ -6843,7 +6843,7 @@
             <a:r>
               <a:rPr sz="1600" b="0">
                 <a:solidFill>
-                  <a:srgbClr val="526477"/>
+                  <a:srgbClr val="53666E"/>
                 </a:solidFill>
                 <a:latin typeface="Times New Roman"/>
                 <a:ea typeface="DFKai-SB"/>
@@ -6890,7 +6890,7 @@
             <a:r>
               <a:rPr sz="2000" b="1">
                 <a:solidFill>
-                  <a:srgbClr val="0070D1"/>
+                  <a:srgbClr val="105186"/>
                 </a:solidFill>
                 <a:latin typeface="Times New Roman"/>
                 <a:ea typeface="DFKai-SB"/>
@@ -6937,7 +6937,7 @@
             <a:r>
               <a:rPr sz="2400" b="0">
                 <a:solidFill>
-                  <a:srgbClr val="121314"/>
+                  <a:srgbClr val="092B42"/>
                 </a:solidFill>
                 <a:latin typeface="Times New Roman"/>
                 <a:ea typeface="DFKai-SB"/>
@@ -6984,7 +6984,7 @@
             <a:r>
               <a:rPr sz="1800" b="0">
                 <a:solidFill>
-                  <a:srgbClr val="121314"/>
+                  <a:srgbClr val="171C1D"/>
                 </a:solidFill>
                 <a:latin typeface="Times New Roman"/>
                 <a:ea typeface="DFKai-SB"/>
@@ -6995,7 +6995,7 @@
             <a:r>
               <a:rPr sz="1800" b="0">
                 <a:solidFill>
-                  <a:srgbClr val="121314"/>
+                  <a:srgbClr val="171C1D"/>
                 </a:solidFill>
                 <a:latin typeface="Times New Roman"/>
                 <a:ea typeface="DFKai-SB"/>
@@ -7006,7 +7006,7 @@
             <a:r>
               <a:rPr sz="1800" b="0">
                 <a:solidFill>
-                  <a:srgbClr val="121314"/>
+                  <a:srgbClr val="171C1D"/>
                 </a:solidFill>
                 <a:latin typeface="Times New Roman"/>
                 <a:ea typeface="DFKai-SB"/>
@@ -7017,7 +7017,7 @@
             <a:r>
               <a:rPr sz="1800" b="0">
                 <a:solidFill>
-                  <a:srgbClr val="121314"/>
+                  <a:srgbClr val="171C1D"/>
                 </a:solidFill>
                 <a:latin typeface="Times New Roman"/>
                 <a:ea typeface="DFKai-SB"/>
@@ -7064,7 +7064,7 @@
             <a:r>
               <a:rPr sz="1800" b="0">
                 <a:solidFill>
-                  <a:srgbClr val="121314"/>
+                  <a:srgbClr val="171C1D"/>
                 </a:solidFill>
                 <a:latin typeface="Times New Roman"/>
                 <a:ea typeface="DFKai-SB"/>
@@ -7090,7 +7090,7 @@
             <a:avLst/>
           </a:prstGeom>
           <a:solidFill>
-            <a:srgbClr val="E8EEF4"/>
+            <a:srgbClr val="F0F2F3"/>
           </a:solidFill>
           <a:ln>
             <a:noFill/>
@@ -7134,7 +7134,7 @@
             <a:avLst/>
           </a:prstGeom>
           <a:solidFill>
-            <a:srgbClr val="9DB5CA"/>
+            <a:srgbClr val="7294A9"/>
           </a:solidFill>
           <a:ln>
             <a:noFill/>
@@ -7199,7 +7199,7 @@
             <a:r>
               <a:rPr sz="2100" b="0">
                 <a:solidFill>
-                  <a:srgbClr val="121314"/>
+                  <a:srgbClr val="171C1D"/>
                 </a:solidFill>
                 <a:latin typeface="Times New Roman"/>
                 <a:ea typeface="DFKai-SB"/>
@@ -7246,7 +7246,7 @@
             <a:r>
               <a:rPr sz="1800" b="0">
                 <a:solidFill>
-                  <a:srgbClr val="121314"/>
+                  <a:srgbClr val="171C1D"/>
                 </a:solidFill>
                 <a:latin typeface="Times New Roman"/>
                 <a:ea typeface="DFKai-SB"/>
@@ -7272,7 +7272,7 @@
             <a:avLst/>
           </a:prstGeom>
           <a:solidFill>
-            <a:srgbClr val="E8EEF4"/>
+            <a:srgbClr val="F0F2F3"/>
           </a:solidFill>
           <a:ln>
             <a:noFill/>
@@ -7316,7 +7316,7 @@
             <a:avLst/>
           </a:prstGeom>
           <a:solidFill>
-            <a:srgbClr val="9DB5CA"/>
+            <a:srgbClr val="7294A9"/>
           </a:solidFill>
           <a:ln>
             <a:noFill/>
@@ -7381,7 +7381,7 @@
             <a:r>
               <a:rPr sz="2100" b="0">
                 <a:solidFill>
-                  <a:srgbClr val="121314"/>
+                  <a:srgbClr val="171C1D"/>
                 </a:solidFill>
                 <a:latin typeface="Times New Roman"/>
                 <a:ea typeface="DFKai-SB"/>
@@ -7428,7 +7428,7 @@
             <a:r>
               <a:rPr sz="1800" b="1">
                 <a:solidFill>
-                  <a:srgbClr val="0070D1"/>
+                  <a:srgbClr val="105186"/>
                 </a:solidFill>
                 <a:latin typeface="Times New Roman"/>
                 <a:ea typeface="DFKai-SB"/>
@@ -7454,7 +7454,7 @@
             <a:avLst/>
           </a:prstGeom>
           <a:solidFill>
-            <a:srgbClr val="E8EEF4"/>
+            <a:srgbClr val="F0F2F3"/>
           </a:solidFill>
           <a:ln>
             <a:noFill/>
@@ -7498,7 +7498,7 @@
             <a:avLst/>
           </a:prstGeom>
           <a:solidFill>
-            <a:srgbClr val="0070D1"/>
+            <a:srgbClr val="FDB338"/>
           </a:solidFill>
           <a:ln>
             <a:noFill/>
@@ -7563,7 +7563,7 @@
             <a:r>
               <a:rPr sz="2100" b="1">
                 <a:solidFill>
-                  <a:srgbClr val="0070D1"/>
+                  <a:srgbClr val="105186"/>
                 </a:solidFill>
                 <a:latin typeface="Times New Roman"/>
                 <a:ea typeface="DFKai-SB"/>
@@ -7610,7 +7610,7 @@
             <a:r>
               <a:rPr sz="1700" b="0">
                 <a:solidFill>
-                  <a:srgbClr val="526477"/>
+                  <a:srgbClr val="53666E"/>
                 </a:solidFill>
                 <a:latin typeface="Times New Roman"/>
                 <a:ea typeface="DFKai-SB"/>
@@ -7621,7 +7621,7 @@
             <a:r>
               <a:rPr sz="1700" b="0">
                 <a:solidFill>
-                  <a:srgbClr val="526477"/>
+                  <a:srgbClr val="53666E"/>
                 </a:solidFill>
                 <a:latin typeface="Times New Roman"/>
                 <a:ea typeface="DFKai-SB"/>
@@ -7668,7 +7668,7 @@
             <a:r>
               <a:rPr sz="1500" b="0">
                 <a:solidFill>
-                  <a:srgbClr val="526477"/>
+                  <a:srgbClr val="53666E"/>
                 </a:solidFill>
                 <a:latin typeface="Times New Roman"/>
                 <a:ea typeface="DFKai-SB"/>
@@ -7679,7 +7679,7 @@
             <a:r>
               <a:rPr sz="1500" b="0">
                 <a:solidFill>
-                  <a:srgbClr val="526477"/>
+                  <a:srgbClr val="53666E"/>
                 </a:solidFill>
                 <a:latin typeface="Times New Roman"/>
                 <a:ea typeface="DFKai-SB"/>
@@ -7690,7 +7690,7 @@
             <a:r>
               <a:rPr sz="1500" b="0">
                 <a:solidFill>
-                  <a:srgbClr val="526477"/>
+                  <a:srgbClr val="53666E"/>
                 </a:solidFill>
                 <a:latin typeface="Times New Roman"/>
                 <a:ea typeface="DFKai-SB"/>
@@ -7717,7 +7717,7 @@
           </a:prstGeom>
           <a:ln w="12700">
             <a:solidFill>
-              <a:srgbClr val="CCDCEB"/>
+              <a:srgbClr val="D6DDE0"/>
             </a:solidFill>
           </a:ln>
           <a:effectLst/>
@@ -7773,7 +7773,7 @@
             <a:r>
               <a:rPr sz="1800" b="0">
                 <a:solidFill>
-                  <a:srgbClr val="121314"/>
+                  <a:srgbClr val="171C1D"/>
                 </a:solidFill>
                 <a:latin typeface="Times New Roman"/>
                 <a:ea typeface="DFKai-SB"/>
@@ -7784,7 +7784,7 @@
             <a:r>
               <a:rPr sz="1800" b="0">
                 <a:solidFill>
-                  <a:srgbClr val="121314"/>
+                  <a:srgbClr val="171C1D"/>
                 </a:solidFill>
                 <a:latin typeface="Times New Roman"/>
                 <a:ea typeface="DFKai-SB"/>
@@ -7795,7 +7795,7 @@
             <a:r>
               <a:rPr sz="1800" b="0">
                 <a:solidFill>
-                  <a:srgbClr val="121314"/>
+                  <a:srgbClr val="171C1D"/>
                 </a:solidFill>
                 <a:latin typeface="Times New Roman"/>
                 <a:ea typeface="DFKai-SB"/>
@@ -7806,7 +7806,7 @@
             <a:r>
               <a:rPr sz="1800" b="0">
                 <a:solidFill>
-                  <a:srgbClr val="121314"/>
+                  <a:srgbClr val="171C1D"/>
                 </a:solidFill>
                 <a:latin typeface="Times New Roman"/>
                 <a:ea typeface="DFKai-SB"/>
@@ -7853,7 +7853,7 @@
             <a:r>
               <a:rPr sz="2800" b="1">
                 <a:solidFill>
-                  <a:srgbClr val="0070D1"/>
+                  <a:srgbClr val="105186"/>
                 </a:solidFill>
                 <a:latin typeface="Times New Roman"/>
                 <a:ea typeface="DFKai-SB"/>
@@ -7900,7 +7900,7 @@
             <a:r>
               <a:rPr sz="1600" b="0">
                 <a:solidFill>
-                  <a:srgbClr val="526477"/>
+                  <a:srgbClr val="53666E"/>
                 </a:solidFill>
                 <a:latin typeface="Times New Roman"/>
                 <a:ea typeface="DFKai-SB"/>
@@ -7911,7 +7911,7 @@
             <a:r>
               <a:rPr sz="1600" b="0">
                 <a:solidFill>
-                  <a:srgbClr val="526477"/>
+                  <a:srgbClr val="53666E"/>
                 </a:solidFill>
                 <a:latin typeface="Times New Roman"/>
                 <a:ea typeface="DFKai-SB"/>
@@ -7922,7 +7922,7 @@
             <a:r>
               <a:rPr sz="1600" b="0">
                 <a:solidFill>
-                  <a:srgbClr val="526477"/>
+                  <a:srgbClr val="53666E"/>
                 </a:solidFill>
                 <a:latin typeface="Times New Roman"/>
                 <a:ea typeface="DFKai-SB"/>
@@ -7969,7 +7969,7 @@
             <a:r>
               <a:rPr sz="2700" b="0">
                 <a:solidFill>
-                  <a:srgbClr val="0070D1"/>
+                  <a:srgbClr val="105186"/>
                 </a:solidFill>
                 <a:latin typeface="Times New Roman"/>
                 <a:ea typeface="DFKai-SB"/>
@@ -8016,7 +8016,7 @@
             <a:r>
               <a:rPr sz="1800" b="0">
                 <a:solidFill>
-                  <a:srgbClr val="121314"/>
+                  <a:srgbClr val="171C1D"/>
                 </a:solidFill>
                 <a:latin typeface="Times New Roman"/>
                 <a:ea typeface="DFKai-SB"/>
@@ -8063,7 +8063,7 @@
             <a:r>
               <a:rPr sz="2700" b="0">
                 <a:solidFill>
-                  <a:srgbClr val="0070D1"/>
+                  <a:srgbClr val="105186"/>
                 </a:solidFill>
                 <a:latin typeface="Times New Roman"/>
                 <a:ea typeface="DFKai-SB"/>
@@ -8110,7 +8110,7 @@
             <a:r>
               <a:rPr sz="1800" b="0">
                 <a:solidFill>
-                  <a:srgbClr val="121314"/>
+                  <a:srgbClr val="171C1D"/>
                 </a:solidFill>
                 <a:latin typeface="Times New Roman"/>
                 <a:ea typeface="DFKai-SB"/>
@@ -8157,7 +8157,7 @@
             <a:r>
               <a:rPr sz="2700" b="0">
                 <a:solidFill>
-                  <a:srgbClr val="0070D1"/>
+                  <a:srgbClr val="105186"/>
                 </a:solidFill>
                 <a:latin typeface="Times New Roman"/>
                 <a:ea typeface="DFKai-SB"/>
@@ -8204,7 +8204,7 @@
             <a:r>
               <a:rPr sz="1800" b="0">
                 <a:solidFill>
-                  <a:srgbClr val="121314"/>
+                  <a:srgbClr val="171C1D"/>
                 </a:solidFill>
                 <a:latin typeface="Times New Roman"/>
                 <a:ea typeface="DFKai-SB"/>
@@ -8251,7 +8251,7 @@
             <a:r>
               <a:rPr sz="1400" b="0">
                 <a:solidFill>
-                  <a:srgbClr val="526477"/>
+                  <a:srgbClr val="53666E"/>
                 </a:solidFill>
                 <a:latin typeface="Times New Roman"/>
                 <a:ea typeface="DFKai-SB"/>
@@ -8262,7 +8262,7 @@
             <a:r>
               <a:rPr sz="1400" b="0">
                 <a:solidFill>
-                  <a:srgbClr val="526477"/>
+                  <a:srgbClr val="53666E"/>
                 </a:solidFill>
                 <a:latin typeface="Times New Roman"/>
                 <a:ea typeface="DFKai-SB"/>
@@ -8273,7 +8273,7 @@
             <a:r>
               <a:rPr sz="1400" b="0">
                 <a:solidFill>
-                  <a:srgbClr val="526477"/>
+                  <a:srgbClr val="53666E"/>
                 </a:solidFill>
                 <a:latin typeface="Times New Roman"/>
                 <a:ea typeface="DFKai-SB"/>
@@ -8284,7 +8284,7 @@
             <a:r>
               <a:rPr sz="1400" b="0">
                 <a:solidFill>
-                  <a:srgbClr val="526477"/>
+                  <a:srgbClr val="53666E"/>
                 </a:solidFill>
                 <a:latin typeface="Times New Roman"/>
                 <a:ea typeface="DFKai-SB"/>
@@ -8308,7 +8308,7 @@
             <a:r>
               <a:rPr sz="1400" b="0">
                 <a:solidFill>
-                  <a:srgbClr val="526477"/>
+                  <a:srgbClr val="53666E"/>
                 </a:solidFill>
                 <a:latin typeface="Times New Roman"/>
                 <a:ea typeface="DFKai-SB"/>
@@ -8319,7 +8319,7 @@
             <a:r>
               <a:rPr sz="1400" b="0">
                 <a:solidFill>
-                  <a:srgbClr val="526477"/>
+                  <a:srgbClr val="53666E"/>
                 </a:solidFill>
                 <a:latin typeface="Times New Roman"/>
                 <a:ea typeface="DFKai-SB"/>
@@ -8330,7 +8330,7 @@
             <a:r>
               <a:rPr sz="1400" b="0">
                 <a:solidFill>
-                  <a:srgbClr val="526477"/>
+                  <a:srgbClr val="53666E"/>
                 </a:solidFill>
                 <a:latin typeface="Times New Roman"/>
                 <a:ea typeface="DFKai-SB"/>
@@ -8357,7 +8357,7 @@
           </a:prstGeom>
           <a:ln w="12700">
             <a:solidFill>
-              <a:srgbClr val="CCDCEB"/>
+              <a:srgbClr val="D6DDE0"/>
             </a:solidFill>
           </a:ln>
           <a:effectLst/>
@@ -8413,7 +8413,7 @@
             <a:r>
               <a:rPr sz="1700" b="0">
                 <a:solidFill>
-                  <a:srgbClr val="0070D1"/>
+                  <a:srgbClr val="105186"/>
                 </a:solidFill>
                 <a:latin typeface="Times New Roman"/>
                 <a:ea typeface="DFKai-SB"/>
@@ -8424,7 +8424,7 @@
             <a:r>
               <a:rPr sz="1700" b="0">
                 <a:solidFill>
-                  <a:srgbClr val="0070D1"/>
+                  <a:srgbClr val="105186"/>
                 </a:solidFill>
                 <a:latin typeface="Times New Roman"/>
                 <a:ea typeface="DFKai-SB"/>
@@ -8435,7 +8435,7 @@
             <a:r>
               <a:rPr sz="1700" b="0">
                 <a:solidFill>
-                  <a:srgbClr val="0070D1"/>
+                  <a:srgbClr val="105186"/>
                 </a:solidFill>
                 <a:latin typeface="Times New Roman"/>
                 <a:ea typeface="DFKai-SB"/>
@@ -8446,7 +8446,7 @@
             <a:r>
               <a:rPr sz="1700" b="0">
                 <a:solidFill>
-                  <a:srgbClr val="0070D1"/>
+                  <a:srgbClr val="105186"/>
                 </a:solidFill>
                 <a:latin typeface="Times New Roman"/>
                 <a:ea typeface="DFKai-SB"/>
@@ -8457,7 +8457,7 @@
             <a:r>
               <a:rPr sz="1700" b="0">
                 <a:solidFill>
-                  <a:srgbClr val="0070D1"/>
+                  <a:srgbClr val="105186"/>
                 </a:solidFill>
                 <a:latin typeface="Times New Roman"/>
                 <a:ea typeface="DFKai-SB"/>
@@ -8468,7 +8468,7 @@
             <a:r>
               <a:rPr sz="1700" b="0">
                 <a:solidFill>
-                  <a:srgbClr val="0070D1"/>
+                  <a:srgbClr val="105186"/>
                 </a:solidFill>
                 <a:latin typeface="Times New Roman"/>
                 <a:ea typeface="DFKai-SB"/>
@@ -8479,7 +8479,7 @@
             <a:r>
               <a:rPr sz="1700" b="0">
                 <a:solidFill>
-                  <a:srgbClr val="0070D1"/>
+                  <a:srgbClr val="105186"/>
                 </a:solidFill>
                 <a:latin typeface="Times New Roman"/>
                 <a:ea typeface="DFKai-SB"/>
@@ -8490,7 +8490,7 @@
             <a:r>
               <a:rPr sz="1700" b="0">
                 <a:solidFill>
-                  <a:srgbClr val="0070D1"/>
+                  <a:srgbClr val="105186"/>
                 </a:solidFill>
                 <a:latin typeface="Times New Roman"/>
                 <a:ea typeface="DFKai-SB"/>
@@ -8501,7 +8501,7 @@
             <a:r>
               <a:rPr sz="1700" b="0">
                 <a:solidFill>
-                  <a:srgbClr val="0070D1"/>
+                  <a:srgbClr val="105186"/>
                 </a:solidFill>
                 <a:latin typeface="Times New Roman"/>
                 <a:ea typeface="DFKai-SB"/>
@@ -8548,7 +8548,7 @@
             <a:r>
               <a:rPr sz="1150" b="0">
                 <a:solidFill>
-                  <a:srgbClr val="526477"/>
+                  <a:srgbClr val="53666E"/>
                 </a:solidFill>
                 <a:latin typeface="Times New Roman"/>
                 <a:ea typeface="DFKai-SB"/>
@@ -8559,7 +8559,7 @@
             <a:r>
               <a:rPr sz="1150" b="0">
                 <a:solidFill>
-                  <a:srgbClr val="526477"/>
+                  <a:srgbClr val="53666E"/>
                 </a:solidFill>
                 <a:latin typeface="Times New Roman"/>
                 <a:ea typeface="DFKai-SB"/>
@@ -8570,7 +8570,7 @@
             <a:r>
               <a:rPr sz="1150" b="0">
                 <a:solidFill>
-                  <a:srgbClr val="526477"/>
+                  <a:srgbClr val="53666E"/>
                 </a:solidFill>
                 <a:latin typeface="Times New Roman"/>
                 <a:ea typeface="DFKai-SB"/>
@@ -8581,7 +8581,7 @@
             <a:r>
               <a:rPr sz="1150" b="0">
                 <a:solidFill>
-                  <a:srgbClr val="526477"/>
+                  <a:srgbClr val="53666E"/>
                 </a:solidFill>
                 <a:latin typeface="Times New Roman"/>
                 <a:ea typeface="DFKai-SB"/>
@@ -8592,7 +8592,7 @@
             <a:r>
               <a:rPr sz="1150" b="0">
                 <a:solidFill>
-                  <a:srgbClr val="526477"/>
+                  <a:srgbClr val="53666E"/>
                 </a:solidFill>
                 <a:latin typeface="Times New Roman"/>
                 <a:ea typeface="DFKai-SB"/>
@@ -8603,7 +8603,7 @@
             <a:r>
               <a:rPr sz="1150" b="0">
                 <a:solidFill>
-                  <a:srgbClr val="526477"/>
+                  <a:srgbClr val="53666E"/>
                 </a:solidFill>
                 <a:latin typeface="Times New Roman"/>
                 <a:ea typeface="DFKai-SB"/>
@@ -8614,7 +8614,7 @@
             <a:r>
               <a:rPr sz="1150" b="0">
                 <a:solidFill>
-                  <a:srgbClr val="526477"/>
+                  <a:srgbClr val="53666E"/>
                 </a:solidFill>
                 <a:latin typeface="Times New Roman"/>
                 <a:ea typeface="DFKai-SB"/>
@@ -8625,7 +8625,7 @@
             <a:r>
               <a:rPr sz="1150" b="0">
                 <a:solidFill>
-                  <a:srgbClr val="526477"/>
+                  <a:srgbClr val="53666E"/>
                 </a:solidFill>
                 <a:latin typeface="Times New Roman"/>
                 <a:ea typeface="DFKai-SB"/>

--- a/deliverables/決賽海報_AI資安框架_A2.pptx
+++ b/deliverables/決賽海報_AI資安框架_A2.pptx
@@ -3325,9 +3325,33 @@
           </a:p>
         </p:txBody>
       </p:sp>
-      <p:sp>
-        <p:nvSpPr>
-          <p:cNvPr id="4" name="TextBox 3"/>
+      <p:pic>
+        <p:nvPicPr>
+          <p:cNvPr id="4" name="Picture 3" descr="icon-4.png"/>
+          <p:cNvPicPr>
+            <a:picLocks noChangeAspect="1"/>
+          </p:cNvPicPr>
+          <p:nvPr/>
+        </p:nvPicPr>
+        <p:blipFill>
+          <a:blip r:embed="rId2"/>
+          <a:stretch>
+            <a:fillRect/>
+          </a:stretch>
+        </p:blipFill>
+        <p:spPr>
+          <a:xfrm>
+            <a:off x="12384000" y="1044000"/>
+            <a:ext cx="1800000" cy="1800000"/>
+          </a:xfrm>
+          <a:prstGeom prst="rect">
+            <a:avLst/>
+          </a:prstGeom>
+        </p:spPr>
+      </p:pic>
+      <p:sp>
+        <p:nvSpPr>
+          <p:cNvPr id="5" name="TextBox 4"/>
           <p:cNvSpPr txBox="1"/>
           <p:nvPr/>
         </p:nvSpPr>
@@ -3374,7 +3398,7 @@
       </p:sp>
       <p:cxnSp>
         <p:nvCxnSpPr>
-          <p:cNvPr id="5" name="Connector 4"/>
+          <p:cNvPr id="6" name="Connector 5"/>
           <p:cNvCxnSpPr/>
           <p:nvPr/>
         </p:nvCxnSpPr>
@@ -3410,14 +3434,14 @@
       </p:cxnSp>
       <p:pic>
         <p:nvPicPr>
-          <p:cNvPr id="6" name="Picture 5" descr="icon-1.png"/>
+          <p:cNvPr id="7" name="Picture 6" descr="icon-1.png"/>
           <p:cNvPicPr>
             <a:picLocks noChangeAspect="1"/>
           </p:cNvPicPr>
           <p:nvPr/>
         </p:nvPicPr>
         <p:blipFill>
-          <a:blip r:embed="rId2"/>
+          <a:blip r:embed="rId3"/>
           <a:stretch>
             <a:fillRect/>
           </a:stretch>
@@ -3434,7 +3458,7 @@
       </p:pic>
       <p:sp>
         <p:nvSpPr>
-          <p:cNvPr id="7" name="TextBox 6"/>
+          <p:cNvPr id="8" name="TextBox 7"/>
           <p:cNvSpPr txBox="1"/>
           <p:nvPr/>
         </p:nvSpPr>
@@ -3481,7 +3505,7 @@
       </p:sp>
       <p:sp>
         <p:nvSpPr>
-          <p:cNvPr id="8" name="TextBox 7"/>
+          <p:cNvPr id="9" name="TextBox 8"/>
           <p:cNvSpPr txBox="1"/>
           <p:nvPr/>
         </p:nvSpPr>
@@ -3528,7 +3552,7 @@
       </p:sp>
       <p:sp>
         <p:nvSpPr>
-          <p:cNvPr id="9" name="TextBox 8"/>
+          <p:cNvPr id="10" name="TextBox 9"/>
           <p:cNvSpPr txBox="1"/>
           <p:nvPr/>
         </p:nvSpPr>
@@ -3575,7 +3599,7 @@
       </p:sp>
       <p:sp>
         <p:nvSpPr>
-          <p:cNvPr id="10" name="TextBox 9"/>
+          <p:cNvPr id="11" name="TextBox 10"/>
           <p:cNvSpPr txBox="1"/>
           <p:nvPr/>
         </p:nvSpPr>
@@ -3622,7 +3646,7 @@
       </p:sp>
       <p:sp>
         <p:nvSpPr>
-          <p:cNvPr id="11" name="Rectangle 10"/>
+          <p:cNvPr id="12" name="Rectangle 11"/>
           <p:cNvSpPr/>
           <p:nvPr/>
         </p:nvSpPr>
@@ -3668,7 +3692,7 @@
       </p:sp>
       <p:sp>
         <p:nvSpPr>
-          <p:cNvPr id="12" name="Rectangle 11"/>
+          <p:cNvPr id="13" name="Rectangle 12"/>
           <p:cNvSpPr/>
           <p:nvPr/>
         </p:nvSpPr>
@@ -3712,7 +3736,7 @@
       </p:sp>
       <p:sp>
         <p:nvSpPr>
-          <p:cNvPr id="13" name="TextBox 12"/>
+          <p:cNvPr id="14" name="TextBox 13"/>
           <p:cNvSpPr txBox="1"/>
           <p:nvPr/>
         </p:nvSpPr>
@@ -3759,7 +3783,7 @@
       </p:sp>
       <p:sp>
         <p:nvSpPr>
-          <p:cNvPr id="14" name="TextBox 13"/>
+          <p:cNvPr id="15" name="TextBox 14"/>
           <p:cNvSpPr txBox="1"/>
           <p:nvPr/>
         </p:nvSpPr>
@@ -3806,14 +3830,14 @@
       </p:sp>
       <p:pic>
         <p:nvPicPr>
-          <p:cNvPr id="15" name="Picture 14" descr="icon-2.png"/>
+          <p:cNvPr id="16" name="Picture 15" descr="icon-2.png"/>
           <p:cNvPicPr>
             <a:picLocks noChangeAspect="1"/>
           </p:cNvPicPr>
           <p:nvPr/>
         </p:nvPicPr>
         <p:blipFill>
-          <a:blip r:embed="rId3"/>
+          <a:blip r:embed="rId4"/>
           <a:stretch>
             <a:fillRect/>
           </a:stretch>
@@ -3830,7 +3854,7 @@
       </p:pic>
       <p:sp>
         <p:nvSpPr>
-          <p:cNvPr id="16" name="TextBox 15"/>
+          <p:cNvPr id="17" name="TextBox 16"/>
           <p:cNvSpPr txBox="1"/>
           <p:nvPr/>
         </p:nvSpPr>
@@ -3888,7 +3912,7 @@
       </p:sp>
       <p:sp>
         <p:nvSpPr>
-          <p:cNvPr id="17" name="TextBox 16"/>
+          <p:cNvPr id="18" name="TextBox 17"/>
           <p:cNvSpPr txBox="1"/>
           <p:nvPr/>
         </p:nvSpPr>
@@ -3946,7 +3970,7 @@
       </p:sp>
       <p:sp>
         <p:nvSpPr>
-          <p:cNvPr id="18" name="Down Arrow 17"/>
+          <p:cNvPr id="19" name="Down Arrow 18"/>
           <p:cNvSpPr/>
           <p:nvPr/>
         </p:nvSpPr>
@@ -3990,7 +4014,7 @@
       </p:sp>
       <p:sp>
         <p:nvSpPr>
-          <p:cNvPr id="19" name="TextBox 18"/>
+          <p:cNvPr id="20" name="TextBox 19"/>
           <p:cNvSpPr txBox="1"/>
           <p:nvPr/>
         </p:nvSpPr>
@@ -4059,7 +4083,7 @@
       </p:sp>
       <p:sp>
         <p:nvSpPr>
-          <p:cNvPr id="20" name="TextBox 19"/>
+          <p:cNvPr id="21" name="TextBox 20"/>
           <p:cNvSpPr txBox="1"/>
           <p:nvPr/>
         </p:nvSpPr>
@@ -4150,7 +4174,7 @@
       </p:sp>
       <p:sp>
         <p:nvSpPr>
-          <p:cNvPr id="21" name="Rectangle 20"/>
+          <p:cNvPr id="22" name="Rectangle 21"/>
           <p:cNvSpPr/>
           <p:nvPr/>
         </p:nvSpPr>
@@ -4196,7 +4220,7 @@
       </p:sp>
       <p:sp>
         <p:nvSpPr>
-          <p:cNvPr id="22" name="Rectangle 21"/>
+          <p:cNvPr id="23" name="Rectangle 22"/>
           <p:cNvSpPr/>
           <p:nvPr/>
         </p:nvSpPr>
@@ -4240,7 +4264,7 @@
       </p:sp>
       <p:sp>
         <p:nvSpPr>
-          <p:cNvPr id="23" name="TextBox 22"/>
+          <p:cNvPr id="24" name="TextBox 23"/>
           <p:cNvSpPr txBox="1"/>
           <p:nvPr/>
         </p:nvSpPr>
@@ -4287,7 +4311,7 @@
       </p:sp>
       <p:sp>
         <p:nvSpPr>
-          <p:cNvPr id="24" name="TextBox 23"/>
+          <p:cNvPr id="25" name="TextBox 24"/>
           <p:cNvSpPr txBox="1"/>
           <p:nvPr/>
         </p:nvSpPr>
@@ -4334,14 +4358,14 @@
       </p:sp>
       <p:pic>
         <p:nvPicPr>
-          <p:cNvPr id="25" name="Picture 24" descr="icon-3.png"/>
+          <p:cNvPr id="26" name="Picture 25" descr="icon-3.png"/>
           <p:cNvPicPr>
             <a:picLocks noChangeAspect="1"/>
           </p:cNvPicPr>
           <p:nvPr/>
         </p:nvPicPr>
         <p:blipFill>
-          <a:blip r:embed="rId4"/>
+          <a:blip r:embed="rId5"/>
           <a:stretch>
             <a:fillRect/>
           </a:stretch>
@@ -4358,7 +4382,7 @@
       </p:pic>
       <p:sp>
         <p:nvSpPr>
-          <p:cNvPr id="26" name="TextBox 25"/>
+          <p:cNvPr id="27" name="TextBox 26"/>
           <p:cNvSpPr txBox="1"/>
           <p:nvPr/>
         </p:nvSpPr>
@@ -4438,7 +4462,7 @@
       </p:sp>
       <p:sp>
         <p:nvSpPr>
-          <p:cNvPr id="27" name="TextBox 26"/>
+          <p:cNvPr id="28" name="TextBox 27"/>
           <p:cNvSpPr txBox="1"/>
           <p:nvPr/>
         </p:nvSpPr>
@@ -4518,7 +4542,7 @@
       </p:sp>
       <p:sp>
         <p:nvSpPr>
-          <p:cNvPr id="28" name="Down Arrow 27"/>
+          <p:cNvPr id="29" name="Down Arrow 28"/>
           <p:cNvSpPr/>
           <p:nvPr/>
         </p:nvSpPr>
@@ -4562,7 +4586,7 @@
       </p:sp>
       <p:sp>
         <p:nvSpPr>
-          <p:cNvPr id="29" name="TextBox 28"/>
+          <p:cNvPr id="30" name="TextBox 29"/>
           <p:cNvSpPr txBox="1"/>
           <p:nvPr/>
         </p:nvSpPr>
@@ -4620,7 +4644,7 @@
       </p:sp>
       <p:sp>
         <p:nvSpPr>
-          <p:cNvPr id="30" name="TextBox 29"/>
+          <p:cNvPr id="31" name="TextBox 30"/>
           <p:cNvSpPr txBox="1"/>
           <p:nvPr/>
         </p:nvSpPr>
@@ -4667,7 +4691,7 @@
       </p:sp>
       <p:sp>
         <p:nvSpPr>
-          <p:cNvPr id="31" name="Right Arrow 30"/>
+          <p:cNvPr id="32" name="Right Arrow 31"/>
           <p:cNvSpPr/>
           <p:nvPr/>
         </p:nvSpPr>
@@ -4711,7 +4735,7 @@
       </p:sp>
       <p:sp>
         <p:nvSpPr>
-          <p:cNvPr id="32" name="Down Arrow 31"/>
+          <p:cNvPr id="33" name="Down Arrow 32"/>
           <p:cNvSpPr/>
           <p:nvPr/>
         </p:nvSpPr>
@@ -4755,7 +4779,7 @@
       </p:sp>
       <p:sp>
         <p:nvSpPr>
-          <p:cNvPr id="33" name="Rectangle 32"/>
+          <p:cNvPr id="34" name="Rectangle 33"/>
           <p:cNvSpPr/>
           <p:nvPr/>
         </p:nvSpPr>
@@ -4801,7 +4825,7 @@
       </p:sp>
       <p:sp>
         <p:nvSpPr>
-          <p:cNvPr id="34" name="Rectangle 33"/>
+          <p:cNvPr id="35" name="Rectangle 34"/>
           <p:cNvSpPr/>
           <p:nvPr/>
         </p:nvSpPr>
@@ -4845,7 +4869,7 @@
       </p:sp>
       <p:sp>
         <p:nvSpPr>
-          <p:cNvPr id="35" name="TextBox 34"/>
+          <p:cNvPr id="36" name="TextBox 35"/>
           <p:cNvSpPr txBox="1"/>
           <p:nvPr/>
         </p:nvSpPr>
@@ -4892,7 +4916,7 @@
       </p:sp>
       <p:sp>
         <p:nvSpPr>
-          <p:cNvPr id="36" name="TextBox 35"/>
+          <p:cNvPr id="37" name="TextBox 36"/>
           <p:cNvSpPr txBox="1"/>
           <p:nvPr/>
         </p:nvSpPr>
@@ -4961,7 +4985,7 @@
       </p:sp>
       <p:sp>
         <p:nvSpPr>
-          <p:cNvPr id="37" name="Rectangle 36"/>
+          <p:cNvPr id="38" name="Rectangle 37"/>
           <p:cNvSpPr/>
           <p:nvPr/>
         </p:nvSpPr>
@@ -5007,49 +5031,13 @@
       </p:sp>
       <p:cxnSp>
         <p:nvCxnSpPr>
-          <p:cNvPr id="38" name="Connector 37"/>
-          <p:cNvCxnSpPr/>
-          <p:nvPr/>
-        </p:nvCxnSpPr>
-        <p:spPr>
-          <a:xfrm>
-            <a:off x="8460000" y="10152000"/>
-            <a:ext cx="360000" cy="0"/>
-          </a:xfrm>
-          <a:prstGeom prst="line">
-            <a:avLst/>
-          </a:prstGeom>
-          <a:ln w="12700">
-            <a:solidFill>
-              <a:srgbClr val="105186"/>
-            </a:solidFill>
-          </a:ln>
-          <a:effectLst/>
-        </p:spPr>
-        <p:style>
-          <a:lnRef idx="2">
-            <a:schemeClr val="accent1"/>
-          </a:lnRef>
-          <a:fillRef idx="0">
-            <a:schemeClr val="accent1"/>
-          </a:fillRef>
-          <a:effectRef idx="1">
-            <a:schemeClr val="accent1"/>
-          </a:effectRef>
-          <a:fontRef idx="minor">
-            <a:schemeClr val="tx1"/>
-          </a:fontRef>
-        </p:style>
-      </p:cxnSp>
-      <p:cxnSp>
-        <p:nvCxnSpPr>
           <p:cNvPr id="39" name="Connector 38"/>
           <p:cNvCxnSpPr/>
           <p:nvPr/>
         </p:nvCxnSpPr>
         <p:spPr>
           <a:xfrm>
-            <a:off x="8460000" y="10332000"/>
+            <a:off x="8460000" y="10152000"/>
             <a:ext cx="360000" cy="0"/>
           </a:xfrm>
           <a:prstGeom prst="line">
@@ -5085,7 +5073,7 @@
         </p:nvCxnSpPr>
         <p:spPr>
           <a:xfrm>
-            <a:off x="8460000" y="10512000"/>
+            <a:off x="8460000" y="10332000"/>
             <a:ext cx="360000" cy="0"/>
           </a:xfrm>
           <a:prstGeom prst="line">
@@ -5121,13 +5109,13 @@
         </p:nvCxnSpPr>
         <p:spPr>
           <a:xfrm>
-            <a:off x="8820000" y="10620000"/>
-            <a:ext cx="144000" cy="144000"/>
+            <a:off x="8460000" y="10512000"/>
+            <a:ext cx="360000" cy="0"/>
           </a:xfrm>
           <a:prstGeom prst="line">
             <a:avLst/>
           </a:prstGeom>
-          <a:ln w="25400">
+          <a:ln w="12700">
             <a:solidFill>
               <a:srgbClr val="105186"/>
             </a:solidFill>
@@ -5156,9 +5144,9 @@
           <p:nvPr/>
         </p:nvCxnSpPr>
         <p:spPr>
-          <a:xfrm flipV="1">
-            <a:off x="8964000" y="10440000"/>
-            <a:ext cx="216000" cy="324000"/>
+          <a:xfrm>
+            <a:off x="8820000" y="10620000"/>
+            <a:ext cx="144000" cy="144000"/>
           </a:xfrm>
           <a:prstGeom prst="line">
             <a:avLst/>
@@ -5185,9 +5173,45 @@
           </a:fontRef>
         </p:style>
       </p:cxnSp>
-      <p:sp>
-        <p:nvSpPr>
-          <p:cNvPr id="43" name="TextBox 42"/>
+      <p:cxnSp>
+        <p:nvCxnSpPr>
+          <p:cNvPr id="43" name="Connector 42"/>
+          <p:cNvCxnSpPr/>
+          <p:nvPr/>
+        </p:nvCxnSpPr>
+        <p:spPr>
+          <a:xfrm flipV="1">
+            <a:off x="8964000" y="10440000"/>
+            <a:ext cx="216000" cy="324000"/>
+          </a:xfrm>
+          <a:prstGeom prst="line">
+            <a:avLst/>
+          </a:prstGeom>
+          <a:ln w="25400">
+            <a:solidFill>
+              <a:srgbClr val="105186"/>
+            </a:solidFill>
+          </a:ln>
+          <a:effectLst/>
+        </p:spPr>
+        <p:style>
+          <a:lnRef idx="2">
+            <a:schemeClr val="accent1"/>
+          </a:lnRef>
+          <a:fillRef idx="0">
+            <a:schemeClr val="accent1"/>
+          </a:fillRef>
+          <a:effectRef idx="1">
+            <a:schemeClr val="accent1"/>
+          </a:effectRef>
+          <a:fontRef idx="minor">
+            <a:schemeClr val="tx1"/>
+          </a:fontRef>
+        </p:style>
+      </p:cxnSp>
+      <p:sp>
+        <p:nvSpPr>
+          <p:cNvPr id="44" name="TextBox 43"/>
           <p:cNvSpPr txBox="1"/>
           <p:nvPr/>
         </p:nvSpPr>
@@ -5234,7 +5258,7 @@
       </p:sp>
       <p:sp>
         <p:nvSpPr>
-          <p:cNvPr id="44" name="TextBox 43"/>
+          <p:cNvPr id="45" name="TextBox 44"/>
           <p:cNvSpPr txBox="1"/>
           <p:nvPr/>
         </p:nvSpPr>
@@ -5281,7 +5305,7 @@
       </p:sp>
       <p:sp>
         <p:nvSpPr>
-          <p:cNvPr id="45" name="Rectangle 44"/>
+          <p:cNvPr id="46" name="Rectangle 45"/>
           <p:cNvSpPr/>
           <p:nvPr/>
         </p:nvSpPr>
@@ -5325,7 +5349,7 @@
       </p:sp>
       <p:sp>
         <p:nvSpPr>
-          <p:cNvPr id="46" name="TextBox 45"/>
+          <p:cNvPr id="47" name="TextBox 46"/>
           <p:cNvSpPr txBox="1"/>
           <p:nvPr/>
         </p:nvSpPr>
@@ -5372,7 +5396,7 @@
       </p:sp>
       <p:sp>
         <p:nvSpPr>
-          <p:cNvPr id="47" name="Rectangle 46"/>
+          <p:cNvPr id="48" name="Rectangle 47"/>
           <p:cNvSpPr/>
           <p:nvPr/>
         </p:nvSpPr>
@@ -5416,7 +5440,7 @@
       </p:sp>
       <p:sp>
         <p:nvSpPr>
-          <p:cNvPr id="48" name="TextBox 47"/>
+          <p:cNvPr id="49" name="TextBox 48"/>
           <p:cNvSpPr txBox="1"/>
           <p:nvPr/>
         </p:nvSpPr>
@@ -5463,7 +5487,7 @@
       </p:sp>
       <p:sp>
         <p:nvSpPr>
-          <p:cNvPr id="49" name="Rectangle 48"/>
+          <p:cNvPr id="50" name="Rectangle 49"/>
           <p:cNvSpPr/>
           <p:nvPr/>
         </p:nvSpPr>
@@ -5507,7 +5531,7 @@
       </p:sp>
       <p:sp>
         <p:nvSpPr>
-          <p:cNvPr id="50" name="TextBox 49"/>
+          <p:cNvPr id="51" name="TextBox 50"/>
           <p:cNvSpPr txBox="1"/>
           <p:nvPr/>
         </p:nvSpPr>
@@ -5554,7 +5578,7 @@
       </p:sp>
       <p:sp>
         <p:nvSpPr>
-          <p:cNvPr id="51" name="TextBox 50"/>
+          <p:cNvPr id="52" name="TextBox 51"/>
           <p:cNvSpPr txBox="1"/>
           <p:nvPr/>
         </p:nvSpPr>
@@ -5601,7 +5625,7 @@
       </p:sp>
       <p:sp>
         <p:nvSpPr>
-          <p:cNvPr id="52" name="Rectangle 51"/>
+          <p:cNvPr id="53" name="Rectangle 52"/>
           <p:cNvSpPr/>
           <p:nvPr/>
         </p:nvSpPr>
@@ -5647,7 +5671,7 @@
       </p:sp>
       <p:sp>
         <p:nvSpPr>
-          <p:cNvPr id="53" name="Rectangle 52"/>
+          <p:cNvPr id="54" name="Rectangle 53"/>
           <p:cNvSpPr/>
           <p:nvPr/>
         </p:nvSpPr>
@@ -5691,7 +5715,7 @@
       </p:sp>
       <p:sp>
         <p:nvSpPr>
-          <p:cNvPr id="54" name="TextBox 53"/>
+          <p:cNvPr id="55" name="TextBox 54"/>
           <p:cNvSpPr txBox="1"/>
           <p:nvPr/>
         </p:nvSpPr>
@@ -5738,7 +5762,7 @@
       </p:sp>
       <p:sp>
         <p:nvSpPr>
-          <p:cNvPr id="55" name="TextBox 54"/>
+          <p:cNvPr id="56" name="TextBox 55"/>
           <p:cNvSpPr txBox="1"/>
           <p:nvPr/>
         </p:nvSpPr>
@@ -5785,14 +5809,14 @@
       </p:sp>
       <p:pic>
         <p:nvPicPr>
-          <p:cNvPr id="56" name="Picture 55" descr="icon-4.png"/>
+          <p:cNvPr id="57" name="Picture 56" descr="icon-4.png"/>
           <p:cNvPicPr>
             <a:picLocks noChangeAspect="1"/>
           </p:cNvPicPr>
           <p:nvPr/>
         </p:nvPicPr>
         <p:blipFill>
-          <a:blip r:embed="rId5"/>
+          <a:blip r:embed="rId2"/>
           <a:stretch>
             <a:fillRect/>
           </a:stretch>
@@ -5809,7 +5833,7 @@
       </p:pic>
       <p:sp>
         <p:nvSpPr>
-          <p:cNvPr id="57" name="TextBox 56"/>
+          <p:cNvPr id="58" name="TextBox 57"/>
           <p:cNvSpPr txBox="1"/>
           <p:nvPr/>
         </p:nvSpPr>
@@ -5849,14 +5873,14 @@
                 <a:ea typeface="DFKai-SB"/>
                 <a:cs typeface="Times New Roman"/>
               </a:rPr>
-              <a:t>檢查範圍、白名單與期限</a:t>
-            </a:r>
-          </a:p>
-        </p:txBody>
-      </p:sp>
-      <p:sp>
-        <p:nvSpPr>
-          <p:cNvPr id="58" name="TextBox 57"/>
+              <a:t>檢查範圍、允許動作與期限</a:t>
+            </a:r>
+          </a:p>
+        </p:txBody>
+      </p:sp>
+      <p:sp>
+        <p:nvSpPr>
+          <p:cNvPr id="59" name="TextBox 58"/>
           <p:cNvSpPr txBox="1"/>
           <p:nvPr/>
         </p:nvSpPr>
@@ -5903,7 +5927,7 @@
       </p:sp>
       <p:sp>
         <p:nvSpPr>
-          <p:cNvPr id="59" name="TextBox 58"/>
+          <p:cNvPr id="60" name="TextBox 59"/>
           <p:cNvSpPr txBox="1"/>
           <p:nvPr/>
         </p:nvSpPr>
@@ -5950,7 +5974,7 @@
       </p:sp>
       <p:sp>
         <p:nvSpPr>
-          <p:cNvPr id="60" name="Right Arrow 59"/>
+          <p:cNvPr id="61" name="Right Arrow 60"/>
           <p:cNvSpPr/>
           <p:nvPr/>
         </p:nvSpPr>
@@ -5994,7 +6018,7 @@
       </p:sp>
       <p:sp>
         <p:nvSpPr>
-          <p:cNvPr id="61" name="TextBox 60"/>
+          <p:cNvPr id="62" name="TextBox 61"/>
           <p:cNvSpPr txBox="1"/>
           <p:nvPr/>
         </p:nvSpPr>
@@ -6041,7 +6065,7 @@
       </p:sp>
       <p:sp>
         <p:nvSpPr>
-          <p:cNvPr id="62" name="Right Arrow 61"/>
+          <p:cNvPr id="63" name="Right Arrow 62"/>
           <p:cNvSpPr/>
           <p:nvPr/>
         </p:nvSpPr>
@@ -6085,7 +6109,7 @@
       </p:sp>
       <p:sp>
         <p:nvSpPr>
-          <p:cNvPr id="63" name="TextBox 62"/>
+          <p:cNvPr id="64" name="TextBox 63"/>
           <p:cNvSpPr txBox="1"/>
           <p:nvPr/>
         </p:nvSpPr>
@@ -6132,7 +6156,7 @@
       </p:sp>
       <p:sp>
         <p:nvSpPr>
-          <p:cNvPr id="64" name="TextBox 63"/>
+          <p:cNvPr id="65" name="TextBox 64"/>
           <p:cNvSpPr txBox="1"/>
           <p:nvPr/>
         </p:nvSpPr>
@@ -6179,7 +6203,7 @@
       </p:sp>
       <p:sp>
         <p:nvSpPr>
-          <p:cNvPr id="65" name="Left Arrow 64"/>
+          <p:cNvPr id="66" name="Left Arrow 65"/>
           <p:cNvSpPr/>
           <p:nvPr/>
         </p:nvSpPr>
@@ -6223,7 +6247,7 @@
       </p:sp>
       <p:sp>
         <p:nvSpPr>
-          <p:cNvPr id="66" name="Rectangle 65"/>
+          <p:cNvPr id="67" name="Rectangle 66"/>
           <p:cNvSpPr/>
           <p:nvPr/>
         </p:nvSpPr>
@@ -6267,7 +6291,7 @@
       </p:sp>
       <p:sp>
         <p:nvSpPr>
-          <p:cNvPr id="67" name="TextBox 66"/>
+          <p:cNvPr id="68" name="TextBox 67"/>
           <p:cNvSpPr txBox="1"/>
           <p:nvPr/>
         </p:nvSpPr>
@@ -6314,7 +6338,7 @@
       </p:sp>
       <p:sp>
         <p:nvSpPr>
-          <p:cNvPr id="68" name="TextBox 67"/>
+          <p:cNvPr id="69" name="TextBox 68"/>
           <p:cNvSpPr txBox="1"/>
           <p:nvPr/>
         </p:nvSpPr>
@@ -6361,7 +6385,7 @@
       </p:sp>
       <p:sp>
         <p:nvSpPr>
-          <p:cNvPr id="69" name="TextBox 68"/>
+          <p:cNvPr id="70" name="TextBox 69"/>
           <p:cNvSpPr txBox="1"/>
           <p:nvPr/>
         </p:nvSpPr>
@@ -6408,7 +6432,7 @@
       </p:sp>
       <p:sp>
         <p:nvSpPr>
-          <p:cNvPr id="70" name="TextBox 69"/>
+          <p:cNvPr id="71" name="TextBox 70"/>
           <p:cNvSpPr txBox="1"/>
           <p:nvPr/>
         </p:nvSpPr>
@@ -6455,7 +6479,7 @@
       </p:sp>
       <p:sp>
         <p:nvSpPr>
-          <p:cNvPr id="71" name="TextBox 70"/>
+          <p:cNvPr id="72" name="TextBox 71"/>
           <p:cNvSpPr txBox="1"/>
           <p:nvPr/>
         </p:nvSpPr>
@@ -6548,7 +6572,7 @@
       </p:sp>
       <p:cxnSp>
         <p:nvCxnSpPr>
-          <p:cNvPr id="72" name="Connector 71"/>
+          <p:cNvPr id="73" name="Connector 72"/>
           <p:cNvCxnSpPr/>
           <p:nvPr/>
         </p:nvCxnSpPr>
@@ -6584,7 +6608,7 @@
       </p:cxnSp>
       <p:sp>
         <p:nvSpPr>
-          <p:cNvPr id="73" name="TextBox 72"/>
+          <p:cNvPr id="74" name="TextBox 73"/>
           <p:cNvSpPr txBox="1"/>
           <p:nvPr/>
         </p:nvSpPr>
@@ -6631,7 +6655,7 @@
       </p:sp>
       <p:sp>
         <p:nvSpPr>
-          <p:cNvPr id="74" name="TextBox 73"/>
+          <p:cNvPr id="75" name="TextBox 74"/>
           <p:cNvSpPr txBox="1"/>
           <p:nvPr/>
         </p:nvSpPr>
@@ -6702,7 +6726,7 @@
       </p:sp>
       <p:cxnSp>
         <p:nvCxnSpPr>
-          <p:cNvPr id="75" name="Connector 74"/>
+          <p:cNvPr id="76" name="Connector 75"/>
           <p:cNvCxnSpPr/>
           <p:nvPr/>
         </p:nvCxnSpPr>
@@ -6738,7 +6762,7 @@
       </p:cxnSp>
       <p:sp>
         <p:nvSpPr>
-          <p:cNvPr id="76" name="TextBox 75"/>
+          <p:cNvPr id="77" name="TextBox 76"/>
           <p:cNvSpPr txBox="1"/>
           <p:nvPr/>
         </p:nvSpPr>
@@ -6785,7 +6809,7 @@
       </p:sp>
       <p:sp>
         <p:nvSpPr>
-          <p:cNvPr id="77" name="TextBox 76"/>
+          <p:cNvPr id="78" name="TextBox 77"/>
           <p:cNvSpPr txBox="1"/>
           <p:nvPr/>
         </p:nvSpPr>
@@ -6856,7 +6880,7 @@
       </p:sp>
       <p:sp>
         <p:nvSpPr>
-          <p:cNvPr id="78" name="TextBox 77"/>
+          <p:cNvPr id="79" name="TextBox 78"/>
           <p:cNvSpPr txBox="1"/>
           <p:nvPr/>
         </p:nvSpPr>
@@ -6903,7 +6927,7 @@
       </p:sp>
       <p:sp>
         <p:nvSpPr>
-          <p:cNvPr id="79" name="TextBox 78"/>
+          <p:cNvPr id="80" name="TextBox 79"/>
           <p:cNvSpPr txBox="1"/>
           <p:nvPr/>
         </p:nvSpPr>
@@ -6950,7 +6974,7 @@
       </p:sp>
       <p:sp>
         <p:nvSpPr>
-          <p:cNvPr id="80" name="TextBox 79"/>
+          <p:cNvPr id="81" name="TextBox 80"/>
           <p:cNvSpPr txBox="1"/>
           <p:nvPr/>
         </p:nvSpPr>
@@ -7030,7 +7054,7 @@
       </p:sp>
       <p:sp>
         <p:nvSpPr>
-          <p:cNvPr id="81" name="TextBox 80"/>
+          <p:cNvPr id="82" name="TextBox 81"/>
           <p:cNvSpPr txBox="1"/>
           <p:nvPr/>
         </p:nvSpPr>
@@ -7077,7 +7101,7 @@
       </p:sp>
       <p:sp>
         <p:nvSpPr>
-          <p:cNvPr id="82" name="Rectangle 81"/>
+          <p:cNvPr id="83" name="Rectangle 82"/>
           <p:cNvSpPr/>
           <p:nvPr/>
         </p:nvSpPr>
@@ -7121,7 +7145,7 @@
       </p:sp>
       <p:sp>
         <p:nvSpPr>
-          <p:cNvPr id="83" name="Rectangle 82"/>
+          <p:cNvPr id="84" name="Rectangle 83"/>
           <p:cNvSpPr/>
           <p:nvPr/>
         </p:nvSpPr>
@@ -7165,7 +7189,7 @@
       </p:sp>
       <p:sp>
         <p:nvSpPr>
-          <p:cNvPr id="84" name="TextBox 83"/>
+          <p:cNvPr id="85" name="TextBox 84"/>
           <p:cNvSpPr txBox="1"/>
           <p:nvPr/>
         </p:nvSpPr>
@@ -7212,7 +7236,7 @@
       </p:sp>
       <p:sp>
         <p:nvSpPr>
-          <p:cNvPr id="85" name="TextBox 84"/>
+          <p:cNvPr id="86" name="TextBox 85"/>
           <p:cNvSpPr txBox="1"/>
           <p:nvPr/>
         </p:nvSpPr>
@@ -7259,7 +7283,7 @@
       </p:sp>
       <p:sp>
         <p:nvSpPr>
-          <p:cNvPr id="86" name="Rectangle 85"/>
+          <p:cNvPr id="87" name="Rectangle 86"/>
           <p:cNvSpPr/>
           <p:nvPr/>
         </p:nvSpPr>
@@ -7303,7 +7327,7 @@
       </p:sp>
       <p:sp>
         <p:nvSpPr>
-          <p:cNvPr id="87" name="Rectangle 86"/>
+          <p:cNvPr id="88" name="Rectangle 87"/>
           <p:cNvSpPr/>
           <p:nvPr/>
         </p:nvSpPr>
@@ -7347,7 +7371,7 @@
       </p:sp>
       <p:sp>
         <p:nvSpPr>
-          <p:cNvPr id="88" name="TextBox 87"/>
+          <p:cNvPr id="89" name="TextBox 88"/>
           <p:cNvSpPr txBox="1"/>
           <p:nvPr/>
         </p:nvSpPr>
@@ -7394,7 +7418,7 @@
       </p:sp>
       <p:sp>
         <p:nvSpPr>
-          <p:cNvPr id="89" name="TextBox 88"/>
+          <p:cNvPr id="90" name="TextBox 89"/>
           <p:cNvSpPr txBox="1"/>
           <p:nvPr/>
         </p:nvSpPr>
@@ -7441,7 +7465,7 @@
       </p:sp>
       <p:sp>
         <p:nvSpPr>
-          <p:cNvPr id="90" name="Rectangle 89"/>
+          <p:cNvPr id="91" name="Rectangle 90"/>
           <p:cNvSpPr/>
           <p:nvPr/>
         </p:nvSpPr>
@@ -7485,7 +7509,7 @@
       </p:sp>
       <p:sp>
         <p:nvSpPr>
-          <p:cNvPr id="91" name="Rectangle 90"/>
+          <p:cNvPr id="92" name="Rectangle 91"/>
           <p:cNvSpPr/>
           <p:nvPr/>
         </p:nvSpPr>
@@ -7529,7 +7553,7 @@
       </p:sp>
       <p:sp>
         <p:nvSpPr>
-          <p:cNvPr id="92" name="TextBox 91"/>
+          <p:cNvPr id="93" name="TextBox 92"/>
           <p:cNvSpPr txBox="1"/>
           <p:nvPr/>
         </p:nvSpPr>
@@ -7576,7 +7600,7 @@
       </p:sp>
       <p:sp>
         <p:nvSpPr>
-          <p:cNvPr id="93" name="TextBox 92"/>
+          <p:cNvPr id="94" name="TextBox 93"/>
           <p:cNvSpPr txBox="1"/>
           <p:nvPr/>
         </p:nvSpPr>
@@ -7634,7 +7658,7 @@
       </p:sp>
       <p:sp>
         <p:nvSpPr>
-          <p:cNvPr id="94" name="TextBox 93"/>
+          <p:cNvPr id="95" name="TextBox 94"/>
           <p:cNvSpPr txBox="1"/>
           <p:nvPr/>
         </p:nvSpPr>
@@ -7703,7 +7727,7 @@
       </p:sp>
       <p:cxnSp>
         <p:nvCxnSpPr>
-          <p:cNvPr id="95" name="Connector 94"/>
+          <p:cNvPr id="96" name="Connector 95"/>
           <p:cNvCxnSpPr/>
           <p:nvPr/>
         </p:nvCxnSpPr>
@@ -7739,7 +7763,7 @@
       </p:cxnSp>
       <p:sp>
         <p:nvSpPr>
-          <p:cNvPr id="96" name="TextBox 95"/>
+          <p:cNvPr id="97" name="TextBox 96"/>
           <p:cNvSpPr txBox="1"/>
           <p:nvPr/>
         </p:nvSpPr>
@@ -7819,7 +7843,7 @@
       </p:sp>
       <p:sp>
         <p:nvSpPr>
-          <p:cNvPr id="97" name="TextBox 96"/>
+          <p:cNvPr id="98" name="TextBox 97"/>
           <p:cNvSpPr txBox="1"/>
           <p:nvPr/>
         </p:nvSpPr>
@@ -7866,7 +7890,7 @@
       </p:sp>
       <p:sp>
         <p:nvSpPr>
-          <p:cNvPr id="98" name="TextBox 97"/>
+          <p:cNvPr id="99" name="TextBox 98"/>
           <p:cNvSpPr txBox="1"/>
           <p:nvPr/>
         </p:nvSpPr>
@@ -7935,7 +7959,7 @@
       </p:sp>
       <p:sp>
         <p:nvSpPr>
-          <p:cNvPr id="99" name="TextBox 98"/>
+          <p:cNvPr id="100" name="TextBox 99"/>
           <p:cNvSpPr txBox="1"/>
           <p:nvPr/>
         </p:nvSpPr>
@@ -7982,7 +8006,7 @@
       </p:sp>
       <p:sp>
         <p:nvSpPr>
-          <p:cNvPr id="100" name="TextBox 99"/>
+          <p:cNvPr id="101" name="TextBox 100"/>
           <p:cNvSpPr txBox="1"/>
           <p:nvPr/>
         </p:nvSpPr>
@@ -8029,7 +8053,7 @@
       </p:sp>
       <p:sp>
         <p:nvSpPr>
-          <p:cNvPr id="101" name="TextBox 100"/>
+          <p:cNvPr id="102" name="TextBox 101"/>
           <p:cNvSpPr txBox="1"/>
           <p:nvPr/>
         </p:nvSpPr>
@@ -8076,7 +8100,7 @@
       </p:sp>
       <p:sp>
         <p:nvSpPr>
-          <p:cNvPr id="102" name="TextBox 101"/>
+          <p:cNvPr id="103" name="TextBox 102"/>
           <p:cNvSpPr txBox="1"/>
           <p:nvPr/>
         </p:nvSpPr>
@@ -8123,7 +8147,7 @@
       </p:sp>
       <p:sp>
         <p:nvSpPr>
-          <p:cNvPr id="103" name="TextBox 102"/>
+          <p:cNvPr id="104" name="TextBox 103"/>
           <p:cNvSpPr txBox="1"/>
           <p:nvPr/>
         </p:nvSpPr>
@@ -8170,7 +8194,7 @@
       </p:sp>
       <p:sp>
         <p:nvSpPr>
-          <p:cNvPr id="104" name="TextBox 103"/>
+          <p:cNvPr id="105" name="TextBox 104"/>
           <p:cNvSpPr txBox="1"/>
           <p:nvPr/>
         </p:nvSpPr>
@@ -8217,7 +8241,7 @@
       </p:sp>
       <p:sp>
         <p:nvSpPr>
-          <p:cNvPr id="105" name="TextBox 104"/>
+          <p:cNvPr id="106" name="TextBox 105"/>
           <p:cNvSpPr txBox="1"/>
           <p:nvPr/>
         </p:nvSpPr>
@@ -8343,7 +8367,7 @@
       </p:sp>
       <p:cxnSp>
         <p:nvCxnSpPr>
-          <p:cNvPr id="106" name="Connector 105"/>
+          <p:cNvPr id="107" name="Connector 106"/>
           <p:cNvCxnSpPr/>
           <p:nvPr/>
         </p:nvCxnSpPr>
@@ -8379,7 +8403,7 @@
       </p:cxnSp>
       <p:sp>
         <p:nvSpPr>
-          <p:cNvPr id="107" name="TextBox 106"/>
+          <p:cNvPr id="108" name="TextBox 107"/>
           <p:cNvSpPr txBox="1"/>
           <p:nvPr/>
         </p:nvSpPr>
@@ -8514,7 +8538,7 @@
       </p:sp>
       <p:sp>
         <p:nvSpPr>
-          <p:cNvPr id="108" name="TextBox 107"/>
+          <p:cNvPr id="109" name="TextBox 108"/>
           <p:cNvSpPr txBox="1"/>
           <p:nvPr/>
         </p:nvSpPr>

--- a/deliverables/決賽海報_AI資安框架_A2.pptx
+++ b/deliverables/決賽海報_AI資安框架_A2.pptx
@@ -5,22 +5,26 @@
     <p:sldMasterId id="2147483648" r:id="rId1"/>
   </p:sldMasterIdLst>
   <p:sldIdLst>
-    <p:sldId id="256" r:id="rId7"/>
+    <p:sldId id="256" r:id="rId2"/>
   </p:sldIdLst>
-  <p:sldSz cx="15120000" cy="21384000" type="screen4x3"/>
+  <p:sldSz cx="15120000" cy="21384000"/>
   <p:notesSz cx="6858000" cy="9144000"/>
   <p:defaultTextStyle>
     <a:defPPr>
-      <a:defRPr lang="en-US"/>
+      <a:defRPr lang="en-US">
+        <a:latin typeface="Times New Roman"/>
+        <a:ea typeface="DFKai-SB"/>
+        <a:cs typeface="Times New Roman"/>
+      </a:defRPr>
     </a:defPPr>
     <a:lvl1pPr marL="0" algn="l" defTabSz="457200" rtl="0" eaLnBrk="1" latinLnBrk="0" hangingPunct="1">
       <a:defRPr sz="1800" kern="1200">
         <a:solidFill>
           <a:schemeClr val="tx1"/>
         </a:solidFill>
-        <a:latin typeface="+mn-lt"/>
-        <a:ea typeface="+mn-ea"/>
-        <a:cs typeface="+mn-cs"/>
+        <a:latin typeface="Times New Roman"/>
+        <a:ea typeface="DFKai-SB"/>
+        <a:cs typeface="Times New Roman"/>
       </a:defRPr>
     </a:lvl1pPr>
     <a:lvl2pPr marL="457200" algn="l" defTabSz="457200" rtl="0" eaLnBrk="1" latinLnBrk="0" hangingPunct="1">
@@ -28,9 +32,9 @@
         <a:solidFill>
           <a:schemeClr val="tx1"/>
         </a:solidFill>
-        <a:latin typeface="+mn-lt"/>
-        <a:ea typeface="+mn-ea"/>
-        <a:cs typeface="+mn-cs"/>
+        <a:latin typeface="Times New Roman"/>
+        <a:ea typeface="DFKai-SB"/>
+        <a:cs typeface="Times New Roman"/>
       </a:defRPr>
     </a:lvl2pPr>
     <a:lvl3pPr marL="914400" algn="l" defTabSz="457200" rtl="0" eaLnBrk="1" latinLnBrk="0" hangingPunct="1">
@@ -38,9 +42,9 @@
         <a:solidFill>
           <a:schemeClr val="tx1"/>
         </a:solidFill>
-        <a:latin typeface="+mn-lt"/>
-        <a:ea typeface="+mn-ea"/>
-        <a:cs typeface="+mn-cs"/>
+        <a:latin typeface="Times New Roman"/>
+        <a:ea typeface="DFKai-SB"/>
+        <a:cs typeface="Times New Roman"/>
       </a:defRPr>
     </a:lvl3pPr>
     <a:lvl4pPr marL="1371600" algn="l" defTabSz="457200" rtl="0" eaLnBrk="1" latinLnBrk="0" hangingPunct="1">
@@ -48,9 +52,9 @@
         <a:solidFill>
           <a:schemeClr val="tx1"/>
         </a:solidFill>
-        <a:latin typeface="+mn-lt"/>
-        <a:ea typeface="+mn-ea"/>
-        <a:cs typeface="+mn-cs"/>
+        <a:latin typeface="Times New Roman"/>
+        <a:ea typeface="DFKai-SB"/>
+        <a:cs typeface="Times New Roman"/>
       </a:defRPr>
     </a:lvl4pPr>
     <a:lvl5pPr marL="1828800" algn="l" defTabSz="457200" rtl="0" eaLnBrk="1" latinLnBrk="0" hangingPunct="1">
@@ -58,9 +62,9 @@
         <a:solidFill>
           <a:schemeClr val="tx1"/>
         </a:solidFill>
-        <a:latin typeface="+mn-lt"/>
-        <a:ea typeface="+mn-ea"/>
-        <a:cs typeface="+mn-cs"/>
+        <a:latin typeface="Times New Roman"/>
+        <a:ea typeface="DFKai-SB"/>
+        <a:cs typeface="Times New Roman"/>
       </a:defRPr>
     </a:lvl5pPr>
     <a:lvl6pPr marL="2286000" algn="l" defTabSz="457200" rtl="0" eaLnBrk="1" latinLnBrk="0" hangingPunct="1">
@@ -68,9 +72,9 @@
         <a:solidFill>
           <a:schemeClr val="tx1"/>
         </a:solidFill>
-        <a:latin typeface="+mn-lt"/>
-        <a:ea typeface="+mn-ea"/>
-        <a:cs typeface="+mn-cs"/>
+        <a:latin typeface="Times New Roman"/>
+        <a:ea typeface="DFKai-SB"/>
+        <a:cs typeface="Times New Roman"/>
       </a:defRPr>
     </a:lvl6pPr>
     <a:lvl7pPr marL="2743200" algn="l" defTabSz="457200" rtl="0" eaLnBrk="1" latinLnBrk="0" hangingPunct="1">
@@ -78,9 +82,9 @@
         <a:solidFill>
           <a:schemeClr val="tx1"/>
         </a:solidFill>
-        <a:latin typeface="+mn-lt"/>
-        <a:ea typeface="+mn-ea"/>
-        <a:cs typeface="+mn-cs"/>
+        <a:latin typeface="Times New Roman"/>
+        <a:ea typeface="DFKai-SB"/>
+        <a:cs typeface="Times New Roman"/>
       </a:defRPr>
     </a:lvl7pPr>
     <a:lvl8pPr marL="3200400" algn="l" defTabSz="457200" rtl="0" eaLnBrk="1" latinLnBrk="0" hangingPunct="1">
@@ -88,9 +92,9 @@
         <a:solidFill>
           <a:schemeClr val="tx1"/>
         </a:solidFill>
-        <a:latin typeface="+mn-lt"/>
-        <a:ea typeface="+mn-ea"/>
-        <a:cs typeface="+mn-cs"/>
+        <a:latin typeface="Times New Roman"/>
+        <a:ea typeface="DFKai-SB"/>
+        <a:cs typeface="Times New Roman"/>
       </a:defRPr>
     </a:lvl8pPr>
     <a:lvl9pPr marL="3657600" algn="l" defTabSz="457200" rtl="0" eaLnBrk="1" latinLnBrk="0" hangingPunct="1">
@@ -98,12 +102,28 @@
         <a:solidFill>
           <a:schemeClr val="tx1"/>
         </a:solidFill>
-        <a:latin typeface="+mn-lt"/>
-        <a:ea typeface="+mn-ea"/>
-        <a:cs typeface="+mn-cs"/>
+        <a:latin typeface="Times New Roman"/>
+        <a:ea typeface="DFKai-SB"/>
+        <a:cs typeface="Times New Roman"/>
       </a:defRPr>
     </a:lvl9pPr>
   </p:defaultTextStyle>
+  <p:extLst>
+    <p:ext uri="{EFAFB233-063F-42B5-8137-9DF3F51BA10A}">
+      <p15:sldGuideLst xmlns:p15="http://schemas.microsoft.com/office/powerpoint/2012/main">
+        <p15:guide id="1" orient="horz" pos="2160">
+          <p15:clr>
+            <a:srgbClr val="A4A3A4"/>
+          </p15:clr>
+        </p15:guide>
+        <p15:guide id="2" pos="2880">
+          <p15:clr>
+            <a:srgbClr val="A4A3A4"/>
+          </p15:clr>
+        </p15:guide>
+      </p15:sldGuideLst>
+    </p:ext>
+  </p:extLst>
 </p:presentation>
 </file>
 
@@ -145,10 +165,13 @@
           <a:lstStyle/>
           <a:p>
             <a:r>
-              <a:rPr lang="en-US" smtClean="0"/>
+              <a:rPr lang="en-US">
+                <a:latin typeface="Times New Roman"/>
+                <a:ea typeface="DFKai-SB"/>
+                <a:cs typeface="Times New Roman"/>
+              </a:rPr>
               <a:t>Click to edit Master title style</a:t>
             </a:r>
-            <a:endParaRPr lang="en-US"/>
           </a:p>
         </p:txBody>
       </p:sp>
@@ -179,6 +202,9 @@
                     <a:tint val="75000"/>
                   </a:schemeClr>
                 </a:solidFill>
+                <a:latin typeface="Times New Roman"/>
+                <a:ea typeface="DFKai-SB"/>
+                <a:cs typeface="Times New Roman"/>
               </a:defRPr>
             </a:lvl1pPr>
             <a:lvl2pPr marL="457200" indent="0" algn="ctr">
@@ -189,6 +215,9 @@
                     <a:tint val="75000"/>
                   </a:schemeClr>
                 </a:solidFill>
+                <a:latin typeface="Times New Roman"/>
+                <a:ea typeface="DFKai-SB"/>
+                <a:cs typeface="Times New Roman"/>
               </a:defRPr>
             </a:lvl2pPr>
             <a:lvl3pPr marL="914400" indent="0" algn="ctr">
@@ -199,6 +228,9 @@
                     <a:tint val="75000"/>
                   </a:schemeClr>
                 </a:solidFill>
+                <a:latin typeface="Times New Roman"/>
+                <a:ea typeface="DFKai-SB"/>
+                <a:cs typeface="Times New Roman"/>
               </a:defRPr>
             </a:lvl3pPr>
             <a:lvl4pPr marL="1371600" indent="0" algn="ctr">
@@ -209,6 +241,9 @@
                     <a:tint val="75000"/>
                   </a:schemeClr>
                 </a:solidFill>
+                <a:latin typeface="Times New Roman"/>
+                <a:ea typeface="DFKai-SB"/>
+                <a:cs typeface="Times New Roman"/>
               </a:defRPr>
             </a:lvl4pPr>
             <a:lvl5pPr marL="1828800" indent="0" algn="ctr">
@@ -219,6 +254,9 @@
                     <a:tint val="75000"/>
                   </a:schemeClr>
                 </a:solidFill>
+                <a:latin typeface="Times New Roman"/>
+                <a:ea typeface="DFKai-SB"/>
+                <a:cs typeface="Times New Roman"/>
               </a:defRPr>
             </a:lvl5pPr>
             <a:lvl6pPr marL="2286000" indent="0" algn="ctr">
@@ -229,6 +267,9 @@
                     <a:tint val="75000"/>
                   </a:schemeClr>
                 </a:solidFill>
+                <a:latin typeface="Times New Roman"/>
+                <a:ea typeface="DFKai-SB"/>
+                <a:cs typeface="Times New Roman"/>
               </a:defRPr>
             </a:lvl6pPr>
             <a:lvl7pPr marL="2743200" indent="0" algn="ctr">
@@ -239,6 +280,9 @@
                     <a:tint val="75000"/>
                   </a:schemeClr>
                 </a:solidFill>
+                <a:latin typeface="Times New Roman"/>
+                <a:ea typeface="DFKai-SB"/>
+                <a:cs typeface="Times New Roman"/>
               </a:defRPr>
             </a:lvl7pPr>
             <a:lvl8pPr marL="3200400" indent="0" algn="ctr">
@@ -249,6 +293,9 @@
                     <a:tint val="75000"/>
                   </a:schemeClr>
                 </a:solidFill>
+                <a:latin typeface="Times New Roman"/>
+                <a:ea typeface="DFKai-SB"/>
+                <a:cs typeface="Times New Roman"/>
               </a:defRPr>
             </a:lvl8pPr>
             <a:lvl9pPr marL="3657600" indent="0" algn="ctr">
@@ -259,15 +306,21 @@
                     <a:tint val="75000"/>
                   </a:schemeClr>
                 </a:solidFill>
+                <a:latin typeface="Times New Roman"/>
+                <a:ea typeface="DFKai-SB"/>
+                <a:cs typeface="Times New Roman"/>
               </a:defRPr>
             </a:lvl9pPr>
           </a:lstStyle>
           <a:p>
             <a:r>
-              <a:rPr lang="en-US" smtClean="0"/>
+              <a:rPr lang="en-US">
+                <a:latin typeface="Times New Roman"/>
+                <a:ea typeface="DFKai-SB"/>
+                <a:cs typeface="Times New Roman"/>
+              </a:rPr>
               <a:t>Click to edit Master subtitle style</a:t>
             </a:r>
-            <a:endParaRPr lang="en-US"/>
           </a:p>
         </p:txBody>
       </p:sp>
@@ -287,10 +340,18 @@
           <a:lstStyle/>
           <a:p>
             <a:fld id="{5BCAD085-E8A6-8845-BD4E-CB4CCA059FC4}" type="datetimeFigureOut">
-              <a:rPr lang="en-US" smtClean="0"/>
-              <a:t>1/27/13</a:t>
+              <a:rPr lang="en-US" smtClean="0">
+                <a:latin typeface="Times New Roman"/>
+                <a:ea typeface="DFKai-SB"/>
+                <a:cs typeface="Times New Roman"/>
+              </a:rPr>
+              <a:t>10/29/2026</a:t>
             </a:fld>
-            <a:endParaRPr lang="en-US"/>
+            <a:endParaRPr lang="en-US">
+              <a:latin typeface="Times New Roman"/>
+              <a:ea typeface="DFKai-SB"/>
+              <a:cs typeface="Times New Roman"/>
+            </a:endParaRPr>
           </a:p>
         </p:txBody>
       </p:sp>
@@ -309,7 +370,11 @@
           <a:bodyPr/>
           <a:lstStyle/>
           <a:p>
-            <a:endParaRPr lang="en-US"/>
+            <a:endParaRPr lang="en-US">
+              <a:latin typeface="Times New Roman"/>
+              <a:ea typeface="DFKai-SB"/>
+              <a:cs typeface="Times New Roman"/>
+            </a:endParaRPr>
           </a:p>
         </p:txBody>
       </p:sp>
@@ -329,10 +394,18 @@
           <a:lstStyle/>
           <a:p>
             <a:fld id="{C1FF6DA9-008F-8B48-92A6-B652298478BF}" type="slidenum">
-              <a:rPr lang="en-US" smtClean="0"/>
+              <a:rPr lang="en-US" smtClean="0">
+                <a:latin typeface="Times New Roman"/>
+                <a:ea typeface="DFKai-SB"/>
+                <a:cs typeface="Times New Roman"/>
+              </a:rPr>
               <a:t>‹#›</a:t>
             </a:fld>
-            <a:endParaRPr lang="en-US"/>
+            <a:endParaRPr lang="en-US">
+              <a:latin typeface="Times New Roman"/>
+              <a:ea typeface="DFKai-SB"/>
+              <a:cs typeface="Times New Roman"/>
+            </a:endParaRPr>
           </a:p>
         </p:txBody>
       </p:sp>
@@ -382,10 +455,13 @@
           <a:lstStyle/>
           <a:p>
             <a:r>
-              <a:rPr lang="en-US" smtClean="0"/>
+              <a:rPr lang="en-US">
+                <a:latin typeface="Times New Roman"/>
+                <a:ea typeface="DFKai-SB"/>
+                <a:cs typeface="Times New Roman"/>
+              </a:rPr>
               <a:t>Click to edit Master title style</a:t>
             </a:r>
-            <a:endParaRPr lang="en-US"/>
           </a:p>
         </p:txBody>
       </p:sp>
@@ -406,38 +482,57 @@
           <a:p>
             <a:pPr lvl="0"/>
             <a:r>
-              <a:rPr lang="en-US" smtClean="0"/>
+              <a:rPr lang="en-US">
+                <a:latin typeface="Times New Roman"/>
+                <a:ea typeface="DFKai-SB"/>
+                <a:cs typeface="Times New Roman"/>
+              </a:rPr>
               <a:t>Click to edit Master text styles</a:t>
             </a:r>
           </a:p>
           <a:p>
             <a:pPr lvl="1"/>
             <a:r>
-              <a:rPr lang="en-US" smtClean="0"/>
+              <a:rPr lang="en-US">
+                <a:latin typeface="Times New Roman"/>
+                <a:ea typeface="DFKai-SB"/>
+                <a:cs typeface="Times New Roman"/>
+              </a:rPr>
               <a:t>Second level</a:t>
             </a:r>
           </a:p>
           <a:p>
             <a:pPr lvl="2"/>
             <a:r>
-              <a:rPr lang="en-US" smtClean="0"/>
+              <a:rPr lang="en-US">
+                <a:latin typeface="Times New Roman"/>
+                <a:ea typeface="DFKai-SB"/>
+                <a:cs typeface="Times New Roman"/>
+              </a:rPr>
               <a:t>Third level</a:t>
             </a:r>
           </a:p>
           <a:p>
             <a:pPr lvl="3"/>
             <a:r>
-              <a:rPr lang="en-US" smtClean="0"/>
+              <a:rPr lang="en-US">
+                <a:latin typeface="Times New Roman"/>
+                <a:ea typeface="DFKai-SB"/>
+                <a:cs typeface="Times New Roman"/>
+              </a:rPr>
               <a:t>Fourth level</a:t>
             </a:r>
           </a:p>
           <a:p>
             <a:pPr lvl="4"/>
             <a:r>
-              <a:rPr lang="en-US" smtClean="0"/>
+              <a:rPr lang="en-US">
+                <a:latin typeface="Times New Roman"/>
+                <a:ea typeface="DFKai-SB"/>
+                <a:cs typeface="Times New Roman"/>
+              </a:rPr>
               <a:t>Fifth level</a:t>
             </a:r>
-            <a:endParaRPr lang="en-US"/>
           </a:p>
         </p:txBody>
       </p:sp>
@@ -457,10 +552,18 @@
           <a:lstStyle/>
           <a:p>
             <a:fld id="{5BCAD085-E8A6-8845-BD4E-CB4CCA059FC4}" type="datetimeFigureOut">
-              <a:rPr lang="en-US" smtClean="0"/>
-              <a:t>1/27/13</a:t>
+              <a:rPr lang="en-US" smtClean="0">
+                <a:latin typeface="Times New Roman"/>
+                <a:ea typeface="DFKai-SB"/>
+                <a:cs typeface="Times New Roman"/>
+              </a:rPr>
+              <a:t>10/29/2026</a:t>
             </a:fld>
-            <a:endParaRPr lang="en-US"/>
+            <a:endParaRPr lang="en-US">
+              <a:latin typeface="Times New Roman"/>
+              <a:ea typeface="DFKai-SB"/>
+              <a:cs typeface="Times New Roman"/>
+            </a:endParaRPr>
           </a:p>
         </p:txBody>
       </p:sp>
@@ -479,7 +582,11 @@
           <a:bodyPr/>
           <a:lstStyle/>
           <a:p>
-            <a:endParaRPr lang="en-US"/>
+            <a:endParaRPr lang="en-US">
+              <a:latin typeface="Times New Roman"/>
+              <a:ea typeface="DFKai-SB"/>
+              <a:cs typeface="Times New Roman"/>
+            </a:endParaRPr>
           </a:p>
         </p:txBody>
       </p:sp>
@@ -499,10 +606,18 @@
           <a:lstStyle/>
           <a:p>
             <a:fld id="{C1FF6DA9-008F-8B48-92A6-B652298478BF}" type="slidenum">
-              <a:rPr lang="en-US" smtClean="0"/>
+              <a:rPr lang="en-US" smtClean="0">
+                <a:latin typeface="Times New Roman"/>
+                <a:ea typeface="DFKai-SB"/>
+                <a:cs typeface="Times New Roman"/>
+              </a:rPr>
               <a:t>‹#›</a:t>
             </a:fld>
-            <a:endParaRPr lang="en-US"/>
+            <a:endParaRPr lang="en-US">
+              <a:latin typeface="Times New Roman"/>
+              <a:ea typeface="DFKai-SB"/>
+              <a:cs typeface="Times New Roman"/>
+            </a:endParaRPr>
           </a:p>
         </p:txBody>
       </p:sp>
@@ -557,10 +672,13 @@
           <a:lstStyle/>
           <a:p>
             <a:r>
-              <a:rPr lang="en-US" smtClean="0"/>
+              <a:rPr lang="en-US">
+                <a:latin typeface="Times New Roman"/>
+                <a:ea typeface="DFKai-SB"/>
+                <a:cs typeface="Times New Roman"/>
+              </a:rPr>
               <a:t>Click to edit Master title style</a:t>
             </a:r>
-            <a:endParaRPr lang="en-US"/>
           </a:p>
         </p:txBody>
       </p:sp>
@@ -586,38 +704,57 @@
           <a:p>
             <a:pPr lvl="0"/>
             <a:r>
-              <a:rPr lang="en-US" smtClean="0"/>
+              <a:rPr lang="en-US">
+                <a:latin typeface="Times New Roman"/>
+                <a:ea typeface="DFKai-SB"/>
+                <a:cs typeface="Times New Roman"/>
+              </a:rPr>
               <a:t>Click to edit Master text styles</a:t>
             </a:r>
           </a:p>
           <a:p>
             <a:pPr lvl="1"/>
             <a:r>
-              <a:rPr lang="en-US" smtClean="0"/>
+              <a:rPr lang="en-US">
+                <a:latin typeface="Times New Roman"/>
+                <a:ea typeface="DFKai-SB"/>
+                <a:cs typeface="Times New Roman"/>
+              </a:rPr>
               <a:t>Second level</a:t>
             </a:r>
           </a:p>
           <a:p>
             <a:pPr lvl="2"/>
             <a:r>
-              <a:rPr lang="en-US" smtClean="0"/>
+              <a:rPr lang="en-US">
+                <a:latin typeface="Times New Roman"/>
+                <a:ea typeface="DFKai-SB"/>
+                <a:cs typeface="Times New Roman"/>
+              </a:rPr>
               <a:t>Third level</a:t>
             </a:r>
           </a:p>
           <a:p>
             <a:pPr lvl="3"/>
             <a:r>
-              <a:rPr lang="en-US" smtClean="0"/>
+              <a:rPr lang="en-US">
+                <a:latin typeface="Times New Roman"/>
+                <a:ea typeface="DFKai-SB"/>
+                <a:cs typeface="Times New Roman"/>
+              </a:rPr>
               <a:t>Fourth level</a:t>
             </a:r>
           </a:p>
           <a:p>
             <a:pPr lvl="4"/>
             <a:r>
-              <a:rPr lang="en-US" smtClean="0"/>
+              <a:rPr lang="en-US">
+                <a:latin typeface="Times New Roman"/>
+                <a:ea typeface="DFKai-SB"/>
+                <a:cs typeface="Times New Roman"/>
+              </a:rPr>
               <a:t>Fifth level</a:t>
             </a:r>
-            <a:endParaRPr lang="en-US"/>
           </a:p>
         </p:txBody>
       </p:sp>
@@ -637,10 +774,18 @@
           <a:lstStyle/>
           <a:p>
             <a:fld id="{5BCAD085-E8A6-8845-BD4E-CB4CCA059FC4}" type="datetimeFigureOut">
-              <a:rPr lang="en-US" smtClean="0"/>
-              <a:t>1/27/13</a:t>
+              <a:rPr lang="en-US" smtClean="0">
+                <a:latin typeface="Times New Roman"/>
+                <a:ea typeface="DFKai-SB"/>
+                <a:cs typeface="Times New Roman"/>
+              </a:rPr>
+              <a:t>10/29/2026</a:t>
             </a:fld>
-            <a:endParaRPr lang="en-US"/>
+            <a:endParaRPr lang="en-US">
+              <a:latin typeface="Times New Roman"/>
+              <a:ea typeface="DFKai-SB"/>
+              <a:cs typeface="Times New Roman"/>
+            </a:endParaRPr>
           </a:p>
         </p:txBody>
       </p:sp>
@@ -659,7 +804,11 @@
           <a:bodyPr/>
           <a:lstStyle/>
           <a:p>
-            <a:endParaRPr lang="en-US"/>
+            <a:endParaRPr lang="en-US">
+              <a:latin typeface="Times New Roman"/>
+              <a:ea typeface="DFKai-SB"/>
+              <a:cs typeface="Times New Roman"/>
+            </a:endParaRPr>
           </a:p>
         </p:txBody>
       </p:sp>
@@ -679,10 +828,18 @@
           <a:lstStyle/>
           <a:p>
             <a:fld id="{C1FF6DA9-008F-8B48-92A6-B652298478BF}" type="slidenum">
-              <a:rPr lang="en-US" smtClean="0"/>
+              <a:rPr lang="en-US" smtClean="0">
+                <a:latin typeface="Times New Roman"/>
+                <a:ea typeface="DFKai-SB"/>
+                <a:cs typeface="Times New Roman"/>
+              </a:rPr>
               <a:t>‹#›</a:t>
             </a:fld>
-            <a:endParaRPr lang="en-US"/>
+            <a:endParaRPr lang="en-US">
+              <a:latin typeface="Times New Roman"/>
+              <a:ea typeface="DFKai-SB"/>
+              <a:cs typeface="Times New Roman"/>
+            </a:endParaRPr>
           </a:p>
         </p:txBody>
       </p:sp>
@@ -732,10 +889,13 @@
           <a:lstStyle/>
           <a:p>
             <a:r>
-              <a:rPr lang="en-US" smtClean="0"/>
+              <a:rPr lang="en-US">
+                <a:latin typeface="Times New Roman"/>
+                <a:ea typeface="DFKai-SB"/>
+                <a:cs typeface="Times New Roman"/>
+              </a:rPr>
               <a:t>Click to edit Master title style</a:t>
             </a:r>
-            <a:endParaRPr lang="en-US"/>
           </a:p>
         </p:txBody>
       </p:sp>
@@ -756,38 +916,57 @@
           <a:p>
             <a:pPr lvl="0"/>
             <a:r>
-              <a:rPr lang="en-US" smtClean="0"/>
+              <a:rPr lang="en-US">
+                <a:latin typeface="Times New Roman"/>
+                <a:ea typeface="DFKai-SB"/>
+                <a:cs typeface="Times New Roman"/>
+              </a:rPr>
               <a:t>Click to edit Master text styles</a:t>
             </a:r>
           </a:p>
           <a:p>
             <a:pPr lvl="1"/>
             <a:r>
-              <a:rPr lang="en-US" smtClean="0"/>
+              <a:rPr lang="en-US">
+                <a:latin typeface="Times New Roman"/>
+                <a:ea typeface="DFKai-SB"/>
+                <a:cs typeface="Times New Roman"/>
+              </a:rPr>
               <a:t>Second level</a:t>
             </a:r>
           </a:p>
           <a:p>
             <a:pPr lvl="2"/>
             <a:r>
-              <a:rPr lang="en-US" smtClean="0"/>
+              <a:rPr lang="en-US">
+                <a:latin typeface="Times New Roman"/>
+                <a:ea typeface="DFKai-SB"/>
+                <a:cs typeface="Times New Roman"/>
+              </a:rPr>
               <a:t>Third level</a:t>
             </a:r>
           </a:p>
           <a:p>
             <a:pPr lvl="3"/>
             <a:r>
-              <a:rPr lang="en-US" smtClean="0"/>
+              <a:rPr lang="en-US">
+                <a:latin typeface="Times New Roman"/>
+                <a:ea typeface="DFKai-SB"/>
+                <a:cs typeface="Times New Roman"/>
+              </a:rPr>
               <a:t>Fourth level</a:t>
             </a:r>
           </a:p>
           <a:p>
             <a:pPr lvl="4"/>
             <a:r>
-              <a:rPr lang="en-US" smtClean="0"/>
+              <a:rPr lang="en-US">
+                <a:latin typeface="Times New Roman"/>
+                <a:ea typeface="DFKai-SB"/>
+                <a:cs typeface="Times New Roman"/>
+              </a:rPr>
               <a:t>Fifth level</a:t>
             </a:r>
-            <a:endParaRPr lang="en-US"/>
           </a:p>
         </p:txBody>
       </p:sp>
@@ -807,10 +986,18 @@
           <a:lstStyle/>
           <a:p>
             <a:fld id="{5BCAD085-E8A6-8845-BD4E-CB4CCA059FC4}" type="datetimeFigureOut">
-              <a:rPr lang="en-US" smtClean="0"/>
-              <a:t>1/27/13</a:t>
+              <a:rPr lang="en-US" smtClean="0">
+                <a:latin typeface="Times New Roman"/>
+                <a:ea typeface="DFKai-SB"/>
+                <a:cs typeface="Times New Roman"/>
+              </a:rPr>
+              <a:t>10/29/2026</a:t>
             </a:fld>
-            <a:endParaRPr lang="en-US"/>
+            <a:endParaRPr lang="en-US">
+              <a:latin typeface="Times New Roman"/>
+              <a:ea typeface="DFKai-SB"/>
+              <a:cs typeface="Times New Roman"/>
+            </a:endParaRPr>
           </a:p>
         </p:txBody>
       </p:sp>
@@ -829,7 +1016,11 @@
           <a:bodyPr/>
           <a:lstStyle/>
           <a:p>
-            <a:endParaRPr lang="en-US"/>
+            <a:endParaRPr lang="en-US">
+              <a:latin typeface="Times New Roman"/>
+              <a:ea typeface="DFKai-SB"/>
+              <a:cs typeface="Times New Roman"/>
+            </a:endParaRPr>
           </a:p>
         </p:txBody>
       </p:sp>
@@ -849,10 +1040,18 @@
           <a:lstStyle/>
           <a:p>
             <a:fld id="{C1FF6DA9-008F-8B48-92A6-B652298478BF}" type="slidenum">
-              <a:rPr lang="en-US" smtClean="0"/>
+              <a:rPr lang="en-US" smtClean="0">
+                <a:latin typeface="Times New Roman"/>
+                <a:ea typeface="DFKai-SB"/>
+                <a:cs typeface="Times New Roman"/>
+              </a:rPr>
               <a:t>‹#›</a:t>
             </a:fld>
-            <a:endParaRPr lang="en-US"/>
+            <a:endParaRPr lang="en-US">
+              <a:latin typeface="Times New Roman"/>
+              <a:ea typeface="DFKai-SB"/>
+              <a:cs typeface="Times New Roman"/>
+            </a:endParaRPr>
           </a:p>
         </p:txBody>
       </p:sp>
@@ -906,15 +1105,22 @@
           <a:bodyPr anchor="t"/>
           <a:lstStyle>
             <a:lvl1pPr algn="l">
-              <a:defRPr sz="4000" b="1" cap="all"/>
+              <a:defRPr sz="4000" b="1" cap="all">
+                <a:latin typeface="Times New Roman"/>
+                <a:ea typeface="DFKai-SB"/>
+                <a:cs typeface="Times New Roman"/>
+              </a:defRPr>
             </a:lvl1pPr>
           </a:lstStyle>
           <a:p>
             <a:r>
-              <a:rPr lang="en-US" smtClean="0"/>
+              <a:rPr lang="en-US">
+                <a:latin typeface="Times New Roman"/>
+                <a:ea typeface="DFKai-SB"/>
+                <a:cs typeface="Times New Roman"/>
+              </a:rPr>
               <a:t>Click to edit Master title style</a:t>
             </a:r>
-            <a:endParaRPr lang="en-US"/>
           </a:p>
         </p:txBody>
       </p:sp>
@@ -945,6 +1151,9 @@
                     <a:tint val="75000"/>
                   </a:schemeClr>
                 </a:solidFill>
+                <a:latin typeface="Times New Roman"/>
+                <a:ea typeface="DFKai-SB"/>
+                <a:cs typeface="Times New Roman"/>
               </a:defRPr>
             </a:lvl1pPr>
             <a:lvl2pPr marL="457200" indent="0">
@@ -955,6 +1164,9 @@
                     <a:tint val="75000"/>
                   </a:schemeClr>
                 </a:solidFill>
+                <a:latin typeface="Times New Roman"/>
+                <a:ea typeface="DFKai-SB"/>
+                <a:cs typeface="Times New Roman"/>
               </a:defRPr>
             </a:lvl2pPr>
             <a:lvl3pPr marL="914400" indent="0">
@@ -965,6 +1177,9 @@
                     <a:tint val="75000"/>
                   </a:schemeClr>
                 </a:solidFill>
+                <a:latin typeface="Times New Roman"/>
+                <a:ea typeface="DFKai-SB"/>
+                <a:cs typeface="Times New Roman"/>
               </a:defRPr>
             </a:lvl3pPr>
             <a:lvl4pPr marL="1371600" indent="0">
@@ -975,6 +1190,9 @@
                     <a:tint val="75000"/>
                   </a:schemeClr>
                 </a:solidFill>
+                <a:latin typeface="Times New Roman"/>
+                <a:ea typeface="DFKai-SB"/>
+                <a:cs typeface="Times New Roman"/>
               </a:defRPr>
             </a:lvl4pPr>
             <a:lvl5pPr marL="1828800" indent="0">
@@ -985,6 +1203,9 @@
                     <a:tint val="75000"/>
                   </a:schemeClr>
                 </a:solidFill>
+                <a:latin typeface="Times New Roman"/>
+                <a:ea typeface="DFKai-SB"/>
+                <a:cs typeface="Times New Roman"/>
               </a:defRPr>
             </a:lvl5pPr>
             <a:lvl6pPr marL="2286000" indent="0">
@@ -995,6 +1216,9 @@
                     <a:tint val="75000"/>
                   </a:schemeClr>
                 </a:solidFill>
+                <a:latin typeface="Times New Roman"/>
+                <a:ea typeface="DFKai-SB"/>
+                <a:cs typeface="Times New Roman"/>
               </a:defRPr>
             </a:lvl6pPr>
             <a:lvl7pPr marL="2743200" indent="0">
@@ -1005,6 +1229,9 @@
                     <a:tint val="75000"/>
                   </a:schemeClr>
                 </a:solidFill>
+                <a:latin typeface="Times New Roman"/>
+                <a:ea typeface="DFKai-SB"/>
+                <a:cs typeface="Times New Roman"/>
               </a:defRPr>
             </a:lvl7pPr>
             <a:lvl8pPr marL="3200400" indent="0">
@@ -1015,6 +1242,9 @@
                     <a:tint val="75000"/>
                   </a:schemeClr>
                 </a:solidFill>
+                <a:latin typeface="Times New Roman"/>
+                <a:ea typeface="DFKai-SB"/>
+                <a:cs typeface="Times New Roman"/>
               </a:defRPr>
             </a:lvl8pPr>
             <a:lvl9pPr marL="3657600" indent="0">
@@ -1025,13 +1255,20 @@
                     <a:tint val="75000"/>
                   </a:schemeClr>
                 </a:solidFill>
+                <a:latin typeface="Times New Roman"/>
+                <a:ea typeface="DFKai-SB"/>
+                <a:cs typeface="Times New Roman"/>
               </a:defRPr>
             </a:lvl9pPr>
           </a:lstStyle>
           <a:p>
             <a:pPr lvl="0"/>
             <a:r>
-              <a:rPr lang="en-US" smtClean="0"/>
+              <a:rPr lang="en-US">
+                <a:latin typeface="Times New Roman"/>
+                <a:ea typeface="DFKai-SB"/>
+                <a:cs typeface="Times New Roman"/>
+              </a:rPr>
               <a:t>Click to edit Master text styles</a:t>
             </a:r>
           </a:p>
@@ -1053,10 +1290,18 @@
           <a:lstStyle/>
           <a:p>
             <a:fld id="{5BCAD085-E8A6-8845-BD4E-CB4CCA059FC4}" type="datetimeFigureOut">
-              <a:rPr lang="en-US" smtClean="0"/>
-              <a:t>1/27/13</a:t>
+              <a:rPr lang="en-US" smtClean="0">
+                <a:latin typeface="Times New Roman"/>
+                <a:ea typeface="DFKai-SB"/>
+                <a:cs typeface="Times New Roman"/>
+              </a:rPr>
+              <a:t>10/29/2026</a:t>
             </a:fld>
-            <a:endParaRPr lang="en-US"/>
+            <a:endParaRPr lang="en-US">
+              <a:latin typeface="Times New Roman"/>
+              <a:ea typeface="DFKai-SB"/>
+              <a:cs typeface="Times New Roman"/>
+            </a:endParaRPr>
           </a:p>
         </p:txBody>
       </p:sp>
@@ -1075,7 +1320,11 @@
           <a:bodyPr/>
           <a:lstStyle/>
           <a:p>
-            <a:endParaRPr lang="en-US"/>
+            <a:endParaRPr lang="en-US">
+              <a:latin typeface="Times New Roman"/>
+              <a:ea typeface="DFKai-SB"/>
+              <a:cs typeface="Times New Roman"/>
+            </a:endParaRPr>
           </a:p>
         </p:txBody>
       </p:sp>
@@ -1095,10 +1344,18 @@
           <a:lstStyle/>
           <a:p>
             <a:fld id="{C1FF6DA9-008F-8B48-92A6-B652298478BF}" type="slidenum">
-              <a:rPr lang="en-US" smtClean="0"/>
+              <a:rPr lang="en-US" smtClean="0">
+                <a:latin typeface="Times New Roman"/>
+                <a:ea typeface="DFKai-SB"/>
+                <a:cs typeface="Times New Roman"/>
+              </a:rPr>
               <a:t>‹#›</a:t>
             </a:fld>
-            <a:endParaRPr lang="en-US"/>
+            <a:endParaRPr lang="en-US">
+              <a:latin typeface="Times New Roman"/>
+              <a:ea typeface="DFKai-SB"/>
+              <a:cs typeface="Times New Roman"/>
+            </a:endParaRPr>
           </a:p>
         </p:txBody>
       </p:sp>
@@ -1148,10 +1405,13 @@
           <a:lstStyle/>
           <a:p>
             <a:r>
-              <a:rPr lang="en-US" smtClean="0"/>
+              <a:rPr lang="en-US">
+                <a:latin typeface="Times New Roman"/>
+                <a:ea typeface="DFKai-SB"/>
+                <a:cs typeface="Times New Roman"/>
+              </a:rPr>
               <a:t>Click to edit Master title style</a:t>
             </a:r>
-            <a:endParaRPr lang="en-US"/>
           </a:p>
         </p:txBody>
       </p:sp>
@@ -1175,68 +1435,123 @@
           <a:bodyPr/>
           <a:lstStyle>
             <a:lvl1pPr>
-              <a:defRPr sz="2800"/>
+              <a:defRPr sz="2800">
+                <a:latin typeface="Times New Roman"/>
+                <a:ea typeface="DFKai-SB"/>
+                <a:cs typeface="Times New Roman"/>
+              </a:defRPr>
             </a:lvl1pPr>
             <a:lvl2pPr>
-              <a:defRPr sz="2400"/>
+              <a:defRPr sz="2400">
+                <a:latin typeface="Times New Roman"/>
+                <a:ea typeface="DFKai-SB"/>
+                <a:cs typeface="Times New Roman"/>
+              </a:defRPr>
             </a:lvl2pPr>
             <a:lvl3pPr>
-              <a:defRPr sz="2000"/>
+              <a:defRPr sz="2000">
+                <a:latin typeface="Times New Roman"/>
+                <a:ea typeface="DFKai-SB"/>
+                <a:cs typeface="Times New Roman"/>
+              </a:defRPr>
             </a:lvl3pPr>
             <a:lvl4pPr>
-              <a:defRPr sz="1800"/>
+              <a:defRPr sz="1800">
+                <a:latin typeface="Times New Roman"/>
+                <a:ea typeface="DFKai-SB"/>
+                <a:cs typeface="Times New Roman"/>
+              </a:defRPr>
             </a:lvl4pPr>
             <a:lvl5pPr>
-              <a:defRPr sz="1800"/>
+              <a:defRPr sz="1800">
+                <a:latin typeface="Times New Roman"/>
+                <a:ea typeface="DFKai-SB"/>
+                <a:cs typeface="Times New Roman"/>
+              </a:defRPr>
             </a:lvl5pPr>
             <a:lvl6pPr>
-              <a:defRPr sz="1800"/>
+              <a:defRPr sz="1800">
+                <a:latin typeface="Times New Roman"/>
+                <a:ea typeface="DFKai-SB"/>
+                <a:cs typeface="Times New Roman"/>
+              </a:defRPr>
             </a:lvl6pPr>
             <a:lvl7pPr>
-              <a:defRPr sz="1800"/>
+              <a:defRPr sz="1800">
+                <a:latin typeface="Times New Roman"/>
+                <a:ea typeface="DFKai-SB"/>
+                <a:cs typeface="Times New Roman"/>
+              </a:defRPr>
             </a:lvl7pPr>
             <a:lvl8pPr>
-              <a:defRPr sz="1800"/>
+              <a:defRPr sz="1800">
+                <a:latin typeface="Times New Roman"/>
+                <a:ea typeface="DFKai-SB"/>
+                <a:cs typeface="Times New Roman"/>
+              </a:defRPr>
             </a:lvl8pPr>
             <a:lvl9pPr>
-              <a:defRPr sz="1800"/>
+              <a:defRPr sz="1800">
+                <a:latin typeface="Times New Roman"/>
+                <a:ea typeface="DFKai-SB"/>
+                <a:cs typeface="Times New Roman"/>
+              </a:defRPr>
             </a:lvl9pPr>
           </a:lstStyle>
           <a:p>
             <a:pPr lvl="0"/>
             <a:r>
-              <a:rPr lang="en-US" smtClean="0"/>
+              <a:rPr lang="en-US">
+                <a:latin typeface="Times New Roman"/>
+                <a:ea typeface="DFKai-SB"/>
+                <a:cs typeface="Times New Roman"/>
+              </a:rPr>
               <a:t>Click to edit Master text styles</a:t>
             </a:r>
           </a:p>
           <a:p>
             <a:pPr lvl="1"/>
             <a:r>
-              <a:rPr lang="en-US" smtClean="0"/>
+              <a:rPr lang="en-US">
+                <a:latin typeface="Times New Roman"/>
+                <a:ea typeface="DFKai-SB"/>
+                <a:cs typeface="Times New Roman"/>
+              </a:rPr>
               <a:t>Second level</a:t>
             </a:r>
           </a:p>
           <a:p>
             <a:pPr lvl="2"/>
             <a:r>
-              <a:rPr lang="en-US" smtClean="0"/>
+              <a:rPr lang="en-US">
+                <a:latin typeface="Times New Roman"/>
+                <a:ea typeface="DFKai-SB"/>
+                <a:cs typeface="Times New Roman"/>
+              </a:rPr>
               <a:t>Third level</a:t>
             </a:r>
           </a:p>
           <a:p>
             <a:pPr lvl="3"/>
             <a:r>
-              <a:rPr lang="en-US" smtClean="0"/>
+              <a:rPr lang="en-US">
+                <a:latin typeface="Times New Roman"/>
+                <a:ea typeface="DFKai-SB"/>
+                <a:cs typeface="Times New Roman"/>
+              </a:rPr>
               <a:t>Fourth level</a:t>
             </a:r>
           </a:p>
           <a:p>
             <a:pPr lvl="4"/>
             <a:r>
-              <a:rPr lang="en-US" smtClean="0"/>
+              <a:rPr lang="en-US">
+                <a:latin typeface="Times New Roman"/>
+                <a:ea typeface="DFKai-SB"/>
+                <a:cs typeface="Times New Roman"/>
+              </a:rPr>
               <a:t>Fifth level</a:t>
             </a:r>
-            <a:endParaRPr lang="en-US"/>
           </a:p>
         </p:txBody>
       </p:sp>
@@ -1260,68 +1575,123 @@
           <a:bodyPr/>
           <a:lstStyle>
             <a:lvl1pPr>
-              <a:defRPr sz="2800"/>
+              <a:defRPr sz="2800">
+                <a:latin typeface="Times New Roman"/>
+                <a:ea typeface="DFKai-SB"/>
+                <a:cs typeface="Times New Roman"/>
+              </a:defRPr>
             </a:lvl1pPr>
             <a:lvl2pPr>
-              <a:defRPr sz="2400"/>
+              <a:defRPr sz="2400">
+                <a:latin typeface="Times New Roman"/>
+                <a:ea typeface="DFKai-SB"/>
+                <a:cs typeface="Times New Roman"/>
+              </a:defRPr>
             </a:lvl2pPr>
             <a:lvl3pPr>
-              <a:defRPr sz="2000"/>
+              <a:defRPr sz="2000">
+                <a:latin typeface="Times New Roman"/>
+                <a:ea typeface="DFKai-SB"/>
+                <a:cs typeface="Times New Roman"/>
+              </a:defRPr>
             </a:lvl3pPr>
             <a:lvl4pPr>
-              <a:defRPr sz="1800"/>
+              <a:defRPr sz="1800">
+                <a:latin typeface="Times New Roman"/>
+                <a:ea typeface="DFKai-SB"/>
+                <a:cs typeface="Times New Roman"/>
+              </a:defRPr>
             </a:lvl4pPr>
             <a:lvl5pPr>
-              <a:defRPr sz="1800"/>
+              <a:defRPr sz="1800">
+                <a:latin typeface="Times New Roman"/>
+                <a:ea typeface="DFKai-SB"/>
+                <a:cs typeface="Times New Roman"/>
+              </a:defRPr>
             </a:lvl5pPr>
             <a:lvl6pPr>
-              <a:defRPr sz="1800"/>
+              <a:defRPr sz="1800">
+                <a:latin typeface="Times New Roman"/>
+                <a:ea typeface="DFKai-SB"/>
+                <a:cs typeface="Times New Roman"/>
+              </a:defRPr>
             </a:lvl6pPr>
             <a:lvl7pPr>
-              <a:defRPr sz="1800"/>
+              <a:defRPr sz="1800">
+                <a:latin typeface="Times New Roman"/>
+                <a:ea typeface="DFKai-SB"/>
+                <a:cs typeface="Times New Roman"/>
+              </a:defRPr>
             </a:lvl7pPr>
             <a:lvl8pPr>
-              <a:defRPr sz="1800"/>
+              <a:defRPr sz="1800">
+                <a:latin typeface="Times New Roman"/>
+                <a:ea typeface="DFKai-SB"/>
+                <a:cs typeface="Times New Roman"/>
+              </a:defRPr>
             </a:lvl8pPr>
             <a:lvl9pPr>
-              <a:defRPr sz="1800"/>
+              <a:defRPr sz="1800">
+                <a:latin typeface="Times New Roman"/>
+                <a:ea typeface="DFKai-SB"/>
+                <a:cs typeface="Times New Roman"/>
+              </a:defRPr>
             </a:lvl9pPr>
           </a:lstStyle>
           <a:p>
             <a:pPr lvl="0"/>
             <a:r>
-              <a:rPr lang="en-US" smtClean="0"/>
+              <a:rPr lang="en-US">
+                <a:latin typeface="Times New Roman"/>
+                <a:ea typeface="DFKai-SB"/>
+                <a:cs typeface="Times New Roman"/>
+              </a:rPr>
               <a:t>Click to edit Master text styles</a:t>
             </a:r>
           </a:p>
           <a:p>
             <a:pPr lvl="1"/>
             <a:r>
-              <a:rPr lang="en-US" smtClean="0"/>
+              <a:rPr lang="en-US">
+                <a:latin typeface="Times New Roman"/>
+                <a:ea typeface="DFKai-SB"/>
+                <a:cs typeface="Times New Roman"/>
+              </a:rPr>
               <a:t>Second level</a:t>
             </a:r>
           </a:p>
           <a:p>
             <a:pPr lvl="2"/>
             <a:r>
-              <a:rPr lang="en-US" smtClean="0"/>
+              <a:rPr lang="en-US">
+                <a:latin typeface="Times New Roman"/>
+                <a:ea typeface="DFKai-SB"/>
+                <a:cs typeface="Times New Roman"/>
+              </a:rPr>
               <a:t>Third level</a:t>
             </a:r>
           </a:p>
           <a:p>
             <a:pPr lvl="3"/>
             <a:r>
-              <a:rPr lang="en-US" smtClean="0"/>
+              <a:rPr lang="en-US">
+                <a:latin typeface="Times New Roman"/>
+                <a:ea typeface="DFKai-SB"/>
+                <a:cs typeface="Times New Roman"/>
+              </a:rPr>
               <a:t>Fourth level</a:t>
             </a:r>
           </a:p>
           <a:p>
             <a:pPr lvl="4"/>
             <a:r>
-              <a:rPr lang="en-US" smtClean="0"/>
+              <a:rPr lang="en-US">
+                <a:latin typeface="Times New Roman"/>
+                <a:ea typeface="DFKai-SB"/>
+                <a:cs typeface="Times New Roman"/>
+              </a:rPr>
               <a:t>Fifth level</a:t>
             </a:r>
-            <a:endParaRPr lang="en-US"/>
           </a:p>
         </p:txBody>
       </p:sp>
@@ -1341,10 +1711,18 @@
           <a:lstStyle/>
           <a:p>
             <a:fld id="{5BCAD085-E8A6-8845-BD4E-CB4CCA059FC4}" type="datetimeFigureOut">
-              <a:rPr lang="en-US" smtClean="0"/>
-              <a:t>1/27/13</a:t>
+              <a:rPr lang="en-US" smtClean="0">
+                <a:latin typeface="Times New Roman"/>
+                <a:ea typeface="DFKai-SB"/>
+                <a:cs typeface="Times New Roman"/>
+              </a:rPr>
+              <a:t>10/29/2026</a:t>
             </a:fld>
-            <a:endParaRPr lang="en-US"/>
+            <a:endParaRPr lang="en-US">
+              <a:latin typeface="Times New Roman"/>
+              <a:ea typeface="DFKai-SB"/>
+              <a:cs typeface="Times New Roman"/>
+            </a:endParaRPr>
           </a:p>
         </p:txBody>
       </p:sp>
@@ -1363,7 +1741,11 @@
           <a:bodyPr/>
           <a:lstStyle/>
           <a:p>
-            <a:endParaRPr lang="en-US"/>
+            <a:endParaRPr lang="en-US">
+              <a:latin typeface="Times New Roman"/>
+              <a:ea typeface="DFKai-SB"/>
+              <a:cs typeface="Times New Roman"/>
+            </a:endParaRPr>
           </a:p>
         </p:txBody>
       </p:sp>
@@ -1383,10 +1765,18 @@
           <a:lstStyle/>
           <a:p>
             <a:fld id="{C1FF6DA9-008F-8B48-92A6-B652298478BF}" type="slidenum">
-              <a:rPr lang="en-US" smtClean="0"/>
+              <a:rPr lang="en-US" smtClean="0">
+                <a:latin typeface="Times New Roman"/>
+                <a:ea typeface="DFKai-SB"/>
+                <a:cs typeface="Times New Roman"/>
+              </a:rPr>
               <a:t>‹#›</a:t>
             </a:fld>
-            <a:endParaRPr lang="en-US"/>
+            <a:endParaRPr lang="en-US">
+              <a:latin typeface="Times New Roman"/>
+              <a:ea typeface="DFKai-SB"/>
+              <a:cs typeface="Times New Roman"/>
+            </a:endParaRPr>
           </a:p>
         </p:txBody>
       </p:sp>
@@ -1435,15 +1825,22 @@
           <a:bodyPr/>
           <a:lstStyle>
             <a:lvl1pPr>
-              <a:defRPr/>
+              <a:defRPr>
+                <a:latin typeface="Times New Roman"/>
+                <a:ea typeface="DFKai-SB"/>
+                <a:cs typeface="Times New Roman"/>
+              </a:defRPr>
             </a:lvl1pPr>
           </a:lstStyle>
           <a:p>
             <a:r>
-              <a:rPr lang="en-US" smtClean="0"/>
+              <a:rPr lang="en-US">
+                <a:latin typeface="Times New Roman"/>
+                <a:ea typeface="DFKai-SB"/>
+                <a:cs typeface="Times New Roman"/>
+              </a:rPr>
               <a:t>Click to edit Master title style</a:t>
             </a:r>
-            <a:endParaRPr lang="en-US"/>
           </a:p>
         </p:txBody>
       </p:sp>
@@ -1468,45 +1865,85 @@
           <a:lstStyle>
             <a:lvl1pPr marL="0" indent="0">
               <a:buNone/>
-              <a:defRPr sz="2400" b="1"/>
+              <a:defRPr sz="2400" b="1">
+                <a:latin typeface="Times New Roman"/>
+                <a:ea typeface="DFKai-SB"/>
+                <a:cs typeface="Times New Roman"/>
+              </a:defRPr>
             </a:lvl1pPr>
             <a:lvl2pPr marL="457200" indent="0">
               <a:buNone/>
-              <a:defRPr sz="2000" b="1"/>
+              <a:defRPr sz="2000" b="1">
+                <a:latin typeface="Times New Roman"/>
+                <a:ea typeface="DFKai-SB"/>
+                <a:cs typeface="Times New Roman"/>
+              </a:defRPr>
             </a:lvl2pPr>
             <a:lvl3pPr marL="914400" indent="0">
               <a:buNone/>
-              <a:defRPr sz="1800" b="1"/>
+              <a:defRPr sz="1800" b="1">
+                <a:latin typeface="Times New Roman"/>
+                <a:ea typeface="DFKai-SB"/>
+                <a:cs typeface="Times New Roman"/>
+              </a:defRPr>
             </a:lvl3pPr>
             <a:lvl4pPr marL="1371600" indent="0">
               <a:buNone/>
-              <a:defRPr sz="1600" b="1"/>
+              <a:defRPr sz="1600" b="1">
+                <a:latin typeface="Times New Roman"/>
+                <a:ea typeface="DFKai-SB"/>
+                <a:cs typeface="Times New Roman"/>
+              </a:defRPr>
             </a:lvl4pPr>
             <a:lvl5pPr marL="1828800" indent="0">
               <a:buNone/>
-              <a:defRPr sz="1600" b="1"/>
+              <a:defRPr sz="1600" b="1">
+                <a:latin typeface="Times New Roman"/>
+                <a:ea typeface="DFKai-SB"/>
+                <a:cs typeface="Times New Roman"/>
+              </a:defRPr>
             </a:lvl5pPr>
             <a:lvl6pPr marL="2286000" indent="0">
               <a:buNone/>
-              <a:defRPr sz="1600" b="1"/>
+              <a:defRPr sz="1600" b="1">
+                <a:latin typeface="Times New Roman"/>
+                <a:ea typeface="DFKai-SB"/>
+                <a:cs typeface="Times New Roman"/>
+              </a:defRPr>
             </a:lvl6pPr>
             <a:lvl7pPr marL="2743200" indent="0">
               <a:buNone/>
-              <a:defRPr sz="1600" b="1"/>
+              <a:defRPr sz="1600" b="1">
+                <a:latin typeface="Times New Roman"/>
+                <a:ea typeface="DFKai-SB"/>
+                <a:cs typeface="Times New Roman"/>
+              </a:defRPr>
             </a:lvl7pPr>
             <a:lvl8pPr marL="3200400" indent="0">
               <a:buNone/>
-              <a:defRPr sz="1600" b="1"/>
+              <a:defRPr sz="1600" b="1">
+                <a:latin typeface="Times New Roman"/>
+                <a:ea typeface="DFKai-SB"/>
+                <a:cs typeface="Times New Roman"/>
+              </a:defRPr>
             </a:lvl8pPr>
             <a:lvl9pPr marL="3657600" indent="0">
               <a:buNone/>
-              <a:defRPr sz="1600" b="1"/>
+              <a:defRPr sz="1600" b="1">
+                <a:latin typeface="Times New Roman"/>
+                <a:ea typeface="DFKai-SB"/>
+                <a:cs typeface="Times New Roman"/>
+              </a:defRPr>
             </a:lvl9pPr>
           </a:lstStyle>
           <a:p>
             <a:pPr lvl="0"/>
             <a:r>
-              <a:rPr lang="en-US" smtClean="0"/>
+              <a:rPr lang="en-US">
+                <a:latin typeface="Times New Roman"/>
+                <a:ea typeface="DFKai-SB"/>
+                <a:cs typeface="Times New Roman"/>
+              </a:rPr>
               <a:t>Click to edit Master text styles</a:t>
             </a:r>
           </a:p>
@@ -1532,68 +1969,123 @@
           <a:bodyPr/>
           <a:lstStyle>
             <a:lvl1pPr>
-              <a:defRPr sz="2400"/>
+              <a:defRPr sz="2400">
+                <a:latin typeface="Times New Roman"/>
+                <a:ea typeface="DFKai-SB"/>
+                <a:cs typeface="Times New Roman"/>
+              </a:defRPr>
             </a:lvl1pPr>
             <a:lvl2pPr>
-              <a:defRPr sz="2000"/>
+              <a:defRPr sz="2000">
+                <a:latin typeface="Times New Roman"/>
+                <a:ea typeface="DFKai-SB"/>
+                <a:cs typeface="Times New Roman"/>
+              </a:defRPr>
             </a:lvl2pPr>
             <a:lvl3pPr>
-              <a:defRPr sz="1800"/>
+              <a:defRPr sz="1800">
+                <a:latin typeface="Times New Roman"/>
+                <a:ea typeface="DFKai-SB"/>
+                <a:cs typeface="Times New Roman"/>
+              </a:defRPr>
             </a:lvl3pPr>
             <a:lvl4pPr>
-              <a:defRPr sz="1600"/>
+              <a:defRPr sz="1600">
+                <a:latin typeface="Times New Roman"/>
+                <a:ea typeface="DFKai-SB"/>
+                <a:cs typeface="Times New Roman"/>
+              </a:defRPr>
             </a:lvl4pPr>
             <a:lvl5pPr>
-              <a:defRPr sz="1600"/>
+              <a:defRPr sz="1600">
+                <a:latin typeface="Times New Roman"/>
+                <a:ea typeface="DFKai-SB"/>
+                <a:cs typeface="Times New Roman"/>
+              </a:defRPr>
             </a:lvl5pPr>
             <a:lvl6pPr>
-              <a:defRPr sz="1600"/>
+              <a:defRPr sz="1600">
+                <a:latin typeface="Times New Roman"/>
+                <a:ea typeface="DFKai-SB"/>
+                <a:cs typeface="Times New Roman"/>
+              </a:defRPr>
             </a:lvl6pPr>
             <a:lvl7pPr>
-              <a:defRPr sz="1600"/>
+              <a:defRPr sz="1600">
+                <a:latin typeface="Times New Roman"/>
+                <a:ea typeface="DFKai-SB"/>
+                <a:cs typeface="Times New Roman"/>
+              </a:defRPr>
             </a:lvl7pPr>
             <a:lvl8pPr>
-              <a:defRPr sz="1600"/>
+              <a:defRPr sz="1600">
+                <a:latin typeface="Times New Roman"/>
+                <a:ea typeface="DFKai-SB"/>
+                <a:cs typeface="Times New Roman"/>
+              </a:defRPr>
             </a:lvl8pPr>
             <a:lvl9pPr>
-              <a:defRPr sz="1600"/>
+              <a:defRPr sz="1600">
+                <a:latin typeface="Times New Roman"/>
+                <a:ea typeface="DFKai-SB"/>
+                <a:cs typeface="Times New Roman"/>
+              </a:defRPr>
             </a:lvl9pPr>
           </a:lstStyle>
           <a:p>
             <a:pPr lvl="0"/>
             <a:r>
-              <a:rPr lang="en-US" smtClean="0"/>
+              <a:rPr lang="en-US">
+                <a:latin typeface="Times New Roman"/>
+                <a:ea typeface="DFKai-SB"/>
+                <a:cs typeface="Times New Roman"/>
+              </a:rPr>
               <a:t>Click to edit Master text styles</a:t>
             </a:r>
           </a:p>
           <a:p>
             <a:pPr lvl="1"/>
             <a:r>
-              <a:rPr lang="en-US" smtClean="0"/>
+              <a:rPr lang="en-US">
+                <a:latin typeface="Times New Roman"/>
+                <a:ea typeface="DFKai-SB"/>
+                <a:cs typeface="Times New Roman"/>
+              </a:rPr>
               <a:t>Second level</a:t>
             </a:r>
           </a:p>
           <a:p>
             <a:pPr lvl="2"/>
             <a:r>
-              <a:rPr lang="en-US" smtClean="0"/>
+              <a:rPr lang="en-US">
+                <a:latin typeface="Times New Roman"/>
+                <a:ea typeface="DFKai-SB"/>
+                <a:cs typeface="Times New Roman"/>
+              </a:rPr>
               <a:t>Third level</a:t>
             </a:r>
           </a:p>
           <a:p>
             <a:pPr lvl="3"/>
             <a:r>
-              <a:rPr lang="en-US" smtClean="0"/>
+              <a:rPr lang="en-US">
+                <a:latin typeface="Times New Roman"/>
+                <a:ea typeface="DFKai-SB"/>
+                <a:cs typeface="Times New Roman"/>
+              </a:rPr>
               <a:t>Fourth level</a:t>
             </a:r>
           </a:p>
           <a:p>
             <a:pPr lvl="4"/>
             <a:r>
-              <a:rPr lang="en-US" smtClean="0"/>
+              <a:rPr lang="en-US">
+                <a:latin typeface="Times New Roman"/>
+                <a:ea typeface="DFKai-SB"/>
+                <a:cs typeface="Times New Roman"/>
+              </a:rPr>
               <a:t>Fifth level</a:t>
             </a:r>
-            <a:endParaRPr lang="en-US"/>
           </a:p>
         </p:txBody>
       </p:sp>
@@ -1618,45 +2110,85 @@
           <a:lstStyle>
             <a:lvl1pPr marL="0" indent="0">
               <a:buNone/>
-              <a:defRPr sz="2400" b="1"/>
+              <a:defRPr sz="2400" b="1">
+                <a:latin typeface="Times New Roman"/>
+                <a:ea typeface="DFKai-SB"/>
+                <a:cs typeface="Times New Roman"/>
+              </a:defRPr>
             </a:lvl1pPr>
             <a:lvl2pPr marL="457200" indent="0">
               <a:buNone/>
-              <a:defRPr sz="2000" b="1"/>
+              <a:defRPr sz="2000" b="1">
+                <a:latin typeface="Times New Roman"/>
+                <a:ea typeface="DFKai-SB"/>
+                <a:cs typeface="Times New Roman"/>
+              </a:defRPr>
             </a:lvl2pPr>
             <a:lvl3pPr marL="914400" indent="0">
               <a:buNone/>
-              <a:defRPr sz="1800" b="1"/>
+              <a:defRPr sz="1800" b="1">
+                <a:latin typeface="Times New Roman"/>
+                <a:ea typeface="DFKai-SB"/>
+                <a:cs typeface="Times New Roman"/>
+              </a:defRPr>
             </a:lvl3pPr>
             <a:lvl4pPr marL="1371600" indent="0">
               <a:buNone/>
-              <a:defRPr sz="1600" b="1"/>
+              <a:defRPr sz="1600" b="1">
+                <a:latin typeface="Times New Roman"/>
+                <a:ea typeface="DFKai-SB"/>
+                <a:cs typeface="Times New Roman"/>
+              </a:defRPr>
             </a:lvl4pPr>
             <a:lvl5pPr marL="1828800" indent="0">
               <a:buNone/>
-              <a:defRPr sz="1600" b="1"/>
+              <a:defRPr sz="1600" b="1">
+                <a:latin typeface="Times New Roman"/>
+                <a:ea typeface="DFKai-SB"/>
+                <a:cs typeface="Times New Roman"/>
+              </a:defRPr>
             </a:lvl5pPr>
             <a:lvl6pPr marL="2286000" indent="0">
               <a:buNone/>
-              <a:defRPr sz="1600" b="1"/>
+              <a:defRPr sz="1600" b="1">
+                <a:latin typeface="Times New Roman"/>
+                <a:ea typeface="DFKai-SB"/>
+                <a:cs typeface="Times New Roman"/>
+              </a:defRPr>
             </a:lvl6pPr>
             <a:lvl7pPr marL="2743200" indent="0">
               <a:buNone/>
-              <a:defRPr sz="1600" b="1"/>
+              <a:defRPr sz="1600" b="1">
+                <a:latin typeface="Times New Roman"/>
+                <a:ea typeface="DFKai-SB"/>
+                <a:cs typeface="Times New Roman"/>
+              </a:defRPr>
             </a:lvl7pPr>
             <a:lvl8pPr marL="3200400" indent="0">
               <a:buNone/>
-              <a:defRPr sz="1600" b="1"/>
+              <a:defRPr sz="1600" b="1">
+                <a:latin typeface="Times New Roman"/>
+                <a:ea typeface="DFKai-SB"/>
+                <a:cs typeface="Times New Roman"/>
+              </a:defRPr>
             </a:lvl8pPr>
             <a:lvl9pPr marL="3657600" indent="0">
               <a:buNone/>
-              <a:defRPr sz="1600" b="1"/>
+              <a:defRPr sz="1600" b="1">
+                <a:latin typeface="Times New Roman"/>
+                <a:ea typeface="DFKai-SB"/>
+                <a:cs typeface="Times New Roman"/>
+              </a:defRPr>
             </a:lvl9pPr>
           </a:lstStyle>
           <a:p>
             <a:pPr lvl="0"/>
             <a:r>
-              <a:rPr lang="en-US" smtClean="0"/>
+              <a:rPr lang="en-US">
+                <a:latin typeface="Times New Roman"/>
+                <a:ea typeface="DFKai-SB"/>
+                <a:cs typeface="Times New Roman"/>
+              </a:rPr>
               <a:t>Click to edit Master text styles</a:t>
             </a:r>
           </a:p>
@@ -1682,68 +2214,123 @@
           <a:bodyPr/>
           <a:lstStyle>
             <a:lvl1pPr>
-              <a:defRPr sz="2400"/>
+              <a:defRPr sz="2400">
+                <a:latin typeface="Times New Roman"/>
+                <a:ea typeface="DFKai-SB"/>
+                <a:cs typeface="Times New Roman"/>
+              </a:defRPr>
             </a:lvl1pPr>
             <a:lvl2pPr>
-              <a:defRPr sz="2000"/>
+              <a:defRPr sz="2000">
+                <a:latin typeface="Times New Roman"/>
+                <a:ea typeface="DFKai-SB"/>
+                <a:cs typeface="Times New Roman"/>
+              </a:defRPr>
             </a:lvl2pPr>
             <a:lvl3pPr>
-              <a:defRPr sz="1800"/>
+              <a:defRPr sz="1800">
+                <a:latin typeface="Times New Roman"/>
+                <a:ea typeface="DFKai-SB"/>
+                <a:cs typeface="Times New Roman"/>
+              </a:defRPr>
             </a:lvl3pPr>
             <a:lvl4pPr>
-              <a:defRPr sz="1600"/>
+              <a:defRPr sz="1600">
+                <a:latin typeface="Times New Roman"/>
+                <a:ea typeface="DFKai-SB"/>
+                <a:cs typeface="Times New Roman"/>
+              </a:defRPr>
             </a:lvl4pPr>
             <a:lvl5pPr>
-              <a:defRPr sz="1600"/>
+              <a:defRPr sz="1600">
+                <a:latin typeface="Times New Roman"/>
+                <a:ea typeface="DFKai-SB"/>
+                <a:cs typeface="Times New Roman"/>
+              </a:defRPr>
             </a:lvl5pPr>
             <a:lvl6pPr>
-              <a:defRPr sz="1600"/>
+              <a:defRPr sz="1600">
+                <a:latin typeface="Times New Roman"/>
+                <a:ea typeface="DFKai-SB"/>
+                <a:cs typeface="Times New Roman"/>
+              </a:defRPr>
             </a:lvl6pPr>
             <a:lvl7pPr>
-              <a:defRPr sz="1600"/>
+              <a:defRPr sz="1600">
+                <a:latin typeface="Times New Roman"/>
+                <a:ea typeface="DFKai-SB"/>
+                <a:cs typeface="Times New Roman"/>
+              </a:defRPr>
             </a:lvl7pPr>
             <a:lvl8pPr>
-              <a:defRPr sz="1600"/>
+              <a:defRPr sz="1600">
+                <a:latin typeface="Times New Roman"/>
+                <a:ea typeface="DFKai-SB"/>
+                <a:cs typeface="Times New Roman"/>
+              </a:defRPr>
             </a:lvl8pPr>
             <a:lvl9pPr>
-              <a:defRPr sz="1600"/>
+              <a:defRPr sz="1600">
+                <a:latin typeface="Times New Roman"/>
+                <a:ea typeface="DFKai-SB"/>
+                <a:cs typeface="Times New Roman"/>
+              </a:defRPr>
             </a:lvl9pPr>
           </a:lstStyle>
           <a:p>
             <a:pPr lvl="0"/>
             <a:r>
-              <a:rPr lang="en-US" smtClean="0"/>
+              <a:rPr lang="en-US">
+                <a:latin typeface="Times New Roman"/>
+                <a:ea typeface="DFKai-SB"/>
+                <a:cs typeface="Times New Roman"/>
+              </a:rPr>
               <a:t>Click to edit Master text styles</a:t>
             </a:r>
           </a:p>
           <a:p>
             <a:pPr lvl="1"/>
             <a:r>
-              <a:rPr lang="en-US" smtClean="0"/>
+              <a:rPr lang="en-US">
+                <a:latin typeface="Times New Roman"/>
+                <a:ea typeface="DFKai-SB"/>
+                <a:cs typeface="Times New Roman"/>
+              </a:rPr>
               <a:t>Second level</a:t>
             </a:r>
           </a:p>
           <a:p>
             <a:pPr lvl="2"/>
             <a:r>
-              <a:rPr lang="en-US" smtClean="0"/>
+              <a:rPr lang="en-US">
+                <a:latin typeface="Times New Roman"/>
+                <a:ea typeface="DFKai-SB"/>
+                <a:cs typeface="Times New Roman"/>
+              </a:rPr>
               <a:t>Third level</a:t>
             </a:r>
           </a:p>
           <a:p>
             <a:pPr lvl="3"/>
             <a:r>
-              <a:rPr lang="en-US" smtClean="0"/>
+              <a:rPr lang="en-US">
+                <a:latin typeface="Times New Roman"/>
+                <a:ea typeface="DFKai-SB"/>
+                <a:cs typeface="Times New Roman"/>
+              </a:rPr>
               <a:t>Fourth level</a:t>
             </a:r>
           </a:p>
           <a:p>
             <a:pPr lvl="4"/>
             <a:r>
-              <a:rPr lang="en-US" smtClean="0"/>
+              <a:rPr lang="en-US">
+                <a:latin typeface="Times New Roman"/>
+                <a:ea typeface="DFKai-SB"/>
+                <a:cs typeface="Times New Roman"/>
+              </a:rPr>
               <a:t>Fifth level</a:t>
             </a:r>
-            <a:endParaRPr lang="en-US"/>
           </a:p>
         </p:txBody>
       </p:sp>
@@ -1763,10 +2350,18 @@
           <a:lstStyle/>
           <a:p>
             <a:fld id="{5BCAD085-E8A6-8845-BD4E-CB4CCA059FC4}" type="datetimeFigureOut">
-              <a:rPr lang="en-US" smtClean="0"/>
-              <a:t>1/27/13</a:t>
+              <a:rPr lang="en-US" smtClean="0">
+                <a:latin typeface="Times New Roman"/>
+                <a:ea typeface="DFKai-SB"/>
+                <a:cs typeface="Times New Roman"/>
+              </a:rPr>
+              <a:t>10/29/2026</a:t>
             </a:fld>
-            <a:endParaRPr lang="en-US"/>
+            <a:endParaRPr lang="en-US">
+              <a:latin typeface="Times New Roman"/>
+              <a:ea typeface="DFKai-SB"/>
+              <a:cs typeface="Times New Roman"/>
+            </a:endParaRPr>
           </a:p>
         </p:txBody>
       </p:sp>
@@ -1785,7 +2380,11 @@
           <a:bodyPr/>
           <a:lstStyle/>
           <a:p>
-            <a:endParaRPr lang="en-US"/>
+            <a:endParaRPr lang="en-US">
+              <a:latin typeface="Times New Roman"/>
+              <a:ea typeface="DFKai-SB"/>
+              <a:cs typeface="Times New Roman"/>
+            </a:endParaRPr>
           </a:p>
         </p:txBody>
       </p:sp>
@@ -1805,10 +2404,18 @@
           <a:lstStyle/>
           <a:p>
             <a:fld id="{C1FF6DA9-008F-8B48-92A6-B652298478BF}" type="slidenum">
-              <a:rPr lang="en-US" smtClean="0"/>
+              <a:rPr lang="en-US" smtClean="0">
+                <a:latin typeface="Times New Roman"/>
+                <a:ea typeface="DFKai-SB"/>
+                <a:cs typeface="Times New Roman"/>
+              </a:rPr>
               <a:t>‹#›</a:t>
             </a:fld>
-            <a:endParaRPr lang="en-US"/>
+            <a:endParaRPr lang="en-US">
+              <a:latin typeface="Times New Roman"/>
+              <a:ea typeface="DFKai-SB"/>
+              <a:cs typeface="Times New Roman"/>
+            </a:endParaRPr>
           </a:p>
         </p:txBody>
       </p:sp>
@@ -1858,10 +2465,13 @@
           <a:lstStyle/>
           <a:p>
             <a:r>
-              <a:rPr lang="en-US" smtClean="0"/>
+              <a:rPr lang="en-US">
+                <a:latin typeface="Times New Roman"/>
+                <a:ea typeface="DFKai-SB"/>
+                <a:cs typeface="Times New Roman"/>
+              </a:rPr>
               <a:t>Click to edit Master title style</a:t>
             </a:r>
-            <a:endParaRPr lang="en-US"/>
           </a:p>
         </p:txBody>
       </p:sp>
@@ -1881,10 +2491,18 @@
           <a:lstStyle/>
           <a:p>
             <a:fld id="{5BCAD085-E8A6-8845-BD4E-CB4CCA059FC4}" type="datetimeFigureOut">
-              <a:rPr lang="en-US" smtClean="0"/>
-              <a:t>1/27/13</a:t>
+              <a:rPr lang="en-US" smtClean="0">
+                <a:latin typeface="Times New Roman"/>
+                <a:ea typeface="DFKai-SB"/>
+                <a:cs typeface="Times New Roman"/>
+              </a:rPr>
+              <a:t>10/29/2026</a:t>
             </a:fld>
-            <a:endParaRPr lang="en-US"/>
+            <a:endParaRPr lang="en-US">
+              <a:latin typeface="Times New Roman"/>
+              <a:ea typeface="DFKai-SB"/>
+              <a:cs typeface="Times New Roman"/>
+            </a:endParaRPr>
           </a:p>
         </p:txBody>
       </p:sp>
@@ -1903,7 +2521,11 @@
           <a:bodyPr/>
           <a:lstStyle/>
           <a:p>
-            <a:endParaRPr lang="en-US"/>
+            <a:endParaRPr lang="en-US">
+              <a:latin typeface="Times New Roman"/>
+              <a:ea typeface="DFKai-SB"/>
+              <a:cs typeface="Times New Roman"/>
+            </a:endParaRPr>
           </a:p>
         </p:txBody>
       </p:sp>
@@ -1923,10 +2545,18 @@
           <a:lstStyle/>
           <a:p>
             <a:fld id="{C1FF6DA9-008F-8B48-92A6-B652298478BF}" type="slidenum">
-              <a:rPr lang="en-US" smtClean="0"/>
+              <a:rPr lang="en-US" smtClean="0">
+                <a:latin typeface="Times New Roman"/>
+                <a:ea typeface="DFKai-SB"/>
+                <a:cs typeface="Times New Roman"/>
+              </a:rPr>
               <a:t>‹#›</a:t>
             </a:fld>
-            <a:endParaRPr lang="en-US"/>
+            <a:endParaRPr lang="en-US">
+              <a:latin typeface="Times New Roman"/>
+              <a:ea typeface="DFKai-SB"/>
+              <a:cs typeface="Times New Roman"/>
+            </a:endParaRPr>
           </a:p>
         </p:txBody>
       </p:sp>
@@ -1976,10 +2606,18 @@
           <a:lstStyle/>
           <a:p>
             <a:fld id="{5BCAD085-E8A6-8845-BD4E-CB4CCA059FC4}" type="datetimeFigureOut">
-              <a:rPr lang="en-US" smtClean="0"/>
-              <a:t>1/27/13</a:t>
+              <a:rPr lang="en-US" smtClean="0">
+                <a:latin typeface="Times New Roman"/>
+                <a:ea typeface="DFKai-SB"/>
+                <a:cs typeface="Times New Roman"/>
+              </a:rPr>
+              <a:t>10/29/2026</a:t>
             </a:fld>
-            <a:endParaRPr lang="en-US"/>
+            <a:endParaRPr lang="en-US">
+              <a:latin typeface="Times New Roman"/>
+              <a:ea typeface="DFKai-SB"/>
+              <a:cs typeface="Times New Roman"/>
+            </a:endParaRPr>
           </a:p>
         </p:txBody>
       </p:sp>
@@ -1998,7 +2636,11 @@
           <a:bodyPr/>
           <a:lstStyle/>
           <a:p>
-            <a:endParaRPr lang="en-US"/>
+            <a:endParaRPr lang="en-US">
+              <a:latin typeface="Times New Roman"/>
+              <a:ea typeface="DFKai-SB"/>
+              <a:cs typeface="Times New Roman"/>
+            </a:endParaRPr>
           </a:p>
         </p:txBody>
       </p:sp>
@@ -2018,10 +2660,18 @@
           <a:lstStyle/>
           <a:p>
             <a:fld id="{C1FF6DA9-008F-8B48-92A6-B652298478BF}" type="slidenum">
-              <a:rPr lang="en-US" smtClean="0"/>
+              <a:rPr lang="en-US" smtClean="0">
+                <a:latin typeface="Times New Roman"/>
+                <a:ea typeface="DFKai-SB"/>
+                <a:cs typeface="Times New Roman"/>
+              </a:rPr>
               <a:t>‹#›</a:t>
             </a:fld>
-            <a:endParaRPr lang="en-US"/>
+            <a:endParaRPr lang="en-US">
+              <a:latin typeface="Times New Roman"/>
+              <a:ea typeface="DFKai-SB"/>
+              <a:cs typeface="Times New Roman"/>
+            </a:endParaRPr>
           </a:p>
         </p:txBody>
       </p:sp>
@@ -2075,15 +2725,22 @@
           <a:bodyPr anchor="b"/>
           <a:lstStyle>
             <a:lvl1pPr algn="l">
-              <a:defRPr sz="2000" b="1"/>
+              <a:defRPr sz="2000" b="1">
+                <a:latin typeface="Times New Roman"/>
+                <a:ea typeface="DFKai-SB"/>
+                <a:cs typeface="Times New Roman"/>
+              </a:defRPr>
             </a:lvl1pPr>
           </a:lstStyle>
           <a:p>
             <a:r>
-              <a:rPr lang="en-US" smtClean="0"/>
+              <a:rPr lang="en-US">
+                <a:latin typeface="Times New Roman"/>
+                <a:ea typeface="DFKai-SB"/>
+                <a:cs typeface="Times New Roman"/>
+              </a:rPr>
               <a:t>Click to edit Master title style</a:t>
             </a:r>
-            <a:endParaRPr lang="en-US"/>
           </a:p>
         </p:txBody>
       </p:sp>
@@ -2107,68 +2764,123 @@
           <a:bodyPr/>
           <a:lstStyle>
             <a:lvl1pPr>
-              <a:defRPr sz="3200"/>
+              <a:defRPr sz="3200">
+                <a:latin typeface="Times New Roman"/>
+                <a:ea typeface="DFKai-SB"/>
+                <a:cs typeface="Times New Roman"/>
+              </a:defRPr>
             </a:lvl1pPr>
             <a:lvl2pPr>
-              <a:defRPr sz="2800"/>
+              <a:defRPr sz="2800">
+                <a:latin typeface="Times New Roman"/>
+                <a:ea typeface="DFKai-SB"/>
+                <a:cs typeface="Times New Roman"/>
+              </a:defRPr>
             </a:lvl2pPr>
             <a:lvl3pPr>
-              <a:defRPr sz="2400"/>
+              <a:defRPr sz="2400">
+                <a:latin typeface="Times New Roman"/>
+                <a:ea typeface="DFKai-SB"/>
+                <a:cs typeface="Times New Roman"/>
+              </a:defRPr>
             </a:lvl3pPr>
             <a:lvl4pPr>
-              <a:defRPr sz="2000"/>
+              <a:defRPr sz="2000">
+                <a:latin typeface="Times New Roman"/>
+                <a:ea typeface="DFKai-SB"/>
+                <a:cs typeface="Times New Roman"/>
+              </a:defRPr>
             </a:lvl4pPr>
             <a:lvl5pPr>
-              <a:defRPr sz="2000"/>
+              <a:defRPr sz="2000">
+                <a:latin typeface="Times New Roman"/>
+                <a:ea typeface="DFKai-SB"/>
+                <a:cs typeface="Times New Roman"/>
+              </a:defRPr>
             </a:lvl5pPr>
             <a:lvl6pPr>
-              <a:defRPr sz="2000"/>
+              <a:defRPr sz="2000">
+                <a:latin typeface="Times New Roman"/>
+                <a:ea typeface="DFKai-SB"/>
+                <a:cs typeface="Times New Roman"/>
+              </a:defRPr>
             </a:lvl6pPr>
             <a:lvl7pPr>
-              <a:defRPr sz="2000"/>
+              <a:defRPr sz="2000">
+                <a:latin typeface="Times New Roman"/>
+                <a:ea typeface="DFKai-SB"/>
+                <a:cs typeface="Times New Roman"/>
+              </a:defRPr>
             </a:lvl7pPr>
             <a:lvl8pPr>
-              <a:defRPr sz="2000"/>
+              <a:defRPr sz="2000">
+                <a:latin typeface="Times New Roman"/>
+                <a:ea typeface="DFKai-SB"/>
+                <a:cs typeface="Times New Roman"/>
+              </a:defRPr>
             </a:lvl8pPr>
             <a:lvl9pPr>
-              <a:defRPr sz="2000"/>
+              <a:defRPr sz="2000">
+                <a:latin typeface="Times New Roman"/>
+                <a:ea typeface="DFKai-SB"/>
+                <a:cs typeface="Times New Roman"/>
+              </a:defRPr>
             </a:lvl9pPr>
           </a:lstStyle>
           <a:p>
             <a:pPr lvl="0"/>
             <a:r>
-              <a:rPr lang="en-US" smtClean="0"/>
+              <a:rPr lang="en-US">
+                <a:latin typeface="Times New Roman"/>
+                <a:ea typeface="DFKai-SB"/>
+                <a:cs typeface="Times New Roman"/>
+              </a:rPr>
               <a:t>Click to edit Master text styles</a:t>
             </a:r>
           </a:p>
           <a:p>
             <a:pPr lvl="1"/>
             <a:r>
-              <a:rPr lang="en-US" smtClean="0"/>
+              <a:rPr lang="en-US">
+                <a:latin typeface="Times New Roman"/>
+                <a:ea typeface="DFKai-SB"/>
+                <a:cs typeface="Times New Roman"/>
+              </a:rPr>
               <a:t>Second level</a:t>
             </a:r>
           </a:p>
           <a:p>
             <a:pPr lvl="2"/>
             <a:r>
-              <a:rPr lang="en-US" smtClean="0"/>
+              <a:rPr lang="en-US">
+                <a:latin typeface="Times New Roman"/>
+                <a:ea typeface="DFKai-SB"/>
+                <a:cs typeface="Times New Roman"/>
+              </a:rPr>
               <a:t>Third level</a:t>
             </a:r>
           </a:p>
           <a:p>
             <a:pPr lvl="3"/>
             <a:r>
-              <a:rPr lang="en-US" smtClean="0"/>
+              <a:rPr lang="en-US">
+                <a:latin typeface="Times New Roman"/>
+                <a:ea typeface="DFKai-SB"/>
+                <a:cs typeface="Times New Roman"/>
+              </a:rPr>
               <a:t>Fourth level</a:t>
             </a:r>
           </a:p>
           <a:p>
             <a:pPr lvl="4"/>
             <a:r>
-              <a:rPr lang="en-US" smtClean="0"/>
+              <a:rPr lang="en-US">
+                <a:latin typeface="Times New Roman"/>
+                <a:ea typeface="DFKai-SB"/>
+                <a:cs typeface="Times New Roman"/>
+              </a:rPr>
               <a:t>Fifth level</a:t>
             </a:r>
-            <a:endParaRPr lang="en-US"/>
           </a:p>
         </p:txBody>
       </p:sp>
@@ -2193,45 +2905,85 @@
           <a:lstStyle>
             <a:lvl1pPr marL="0" indent="0">
               <a:buNone/>
-              <a:defRPr sz="1400"/>
+              <a:defRPr sz="1400">
+                <a:latin typeface="Times New Roman"/>
+                <a:ea typeface="DFKai-SB"/>
+                <a:cs typeface="Times New Roman"/>
+              </a:defRPr>
             </a:lvl1pPr>
             <a:lvl2pPr marL="457200" indent="0">
               <a:buNone/>
-              <a:defRPr sz="1200"/>
+              <a:defRPr sz="1200">
+                <a:latin typeface="Times New Roman"/>
+                <a:ea typeface="DFKai-SB"/>
+                <a:cs typeface="Times New Roman"/>
+              </a:defRPr>
             </a:lvl2pPr>
             <a:lvl3pPr marL="914400" indent="0">
               <a:buNone/>
-              <a:defRPr sz="1000"/>
+              <a:defRPr sz="1000">
+                <a:latin typeface="Times New Roman"/>
+                <a:ea typeface="DFKai-SB"/>
+                <a:cs typeface="Times New Roman"/>
+              </a:defRPr>
             </a:lvl3pPr>
             <a:lvl4pPr marL="1371600" indent="0">
               <a:buNone/>
-              <a:defRPr sz="900"/>
+              <a:defRPr sz="900">
+                <a:latin typeface="Times New Roman"/>
+                <a:ea typeface="DFKai-SB"/>
+                <a:cs typeface="Times New Roman"/>
+              </a:defRPr>
             </a:lvl4pPr>
             <a:lvl5pPr marL="1828800" indent="0">
               <a:buNone/>
-              <a:defRPr sz="900"/>
+              <a:defRPr sz="900">
+                <a:latin typeface="Times New Roman"/>
+                <a:ea typeface="DFKai-SB"/>
+                <a:cs typeface="Times New Roman"/>
+              </a:defRPr>
             </a:lvl5pPr>
             <a:lvl6pPr marL="2286000" indent="0">
               <a:buNone/>
-              <a:defRPr sz="900"/>
+              <a:defRPr sz="900">
+                <a:latin typeface="Times New Roman"/>
+                <a:ea typeface="DFKai-SB"/>
+                <a:cs typeface="Times New Roman"/>
+              </a:defRPr>
             </a:lvl6pPr>
             <a:lvl7pPr marL="2743200" indent="0">
               <a:buNone/>
-              <a:defRPr sz="900"/>
+              <a:defRPr sz="900">
+                <a:latin typeface="Times New Roman"/>
+                <a:ea typeface="DFKai-SB"/>
+                <a:cs typeface="Times New Roman"/>
+              </a:defRPr>
             </a:lvl7pPr>
             <a:lvl8pPr marL="3200400" indent="0">
               <a:buNone/>
-              <a:defRPr sz="900"/>
+              <a:defRPr sz="900">
+                <a:latin typeface="Times New Roman"/>
+                <a:ea typeface="DFKai-SB"/>
+                <a:cs typeface="Times New Roman"/>
+              </a:defRPr>
             </a:lvl8pPr>
             <a:lvl9pPr marL="3657600" indent="0">
               <a:buNone/>
-              <a:defRPr sz="900"/>
+              <a:defRPr sz="900">
+                <a:latin typeface="Times New Roman"/>
+                <a:ea typeface="DFKai-SB"/>
+                <a:cs typeface="Times New Roman"/>
+              </a:defRPr>
             </a:lvl9pPr>
           </a:lstStyle>
           <a:p>
             <a:pPr lvl="0"/>
             <a:r>
-              <a:rPr lang="en-US" smtClean="0"/>
+              <a:rPr lang="en-US">
+                <a:latin typeface="Times New Roman"/>
+                <a:ea typeface="DFKai-SB"/>
+                <a:cs typeface="Times New Roman"/>
+              </a:rPr>
               <a:t>Click to edit Master text styles</a:t>
             </a:r>
           </a:p>
@@ -2253,10 +3005,18 @@
           <a:lstStyle/>
           <a:p>
             <a:fld id="{5BCAD085-E8A6-8845-BD4E-CB4CCA059FC4}" type="datetimeFigureOut">
-              <a:rPr lang="en-US" smtClean="0"/>
-              <a:t>1/27/13</a:t>
+              <a:rPr lang="en-US" smtClean="0">
+                <a:latin typeface="Times New Roman"/>
+                <a:ea typeface="DFKai-SB"/>
+                <a:cs typeface="Times New Roman"/>
+              </a:rPr>
+              <a:t>10/29/2026</a:t>
             </a:fld>
-            <a:endParaRPr lang="en-US"/>
+            <a:endParaRPr lang="en-US">
+              <a:latin typeface="Times New Roman"/>
+              <a:ea typeface="DFKai-SB"/>
+              <a:cs typeface="Times New Roman"/>
+            </a:endParaRPr>
           </a:p>
         </p:txBody>
       </p:sp>
@@ -2275,7 +3035,11 @@
           <a:bodyPr/>
           <a:lstStyle/>
           <a:p>
-            <a:endParaRPr lang="en-US"/>
+            <a:endParaRPr lang="en-US">
+              <a:latin typeface="Times New Roman"/>
+              <a:ea typeface="DFKai-SB"/>
+              <a:cs typeface="Times New Roman"/>
+            </a:endParaRPr>
           </a:p>
         </p:txBody>
       </p:sp>
@@ -2295,10 +3059,18 @@
           <a:lstStyle/>
           <a:p>
             <a:fld id="{C1FF6DA9-008F-8B48-92A6-B652298478BF}" type="slidenum">
-              <a:rPr lang="en-US" smtClean="0"/>
+              <a:rPr lang="en-US" smtClean="0">
+                <a:latin typeface="Times New Roman"/>
+                <a:ea typeface="DFKai-SB"/>
+                <a:cs typeface="Times New Roman"/>
+              </a:rPr>
               <a:t>‹#›</a:t>
             </a:fld>
-            <a:endParaRPr lang="en-US"/>
+            <a:endParaRPr lang="en-US">
+              <a:latin typeface="Times New Roman"/>
+              <a:ea typeface="DFKai-SB"/>
+              <a:cs typeface="Times New Roman"/>
+            </a:endParaRPr>
           </a:p>
         </p:txBody>
       </p:sp>
@@ -2352,15 +3124,22 @@
           <a:bodyPr anchor="b"/>
           <a:lstStyle>
             <a:lvl1pPr algn="l">
-              <a:defRPr sz="2000" b="1"/>
+              <a:defRPr sz="2000" b="1">
+                <a:latin typeface="Times New Roman"/>
+                <a:ea typeface="DFKai-SB"/>
+                <a:cs typeface="Times New Roman"/>
+              </a:defRPr>
             </a:lvl1pPr>
           </a:lstStyle>
           <a:p>
             <a:r>
-              <a:rPr lang="en-US" smtClean="0"/>
+              <a:rPr lang="en-US">
+                <a:latin typeface="Times New Roman"/>
+                <a:ea typeface="DFKai-SB"/>
+                <a:cs typeface="Times New Roman"/>
+              </a:rPr>
               <a:t>Click to edit Master title style</a:t>
             </a:r>
-            <a:endParaRPr lang="en-US"/>
           </a:p>
         </p:txBody>
       </p:sp>
@@ -2385,43 +3164,83 @@
           <a:lstStyle>
             <a:lvl1pPr marL="0" indent="0">
               <a:buNone/>
-              <a:defRPr sz="3200"/>
+              <a:defRPr sz="3200">
+                <a:latin typeface="Times New Roman"/>
+                <a:ea typeface="DFKai-SB"/>
+                <a:cs typeface="Times New Roman"/>
+              </a:defRPr>
             </a:lvl1pPr>
             <a:lvl2pPr marL="457200" indent="0">
               <a:buNone/>
-              <a:defRPr sz="2800"/>
+              <a:defRPr sz="2800">
+                <a:latin typeface="Times New Roman"/>
+                <a:ea typeface="DFKai-SB"/>
+                <a:cs typeface="Times New Roman"/>
+              </a:defRPr>
             </a:lvl2pPr>
             <a:lvl3pPr marL="914400" indent="0">
               <a:buNone/>
-              <a:defRPr sz="2400"/>
+              <a:defRPr sz="2400">
+                <a:latin typeface="Times New Roman"/>
+                <a:ea typeface="DFKai-SB"/>
+                <a:cs typeface="Times New Roman"/>
+              </a:defRPr>
             </a:lvl3pPr>
             <a:lvl4pPr marL="1371600" indent="0">
               <a:buNone/>
-              <a:defRPr sz="2000"/>
+              <a:defRPr sz="2000">
+                <a:latin typeface="Times New Roman"/>
+                <a:ea typeface="DFKai-SB"/>
+                <a:cs typeface="Times New Roman"/>
+              </a:defRPr>
             </a:lvl4pPr>
             <a:lvl5pPr marL="1828800" indent="0">
               <a:buNone/>
-              <a:defRPr sz="2000"/>
+              <a:defRPr sz="2000">
+                <a:latin typeface="Times New Roman"/>
+                <a:ea typeface="DFKai-SB"/>
+                <a:cs typeface="Times New Roman"/>
+              </a:defRPr>
             </a:lvl5pPr>
             <a:lvl6pPr marL="2286000" indent="0">
               <a:buNone/>
-              <a:defRPr sz="2000"/>
+              <a:defRPr sz="2000">
+                <a:latin typeface="Times New Roman"/>
+                <a:ea typeface="DFKai-SB"/>
+                <a:cs typeface="Times New Roman"/>
+              </a:defRPr>
             </a:lvl6pPr>
             <a:lvl7pPr marL="2743200" indent="0">
               <a:buNone/>
-              <a:defRPr sz="2000"/>
+              <a:defRPr sz="2000">
+                <a:latin typeface="Times New Roman"/>
+                <a:ea typeface="DFKai-SB"/>
+                <a:cs typeface="Times New Roman"/>
+              </a:defRPr>
             </a:lvl7pPr>
             <a:lvl8pPr marL="3200400" indent="0">
               <a:buNone/>
-              <a:defRPr sz="2000"/>
+              <a:defRPr sz="2000">
+                <a:latin typeface="Times New Roman"/>
+                <a:ea typeface="DFKai-SB"/>
+                <a:cs typeface="Times New Roman"/>
+              </a:defRPr>
             </a:lvl8pPr>
             <a:lvl9pPr marL="3657600" indent="0">
               <a:buNone/>
-              <a:defRPr sz="2000"/>
+              <a:defRPr sz="2000">
+                <a:latin typeface="Times New Roman"/>
+                <a:ea typeface="DFKai-SB"/>
+                <a:cs typeface="Times New Roman"/>
+              </a:defRPr>
             </a:lvl9pPr>
           </a:lstStyle>
           <a:p>
-            <a:endParaRPr lang="en-US"/>
+            <a:endParaRPr lang="en-US">
+              <a:latin typeface="Times New Roman"/>
+              <a:ea typeface="DFKai-SB"/>
+              <a:cs typeface="Times New Roman"/>
+            </a:endParaRPr>
           </a:p>
         </p:txBody>
       </p:sp>
@@ -2446,45 +3265,85 @@
           <a:lstStyle>
             <a:lvl1pPr marL="0" indent="0">
               <a:buNone/>
-              <a:defRPr sz="1400"/>
+              <a:defRPr sz="1400">
+                <a:latin typeface="Times New Roman"/>
+                <a:ea typeface="DFKai-SB"/>
+                <a:cs typeface="Times New Roman"/>
+              </a:defRPr>
             </a:lvl1pPr>
             <a:lvl2pPr marL="457200" indent="0">
               <a:buNone/>
-              <a:defRPr sz="1200"/>
+              <a:defRPr sz="1200">
+                <a:latin typeface="Times New Roman"/>
+                <a:ea typeface="DFKai-SB"/>
+                <a:cs typeface="Times New Roman"/>
+              </a:defRPr>
             </a:lvl2pPr>
             <a:lvl3pPr marL="914400" indent="0">
               <a:buNone/>
-              <a:defRPr sz="1000"/>
+              <a:defRPr sz="1000">
+                <a:latin typeface="Times New Roman"/>
+                <a:ea typeface="DFKai-SB"/>
+                <a:cs typeface="Times New Roman"/>
+              </a:defRPr>
             </a:lvl3pPr>
             <a:lvl4pPr marL="1371600" indent="0">
               <a:buNone/>
-              <a:defRPr sz="900"/>
+              <a:defRPr sz="900">
+                <a:latin typeface="Times New Roman"/>
+                <a:ea typeface="DFKai-SB"/>
+                <a:cs typeface="Times New Roman"/>
+              </a:defRPr>
             </a:lvl4pPr>
             <a:lvl5pPr marL="1828800" indent="0">
               <a:buNone/>
-              <a:defRPr sz="900"/>
+              <a:defRPr sz="900">
+                <a:latin typeface="Times New Roman"/>
+                <a:ea typeface="DFKai-SB"/>
+                <a:cs typeface="Times New Roman"/>
+              </a:defRPr>
             </a:lvl5pPr>
             <a:lvl6pPr marL="2286000" indent="0">
               <a:buNone/>
-              <a:defRPr sz="900"/>
+              <a:defRPr sz="900">
+                <a:latin typeface="Times New Roman"/>
+                <a:ea typeface="DFKai-SB"/>
+                <a:cs typeface="Times New Roman"/>
+              </a:defRPr>
             </a:lvl6pPr>
             <a:lvl7pPr marL="2743200" indent="0">
               <a:buNone/>
-              <a:defRPr sz="900"/>
+              <a:defRPr sz="900">
+                <a:latin typeface="Times New Roman"/>
+                <a:ea typeface="DFKai-SB"/>
+                <a:cs typeface="Times New Roman"/>
+              </a:defRPr>
             </a:lvl7pPr>
             <a:lvl8pPr marL="3200400" indent="0">
               <a:buNone/>
-              <a:defRPr sz="900"/>
+              <a:defRPr sz="900">
+                <a:latin typeface="Times New Roman"/>
+                <a:ea typeface="DFKai-SB"/>
+                <a:cs typeface="Times New Roman"/>
+              </a:defRPr>
             </a:lvl8pPr>
             <a:lvl9pPr marL="3657600" indent="0">
               <a:buNone/>
-              <a:defRPr sz="900"/>
+              <a:defRPr sz="900">
+                <a:latin typeface="Times New Roman"/>
+                <a:ea typeface="DFKai-SB"/>
+                <a:cs typeface="Times New Roman"/>
+              </a:defRPr>
             </a:lvl9pPr>
           </a:lstStyle>
           <a:p>
             <a:pPr lvl="0"/>
             <a:r>
-              <a:rPr lang="en-US" smtClean="0"/>
+              <a:rPr lang="en-US">
+                <a:latin typeface="Times New Roman"/>
+                <a:ea typeface="DFKai-SB"/>
+                <a:cs typeface="Times New Roman"/>
+              </a:rPr>
               <a:t>Click to edit Master text styles</a:t>
             </a:r>
           </a:p>
@@ -2506,10 +3365,18 @@
           <a:lstStyle/>
           <a:p>
             <a:fld id="{5BCAD085-E8A6-8845-BD4E-CB4CCA059FC4}" type="datetimeFigureOut">
-              <a:rPr lang="en-US" smtClean="0"/>
-              <a:t>1/27/13</a:t>
+              <a:rPr lang="en-US" smtClean="0">
+                <a:latin typeface="Times New Roman"/>
+                <a:ea typeface="DFKai-SB"/>
+                <a:cs typeface="Times New Roman"/>
+              </a:rPr>
+              <a:t>10/29/2026</a:t>
             </a:fld>
-            <a:endParaRPr lang="en-US"/>
+            <a:endParaRPr lang="en-US">
+              <a:latin typeface="Times New Roman"/>
+              <a:ea typeface="DFKai-SB"/>
+              <a:cs typeface="Times New Roman"/>
+            </a:endParaRPr>
           </a:p>
         </p:txBody>
       </p:sp>
@@ -2528,7 +3395,11 @@
           <a:bodyPr/>
           <a:lstStyle/>
           <a:p>
-            <a:endParaRPr lang="en-US"/>
+            <a:endParaRPr lang="en-US">
+              <a:latin typeface="Times New Roman"/>
+              <a:ea typeface="DFKai-SB"/>
+              <a:cs typeface="Times New Roman"/>
+            </a:endParaRPr>
           </a:p>
         </p:txBody>
       </p:sp>
@@ -2548,10 +3419,18 @@
           <a:lstStyle/>
           <a:p>
             <a:fld id="{C1FF6DA9-008F-8B48-92A6-B652298478BF}" type="slidenum">
-              <a:rPr lang="en-US" smtClean="0"/>
+              <a:rPr lang="en-US" smtClean="0">
+                <a:latin typeface="Times New Roman"/>
+                <a:ea typeface="DFKai-SB"/>
+                <a:cs typeface="Times New Roman"/>
+              </a:rPr>
               <a:t>‹#›</a:t>
             </a:fld>
-            <a:endParaRPr lang="en-US"/>
+            <a:endParaRPr lang="en-US">
+              <a:latin typeface="Times New Roman"/>
+              <a:ea typeface="DFKai-SB"/>
+              <a:cs typeface="Times New Roman"/>
+            </a:endParaRPr>
           </a:p>
         </p:txBody>
       </p:sp>
@@ -2616,18 +3495,13 @@
           <a:lstStyle/>
           <a:p>
             <a:r>
-              <a:rPr lang="en-US" smtClean="0">
+              <a:rPr lang="en-US">
                 <a:latin typeface="Times New Roman"/>
                 <a:ea typeface="DFKai-SB"/>
                 <a:cs typeface="Times New Roman"/>
               </a:rPr>
               <a:t>Click to edit Master title style</a:t>
             </a:r>
-            <a:endParaRPr lang="en-US">
-              <a:latin typeface="Times New Roman"/>
-              <a:ea typeface="DFKai-SB"/>
-              <a:cs typeface="Times New Roman"/>
-            </a:endParaRPr>
           </a:p>
         </p:txBody>
       </p:sp>
@@ -2658,7 +3532,7 @@
           <a:p>
             <a:pPr lvl="0"/>
             <a:r>
-              <a:rPr lang="en-US" smtClean="0">
+              <a:rPr lang="en-US">
                 <a:latin typeface="Times New Roman"/>
                 <a:ea typeface="DFKai-SB"/>
                 <a:cs typeface="Times New Roman"/>
@@ -2669,7 +3543,7 @@
           <a:p>
             <a:pPr lvl="1"/>
             <a:r>
-              <a:rPr lang="en-US" smtClean="0">
+              <a:rPr lang="en-US">
                 <a:latin typeface="Times New Roman"/>
                 <a:ea typeface="DFKai-SB"/>
                 <a:cs typeface="Times New Roman"/>
@@ -2680,7 +3554,7 @@
           <a:p>
             <a:pPr lvl="2"/>
             <a:r>
-              <a:rPr lang="en-US" smtClean="0">
+              <a:rPr lang="en-US">
                 <a:latin typeface="Times New Roman"/>
                 <a:ea typeface="DFKai-SB"/>
                 <a:cs typeface="Times New Roman"/>
@@ -2691,7 +3565,7 @@
           <a:p>
             <a:pPr lvl="3"/>
             <a:r>
-              <a:rPr lang="en-US" smtClean="0">
+              <a:rPr lang="en-US">
                 <a:latin typeface="Times New Roman"/>
                 <a:ea typeface="DFKai-SB"/>
                 <a:cs typeface="Times New Roman"/>
@@ -2702,18 +3576,13 @@
           <a:p>
             <a:pPr lvl="4"/>
             <a:r>
-              <a:rPr lang="en-US" smtClean="0">
+              <a:rPr lang="en-US">
                 <a:latin typeface="Times New Roman"/>
                 <a:ea typeface="DFKai-SB"/>
                 <a:cs typeface="Times New Roman"/>
               </a:rPr>
               <a:t>Fifth level</a:t>
             </a:r>
-            <a:endParaRPr lang="en-US">
-              <a:latin typeface="Times New Roman"/>
-              <a:ea typeface="DFKai-SB"/>
-              <a:cs typeface="Times New Roman"/>
-            </a:endParaRPr>
           </a:p>
         </p:txBody>
       </p:sp>
@@ -2759,7 +3628,7 @@
                 <a:ea typeface="DFKai-SB"/>
                 <a:cs typeface="Times New Roman"/>
               </a:rPr>
-              <a:t>1/27/13</a:t>
+              <a:t>10/29/2026</a:t>
             </a:fld>
             <a:endParaRPr lang="en-US">
               <a:latin typeface="Times New Roman"/>
@@ -2908,7 +3777,7 @@
         <a:spcBef>
           <a:spcPct val="20000"/>
         </a:spcBef>
-        <a:buFont typeface="Arial"/>
+        <a:buFont typeface="Times New Roman"/>
         <a:buChar char="•"/>
         <a:defRPr sz="3200" kern="1200">
           <a:solidFill>
@@ -2923,7 +3792,7 @@
         <a:spcBef>
           <a:spcPct val="20000"/>
         </a:spcBef>
-        <a:buFont typeface="Arial"/>
+        <a:buFont typeface="Times New Roman"/>
         <a:buChar char="–"/>
         <a:defRPr sz="2800" kern="1200">
           <a:solidFill>
@@ -2938,7 +3807,7 @@
         <a:spcBef>
           <a:spcPct val="20000"/>
         </a:spcBef>
-        <a:buFont typeface="Arial"/>
+        <a:buFont typeface="Times New Roman"/>
         <a:buChar char="•"/>
         <a:defRPr sz="2400" kern="1200">
           <a:solidFill>
@@ -2953,7 +3822,7 @@
         <a:spcBef>
           <a:spcPct val="20000"/>
         </a:spcBef>
-        <a:buFont typeface="Arial"/>
+        <a:buFont typeface="Times New Roman"/>
         <a:buChar char="–"/>
         <a:defRPr sz="2000" kern="1200">
           <a:solidFill>
@@ -2968,7 +3837,7 @@
         <a:spcBef>
           <a:spcPct val="20000"/>
         </a:spcBef>
-        <a:buFont typeface="Arial"/>
+        <a:buFont typeface="Times New Roman"/>
         <a:buChar char="»"/>
         <a:defRPr sz="2000" kern="1200">
           <a:solidFill>
@@ -2983,7 +3852,7 @@
         <a:spcBef>
           <a:spcPct val="20000"/>
         </a:spcBef>
-        <a:buFont typeface="Arial"/>
+        <a:buFont typeface="Times New Roman"/>
         <a:buChar char="•"/>
         <a:defRPr sz="2000" kern="1200">
           <a:solidFill>
@@ -2998,7 +3867,7 @@
         <a:spcBef>
           <a:spcPct val="20000"/>
         </a:spcBef>
-        <a:buFont typeface="Arial"/>
+        <a:buFont typeface="Times New Roman"/>
         <a:buChar char="•"/>
         <a:defRPr sz="2000" kern="1200">
           <a:solidFill>
@@ -3013,7 +3882,7 @@
         <a:spcBef>
           <a:spcPct val="20000"/>
         </a:spcBef>
-        <a:buFont typeface="Arial"/>
+        <a:buFont typeface="Times New Roman"/>
         <a:buChar char="•"/>
         <a:defRPr sz="2000" kern="1200">
           <a:solidFill>
@@ -3028,7 +3897,7 @@
         <a:spcBef>
           <a:spcPct val="20000"/>
         </a:spcBef>
-        <a:buFont typeface="Arial"/>
+        <a:buFont typeface="Times New Roman"/>
         <a:buChar char="•"/>
         <a:defRPr sz="2000" kern="1200">
           <a:solidFill>
@@ -3144,7 +4013,7 @@
 </file>
 
 <file path=ppt/slides/slide1.xml><?xml version="1.0" encoding="utf-8"?>
-<p:sld xmlns:a="http://schemas.openxmlformats.org/drawingml/2006/main" xmlns:p="http://schemas.openxmlformats.org/presentationml/2006/main" xmlns:r="http://schemas.openxmlformats.org/officeDocument/2006/relationships">
+<p:sld xmlns:a="http://schemas.openxmlformats.org/drawingml/2006/main" xmlns:r="http://schemas.openxmlformats.org/officeDocument/2006/relationships" xmlns:p="http://schemas.openxmlformats.org/presentationml/2006/main">
   <p:cSld>
     <p:bg>
       <p:bgPr>
@@ -3160,12 +4029,23 @@
         <p:cNvGrpSpPr/>
         <p:nvPr/>
       </p:nvGrpSpPr>
-      <p:grpSpPr/>
+      <p:grpSpPr>
+        <a:xfrm>
+          <a:off x="0" y="0"/>
+          <a:ext cx="0" cy="0"/>
+          <a:chOff x="0" y="0"/>
+          <a:chExt cx="0" cy="0"/>
+        </a:xfrm>
+      </p:grpSpPr>
       <p:sp>
         <p:nvSpPr>
           <p:cNvPr id="2" name="TextBox 1"/>
           <p:cNvSpPr txBox="1"/>
-          <p:nvPr/>
+          <p:nvPr>
+            <p:custDataLst>
+              <p:tags r:id="rId1"/>
+            </p:custDataLst>
+          </p:nvPr>
         </p:nvSpPr>
         <p:spPr>
           <a:xfrm>
@@ -3178,7 +4058,7 @@
           <a:noFill/>
         </p:spPr>
         <p:txBody>
-          <a:bodyPr wrap="none" lIns="0" rIns="0" tIns="0" bIns="0" anchor="ctr">
+          <a:bodyPr wrap="none" lIns="0" tIns="0" rIns="0" bIns="0" anchor="ctr">
             <a:spAutoFit/>
           </a:bodyPr>
           <a:lstStyle/>
@@ -3212,7 +4092,11 @@
         <p:nvSpPr>
           <p:cNvPr id="3" name="TextBox 2"/>
           <p:cNvSpPr txBox="1"/>
-          <p:nvPr/>
+          <p:nvPr>
+            <p:custDataLst>
+              <p:tags r:id="rId2"/>
+            </p:custDataLst>
+          </p:nvPr>
         </p:nvSpPr>
         <p:spPr>
           <a:xfrm>
@@ -3225,7 +4109,7 @@
           <a:noFill/>
         </p:spPr>
         <p:txBody>
-          <a:bodyPr wrap="none" lIns="0" rIns="0" tIns="0" bIns="0" anchor="ctr">
+          <a:bodyPr wrap="none" lIns="0" tIns="0" rIns="0" bIns="0" anchor="ctr">
             <a:spAutoFit/>
           </a:bodyPr>
           <a:lstStyle/>
@@ -3298,43 +4182,21 @@
                 <a:ea typeface="DFKai-SB"/>
                 <a:cs typeface="Times New Roman"/>
               </a:rPr>
-              <a:t>之</a:t>
-            </a:r>
-            <a:r>
-              <a:rPr sz="3200" b="0">
-                <a:solidFill>
-                  <a:srgbClr val="092B42"/>
-                </a:solidFill>
-                <a:latin typeface="Times New Roman"/>
-                <a:ea typeface="DFKai-SB"/>
-                <a:cs typeface="Times New Roman"/>
-              </a:rPr>
-              <a:t> AI </a:t>
-            </a:r>
-            <a:r>
-              <a:rPr sz="3200" b="0">
-                <a:solidFill>
-                  <a:srgbClr val="092B42"/>
-                </a:solidFill>
-                <a:latin typeface="Times New Roman"/>
-                <a:ea typeface="DFKai-SB"/>
-                <a:cs typeface="Times New Roman"/>
-              </a:rPr>
-              <a:t>資安框架</a:t>
+              <a:t>之 AI 資安框架</a:t>
             </a:r>
           </a:p>
         </p:txBody>
       </p:sp>
       <p:pic>
         <p:nvPicPr>
-          <p:cNvPr id="4" name="Picture 3" descr="icon-4.png"/>
+          <p:cNvPr id="4" name="Picture 3" descr="flat-icon-4.png"/>
           <p:cNvPicPr>
             <a:picLocks noChangeAspect="1"/>
           </p:cNvPicPr>
           <p:nvPr/>
         </p:nvPicPr>
         <p:blipFill>
-          <a:blip r:embed="rId2"/>
+          <a:blip r:embed="rId69"/>
           <a:stretch>
             <a:fillRect/>
           </a:stretch>
@@ -3353,7 +4215,11 @@
         <p:nvSpPr>
           <p:cNvPr id="5" name="TextBox 4"/>
           <p:cNvSpPr txBox="1"/>
-          <p:nvPr/>
+          <p:nvPr>
+            <p:custDataLst>
+              <p:tags r:id="rId3"/>
+            </p:custDataLst>
+          </p:nvPr>
         </p:nvSpPr>
         <p:spPr>
           <a:xfrm>
@@ -3366,7 +4232,7 @@
           <a:noFill/>
         </p:spPr>
         <p:txBody>
-          <a:bodyPr wrap="none" lIns="0" rIns="0" tIns="0" bIns="0" anchor="ctr">
+          <a:bodyPr wrap="none" lIns="0" tIns="0" rIns="0" bIns="0" anchor="ctr">
             <a:spAutoFit/>
           </a:bodyPr>
           <a:lstStyle/>
@@ -3434,14 +4300,14 @@
       </p:cxnSp>
       <p:pic>
         <p:nvPicPr>
-          <p:cNvPr id="7" name="Picture 6" descr="icon-1.png"/>
+          <p:cNvPr id="7" name="Picture 6" descr="flat-icon-1.png"/>
           <p:cNvPicPr>
             <a:picLocks noChangeAspect="1"/>
           </p:cNvPicPr>
           <p:nvPr/>
         </p:nvPicPr>
         <p:blipFill>
-          <a:blip r:embed="rId3"/>
+          <a:blip r:embed="rId70"/>
           <a:stretch>
             <a:fillRect/>
           </a:stretch>
@@ -3460,7 +4326,11 @@
         <p:nvSpPr>
           <p:cNvPr id="8" name="TextBox 7"/>
           <p:cNvSpPr txBox="1"/>
-          <p:nvPr/>
+          <p:nvPr>
+            <p:custDataLst>
+              <p:tags r:id="rId4"/>
+            </p:custDataLst>
+          </p:nvPr>
         </p:nvSpPr>
         <p:spPr>
           <a:xfrm>
@@ -3473,7 +4343,7 @@
           <a:noFill/>
         </p:spPr>
         <p:txBody>
-          <a:bodyPr wrap="none" lIns="0" rIns="0" tIns="0" bIns="0" anchor="ctr">
+          <a:bodyPr wrap="none" lIns="0" tIns="0" rIns="0" bIns="0" anchor="ctr">
             <a:spAutoFit/>
           </a:bodyPr>
           <a:lstStyle/>
@@ -3507,7 +4377,11 @@
         <p:nvSpPr>
           <p:cNvPr id="9" name="TextBox 8"/>
           <p:cNvSpPr txBox="1"/>
-          <p:nvPr/>
+          <p:nvPr>
+            <p:custDataLst>
+              <p:tags r:id="rId5"/>
+            </p:custDataLst>
+          </p:nvPr>
         </p:nvSpPr>
         <p:spPr>
           <a:xfrm>
@@ -3520,7 +4394,7 @@
           <a:noFill/>
         </p:spPr>
         <p:txBody>
-          <a:bodyPr wrap="none" lIns="0" rIns="0" tIns="0" bIns="0" anchor="ctr">
+          <a:bodyPr wrap="none" lIns="0" tIns="0" rIns="0" bIns="0" anchor="ctr">
             <a:spAutoFit/>
           </a:bodyPr>
           <a:lstStyle/>
@@ -3554,7 +4428,11 @@
         <p:nvSpPr>
           <p:cNvPr id="10" name="TextBox 9"/>
           <p:cNvSpPr txBox="1"/>
-          <p:nvPr/>
+          <p:nvPr>
+            <p:custDataLst>
+              <p:tags r:id="rId6"/>
+            </p:custDataLst>
+          </p:nvPr>
         </p:nvSpPr>
         <p:spPr>
           <a:xfrm>
@@ -3567,7 +4445,7 @@
           <a:noFill/>
         </p:spPr>
         <p:txBody>
-          <a:bodyPr wrap="none" lIns="0" rIns="0" tIns="0" bIns="0" anchor="ctr">
+          <a:bodyPr wrap="none" lIns="0" tIns="0" rIns="0" bIns="0" anchor="ctr">
             <a:spAutoFit/>
           </a:bodyPr>
           <a:lstStyle/>
@@ -3601,7 +4479,11 @@
         <p:nvSpPr>
           <p:cNvPr id="11" name="TextBox 10"/>
           <p:cNvSpPr txBox="1"/>
-          <p:nvPr/>
+          <p:nvPr>
+            <p:custDataLst>
+              <p:tags r:id="rId7"/>
+            </p:custDataLst>
+          </p:nvPr>
         </p:nvSpPr>
         <p:spPr>
           <a:xfrm>
@@ -3614,7 +4496,7 @@
           <a:noFill/>
         </p:spPr>
         <p:txBody>
-          <a:bodyPr wrap="none" lIns="0" rIns="0" tIns="0" bIns="0" anchor="ctr">
+          <a:bodyPr wrap="none" lIns="0" tIns="0" rIns="0" bIns="0" anchor="ctr">
             <a:spAutoFit/>
           </a:bodyPr>
           <a:lstStyle/>
@@ -3687,6 +4569,11 @@
           <a:lstStyle/>
           <a:p>
             <a:pPr algn="ctr"/>
+            <a:endParaRPr>
+              <a:latin typeface="Times New Roman"/>
+              <a:ea typeface="DFKai-SB"/>
+              <a:cs typeface="Times New Roman"/>
+            </a:endParaRPr>
           </a:p>
         </p:txBody>
       </p:sp>
@@ -3731,6 +4618,11 @@
           <a:lstStyle/>
           <a:p>
             <a:pPr algn="ctr"/>
+            <a:endParaRPr>
+              <a:latin typeface="Times New Roman"/>
+              <a:ea typeface="DFKai-SB"/>
+              <a:cs typeface="Times New Roman"/>
+            </a:endParaRPr>
           </a:p>
         </p:txBody>
       </p:sp>
@@ -3738,7 +4630,11 @@
         <p:nvSpPr>
           <p:cNvPr id="14" name="TextBox 13"/>
           <p:cNvSpPr txBox="1"/>
-          <p:nvPr/>
+          <p:nvPr>
+            <p:custDataLst>
+              <p:tags r:id="rId8"/>
+            </p:custDataLst>
+          </p:nvPr>
         </p:nvSpPr>
         <p:spPr>
           <a:xfrm>
@@ -3751,7 +4647,7 @@
           <a:noFill/>
         </p:spPr>
         <p:txBody>
-          <a:bodyPr wrap="none" lIns="0" rIns="0" tIns="0" bIns="0" anchor="ctr">
+          <a:bodyPr wrap="none" lIns="0" tIns="0" rIns="0" bIns="0" anchor="ctr">
             <a:spAutoFit/>
           </a:bodyPr>
           <a:lstStyle/>
@@ -3785,7 +4681,11 @@
         <p:nvSpPr>
           <p:cNvPr id="15" name="TextBox 14"/>
           <p:cNvSpPr txBox="1"/>
-          <p:nvPr/>
+          <p:nvPr>
+            <p:custDataLst>
+              <p:tags r:id="rId9"/>
+            </p:custDataLst>
+          </p:nvPr>
         </p:nvSpPr>
         <p:spPr>
           <a:xfrm>
@@ -3798,7 +4698,7 @@
           <a:noFill/>
         </p:spPr>
         <p:txBody>
-          <a:bodyPr wrap="none" lIns="0" rIns="0" tIns="0" bIns="0" anchor="ctr">
+          <a:bodyPr wrap="none" lIns="0" tIns="0" rIns="0" bIns="0" anchor="ctr">
             <a:spAutoFit/>
           </a:bodyPr>
           <a:lstStyle/>
@@ -3817,7 +4717,7 @@
             <a:r>
               <a:rPr sz="2300" b="0">
                 <a:solidFill>
-                  <a:srgbClr val="171C1D"/>
+                  <a:srgbClr val="105186"/>
                 </a:solidFill>
                 <a:latin typeface="Times New Roman"/>
                 <a:ea typeface="DFKai-SB"/>
@@ -3830,14 +4730,14 @@
       </p:sp>
       <p:pic>
         <p:nvPicPr>
-          <p:cNvPr id="16" name="Picture 15" descr="icon-2.png"/>
+          <p:cNvPr id="16" name="Picture 15" descr="flat-icon-2.png"/>
           <p:cNvPicPr>
             <a:picLocks noChangeAspect="1"/>
           </p:cNvPicPr>
           <p:nvPr/>
         </p:nvPicPr>
         <p:blipFill>
-          <a:blip r:embed="rId4"/>
+          <a:blip r:embed="rId71"/>
           <a:stretch>
             <a:fillRect/>
           </a:stretch>
@@ -3856,7 +4756,11 @@
         <p:nvSpPr>
           <p:cNvPr id="17" name="TextBox 16"/>
           <p:cNvSpPr txBox="1"/>
-          <p:nvPr/>
+          <p:nvPr>
+            <p:custDataLst>
+              <p:tags r:id="rId10"/>
+            </p:custDataLst>
+          </p:nvPr>
         </p:nvSpPr>
         <p:spPr>
           <a:xfrm>
@@ -3869,7 +4773,7 @@
           <a:noFill/>
         </p:spPr>
         <p:txBody>
-          <a:bodyPr wrap="none" lIns="0" rIns="0" tIns="0" bIns="0" anchor="ctr">
+          <a:bodyPr wrap="none" lIns="0" tIns="0" rIns="0" bIns="0" anchor="ctr">
             <a:spAutoFit/>
           </a:bodyPr>
           <a:lstStyle/>
@@ -3894,18 +4798,7 @@
                 <a:ea typeface="DFKai-SB"/>
                 <a:cs typeface="Times New Roman"/>
               </a:rPr>
-              <a:t>CTBM</a:t>
-            </a:r>
-            <a:r>
-              <a:rPr sz="1800" b="0">
-                <a:solidFill>
-                  <a:srgbClr val="171C1D"/>
-                </a:solidFill>
-                <a:latin typeface="Times New Roman"/>
-                <a:ea typeface="DFKai-SB"/>
-                <a:cs typeface="Times New Roman"/>
-              </a:rPr>
-              <a:t>：內容、時間差、方向</a:t>
+              <a:t>CTBM：內容、時間差、方向</a:t>
             </a:r>
           </a:p>
         </p:txBody>
@@ -3914,7 +4807,11 @@
         <p:nvSpPr>
           <p:cNvPr id="18" name="TextBox 17"/>
           <p:cNvSpPr txBox="1"/>
-          <p:nvPr/>
+          <p:nvPr>
+            <p:custDataLst>
+              <p:tags r:id="rId11"/>
+            </p:custDataLst>
+          </p:nvPr>
         </p:nvSpPr>
         <p:spPr>
           <a:xfrm>
@@ -3927,7 +4824,7 @@
           <a:noFill/>
         </p:spPr>
         <p:txBody>
-          <a:bodyPr wrap="none" lIns="0" rIns="0" tIns="0" bIns="0" anchor="ctr">
+          <a:bodyPr wrap="none" lIns="0" tIns="0" rIns="0" bIns="0" anchor="ctr">
             <a:spAutoFit/>
           </a:bodyPr>
           <a:lstStyle/>
@@ -3952,18 +4849,7 @@
                 <a:ea typeface="DFKai-SB"/>
                 <a:cs typeface="Times New Roman"/>
               </a:rPr>
-              <a:t>PBCNN</a:t>
-            </a:r>
-            <a:r>
-              <a:rPr sz="1800" b="0">
-                <a:solidFill>
-                  <a:srgbClr val="171C1D"/>
-                </a:solidFill>
-                <a:latin typeface="Times New Roman"/>
-                <a:ea typeface="DFKai-SB"/>
-                <a:cs typeface="Times New Roman"/>
-              </a:rPr>
-              <a:t>：短窗位元組模式</a:t>
+              <a:t>PBCNN：短窗位元組模式</a:t>
             </a:r>
           </a:p>
         </p:txBody>
@@ -3976,7 +4862,7 @@
         </p:nvSpPr>
         <p:spPr>
           <a:xfrm>
-            <a:off x="3528000" y="7200000"/>
+            <a:off x="3564000" y="7200000"/>
             <a:ext cx="648000" cy="252000"/>
           </a:xfrm>
           <a:prstGeom prst="downArrow">
@@ -4009,6 +4895,11 @@
           <a:lstStyle/>
           <a:p>
             <a:pPr algn="ctr"/>
+            <a:endParaRPr>
+              <a:latin typeface="Times New Roman"/>
+              <a:ea typeface="DFKai-SB"/>
+              <a:cs typeface="Times New Roman"/>
+            </a:endParaRPr>
           </a:p>
         </p:txBody>
       </p:sp>
@@ -4016,11 +4907,15 @@
         <p:nvSpPr>
           <p:cNvPr id="20" name="TextBox 19"/>
           <p:cNvSpPr txBox="1"/>
-          <p:nvPr/>
-        </p:nvSpPr>
-        <p:spPr>
-          <a:xfrm>
-            <a:off x="864000" y="7596000"/>
+          <p:nvPr>
+            <p:custDataLst>
+              <p:tags r:id="rId12"/>
+            </p:custDataLst>
+          </p:nvPr>
+        </p:nvSpPr>
+        <p:spPr>
+          <a:xfrm>
+            <a:off x="832250" y="7596000"/>
             <a:ext cx="6048000" cy="360000"/>
           </a:xfrm>
           <a:prstGeom prst="rect">
@@ -4029,7 +4924,7 @@
           <a:noFill/>
         </p:spPr>
         <p:txBody>
-          <a:bodyPr wrap="none" lIns="0" rIns="0" tIns="0" bIns="0" anchor="ctr">
+          <a:bodyPr wrap="none" lIns="0" tIns="0" rIns="0" bIns="0" anchor="ctr">
             <a:spAutoFit/>
           </a:bodyPr>
           <a:lstStyle/>
@@ -4054,29 +4949,7 @@
                 <a:ea typeface="DFKai-SB"/>
                 <a:cs typeface="Times New Roman"/>
               </a:rPr>
-              <a:t>校準＋</a:t>
-            </a:r>
-            <a:r>
-              <a:rPr sz="2000" b="1">
-                <a:solidFill>
-                  <a:srgbClr val="105186"/>
-                </a:solidFill>
-                <a:latin typeface="Times New Roman"/>
-                <a:ea typeface="DFKai-SB"/>
-                <a:cs typeface="Times New Roman"/>
-              </a:rPr>
-              <a:t>OOF Gate </a:t>
-            </a:r>
-            <a:r>
-              <a:rPr sz="2000" b="1">
-                <a:solidFill>
-                  <a:srgbClr val="105186"/>
-                </a:solidFill>
-                <a:latin typeface="Times New Roman"/>
-                <a:ea typeface="DFKai-SB"/>
-                <a:cs typeface="Times New Roman"/>
-              </a:rPr>
-              <a:t>融合</a:t>
+              <a:t>校準＋OOF Gate 融合</a:t>
             </a:r>
           </a:p>
         </p:txBody>
@@ -4085,11 +4958,15 @@
         <p:nvSpPr>
           <p:cNvPr id="21" name="TextBox 20"/>
           <p:cNvSpPr txBox="1"/>
-          <p:nvPr/>
-        </p:nvSpPr>
-        <p:spPr>
-          <a:xfrm>
-            <a:off x="864000" y="8100000"/>
+          <p:nvPr>
+            <p:custDataLst>
+              <p:tags r:id="rId13"/>
+            </p:custDataLst>
+          </p:nvPr>
+        </p:nvSpPr>
+        <p:spPr>
+          <a:xfrm>
+            <a:off x="840187" y="8100000"/>
             <a:ext cx="6048000" cy="252000"/>
           </a:xfrm>
           <a:prstGeom prst="rect">
@@ -4098,7 +4975,7 @@
           <a:noFill/>
         </p:spPr>
         <p:txBody>
-          <a:bodyPr wrap="none" lIns="0" rIns="0" tIns="0" bIns="0" anchor="ctr">
+          <a:bodyPr wrap="none" lIns="0" tIns="0" rIns="0" bIns="0" anchor="ctr">
             <a:spAutoFit/>
           </a:bodyPr>
           <a:lstStyle/>
@@ -4123,51 +5000,7 @@
                 <a:ea typeface="DFKai-SB"/>
                 <a:cs typeface="Times New Roman"/>
               </a:rPr>
-              <a:t>輸出：</a:t>
-            </a:r>
-            <a:r>
-              <a:rPr sz="1500" b="0">
-                <a:solidFill>
-                  <a:srgbClr val="53666E"/>
-                </a:solidFill>
-                <a:latin typeface="Times New Roman"/>
-                <a:ea typeface="DFKai-SB"/>
-                <a:cs typeface="Times New Roman"/>
-              </a:rPr>
-              <a:t>17</a:t>
-            </a:r>
-            <a:r>
-              <a:rPr sz="1500" b="0">
-                <a:solidFill>
-                  <a:srgbClr val="53666E"/>
-                </a:solidFill>
-                <a:latin typeface="Times New Roman"/>
-                <a:ea typeface="DFKai-SB"/>
-                <a:cs typeface="Times New Roman"/>
-              </a:rPr>
-              <a:t>類判定、信心與</a:t>
-            </a:r>
-            <a:r>
-              <a:rPr sz="1500" b="0">
-                <a:solidFill>
-                  <a:srgbClr val="53666E"/>
-                </a:solidFill>
-                <a:latin typeface="Times New Roman"/>
-                <a:ea typeface="DFKai-SB"/>
-                <a:cs typeface="Times New Roman"/>
-              </a:rPr>
-              <a:t>512</a:t>
-            </a:r>
-            <a:r>
-              <a:rPr sz="1500" b="0">
-                <a:solidFill>
-                  <a:srgbClr val="53666E"/>
-                </a:solidFill>
-                <a:latin typeface="Times New Roman"/>
-                <a:ea typeface="DFKai-SB"/>
-                <a:cs typeface="Times New Roman"/>
-              </a:rPr>
-              <a:t>維表徵</a:t>
+              <a:t>輸出：17類判定、信心與512維表徵</a:t>
             </a:r>
           </a:p>
         </p:txBody>
@@ -4215,6 +5048,11 @@
           <a:lstStyle/>
           <a:p>
             <a:pPr algn="ctr"/>
+            <a:endParaRPr>
+              <a:latin typeface="Times New Roman"/>
+              <a:ea typeface="DFKai-SB"/>
+              <a:cs typeface="Times New Roman"/>
+            </a:endParaRPr>
           </a:p>
         </p:txBody>
       </p:sp>
@@ -4259,6 +5097,11 @@
           <a:lstStyle/>
           <a:p>
             <a:pPr algn="ctr"/>
+            <a:endParaRPr>
+              <a:latin typeface="Times New Roman"/>
+              <a:ea typeface="DFKai-SB"/>
+              <a:cs typeface="Times New Roman"/>
+            </a:endParaRPr>
           </a:p>
         </p:txBody>
       </p:sp>
@@ -4266,7 +5109,11 @@
         <p:nvSpPr>
           <p:cNvPr id="24" name="TextBox 23"/>
           <p:cNvSpPr txBox="1"/>
-          <p:nvPr/>
+          <p:nvPr>
+            <p:custDataLst>
+              <p:tags r:id="rId14"/>
+            </p:custDataLst>
+          </p:nvPr>
         </p:nvSpPr>
         <p:spPr>
           <a:xfrm>
@@ -4279,7 +5126,7 @@
           <a:noFill/>
         </p:spPr>
         <p:txBody>
-          <a:bodyPr wrap="none" lIns="0" rIns="0" tIns="0" bIns="0" anchor="ctr">
+          <a:bodyPr wrap="none" lIns="0" tIns="0" rIns="0" bIns="0" anchor="ctr">
             <a:spAutoFit/>
           </a:bodyPr>
           <a:lstStyle/>
@@ -4313,7 +5160,11 @@
         <p:nvSpPr>
           <p:cNvPr id="25" name="TextBox 24"/>
           <p:cNvSpPr txBox="1"/>
-          <p:nvPr/>
+          <p:nvPr>
+            <p:custDataLst>
+              <p:tags r:id="rId15"/>
+            </p:custDataLst>
+          </p:nvPr>
         </p:nvSpPr>
         <p:spPr>
           <a:xfrm>
@@ -4326,7 +5177,7 @@
           <a:noFill/>
         </p:spPr>
         <p:txBody>
-          <a:bodyPr wrap="none" lIns="0" rIns="0" tIns="0" bIns="0" anchor="ctr">
+          <a:bodyPr wrap="none" lIns="0" tIns="0" rIns="0" bIns="0" anchor="ctr">
             <a:spAutoFit/>
           </a:bodyPr>
           <a:lstStyle/>
@@ -4345,7 +5196,7 @@
             <a:r>
               <a:rPr sz="2300" b="0">
                 <a:solidFill>
-                  <a:srgbClr val="171C1D"/>
+                  <a:srgbClr val="105186"/>
                 </a:solidFill>
                 <a:latin typeface="Times New Roman"/>
                 <a:ea typeface="DFKai-SB"/>
@@ -4358,14 +5209,14 @@
       </p:sp>
       <p:pic>
         <p:nvPicPr>
-          <p:cNvPr id="26" name="Picture 25" descr="icon-3.png"/>
+          <p:cNvPr id="26" name="Picture 25" descr="flat-icon-3.png"/>
           <p:cNvPicPr>
             <a:picLocks noChangeAspect="1"/>
           </p:cNvPicPr>
           <p:nvPr/>
         </p:nvPicPr>
         <p:blipFill>
-          <a:blip r:embed="rId5"/>
+          <a:blip r:embed="rId72"/>
           <a:stretch>
             <a:fillRect/>
           </a:stretch>
@@ -4384,7 +5235,11 @@
         <p:nvSpPr>
           <p:cNvPr id="27" name="TextBox 26"/>
           <p:cNvSpPr txBox="1"/>
-          <p:nvPr/>
+          <p:nvPr>
+            <p:custDataLst>
+              <p:tags r:id="rId16"/>
+            </p:custDataLst>
+          </p:nvPr>
         </p:nvSpPr>
         <p:spPr>
           <a:xfrm>
@@ -4397,7 +5252,7 @@
           <a:noFill/>
         </p:spPr>
         <p:txBody>
-          <a:bodyPr wrap="none" lIns="0" rIns="0" tIns="0" bIns="0" anchor="ctr">
+          <a:bodyPr wrap="none" lIns="0" tIns="0" rIns="0" bIns="0" anchor="ctr">
             <a:spAutoFit/>
           </a:bodyPr>
           <a:lstStyle/>
@@ -4422,40 +5277,7 @@
                 <a:ea typeface="DFKai-SB"/>
                 <a:cs typeface="Times New Roman"/>
               </a:rPr>
-              <a:t>512</a:t>
-            </a:r>
-            <a:r>
-              <a:rPr sz="2000" b="0">
-                <a:solidFill>
-                  <a:srgbClr val="171C1D"/>
-                </a:solidFill>
-                <a:latin typeface="Times New Roman"/>
-                <a:ea typeface="DFKai-SB"/>
-                <a:cs typeface="Times New Roman"/>
-              </a:rPr>
-              <a:t>維表徵＋</a:t>
-            </a:r>
-            <a:r>
-              <a:rPr sz="2000" b="0">
-                <a:solidFill>
-                  <a:srgbClr val="171C1D"/>
-                </a:solidFill>
-                <a:latin typeface="Times New Roman"/>
-                <a:ea typeface="DFKai-SB"/>
-                <a:cs typeface="Times New Roman"/>
-              </a:rPr>
-              <a:t>17</a:t>
-            </a:r>
-            <a:r>
-              <a:rPr sz="2000" b="0">
-                <a:solidFill>
-                  <a:srgbClr val="171C1D"/>
-                </a:solidFill>
-                <a:latin typeface="Times New Roman"/>
-                <a:ea typeface="DFKai-SB"/>
-                <a:cs typeface="Times New Roman"/>
-              </a:rPr>
-              <a:t>維機率</a:t>
+              <a:t>512維表徵＋17維機率</a:t>
             </a:r>
           </a:p>
         </p:txBody>
@@ -4464,7 +5286,11 @@
         <p:nvSpPr>
           <p:cNvPr id="28" name="TextBox 27"/>
           <p:cNvSpPr txBox="1"/>
-          <p:nvPr/>
+          <p:nvPr>
+            <p:custDataLst>
+              <p:tags r:id="rId17"/>
+            </p:custDataLst>
+          </p:nvPr>
         </p:nvSpPr>
         <p:spPr>
           <a:xfrm>
@@ -4477,7 +5303,7 @@
           <a:noFill/>
         </p:spPr>
         <p:txBody>
-          <a:bodyPr wrap="none" lIns="0" rIns="0" tIns="0" bIns="0" anchor="ctr">
+          <a:bodyPr wrap="none" lIns="0" tIns="0" rIns="0" bIns="0" anchor="ctr">
             <a:spAutoFit/>
           </a:bodyPr>
           <a:lstStyle/>
@@ -4502,40 +5328,7 @@
                 <a:ea typeface="DFKai-SB"/>
                 <a:cs typeface="Times New Roman"/>
               </a:rPr>
-              <a:t>529</a:t>
-            </a:r>
-            <a:r>
-              <a:rPr sz="1800" b="0">
-                <a:solidFill>
-                  <a:srgbClr val="171C1D"/>
-                </a:solidFill>
-                <a:latin typeface="Times New Roman"/>
-                <a:ea typeface="DFKai-SB"/>
-                <a:cs typeface="Times New Roman"/>
-              </a:rPr>
-              <a:t>維任務向量，</a:t>
-            </a:r>
-            <a:r>
-              <a:rPr sz="1800" b="0">
-                <a:solidFill>
-                  <a:srgbClr val="171C1D"/>
-                </a:solidFill>
-                <a:latin typeface="Times New Roman"/>
-                <a:ea typeface="DFKai-SB"/>
-                <a:cs typeface="Times New Roman"/>
-              </a:rPr>
-              <a:t>L2</a:t>
-            </a:r>
-            <a:r>
-              <a:rPr sz="1800" b="0">
-                <a:solidFill>
-                  <a:srgbClr val="171C1D"/>
-                </a:solidFill>
-                <a:latin typeface="Times New Roman"/>
-                <a:ea typeface="DFKai-SB"/>
-                <a:cs typeface="Times New Roman"/>
-              </a:rPr>
-              <a:t>正規化</a:t>
+              <a:t>529維任務向量，L2正規化</a:t>
             </a:r>
           </a:p>
         </p:txBody>
@@ -4548,7 +5341,7 @@
         </p:nvSpPr>
         <p:spPr>
           <a:xfrm>
-            <a:off x="10872000" y="7200000"/>
+            <a:off x="10908000" y="7200000"/>
             <a:ext cx="648000" cy="252000"/>
           </a:xfrm>
           <a:prstGeom prst="downArrow">
@@ -4581,6 +5374,11 @@
           <a:lstStyle/>
           <a:p>
             <a:pPr algn="ctr"/>
+            <a:endParaRPr>
+              <a:latin typeface="Times New Roman"/>
+              <a:ea typeface="DFKai-SB"/>
+              <a:cs typeface="Times New Roman"/>
+            </a:endParaRPr>
           </a:p>
         </p:txBody>
       </p:sp>
@@ -4588,11 +5386,15 @@
         <p:nvSpPr>
           <p:cNvPr id="30" name="TextBox 29"/>
           <p:cNvSpPr txBox="1"/>
-          <p:nvPr/>
-        </p:nvSpPr>
-        <p:spPr>
-          <a:xfrm>
-            <a:off x="8208000" y="7596000"/>
+          <p:nvPr>
+            <p:custDataLst>
+              <p:tags r:id="rId18"/>
+            </p:custDataLst>
+          </p:nvPr>
+        </p:nvSpPr>
+        <p:spPr>
+          <a:xfrm>
+            <a:off x="8176249" y="7596000"/>
             <a:ext cx="6048000" cy="360000"/>
           </a:xfrm>
           <a:prstGeom prst="rect">
@@ -4601,7 +5403,7 @@
           <a:noFill/>
         </p:spPr>
         <p:txBody>
-          <a:bodyPr wrap="none" lIns="0" rIns="0" tIns="0" bIns="0" anchor="ctr">
+          <a:bodyPr wrap="none" lIns="0" tIns="0" rIns="0" bIns="0" anchor="ctr">
             <a:spAutoFit/>
           </a:bodyPr>
           <a:lstStyle/>
@@ -4626,18 +5428,7 @@
                 <a:ea typeface="DFKai-SB"/>
                 <a:cs typeface="Times New Roman"/>
               </a:rPr>
-              <a:t>Top-5 </a:t>
-            </a:r>
-            <a:r>
-              <a:rPr sz="2000" b="1">
-                <a:solidFill>
-                  <a:srgbClr val="105186"/>
-                </a:solidFill>
-                <a:latin typeface="Times New Roman"/>
-                <a:ea typeface="DFKai-SB"/>
-                <a:cs typeface="Times New Roman"/>
-              </a:rPr>
-              <a:t>訓練案例證據</a:t>
+              <a:t>Top-5 訓練案例證據</a:t>
             </a:r>
           </a:p>
         </p:txBody>
@@ -4646,11 +5437,15 @@
         <p:nvSpPr>
           <p:cNvPr id="31" name="TextBox 30"/>
           <p:cNvSpPr txBox="1"/>
-          <p:nvPr/>
-        </p:nvSpPr>
-        <p:spPr>
-          <a:xfrm>
-            <a:off x="8208000" y="8100000"/>
+          <p:nvPr>
+            <p:custDataLst>
+              <p:tags r:id="rId19"/>
+            </p:custDataLst>
+          </p:nvPr>
+        </p:nvSpPr>
+        <p:spPr>
+          <a:xfrm>
+            <a:off x="8184187" y="8100000"/>
             <a:ext cx="6048000" cy="252000"/>
           </a:xfrm>
           <a:prstGeom prst="rect">
@@ -4659,7 +5454,7 @@
           <a:noFill/>
         </p:spPr>
         <p:txBody>
-          <a:bodyPr wrap="none" lIns="0" rIns="0" tIns="0" bIns="0" anchor="ctr">
+          <a:bodyPr wrap="none" lIns="0" tIns="0" rIns="0" bIns="0" anchor="ctr">
             <a:spAutoFit/>
           </a:bodyPr>
           <a:lstStyle/>
@@ -4730,6 +5525,11 @@
           <a:lstStyle/>
           <a:p>
             <a:pPr algn="ctr"/>
+            <a:endParaRPr>
+              <a:latin typeface="Times New Roman"/>
+              <a:ea typeface="DFKai-SB"/>
+              <a:cs typeface="Times New Roman"/>
+            </a:endParaRPr>
           </a:p>
         </p:txBody>
       </p:sp>
@@ -4774,6 +5574,11 @@
           <a:lstStyle/>
           <a:p>
             <a:pPr algn="ctr"/>
+            <a:endParaRPr>
+              <a:latin typeface="Times New Roman"/>
+              <a:ea typeface="DFKai-SB"/>
+              <a:cs typeface="Times New Roman"/>
+            </a:endParaRPr>
           </a:p>
         </p:txBody>
       </p:sp>
@@ -4820,6 +5625,11 @@
           <a:lstStyle/>
           <a:p>
             <a:pPr algn="ctr"/>
+            <a:endParaRPr>
+              <a:latin typeface="Times New Roman"/>
+              <a:ea typeface="DFKai-SB"/>
+              <a:cs typeface="Times New Roman"/>
+            </a:endParaRPr>
           </a:p>
         </p:txBody>
       </p:sp>
@@ -4864,6 +5674,11 @@
           <a:lstStyle/>
           <a:p>
             <a:pPr algn="ctr"/>
+            <a:endParaRPr>
+              <a:latin typeface="Times New Roman"/>
+              <a:ea typeface="DFKai-SB"/>
+              <a:cs typeface="Times New Roman"/>
+            </a:endParaRPr>
           </a:p>
         </p:txBody>
       </p:sp>
@@ -4871,7 +5686,11 @@
         <p:nvSpPr>
           <p:cNvPr id="36" name="TextBox 35"/>
           <p:cNvSpPr txBox="1"/>
-          <p:nvPr/>
+          <p:nvPr>
+            <p:custDataLst>
+              <p:tags r:id="rId20"/>
+            </p:custDataLst>
+          </p:nvPr>
         </p:nvSpPr>
         <p:spPr>
           <a:xfrm>
@@ -4884,7 +5703,7 @@
           <a:noFill/>
         </p:spPr>
         <p:txBody>
-          <a:bodyPr wrap="none" lIns="0" rIns="0" tIns="0" bIns="0" anchor="ctr">
+          <a:bodyPr wrap="none" lIns="0" tIns="0" rIns="0" bIns="0" anchor="ctr">
             <a:spAutoFit/>
           </a:bodyPr>
           <a:lstStyle/>
@@ -4918,7 +5737,11 @@
         <p:nvSpPr>
           <p:cNvPr id="37" name="TextBox 36"/>
           <p:cNvSpPr txBox="1"/>
-          <p:nvPr/>
+          <p:nvPr>
+            <p:custDataLst>
+              <p:tags r:id="rId21"/>
+            </p:custDataLst>
+          </p:nvPr>
         </p:nvSpPr>
         <p:spPr>
           <a:xfrm>
@@ -4931,7 +5754,7 @@
           <a:noFill/>
         </p:spPr>
         <p:txBody>
-          <a:bodyPr wrap="none" lIns="0" rIns="0" tIns="0" bIns="0" anchor="ctr">
+          <a:bodyPr wrap="none" lIns="0" tIns="0" rIns="0" bIns="0" anchor="ctr">
             <a:spAutoFit/>
           </a:bodyPr>
           <a:lstStyle/>
@@ -4950,35 +5773,13 @@
             <a:r>
               <a:rPr sz="2300" b="0">
                 <a:solidFill>
-                  <a:srgbClr val="171C1D"/>
+                  <a:srgbClr val="105186"/>
                 </a:solidFill>
                 <a:latin typeface="Times New Roman"/>
                 <a:ea typeface="DFKai-SB"/>
                 <a:cs typeface="Times New Roman"/>
               </a:rPr>
-              <a:t>本機</a:t>
-            </a:r>
-            <a:r>
-              <a:rPr sz="2300" b="0">
-                <a:solidFill>
-                  <a:srgbClr val="171C1D"/>
-                </a:solidFill>
-                <a:latin typeface="Times New Roman"/>
-                <a:ea typeface="DFKai-SB"/>
-                <a:cs typeface="Times New Roman"/>
-              </a:rPr>
-              <a:t>AI</a:t>
-            </a:r>
-            <a:r>
-              <a:rPr sz="2300" b="0">
-                <a:solidFill>
-                  <a:srgbClr val="171C1D"/>
-                </a:solidFill>
-                <a:latin typeface="Times New Roman"/>
-                <a:ea typeface="DFKai-SB"/>
-                <a:cs typeface="Times New Roman"/>
-              </a:rPr>
-              <a:t>證據稽核</a:t>
+              <a:t>本機AI證據稽核</a:t>
             </a:r>
           </a:p>
         </p:txBody>
@@ -5026,6 +5827,11 @@
           <a:lstStyle/>
           <a:p>
             <a:pPr algn="ctr"/>
+            <a:endParaRPr>
+              <a:latin typeface="Times New Roman"/>
+              <a:ea typeface="DFKai-SB"/>
+              <a:cs typeface="Times New Roman"/>
+            </a:endParaRPr>
           </a:p>
         </p:txBody>
       </p:sp>
@@ -5213,7 +6019,11 @@
         <p:nvSpPr>
           <p:cNvPr id="44" name="TextBox 43"/>
           <p:cNvSpPr txBox="1"/>
-          <p:nvPr/>
+          <p:nvPr>
+            <p:custDataLst>
+              <p:tags r:id="rId22"/>
+            </p:custDataLst>
+          </p:nvPr>
         </p:nvSpPr>
         <p:spPr>
           <a:xfrm>
@@ -5226,7 +6036,7 @@
           <a:noFill/>
         </p:spPr>
         <p:txBody>
-          <a:bodyPr wrap="none" lIns="0" rIns="0" tIns="0" bIns="0" anchor="ctr">
+          <a:bodyPr wrap="none" lIns="0" tIns="0" rIns="0" bIns="0" anchor="ctr">
             <a:spAutoFit/>
           </a:bodyPr>
           <a:lstStyle/>
@@ -5260,7 +6070,11 @@
         <p:nvSpPr>
           <p:cNvPr id="45" name="TextBox 44"/>
           <p:cNvSpPr txBox="1"/>
-          <p:nvPr/>
+          <p:nvPr>
+            <p:custDataLst>
+              <p:tags r:id="rId23"/>
+            </p:custDataLst>
+          </p:nvPr>
         </p:nvSpPr>
         <p:spPr>
           <a:xfrm>
@@ -5273,7 +6087,7 @@
           <a:noFill/>
         </p:spPr>
         <p:txBody>
-          <a:bodyPr wrap="none" lIns="0" rIns="0" tIns="0" bIns="0" anchor="ctr">
+          <a:bodyPr wrap="none" lIns="0" tIns="0" rIns="0" bIns="0" anchor="ctr">
             <a:spAutoFit/>
           </a:bodyPr>
           <a:lstStyle/>
@@ -5344,6 +6158,11 @@
           <a:lstStyle/>
           <a:p>
             <a:pPr algn="ctr"/>
+            <a:endParaRPr>
+              <a:latin typeface="Times New Roman"/>
+              <a:ea typeface="DFKai-SB"/>
+              <a:cs typeface="Times New Roman"/>
+            </a:endParaRPr>
           </a:p>
         </p:txBody>
       </p:sp>
@@ -5351,11 +6170,15 @@
         <p:nvSpPr>
           <p:cNvPr id="47" name="TextBox 46"/>
           <p:cNvSpPr txBox="1"/>
-          <p:nvPr/>
-        </p:nvSpPr>
-        <p:spPr>
-          <a:xfrm>
-            <a:off x="8208000" y="11088000"/>
+          <p:nvPr>
+            <p:custDataLst>
+              <p:tags r:id="rId24"/>
+            </p:custDataLst>
+          </p:nvPr>
+        </p:nvSpPr>
+        <p:spPr>
+          <a:xfrm>
+            <a:off x="8176249" y="11088000"/>
             <a:ext cx="1836000" cy="540000"/>
           </a:xfrm>
           <a:prstGeom prst="rect">
@@ -5364,7 +6187,7 @@
           <a:noFill/>
         </p:spPr>
         <p:txBody>
-          <a:bodyPr wrap="none" lIns="0" rIns="0" tIns="0" bIns="0" anchor="ctr">
+          <a:bodyPr wrap="none" lIns="0" tIns="0" rIns="0" bIns="0" anchor="ctr">
             <a:spAutoFit/>
           </a:bodyPr>
           <a:lstStyle/>
@@ -5402,7 +6225,7 @@
         </p:nvSpPr>
         <p:spPr>
           <a:xfrm>
-            <a:off x="10188000" y="11088000"/>
+            <a:off x="10314000" y="11088000"/>
             <a:ext cx="1836000" cy="540000"/>
           </a:xfrm>
           <a:prstGeom prst="rect">
@@ -5435,6 +6258,11 @@
           <a:lstStyle/>
           <a:p>
             <a:pPr algn="ctr"/>
+            <a:endParaRPr>
+              <a:latin typeface="Times New Roman"/>
+              <a:ea typeface="DFKai-SB"/>
+              <a:cs typeface="Times New Roman"/>
+            </a:endParaRPr>
           </a:p>
         </p:txBody>
       </p:sp>
@@ -5442,11 +6270,15 @@
         <p:nvSpPr>
           <p:cNvPr id="49" name="TextBox 48"/>
           <p:cNvSpPr txBox="1"/>
-          <p:nvPr/>
-        </p:nvSpPr>
-        <p:spPr>
-          <a:xfrm>
-            <a:off x="10188000" y="11088000"/>
+          <p:nvPr>
+            <p:custDataLst>
+              <p:tags r:id="rId25"/>
+            </p:custDataLst>
+          </p:nvPr>
+        </p:nvSpPr>
+        <p:spPr>
+          <a:xfrm>
+            <a:off x="10282250" y="11088000"/>
             <a:ext cx="1836000" cy="540000"/>
           </a:xfrm>
           <a:prstGeom prst="rect">
@@ -5455,7 +6287,7 @@
           <a:noFill/>
         </p:spPr>
         <p:txBody>
-          <a:bodyPr wrap="none" lIns="0" rIns="0" tIns="0" bIns="0" anchor="ctr">
+          <a:bodyPr wrap="none" lIns="0" tIns="0" rIns="0" bIns="0" anchor="ctr">
             <a:spAutoFit/>
           </a:bodyPr>
           <a:lstStyle/>
@@ -5493,7 +6325,7 @@
         </p:nvSpPr>
         <p:spPr>
           <a:xfrm>
-            <a:off x="12168000" y="11088000"/>
+            <a:off x="12420000" y="11088000"/>
             <a:ext cx="1836000" cy="540000"/>
           </a:xfrm>
           <a:prstGeom prst="rect">
@@ -5526,6 +6358,11 @@
           <a:lstStyle/>
           <a:p>
             <a:pPr algn="ctr"/>
+            <a:endParaRPr>
+              <a:latin typeface="Times New Roman"/>
+              <a:ea typeface="DFKai-SB"/>
+              <a:cs typeface="Times New Roman"/>
+            </a:endParaRPr>
           </a:p>
         </p:txBody>
       </p:sp>
@@ -5533,11 +6370,15 @@
         <p:nvSpPr>
           <p:cNvPr id="51" name="TextBox 50"/>
           <p:cNvSpPr txBox="1"/>
-          <p:nvPr/>
-        </p:nvSpPr>
-        <p:spPr>
-          <a:xfrm>
-            <a:off x="12168000" y="11088000"/>
+          <p:nvPr>
+            <p:custDataLst>
+              <p:tags r:id="rId26"/>
+            </p:custDataLst>
+          </p:nvPr>
+        </p:nvSpPr>
+        <p:spPr>
+          <a:xfrm>
+            <a:off x="12388250" y="11088000"/>
             <a:ext cx="1836000" cy="540000"/>
           </a:xfrm>
           <a:prstGeom prst="rect">
@@ -5546,7 +6387,7 @@
           <a:noFill/>
         </p:spPr>
         <p:txBody>
-          <a:bodyPr wrap="none" lIns="0" rIns="0" tIns="0" bIns="0" anchor="ctr">
+          <a:bodyPr wrap="none" lIns="0" tIns="0" rIns="0" bIns="0" anchor="ctr">
             <a:spAutoFit/>
           </a:bodyPr>
           <a:lstStyle/>
@@ -5580,11 +6421,15 @@
         <p:nvSpPr>
           <p:cNvPr id="52" name="TextBox 51"/>
           <p:cNvSpPr txBox="1"/>
-          <p:nvPr/>
-        </p:nvSpPr>
-        <p:spPr>
-          <a:xfrm>
-            <a:off x="8208000" y="11916000"/>
+          <p:nvPr>
+            <p:custDataLst>
+              <p:tags r:id="rId27"/>
+            </p:custDataLst>
+          </p:nvPr>
+        </p:nvSpPr>
+        <p:spPr>
+          <a:xfrm>
+            <a:off x="8184187" y="11916000"/>
             <a:ext cx="6048000" cy="288000"/>
           </a:xfrm>
           <a:prstGeom prst="rect">
@@ -5593,7 +6438,7 @@
           <a:noFill/>
         </p:spPr>
         <p:txBody>
-          <a:bodyPr wrap="none" lIns="0" rIns="0" tIns="0" bIns="0" anchor="ctr">
+          <a:bodyPr wrap="none" lIns="0" tIns="0" rIns="0" bIns="0" anchor="ctr">
             <a:spAutoFit/>
           </a:bodyPr>
           <a:lstStyle/>
@@ -5666,6 +6511,11 @@
           <a:lstStyle/>
           <a:p>
             <a:pPr algn="ctr"/>
+            <a:endParaRPr>
+              <a:latin typeface="Times New Roman"/>
+              <a:ea typeface="DFKai-SB"/>
+              <a:cs typeface="Times New Roman"/>
+            </a:endParaRPr>
           </a:p>
         </p:txBody>
       </p:sp>
@@ -5710,6 +6560,11 @@
           <a:lstStyle/>
           <a:p>
             <a:pPr algn="ctr"/>
+            <a:endParaRPr>
+              <a:latin typeface="Times New Roman"/>
+              <a:ea typeface="DFKai-SB"/>
+              <a:cs typeface="Times New Roman"/>
+            </a:endParaRPr>
           </a:p>
         </p:txBody>
       </p:sp>
@@ -5717,7 +6572,11 @@
         <p:nvSpPr>
           <p:cNvPr id="55" name="TextBox 54"/>
           <p:cNvSpPr txBox="1"/>
-          <p:nvPr/>
+          <p:nvPr>
+            <p:custDataLst>
+              <p:tags r:id="rId28"/>
+            </p:custDataLst>
+          </p:nvPr>
         </p:nvSpPr>
         <p:spPr>
           <a:xfrm>
@@ -5730,7 +6589,7 @@
           <a:noFill/>
         </p:spPr>
         <p:txBody>
-          <a:bodyPr wrap="none" lIns="0" rIns="0" tIns="0" bIns="0" anchor="ctr">
+          <a:bodyPr wrap="none" lIns="0" tIns="0" rIns="0" bIns="0" anchor="ctr">
             <a:spAutoFit/>
           </a:bodyPr>
           <a:lstStyle/>
@@ -5764,7 +6623,11 @@
         <p:nvSpPr>
           <p:cNvPr id="56" name="TextBox 55"/>
           <p:cNvSpPr txBox="1"/>
-          <p:nvPr/>
+          <p:nvPr>
+            <p:custDataLst>
+              <p:tags r:id="rId29"/>
+            </p:custDataLst>
+          </p:nvPr>
         </p:nvSpPr>
         <p:spPr>
           <a:xfrm>
@@ -5777,7 +6640,7 @@
           <a:noFill/>
         </p:spPr>
         <p:txBody>
-          <a:bodyPr wrap="none" lIns="0" rIns="0" tIns="0" bIns="0" anchor="ctr">
+          <a:bodyPr wrap="none" lIns="0" tIns="0" rIns="0" bIns="0" anchor="ctr">
             <a:spAutoFit/>
           </a:bodyPr>
           <a:lstStyle/>
@@ -5796,7 +6659,7 @@
             <a:r>
               <a:rPr sz="2300" b="0">
                 <a:solidFill>
-                  <a:srgbClr val="171C1D"/>
+                  <a:srgbClr val="105186"/>
                 </a:solidFill>
                 <a:latin typeface="Times New Roman"/>
                 <a:ea typeface="DFKai-SB"/>
@@ -5809,14 +6672,14 @@
       </p:sp>
       <p:pic>
         <p:nvPicPr>
-          <p:cNvPr id="57" name="Picture 56" descr="icon-4.png"/>
+          <p:cNvPr id="57" name="Picture 56" descr="flat-icon-4.png"/>
           <p:cNvPicPr>
             <a:picLocks noChangeAspect="1"/>
           </p:cNvPicPr>
           <p:nvPr/>
         </p:nvPicPr>
         <p:blipFill>
-          <a:blip r:embed="rId2"/>
+          <a:blip r:embed="rId69"/>
           <a:stretch>
             <a:fillRect/>
           </a:stretch>
@@ -5835,7 +6698,11 @@
         <p:nvSpPr>
           <p:cNvPr id="58" name="TextBox 57"/>
           <p:cNvSpPr txBox="1"/>
-          <p:nvPr/>
+          <p:nvPr>
+            <p:custDataLst>
+              <p:tags r:id="rId30"/>
+            </p:custDataLst>
+          </p:nvPr>
         </p:nvSpPr>
         <p:spPr>
           <a:xfrm>
@@ -5848,7 +6715,7 @@
           <a:noFill/>
         </p:spPr>
         <p:txBody>
-          <a:bodyPr wrap="none" lIns="0" rIns="0" tIns="0" bIns="0" anchor="ctr">
+          <a:bodyPr wrap="none" lIns="0" tIns="0" rIns="0" bIns="0" anchor="ctr">
             <a:spAutoFit/>
           </a:bodyPr>
           <a:lstStyle/>
@@ -5882,7 +6749,11 @@
         <p:nvSpPr>
           <p:cNvPr id="59" name="TextBox 58"/>
           <p:cNvSpPr txBox="1"/>
-          <p:nvPr/>
+          <p:nvPr>
+            <p:custDataLst>
+              <p:tags r:id="rId31"/>
+            </p:custDataLst>
+          </p:nvPr>
         </p:nvSpPr>
         <p:spPr>
           <a:xfrm>
@@ -5895,7 +6766,7 @@
           <a:noFill/>
         </p:spPr>
         <p:txBody>
-          <a:bodyPr wrap="none" lIns="0" rIns="0" tIns="0" bIns="0" anchor="ctr">
+          <a:bodyPr wrap="none" lIns="0" tIns="0" rIns="0" bIns="0" anchor="ctr">
             <a:spAutoFit/>
           </a:bodyPr>
           <a:lstStyle/>
@@ -5929,11 +6800,15 @@
         <p:nvSpPr>
           <p:cNvPr id="60" name="TextBox 59"/>
           <p:cNvSpPr txBox="1"/>
-          <p:nvPr/>
-        </p:nvSpPr>
-        <p:spPr>
-          <a:xfrm>
-            <a:off x="864000" y="11088000"/>
+          <p:nvPr>
+            <p:custDataLst>
+              <p:tags r:id="rId32"/>
+            </p:custDataLst>
+          </p:nvPr>
+        </p:nvSpPr>
+        <p:spPr>
+          <a:xfrm>
+            <a:off x="830662" y="11088000"/>
             <a:ext cx="1584000" cy="540000"/>
           </a:xfrm>
           <a:prstGeom prst="rect">
@@ -5942,7 +6817,7 @@
           <a:noFill/>
         </p:spPr>
         <p:txBody>
-          <a:bodyPr wrap="none" lIns="0" rIns="0" tIns="0" bIns="0" anchor="ctr">
+          <a:bodyPr wrap="none" lIns="0" tIns="0" rIns="0" bIns="0" anchor="ctr">
             <a:spAutoFit/>
           </a:bodyPr>
           <a:lstStyle/>
@@ -6013,6 +6888,11 @@
           <a:lstStyle/>
           <a:p>
             <a:pPr algn="ctr"/>
+            <a:endParaRPr>
+              <a:latin typeface="Times New Roman"/>
+              <a:ea typeface="DFKai-SB"/>
+              <a:cs typeface="Times New Roman"/>
+            </a:endParaRPr>
           </a:p>
         </p:txBody>
       </p:sp>
@@ -6020,11 +6900,15 @@
         <p:nvSpPr>
           <p:cNvPr id="62" name="TextBox 61"/>
           <p:cNvSpPr txBox="1"/>
-          <p:nvPr/>
-        </p:nvSpPr>
-        <p:spPr>
-          <a:xfrm>
-            <a:off x="2880000" y="11088000"/>
+          <p:nvPr>
+            <p:custDataLst>
+              <p:tags r:id="rId33"/>
+            </p:custDataLst>
+          </p:nvPr>
+        </p:nvSpPr>
+        <p:spPr>
+          <a:xfrm>
+            <a:off x="3062663" y="11088000"/>
             <a:ext cx="1584000" cy="540000"/>
           </a:xfrm>
           <a:prstGeom prst="rect">
@@ -6033,7 +6917,7 @@
           <a:noFill/>
         </p:spPr>
         <p:txBody>
-          <a:bodyPr wrap="none" lIns="0" rIns="0" tIns="0" bIns="0" anchor="ctr">
+          <a:bodyPr wrap="none" lIns="0" tIns="0" rIns="0" bIns="0" anchor="ctr">
             <a:spAutoFit/>
           </a:bodyPr>
           <a:lstStyle/>
@@ -6071,7 +6955,7 @@
         </p:nvSpPr>
         <p:spPr>
           <a:xfrm>
-            <a:off x="4500000" y="11232000"/>
+            <a:off x="4716000" y="11232000"/>
             <a:ext cx="324000" cy="180000"/>
           </a:xfrm>
           <a:prstGeom prst="rightArrow">
@@ -6104,6 +6988,11 @@
           <a:lstStyle/>
           <a:p>
             <a:pPr algn="ctr"/>
+            <a:endParaRPr>
+              <a:latin typeface="Times New Roman"/>
+              <a:ea typeface="DFKai-SB"/>
+              <a:cs typeface="Times New Roman"/>
+            </a:endParaRPr>
           </a:p>
         </p:txBody>
       </p:sp>
@@ -6111,11 +7000,15 @@
         <p:nvSpPr>
           <p:cNvPr id="64" name="TextBox 63"/>
           <p:cNvSpPr txBox="1"/>
-          <p:nvPr/>
-        </p:nvSpPr>
-        <p:spPr>
-          <a:xfrm>
-            <a:off x="4896000" y="11088000"/>
+          <p:nvPr>
+            <p:custDataLst>
+              <p:tags r:id="rId34"/>
+            </p:custDataLst>
+          </p:nvPr>
+        </p:nvSpPr>
+        <p:spPr>
+          <a:xfrm>
+            <a:off x="5294662" y="11088000"/>
             <a:ext cx="1584000" cy="540000"/>
           </a:xfrm>
           <a:prstGeom prst="rect">
@@ -6124,7 +7017,7 @@
           <a:noFill/>
         </p:spPr>
         <p:txBody>
-          <a:bodyPr wrap="none" lIns="0" rIns="0" tIns="0" bIns="0" anchor="ctr">
+          <a:bodyPr wrap="none" lIns="0" tIns="0" rIns="0" bIns="0" anchor="ctr">
             <a:spAutoFit/>
           </a:bodyPr>
           <a:lstStyle/>
@@ -6158,11 +7051,15 @@
         <p:nvSpPr>
           <p:cNvPr id="65" name="TextBox 64"/>
           <p:cNvSpPr txBox="1"/>
-          <p:nvPr/>
-        </p:nvSpPr>
-        <p:spPr>
-          <a:xfrm>
-            <a:off x="864000" y="11916000"/>
+          <p:nvPr>
+            <p:custDataLst>
+              <p:tags r:id="rId35"/>
+            </p:custDataLst>
+          </p:nvPr>
+        </p:nvSpPr>
+        <p:spPr>
+          <a:xfrm>
+            <a:off x="840187" y="11916000"/>
             <a:ext cx="6048000" cy="288000"/>
           </a:xfrm>
           <a:prstGeom prst="rect">
@@ -6171,7 +7068,7 @@
           <a:noFill/>
         </p:spPr>
         <p:txBody>
-          <a:bodyPr wrap="none" lIns="0" rIns="0" tIns="0" bIns="0" anchor="ctr">
+          <a:bodyPr wrap="none" lIns="0" tIns="0" rIns="0" bIns="0" anchor="ctr">
             <a:spAutoFit/>
           </a:bodyPr>
           <a:lstStyle/>
@@ -6242,6 +7139,11 @@
           <a:lstStyle/>
           <a:p>
             <a:pPr algn="ctr"/>
+            <a:endParaRPr>
+              <a:latin typeface="Times New Roman"/>
+              <a:ea typeface="DFKai-SB"/>
+              <a:cs typeface="Times New Roman"/>
+            </a:endParaRPr>
           </a:p>
         </p:txBody>
       </p:sp>
@@ -6286,6 +7188,11 @@
           <a:lstStyle/>
           <a:p>
             <a:pPr algn="ctr"/>
+            <a:endParaRPr>
+              <a:latin typeface="Times New Roman"/>
+              <a:ea typeface="DFKai-SB"/>
+              <a:cs typeface="Times New Roman"/>
+            </a:endParaRPr>
           </a:p>
         </p:txBody>
       </p:sp>
@@ -6293,11 +7200,15 @@
         <p:nvSpPr>
           <p:cNvPr id="68" name="TextBox 67"/>
           <p:cNvSpPr txBox="1"/>
-          <p:nvPr/>
-        </p:nvSpPr>
-        <p:spPr>
-          <a:xfrm>
-            <a:off x="720000" y="12636000"/>
+          <p:nvPr>
+            <p:custDataLst>
+              <p:tags r:id="rId36"/>
+            </p:custDataLst>
+          </p:nvPr>
+        </p:nvSpPr>
+        <p:spPr>
+          <a:xfrm>
+            <a:off x="691425" y="12636000"/>
             <a:ext cx="13680000" cy="468000"/>
           </a:xfrm>
           <a:prstGeom prst="rect">
@@ -6306,7 +7217,7 @@
           <a:noFill/>
         </p:spPr>
         <p:txBody>
-          <a:bodyPr wrap="none" lIns="0" rIns="0" tIns="0" bIns="0" anchor="ctr">
+          <a:bodyPr wrap="none" lIns="0" tIns="0" rIns="0" bIns="0" anchor="ctr">
             <a:spAutoFit/>
           </a:bodyPr>
           <a:lstStyle/>
@@ -6340,7 +7251,11 @@
         <p:nvSpPr>
           <p:cNvPr id="69" name="TextBox 68"/>
           <p:cNvSpPr txBox="1"/>
-          <p:nvPr/>
+          <p:nvPr>
+            <p:custDataLst>
+              <p:tags r:id="rId37"/>
+            </p:custDataLst>
+          </p:nvPr>
         </p:nvSpPr>
         <p:spPr>
           <a:xfrm>
@@ -6353,7 +7268,7 @@
           <a:noFill/>
         </p:spPr>
         <p:txBody>
-          <a:bodyPr wrap="none" lIns="0" rIns="0" tIns="0" bIns="0" anchor="ctr">
+          <a:bodyPr wrap="none" lIns="0" tIns="0" rIns="0" bIns="0" anchor="ctr">
             <a:spAutoFit/>
           </a:bodyPr>
           <a:lstStyle/>
@@ -6387,7 +7302,11 @@
         <p:nvSpPr>
           <p:cNvPr id="70" name="TextBox 69"/>
           <p:cNvSpPr txBox="1"/>
-          <p:nvPr/>
+          <p:nvPr>
+            <p:custDataLst>
+              <p:tags r:id="rId38"/>
+            </p:custDataLst>
+          </p:nvPr>
         </p:nvSpPr>
         <p:spPr>
           <a:xfrm>
@@ -6400,7 +7319,7 @@
           <a:noFill/>
         </p:spPr>
         <p:txBody>
-          <a:bodyPr wrap="none" lIns="0" rIns="0" tIns="0" bIns="0" anchor="ctr">
+          <a:bodyPr wrap="none" lIns="0" tIns="0" rIns="0" bIns="0" anchor="ctr">
             <a:spAutoFit/>
           </a:bodyPr>
           <a:lstStyle/>
@@ -6434,7 +7353,11 @@
         <p:nvSpPr>
           <p:cNvPr id="71" name="TextBox 70"/>
           <p:cNvSpPr txBox="1"/>
-          <p:nvPr/>
+          <p:nvPr>
+            <p:custDataLst>
+              <p:tags r:id="rId39"/>
+            </p:custDataLst>
+          </p:nvPr>
         </p:nvSpPr>
         <p:spPr>
           <a:xfrm>
@@ -6447,7 +7370,7 @@
           <a:noFill/>
         </p:spPr>
         <p:txBody>
-          <a:bodyPr wrap="none" lIns="0" rIns="0" tIns="0" bIns="0" anchor="ctr">
+          <a:bodyPr wrap="none" lIns="0" tIns="0" rIns="0" bIns="0" anchor="ctr">
             <a:spAutoFit/>
           </a:bodyPr>
           <a:lstStyle/>
@@ -6481,7 +7404,11 @@
         <p:nvSpPr>
           <p:cNvPr id="72" name="TextBox 71"/>
           <p:cNvSpPr txBox="1"/>
-          <p:nvPr/>
+          <p:nvPr>
+            <p:custDataLst>
+              <p:tags r:id="rId40"/>
+            </p:custDataLst>
+          </p:nvPr>
         </p:nvSpPr>
         <p:spPr>
           <a:xfrm>
@@ -6494,7 +7421,7 @@
           <a:noFill/>
         </p:spPr>
         <p:txBody>
-          <a:bodyPr wrap="none" lIns="0" rIns="0" tIns="0" bIns="0" anchor="ctr">
+          <a:bodyPr wrap="none" lIns="0" tIns="0" rIns="0" bIns="0" anchor="ctr">
             <a:spAutoFit/>
           </a:bodyPr>
           <a:lstStyle/>
@@ -6543,29 +7470,7 @@
                 <a:ea typeface="DFKai-SB"/>
                 <a:cs typeface="Times New Roman"/>
               </a:rPr>
-              <a:t>由校準與</a:t>
-            </a:r>
-            <a:r>
-              <a:rPr sz="1600" b="0">
-                <a:solidFill>
-                  <a:srgbClr val="53666E"/>
-                </a:solidFill>
-                <a:latin typeface="Times New Roman"/>
-                <a:ea typeface="DFKai-SB"/>
-                <a:cs typeface="Times New Roman"/>
-              </a:rPr>
-              <a:t>Gate</a:t>
-            </a:r>
-            <a:r>
-              <a:rPr sz="1600" b="0">
-                <a:solidFill>
-                  <a:srgbClr val="53666E"/>
-                </a:solidFill>
-                <a:latin typeface="Times New Roman"/>
-                <a:ea typeface="DFKai-SB"/>
-                <a:cs typeface="Times New Roman"/>
-              </a:rPr>
-              <a:t>形成正式分類</a:t>
+              <a:t>由校準與Gate形成正式分類</a:t>
             </a:r>
           </a:p>
         </p:txBody>
@@ -6610,7 +7515,11 @@
         <p:nvSpPr>
           <p:cNvPr id="74" name="TextBox 73"/>
           <p:cNvSpPr txBox="1"/>
-          <p:nvPr/>
+          <p:nvPr>
+            <p:custDataLst>
+              <p:tags r:id="rId41"/>
+            </p:custDataLst>
+          </p:nvPr>
         </p:nvSpPr>
         <p:spPr>
           <a:xfrm>
@@ -6623,7 +7532,7 @@
           <a:noFill/>
         </p:spPr>
         <p:txBody>
-          <a:bodyPr wrap="none" lIns="0" rIns="0" tIns="0" bIns="0" anchor="ctr">
+          <a:bodyPr wrap="none" lIns="0" tIns="0" rIns="0" bIns="0" anchor="ctr">
             <a:spAutoFit/>
           </a:bodyPr>
           <a:lstStyle/>
@@ -6657,7 +7566,11 @@
         <p:nvSpPr>
           <p:cNvPr id="75" name="TextBox 74"/>
           <p:cNvSpPr txBox="1"/>
-          <p:nvPr/>
+          <p:nvPr>
+            <p:custDataLst>
+              <p:tags r:id="rId42"/>
+            </p:custDataLst>
+          </p:nvPr>
         </p:nvSpPr>
         <p:spPr>
           <a:xfrm>
@@ -6670,7 +7583,7 @@
           <a:noFill/>
         </p:spPr>
         <p:txBody>
-          <a:bodyPr wrap="none" lIns="0" rIns="0" tIns="0" bIns="0" anchor="ctr">
+          <a:bodyPr wrap="none" lIns="0" tIns="0" rIns="0" bIns="0" anchor="ctr">
             <a:spAutoFit/>
           </a:bodyPr>
           <a:lstStyle/>
@@ -6764,7 +7677,11 @@
         <p:nvSpPr>
           <p:cNvPr id="77" name="TextBox 76"/>
           <p:cNvSpPr txBox="1"/>
-          <p:nvPr/>
+          <p:nvPr>
+            <p:custDataLst>
+              <p:tags r:id="rId43"/>
+            </p:custDataLst>
+          </p:nvPr>
         </p:nvSpPr>
         <p:spPr>
           <a:xfrm>
@@ -6777,7 +7694,7 @@
           <a:noFill/>
         </p:spPr>
         <p:txBody>
-          <a:bodyPr wrap="none" lIns="0" rIns="0" tIns="0" bIns="0" anchor="ctr">
+          <a:bodyPr wrap="none" lIns="0" tIns="0" rIns="0" bIns="0" anchor="ctr">
             <a:spAutoFit/>
           </a:bodyPr>
           <a:lstStyle/>
@@ -6811,7 +7728,11 @@
         <p:nvSpPr>
           <p:cNvPr id="78" name="TextBox 77"/>
           <p:cNvSpPr txBox="1"/>
-          <p:nvPr/>
+          <p:nvPr>
+            <p:custDataLst>
+              <p:tags r:id="rId44"/>
+            </p:custDataLst>
+          </p:nvPr>
         </p:nvSpPr>
         <p:spPr>
           <a:xfrm>
@@ -6824,7 +7745,7 @@
           <a:noFill/>
         </p:spPr>
         <p:txBody>
-          <a:bodyPr wrap="none" lIns="0" rIns="0" tIns="0" bIns="0" anchor="ctr">
+          <a:bodyPr wrap="none" lIns="0" tIns="0" rIns="0" bIns="0" anchor="ctr">
             <a:spAutoFit/>
           </a:bodyPr>
           <a:lstStyle/>
@@ -6882,7 +7803,11 @@
         <p:nvSpPr>
           <p:cNvPr id="79" name="TextBox 78"/>
           <p:cNvSpPr txBox="1"/>
-          <p:nvPr/>
+          <p:nvPr>
+            <p:custDataLst>
+              <p:tags r:id="rId45"/>
+            </p:custDataLst>
+          </p:nvPr>
         </p:nvSpPr>
         <p:spPr>
           <a:xfrm>
@@ -6895,7 +7820,7 @@
           <a:noFill/>
         </p:spPr>
         <p:txBody>
-          <a:bodyPr wrap="none" lIns="0" rIns="0" tIns="0" bIns="0" anchor="ctr">
+          <a:bodyPr wrap="none" lIns="0" tIns="0" rIns="0" bIns="0" anchor="ctr">
             <a:spAutoFit/>
           </a:bodyPr>
           <a:lstStyle/>
@@ -6929,7 +7854,11 @@
         <p:nvSpPr>
           <p:cNvPr id="80" name="TextBox 79"/>
           <p:cNvSpPr txBox="1"/>
-          <p:nvPr/>
+          <p:nvPr>
+            <p:custDataLst>
+              <p:tags r:id="rId46"/>
+            </p:custDataLst>
+          </p:nvPr>
         </p:nvSpPr>
         <p:spPr>
           <a:xfrm>
@@ -6942,7 +7871,7 @@
           <a:noFill/>
         </p:spPr>
         <p:txBody>
-          <a:bodyPr wrap="none" lIns="0" rIns="0" tIns="0" bIns="0" anchor="ctr">
+          <a:bodyPr wrap="none" lIns="0" tIns="0" rIns="0" bIns="0" anchor="ctr">
             <a:spAutoFit/>
           </a:bodyPr>
           <a:lstStyle/>
@@ -6976,7 +7905,11 @@
         <p:nvSpPr>
           <p:cNvPr id="81" name="TextBox 80"/>
           <p:cNvSpPr txBox="1"/>
-          <p:nvPr/>
+          <p:nvPr>
+            <p:custDataLst>
+              <p:tags r:id="rId47"/>
+            </p:custDataLst>
+          </p:nvPr>
         </p:nvSpPr>
         <p:spPr>
           <a:xfrm>
@@ -6989,7 +7922,7 @@
           <a:noFill/>
         </p:spPr>
         <p:txBody>
-          <a:bodyPr wrap="none" lIns="0" rIns="0" tIns="0" bIns="0" anchor="ctr">
+          <a:bodyPr wrap="none" lIns="0" tIns="0" rIns="0" bIns="0" anchor="ctr">
             <a:spAutoFit/>
           </a:bodyPr>
           <a:lstStyle/>
@@ -7014,40 +7947,7 @@
                 <a:ea typeface="DFKai-SB"/>
                 <a:cs typeface="Times New Roman"/>
               </a:rPr>
-              <a:t>相同</a:t>
-            </a:r>
-            <a:r>
-              <a:rPr sz="1800" b="0">
-                <a:solidFill>
-                  <a:srgbClr val="171C1D"/>
-                </a:solidFill>
-                <a:latin typeface="Times New Roman"/>
-                <a:ea typeface="DFKai-SB"/>
-                <a:cs typeface="Times New Roman"/>
-              </a:rPr>
-              <a:t>18,998</a:t>
-            </a:r>
-            <a:r>
-              <a:rPr sz="1800" b="0">
-                <a:solidFill>
-                  <a:srgbClr val="171C1D"/>
-                </a:solidFill>
-                <a:latin typeface="Times New Roman"/>
-                <a:ea typeface="DFKai-SB"/>
-                <a:cs typeface="Times New Roman"/>
-              </a:rPr>
-              <a:t>筆測試的</a:t>
-            </a:r>
-            <a:r>
-              <a:rPr sz="1800" b="0">
-                <a:solidFill>
-                  <a:srgbClr val="171C1D"/>
-                </a:solidFill>
-                <a:latin typeface="Times New Roman"/>
-                <a:ea typeface="DFKai-SB"/>
-                <a:cs typeface="Times New Roman"/>
-              </a:rPr>
-              <a:t> Macro-F1</a:t>
+              <a:t>相同18,998筆測試的 Macro-F1</a:t>
             </a:r>
           </a:p>
         </p:txBody>
@@ -7056,7 +7956,11 @@
         <p:nvSpPr>
           <p:cNvPr id="82" name="TextBox 81"/>
           <p:cNvSpPr txBox="1"/>
-          <p:nvPr/>
+          <p:nvPr>
+            <p:custDataLst>
+              <p:tags r:id="rId48"/>
+            </p:custDataLst>
+          </p:nvPr>
         </p:nvSpPr>
         <p:spPr>
           <a:xfrm>
@@ -7069,7 +7973,7 @@
           <a:noFill/>
         </p:spPr>
         <p:txBody>
-          <a:bodyPr wrap="none" lIns="0" rIns="0" tIns="0" bIns="0" anchor="ctr">
+          <a:bodyPr wrap="none" lIns="0" tIns="0" rIns="0" bIns="0" anchor="ctr">
             <a:spAutoFit/>
           </a:bodyPr>
           <a:lstStyle/>
@@ -7140,6 +8044,11 @@
           <a:lstStyle/>
           <a:p>
             <a:pPr algn="ctr"/>
+            <a:endParaRPr>
+              <a:latin typeface="Times New Roman"/>
+              <a:ea typeface="DFKai-SB"/>
+              <a:cs typeface="Times New Roman"/>
+            </a:endParaRPr>
           </a:p>
         </p:txBody>
       </p:sp>
@@ -7184,6 +8093,11 @@
           <a:lstStyle/>
           <a:p>
             <a:pPr algn="ctr"/>
+            <a:endParaRPr>
+              <a:latin typeface="Times New Roman"/>
+              <a:ea typeface="DFKai-SB"/>
+              <a:cs typeface="Times New Roman"/>
+            </a:endParaRPr>
           </a:p>
         </p:txBody>
       </p:sp>
@@ -7191,11 +8105,15 @@
         <p:nvSpPr>
           <p:cNvPr id="85" name="TextBox 84"/>
           <p:cNvSpPr txBox="1"/>
-          <p:nvPr/>
-        </p:nvSpPr>
-        <p:spPr>
-          <a:xfrm>
-            <a:off x="5796000" y="17136000"/>
+          <p:nvPr>
+            <p:custDataLst>
+              <p:tags r:id="rId49"/>
+            </p:custDataLst>
+          </p:nvPr>
+        </p:nvSpPr>
+        <p:spPr>
+          <a:xfrm>
+            <a:off x="5729975" y="17136000"/>
             <a:ext cx="1404000" cy="360000"/>
           </a:xfrm>
           <a:prstGeom prst="rect">
@@ -7204,7 +8122,7 @@
           <a:noFill/>
         </p:spPr>
         <p:txBody>
-          <a:bodyPr wrap="none" lIns="0" rIns="0" tIns="0" bIns="0" anchor="ctr">
+          <a:bodyPr wrap="none" lIns="0" tIns="0" rIns="0" bIns="0" anchor="ctr">
             <a:spAutoFit/>
           </a:bodyPr>
           <a:lstStyle/>
@@ -7238,7 +8156,11 @@
         <p:nvSpPr>
           <p:cNvPr id="86" name="TextBox 85"/>
           <p:cNvSpPr txBox="1"/>
-          <p:nvPr/>
+          <p:nvPr>
+            <p:custDataLst>
+              <p:tags r:id="rId50"/>
+            </p:custDataLst>
+          </p:nvPr>
         </p:nvSpPr>
         <p:spPr>
           <a:xfrm>
@@ -7251,7 +8173,7 @@
           <a:noFill/>
         </p:spPr>
         <p:txBody>
-          <a:bodyPr wrap="none" lIns="0" rIns="0" tIns="0" bIns="0" anchor="ctr">
+          <a:bodyPr wrap="none" lIns="0" tIns="0" rIns="0" bIns="0" anchor="ctr">
             <a:spAutoFit/>
           </a:bodyPr>
           <a:lstStyle/>
@@ -7322,6 +8244,11 @@
           <a:lstStyle/>
           <a:p>
             <a:pPr algn="ctr"/>
+            <a:endParaRPr>
+              <a:latin typeface="Times New Roman"/>
+              <a:ea typeface="DFKai-SB"/>
+              <a:cs typeface="Times New Roman"/>
+            </a:endParaRPr>
           </a:p>
         </p:txBody>
       </p:sp>
@@ -7366,6 +8293,11 @@
           <a:lstStyle/>
           <a:p>
             <a:pPr algn="ctr"/>
+            <a:endParaRPr>
+              <a:latin typeface="Times New Roman"/>
+              <a:ea typeface="DFKai-SB"/>
+              <a:cs typeface="Times New Roman"/>
+            </a:endParaRPr>
           </a:p>
         </p:txBody>
       </p:sp>
@@ -7373,11 +8305,15 @@
         <p:nvSpPr>
           <p:cNvPr id="89" name="TextBox 88"/>
           <p:cNvSpPr txBox="1"/>
-          <p:nvPr/>
-        </p:nvSpPr>
-        <p:spPr>
-          <a:xfrm>
-            <a:off x="5796000" y="17748000"/>
+          <p:nvPr>
+            <p:custDataLst>
+              <p:tags r:id="rId51"/>
+            </p:custDataLst>
+          </p:nvPr>
+        </p:nvSpPr>
+        <p:spPr>
+          <a:xfrm>
+            <a:off x="5729975" y="17748000"/>
             <a:ext cx="1404000" cy="360000"/>
           </a:xfrm>
           <a:prstGeom prst="rect">
@@ -7386,7 +8322,7 @@
           <a:noFill/>
         </p:spPr>
         <p:txBody>
-          <a:bodyPr wrap="none" lIns="0" rIns="0" tIns="0" bIns="0" anchor="ctr">
+          <a:bodyPr wrap="none" lIns="0" tIns="0" rIns="0" bIns="0" anchor="ctr">
             <a:spAutoFit/>
           </a:bodyPr>
           <a:lstStyle/>
@@ -7420,7 +8356,11 @@
         <p:nvSpPr>
           <p:cNvPr id="90" name="TextBox 89"/>
           <p:cNvSpPr txBox="1"/>
-          <p:nvPr/>
+          <p:nvPr>
+            <p:custDataLst>
+              <p:tags r:id="rId52"/>
+            </p:custDataLst>
+          </p:nvPr>
         </p:nvSpPr>
         <p:spPr>
           <a:xfrm>
@@ -7433,7 +8373,7 @@
           <a:noFill/>
         </p:spPr>
         <p:txBody>
-          <a:bodyPr wrap="none" lIns="0" rIns="0" tIns="0" bIns="0" anchor="ctr">
+          <a:bodyPr wrap="none" lIns="0" tIns="0" rIns="0" bIns="0" anchor="ctr">
             <a:spAutoFit/>
           </a:bodyPr>
           <a:lstStyle/>
@@ -7504,6 +8444,11 @@
           <a:lstStyle/>
           <a:p>
             <a:pPr algn="ctr"/>
+            <a:endParaRPr>
+              <a:latin typeface="Times New Roman"/>
+              <a:ea typeface="DFKai-SB"/>
+              <a:cs typeface="Times New Roman"/>
+            </a:endParaRPr>
           </a:p>
         </p:txBody>
       </p:sp>
@@ -7548,6 +8493,11 @@
           <a:lstStyle/>
           <a:p>
             <a:pPr algn="ctr"/>
+            <a:endParaRPr>
+              <a:latin typeface="Times New Roman"/>
+              <a:ea typeface="DFKai-SB"/>
+              <a:cs typeface="Times New Roman"/>
+            </a:endParaRPr>
           </a:p>
         </p:txBody>
       </p:sp>
@@ -7555,11 +8505,15 @@
         <p:nvSpPr>
           <p:cNvPr id="93" name="TextBox 92"/>
           <p:cNvSpPr txBox="1"/>
-          <p:nvPr/>
-        </p:nvSpPr>
-        <p:spPr>
-          <a:xfrm>
-            <a:off x="5796000" y="18360000"/>
+          <p:nvPr>
+            <p:custDataLst>
+              <p:tags r:id="rId53"/>
+            </p:custDataLst>
+          </p:nvPr>
+        </p:nvSpPr>
+        <p:spPr>
+          <a:xfrm>
+            <a:off x="5729975" y="18360000"/>
             <a:ext cx="1404000" cy="360000"/>
           </a:xfrm>
           <a:prstGeom prst="rect">
@@ -7568,7 +8522,7 @@
           <a:noFill/>
         </p:spPr>
         <p:txBody>
-          <a:bodyPr wrap="none" lIns="0" rIns="0" tIns="0" bIns="0" anchor="ctr">
+          <a:bodyPr wrap="none" lIns="0" tIns="0" rIns="0" bIns="0" anchor="ctr">
             <a:spAutoFit/>
           </a:bodyPr>
           <a:lstStyle/>
@@ -7602,7 +8556,11 @@
         <p:nvSpPr>
           <p:cNvPr id="94" name="TextBox 93"/>
           <p:cNvSpPr txBox="1"/>
-          <p:nvPr/>
+          <p:nvPr>
+            <p:custDataLst>
+              <p:tags r:id="rId54"/>
+            </p:custDataLst>
+          </p:nvPr>
         </p:nvSpPr>
         <p:spPr>
           <a:xfrm>
@@ -7615,7 +8573,7 @@
           <a:noFill/>
         </p:spPr>
         <p:txBody>
-          <a:bodyPr wrap="none" lIns="0" rIns="0" tIns="0" bIns="0" anchor="ctr">
+          <a:bodyPr wrap="none" lIns="0" tIns="0" rIns="0" bIns="0" anchor="ctr">
             <a:spAutoFit/>
           </a:bodyPr>
           <a:lstStyle/>
@@ -7640,18 +8598,7 @@
                 <a:ea typeface="DFKai-SB"/>
                 <a:cs typeface="Times New Roman"/>
               </a:rPr>
-              <a:t>融合判定</a:t>
-            </a:r>
-            <a:r>
-              <a:rPr sz="1700" b="0">
-                <a:solidFill>
-                  <a:srgbClr val="53666E"/>
-                </a:solidFill>
-                <a:latin typeface="Times New Roman"/>
-                <a:ea typeface="DFKai-SB"/>
-                <a:cs typeface="Times New Roman"/>
-              </a:rPr>
-              <a:t> Accuracy 98.08%</a:t>
+              <a:t>融合判定 Accuracy 98.08%</a:t>
             </a:r>
           </a:p>
         </p:txBody>
@@ -7660,7 +8607,11 @@
         <p:nvSpPr>
           <p:cNvPr id="95" name="TextBox 94"/>
           <p:cNvSpPr txBox="1"/>
-          <p:nvPr/>
+          <p:nvPr>
+            <p:custDataLst>
+              <p:tags r:id="rId55"/>
+            </p:custDataLst>
+          </p:nvPr>
         </p:nvSpPr>
         <p:spPr>
           <a:xfrm>
@@ -7673,7 +8624,7 @@
           <a:noFill/>
         </p:spPr>
         <p:txBody>
-          <a:bodyPr wrap="none" lIns="0" rIns="0" tIns="0" bIns="0" anchor="ctr">
+          <a:bodyPr wrap="none" lIns="0" tIns="0" rIns="0" bIns="0" anchor="ctr">
             <a:spAutoFit/>
           </a:bodyPr>
           <a:lstStyle/>
@@ -7698,29 +8649,7 @@
                 <a:ea typeface="DFKai-SB"/>
                 <a:cs typeface="Times New Roman"/>
               </a:rPr>
-              <a:t>比較使用相同資料與</a:t>
-            </a:r>
-            <a:r>
-              <a:rPr sz="1500" b="0">
-                <a:solidFill>
-                  <a:srgbClr val="53666E"/>
-                </a:solidFill>
-                <a:latin typeface="Times New Roman"/>
-                <a:ea typeface="DFKai-SB"/>
-                <a:cs typeface="Times New Roman"/>
-              </a:rPr>
-              <a:t>17</a:t>
-            </a:r>
-            <a:r>
-              <a:rPr sz="1500" b="0">
-                <a:solidFill>
-                  <a:srgbClr val="53666E"/>
-                </a:solidFill>
-                <a:latin typeface="Times New Roman"/>
-                <a:ea typeface="DFKai-SB"/>
-                <a:cs typeface="Times New Roman"/>
-              </a:rPr>
-              <a:t>類標籤</a:t>
+              <a:t>比較使用相同資料與17類標籤</a:t>
             </a:r>
           </a:p>
         </p:txBody>
@@ -7765,7 +8694,11 @@
         <p:nvSpPr>
           <p:cNvPr id="97" name="TextBox 96"/>
           <p:cNvSpPr txBox="1"/>
-          <p:nvPr/>
+          <p:nvPr>
+            <p:custDataLst>
+              <p:tags r:id="rId56"/>
+            </p:custDataLst>
+          </p:nvPr>
         </p:nvSpPr>
         <p:spPr>
           <a:xfrm>
@@ -7778,7 +8711,7 @@
           <a:noFill/>
         </p:spPr>
         <p:txBody>
-          <a:bodyPr wrap="none" lIns="0" rIns="0" tIns="0" bIns="0" anchor="ctr">
+          <a:bodyPr wrap="none" lIns="0" tIns="0" rIns="0" bIns="0" anchor="ctr">
             <a:spAutoFit/>
           </a:bodyPr>
           <a:lstStyle/>
@@ -7803,40 +8736,7 @@
                 <a:ea typeface="DFKai-SB"/>
                 <a:cs typeface="Times New Roman"/>
               </a:rPr>
-              <a:t>1,550</a:t>
-            </a:r>
-            <a:r>
-              <a:rPr sz="1800" b="0">
-                <a:solidFill>
-                  <a:srgbClr val="171C1D"/>
-                </a:solidFill>
-                <a:latin typeface="Times New Roman"/>
-                <a:ea typeface="DFKai-SB"/>
-                <a:cs typeface="Times New Roman"/>
-              </a:rPr>
-              <a:t>筆訓練案例／</a:t>
-            </a:r>
-            <a:r>
-              <a:rPr sz="1800" b="0">
-                <a:solidFill>
-                  <a:srgbClr val="171C1D"/>
-                </a:solidFill>
-                <a:latin typeface="Times New Roman"/>
-                <a:ea typeface="DFKai-SB"/>
-                <a:cs typeface="Times New Roman"/>
-              </a:rPr>
-              <a:t>463</a:t>
-            </a:r>
-            <a:r>
-              <a:rPr sz="1800" b="0">
-                <a:solidFill>
-                  <a:srgbClr val="171C1D"/>
-                </a:solidFill>
-                <a:latin typeface="Times New Roman"/>
-                <a:ea typeface="DFKai-SB"/>
-                <a:cs typeface="Times New Roman"/>
-              </a:rPr>
-              <a:t>筆查詢</a:t>
+              <a:t>1,550筆訓練案例／463筆查詢</a:t>
             </a:r>
           </a:p>
         </p:txBody>
@@ -7845,7 +8745,11 @@
         <p:nvSpPr>
           <p:cNvPr id="98" name="TextBox 97"/>
           <p:cNvSpPr txBox="1"/>
-          <p:nvPr/>
+          <p:nvPr>
+            <p:custDataLst>
+              <p:tags r:id="rId57"/>
+            </p:custDataLst>
+          </p:nvPr>
         </p:nvSpPr>
         <p:spPr>
           <a:xfrm>
@@ -7858,7 +8762,7 @@
           <a:noFill/>
         </p:spPr>
         <p:txBody>
-          <a:bodyPr wrap="none" lIns="0" rIns="0" tIns="0" bIns="0" anchor="ctr">
+          <a:bodyPr wrap="none" lIns="0" tIns="0" rIns="0" bIns="0" anchor="ctr">
             <a:spAutoFit/>
           </a:bodyPr>
           <a:lstStyle/>
@@ -7892,7 +8796,11 @@
         <p:nvSpPr>
           <p:cNvPr id="99" name="TextBox 98"/>
           <p:cNvSpPr txBox="1"/>
-          <p:nvPr/>
+          <p:nvPr>
+            <p:custDataLst>
+              <p:tags r:id="rId58"/>
+            </p:custDataLst>
+          </p:nvPr>
         </p:nvSpPr>
         <p:spPr>
           <a:xfrm>
@@ -7905,7 +8813,7 @@
           <a:noFill/>
         </p:spPr>
         <p:txBody>
-          <a:bodyPr wrap="none" lIns="0" rIns="0" tIns="0" bIns="0" anchor="ctr">
+          <a:bodyPr wrap="none" lIns="0" tIns="0" rIns="0" bIns="0" anchor="ctr">
             <a:spAutoFit/>
           </a:bodyPr>
           <a:lstStyle/>
@@ -7930,29 +8838,7 @@
                 <a:ea typeface="DFKai-SB"/>
                 <a:cs typeface="Times New Roman"/>
               </a:rPr>
-              <a:t>MRR@5  93.89%</a:t>
-            </a:r>
-            <a:r>
-              <a:rPr sz="1600" b="0">
-                <a:solidFill>
-                  <a:srgbClr val="53666E"/>
-                </a:solidFill>
-                <a:latin typeface="Times New Roman"/>
-                <a:ea typeface="DFKai-SB"/>
-                <a:cs typeface="Times New Roman"/>
-              </a:rPr>
-              <a:t>　訓練／查詢重疊</a:t>
-            </a:r>
-            <a:r>
-              <a:rPr sz="1600" b="0">
-                <a:solidFill>
-                  <a:srgbClr val="53666E"/>
-                </a:solidFill>
-                <a:latin typeface="Times New Roman"/>
-                <a:ea typeface="DFKai-SB"/>
-                <a:cs typeface="Times New Roman"/>
-              </a:rPr>
-              <a:t>0</a:t>
+              <a:t>MRR@5  93.89%　訓練／查詢重疊0</a:t>
             </a:r>
           </a:p>
         </p:txBody>
@@ -7961,11 +8847,15 @@
         <p:nvSpPr>
           <p:cNvPr id="100" name="TextBox 99"/>
           <p:cNvSpPr txBox="1"/>
-          <p:nvPr/>
-        </p:nvSpPr>
-        <p:spPr>
-          <a:xfrm>
-            <a:off x="7920000" y="18180000"/>
+          <p:nvPr>
+            <p:custDataLst>
+              <p:tags r:id="rId59"/>
+            </p:custDataLst>
+          </p:nvPr>
+        </p:nvSpPr>
+        <p:spPr>
+          <a:xfrm>
+            <a:off x="7877138" y="18180000"/>
             <a:ext cx="2088000" cy="432000"/>
           </a:xfrm>
           <a:prstGeom prst="rect">
@@ -7974,7 +8864,7 @@
           <a:noFill/>
         </p:spPr>
         <p:txBody>
-          <a:bodyPr wrap="none" lIns="0" rIns="0" tIns="0" bIns="0" anchor="ctr">
+          <a:bodyPr wrap="none" lIns="0" tIns="0" rIns="0" bIns="0" anchor="ctr">
             <a:spAutoFit/>
           </a:bodyPr>
           <a:lstStyle/>
@@ -8008,11 +8898,15 @@
         <p:nvSpPr>
           <p:cNvPr id="101" name="TextBox 100"/>
           <p:cNvSpPr txBox="1"/>
-          <p:nvPr/>
-        </p:nvSpPr>
-        <p:spPr>
-          <a:xfrm>
-            <a:off x="7920000" y="18720000"/>
+          <p:nvPr>
+            <p:custDataLst>
+              <p:tags r:id="rId60"/>
+            </p:custDataLst>
+          </p:nvPr>
+        </p:nvSpPr>
+        <p:spPr>
+          <a:xfrm>
+            <a:off x="7891425" y="18720000"/>
             <a:ext cx="2088000" cy="324000"/>
           </a:xfrm>
           <a:prstGeom prst="rect">
@@ -8021,7 +8915,7 @@
           <a:noFill/>
         </p:spPr>
         <p:txBody>
-          <a:bodyPr wrap="none" lIns="0" rIns="0" tIns="0" bIns="0" anchor="ctr">
+          <a:bodyPr wrap="none" lIns="0" tIns="0" rIns="0" bIns="0" anchor="ctr">
             <a:spAutoFit/>
           </a:bodyPr>
           <a:lstStyle/>
@@ -8055,11 +8949,15 @@
         <p:nvSpPr>
           <p:cNvPr id="102" name="TextBox 101"/>
           <p:cNvSpPr txBox="1"/>
-          <p:nvPr/>
-        </p:nvSpPr>
-        <p:spPr>
-          <a:xfrm>
-            <a:off x="10152000" y="18180000"/>
+          <p:nvPr>
+            <p:custDataLst>
+              <p:tags r:id="rId61"/>
+            </p:custDataLst>
+          </p:nvPr>
+        </p:nvSpPr>
+        <p:spPr>
+          <a:xfrm>
+            <a:off x="10145137" y="18180000"/>
             <a:ext cx="2088000" cy="432000"/>
           </a:xfrm>
           <a:prstGeom prst="rect">
@@ -8068,7 +8966,7 @@
           <a:noFill/>
         </p:spPr>
         <p:txBody>
-          <a:bodyPr wrap="none" lIns="0" rIns="0" tIns="0" bIns="0" anchor="ctr">
+          <a:bodyPr wrap="none" lIns="0" tIns="0" rIns="0" bIns="0" anchor="ctr">
             <a:spAutoFit/>
           </a:bodyPr>
           <a:lstStyle/>
@@ -8102,11 +9000,15 @@
         <p:nvSpPr>
           <p:cNvPr id="103" name="TextBox 102"/>
           <p:cNvSpPr txBox="1"/>
-          <p:nvPr/>
-        </p:nvSpPr>
-        <p:spPr>
-          <a:xfrm>
-            <a:off x="10152000" y="18720000"/>
+          <p:nvPr>
+            <p:custDataLst>
+              <p:tags r:id="rId62"/>
+            </p:custDataLst>
+          </p:nvPr>
+        </p:nvSpPr>
+        <p:spPr>
+          <a:xfrm>
+            <a:off x="10159425" y="18720000"/>
             <a:ext cx="2088000" cy="324000"/>
           </a:xfrm>
           <a:prstGeom prst="rect">
@@ -8115,7 +9017,7 @@
           <a:noFill/>
         </p:spPr>
         <p:txBody>
-          <a:bodyPr wrap="none" lIns="0" rIns="0" tIns="0" bIns="0" anchor="ctr">
+          <a:bodyPr wrap="none" lIns="0" tIns="0" rIns="0" bIns="0" anchor="ctr">
             <a:spAutoFit/>
           </a:bodyPr>
           <a:lstStyle/>
@@ -8149,11 +9051,15 @@
         <p:nvSpPr>
           <p:cNvPr id="104" name="TextBox 103"/>
           <p:cNvSpPr txBox="1"/>
-          <p:nvPr/>
-        </p:nvSpPr>
-        <p:spPr>
-          <a:xfrm>
-            <a:off x="12384000" y="18180000"/>
+          <p:nvPr>
+            <p:custDataLst>
+              <p:tags r:id="rId63"/>
+            </p:custDataLst>
+          </p:nvPr>
+        </p:nvSpPr>
+        <p:spPr>
+          <a:xfrm>
+            <a:off x="12413138" y="18180000"/>
             <a:ext cx="2088000" cy="432000"/>
           </a:xfrm>
           <a:prstGeom prst="rect">
@@ -8162,7 +9068,7 @@
           <a:noFill/>
         </p:spPr>
         <p:txBody>
-          <a:bodyPr wrap="none" lIns="0" rIns="0" tIns="0" bIns="0" anchor="ctr">
+          <a:bodyPr wrap="none" lIns="0" tIns="0" rIns="0" bIns="0" anchor="ctr">
             <a:spAutoFit/>
           </a:bodyPr>
           <a:lstStyle/>
@@ -8196,11 +9102,15 @@
         <p:nvSpPr>
           <p:cNvPr id="105" name="TextBox 104"/>
           <p:cNvSpPr txBox="1"/>
-          <p:nvPr/>
-        </p:nvSpPr>
-        <p:spPr>
-          <a:xfrm>
-            <a:off x="12384000" y="18720000"/>
+          <p:nvPr>
+            <p:custDataLst>
+              <p:tags r:id="rId64"/>
+            </p:custDataLst>
+          </p:nvPr>
+        </p:nvSpPr>
+        <p:spPr>
+          <a:xfrm>
+            <a:off x="12427426" y="18720000"/>
             <a:ext cx="2088000" cy="324000"/>
           </a:xfrm>
           <a:prstGeom prst="rect">
@@ -8209,7 +9119,7 @@
           <a:noFill/>
         </p:spPr>
         <p:txBody>
-          <a:bodyPr wrap="none" lIns="0" rIns="0" tIns="0" bIns="0" anchor="ctr">
+          <a:bodyPr wrap="none" lIns="0" tIns="0" rIns="0" bIns="0" anchor="ctr">
             <a:spAutoFit/>
           </a:bodyPr>
           <a:lstStyle/>
@@ -8243,7 +9153,11 @@
         <p:nvSpPr>
           <p:cNvPr id="106" name="TextBox 105"/>
           <p:cNvSpPr txBox="1"/>
-          <p:nvPr/>
+          <p:nvPr>
+            <p:custDataLst>
+              <p:tags r:id="rId65"/>
+            </p:custDataLst>
+          </p:nvPr>
         </p:nvSpPr>
         <p:spPr>
           <a:xfrm>
@@ -8256,7 +9170,7 @@
           <a:noFill/>
         </p:spPr>
         <p:txBody>
-          <a:bodyPr wrap="none" lIns="0" rIns="0" tIns="0" bIns="0" anchor="ctr">
+          <a:bodyPr wrap="none" lIns="0" tIns="0" rIns="0" bIns="0" anchor="ctr">
             <a:spAutoFit/>
           </a:bodyPr>
           <a:lstStyle/>
@@ -8281,40 +9195,7 @@
                 <a:ea typeface="DFKai-SB"/>
                 <a:cs typeface="Times New Roman"/>
               </a:rPr>
-              <a:t>30</a:t>
-            </a:r>
-            <a:r>
-              <a:rPr sz="1400" b="0">
-                <a:solidFill>
-                  <a:srgbClr val="53666E"/>
-                </a:solidFill>
-                <a:latin typeface="Times New Roman"/>
-                <a:ea typeface="DFKai-SB"/>
-                <a:cs typeface="Times New Roman"/>
-              </a:rPr>
-              <a:t>筆偵測誤判中</a:t>
-            </a:r>
-            <a:r>
-              <a:rPr sz="1400" b="0">
-                <a:solidFill>
-                  <a:srgbClr val="53666E"/>
-                </a:solidFill>
-                <a:latin typeface="Times New Roman"/>
-                <a:ea typeface="DFKai-SB"/>
-                <a:cs typeface="Times New Roman"/>
-              </a:rPr>
-              <a:t>18</a:t>
-            </a:r>
-            <a:r>
-              <a:rPr sz="1400" b="0">
-                <a:solidFill>
-                  <a:srgbClr val="53666E"/>
-                </a:solidFill>
-                <a:latin typeface="Times New Roman"/>
-                <a:ea typeface="DFKai-SB"/>
-                <a:cs typeface="Times New Roman"/>
-              </a:rPr>
-              <a:t>筆分流</a:t>
+              <a:t>30筆偵測誤判中18筆分流</a:t>
             </a:r>
           </a:p>
           <a:p>
@@ -8338,29 +9219,7 @@
                 <a:ea typeface="DFKai-SB"/>
                 <a:cs typeface="Times New Roman"/>
               </a:rPr>
-              <a:t>其餘</a:t>
-            </a:r>
-            <a:r>
-              <a:rPr sz="1400" b="0">
-                <a:solidFill>
-                  <a:srgbClr val="53666E"/>
-                </a:solidFill>
-                <a:latin typeface="Times New Roman"/>
-                <a:ea typeface="DFKai-SB"/>
-                <a:cs typeface="Times New Roman"/>
-              </a:rPr>
-              <a:t>12</a:t>
-            </a:r>
-            <a:r>
-              <a:rPr sz="1400" b="0">
-                <a:solidFill>
-                  <a:srgbClr val="53666E"/>
-                </a:solidFill>
-                <a:latin typeface="Times New Roman"/>
-                <a:ea typeface="DFKai-SB"/>
-                <a:cs typeface="Times New Roman"/>
-              </a:rPr>
-              <a:t>筆獲支持，處置另經策略檢查</a:t>
+              <a:t>其餘12筆獲支持，處置另經策略檢查</a:t>
             </a:r>
           </a:p>
         </p:txBody>
@@ -8405,7 +9264,11 @@
         <p:nvSpPr>
           <p:cNvPr id="108" name="TextBox 107"/>
           <p:cNvSpPr txBox="1"/>
-          <p:nvPr/>
+          <p:nvPr>
+            <p:custDataLst>
+              <p:tags r:id="rId66"/>
+            </p:custDataLst>
+          </p:nvPr>
         </p:nvSpPr>
         <p:spPr>
           <a:xfrm>
@@ -8418,7 +9281,7 @@
           <a:noFill/>
         </p:spPr>
         <p:txBody>
-          <a:bodyPr wrap="none" lIns="0" rIns="0" tIns="0" bIns="0" anchor="ctr">
+          <a:bodyPr wrap="none" lIns="0" tIns="0" rIns="0" bIns="0" anchor="ctr">
             <a:spAutoFit/>
           </a:bodyPr>
           <a:lstStyle/>
@@ -8443,95 +9306,7 @@
                 <a:ea typeface="DFKai-SB"/>
                 <a:cs typeface="Times New Roman"/>
               </a:rPr>
-              <a:t>整合驗證：</a:t>
-            </a:r>
-            <a:r>
-              <a:rPr sz="1700" b="0">
-                <a:solidFill>
-                  <a:srgbClr val="105186"/>
-                </a:solidFill>
-                <a:latin typeface="Times New Roman"/>
-                <a:ea typeface="DFKai-SB"/>
-                <a:cs typeface="Times New Roman"/>
-              </a:rPr>
-              <a:t>17</a:t>
-            </a:r>
-            <a:r>
-              <a:rPr sz="1700" b="0">
-                <a:solidFill>
-                  <a:srgbClr val="105186"/>
-                </a:solidFill>
-                <a:latin typeface="Times New Roman"/>
-                <a:ea typeface="DFKai-SB"/>
-                <a:cs typeface="Times New Roman"/>
-              </a:rPr>
-              <a:t>類真實張量重跑；</a:t>
-            </a:r>
-            <a:r>
-              <a:rPr sz="1700" b="0">
-                <a:solidFill>
-                  <a:srgbClr val="105186"/>
-                </a:solidFill>
-                <a:latin typeface="Times New Roman"/>
-                <a:ea typeface="DFKai-SB"/>
-                <a:cs typeface="Times New Roman"/>
-              </a:rPr>
-              <a:t>6</a:t>
-            </a:r>
-            <a:r>
-              <a:rPr sz="1700" b="0">
-                <a:solidFill>
-                  <a:srgbClr val="105186"/>
-                </a:solidFill>
-                <a:latin typeface="Times New Roman"/>
-                <a:ea typeface="DFKai-SB"/>
-                <a:cs typeface="Times New Roman"/>
-              </a:rPr>
-              <a:t>種隔離</a:t>
-            </a:r>
-            <a:r>
-              <a:rPr sz="1700" b="0">
-                <a:solidFill>
-                  <a:srgbClr val="105186"/>
-                </a:solidFill>
-                <a:latin typeface="Times New Roman"/>
-                <a:ea typeface="DFKai-SB"/>
-                <a:cs typeface="Times New Roman"/>
-              </a:rPr>
-              <a:t>TCP</a:t>
-            </a:r>
-            <a:r>
-              <a:rPr sz="1700" b="0">
-                <a:solidFill>
-                  <a:srgbClr val="105186"/>
-                </a:solidFill>
-                <a:latin typeface="Times New Roman"/>
-                <a:ea typeface="DFKai-SB"/>
-                <a:cs typeface="Times New Roman"/>
-              </a:rPr>
-              <a:t>情境，背景保留與回復皆</a:t>
-            </a:r>
-            <a:r>
-              <a:rPr sz="1700" b="0">
-                <a:solidFill>
-                  <a:srgbClr val="105186"/>
-                </a:solidFill>
-                <a:latin typeface="Times New Roman"/>
-                <a:ea typeface="DFKai-SB"/>
-                <a:cs typeface="Times New Roman"/>
-              </a:rPr>
-              <a:t>6/6</a:t>
-            </a:r>
-            <a:r>
-              <a:rPr sz="1700" b="0">
-                <a:solidFill>
-                  <a:srgbClr val="105186"/>
-                </a:solidFill>
-                <a:latin typeface="Times New Roman"/>
-                <a:ea typeface="DFKai-SB"/>
-                <a:cs typeface="Times New Roman"/>
-              </a:rPr>
-              <a:t>。</a:t>
+              <a:t>整合驗證：17類真實張量重跑；6種隔離TCP情境，背景保留與回復皆6/6。</a:t>
             </a:r>
           </a:p>
         </p:txBody>
@@ -8540,7 +9315,11 @@
         <p:nvSpPr>
           <p:cNvPr id="109" name="TextBox 108"/>
           <p:cNvSpPr txBox="1"/>
-          <p:nvPr/>
+          <p:nvPr>
+            <p:custDataLst>
+              <p:tags r:id="rId67"/>
+            </p:custDataLst>
+          </p:nvPr>
         </p:nvSpPr>
         <p:spPr>
           <a:xfrm>
@@ -8553,7 +9332,7 @@
           <a:noFill/>
         </p:spPr>
         <p:txBody>
-          <a:bodyPr wrap="none" lIns="0" rIns="0" tIns="0" bIns="0" anchor="ctr">
+          <a:bodyPr wrap="none" lIns="0" tIns="0" rIns="0" bIns="0" anchor="ctr">
             <a:spAutoFit/>
           </a:bodyPr>
           <a:lstStyle/>
@@ -8578,84 +9357,7 @@
                 <a:ea typeface="DFKai-SB"/>
                 <a:cs typeface="Times New Roman"/>
               </a:rPr>
-              <a:t>6</a:t>
-            </a:r>
-            <a:r>
-              <a:rPr sz="1150" b="0">
-                <a:solidFill>
-                  <a:srgbClr val="53666E"/>
-                </a:solidFill>
-                <a:latin typeface="Times New Roman"/>
-                <a:ea typeface="DFKai-SB"/>
-                <a:cs typeface="Times New Roman"/>
-              </a:rPr>
-              <a:t>種情境含</a:t>
-            </a:r>
-            <a:r>
-              <a:rPr sz="1150" b="0">
-                <a:solidFill>
-                  <a:srgbClr val="53666E"/>
-                </a:solidFill>
-                <a:latin typeface="Times New Roman"/>
-                <a:ea typeface="DFKai-SB"/>
-                <a:cs typeface="Times New Roman"/>
-              </a:rPr>
-              <a:t>4</a:t>
-            </a:r>
-            <a:r>
-              <a:rPr sz="1150" b="0">
-                <a:solidFill>
-                  <a:srgbClr val="53666E"/>
-                </a:solidFill>
-                <a:latin typeface="Times New Roman"/>
-                <a:ea typeface="DFKai-SB"/>
-                <a:cs typeface="Times New Roman"/>
-              </a:rPr>
-              <a:t>種套用規則、</a:t>
-            </a:r>
-            <a:r>
-              <a:rPr sz="1150" b="0">
-                <a:solidFill>
-                  <a:srgbClr val="53666E"/>
-                </a:solidFill>
-                <a:latin typeface="Times New Roman"/>
-                <a:ea typeface="DFKai-SB"/>
-                <a:cs typeface="Times New Roman"/>
-              </a:rPr>
-              <a:t>2</a:t>
-            </a:r>
-            <a:r>
-              <a:rPr sz="1150" b="0">
-                <a:solidFill>
-                  <a:srgbClr val="53666E"/>
-                </a:solidFill>
-                <a:latin typeface="Times New Roman"/>
-                <a:ea typeface="DFKai-SB"/>
-                <a:cs typeface="Times New Roman"/>
-              </a:rPr>
-              <a:t>種監測或蒐證；</a:t>
-            </a:r>
-            <a:r>
-              <a:rPr sz="1150" b="0">
-                <a:solidFill>
-                  <a:srgbClr val="53666E"/>
-                </a:solidFill>
-                <a:latin typeface="Times New Roman"/>
-                <a:ea typeface="DFKai-SB"/>
-                <a:cs typeface="Times New Roman"/>
-              </a:rPr>
-              <a:t>6/6</a:t>
-            </a:r>
-            <a:r>
-              <a:rPr sz="1150" b="0">
-                <a:solidFill>
-                  <a:srgbClr val="53666E"/>
-                </a:solidFill>
-                <a:latin typeface="Times New Roman"/>
-                <a:ea typeface="DFKai-SB"/>
-                <a:cs typeface="Times New Roman"/>
-              </a:rPr>
-              <a:t>為隔離交易與回復結果，非原生攻擊防禦率。</a:t>
+              <a:t>6種情境含4種套用規則、2種監測或蒐證；6/6為隔離交易與回復結果，非原生攻擊防禦率。</a:t>
             </a:r>
           </a:p>
         </p:txBody>
@@ -8668,45 +9370,447 @@
 </p:sld>
 </file>
 
+<file path=ppt/tags/tag1.xml><?xml version="1.0" encoding="utf-8"?>
+<p:tagLst xmlns:a="http://schemas.openxmlformats.org/drawingml/2006/main" xmlns:r="http://schemas.openxmlformats.org/officeDocument/2006/relationships" xmlns:p="http://schemas.openxmlformats.org/presentationml/2006/main">
+  <p:tag name="ALIGNMENT_TARGET_X" val="45.354331970214844"/>
+</p:tagLst>
+</file>
+
+<file path=ppt/tags/tag10.xml><?xml version="1.0" encoding="utf-8"?>
+<p:tagLst xmlns:a="http://schemas.openxmlformats.org/drawingml/2006/main" xmlns:r="http://schemas.openxmlformats.org/officeDocument/2006/relationships" xmlns:p="http://schemas.openxmlformats.org/presentationml/2006/main">
+  <p:tag name="ALIGNMENT_TARGET_X" val="158.7401580810547"/>
+</p:tagLst>
+</file>
+
+<file path=ppt/tags/tag11.xml><?xml version="1.0" encoding="utf-8"?>
+<p:tagLst xmlns:a="http://schemas.openxmlformats.org/drawingml/2006/main" xmlns:r="http://schemas.openxmlformats.org/officeDocument/2006/relationships" xmlns:p="http://schemas.openxmlformats.org/presentationml/2006/main">
+  <p:tag name="ALIGNMENT_TARGET_X" val="158.7401580810547"/>
+</p:tagLst>
+</file>
+
+<file path=ppt/tags/tag12.xml><?xml version="1.0" encoding="utf-8"?>
+<p:tagLst xmlns:a="http://schemas.openxmlformats.org/drawingml/2006/main" xmlns:r="http://schemas.openxmlformats.org/officeDocument/2006/relationships" xmlns:p="http://schemas.openxmlformats.org/presentationml/2006/main">
+  <p:tag name="ALIGNMENT_TARGET_X" val="306.1417236328125"/>
+</p:tagLst>
+</file>
+
+<file path=ppt/tags/tag13.xml><?xml version="1.0" encoding="utf-8"?>
+<p:tagLst xmlns:a="http://schemas.openxmlformats.org/drawingml/2006/main" xmlns:r="http://schemas.openxmlformats.org/officeDocument/2006/relationships" xmlns:p="http://schemas.openxmlformats.org/presentationml/2006/main">
+  <p:tag name="ALIGNMENT_TARGET_X" val="306.1417236328125"/>
+</p:tagLst>
+</file>
+
+<file path=ppt/tags/tag14.xml><?xml version="1.0" encoding="utf-8"?>
+<p:tagLst xmlns:a="http://schemas.openxmlformats.org/drawingml/2006/main" xmlns:r="http://schemas.openxmlformats.org/officeDocument/2006/relationships" xmlns:p="http://schemas.openxmlformats.org/presentationml/2006/main">
+  <p:tag name="ALIGNMENT_TARGET_X" val="646.2991943359375"/>
+</p:tagLst>
+</file>
+
+<file path=ppt/tags/tag15.xml><?xml version="1.0" encoding="utf-8"?>
+<p:tagLst xmlns:a="http://schemas.openxmlformats.org/drawingml/2006/main" xmlns:r="http://schemas.openxmlformats.org/officeDocument/2006/relationships" xmlns:p="http://schemas.openxmlformats.org/presentationml/2006/main">
+  <p:tag name="ALIGNMENT_TARGET_X" val="688.8189086914062"/>
+</p:tagLst>
+</file>
+
+<file path=ppt/tags/tag16.xml><?xml version="1.0" encoding="utf-8"?>
+<p:tagLst xmlns:a="http://schemas.openxmlformats.org/drawingml/2006/main" xmlns:r="http://schemas.openxmlformats.org/officeDocument/2006/relationships" xmlns:p="http://schemas.openxmlformats.org/presentationml/2006/main">
+  <p:tag name="ALIGNMENT_TARGET_X" val="737.0078735351562"/>
+</p:tagLst>
+</file>
+
+<file path=ppt/tags/tag17.xml><?xml version="1.0" encoding="utf-8"?>
+<p:tagLst xmlns:a="http://schemas.openxmlformats.org/drawingml/2006/main" xmlns:r="http://schemas.openxmlformats.org/officeDocument/2006/relationships" xmlns:p="http://schemas.openxmlformats.org/presentationml/2006/main">
+  <p:tag name="ALIGNMENT_TARGET_X" val="737.0078735351562"/>
+</p:tagLst>
+</file>
+
+<file path=ppt/tags/tag18.xml><?xml version="1.0" encoding="utf-8"?>
+<p:tagLst xmlns:a="http://schemas.openxmlformats.org/drawingml/2006/main" xmlns:r="http://schemas.openxmlformats.org/officeDocument/2006/relationships" xmlns:p="http://schemas.openxmlformats.org/presentationml/2006/main">
+  <p:tag name="ALIGNMENT_TARGET_X" val="884.409423828125"/>
+</p:tagLst>
+</file>
+
+<file path=ppt/tags/tag19.xml><?xml version="1.0" encoding="utf-8"?>
+<p:tagLst xmlns:a="http://schemas.openxmlformats.org/drawingml/2006/main" xmlns:r="http://schemas.openxmlformats.org/officeDocument/2006/relationships" xmlns:p="http://schemas.openxmlformats.org/presentationml/2006/main">
+  <p:tag name="ALIGNMENT_TARGET_X" val="884.409423828125"/>
+</p:tagLst>
+</file>
+
+<file path=ppt/tags/tag2.xml><?xml version="1.0" encoding="utf-8"?>
+<p:tagLst xmlns:a="http://schemas.openxmlformats.org/drawingml/2006/main" xmlns:r="http://schemas.openxmlformats.org/officeDocument/2006/relationships" xmlns:p="http://schemas.openxmlformats.org/presentationml/2006/main">
+  <p:tag name="ALIGNMENT_TARGET_X" val="45.354331970214844"/>
+</p:tagLst>
+</file>
+
+<file path=ppt/tags/tag20.xml><?xml version="1.0" encoding="utf-8"?>
+<p:tagLst xmlns:a="http://schemas.openxmlformats.org/drawingml/2006/main" xmlns:r="http://schemas.openxmlformats.org/officeDocument/2006/relationships" xmlns:p="http://schemas.openxmlformats.org/presentationml/2006/main">
+  <p:tag name="ALIGNMENT_TARGET_X" val="646.2991943359375"/>
+</p:tagLst>
+</file>
+
+<file path=ppt/tags/tag21.xml><?xml version="1.0" encoding="utf-8"?>
+<p:tagLst xmlns:a="http://schemas.openxmlformats.org/drawingml/2006/main" xmlns:r="http://schemas.openxmlformats.org/officeDocument/2006/relationships" xmlns:p="http://schemas.openxmlformats.org/presentationml/2006/main">
+  <p:tag name="ALIGNMENT_TARGET_X" val="688.8189086914062"/>
+</p:tagLst>
+</file>
+
+<file path=ppt/tags/tag22.xml><?xml version="1.0" encoding="utf-8"?>
+<p:tagLst xmlns:a="http://schemas.openxmlformats.org/drawingml/2006/main" xmlns:r="http://schemas.openxmlformats.org/officeDocument/2006/relationships" xmlns:p="http://schemas.openxmlformats.org/presentationml/2006/main">
+  <p:tag name="ALIGNMENT_TARGET_X" val="737.0078735351562"/>
+</p:tagLst>
+</file>
+
+<file path=ppt/tags/tag23.xml><?xml version="1.0" encoding="utf-8"?>
+<p:tagLst xmlns:a="http://schemas.openxmlformats.org/drawingml/2006/main" xmlns:r="http://schemas.openxmlformats.org/officeDocument/2006/relationships" xmlns:p="http://schemas.openxmlformats.org/presentationml/2006/main">
+  <p:tag name="ALIGNMENT_TARGET_X" val="737.0078735351562"/>
+</p:tagLst>
+</file>
+
+<file path=ppt/tags/tag24.xml><?xml version="1.0" encoding="utf-8"?>
+<p:tagLst xmlns:a="http://schemas.openxmlformats.org/drawingml/2006/main" xmlns:r="http://schemas.openxmlformats.org/officeDocument/2006/relationships" xmlns:p="http://schemas.openxmlformats.org/presentationml/2006/main">
+  <p:tag name="ALIGNMENT_TARGET_X" val="718.5826568603516"/>
+</p:tagLst>
+</file>
+
+<file path=ppt/tags/tag25.xml><?xml version="1.0" encoding="utf-8"?>
+<p:tagLst xmlns:a="http://schemas.openxmlformats.org/drawingml/2006/main" xmlns:r="http://schemas.openxmlformats.org/officeDocument/2006/relationships" xmlns:p="http://schemas.openxmlformats.org/presentationml/2006/main">
+  <p:tag name="ALIGNMENT_TARGET_X" val="884.4094390869141"/>
+</p:tagLst>
+</file>
+
+<file path=ppt/tags/tag26.xml><?xml version="1.0" encoding="utf-8"?>
+<p:tagLst xmlns:a="http://schemas.openxmlformats.org/drawingml/2006/main" xmlns:r="http://schemas.openxmlformats.org/officeDocument/2006/relationships" xmlns:p="http://schemas.openxmlformats.org/presentationml/2006/main">
+  <p:tag name="ALIGNMENT_TARGET_X" val="1050.2362213134766"/>
+</p:tagLst>
+</file>
+
+<file path=ppt/tags/tag27.xml><?xml version="1.0" encoding="utf-8"?>
+<p:tagLst xmlns:a="http://schemas.openxmlformats.org/drawingml/2006/main" xmlns:r="http://schemas.openxmlformats.org/officeDocument/2006/relationships" xmlns:p="http://schemas.openxmlformats.org/presentationml/2006/main">
+  <p:tag name="ALIGNMENT_TARGET_X" val="884.409423828125"/>
+</p:tagLst>
+</file>
+
+<file path=ppt/tags/tag28.xml><?xml version="1.0" encoding="utf-8"?>
+<p:tagLst xmlns:a="http://schemas.openxmlformats.org/drawingml/2006/main" xmlns:r="http://schemas.openxmlformats.org/officeDocument/2006/relationships" xmlns:p="http://schemas.openxmlformats.org/presentationml/2006/main">
+  <p:tag name="ALIGNMENT_TARGET_X" val="68.031494140625"/>
+</p:tagLst>
+</file>
+
+<file path=ppt/tags/tag29.xml><?xml version="1.0" encoding="utf-8"?>
+<p:tagLst xmlns:a="http://schemas.openxmlformats.org/drawingml/2006/main" xmlns:r="http://schemas.openxmlformats.org/officeDocument/2006/relationships" xmlns:p="http://schemas.openxmlformats.org/presentationml/2006/main">
+  <p:tag name="ALIGNMENT_TARGET_X" val="110.55117797851562"/>
+</p:tagLst>
+</file>
+
+<file path=ppt/tags/tag3.xml><?xml version="1.0" encoding="utf-8"?>
+<p:tagLst xmlns:a="http://schemas.openxmlformats.org/drawingml/2006/main" xmlns:r="http://schemas.openxmlformats.org/officeDocument/2006/relationships" xmlns:p="http://schemas.openxmlformats.org/presentationml/2006/main">
+  <p:tag name="ALIGNMENT_TARGET_X" val="45.354331970214844"/>
+</p:tagLst>
+</file>
+
+<file path=ppt/tags/tag30.xml><?xml version="1.0" encoding="utf-8"?>
+<p:tagLst xmlns:a="http://schemas.openxmlformats.org/drawingml/2006/main" xmlns:r="http://schemas.openxmlformats.org/officeDocument/2006/relationships" xmlns:p="http://schemas.openxmlformats.org/presentationml/2006/main">
+  <p:tag name="ALIGNMENT_TARGET_X" val="158.7401580810547"/>
+</p:tagLst>
+</file>
+
+<file path=ppt/tags/tag31.xml><?xml version="1.0" encoding="utf-8"?>
+<p:tagLst xmlns:a="http://schemas.openxmlformats.org/drawingml/2006/main" xmlns:r="http://schemas.openxmlformats.org/officeDocument/2006/relationships" xmlns:p="http://schemas.openxmlformats.org/presentationml/2006/main">
+  <p:tag name="ALIGNMENT_TARGET_X" val="158.7401580810547"/>
+</p:tagLst>
+</file>
+
+<file path=ppt/tags/tag32.xml><?xml version="1.0" encoding="utf-8"?>
+<p:tagLst xmlns:a="http://schemas.openxmlformats.org/drawingml/2006/main" xmlns:r="http://schemas.openxmlformats.org/officeDocument/2006/relationships" xmlns:p="http://schemas.openxmlformats.org/presentationml/2006/main">
+  <p:tag name="ALIGNMENT_TARGET_X" val="130.3936996459961"/>
+</p:tagLst>
+</file>
+
+<file path=ppt/tags/tag33.xml><?xml version="1.0" encoding="utf-8"?>
+<p:tagLst xmlns:a="http://schemas.openxmlformats.org/drawingml/2006/main" xmlns:r="http://schemas.openxmlformats.org/officeDocument/2006/relationships" xmlns:p="http://schemas.openxmlformats.org/presentationml/2006/main">
+  <p:tag name="ALIGNMENT_TARGET_X" val="306.14173126220703"/>
+</p:tagLst>
+</file>
+
+<file path=ppt/tags/tag34.xml><?xml version="1.0" encoding="utf-8"?>
+<p:tagLst xmlns:a="http://schemas.openxmlformats.org/drawingml/2006/main" xmlns:r="http://schemas.openxmlformats.org/officeDocument/2006/relationships" xmlns:p="http://schemas.openxmlformats.org/presentationml/2006/main">
+  <p:tag name="ALIGNMENT_TARGET_X" val="481.88976287841797"/>
+</p:tagLst>
+</file>
+
+<file path=ppt/tags/tag35.xml><?xml version="1.0" encoding="utf-8"?>
+<p:tagLst xmlns:a="http://schemas.openxmlformats.org/drawingml/2006/main" xmlns:r="http://schemas.openxmlformats.org/officeDocument/2006/relationships" xmlns:p="http://schemas.openxmlformats.org/presentationml/2006/main">
+  <p:tag name="ALIGNMENT_TARGET_X" val="306.1417236328125"/>
+</p:tagLst>
+</file>
+
+<file path=ppt/tags/tag36.xml><?xml version="1.0" encoding="utf-8"?>
+<p:tagLst xmlns:a="http://schemas.openxmlformats.org/drawingml/2006/main" xmlns:r="http://schemas.openxmlformats.org/officeDocument/2006/relationships" xmlns:p="http://schemas.openxmlformats.org/presentationml/2006/main">
+  <p:tag name="ALIGNMENT_TARGET_X" val="595.2756156921387"/>
+</p:tagLst>
+</file>
+
+<file path=ppt/tags/tag37.xml><?xml version="1.0" encoding="utf-8"?>
+<p:tagLst xmlns:a="http://schemas.openxmlformats.org/drawingml/2006/main" xmlns:r="http://schemas.openxmlformats.org/officeDocument/2006/relationships" xmlns:p="http://schemas.openxmlformats.org/presentationml/2006/main">
+  <p:tag name="ALIGNMENT_TARGET_X" val="45.354331970214844"/>
+</p:tagLst>
+</file>
+
+<file path=ppt/tags/tag38.xml><?xml version="1.0" encoding="utf-8"?>
+<p:tagLst xmlns:a="http://schemas.openxmlformats.org/drawingml/2006/main" xmlns:r="http://schemas.openxmlformats.org/officeDocument/2006/relationships" xmlns:p="http://schemas.openxmlformats.org/presentationml/2006/main">
+  <p:tag name="ALIGNMENT_TARGET_X" val="87.87401580810547"/>
+</p:tagLst>
+</file>
+
+<file path=ppt/tags/tag39.xml><?xml version="1.0" encoding="utf-8"?>
+<p:tagLst xmlns:a="http://schemas.openxmlformats.org/drawingml/2006/main" xmlns:r="http://schemas.openxmlformats.org/officeDocument/2006/relationships" xmlns:p="http://schemas.openxmlformats.org/presentationml/2006/main">
+  <p:tag name="ALIGNMENT_TARGET_X" val="45.354331970214844"/>
+</p:tagLst>
+</file>
+
+<file path=ppt/tags/tag4.xml><?xml version="1.0" encoding="utf-8"?>
+<p:tagLst xmlns:a="http://schemas.openxmlformats.org/drawingml/2006/main" xmlns:r="http://schemas.openxmlformats.org/officeDocument/2006/relationships" xmlns:p="http://schemas.openxmlformats.org/presentationml/2006/main">
+  <p:tag name="ALIGNMENT_TARGET_X" val="141.73228454589844"/>
+</p:tagLst>
+</file>
+
+<file path=ppt/tags/tag40.xml><?xml version="1.0" encoding="utf-8"?>
+<p:tagLst xmlns:a="http://schemas.openxmlformats.org/drawingml/2006/main" xmlns:r="http://schemas.openxmlformats.org/officeDocument/2006/relationships" xmlns:p="http://schemas.openxmlformats.org/presentationml/2006/main">
+  <p:tag name="ALIGNMENT_TARGET_X" val="45.354331970214844"/>
+</p:tagLst>
+</file>
+
+<file path=ppt/tags/tag41.xml><?xml version="1.0" encoding="utf-8"?>
+<p:tagLst xmlns:a="http://schemas.openxmlformats.org/drawingml/2006/main" xmlns:r="http://schemas.openxmlformats.org/officeDocument/2006/relationships" xmlns:p="http://schemas.openxmlformats.org/presentationml/2006/main">
+  <p:tag name="ALIGNMENT_TARGET_X" val="422.3622131347656"/>
+</p:tagLst>
+</file>
+
+<file path=ppt/tags/tag42.xml><?xml version="1.0" encoding="utf-8"?>
+<p:tagLst xmlns:a="http://schemas.openxmlformats.org/drawingml/2006/main" xmlns:r="http://schemas.openxmlformats.org/officeDocument/2006/relationships" xmlns:p="http://schemas.openxmlformats.org/presentationml/2006/main">
+  <p:tag name="ALIGNMENT_TARGET_X" val="422.3622131347656"/>
+</p:tagLst>
+</file>
+
+<file path=ppt/tags/tag43.xml><?xml version="1.0" encoding="utf-8"?>
+<p:tagLst xmlns:a="http://schemas.openxmlformats.org/drawingml/2006/main" xmlns:r="http://schemas.openxmlformats.org/officeDocument/2006/relationships" xmlns:p="http://schemas.openxmlformats.org/presentationml/2006/main">
+  <p:tag name="ALIGNMENT_TARGET_X" val="799.3700561523438"/>
+</p:tagLst>
+</file>
+
+<file path=ppt/tags/tag44.xml><?xml version="1.0" encoding="utf-8"?>
+<p:tagLst xmlns:a="http://schemas.openxmlformats.org/drawingml/2006/main" xmlns:r="http://schemas.openxmlformats.org/officeDocument/2006/relationships" xmlns:p="http://schemas.openxmlformats.org/presentationml/2006/main">
+  <p:tag name="ALIGNMENT_TARGET_X" val="799.3700561523438"/>
+</p:tagLst>
+</file>
+
+<file path=ppt/tags/tag45.xml><?xml version="1.0" encoding="utf-8"?>
+<p:tagLst xmlns:a="http://schemas.openxmlformats.org/drawingml/2006/main" xmlns:r="http://schemas.openxmlformats.org/officeDocument/2006/relationships" xmlns:p="http://schemas.openxmlformats.org/presentationml/2006/main">
+  <p:tag name="ALIGNMENT_TARGET_X" val="45.354331970214844"/>
+</p:tagLst>
+</file>
+
+<file path=ppt/tags/tag46.xml><?xml version="1.0" encoding="utf-8"?>
+<p:tagLst xmlns:a="http://schemas.openxmlformats.org/drawingml/2006/main" xmlns:r="http://schemas.openxmlformats.org/officeDocument/2006/relationships" xmlns:p="http://schemas.openxmlformats.org/presentationml/2006/main">
+  <p:tag name="ALIGNMENT_TARGET_X" val="87.87401580810547"/>
+</p:tagLst>
+</file>
+
+<file path=ppt/tags/tag47.xml><?xml version="1.0" encoding="utf-8"?>
+<p:tagLst xmlns:a="http://schemas.openxmlformats.org/drawingml/2006/main" xmlns:r="http://schemas.openxmlformats.org/officeDocument/2006/relationships" xmlns:p="http://schemas.openxmlformats.org/presentationml/2006/main">
+  <p:tag name="ALIGNMENT_TARGET_X" val="45.354331970214844"/>
+</p:tagLst>
+</file>
+
+<file path=ppt/tags/tag48.xml><?xml version="1.0" encoding="utf-8"?>
+<p:tagLst xmlns:a="http://schemas.openxmlformats.org/drawingml/2006/main" xmlns:r="http://schemas.openxmlformats.org/officeDocument/2006/relationships" xmlns:p="http://schemas.openxmlformats.org/presentationml/2006/main">
+  <p:tag name="ALIGNMENT_TARGET_X" val="45.354331970214844"/>
+</p:tagLst>
+</file>
+
+<file path=ppt/tags/tag49.xml><?xml version="1.0" encoding="utf-8"?>
+<p:tagLst xmlns:a="http://schemas.openxmlformats.org/drawingml/2006/main" xmlns:r="http://schemas.openxmlformats.org/officeDocument/2006/relationships" xmlns:p="http://schemas.openxmlformats.org/presentationml/2006/main">
+  <p:tag name="ALIGNMENT_TARGET_X" val="566.9291381835938"/>
+</p:tagLst>
+</file>
+
+<file path=ppt/tags/tag5.xml><?xml version="1.0" encoding="utf-8"?>
+<p:tagLst xmlns:a="http://schemas.openxmlformats.org/drawingml/2006/main" xmlns:r="http://schemas.openxmlformats.org/officeDocument/2006/relationships" xmlns:p="http://schemas.openxmlformats.org/presentationml/2006/main">
+  <p:tag name="ALIGNMENT_TARGET_X" val="141.73228454589844"/>
+</p:tagLst>
+</file>
+
+<file path=ppt/tags/tag50.xml><?xml version="1.0" encoding="utf-8"?>
+<p:tagLst xmlns:a="http://schemas.openxmlformats.org/drawingml/2006/main" xmlns:r="http://schemas.openxmlformats.org/officeDocument/2006/relationships" xmlns:p="http://schemas.openxmlformats.org/presentationml/2006/main">
+  <p:tag name="ALIGNMENT_TARGET_X" val="45.354331970214844"/>
+</p:tagLst>
+</file>
+
+<file path=ppt/tags/tag51.xml><?xml version="1.0" encoding="utf-8"?>
+<p:tagLst xmlns:a="http://schemas.openxmlformats.org/drawingml/2006/main" xmlns:r="http://schemas.openxmlformats.org/officeDocument/2006/relationships" xmlns:p="http://schemas.openxmlformats.org/presentationml/2006/main">
+  <p:tag name="ALIGNMENT_TARGET_X" val="566.9291381835938"/>
+</p:tagLst>
+</file>
+
+<file path=ppt/tags/tag52.xml><?xml version="1.0" encoding="utf-8"?>
+<p:tagLst xmlns:a="http://schemas.openxmlformats.org/drawingml/2006/main" xmlns:r="http://schemas.openxmlformats.org/officeDocument/2006/relationships" xmlns:p="http://schemas.openxmlformats.org/presentationml/2006/main">
+  <p:tag name="ALIGNMENT_TARGET_X" val="45.354331970214844"/>
+</p:tagLst>
+</file>
+
+<file path=ppt/tags/tag53.xml><?xml version="1.0" encoding="utf-8"?>
+<p:tagLst xmlns:a="http://schemas.openxmlformats.org/drawingml/2006/main" xmlns:r="http://schemas.openxmlformats.org/officeDocument/2006/relationships" xmlns:p="http://schemas.openxmlformats.org/presentationml/2006/main">
+  <p:tag name="ALIGNMENT_TARGET_X" val="566.9291381835938"/>
+</p:tagLst>
+</file>
+
+<file path=ppt/tags/tag54.xml><?xml version="1.0" encoding="utf-8"?>
+<p:tagLst xmlns:a="http://schemas.openxmlformats.org/drawingml/2006/main" xmlns:r="http://schemas.openxmlformats.org/officeDocument/2006/relationships" xmlns:p="http://schemas.openxmlformats.org/presentationml/2006/main">
+  <p:tag name="ALIGNMENT_TARGET_X" val="45.354331970214844"/>
+</p:tagLst>
+</file>
+
+<file path=ppt/tags/tag55.xml><?xml version="1.0" encoding="utf-8"?>
+<p:tagLst xmlns:a="http://schemas.openxmlformats.org/drawingml/2006/main" xmlns:r="http://schemas.openxmlformats.org/officeDocument/2006/relationships" xmlns:p="http://schemas.openxmlformats.org/presentationml/2006/main">
+  <p:tag name="ALIGNMENT_TARGET_X" val="45.354331970214844"/>
+</p:tagLst>
+</file>
+
+<file path=ppt/tags/tag56.xml><?xml version="1.0" encoding="utf-8"?>
+<p:tagLst xmlns:a="http://schemas.openxmlformats.org/drawingml/2006/main" xmlns:r="http://schemas.openxmlformats.org/officeDocument/2006/relationships" xmlns:p="http://schemas.openxmlformats.org/presentationml/2006/main">
+  <p:tag name="ALIGNMENT_TARGET_X" val="623.6220703125"/>
+</p:tagLst>
+</file>
+
+<file path=ppt/tags/tag57.xml><?xml version="1.0" encoding="utf-8"?>
+<p:tagLst xmlns:a="http://schemas.openxmlformats.org/drawingml/2006/main" xmlns:r="http://schemas.openxmlformats.org/officeDocument/2006/relationships" xmlns:p="http://schemas.openxmlformats.org/presentationml/2006/main">
+  <p:tag name="ALIGNMENT_TARGET_X" val="623.6220703125"/>
+</p:tagLst>
+</file>
+
+<file path=ppt/tags/tag58.xml><?xml version="1.0" encoding="utf-8"?>
+<p:tagLst xmlns:a="http://schemas.openxmlformats.org/drawingml/2006/main" xmlns:r="http://schemas.openxmlformats.org/officeDocument/2006/relationships" xmlns:p="http://schemas.openxmlformats.org/presentationml/2006/main">
+  <p:tag name="ALIGNMENT_TARGET_X" val="623.6220703125"/>
+</p:tagLst>
+</file>
+
+<file path=ppt/tags/tag59.xml><?xml version="1.0" encoding="utf-8"?>
+<p:tagLst xmlns:a="http://schemas.openxmlformats.org/drawingml/2006/main" xmlns:r="http://schemas.openxmlformats.org/officeDocument/2006/relationships" xmlns:p="http://schemas.openxmlformats.org/presentationml/2006/main">
+  <p:tag name="ALIGNMENT_TARGET_X" val="705.8267974853516"/>
+</p:tagLst>
+</file>
+
+<file path=ppt/tags/tag6.xml><?xml version="1.0" encoding="utf-8"?>
+<p:tagLst xmlns:a="http://schemas.openxmlformats.org/drawingml/2006/main" xmlns:r="http://schemas.openxmlformats.org/officeDocument/2006/relationships" xmlns:p="http://schemas.openxmlformats.org/presentationml/2006/main">
+  <p:tag name="ALIGNMENT_TARGET_X" val="45.354331970214844"/>
+</p:tagLst>
+</file>
+
+<file path=ppt/tags/tag60.xml><?xml version="1.0" encoding="utf-8"?>
+<p:tagLst xmlns:a="http://schemas.openxmlformats.org/drawingml/2006/main" xmlns:r="http://schemas.openxmlformats.org/officeDocument/2006/relationships" xmlns:p="http://schemas.openxmlformats.org/presentationml/2006/main">
+  <p:tag name="ALIGNMENT_TARGET_X" val="705.8267974853516"/>
+</p:tagLst>
+</file>
+
+<file path=ppt/tags/tag61.xml><?xml version="1.0" encoding="utf-8"?>
+<p:tagLst xmlns:a="http://schemas.openxmlformats.org/drawingml/2006/main" xmlns:r="http://schemas.openxmlformats.org/officeDocument/2006/relationships" xmlns:p="http://schemas.openxmlformats.org/presentationml/2006/main">
+  <p:tag name="ALIGNMENT_TARGET_X" val="884.4094390869141"/>
+</p:tagLst>
+</file>
+
+<file path=ppt/tags/tag62.xml><?xml version="1.0" encoding="utf-8"?>
+<p:tagLst xmlns:a="http://schemas.openxmlformats.org/drawingml/2006/main" xmlns:r="http://schemas.openxmlformats.org/officeDocument/2006/relationships" xmlns:p="http://schemas.openxmlformats.org/presentationml/2006/main">
+  <p:tag name="ALIGNMENT_TARGET_X" val="884.4094390869141"/>
+</p:tagLst>
+</file>
+
+<file path=ppt/tags/tag63.xml><?xml version="1.0" encoding="utf-8"?>
+<p:tagLst xmlns:a="http://schemas.openxmlformats.org/drawingml/2006/main" xmlns:r="http://schemas.openxmlformats.org/officeDocument/2006/relationships" xmlns:p="http://schemas.openxmlformats.org/presentationml/2006/main">
+  <p:tag name="ALIGNMENT_TARGET_X" val="1062.9921417236328"/>
+</p:tagLst>
+</file>
+
+<file path=ppt/tags/tag64.xml><?xml version="1.0" encoding="utf-8"?>
+<p:tagLst xmlns:a="http://schemas.openxmlformats.org/drawingml/2006/main" xmlns:r="http://schemas.openxmlformats.org/officeDocument/2006/relationships" xmlns:p="http://schemas.openxmlformats.org/presentationml/2006/main">
+  <p:tag name="ALIGNMENT_TARGET_X" val="1062.9921417236328"/>
+</p:tagLst>
+</file>
+
+<file path=ppt/tags/tag65.xml><?xml version="1.0" encoding="utf-8"?>
+<p:tagLst xmlns:a="http://schemas.openxmlformats.org/drawingml/2006/main" xmlns:r="http://schemas.openxmlformats.org/officeDocument/2006/relationships" xmlns:p="http://schemas.openxmlformats.org/presentationml/2006/main">
+  <p:tag name="ALIGNMENT_TARGET_X" val="623.6220703125"/>
+</p:tagLst>
+</file>
+
+<file path=ppt/tags/tag66.xml><?xml version="1.0" encoding="utf-8"?>
+<p:tagLst xmlns:a="http://schemas.openxmlformats.org/drawingml/2006/main" xmlns:r="http://schemas.openxmlformats.org/officeDocument/2006/relationships" xmlns:p="http://schemas.openxmlformats.org/presentationml/2006/main">
+  <p:tag name="ALIGNMENT_TARGET_X" val="45.354331970214844"/>
+</p:tagLst>
+</file>
+
+<file path=ppt/tags/tag67.xml><?xml version="1.0" encoding="utf-8"?>
+<p:tagLst xmlns:a="http://schemas.openxmlformats.org/drawingml/2006/main" xmlns:r="http://schemas.openxmlformats.org/officeDocument/2006/relationships" xmlns:p="http://schemas.openxmlformats.org/presentationml/2006/main">
+  <p:tag name="ALIGNMENT_TARGET_X" val="45.354331970214844"/>
+</p:tagLst>
+</file>
+
+<file path=ppt/tags/tag7.xml><?xml version="1.0" encoding="utf-8"?>
+<p:tagLst xmlns:a="http://schemas.openxmlformats.org/drawingml/2006/main" xmlns:r="http://schemas.openxmlformats.org/officeDocument/2006/relationships" xmlns:p="http://schemas.openxmlformats.org/presentationml/2006/main">
+  <p:tag name="ALIGNMENT_TARGET_X" val="87.87401580810547"/>
+</p:tagLst>
+</file>
+
+<file path=ppt/tags/tag8.xml><?xml version="1.0" encoding="utf-8"?>
+<p:tagLst xmlns:a="http://schemas.openxmlformats.org/drawingml/2006/main" xmlns:r="http://schemas.openxmlformats.org/officeDocument/2006/relationships" xmlns:p="http://schemas.openxmlformats.org/presentationml/2006/main">
+  <p:tag name="ALIGNMENT_TARGET_X" val="68.031494140625"/>
+</p:tagLst>
+</file>
+
+<file path=ppt/tags/tag9.xml><?xml version="1.0" encoding="utf-8"?>
+<p:tagLst xmlns:a="http://schemas.openxmlformats.org/drawingml/2006/main" xmlns:r="http://schemas.openxmlformats.org/officeDocument/2006/relationships" xmlns:p="http://schemas.openxmlformats.org/presentationml/2006/main">
+  <p:tag name="ALIGNMENT_TARGET_X" val="110.55117797851562"/>
+</p:tagLst>
+</file>
+
 <file path=ppt/theme/theme1.xml><?xml version="1.0" encoding="utf-8"?>
 <a:theme xmlns:a="http://schemas.openxmlformats.org/drawingml/2006/main" name="Office Theme">
   <a:themeElements>
-    <a:clrScheme name="Office">
+    <a:clrScheme name="AI Security Navy Blue Gold">
       <a:dk1>
-        <a:sysClr val="windowText" lastClr="000000"/>
+        <a:srgbClr val="171C1D"/>
       </a:dk1>
       <a:lt1>
-        <a:sysClr val="window" lastClr="FFFFFF"/>
+        <a:srgbClr val="FFFFFF"/>
       </a:lt1>
       <a:dk2>
-        <a:srgbClr val="1F497D"/>
+        <a:srgbClr val="092B42"/>
       </a:dk2>
       <a:lt2>
-        <a:srgbClr val="EEECE1"/>
+        <a:srgbClr val="F0F2F3"/>
       </a:lt2>
       <a:accent1>
-        <a:srgbClr val="4F81BD"/>
+        <a:srgbClr val="105186"/>
       </a:accent1>
       <a:accent2>
-        <a:srgbClr val="C0504D"/>
+        <a:srgbClr val="FDB338"/>
       </a:accent2>
       <a:accent3>
-        <a:srgbClr val="9BBB59"/>
+        <a:srgbClr val="F0F2F3"/>
       </a:accent3>
       <a:accent4>
-        <a:srgbClr val="8064A2"/>
+        <a:srgbClr val="105186"/>
       </a:accent4>
       <a:accent5>
-        <a:srgbClr val="4BACC6"/>
+        <a:srgbClr val="092B42"/>
       </a:accent5>
       <a:accent6>
-        <a:srgbClr val="F79646"/>
+        <a:srgbClr val="53666E"/>
       </a:accent6>
       <a:hlink>
-        <a:srgbClr val="0000FF"/>
+        <a:srgbClr val="105186"/>
       </a:hlink>
       <a:folHlink>
-        <a:srgbClr val="800080"/>
+        <a:srgbClr val="092B42"/>
       </a:folHlink>
     </a:clrScheme>
     <a:fontScheme name="Office">
@@ -8714,71 +9818,71 @@
         <a:latin typeface="Times New Roman"/>
         <a:ea typeface="DFKai-SB"/>
         <a:cs typeface="Times New Roman"/>
-        <a:font script="Jpan" typeface="ＭＳ Ｐゴシック"/>
-        <a:font script="Hang" typeface="맑은 고딕"/>
-        <a:font script="Hans" typeface="宋体"/>
-        <a:font script="Hant" typeface="新細明體"/>
+        <a:font script="Jpan" typeface="Times New Roman"/>
+        <a:font script="Hang" typeface="Times New Roman"/>
+        <a:font script="Hans" typeface="DFKai-SB"/>
+        <a:font script="Hant" typeface="DFKai-SB"/>
         <a:font script="Arab" typeface="Times New Roman"/>
         <a:font script="Hebr" typeface="Times New Roman"/>
-        <a:font script="Thai" typeface="Angsana New"/>
-        <a:font script="Ethi" typeface="Nyala"/>
-        <a:font script="Beng" typeface="Vrinda"/>
-        <a:font script="Gujr" typeface="Shruti"/>
-        <a:font script="Khmr" typeface="MoolBoran"/>
-        <a:font script="Knda" typeface="Tunga"/>
-        <a:font script="Guru" typeface="Raavi"/>
-        <a:font script="Cans" typeface="Euphemia"/>
-        <a:font script="Cher" typeface="Plantagenet Cherokee"/>
-        <a:font script="Yiii" typeface="Microsoft Yi Baiti"/>
-        <a:font script="Tibt" typeface="Microsoft Himalaya"/>
-        <a:font script="Thaa" typeface="MV Boli"/>
-        <a:font script="Deva" typeface="Mangal"/>
-        <a:font script="Telu" typeface="Gautami"/>
-        <a:font script="Taml" typeface="Latha"/>
-        <a:font script="Syrc" typeface="Estrangelo Edessa"/>
-        <a:font script="Orya" typeface="Kalinga"/>
-        <a:font script="Mlym" typeface="Kartika"/>
-        <a:font script="Laoo" typeface="DokChampa"/>
-        <a:font script="Sinh" typeface="Iskoola Pota"/>
-        <a:font script="Mong" typeface="Mongolian Baiti"/>
+        <a:font script="Thai" typeface="Times New Roman"/>
+        <a:font script="Ethi" typeface="Times New Roman"/>
+        <a:font script="Beng" typeface="Times New Roman"/>
+        <a:font script="Gujr" typeface="Times New Roman"/>
+        <a:font script="Khmr" typeface="Times New Roman"/>
+        <a:font script="Knda" typeface="Times New Roman"/>
+        <a:font script="Guru" typeface="Times New Roman"/>
+        <a:font script="Cans" typeface="Times New Roman"/>
+        <a:font script="Cher" typeface="Times New Roman"/>
+        <a:font script="Yiii" typeface="Times New Roman"/>
+        <a:font script="Tibt" typeface="Times New Roman"/>
+        <a:font script="Thaa" typeface="Times New Roman"/>
+        <a:font script="Deva" typeface="Times New Roman"/>
+        <a:font script="Telu" typeface="Times New Roman"/>
+        <a:font script="Taml" typeface="Times New Roman"/>
+        <a:font script="Syrc" typeface="Times New Roman"/>
+        <a:font script="Orya" typeface="Times New Roman"/>
+        <a:font script="Mlym" typeface="Times New Roman"/>
+        <a:font script="Laoo" typeface="Times New Roman"/>
+        <a:font script="Sinh" typeface="Times New Roman"/>
+        <a:font script="Mong" typeface="Times New Roman"/>
         <a:font script="Viet" typeface="Times New Roman"/>
-        <a:font script="Uigh" typeface="Microsoft Uighur"/>
-        <a:font script="Geor" typeface="Sylfaen"/>
+        <a:font script="Uigh" typeface="Times New Roman"/>
+        <a:font script="Geor" typeface="Times New Roman"/>
       </a:majorFont>
       <a:minorFont>
         <a:latin typeface="Times New Roman"/>
         <a:ea typeface="DFKai-SB"/>
         <a:cs typeface="Times New Roman"/>
-        <a:font script="Jpan" typeface="ＭＳ Ｐゴシック"/>
-        <a:font script="Hang" typeface="맑은 고딕"/>
-        <a:font script="Hans" typeface="宋体"/>
-        <a:font script="Hant" typeface="新細明體"/>
-        <a:font script="Arab" typeface="Arial"/>
-        <a:font script="Hebr" typeface="Arial"/>
-        <a:font script="Thai" typeface="Cordia New"/>
-        <a:font script="Ethi" typeface="Nyala"/>
-        <a:font script="Beng" typeface="Vrinda"/>
-        <a:font script="Gujr" typeface="Shruti"/>
-        <a:font script="Khmr" typeface="DaunPenh"/>
-        <a:font script="Knda" typeface="Tunga"/>
-        <a:font script="Guru" typeface="Raavi"/>
-        <a:font script="Cans" typeface="Euphemia"/>
-        <a:font script="Cher" typeface="Plantagenet Cherokee"/>
-        <a:font script="Yiii" typeface="Microsoft Yi Baiti"/>
-        <a:font script="Tibt" typeface="Microsoft Himalaya"/>
-        <a:font script="Thaa" typeface="MV Boli"/>
-        <a:font script="Deva" typeface="Mangal"/>
-        <a:font script="Telu" typeface="Gautami"/>
-        <a:font script="Taml" typeface="Latha"/>
-        <a:font script="Syrc" typeface="Estrangelo Edessa"/>
-        <a:font script="Orya" typeface="Kalinga"/>
-        <a:font script="Mlym" typeface="Kartika"/>
-        <a:font script="Laoo" typeface="DokChampa"/>
-        <a:font script="Sinh" typeface="Iskoola Pota"/>
-        <a:font script="Mong" typeface="Mongolian Baiti"/>
-        <a:font script="Viet" typeface="Arial"/>
-        <a:font script="Uigh" typeface="Microsoft Uighur"/>
-        <a:font script="Geor" typeface="Sylfaen"/>
+        <a:font script="Jpan" typeface="Times New Roman"/>
+        <a:font script="Hang" typeface="Times New Roman"/>
+        <a:font script="Hans" typeface="DFKai-SB"/>
+        <a:font script="Hant" typeface="DFKai-SB"/>
+        <a:font script="Arab" typeface="Times New Roman"/>
+        <a:font script="Hebr" typeface="Times New Roman"/>
+        <a:font script="Thai" typeface="Times New Roman"/>
+        <a:font script="Ethi" typeface="Times New Roman"/>
+        <a:font script="Beng" typeface="Times New Roman"/>
+        <a:font script="Gujr" typeface="Times New Roman"/>
+        <a:font script="Khmr" typeface="Times New Roman"/>
+        <a:font script="Knda" typeface="Times New Roman"/>
+        <a:font script="Guru" typeface="Times New Roman"/>
+        <a:font script="Cans" typeface="Times New Roman"/>
+        <a:font script="Cher" typeface="Times New Roman"/>
+        <a:font script="Yiii" typeface="Times New Roman"/>
+        <a:font script="Tibt" typeface="Times New Roman"/>
+        <a:font script="Thaa" typeface="Times New Roman"/>
+        <a:font script="Deva" typeface="Times New Roman"/>
+        <a:font script="Telu" typeface="Times New Roman"/>
+        <a:font script="Taml" typeface="Times New Roman"/>
+        <a:font script="Syrc" typeface="Times New Roman"/>
+        <a:font script="Orya" typeface="Times New Roman"/>
+        <a:font script="Mlym" typeface="Times New Roman"/>
+        <a:font script="Laoo" typeface="Times New Roman"/>
+        <a:font script="Sinh" typeface="Times New Roman"/>
+        <a:font script="Mong" typeface="Times New Roman"/>
+        <a:font script="Viet" typeface="Times New Roman"/>
+        <a:font script="Uigh" typeface="Times New Roman"/>
+        <a:font script="Geor" typeface="Times New Roman"/>
       </a:minorFont>
     </a:fontScheme>
     <a:fmtScheme name="Office">

--- a/deliverables/決賽海報_AI資安框架_A2.pptx
+++ b/deliverables/決賽海報_AI資安框架_A2.pptx
@@ -4126,7 +4126,7 @@
               </a:spcAft>
             </a:pPr>
             <a:r>
-              <a:rPr sz="3200" b="0">
+              <a:rPr sz="3000" b="0">
                 <a:solidFill>
                   <a:srgbClr val="092B42"/>
                 </a:solidFill>
@@ -4150,7 +4150,7 @@
               </a:spcAft>
             </a:pPr>
             <a:r>
-              <a:rPr sz="3200" b="0">
+              <a:rPr sz="3000" b="0">
                 <a:solidFill>
                   <a:srgbClr val="092B42"/>
                 </a:solidFill>
@@ -4174,7 +4174,7 @@
               </a:spcAft>
             </a:pPr>
             <a:r>
-              <a:rPr sz="3200" b="0">
+              <a:rPr sz="3000" b="0">
                 <a:solidFill>
                   <a:srgbClr val="092B42"/>
                 </a:solidFill>
@@ -4196,81 +4196,30 @@
           <p:nvPr/>
         </p:nvPicPr>
         <p:blipFill>
-          <a:blip r:embed="rId69"/>
+          <a:blip r:embed="rId77"/>
           <a:stretch>
             <a:fillRect/>
           </a:stretch>
         </p:blipFill>
         <p:spPr>
           <a:xfrm>
-            <a:off x="12384000" y="1044000"/>
-            <a:ext cx="1800000" cy="1800000"/>
+            <a:off x="12528000" y="1080000"/>
+            <a:ext cx="1656000" cy="1656000"/>
           </a:xfrm>
           <a:prstGeom prst="rect">
             <a:avLst/>
           </a:prstGeom>
         </p:spPr>
       </p:pic>
-      <p:sp>
-        <p:nvSpPr>
-          <p:cNvPr id="5" name="TextBox 4"/>
-          <p:cNvSpPr txBox="1"/>
-          <p:nvPr>
-            <p:custDataLst>
-              <p:tags r:id="rId3"/>
-            </p:custDataLst>
-          </p:nvPr>
-        </p:nvSpPr>
-        <p:spPr>
-          <a:xfrm>
-            <a:off x="576000" y="2628000"/>
-            <a:ext cx="13968000" cy="360000"/>
-          </a:xfrm>
-          <a:prstGeom prst="rect">
-            <a:avLst/>
-          </a:prstGeom>
-          <a:noFill/>
-        </p:spPr>
-        <p:txBody>
-          <a:bodyPr wrap="none" lIns="0" tIns="0" rIns="0" bIns="0" anchor="ctr">
-            <a:spAutoFit/>
-          </a:bodyPr>
-          <a:lstStyle/>
-          <a:p>
-            <a:pPr algn="l">
-              <a:lnSpc>
-                <a:spcPct val="110000"/>
-              </a:lnSpc>
-              <a:spcBef>
-                <a:spcPts val="0"/>
-              </a:spcBef>
-              <a:spcAft>
-                <a:spcPts val="0"/>
-              </a:spcAft>
-            </a:pPr>
-            <a:r>
-              <a:rPr sz="2200" b="0">
-                <a:solidFill>
-                  <a:srgbClr val="105186"/>
-                </a:solidFill>
-                <a:latin typeface="Times New Roman"/>
-                <a:ea typeface="DFKai-SB"/>
-                <a:cs typeface="Times New Roman"/>
-              </a:rPr>
-              <a:t>同一事件串起流量判定、案例證據與可回復的處置</a:t>
-            </a:r>
-          </a:p>
-        </p:txBody>
-      </p:sp>
       <p:cxnSp>
         <p:nvCxnSpPr>
-          <p:cNvPr id="6" name="Connector 5"/>
+          <p:cNvPr id="5" name="Connector 4"/>
           <p:cNvCxnSpPr/>
           <p:nvPr/>
         </p:nvCxnSpPr>
         <p:spPr>
           <a:xfrm>
-            <a:off x="576000" y="3132000"/>
+            <a:off x="576000" y="3060000"/>
             <a:ext cx="13968000" cy="0"/>
           </a:xfrm>
           <a:prstGeom prst="line">
@@ -4298,44 +4247,20 @@
           </a:fontRef>
         </p:style>
       </p:cxnSp>
-      <p:pic>
-        <p:nvPicPr>
-          <p:cNvPr id="7" name="Picture 6" descr="flat-icon-1.png"/>
-          <p:cNvPicPr>
-            <a:picLocks noChangeAspect="1"/>
-          </p:cNvPicPr>
-          <p:nvPr/>
-        </p:nvPicPr>
-        <p:blipFill>
-          <a:blip r:embed="rId70"/>
-          <a:stretch>
-            <a:fillRect/>
-          </a:stretch>
-        </p:blipFill>
-        <p:spPr>
-          <a:xfrm>
-            <a:off x="576000" y="3384000"/>
-            <a:ext cx="972000" cy="972000"/>
-          </a:xfrm>
-          <a:prstGeom prst="rect">
-            <a:avLst/>
-          </a:prstGeom>
-        </p:spPr>
-      </p:pic>
-      <p:sp>
-        <p:nvSpPr>
-          <p:cNvPr id="8" name="TextBox 7"/>
+      <p:sp>
+        <p:nvSpPr>
+          <p:cNvPr id="6" name="TextBox 5"/>
           <p:cNvSpPr txBox="1"/>
           <p:nvPr>
             <p:custDataLst>
-              <p:tags r:id="rId4"/>
+              <p:tags r:id="rId3"/>
             </p:custDataLst>
           </p:nvPr>
         </p:nvSpPr>
         <p:spPr>
           <a:xfrm>
-            <a:off x="1800000" y="3384000"/>
-            <a:ext cx="12744000" cy="360000"/>
+            <a:off x="576000" y="3312000"/>
+            <a:ext cx="13968000" cy="468000"/>
           </a:xfrm>
           <a:prstGeom prst="rect">
             <a:avLst/>
@@ -4360,33 +4285,33 @@
               </a:spcAft>
             </a:pPr>
             <a:r>
-              <a:rPr sz="2300" b="0">
+              <a:rPr sz="2600" b="0">
                 <a:solidFill>
-                  <a:srgbClr val="171C1D"/>
+                  <a:srgbClr val="092B42"/>
                 </a:solidFill>
                 <a:latin typeface="Times New Roman"/>
                 <a:ea typeface="DFKai-SB"/>
                 <a:cs typeface="Times New Roman"/>
               </a:rPr>
-              <a:t>從辨識告警，走到可查核的資安處理流程</a:t>
-            </a:r>
-          </a:p>
-        </p:txBody>
-      </p:sp>
-      <p:sp>
-        <p:nvSpPr>
-          <p:cNvPr id="9" name="TextBox 8"/>
+              <a:t>從流量告警，走到有證據、可回復的處置</a:t>
+            </a:r>
+          </a:p>
+        </p:txBody>
+      </p:sp>
+      <p:sp>
+        <p:nvSpPr>
+          <p:cNvPr id="7" name="TextBox 6"/>
           <p:cNvSpPr txBox="1"/>
           <p:nvPr>
             <p:custDataLst>
-              <p:tags r:id="rId5"/>
+              <p:tags r:id="rId4"/>
             </p:custDataLst>
           </p:nvPr>
         </p:nvSpPr>
         <p:spPr>
           <a:xfrm>
-            <a:off x="1800000" y="3852000"/>
-            <a:ext cx="12744000" cy="468000"/>
+            <a:off x="576000" y="3888000"/>
+            <a:ext cx="13968000" cy="360000"/>
           </a:xfrm>
           <a:prstGeom prst="rect">
             <a:avLst/>
@@ -4411,7 +4336,7 @@
               </a:spcAft>
             </a:pPr>
             <a:r>
-              <a:rPr sz="1700" b="0">
+              <a:rPr sz="1900" b="0">
                 <a:solidFill>
                   <a:srgbClr val="53666E"/>
                 </a:solidFill>
@@ -4419,24 +4344,24 @@
                 <a:ea typeface="DFKai-SB"/>
                 <a:cs typeface="Times New Roman"/>
               </a:rPr>
-              <a:t>面向校園與中小型組織的資安管理需求，協助管理者核對事件依據。</a:t>
-            </a:r>
-          </a:p>
-        </p:txBody>
-      </p:sp>
-      <p:sp>
-        <p:nvSpPr>
-          <p:cNvPr id="10" name="TextBox 9"/>
+              <a:t>同一事件串起模型判定、相似案例、AI稽核與處置回條。</a:t>
+            </a:r>
+          </a:p>
+        </p:txBody>
+      </p:sp>
+      <p:sp>
+        <p:nvSpPr>
+          <p:cNvPr id="8" name="TextBox 7"/>
           <p:cNvSpPr txBox="1"/>
           <p:nvPr>
             <p:custDataLst>
-              <p:tags r:id="rId6"/>
+              <p:tags r:id="rId5"/>
             </p:custDataLst>
           </p:nvPr>
         </p:nvSpPr>
         <p:spPr>
           <a:xfrm>
-            <a:off x="576000" y="4644000"/>
+            <a:off x="576000" y="4608000"/>
             <a:ext cx="432000" cy="360000"/>
           </a:xfrm>
           <a:prstGeom prst="rect">
@@ -4477,17 +4402,17 @@
       </p:sp>
       <p:sp>
         <p:nvSpPr>
-          <p:cNvPr id="11" name="TextBox 10"/>
+          <p:cNvPr id="9" name="TextBox 8"/>
           <p:cNvSpPr txBox="1"/>
           <p:nvPr>
             <p:custDataLst>
-              <p:tags r:id="rId7"/>
+              <p:tags r:id="rId6"/>
             </p:custDataLst>
           </p:nvPr>
         </p:nvSpPr>
         <p:spPr>
           <a:xfrm>
-            <a:off x="1116000" y="4644000"/>
+            <a:off x="1116000" y="4608000"/>
             <a:ext cx="13320000" cy="360000"/>
           </a:xfrm>
           <a:prstGeom prst="rect">
@@ -4521,21 +4446,21 @@
                 <a:ea typeface="DFKai-SB"/>
                 <a:cs typeface="Times New Roman"/>
               </a:rPr>
-              <a:t>四階段方法，以同一事件銜接</a:t>
-            </a:r>
-          </a:p>
-        </p:txBody>
-      </p:sp>
-      <p:sp>
-        <p:nvSpPr>
-          <p:cNvPr id="12" name="Rectangle 11"/>
+              <a:t>四階段方法，串成同一條事件鏈</a:t>
+            </a:r>
+          </a:p>
+        </p:txBody>
+      </p:sp>
+      <p:sp>
+        <p:nvSpPr>
+          <p:cNvPr id="10" name="Rectangle 9"/>
           <p:cNvSpPr/>
           <p:nvPr/>
         </p:nvSpPr>
         <p:spPr>
           <a:xfrm>
             <a:off x="576000" y="5220000"/>
-            <a:ext cx="6624000" cy="3276000"/>
+            <a:ext cx="13968000" cy="1800000"/>
           </a:xfrm>
           <a:prstGeom prst="rect">
             <a:avLst/>
@@ -4579,14 +4504,14 @@
       </p:sp>
       <p:sp>
         <p:nvSpPr>
-          <p:cNvPr id="13" name="Rectangle 12"/>
+          <p:cNvPr id="11" name="Rectangle 10"/>
           <p:cNvSpPr/>
           <p:nvPr/>
         </p:nvSpPr>
         <p:spPr>
           <a:xfrm>
             <a:off x="576000" y="5220000"/>
-            <a:ext cx="6624000" cy="46800"/>
+            <a:ext cx="54000" cy="1800000"/>
           </a:xfrm>
           <a:prstGeom prst="rect">
             <a:avLst/>
@@ -4628,18 +4553,18 @@
       </p:sp>
       <p:sp>
         <p:nvSpPr>
-          <p:cNvPr id="14" name="TextBox 13"/>
+          <p:cNvPr id="12" name="TextBox 11"/>
           <p:cNvSpPr txBox="1"/>
           <p:nvPr>
             <p:custDataLst>
-              <p:tags r:id="rId8"/>
+              <p:tags r:id="rId7"/>
             </p:custDataLst>
           </p:nvPr>
         </p:nvSpPr>
         <p:spPr>
           <a:xfrm>
-            <a:off x="864000" y="5400000"/>
-            <a:ext cx="432000" cy="360000"/>
+            <a:off x="828000" y="5364000"/>
+            <a:ext cx="360000" cy="288000"/>
           </a:xfrm>
           <a:prstGeom prst="rect">
             <a:avLst/>
@@ -4664,7 +4589,7 @@
               </a:spcAft>
             </a:pPr>
             <a:r>
-              <a:rPr sz="1800" b="1">
+              <a:rPr sz="1600" b="1">
                 <a:solidFill>
                   <a:srgbClr val="105186"/>
                 </a:solidFill>
@@ -4672,25 +4597,25 @@
                 <a:ea typeface="DFKai-SB"/>
                 <a:cs typeface="Times New Roman"/>
               </a:rPr>
-              <a:t>1</a:t>
-            </a:r>
-          </a:p>
-        </p:txBody>
-      </p:sp>
-      <p:sp>
-        <p:nvSpPr>
-          <p:cNvPr id="15" name="TextBox 14"/>
+              <a:t>01</a:t>
+            </a:r>
+          </a:p>
+        </p:txBody>
+      </p:sp>
+      <p:sp>
+        <p:nvSpPr>
+          <p:cNvPr id="13" name="TextBox 12"/>
           <p:cNvSpPr txBox="1"/>
           <p:nvPr>
             <p:custDataLst>
-              <p:tags r:id="rId9"/>
+              <p:tags r:id="rId8"/>
             </p:custDataLst>
           </p:nvPr>
         </p:nvSpPr>
         <p:spPr>
           <a:xfrm>
-            <a:off x="1404000" y="5400000"/>
-            <a:ext cx="5256000" cy="360000"/>
+            <a:off x="1332000" y="5328000"/>
+            <a:ext cx="2628000" cy="360000"/>
           </a:xfrm>
           <a:prstGeom prst="rect">
             <a:avLst/>
@@ -4723,29 +4648,80 @@
                 <a:ea typeface="DFKai-SB"/>
                 <a:cs typeface="Times New Roman"/>
               </a:rPr>
-              <a:t>互補模型判定</a:t>
+              <a:t>互補判定</a:t>
+            </a:r>
+          </a:p>
+        </p:txBody>
+      </p:sp>
+      <p:sp>
+        <p:nvSpPr>
+          <p:cNvPr id="14" name="TextBox 13"/>
+          <p:cNvSpPr txBox="1"/>
+          <p:nvPr>
+            <p:custDataLst>
+              <p:tags r:id="rId9"/>
+            </p:custDataLst>
+          </p:nvPr>
+        </p:nvSpPr>
+        <p:spPr>
+          <a:xfrm>
+            <a:off x="1332000" y="5724000"/>
+            <a:ext cx="2628000" cy="288000"/>
+          </a:xfrm>
+          <a:prstGeom prst="rect">
+            <a:avLst/>
+          </a:prstGeom>
+          <a:noFill/>
+        </p:spPr>
+        <p:txBody>
+          <a:bodyPr wrap="none" lIns="0" tIns="0" rIns="0" bIns="0" anchor="ctr">
+            <a:spAutoFit/>
+          </a:bodyPr>
+          <a:lstStyle/>
+          <a:p>
+            <a:pPr algn="l">
+              <a:lnSpc>
+                <a:spcPct val="110000"/>
+              </a:lnSpc>
+              <a:spcBef>
+                <a:spcPts val="0"/>
+              </a:spcBef>
+              <a:spcAft>
+                <a:spcPts val="0"/>
+              </a:spcAft>
+            </a:pPr>
+            <a:r>
+              <a:rPr sz="1500" b="0">
+                <a:solidFill>
+                  <a:srgbClr val="53666E"/>
+                </a:solidFill>
+                <a:latin typeface="Times New Roman"/>
+                <a:ea typeface="DFKai-SB"/>
+                <a:cs typeface="Times New Roman"/>
+              </a:rPr>
+              <a:t>內容＋時序</a:t>
             </a:r>
           </a:p>
         </p:txBody>
       </p:sp>
       <p:pic>
         <p:nvPicPr>
-          <p:cNvPr id="16" name="Picture 15" descr="flat-icon-2.png"/>
+          <p:cNvPr id="15" name="Picture 14" descr="flat-icon-2.png"/>
           <p:cNvPicPr>
             <a:picLocks noChangeAspect="1"/>
           </p:cNvPicPr>
           <p:nvPr/>
         </p:nvPicPr>
         <p:blipFill>
-          <a:blip r:embed="rId71"/>
+          <a:blip r:embed="rId78"/>
           <a:stretch>
             <a:fillRect/>
           </a:stretch>
         </p:blipFill>
         <p:spPr>
           <a:xfrm>
-            <a:off x="864000" y="6012000"/>
-            <a:ext cx="900000" cy="900000"/>
+            <a:off x="900000" y="6120000"/>
+            <a:ext cx="756000" cy="756000"/>
           </a:xfrm>
           <a:prstGeom prst="rect">
             <a:avLst/>
@@ -4754,116 +4730,14 @@
       </p:pic>
       <p:sp>
         <p:nvSpPr>
-          <p:cNvPr id="17" name="TextBox 16"/>
-          <p:cNvSpPr txBox="1"/>
-          <p:nvPr>
-            <p:custDataLst>
-              <p:tags r:id="rId10"/>
-            </p:custDataLst>
-          </p:nvPr>
-        </p:nvSpPr>
-        <p:spPr>
-          <a:xfrm>
-            <a:off x="2016000" y="6048000"/>
-            <a:ext cx="4932000" cy="468000"/>
-          </a:xfrm>
-          <a:prstGeom prst="rect">
-            <a:avLst/>
-          </a:prstGeom>
-          <a:noFill/>
-        </p:spPr>
-        <p:txBody>
-          <a:bodyPr wrap="none" lIns="0" tIns="0" rIns="0" bIns="0" anchor="ctr">
-            <a:spAutoFit/>
-          </a:bodyPr>
-          <a:lstStyle/>
-          <a:p>
-            <a:pPr algn="l">
-              <a:lnSpc>
-                <a:spcPct val="110000"/>
-              </a:lnSpc>
-              <a:spcBef>
-                <a:spcPts val="0"/>
-              </a:spcBef>
-              <a:spcAft>
-                <a:spcPts val="0"/>
-              </a:spcAft>
-            </a:pPr>
-            <a:r>
-              <a:rPr sz="1800" b="0">
-                <a:solidFill>
-                  <a:srgbClr val="171C1D"/>
-                </a:solidFill>
-                <a:latin typeface="Times New Roman"/>
-                <a:ea typeface="DFKai-SB"/>
-                <a:cs typeface="Times New Roman"/>
-              </a:rPr>
-              <a:t>CTBM：內容、時間差、方向</a:t>
-            </a:r>
-          </a:p>
-        </p:txBody>
-      </p:sp>
-      <p:sp>
-        <p:nvSpPr>
-          <p:cNvPr id="18" name="TextBox 17"/>
-          <p:cNvSpPr txBox="1"/>
-          <p:nvPr>
-            <p:custDataLst>
-              <p:tags r:id="rId11"/>
-            </p:custDataLst>
-          </p:nvPr>
-        </p:nvSpPr>
-        <p:spPr>
-          <a:xfrm>
-            <a:off x="2016000" y="6552000"/>
-            <a:ext cx="4932000" cy="468000"/>
-          </a:xfrm>
-          <a:prstGeom prst="rect">
-            <a:avLst/>
-          </a:prstGeom>
-          <a:noFill/>
-        </p:spPr>
-        <p:txBody>
-          <a:bodyPr wrap="none" lIns="0" tIns="0" rIns="0" bIns="0" anchor="ctr">
-            <a:spAutoFit/>
-          </a:bodyPr>
-          <a:lstStyle/>
-          <a:p>
-            <a:pPr algn="l">
-              <a:lnSpc>
-                <a:spcPct val="110000"/>
-              </a:lnSpc>
-              <a:spcBef>
-                <a:spcPts val="0"/>
-              </a:spcBef>
-              <a:spcAft>
-                <a:spcPts val="0"/>
-              </a:spcAft>
-            </a:pPr>
-            <a:r>
-              <a:rPr sz="1800" b="0">
-                <a:solidFill>
-                  <a:srgbClr val="171C1D"/>
-                </a:solidFill>
-                <a:latin typeface="Times New Roman"/>
-                <a:ea typeface="DFKai-SB"/>
-                <a:cs typeface="Times New Roman"/>
-              </a:rPr>
-              <a:t>PBCNN：短窗位元組模式</a:t>
-            </a:r>
-          </a:p>
-        </p:txBody>
-      </p:sp>
-      <p:sp>
-        <p:nvSpPr>
-          <p:cNvPr id="19" name="Down Arrow 18"/>
+          <p:cNvPr id="16" name="Down Arrow 15"/>
           <p:cNvSpPr/>
           <p:nvPr/>
         </p:nvSpPr>
         <p:spPr>
           <a:xfrm>
-            <a:off x="3564000" y="7200000"/>
-            <a:ext cx="648000" cy="252000"/>
+            <a:off x="9252000" y="7038000"/>
+            <a:ext cx="288000" cy="180000"/>
           </a:xfrm>
           <a:prstGeom prst="downArrow">
             <a:avLst/>
@@ -4905,116 +4779,14 @@
       </p:sp>
       <p:sp>
         <p:nvSpPr>
-          <p:cNvPr id="20" name="TextBox 19"/>
-          <p:cNvSpPr txBox="1"/>
-          <p:nvPr>
-            <p:custDataLst>
-              <p:tags r:id="rId12"/>
-            </p:custDataLst>
-          </p:nvPr>
-        </p:nvSpPr>
-        <p:spPr>
-          <a:xfrm>
-            <a:off x="832250" y="7596000"/>
-            <a:ext cx="6048000" cy="360000"/>
-          </a:xfrm>
-          <a:prstGeom prst="rect">
-            <a:avLst/>
-          </a:prstGeom>
-          <a:noFill/>
-        </p:spPr>
-        <p:txBody>
-          <a:bodyPr wrap="none" lIns="0" tIns="0" rIns="0" bIns="0" anchor="ctr">
-            <a:spAutoFit/>
-          </a:bodyPr>
-          <a:lstStyle/>
-          <a:p>
-            <a:pPr algn="ctr">
-              <a:lnSpc>
-                <a:spcPct val="110000"/>
-              </a:lnSpc>
-              <a:spcBef>
-                <a:spcPts val="0"/>
-              </a:spcBef>
-              <a:spcAft>
-                <a:spcPts val="0"/>
-              </a:spcAft>
-            </a:pPr>
-            <a:r>
-              <a:rPr sz="2000" b="1">
-                <a:solidFill>
-                  <a:srgbClr val="105186"/>
-                </a:solidFill>
-                <a:latin typeface="Times New Roman"/>
-                <a:ea typeface="DFKai-SB"/>
-                <a:cs typeface="Times New Roman"/>
-              </a:rPr>
-              <a:t>校準＋OOF Gate 融合</a:t>
-            </a:r>
-          </a:p>
-        </p:txBody>
-      </p:sp>
-      <p:sp>
-        <p:nvSpPr>
-          <p:cNvPr id="21" name="TextBox 20"/>
-          <p:cNvSpPr txBox="1"/>
-          <p:nvPr>
-            <p:custDataLst>
-              <p:tags r:id="rId13"/>
-            </p:custDataLst>
-          </p:nvPr>
-        </p:nvSpPr>
-        <p:spPr>
-          <a:xfrm>
-            <a:off x="840187" y="8100000"/>
-            <a:ext cx="6048000" cy="252000"/>
-          </a:xfrm>
-          <a:prstGeom prst="rect">
-            <a:avLst/>
-          </a:prstGeom>
-          <a:noFill/>
-        </p:spPr>
-        <p:txBody>
-          <a:bodyPr wrap="none" lIns="0" tIns="0" rIns="0" bIns="0" anchor="ctr">
-            <a:spAutoFit/>
-          </a:bodyPr>
-          <a:lstStyle/>
-          <a:p>
-            <a:pPr algn="ctr">
-              <a:lnSpc>
-                <a:spcPct val="110000"/>
-              </a:lnSpc>
-              <a:spcBef>
-                <a:spcPts val="0"/>
-              </a:spcBef>
-              <a:spcAft>
-                <a:spcPts val="0"/>
-              </a:spcAft>
-            </a:pPr>
-            <a:r>
-              <a:rPr sz="1500" b="0">
-                <a:solidFill>
-                  <a:srgbClr val="53666E"/>
-                </a:solidFill>
-                <a:latin typeface="Times New Roman"/>
-                <a:ea typeface="DFKai-SB"/>
-                <a:cs typeface="Times New Roman"/>
-              </a:rPr>
-              <a:t>輸出：17類判定、信心與512維表徵</a:t>
-            </a:r>
-          </a:p>
-        </p:txBody>
-      </p:sp>
-      <p:sp>
-        <p:nvSpPr>
-          <p:cNvPr id="22" name="Rectangle 21"/>
+          <p:cNvPr id="17" name="Rectangle 16"/>
           <p:cNvSpPr/>
           <p:nvPr/>
         </p:nvSpPr>
         <p:spPr>
           <a:xfrm>
-            <a:off x="7920000" y="5220000"/>
-            <a:ext cx="6624000" cy="3276000"/>
+            <a:off x="576000" y="7236000"/>
+            <a:ext cx="13968000" cy="1800000"/>
           </a:xfrm>
           <a:prstGeom prst="rect">
             <a:avLst/>
@@ -5058,14 +4830,14 @@
       </p:sp>
       <p:sp>
         <p:nvSpPr>
-          <p:cNvPr id="23" name="Rectangle 22"/>
+          <p:cNvPr id="18" name="Rectangle 17"/>
           <p:cNvSpPr/>
           <p:nvPr/>
         </p:nvSpPr>
         <p:spPr>
           <a:xfrm>
-            <a:off x="7920000" y="5220000"/>
-            <a:ext cx="6624000" cy="46800"/>
+            <a:off x="576000" y="7236000"/>
+            <a:ext cx="54000" cy="1800000"/>
           </a:xfrm>
           <a:prstGeom prst="rect">
             <a:avLst/>
@@ -5107,18 +4879,18 @@
       </p:sp>
       <p:sp>
         <p:nvSpPr>
-          <p:cNvPr id="24" name="TextBox 23"/>
+          <p:cNvPr id="19" name="TextBox 18"/>
           <p:cNvSpPr txBox="1"/>
           <p:nvPr>
             <p:custDataLst>
-              <p:tags r:id="rId14"/>
+              <p:tags r:id="rId10"/>
             </p:custDataLst>
           </p:nvPr>
         </p:nvSpPr>
         <p:spPr>
           <a:xfrm>
-            <a:off x="8208000" y="5400000"/>
-            <a:ext cx="432000" cy="360000"/>
+            <a:off x="828000" y="7380000"/>
+            <a:ext cx="360000" cy="288000"/>
           </a:xfrm>
           <a:prstGeom prst="rect">
             <a:avLst/>
@@ -5143,7 +4915,7 @@
               </a:spcAft>
             </a:pPr>
             <a:r>
-              <a:rPr sz="1800" b="1">
+              <a:rPr sz="1600" b="1">
                 <a:solidFill>
                   <a:srgbClr val="105186"/>
                 </a:solidFill>
@@ -5151,25 +4923,25 @@
                 <a:ea typeface="DFKai-SB"/>
                 <a:cs typeface="Times New Roman"/>
               </a:rPr>
-              <a:t>2</a:t>
-            </a:r>
-          </a:p>
-        </p:txBody>
-      </p:sp>
-      <p:sp>
-        <p:nvSpPr>
-          <p:cNvPr id="25" name="TextBox 24"/>
+              <a:t>02</a:t>
+            </a:r>
+          </a:p>
+        </p:txBody>
+      </p:sp>
+      <p:sp>
+        <p:nvSpPr>
+          <p:cNvPr id="20" name="TextBox 19"/>
           <p:cNvSpPr txBox="1"/>
           <p:nvPr>
             <p:custDataLst>
-              <p:tags r:id="rId15"/>
+              <p:tags r:id="rId11"/>
             </p:custDataLst>
           </p:nvPr>
         </p:nvSpPr>
         <p:spPr>
           <a:xfrm>
-            <a:off x="8748000" y="5400000"/>
-            <a:ext cx="5256000" cy="360000"/>
+            <a:off x="1332000" y="7344000"/>
+            <a:ext cx="2628000" cy="360000"/>
           </a:xfrm>
           <a:prstGeom prst="rect">
             <a:avLst/>
@@ -5202,29 +4974,80 @@
                 <a:ea typeface="DFKai-SB"/>
                 <a:cs typeface="Times New Roman"/>
               </a:rPr>
-              <a:t>任務導向案例檢索</a:t>
+              <a:t>任務檢索</a:t>
+            </a:r>
+          </a:p>
+        </p:txBody>
+      </p:sp>
+      <p:sp>
+        <p:nvSpPr>
+          <p:cNvPr id="21" name="TextBox 20"/>
+          <p:cNvSpPr txBox="1"/>
+          <p:nvPr>
+            <p:custDataLst>
+              <p:tags r:id="rId12"/>
+            </p:custDataLst>
+          </p:nvPr>
+        </p:nvSpPr>
+        <p:spPr>
+          <a:xfrm>
+            <a:off x="1332000" y="7740000"/>
+            <a:ext cx="2628000" cy="288000"/>
+          </a:xfrm>
+          <a:prstGeom prst="rect">
+            <a:avLst/>
+          </a:prstGeom>
+          <a:noFill/>
+        </p:spPr>
+        <p:txBody>
+          <a:bodyPr wrap="none" lIns="0" tIns="0" rIns="0" bIns="0" anchor="ctr">
+            <a:spAutoFit/>
+          </a:bodyPr>
+          <a:lstStyle/>
+          <a:p>
+            <a:pPr algn="l">
+              <a:lnSpc>
+                <a:spcPct val="110000"/>
+              </a:lnSpc>
+              <a:spcBef>
+                <a:spcPts val="0"/>
+              </a:spcBef>
+              <a:spcAft>
+                <a:spcPts val="0"/>
+              </a:spcAft>
+            </a:pPr>
+            <a:r>
+              <a:rPr sz="1500" b="0">
+                <a:solidFill>
+                  <a:srgbClr val="53666E"/>
+                </a:solidFill>
+                <a:latin typeface="Times New Roman"/>
+                <a:ea typeface="DFKai-SB"/>
+                <a:cs typeface="Times New Roman"/>
+              </a:rPr>
+              <a:t>表徵＋機率</a:t>
             </a:r>
           </a:p>
         </p:txBody>
       </p:sp>
       <p:pic>
         <p:nvPicPr>
-          <p:cNvPr id="26" name="Picture 25" descr="flat-icon-3.png"/>
+          <p:cNvPr id="22" name="Picture 21" descr="flat-icon-3.png"/>
           <p:cNvPicPr>
             <a:picLocks noChangeAspect="1"/>
           </p:cNvPicPr>
           <p:nvPr/>
         </p:nvPicPr>
         <p:blipFill>
-          <a:blip r:embed="rId72"/>
+          <a:blip r:embed="rId79"/>
           <a:stretch>
             <a:fillRect/>
           </a:stretch>
         </p:blipFill>
         <p:spPr>
           <a:xfrm>
-            <a:off x="8208000" y="6012000"/>
-            <a:ext cx="900000" cy="900000"/>
+            <a:off x="900000" y="8136000"/>
+            <a:ext cx="756000" cy="756000"/>
           </a:xfrm>
           <a:prstGeom prst="rect">
             <a:avLst/>
@@ -5233,116 +5056,14 @@
       </p:pic>
       <p:sp>
         <p:nvSpPr>
-          <p:cNvPr id="27" name="TextBox 26"/>
-          <p:cNvSpPr txBox="1"/>
-          <p:nvPr>
-            <p:custDataLst>
-              <p:tags r:id="rId16"/>
-            </p:custDataLst>
-          </p:nvPr>
-        </p:nvSpPr>
-        <p:spPr>
-          <a:xfrm>
-            <a:off x="9360000" y="6048000"/>
-            <a:ext cx="4932000" cy="468000"/>
-          </a:xfrm>
-          <a:prstGeom prst="rect">
-            <a:avLst/>
-          </a:prstGeom>
-          <a:noFill/>
-        </p:spPr>
-        <p:txBody>
-          <a:bodyPr wrap="none" lIns="0" tIns="0" rIns="0" bIns="0" anchor="ctr">
-            <a:spAutoFit/>
-          </a:bodyPr>
-          <a:lstStyle/>
-          <a:p>
-            <a:pPr algn="l">
-              <a:lnSpc>
-                <a:spcPct val="110000"/>
-              </a:lnSpc>
-              <a:spcBef>
-                <a:spcPts val="0"/>
-              </a:spcBef>
-              <a:spcAft>
-                <a:spcPts val="0"/>
-              </a:spcAft>
-            </a:pPr>
-            <a:r>
-              <a:rPr sz="2000" b="0">
-                <a:solidFill>
-                  <a:srgbClr val="171C1D"/>
-                </a:solidFill>
-                <a:latin typeface="Times New Roman"/>
-                <a:ea typeface="DFKai-SB"/>
-                <a:cs typeface="Times New Roman"/>
-              </a:rPr>
-              <a:t>512維表徵＋17維機率</a:t>
-            </a:r>
-          </a:p>
-        </p:txBody>
-      </p:sp>
-      <p:sp>
-        <p:nvSpPr>
-          <p:cNvPr id="28" name="TextBox 27"/>
-          <p:cNvSpPr txBox="1"/>
-          <p:nvPr>
-            <p:custDataLst>
-              <p:tags r:id="rId17"/>
-            </p:custDataLst>
-          </p:nvPr>
-        </p:nvSpPr>
-        <p:spPr>
-          <a:xfrm>
-            <a:off x="9360000" y="6552000"/>
-            <a:ext cx="4932000" cy="468000"/>
-          </a:xfrm>
-          <a:prstGeom prst="rect">
-            <a:avLst/>
-          </a:prstGeom>
-          <a:noFill/>
-        </p:spPr>
-        <p:txBody>
-          <a:bodyPr wrap="none" lIns="0" tIns="0" rIns="0" bIns="0" anchor="ctr">
-            <a:spAutoFit/>
-          </a:bodyPr>
-          <a:lstStyle/>
-          <a:p>
-            <a:pPr algn="l">
-              <a:lnSpc>
-                <a:spcPct val="110000"/>
-              </a:lnSpc>
-              <a:spcBef>
-                <a:spcPts val="0"/>
-              </a:spcBef>
-              <a:spcAft>
-                <a:spcPts val="0"/>
-              </a:spcAft>
-            </a:pPr>
-            <a:r>
-              <a:rPr sz="1800" b="0">
-                <a:solidFill>
-                  <a:srgbClr val="171C1D"/>
-                </a:solidFill>
-                <a:latin typeface="Times New Roman"/>
-                <a:ea typeface="DFKai-SB"/>
-                <a:cs typeface="Times New Roman"/>
-              </a:rPr>
-              <a:t>529維任務向量，L2正規化</a:t>
-            </a:r>
-          </a:p>
-        </p:txBody>
-      </p:sp>
-      <p:sp>
-        <p:nvSpPr>
-          <p:cNvPr id="29" name="Down Arrow 28"/>
+          <p:cNvPr id="23" name="Down Arrow 22"/>
           <p:cNvSpPr/>
           <p:nvPr/>
         </p:nvSpPr>
         <p:spPr>
           <a:xfrm>
-            <a:off x="10908000" y="7200000"/>
-            <a:ext cx="648000" cy="252000"/>
+            <a:off x="9252000" y="9054000"/>
+            <a:ext cx="288000" cy="180000"/>
           </a:xfrm>
           <a:prstGeom prst="downArrow">
             <a:avLst/>
@@ -5384,214 +5105,14 @@
       </p:sp>
       <p:sp>
         <p:nvSpPr>
-          <p:cNvPr id="30" name="TextBox 29"/>
-          <p:cNvSpPr txBox="1"/>
-          <p:nvPr>
-            <p:custDataLst>
-              <p:tags r:id="rId18"/>
-            </p:custDataLst>
-          </p:nvPr>
-        </p:nvSpPr>
-        <p:spPr>
-          <a:xfrm>
-            <a:off x="8176249" y="7596000"/>
-            <a:ext cx="6048000" cy="360000"/>
-          </a:xfrm>
-          <a:prstGeom prst="rect">
-            <a:avLst/>
-          </a:prstGeom>
-          <a:noFill/>
-        </p:spPr>
-        <p:txBody>
-          <a:bodyPr wrap="none" lIns="0" tIns="0" rIns="0" bIns="0" anchor="ctr">
-            <a:spAutoFit/>
-          </a:bodyPr>
-          <a:lstStyle/>
-          <a:p>
-            <a:pPr algn="ctr">
-              <a:lnSpc>
-                <a:spcPct val="110000"/>
-              </a:lnSpc>
-              <a:spcBef>
-                <a:spcPts val="0"/>
-              </a:spcBef>
-              <a:spcAft>
-                <a:spcPts val="0"/>
-              </a:spcAft>
-            </a:pPr>
-            <a:r>
-              <a:rPr sz="2000" b="1">
-                <a:solidFill>
-                  <a:srgbClr val="105186"/>
-                </a:solidFill>
-                <a:latin typeface="Times New Roman"/>
-                <a:ea typeface="DFKai-SB"/>
-                <a:cs typeface="Times New Roman"/>
-              </a:rPr>
-              <a:t>Top-5 訓練案例證據</a:t>
-            </a:r>
-          </a:p>
-        </p:txBody>
-      </p:sp>
-      <p:sp>
-        <p:nvSpPr>
-          <p:cNvPr id="31" name="TextBox 30"/>
-          <p:cNvSpPr txBox="1"/>
-          <p:nvPr>
-            <p:custDataLst>
-              <p:tags r:id="rId19"/>
-            </p:custDataLst>
-          </p:nvPr>
-        </p:nvSpPr>
-        <p:spPr>
-          <a:xfrm>
-            <a:off x="8184187" y="8100000"/>
-            <a:ext cx="6048000" cy="252000"/>
-          </a:xfrm>
-          <a:prstGeom prst="rect">
-            <a:avLst/>
-          </a:prstGeom>
-          <a:noFill/>
-        </p:spPr>
-        <p:txBody>
-          <a:bodyPr wrap="none" lIns="0" tIns="0" rIns="0" bIns="0" anchor="ctr">
-            <a:spAutoFit/>
-          </a:bodyPr>
-          <a:lstStyle/>
-          <a:p>
-            <a:pPr algn="ctr">
-              <a:lnSpc>
-                <a:spcPct val="110000"/>
-              </a:lnSpc>
-              <a:spcBef>
-                <a:spcPts val="0"/>
-              </a:spcBef>
-              <a:spcAft>
-                <a:spcPts val="0"/>
-              </a:spcAft>
-            </a:pPr>
-            <a:r>
-              <a:rPr sz="1500" b="0">
-                <a:solidFill>
-                  <a:srgbClr val="53666E"/>
-                </a:solidFill>
-                <a:latin typeface="Times New Roman"/>
-                <a:ea typeface="DFKai-SB"/>
-                <a:cs typeface="Times New Roman"/>
-              </a:rPr>
-              <a:t>案例庫僅由訓練資料建立</a:t>
-            </a:r>
-          </a:p>
-        </p:txBody>
-      </p:sp>
-      <p:sp>
-        <p:nvSpPr>
-          <p:cNvPr id="32" name="Right Arrow 31"/>
+          <p:cNvPr id="24" name="Rectangle 23"/>
           <p:cNvSpPr/>
           <p:nvPr/>
         </p:nvSpPr>
         <p:spPr>
           <a:xfrm>
-            <a:off x="7272000" y="6588000"/>
-            <a:ext cx="576000" cy="288000"/>
-          </a:xfrm>
-          <a:prstGeom prst="rightArrow">
-            <a:avLst/>
-          </a:prstGeom>
-          <a:solidFill>
-            <a:srgbClr val="105186"/>
-          </a:solidFill>
-          <a:ln>
-            <a:noFill/>
-          </a:ln>
-          <a:effectLst/>
-        </p:spPr>
-        <p:style>
-          <a:lnRef idx="1">
-            <a:schemeClr val="accent1"/>
-          </a:lnRef>
-          <a:fillRef idx="3">
-            <a:schemeClr val="accent1"/>
-          </a:fillRef>
-          <a:effectRef idx="2">
-            <a:schemeClr val="accent1"/>
-          </a:effectRef>
-          <a:fontRef idx="minor">
-            <a:schemeClr val="lt1"/>
-          </a:fontRef>
-        </p:style>
-        <p:txBody>
-          <a:bodyPr rtlCol="0" anchor="ctr"/>
-          <a:lstStyle/>
-          <a:p>
-            <a:pPr algn="ctr"/>
-            <a:endParaRPr>
-              <a:latin typeface="Times New Roman"/>
-              <a:ea typeface="DFKai-SB"/>
-              <a:cs typeface="Times New Roman"/>
-            </a:endParaRPr>
-          </a:p>
-        </p:txBody>
-      </p:sp>
-      <p:sp>
-        <p:nvSpPr>
-          <p:cNvPr id="33" name="Down Arrow 32"/>
-          <p:cNvSpPr/>
-          <p:nvPr/>
-        </p:nvSpPr>
-        <p:spPr>
-          <a:xfrm>
-            <a:off x="11052000" y="8568000"/>
-            <a:ext cx="360000" cy="468000"/>
-          </a:xfrm>
-          <a:prstGeom prst="downArrow">
-            <a:avLst/>
-          </a:prstGeom>
-          <a:solidFill>
-            <a:srgbClr val="105186"/>
-          </a:solidFill>
-          <a:ln>
-            <a:noFill/>
-          </a:ln>
-          <a:effectLst/>
-        </p:spPr>
-        <p:style>
-          <a:lnRef idx="1">
-            <a:schemeClr val="accent1"/>
-          </a:lnRef>
-          <a:fillRef idx="3">
-            <a:schemeClr val="accent1"/>
-          </a:fillRef>
-          <a:effectRef idx="2">
-            <a:schemeClr val="accent1"/>
-          </a:effectRef>
-          <a:fontRef idx="minor">
-            <a:schemeClr val="lt1"/>
-          </a:fontRef>
-        </p:style>
-        <p:txBody>
-          <a:bodyPr rtlCol="0" anchor="ctr"/>
-          <a:lstStyle/>
-          <a:p>
-            <a:pPr algn="ctr"/>
-            <a:endParaRPr>
-              <a:latin typeface="Times New Roman"/>
-              <a:ea typeface="DFKai-SB"/>
-              <a:cs typeface="Times New Roman"/>
-            </a:endParaRPr>
-          </a:p>
-        </p:txBody>
-      </p:sp>
-      <p:sp>
-        <p:nvSpPr>
-          <p:cNvPr id="34" name="Rectangle 33"/>
-          <p:cNvSpPr/>
-          <p:nvPr/>
-        </p:nvSpPr>
-        <p:spPr>
-          <a:xfrm>
-            <a:off x="7920000" y="9108000"/>
-            <a:ext cx="6624000" cy="3276000"/>
+            <a:off x="576000" y="9252000"/>
+            <a:ext cx="13968000" cy="1800000"/>
           </a:xfrm>
           <a:prstGeom prst="rect">
             <a:avLst/>
@@ -5635,14 +5156,14 @@
       </p:sp>
       <p:sp>
         <p:nvSpPr>
-          <p:cNvPr id="35" name="Rectangle 34"/>
+          <p:cNvPr id="25" name="Rectangle 24"/>
           <p:cNvSpPr/>
           <p:nvPr/>
         </p:nvSpPr>
         <p:spPr>
           <a:xfrm>
-            <a:off x="7920000" y="9108000"/>
-            <a:ext cx="6624000" cy="46800"/>
+            <a:off x="576000" y="9252000"/>
+            <a:ext cx="54000" cy="1800000"/>
           </a:xfrm>
           <a:prstGeom prst="rect">
             <a:avLst/>
@@ -5684,18 +5205,18 @@
       </p:sp>
       <p:sp>
         <p:nvSpPr>
-          <p:cNvPr id="36" name="TextBox 35"/>
+          <p:cNvPr id="26" name="TextBox 25"/>
           <p:cNvSpPr txBox="1"/>
           <p:nvPr>
             <p:custDataLst>
-              <p:tags r:id="rId20"/>
+              <p:tags r:id="rId13"/>
             </p:custDataLst>
           </p:nvPr>
         </p:nvSpPr>
         <p:spPr>
           <a:xfrm>
-            <a:off x="8208000" y="9288000"/>
-            <a:ext cx="432000" cy="360000"/>
+            <a:off x="828000" y="9396000"/>
+            <a:ext cx="360000" cy="288000"/>
           </a:xfrm>
           <a:prstGeom prst="rect">
             <a:avLst/>
@@ -5720,7 +5241,7 @@
               </a:spcAft>
             </a:pPr>
             <a:r>
-              <a:rPr sz="1800" b="1">
+              <a:rPr sz="1600" b="1">
                 <a:solidFill>
                   <a:srgbClr val="105186"/>
                 </a:solidFill>
@@ -5728,25 +5249,25 @@
                 <a:ea typeface="DFKai-SB"/>
                 <a:cs typeface="Times New Roman"/>
               </a:rPr>
-              <a:t>3</a:t>
-            </a:r>
-          </a:p>
-        </p:txBody>
-      </p:sp>
-      <p:sp>
-        <p:nvSpPr>
-          <p:cNvPr id="37" name="TextBox 36"/>
+              <a:t>03</a:t>
+            </a:r>
+          </a:p>
+        </p:txBody>
+      </p:sp>
+      <p:sp>
+        <p:nvSpPr>
+          <p:cNvPr id="27" name="TextBox 26"/>
           <p:cNvSpPr txBox="1"/>
           <p:nvPr>
             <p:custDataLst>
-              <p:tags r:id="rId21"/>
+              <p:tags r:id="rId14"/>
             </p:custDataLst>
           </p:nvPr>
         </p:nvSpPr>
         <p:spPr>
           <a:xfrm>
-            <a:off x="8748000" y="9288000"/>
-            <a:ext cx="5256000" cy="360000"/>
+            <a:off x="1332000" y="9360000"/>
+            <a:ext cx="2628000" cy="360000"/>
           </a:xfrm>
           <a:prstGeom prst="rect">
             <a:avLst/>
@@ -5779,21 +5300,72 @@
                 <a:ea typeface="DFKai-SB"/>
                 <a:cs typeface="Times New Roman"/>
               </a:rPr>
-              <a:t>本機AI證據稽核</a:t>
-            </a:r>
-          </a:p>
-        </p:txBody>
-      </p:sp>
-      <p:sp>
-        <p:nvSpPr>
-          <p:cNvPr id="38" name="Rectangle 37"/>
+              <a:t>證據稽核</a:t>
+            </a:r>
+          </a:p>
+        </p:txBody>
+      </p:sp>
+      <p:sp>
+        <p:nvSpPr>
+          <p:cNvPr id="28" name="TextBox 27"/>
+          <p:cNvSpPr txBox="1"/>
+          <p:nvPr>
+            <p:custDataLst>
+              <p:tags r:id="rId15"/>
+            </p:custDataLst>
+          </p:nvPr>
+        </p:nvSpPr>
+        <p:spPr>
+          <a:xfrm>
+            <a:off x="1332000" y="9756000"/>
+            <a:ext cx="2628000" cy="288000"/>
+          </a:xfrm>
+          <a:prstGeom prst="rect">
+            <a:avLst/>
+          </a:prstGeom>
+          <a:noFill/>
+        </p:spPr>
+        <p:txBody>
+          <a:bodyPr wrap="none" lIns="0" tIns="0" rIns="0" bIns="0" anchor="ctr">
+            <a:spAutoFit/>
+          </a:bodyPr>
+          <a:lstStyle/>
+          <a:p>
+            <a:pPr algn="l">
+              <a:lnSpc>
+                <a:spcPct val="110000"/>
+              </a:lnSpc>
+              <a:spcBef>
+                <a:spcPts val="0"/>
+              </a:spcBef>
+              <a:spcAft>
+                <a:spcPts val="0"/>
+              </a:spcAft>
+            </a:pPr>
+            <a:r>
+              <a:rPr sz="1500" b="0">
+                <a:solidFill>
+                  <a:srgbClr val="53666E"/>
+                </a:solidFill>
+                <a:latin typeface="Times New Roman"/>
+                <a:ea typeface="DFKai-SB"/>
+                <a:cs typeface="Times New Roman"/>
+              </a:rPr>
+              <a:t>保留正式分類</a:t>
+            </a:r>
+          </a:p>
+        </p:txBody>
+      </p:sp>
+      <p:sp>
+        <p:nvSpPr>
+          <p:cNvPr id="29" name="Rectangle 28"/>
           <p:cNvSpPr/>
           <p:nvPr/>
         </p:nvSpPr>
         <p:spPr>
           <a:xfrm>
-            <a:off x="8352000" y="9972000"/>
-            <a:ext cx="648000" cy="792000"/>
+            <a:off x="1044000" y="10152000"/>
+            <a:ext cx="504000" cy="720000"/>
           </a:xfrm>
           <a:prstGeom prst="rect">
             <a:avLst/>
@@ -5837,14 +5409,14 @@
       </p:sp>
       <p:cxnSp>
         <p:nvCxnSpPr>
-          <p:cNvPr id="39" name="Connector 38"/>
+          <p:cNvPr id="30" name="Connector 29"/>
           <p:cNvCxnSpPr/>
           <p:nvPr/>
         </p:nvCxnSpPr>
         <p:spPr>
           <a:xfrm>
-            <a:off x="8460000" y="10152000"/>
-            <a:ext cx="360000" cy="0"/>
+            <a:off x="1152000" y="10296000"/>
+            <a:ext cx="288000" cy="0"/>
           </a:xfrm>
           <a:prstGeom prst="line">
             <a:avLst/>
@@ -5873,14 +5445,14 @@
       </p:cxnSp>
       <p:cxnSp>
         <p:nvCxnSpPr>
-          <p:cNvPr id="40" name="Connector 39"/>
+          <p:cNvPr id="31" name="Connector 30"/>
           <p:cNvCxnSpPr/>
           <p:nvPr/>
         </p:nvCxnSpPr>
         <p:spPr>
           <a:xfrm>
-            <a:off x="8460000" y="10332000"/>
-            <a:ext cx="360000" cy="0"/>
+            <a:off x="1152000" y="10476000"/>
+            <a:ext cx="288000" cy="0"/>
           </a:xfrm>
           <a:prstGeom prst="line">
             <a:avLst/>
@@ -5909,14 +5481,14 @@
       </p:cxnSp>
       <p:cxnSp>
         <p:nvCxnSpPr>
-          <p:cNvPr id="41" name="Connector 40"/>
+          <p:cNvPr id="32" name="Connector 31"/>
           <p:cNvCxnSpPr/>
           <p:nvPr/>
         </p:nvCxnSpPr>
         <p:spPr>
           <a:xfrm>
-            <a:off x="8460000" y="10512000"/>
-            <a:ext cx="360000" cy="0"/>
+            <a:off x="1152000" y="10656000"/>
+            <a:ext cx="288000" cy="0"/>
           </a:xfrm>
           <a:prstGeom prst="line">
             <a:avLst/>
@@ -5943,196 +5515,22 @@
           </a:fontRef>
         </p:style>
       </p:cxnSp>
-      <p:cxnSp>
-        <p:nvCxnSpPr>
-          <p:cNvPr id="42" name="Connector 41"/>
-          <p:cNvCxnSpPr/>
-          <p:nvPr/>
-        </p:nvCxnSpPr>
-        <p:spPr>
-          <a:xfrm>
-            <a:off x="8820000" y="10620000"/>
-            <a:ext cx="144000" cy="144000"/>
-          </a:xfrm>
-          <a:prstGeom prst="line">
-            <a:avLst/>
-          </a:prstGeom>
-          <a:ln w="25400">
-            <a:solidFill>
-              <a:srgbClr val="105186"/>
-            </a:solidFill>
-          </a:ln>
-          <a:effectLst/>
-        </p:spPr>
-        <p:style>
-          <a:lnRef idx="2">
-            <a:schemeClr val="accent1"/>
-          </a:lnRef>
-          <a:fillRef idx="0">
-            <a:schemeClr val="accent1"/>
-          </a:fillRef>
-          <a:effectRef idx="1">
-            <a:schemeClr val="accent1"/>
-          </a:effectRef>
-          <a:fontRef idx="minor">
-            <a:schemeClr val="tx1"/>
-          </a:fontRef>
-        </p:style>
-      </p:cxnSp>
-      <p:cxnSp>
-        <p:nvCxnSpPr>
-          <p:cNvPr id="43" name="Connector 42"/>
-          <p:cNvCxnSpPr/>
-          <p:nvPr/>
-        </p:nvCxnSpPr>
-        <p:spPr>
-          <a:xfrm flipV="1">
-            <a:off x="8964000" y="10440000"/>
-            <a:ext cx="216000" cy="324000"/>
-          </a:xfrm>
-          <a:prstGeom prst="line">
-            <a:avLst/>
-          </a:prstGeom>
-          <a:ln w="25400">
-            <a:solidFill>
-              <a:srgbClr val="105186"/>
-            </a:solidFill>
-          </a:ln>
-          <a:effectLst/>
-        </p:spPr>
-        <p:style>
-          <a:lnRef idx="2">
-            <a:schemeClr val="accent1"/>
-          </a:lnRef>
-          <a:fillRef idx="0">
-            <a:schemeClr val="accent1"/>
-          </a:fillRef>
-          <a:effectRef idx="1">
-            <a:schemeClr val="accent1"/>
-          </a:effectRef>
-          <a:fontRef idx="minor">
-            <a:schemeClr val="tx1"/>
-          </a:fontRef>
-        </p:style>
-      </p:cxnSp>
-      <p:sp>
-        <p:nvSpPr>
-          <p:cNvPr id="44" name="TextBox 43"/>
-          <p:cNvSpPr txBox="1"/>
-          <p:nvPr>
-            <p:custDataLst>
-              <p:tags r:id="rId22"/>
-            </p:custDataLst>
-          </p:nvPr>
-        </p:nvSpPr>
-        <p:spPr>
-          <a:xfrm>
-            <a:off x="9360000" y="9900000"/>
-            <a:ext cx="4932000" cy="432000"/>
-          </a:xfrm>
-          <a:prstGeom prst="rect">
-            <a:avLst/>
-          </a:prstGeom>
-          <a:noFill/>
-        </p:spPr>
-        <p:txBody>
-          <a:bodyPr wrap="none" lIns="0" tIns="0" rIns="0" bIns="0" anchor="ctr">
-            <a:spAutoFit/>
-          </a:bodyPr>
-          <a:lstStyle/>
-          <a:p>
-            <a:pPr algn="l">
-              <a:lnSpc>
-                <a:spcPct val="110000"/>
-              </a:lnSpc>
-              <a:spcBef>
-                <a:spcPts val="0"/>
-              </a:spcBef>
-              <a:spcAft>
-                <a:spcPts val="0"/>
-              </a:spcAft>
-            </a:pPr>
-            <a:r>
-              <a:rPr sz="1900" b="0">
-                <a:solidFill>
-                  <a:srgbClr val="171C1D"/>
-                </a:solidFill>
-                <a:latin typeface="Times New Roman"/>
-                <a:ea typeface="DFKai-SB"/>
-                <a:cs typeface="Times New Roman"/>
-              </a:rPr>
-              <a:t>核對正式判定與相似案例</a:t>
-            </a:r>
-          </a:p>
-        </p:txBody>
-      </p:sp>
-      <p:sp>
-        <p:nvSpPr>
-          <p:cNvPr id="45" name="TextBox 44"/>
-          <p:cNvSpPr txBox="1"/>
-          <p:nvPr>
-            <p:custDataLst>
-              <p:tags r:id="rId23"/>
-            </p:custDataLst>
-          </p:nvPr>
-        </p:nvSpPr>
-        <p:spPr>
-          <a:xfrm>
-            <a:off x="9360000" y="10404000"/>
-            <a:ext cx="4932000" cy="432000"/>
-          </a:xfrm>
-          <a:prstGeom prst="rect">
-            <a:avLst/>
-          </a:prstGeom>
-          <a:noFill/>
-        </p:spPr>
-        <p:txBody>
-          <a:bodyPr wrap="none" lIns="0" tIns="0" rIns="0" bIns="0" anchor="ctr">
-            <a:spAutoFit/>
-          </a:bodyPr>
-          <a:lstStyle/>
-          <a:p>
-            <a:pPr algn="l">
-              <a:lnSpc>
-                <a:spcPct val="110000"/>
-              </a:lnSpc>
-              <a:spcBef>
-                <a:spcPts val="0"/>
-              </a:spcBef>
-              <a:spcAft>
-                <a:spcPts val="0"/>
-              </a:spcAft>
-            </a:pPr>
-            <a:r>
-              <a:rPr sz="1900" b="0">
-                <a:solidFill>
-                  <a:srgbClr val="171C1D"/>
-                </a:solidFill>
-                <a:latin typeface="Times New Roman"/>
-                <a:ea typeface="DFKai-SB"/>
-                <a:cs typeface="Times New Roman"/>
-              </a:rPr>
-              <a:t>保留分類，附加稽核結論</a:t>
-            </a:r>
-          </a:p>
-        </p:txBody>
-      </p:sp>
-      <p:sp>
-        <p:nvSpPr>
-          <p:cNvPr id="46" name="Rectangle 45"/>
+      <p:sp>
+        <p:nvSpPr>
+          <p:cNvPr id="33" name="Down Arrow 32"/>
           <p:cNvSpPr/>
           <p:nvPr/>
         </p:nvSpPr>
         <p:spPr>
           <a:xfrm>
-            <a:off x="8208000" y="11088000"/>
-            <a:ext cx="1836000" cy="540000"/>
-          </a:xfrm>
-          <a:prstGeom prst="rect">
+            <a:off x="9252000" y="11070000"/>
+            <a:ext cx="288000" cy="180000"/>
+          </a:xfrm>
+          <a:prstGeom prst="downArrow">
             <a:avLst/>
           </a:prstGeom>
           <a:solidFill>
-            <a:srgbClr val="EAF0F4"/>
+            <a:srgbClr val="105186"/>
           </a:solidFill>
           <a:ln>
             <a:noFill/>
@@ -6168,316 +5566,14 @@
       </p:sp>
       <p:sp>
         <p:nvSpPr>
-          <p:cNvPr id="47" name="TextBox 46"/>
-          <p:cNvSpPr txBox="1"/>
-          <p:nvPr>
-            <p:custDataLst>
-              <p:tags r:id="rId24"/>
-            </p:custDataLst>
-          </p:nvPr>
-        </p:nvSpPr>
-        <p:spPr>
-          <a:xfrm>
-            <a:off x="8176249" y="11088000"/>
-            <a:ext cx="1836000" cy="540000"/>
-          </a:xfrm>
-          <a:prstGeom prst="rect">
-            <a:avLst/>
-          </a:prstGeom>
-          <a:noFill/>
-        </p:spPr>
-        <p:txBody>
-          <a:bodyPr wrap="none" lIns="0" tIns="0" rIns="0" bIns="0" anchor="ctr">
-            <a:spAutoFit/>
-          </a:bodyPr>
-          <a:lstStyle/>
-          <a:p>
-            <a:pPr algn="ctr">
-              <a:lnSpc>
-                <a:spcPct val="110000"/>
-              </a:lnSpc>
-              <a:spcBef>
-                <a:spcPts val="0"/>
-              </a:spcBef>
-              <a:spcAft>
-                <a:spcPts val="0"/>
-              </a:spcAft>
-            </a:pPr>
-            <a:r>
-              <a:rPr sz="2000" b="0">
-                <a:solidFill>
-                  <a:srgbClr val="105186"/>
-                </a:solidFill>
-                <a:latin typeface="Times New Roman"/>
-                <a:ea typeface="DFKai-SB"/>
-                <a:cs typeface="Times New Roman"/>
-              </a:rPr>
-              <a:t>支持</a:t>
-            </a:r>
-          </a:p>
-        </p:txBody>
-      </p:sp>
-      <p:sp>
-        <p:nvSpPr>
-          <p:cNvPr id="48" name="Rectangle 47"/>
+          <p:cNvPr id="34" name="Rectangle 33"/>
           <p:cNvSpPr/>
           <p:nvPr/>
         </p:nvSpPr>
         <p:spPr>
           <a:xfrm>
-            <a:off x="10314000" y="11088000"/>
-            <a:ext cx="1836000" cy="540000"/>
-          </a:xfrm>
-          <a:prstGeom prst="rect">
-            <a:avLst/>
-          </a:prstGeom>
-          <a:solidFill>
-            <a:srgbClr val="EAF0F4"/>
-          </a:solidFill>
-          <a:ln>
-            <a:noFill/>
-          </a:ln>
-          <a:effectLst/>
-        </p:spPr>
-        <p:style>
-          <a:lnRef idx="1">
-            <a:schemeClr val="accent1"/>
-          </a:lnRef>
-          <a:fillRef idx="3">
-            <a:schemeClr val="accent1"/>
-          </a:fillRef>
-          <a:effectRef idx="2">
-            <a:schemeClr val="accent1"/>
-          </a:effectRef>
-          <a:fontRef idx="minor">
-            <a:schemeClr val="lt1"/>
-          </a:fontRef>
-        </p:style>
-        <p:txBody>
-          <a:bodyPr rtlCol="0" anchor="ctr"/>
-          <a:lstStyle/>
-          <a:p>
-            <a:pPr algn="ctr"/>
-            <a:endParaRPr>
-              <a:latin typeface="Times New Roman"/>
-              <a:ea typeface="DFKai-SB"/>
-              <a:cs typeface="Times New Roman"/>
-            </a:endParaRPr>
-          </a:p>
-        </p:txBody>
-      </p:sp>
-      <p:sp>
-        <p:nvSpPr>
-          <p:cNvPr id="49" name="TextBox 48"/>
-          <p:cNvSpPr txBox="1"/>
-          <p:nvPr>
-            <p:custDataLst>
-              <p:tags r:id="rId25"/>
-            </p:custDataLst>
-          </p:nvPr>
-        </p:nvSpPr>
-        <p:spPr>
-          <a:xfrm>
-            <a:off x="10282250" y="11088000"/>
-            <a:ext cx="1836000" cy="540000"/>
-          </a:xfrm>
-          <a:prstGeom prst="rect">
-            <a:avLst/>
-          </a:prstGeom>
-          <a:noFill/>
-        </p:spPr>
-        <p:txBody>
-          <a:bodyPr wrap="none" lIns="0" tIns="0" rIns="0" bIns="0" anchor="ctr">
-            <a:spAutoFit/>
-          </a:bodyPr>
-          <a:lstStyle/>
-          <a:p>
-            <a:pPr algn="ctr">
-              <a:lnSpc>
-                <a:spcPct val="110000"/>
-              </a:lnSpc>
-              <a:spcBef>
-                <a:spcPts val="0"/>
-              </a:spcBef>
-              <a:spcAft>
-                <a:spcPts val="0"/>
-              </a:spcAft>
-            </a:pPr>
-            <a:r>
-              <a:rPr sz="2000" b="0">
-                <a:solidFill>
-                  <a:srgbClr val="105186"/>
-                </a:solidFill>
-                <a:latin typeface="Times New Roman"/>
-                <a:ea typeface="DFKai-SB"/>
-                <a:cs typeface="Times New Roman"/>
-              </a:rPr>
-              <a:t>複核</a:t>
-            </a:r>
-          </a:p>
-        </p:txBody>
-      </p:sp>
-      <p:sp>
-        <p:nvSpPr>
-          <p:cNvPr id="50" name="Rectangle 49"/>
-          <p:cNvSpPr/>
-          <p:nvPr/>
-        </p:nvSpPr>
-        <p:spPr>
-          <a:xfrm>
-            <a:off x="12420000" y="11088000"/>
-            <a:ext cx="1836000" cy="540000"/>
-          </a:xfrm>
-          <a:prstGeom prst="rect">
-            <a:avLst/>
-          </a:prstGeom>
-          <a:solidFill>
-            <a:srgbClr val="EAF0F4"/>
-          </a:solidFill>
-          <a:ln>
-            <a:noFill/>
-          </a:ln>
-          <a:effectLst/>
-        </p:spPr>
-        <p:style>
-          <a:lnRef idx="1">
-            <a:schemeClr val="accent1"/>
-          </a:lnRef>
-          <a:fillRef idx="3">
-            <a:schemeClr val="accent1"/>
-          </a:fillRef>
-          <a:effectRef idx="2">
-            <a:schemeClr val="accent1"/>
-          </a:effectRef>
-          <a:fontRef idx="minor">
-            <a:schemeClr val="lt1"/>
-          </a:fontRef>
-        </p:style>
-        <p:txBody>
-          <a:bodyPr rtlCol="0" anchor="ctr"/>
-          <a:lstStyle/>
-          <a:p>
-            <a:pPr algn="ctr"/>
-            <a:endParaRPr>
-              <a:latin typeface="Times New Roman"/>
-              <a:ea typeface="DFKai-SB"/>
-              <a:cs typeface="Times New Roman"/>
-            </a:endParaRPr>
-          </a:p>
-        </p:txBody>
-      </p:sp>
-      <p:sp>
-        <p:nvSpPr>
-          <p:cNvPr id="51" name="TextBox 50"/>
-          <p:cNvSpPr txBox="1"/>
-          <p:nvPr>
-            <p:custDataLst>
-              <p:tags r:id="rId26"/>
-            </p:custDataLst>
-          </p:nvPr>
-        </p:nvSpPr>
-        <p:spPr>
-          <a:xfrm>
-            <a:off x="12388250" y="11088000"/>
-            <a:ext cx="1836000" cy="540000"/>
-          </a:xfrm>
-          <a:prstGeom prst="rect">
-            <a:avLst/>
-          </a:prstGeom>
-          <a:noFill/>
-        </p:spPr>
-        <p:txBody>
-          <a:bodyPr wrap="none" lIns="0" tIns="0" rIns="0" bIns="0" anchor="ctr">
-            <a:spAutoFit/>
-          </a:bodyPr>
-          <a:lstStyle/>
-          <a:p>
-            <a:pPr algn="ctr">
-              <a:lnSpc>
-                <a:spcPct val="110000"/>
-              </a:lnSpc>
-              <a:spcBef>
-                <a:spcPts val="0"/>
-              </a:spcBef>
-              <a:spcAft>
-                <a:spcPts val="0"/>
-              </a:spcAft>
-            </a:pPr>
-            <a:r>
-              <a:rPr sz="2000" b="0">
-                <a:solidFill>
-                  <a:srgbClr val="105186"/>
-                </a:solidFill>
-                <a:latin typeface="Times New Roman"/>
-                <a:ea typeface="DFKai-SB"/>
-                <a:cs typeface="Times New Roman"/>
-              </a:rPr>
-              <a:t>不確定</a:t>
-            </a:r>
-          </a:p>
-        </p:txBody>
-      </p:sp>
-      <p:sp>
-        <p:nvSpPr>
-          <p:cNvPr id="52" name="TextBox 51"/>
-          <p:cNvSpPr txBox="1"/>
-          <p:nvPr>
-            <p:custDataLst>
-              <p:tags r:id="rId27"/>
-            </p:custDataLst>
-          </p:nvPr>
-        </p:nvSpPr>
-        <p:spPr>
-          <a:xfrm>
-            <a:off x="8184187" y="11916000"/>
-            <a:ext cx="6048000" cy="288000"/>
-          </a:xfrm>
-          <a:prstGeom prst="rect">
-            <a:avLst/>
-          </a:prstGeom>
-          <a:noFill/>
-        </p:spPr>
-        <p:txBody>
-          <a:bodyPr wrap="none" lIns="0" tIns="0" rIns="0" bIns="0" anchor="ctr">
-            <a:spAutoFit/>
-          </a:bodyPr>
-          <a:lstStyle/>
-          <a:p>
-            <a:pPr algn="ctr">
-              <a:lnSpc>
-                <a:spcPct val="110000"/>
-              </a:lnSpc>
-              <a:spcBef>
-                <a:spcPts val="0"/>
-              </a:spcBef>
-              <a:spcAft>
-                <a:spcPts val="0"/>
-              </a:spcAft>
-            </a:pPr>
-            <a:r>
-              <a:rPr sz="1500" b="0">
-                <a:solidFill>
-                  <a:srgbClr val="53666E"/>
-                </a:solidFill>
-                <a:latin typeface="Times New Roman"/>
-                <a:ea typeface="DFKai-SB"/>
-                <a:cs typeface="Times New Roman"/>
-              </a:rPr>
-              <a:t>複核與不確定事件保留監測或蒐證</a:t>
-            </a:r>
-          </a:p>
-        </p:txBody>
-      </p:sp>
-      <p:sp>
-        <p:nvSpPr>
-          <p:cNvPr id="53" name="Rectangle 52"/>
-          <p:cNvSpPr/>
-          <p:nvPr/>
-        </p:nvSpPr>
-        <p:spPr>
-          <a:xfrm>
-            <a:off x="576000" y="9108000"/>
-            <a:ext cx="6624000" cy="3276000"/>
+            <a:off x="576000" y="11268000"/>
+            <a:ext cx="13968000" cy="1800000"/>
           </a:xfrm>
           <a:prstGeom prst="rect">
             <a:avLst/>
@@ -6521,14 +5617,14 @@
       </p:sp>
       <p:sp>
         <p:nvSpPr>
-          <p:cNvPr id="54" name="Rectangle 53"/>
+          <p:cNvPr id="35" name="Rectangle 34"/>
           <p:cNvSpPr/>
           <p:nvPr/>
         </p:nvSpPr>
         <p:spPr>
           <a:xfrm>
-            <a:off x="576000" y="9108000"/>
-            <a:ext cx="6624000" cy="46800"/>
+            <a:off x="576000" y="11268000"/>
+            <a:ext cx="54000" cy="1800000"/>
           </a:xfrm>
           <a:prstGeom prst="rect">
             <a:avLst/>
@@ -6570,18 +5666,18 @@
       </p:sp>
       <p:sp>
         <p:nvSpPr>
-          <p:cNvPr id="55" name="TextBox 54"/>
+          <p:cNvPr id="36" name="TextBox 35"/>
           <p:cNvSpPr txBox="1"/>
           <p:nvPr>
             <p:custDataLst>
-              <p:tags r:id="rId28"/>
+              <p:tags r:id="rId16"/>
             </p:custDataLst>
           </p:nvPr>
         </p:nvSpPr>
         <p:spPr>
           <a:xfrm>
-            <a:off x="864000" y="9288000"/>
-            <a:ext cx="432000" cy="360000"/>
+            <a:off x="828000" y="11412000"/>
+            <a:ext cx="360000" cy="288000"/>
           </a:xfrm>
           <a:prstGeom prst="rect">
             <a:avLst/>
@@ -6606,7 +5702,7 @@
               </a:spcAft>
             </a:pPr>
             <a:r>
-              <a:rPr sz="1800" b="1">
+              <a:rPr sz="1600" b="1">
                 <a:solidFill>
                   <a:srgbClr val="105186"/>
                 </a:solidFill>
@@ -6614,25 +5710,25 @@
                 <a:ea typeface="DFKai-SB"/>
                 <a:cs typeface="Times New Roman"/>
               </a:rPr>
-              <a:t>4</a:t>
-            </a:r>
-          </a:p>
-        </p:txBody>
-      </p:sp>
-      <p:sp>
-        <p:nvSpPr>
-          <p:cNvPr id="56" name="TextBox 55"/>
+              <a:t>04</a:t>
+            </a:r>
+          </a:p>
+        </p:txBody>
+      </p:sp>
+      <p:sp>
+        <p:nvSpPr>
+          <p:cNvPr id="37" name="TextBox 36"/>
           <p:cNvSpPr txBox="1"/>
           <p:nvPr>
             <p:custDataLst>
-              <p:tags r:id="rId29"/>
+              <p:tags r:id="rId17"/>
             </p:custDataLst>
           </p:nvPr>
         </p:nvSpPr>
         <p:spPr>
           <a:xfrm>
-            <a:off x="1404000" y="9288000"/>
-            <a:ext cx="5256000" cy="360000"/>
+            <a:off x="1332000" y="11376000"/>
+            <a:ext cx="2628000" cy="360000"/>
           </a:xfrm>
           <a:prstGeom prst="rect">
             <a:avLst/>
@@ -6665,29 +5761,80 @@
                 <a:ea typeface="DFKai-SB"/>
                 <a:cs typeface="Times New Roman"/>
               </a:rPr>
-              <a:t>受控處置與回復</a:t>
+              <a:t>受控回復</a:t>
+            </a:r>
+          </a:p>
+        </p:txBody>
+      </p:sp>
+      <p:sp>
+        <p:nvSpPr>
+          <p:cNvPr id="38" name="TextBox 37"/>
+          <p:cNvSpPr txBox="1"/>
+          <p:nvPr>
+            <p:custDataLst>
+              <p:tags r:id="rId18"/>
+            </p:custDataLst>
+          </p:nvPr>
+        </p:nvSpPr>
+        <p:spPr>
+          <a:xfrm>
+            <a:off x="1332000" y="11772000"/>
+            <a:ext cx="2628000" cy="288000"/>
+          </a:xfrm>
+          <a:prstGeom prst="rect">
+            <a:avLst/>
+          </a:prstGeom>
+          <a:noFill/>
+        </p:spPr>
+        <p:txBody>
+          <a:bodyPr wrap="none" lIns="0" tIns="0" rIns="0" bIns="0" anchor="ctr">
+            <a:spAutoFit/>
+          </a:bodyPr>
+          <a:lstStyle/>
+          <a:p>
+            <a:pPr algn="l">
+              <a:lnSpc>
+                <a:spcPct val="110000"/>
+              </a:lnSpc>
+              <a:spcBef>
+                <a:spcPts val="0"/>
+              </a:spcBef>
+              <a:spcAft>
+                <a:spcPts val="0"/>
+              </a:spcAft>
+            </a:pPr>
+            <a:r>
+              <a:rPr sz="1500" b="0">
+                <a:solidFill>
+                  <a:srgbClr val="53666E"/>
+                </a:solidFill>
+                <a:latin typeface="Times New Roman"/>
+                <a:ea typeface="DFKai-SB"/>
+                <a:cs typeface="Times New Roman"/>
+              </a:rPr>
+              <a:t>策略＋期限</a:t>
             </a:r>
           </a:p>
         </p:txBody>
       </p:sp>
       <p:pic>
         <p:nvPicPr>
-          <p:cNvPr id="57" name="Picture 56" descr="flat-icon-4.png"/>
+          <p:cNvPr id="39" name="Picture 38" descr="flat-icon-4.png"/>
           <p:cNvPicPr>
             <a:picLocks noChangeAspect="1"/>
           </p:cNvPicPr>
           <p:nvPr/>
         </p:nvPicPr>
         <p:blipFill>
-          <a:blip r:embed="rId69"/>
+          <a:blip r:embed="rId77"/>
           <a:stretch>
             <a:fillRect/>
           </a:stretch>
         </p:blipFill>
         <p:spPr>
           <a:xfrm>
-            <a:off x="864000" y="9900000"/>
-            <a:ext cx="900000" cy="900000"/>
+            <a:off x="900000" y="12168000"/>
+            <a:ext cx="756000" cy="756000"/>
           </a:xfrm>
           <a:prstGeom prst="rect">
             <a:avLst/>
@@ -6696,120 +5843,67 @@
       </p:pic>
       <p:sp>
         <p:nvSpPr>
-          <p:cNvPr id="58" name="TextBox 57"/>
+          <p:cNvPr id="40" name="Rectangle 39"/>
+          <p:cNvSpPr/>
+          <p:nvPr/>
+        </p:nvSpPr>
+        <p:spPr>
+          <a:xfrm>
+            <a:off x="4320000" y="5400000"/>
+            <a:ext cx="2808000" cy="612000"/>
+          </a:xfrm>
+          <a:prstGeom prst="rect">
+            <a:avLst/>
+          </a:prstGeom>
+          <a:solidFill>
+            <a:srgbClr val="FFFFFF"/>
+          </a:solidFill>
+          <a:ln>
+            <a:noFill/>
+          </a:ln>
+          <a:effectLst/>
+        </p:spPr>
+        <p:style>
+          <a:lnRef idx="1">
+            <a:schemeClr val="accent1"/>
+          </a:lnRef>
+          <a:fillRef idx="3">
+            <a:schemeClr val="accent1"/>
+          </a:fillRef>
+          <a:effectRef idx="2">
+            <a:schemeClr val="accent1"/>
+          </a:effectRef>
+          <a:fontRef idx="minor">
+            <a:schemeClr val="lt1"/>
+          </a:fontRef>
+        </p:style>
+        <p:txBody>
+          <a:bodyPr rtlCol="0" anchor="ctr"/>
+          <a:lstStyle/>
+          <a:p>
+            <a:pPr algn="ctr"/>
+            <a:endParaRPr>
+              <a:latin typeface="Times New Roman"/>
+              <a:ea typeface="DFKai-SB"/>
+              <a:cs typeface="Times New Roman"/>
+            </a:endParaRPr>
+          </a:p>
+        </p:txBody>
+      </p:sp>
+      <p:sp>
+        <p:nvSpPr>
+          <p:cNvPr id="41" name="TextBox 40"/>
           <p:cNvSpPr txBox="1"/>
           <p:nvPr>
             <p:custDataLst>
-              <p:tags r:id="rId30"/>
+              <p:tags r:id="rId19"/>
             </p:custDataLst>
           </p:nvPr>
         </p:nvSpPr>
         <p:spPr>
           <a:xfrm>
-            <a:off x="2016000" y="9900000"/>
-            <a:ext cx="4932000" cy="432000"/>
-          </a:xfrm>
-          <a:prstGeom prst="rect">
-            <a:avLst/>
-          </a:prstGeom>
-          <a:noFill/>
-        </p:spPr>
-        <p:txBody>
-          <a:bodyPr wrap="none" lIns="0" tIns="0" rIns="0" bIns="0" anchor="ctr">
-            <a:spAutoFit/>
-          </a:bodyPr>
-          <a:lstStyle/>
-          <a:p>
-            <a:pPr algn="l">
-              <a:lnSpc>
-                <a:spcPct val="110000"/>
-              </a:lnSpc>
-              <a:spcBef>
-                <a:spcPts val="0"/>
-              </a:spcBef>
-              <a:spcAft>
-                <a:spcPts val="0"/>
-              </a:spcAft>
-            </a:pPr>
-            <a:r>
-              <a:rPr sz="1900" b="0">
-                <a:solidFill>
-                  <a:srgbClr val="171C1D"/>
-                </a:solidFill>
-                <a:latin typeface="Times New Roman"/>
-                <a:ea typeface="DFKai-SB"/>
-                <a:cs typeface="Times New Roman"/>
-              </a:rPr>
-              <a:t>檢查範圍、允許動作與期限</a:t>
-            </a:r>
-          </a:p>
-        </p:txBody>
-      </p:sp>
-      <p:sp>
-        <p:nvSpPr>
-          <p:cNvPr id="59" name="TextBox 58"/>
-          <p:cNvSpPr txBox="1"/>
-          <p:nvPr>
-            <p:custDataLst>
-              <p:tags r:id="rId31"/>
-            </p:custDataLst>
-          </p:nvPr>
-        </p:nvSpPr>
-        <p:spPr>
-          <a:xfrm>
-            <a:off x="2016000" y="10404000"/>
-            <a:ext cx="4932000" cy="432000"/>
-          </a:xfrm>
-          <a:prstGeom prst="rect">
-            <a:avLst/>
-          </a:prstGeom>
-          <a:noFill/>
-        </p:spPr>
-        <p:txBody>
-          <a:bodyPr wrap="none" lIns="0" tIns="0" rIns="0" bIns="0" anchor="ctr">
-            <a:spAutoFit/>
-          </a:bodyPr>
-          <a:lstStyle/>
-          <a:p>
-            <a:pPr algn="l">
-              <a:lnSpc>
-                <a:spcPct val="110000"/>
-              </a:lnSpc>
-              <a:spcBef>
-                <a:spcPts val="0"/>
-              </a:spcBef>
-              <a:spcAft>
-                <a:spcPts val="0"/>
-              </a:spcAft>
-            </a:pPr>
-            <a:r>
-              <a:rPr sz="1900" b="0">
-                <a:solidFill>
-                  <a:srgbClr val="171C1D"/>
-                </a:solidFill>
-                <a:latin typeface="Times New Roman"/>
-                <a:ea typeface="DFKai-SB"/>
-                <a:cs typeface="Times New Roman"/>
-              </a:rPr>
-              <a:t>允許的策略才進入執行</a:t>
-            </a:r>
-          </a:p>
-        </p:txBody>
-      </p:sp>
-      <p:sp>
-        <p:nvSpPr>
-          <p:cNvPr id="60" name="TextBox 59"/>
-          <p:cNvSpPr txBox="1"/>
-          <p:nvPr>
-            <p:custDataLst>
-              <p:tags r:id="rId32"/>
-            </p:custDataLst>
-          </p:nvPr>
-        </p:nvSpPr>
-        <p:spPr>
-          <a:xfrm>
-            <a:off x="830662" y="11088000"/>
-            <a:ext cx="1584000" cy="540000"/>
+            <a:off x="4288250" y="5436000"/>
+            <a:ext cx="2808000" cy="342720"/>
           </a:xfrm>
           <a:prstGeom prst="rect">
             <a:avLst/>
@@ -6834,7 +5928,7 @@
               </a:spcAft>
             </a:pPr>
             <a:r>
-              <a:rPr sz="2100" b="0">
+              <a:rPr sz="2000" b="1">
                 <a:solidFill>
                   <a:srgbClr val="105186"/>
                 </a:solidFill>
@@ -6842,21 +5936,331 @@
                 <a:ea typeface="DFKai-SB"/>
                 <a:cs typeface="Times New Roman"/>
               </a:rPr>
-              <a:t>套用</a:t>
-            </a:r>
-          </a:p>
-        </p:txBody>
-      </p:sp>
-      <p:sp>
-        <p:nvSpPr>
-          <p:cNvPr id="61" name="Right Arrow 60"/>
+              <a:t>CTBM</a:t>
+            </a:r>
+          </a:p>
+        </p:txBody>
+      </p:sp>
+      <p:sp>
+        <p:nvSpPr>
+          <p:cNvPr id="42" name="TextBox 41"/>
+          <p:cNvSpPr txBox="1"/>
+          <p:nvPr>
+            <p:custDataLst>
+              <p:tags r:id="rId20"/>
+            </p:custDataLst>
+          </p:nvPr>
+        </p:nvSpPr>
+        <p:spPr>
+          <a:xfrm>
+            <a:off x="4297775" y="5730480"/>
+            <a:ext cx="2808000" cy="263160"/>
+          </a:xfrm>
+          <a:prstGeom prst="rect">
+            <a:avLst/>
+          </a:prstGeom>
+          <a:noFill/>
+        </p:spPr>
+        <p:txBody>
+          <a:bodyPr wrap="none" lIns="0" tIns="0" rIns="0" bIns="0" anchor="ctr">
+            <a:spAutoFit/>
+          </a:bodyPr>
+          <a:lstStyle/>
+          <a:p>
+            <a:pPr algn="ctr">
+              <a:lnSpc>
+                <a:spcPct val="110000"/>
+              </a:lnSpc>
+              <a:spcBef>
+                <a:spcPts val="0"/>
+              </a:spcBef>
+              <a:spcAft>
+                <a:spcPts val="0"/>
+              </a:spcAft>
+            </a:pPr>
+            <a:r>
+              <a:rPr sz="1400" b="0">
+                <a:solidFill>
+                  <a:srgbClr val="53666E"/>
+                </a:solidFill>
+                <a:latin typeface="Times New Roman"/>
+                <a:ea typeface="DFKai-SB"/>
+                <a:cs typeface="Times New Roman"/>
+              </a:rPr>
+              <a:t>內容·時間差·方向</a:t>
+            </a:r>
+          </a:p>
+        </p:txBody>
+      </p:sp>
+      <p:sp>
+        <p:nvSpPr>
+          <p:cNvPr id="43" name="Rectangle 42"/>
           <p:cNvSpPr/>
           <p:nvPr/>
         </p:nvSpPr>
         <p:spPr>
           <a:xfrm>
-            <a:off x="2484000" y="11232000"/>
-            <a:ext cx="324000" cy="180000"/>
+            <a:off x="4320000" y="6228000"/>
+            <a:ext cx="2808000" cy="612000"/>
+          </a:xfrm>
+          <a:prstGeom prst="rect">
+            <a:avLst/>
+          </a:prstGeom>
+          <a:solidFill>
+            <a:srgbClr val="FFFFFF"/>
+          </a:solidFill>
+          <a:ln>
+            <a:noFill/>
+          </a:ln>
+          <a:effectLst/>
+        </p:spPr>
+        <p:style>
+          <a:lnRef idx="1">
+            <a:schemeClr val="accent1"/>
+          </a:lnRef>
+          <a:fillRef idx="3">
+            <a:schemeClr val="accent1"/>
+          </a:fillRef>
+          <a:effectRef idx="2">
+            <a:schemeClr val="accent1"/>
+          </a:effectRef>
+          <a:fontRef idx="minor">
+            <a:schemeClr val="lt1"/>
+          </a:fontRef>
+        </p:style>
+        <p:txBody>
+          <a:bodyPr rtlCol="0" anchor="ctr"/>
+          <a:lstStyle/>
+          <a:p>
+            <a:pPr algn="ctr"/>
+            <a:endParaRPr>
+              <a:latin typeface="Times New Roman"/>
+              <a:ea typeface="DFKai-SB"/>
+              <a:cs typeface="Times New Roman"/>
+            </a:endParaRPr>
+          </a:p>
+        </p:txBody>
+      </p:sp>
+      <p:sp>
+        <p:nvSpPr>
+          <p:cNvPr id="44" name="TextBox 43"/>
+          <p:cNvSpPr txBox="1"/>
+          <p:nvPr>
+            <p:custDataLst>
+              <p:tags r:id="rId21"/>
+            </p:custDataLst>
+          </p:nvPr>
+        </p:nvSpPr>
+        <p:spPr>
+          <a:xfrm>
+            <a:off x="4288250" y="6264000"/>
+            <a:ext cx="2808000" cy="342720"/>
+          </a:xfrm>
+          <a:prstGeom prst="rect">
+            <a:avLst/>
+          </a:prstGeom>
+          <a:noFill/>
+        </p:spPr>
+        <p:txBody>
+          <a:bodyPr wrap="none" lIns="0" tIns="0" rIns="0" bIns="0" anchor="ctr">
+            <a:spAutoFit/>
+          </a:bodyPr>
+          <a:lstStyle/>
+          <a:p>
+            <a:pPr algn="ctr">
+              <a:lnSpc>
+                <a:spcPct val="110000"/>
+              </a:lnSpc>
+              <a:spcBef>
+                <a:spcPts val="0"/>
+              </a:spcBef>
+              <a:spcAft>
+                <a:spcPts val="0"/>
+              </a:spcAft>
+            </a:pPr>
+            <a:r>
+              <a:rPr sz="2000" b="1">
+                <a:solidFill>
+                  <a:srgbClr val="105186"/>
+                </a:solidFill>
+                <a:latin typeface="Times New Roman"/>
+                <a:ea typeface="DFKai-SB"/>
+                <a:cs typeface="Times New Roman"/>
+              </a:rPr>
+              <a:t>PBCNN</a:t>
+            </a:r>
+          </a:p>
+        </p:txBody>
+      </p:sp>
+      <p:sp>
+        <p:nvSpPr>
+          <p:cNvPr id="45" name="TextBox 44"/>
+          <p:cNvSpPr txBox="1"/>
+          <p:nvPr>
+            <p:custDataLst>
+              <p:tags r:id="rId22"/>
+            </p:custDataLst>
+          </p:nvPr>
+        </p:nvSpPr>
+        <p:spPr>
+          <a:xfrm>
+            <a:off x="4297775" y="6558480"/>
+            <a:ext cx="2808000" cy="263160"/>
+          </a:xfrm>
+          <a:prstGeom prst="rect">
+            <a:avLst/>
+          </a:prstGeom>
+          <a:noFill/>
+        </p:spPr>
+        <p:txBody>
+          <a:bodyPr wrap="none" lIns="0" tIns="0" rIns="0" bIns="0" anchor="ctr">
+            <a:spAutoFit/>
+          </a:bodyPr>
+          <a:lstStyle/>
+          <a:p>
+            <a:pPr algn="ctr">
+              <a:lnSpc>
+                <a:spcPct val="110000"/>
+              </a:lnSpc>
+              <a:spcBef>
+                <a:spcPts val="0"/>
+              </a:spcBef>
+              <a:spcAft>
+                <a:spcPts val="0"/>
+              </a:spcAft>
+            </a:pPr>
+            <a:r>
+              <a:rPr sz="1400" b="0">
+                <a:solidFill>
+                  <a:srgbClr val="53666E"/>
+                </a:solidFill>
+                <a:latin typeface="Times New Roman"/>
+                <a:ea typeface="DFKai-SB"/>
+                <a:cs typeface="Times New Roman"/>
+              </a:rPr>
+              <a:t>短窗位元組模式</a:t>
+            </a:r>
+          </a:p>
+        </p:txBody>
+      </p:sp>
+      <p:cxnSp>
+        <p:nvCxnSpPr>
+          <p:cNvPr id="46" name="Connector 45"/>
+          <p:cNvCxnSpPr/>
+          <p:nvPr/>
+        </p:nvCxnSpPr>
+        <p:spPr>
+          <a:xfrm>
+            <a:off x="7128000" y="5706000"/>
+            <a:ext cx="324000" cy="0"/>
+          </a:xfrm>
+          <a:prstGeom prst="line">
+            <a:avLst/>
+          </a:prstGeom>
+          <a:ln w="12700">
+            <a:solidFill>
+              <a:srgbClr val="105186"/>
+            </a:solidFill>
+          </a:ln>
+          <a:effectLst/>
+        </p:spPr>
+        <p:style>
+          <a:lnRef idx="2">
+            <a:schemeClr val="accent1"/>
+          </a:lnRef>
+          <a:fillRef idx="0">
+            <a:schemeClr val="accent1"/>
+          </a:fillRef>
+          <a:effectRef idx="1">
+            <a:schemeClr val="accent1"/>
+          </a:effectRef>
+          <a:fontRef idx="minor">
+            <a:schemeClr val="tx1"/>
+          </a:fontRef>
+        </p:style>
+      </p:cxnSp>
+      <p:cxnSp>
+        <p:nvCxnSpPr>
+          <p:cNvPr id="47" name="Connector 46"/>
+          <p:cNvCxnSpPr/>
+          <p:nvPr/>
+        </p:nvCxnSpPr>
+        <p:spPr>
+          <a:xfrm>
+            <a:off x="7128000" y="6534000"/>
+            <a:ext cx="324000" cy="0"/>
+          </a:xfrm>
+          <a:prstGeom prst="line">
+            <a:avLst/>
+          </a:prstGeom>
+          <a:ln w="12700">
+            <a:solidFill>
+              <a:srgbClr val="105186"/>
+            </a:solidFill>
+          </a:ln>
+          <a:effectLst/>
+        </p:spPr>
+        <p:style>
+          <a:lnRef idx="2">
+            <a:schemeClr val="accent1"/>
+          </a:lnRef>
+          <a:fillRef idx="0">
+            <a:schemeClr val="accent1"/>
+          </a:fillRef>
+          <a:effectRef idx="1">
+            <a:schemeClr val="accent1"/>
+          </a:effectRef>
+          <a:fontRef idx="minor">
+            <a:schemeClr val="tx1"/>
+          </a:fontRef>
+        </p:style>
+      </p:cxnSp>
+      <p:cxnSp>
+        <p:nvCxnSpPr>
+          <p:cNvPr id="48" name="Connector 47"/>
+          <p:cNvCxnSpPr/>
+          <p:nvPr/>
+        </p:nvCxnSpPr>
+        <p:spPr>
+          <a:xfrm>
+            <a:off x="7452000" y="5706000"/>
+            <a:ext cx="0" cy="828000"/>
+          </a:xfrm>
+          <a:prstGeom prst="line">
+            <a:avLst/>
+          </a:prstGeom>
+          <a:ln w="12700">
+            <a:solidFill>
+              <a:srgbClr val="105186"/>
+            </a:solidFill>
+          </a:ln>
+          <a:effectLst/>
+        </p:spPr>
+        <p:style>
+          <a:lnRef idx="2">
+            <a:schemeClr val="accent1"/>
+          </a:lnRef>
+          <a:fillRef idx="0">
+            <a:schemeClr val="accent1"/>
+          </a:fillRef>
+          <a:effectRef idx="1">
+            <a:schemeClr val="accent1"/>
+          </a:effectRef>
+          <a:fontRef idx="minor">
+            <a:schemeClr val="tx1"/>
+          </a:fontRef>
+        </p:style>
+      </p:cxnSp>
+      <p:sp>
+        <p:nvSpPr>
+          <p:cNvPr id="49" name="Right Arrow 48"/>
+          <p:cNvSpPr/>
+          <p:nvPr/>
+        </p:nvSpPr>
+        <p:spPr>
+          <a:xfrm>
+            <a:off x="7488000" y="6012000"/>
+            <a:ext cx="288000" cy="216000"/>
           </a:xfrm>
           <a:prstGeom prst="rightArrow">
             <a:avLst/>
@@ -6898,18 +6302,67 @@
       </p:sp>
       <p:sp>
         <p:nvSpPr>
-          <p:cNvPr id="62" name="TextBox 61"/>
+          <p:cNvPr id="50" name="Rectangle 49"/>
+          <p:cNvSpPr/>
+          <p:nvPr/>
+        </p:nvSpPr>
+        <p:spPr>
+          <a:xfrm>
+            <a:off x="7848000" y="5688000"/>
+            <a:ext cx="3060000" cy="900000"/>
+          </a:xfrm>
+          <a:prstGeom prst="rect">
+            <a:avLst/>
+          </a:prstGeom>
+          <a:solidFill>
+            <a:srgbClr val="FFFFFF"/>
+          </a:solidFill>
+          <a:ln>
+            <a:noFill/>
+          </a:ln>
+          <a:effectLst/>
+        </p:spPr>
+        <p:style>
+          <a:lnRef idx="1">
+            <a:schemeClr val="accent1"/>
+          </a:lnRef>
+          <a:fillRef idx="3">
+            <a:schemeClr val="accent1"/>
+          </a:fillRef>
+          <a:effectRef idx="2">
+            <a:schemeClr val="accent1"/>
+          </a:effectRef>
+          <a:fontRef idx="minor">
+            <a:schemeClr val="lt1"/>
+          </a:fontRef>
+        </p:style>
+        <p:txBody>
+          <a:bodyPr rtlCol="0" anchor="ctr"/>
+          <a:lstStyle/>
+          <a:p>
+            <a:pPr algn="ctr"/>
+            <a:endParaRPr>
+              <a:latin typeface="Times New Roman"/>
+              <a:ea typeface="DFKai-SB"/>
+              <a:cs typeface="Times New Roman"/>
+            </a:endParaRPr>
+          </a:p>
+        </p:txBody>
+      </p:sp>
+      <p:sp>
+        <p:nvSpPr>
+          <p:cNvPr id="51" name="TextBox 50"/>
           <p:cNvSpPr txBox="1"/>
           <p:nvPr>
             <p:custDataLst>
-              <p:tags r:id="rId33"/>
+              <p:tags r:id="rId23"/>
             </p:custDataLst>
           </p:nvPr>
         </p:nvSpPr>
         <p:spPr>
           <a:xfrm>
-            <a:off x="3062663" y="11088000"/>
-            <a:ext cx="1584000" cy="540000"/>
+            <a:off x="7816250" y="5724000"/>
+            <a:ext cx="3060000" cy="504000"/>
           </a:xfrm>
           <a:prstGeom prst="rect">
             <a:avLst/>
@@ -6934,7 +6387,7 @@
               </a:spcAft>
             </a:pPr>
             <a:r>
-              <a:rPr sz="2100" b="0">
+              <a:rPr sz="2000" b="1">
                 <a:solidFill>
                   <a:srgbClr val="105186"/>
                 </a:solidFill>
@@ -6942,21 +6395,72 @@
                 <a:ea typeface="DFKai-SB"/>
                 <a:cs typeface="Times New Roman"/>
               </a:rPr>
-              <a:t>讀回</a:t>
-            </a:r>
-          </a:p>
-        </p:txBody>
-      </p:sp>
-      <p:sp>
-        <p:nvSpPr>
-          <p:cNvPr id="63" name="Right Arrow 62"/>
+              <a:t>校準＋融合</a:t>
+            </a:r>
+          </a:p>
+        </p:txBody>
+      </p:sp>
+      <p:sp>
+        <p:nvSpPr>
+          <p:cNvPr id="52" name="TextBox 51"/>
+          <p:cNvSpPr txBox="1"/>
+          <p:nvPr>
+            <p:custDataLst>
+              <p:tags r:id="rId24"/>
+            </p:custDataLst>
+          </p:nvPr>
+        </p:nvSpPr>
+        <p:spPr>
+          <a:xfrm>
+            <a:off x="7825775" y="6174000"/>
+            <a:ext cx="3060000" cy="387000"/>
+          </a:xfrm>
+          <a:prstGeom prst="rect">
+            <a:avLst/>
+          </a:prstGeom>
+          <a:noFill/>
+        </p:spPr>
+        <p:txBody>
+          <a:bodyPr wrap="none" lIns="0" tIns="0" rIns="0" bIns="0" anchor="ctr">
+            <a:spAutoFit/>
+          </a:bodyPr>
+          <a:lstStyle/>
+          <a:p>
+            <a:pPr algn="ctr">
+              <a:lnSpc>
+                <a:spcPct val="110000"/>
+              </a:lnSpc>
+              <a:spcBef>
+                <a:spcPts val="0"/>
+              </a:spcBef>
+              <a:spcAft>
+                <a:spcPts val="0"/>
+              </a:spcAft>
+            </a:pPr>
+            <a:r>
+              <a:rPr sz="1400" b="0">
+                <a:solidFill>
+                  <a:srgbClr val="53666E"/>
+                </a:solidFill>
+                <a:latin typeface="Times New Roman"/>
+                <a:ea typeface="DFKai-SB"/>
+                <a:cs typeface="Times New Roman"/>
+              </a:rPr>
+              <a:t>OOF Gate</a:t>
+            </a:r>
+          </a:p>
+        </p:txBody>
+      </p:sp>
+      <p:sp>
+        <p:nvSpPr>
+          <p:cNvPr id="53" name="Right Arrow 52"/>
           <p:cNvSpPr/>
           <p:nvPr/>
         </p:nvSpPr>
         <p:spPr>
           <a:xfrm>
-            <a:off x="4716000" y="11232000"/>
-            <a:ext cx="324000" cy="180000"/>
+            <a:off x="10980000" y="6012000"/>
+            <a:ext cx="504000" cy="216000"/>
           </a:xfrm>
           <a:prstGeom prst="rightArrow">
             <a:avLst/>
@@ -6998,18 +6502,67 @@
       </p:sp>
       <p:sp>
         <p:nvSpPr>
-          <p:cNvPr id="64" name="TextBox 63"/>
+          <p:cNvPr id="54" name="Rectangle 53"/>
+          <p:cNvSpPr/>
+          <p:nvPr/>
+        </p:nvSpPr>
+        <p:spPr>
+          <a:xfrm>
+            <a:off x="11592000" y="5688000"/>
+            <a:ext cx="2736000" cy="900000"/>
+          </a:xfrm>
+          <a:prstGeom prst="rect">
+            <a:avLst/>
+          </a:prstGeom>
+          <a:solidFill>
+            <a:srgbClr val="FFFFFF"/>
+          </a:solidFill>
+          <a:ln>
+            <a:noFill/>
+          </a:ln>
+          <a:effectLst/>
+        </p:spPr>
+        <p:style>
+          <a:lnRef idx="1">
+            <a:schemeClr val="accent1"/>
+          </a:lnRef>
+          <a:fillRef idx="3">
+            <a:schemeClr val="accent1"/>
+          </a:fillRef>
+          <a:effectRef idx="2">
+            <a:schemeClr val="accent1"/>
+          </a:effectRef>
+          <a:fontRef idx="minor">
+            <a:schemeClr val="lt1"/>
+          </a:fontRef>
+        </p:style>
+        <p:txBody>
+          <a:bodyPr rtlCol="0" anchor="ctr"/>
+          <a:lstStyle/>
+          <a:p>
+            <a:pPr algn="ctr"/>
+            <a:endParaRPr>
+              <a:latin typeface="Times New Roman"/>
+              <a:ea typeface="DFKai-SB"/>
+              <a:cs typeface="Times New Roman"/>
+            </a:endParaRPr>
+          </a:p>
+        </p:txBody>
+      </p:sp>
+      <p:sp>
+        <p:nvSpPr>
+          <p:cNvPr id="55" name="TextBox 54"/>
           <p:cNvSpPr txBox="1"/>
           <p:nvPr>
             <p:custDataLst>
-              <p:tags r:id="rId34"/>
+              <p:tags r:id="rId25"/>
             </p:custDataLst>
           </p:nvPr>
         </p:nvSpPr>
         <p:spPr>
           <a:xfrm>
-            <a:off x="5294662" y="11088000"/>
-            <a:ext cx="1584000" cy="540000"/>
+            <a:off x="11560251" y="5724000"/>
+            <a:ext cx="2736000" cy="504000"/>
           </a:xfrm>
           <a:prstGeom prst="rect">
             <a:avLst/>
@@ -7034,7 +6587,7 @@
               </a:spcAft>
             </a:pPr>
             <a:r>
-              <a:rPr sz="2100" b="0">
+              <a:rPr sz="2000" b="1">
                 <a:solidFill>
                   <a:srgbClr val="105186"/>
                 </a:solidFill>
@@ -7042,25 +6595,25 @@
                 <a:ea typeface="DFKai-SB"/>
                 <a:cs typeface="Times New Roman"/>
               </a:rPr>
-              <a:t>回復</a:t>
-            </a:r>
-          </a:p>
-        </p:txBody>
-      </p:sp>
-      <p:sp>
-        <p:nvSpPr>
-          <p:cNvPr id="65" name="TextBox 64"/>
+              <a:t>17類判定</a:t>
+            </a:r>
+          </a:p>
+        </p:txBody>
+      </p:sp>
+      <p:sp>
+        <p:nvSpPr>
+          <p:cNvPr id="56" name="TextBox 55"/>
           <p:cNvSpPr txBox="1"/>
           <p:nvPr>
             <p:custDataLst>
-              <p:tags r:id="rId35"/>
+              <p:tags r:id="rId26"/>
             </p:custDataLst>
           </p:nvPr>
         </p:nvSpPr>
         <p:spPr>
           <a:xfrm>
-            <a:off x="840187" y="11916000"/>
-            <a:ext cx="6048000" cy="288000"/>
+            <a:off x="11569776" y="6174000"/>
+            <a:ext cx="2736000" cy="387000"/>
           </a:xfrm>
           <a:prstGeom prst="rect">
             <a:avLst/>
@@ -7085,7 +6638,7 @@
               </a:spcAft>
             </a:pPr>
             <a:r>
-              <a:rPr sz="1500" b="0">
+              <a:rPr sz="1400" b="0">
                 <a:solidFill>
                   <a:srgbClr val="53666E"/>
                 </a:solidFill>
@@ -7093,23 +6646,331 @@
                 <a:ea typeface="DFKai-SB"/>
                 <a:cs typeface="Times New Roman"/>
               </a:rPr>
-              <a:t>同次執行回條綁定，規則到期撤銷</a:t>
-            </a:r>
-          </a:p>
-        </p:txBody>
-      </p:sp>
-      <p:sp>
-        <p:nvSpPr>
-          <p:cNvPr id="66" name="Left Arrow 65"/>
+              <a:t>信心與512維表徵</a:t>
+            </a:r>
+          </a:p>
+        </p:txBody>
+      </p:sp>
+      <p:sp>
+        <p:nvSpPr>
+          <p:cNvPr id="57" name="Rectangle 56"/>
           <p:cNvSpPr/>
           <p:nvPr/>
         </p:nvSpPr>
         <p:spPr>
           <a:xfrm>
-            <a:off x="7272000" y="10476000"/>
-            <a:ext cx="576000" cy="288000"/>
-          </a:xfrm>
-          <a:prstGeom prst="leftArrow">
+            <a:off x="4320000" y="7416000"/>
+            <a:ext cx="2808000" cy="612000"/>
+          </a:xfrm>
+          <a:prstGeom prst="rect">
+            <a:avLst/>
+          </a:prstGeom>
+          <a:solidFill>
+            <a:srgbClr val="FFFFFF"/>
+          </a:solidFill>
+          <a:ln>
+            <a:noFill/>
+          </a:ln>
+          <a:effectLst/>
+        </p:spPr>
+        <p:style>
+          <a:lnRef idx="1">
+            <a:schemeClr val="accent1"/>
+          </a:lnRef>
+          <a:fillRef idx="3">
+            <a:schemeClr val="accent1"/>
+          </a:fillRef>
+          <a:effectRef idx="2">
+            <a:schemeClr val="accent1"/>
+          </a:effectRef>
+          <a:fontRef idx="minor">
+            <a:schemeClr val="lt1"/>
+          </a:fontRef>
+        </p:style>
+        <p:txBody>
+          <a:bodyPr rtlCol="0" anchor="ctr"/>
+          <a:lstStyle/>
+          <a:p>
+            <a:pPr algn="ctr"/>
+            <a:endParaRPr>
+              <a:latin typeface="Times New Roman"/>
+              <a:ea typeface="DFKai-SB"/>
+              <a:cs typeface="Times New Roman"/>
+            </a:endParaRPr>
+          </a:p>
+        </p:txBody>
+      </p:sp>
+      <p:sp>
+        <p:nvSpPr>
+          <p:cNvPr id="58" name="TextBox 57"/>
+          <p:cNvSpPr txBox="1"/>
+          <p:nvPr>
+            <p:custDataLst>
+              <p:tags r:id="rId27"/>
+            </p:custDataLst>
+          </p:nvPr>
+        </p:nvSpPr>
+        <p:spPr>
+          <a:xfrm>
+            <a:off x="4288250" y="7416000"/>
+            <a:ext cx="2808000" cy="612000"/>
+          </a:xfrm>
+          <a:prstGeom prst="rect">
+            <a:avLst/>
+          </a:prstGeom>
+          <a:noFill/>
+        </p:spPr>
+        <p:txBody>
+          <a:bodyPr wrap="none" lIns="0" tIns="0" rIns="0" bIns="0" anchor="ctr">
+            <a:spAutoFit/>
+          </a:bodyPr>
+          <a:lstStyle/>
+          <a:p>
+            <a:pPr algn="ctr">
+              <a:lnSpc>
+                <a:spcPct val="110000"/>
+              </a:lnSpc>
+              <a:spcBef>
+                <a:spcPts val="0"/>
+              </a:spcBef>
+              <a:spcAft>
+                <a:spcPts val="0"/>
+              </a:spcAft>
+            </a:pPr>
+            <a:r>
+              <a:rPr sz="2000" b="1">
+                <a:solidFill>
+                  <a:srgbClr val="105186"/>
+                </a:solidFill>
+                <a:latin typeface="Times New Roman"/>
+                <a:ea typeface="DFKai-SB"/>
+                <a:cs typeface="Times New Roman"/>
+              </a:rPr>
+              <a:t>512維表徵</a:t>
+            </a:r>
+          </a:p>
+        </p:txBody>
+      </p:sp>
+      <p:sp>
+        <p:nvSpPr>
+          <p:cNvPr id="59" name="Rectangle 58"/>
+          <p:cNvSpPr/>
+          <p:nvPr/>
+        </p:nvSpPr>
+        <p:spPr>
+          <a:xfrm>
+            <a:off x="4320000" y="8244000"/>
+            <a:ext cx="2808000" cy="612000"/>
+          </a:xfrm>
+          <a:prstGeom prst="rect">
+            <a:avLst/>
+          </a:prstGeom>
+          <a:solidFill>
+            <a:srgbClr val="FFFFFF"/>
+          </a:solidFill>
+          <a:ln>
+            <a:noFill/>
+          </a:ln>
+          <a:effectLst/>
+        </p:spPr>
+        <p:style>
+          <a:lnRef idx="1">
+            <a:schemeClr val="accent1"/>
+          </a:lnRef>
+          <a:fillRef idx="3">
+            <a:schemeClr val="accent1"/>
+          </a:fillRef>
+          <a:effectRef idx="2">
+            <a:schemeClr val="accent1"/>
+          </a:effectRef>
+          <a:fontRef idx="minor">
+            <a:schemeClr val="lt1"/>
+          </a:fontRef>
+        </p:style>
+        <p:txBody>
+          <a:bodyPr rtlCol="0" anchor="ctr"/>
+          <a:lstStyle/>
+          <a:p>
+            <a:pPr algn="ctr"/>
+            <a:endParaRPr>
+              <a:latin typeface="Times New Roman"/>
+              <a:ea typeface="DFKai-SB"/>
+              <a:cs typeface="Times New Roman"/>
+            </a:endParaRPr>
+          </a:p>
+        </p:txBody>
+      </p:sp>
+      <p:sp>
+        <p:nvSpPr>
+          <p:cNvPr id="60" name="TextBox 59"/>
+          <p:cNvSpPr txBox="1"/>
+          <p:nvPr>
+            <p:custDataLst>
+              <p:tags r:id="rId28"/>
+            </p:custDataLst>
+          </p:nvPr>
+        </p:nvSpPr>
+        <p:spPr>
+          <a:xfrm>
+            <a:off x="4288250" y="8244000"/>
+            <a:ext cx="2808000" cy="612000"/>
+          </a:xfrm>
+          <a:prstGeom prst="rect">
+            <a:avLst/>
+          </a:prstGeom>
+          <a:noFill/>
+        </p:spPr>
+        <p:txBody>
+          <a:bodyPr wrap="none" lIns="0" tIns="0" rIns="0" bIns="0" anchor="ctr">
+            <a:spAutoFit/>
+          </a:bodyPr>
+          <a:lstStyle/>
+          <a:p>
+            <a:pPr algn="ctr">
+              <a:lnSpc>
+                <a:spcPct val="110000"/>
+              </a:lnSpc>
+              <a:spcBef>
+                <a:spcPts val="0"/>
+              </a:spcBef>
+              <a:spcAft>
+                <a:spcPts val="0"/>
+              </a:spcAft>
+            </a:pPr>
+            <a:r>
+              <a:rPr sz="2000" b="1">
+                <a:solidFill>
+                  <a:srgbClr val="105186"/>
+                </a:solidFill>
+                <a:latin typeface="Times New Roman"/>
+                <a:ea typeface="DFKai-SB"/>
+                <a:cs typeface="Times New Roman"/>
+              </a:rPr>
+              <a:t>17維機率</a:t>
+            </a:r>
+          </a:p>
+        </p:txBody>
+      </p:sp>
+      <p:cxnSp>
+        <p:nvCxnSpPr>
+          <p:cNvPr id="61" name="Connector 60"/>
+          <p:cNvCxnSpPr/>
+          <p:nvPr/>
+        </p:nvCxnSpPr>
+        <p:spPr>
+          <a:xfrm>
+            <a:off x="7128000" y="7722000"/>
+            <a:ext cx="324000" cy="0"/>
+          </a:xfrm>
+          <a:prstGeom prst="line">
+            <a:avLst/>
+          </a:prstGeom>
+          <a:ln w="12700">
+            <a:solidFill>
+              <a:srgbClr val="105186"/>
+            </a:solidFill>
+          </a:ln>
+          <a:effectLst/>
+        </p:spPr>
+        <p:style>
+          <a:lnRef idx="2">
+            <a:schemeClr val="accent1"/>
+          </a:lnRef>
+          <a:fillRef idx="0">
+            <a:schemeClr val="accent1"/>
+          </a:fillRef>
+          <a:effectRef idx="1">
+            <a:schemeClr val="accent1"/>
+          </a:effectRef>
+          <a:fontRef idx="minor">
+            <a:schemeClr val="tx1"/>
+          </a:fontRef>
+        </p:style>
+      </p:cxnSp>
+      <p:cxnSp>
+        <p:nvCxnSpPr>
+          <p:cNvPr id="62" name="Connector 61"/>
+          <p:cNvCxnSpPr/>
+          <p:nvPr/>
+        </p:nvCxnSpPr>
+        <p:spPr>
+          <a:xfrm>
+            <a:off x="7128000" y="8550000"/>
+            <a:ext cx="324000" cy="0"/>
+          </a:xfrm>
+          <a:prstGeom prst="line">
+            <a:avLst/>
+          </a:prstGeom>
+          <a:ln w="12700">
+            <a:solidFill>
+              <a:srgbClr val="105186"/>
+            </a:solidFill>
+          </a:ln>
+          <a:effectLst/>
+        </p:spPr>
+        <p:style>
+          <a:lnRef idx="2">
+            <a:schemeClr val="accent1"/>
+          </a:lnRef>
+          <a:fillRef idx="0">
+            <a:schemeClr val="accent1"/>
+          </a:fillRef>
+          <a:effectRef idx="1">
+            <a:schemeClr val="accent1"/>
+          </a:effectRef>
+          <a:fontRef idx="minor">
+            <a:schemeClr val="tx1"/>
+          </a:fontRef>
+        </p:style>
+      </p:cxnSp>
+      <p:cxnSp>
+        <p:nvCxnSpPr>
+          <p:cNvPr id="63" name="Connector 62"/>
+          <p:cNvCxnSpPr/>
+          <p:nvPr/>
+        </p:nvCxnSpPr>
+        <p:spPr>
+          <a:xfrm>
+            <a:off x="7452000" y="7722000"/>
+            <a:ext cx="0" cy="828000"/>
+          </a:xfrm>
+          <a:prstGeom prst="line">
+            <a:avLst/>
+          </a:prstGeom>
+          <a:ln w="12700">
+            <a:solidFill>
+              <a:srgbClr val="105186"/>
+            </a:solidFill>
+          </a:ln>
+          <a:effectLst/>
+        </p:spPr>
+        <p:style>
+          <a:lnRef idx="2">
+            <a:schemeClr val="accent1"/>
+          </a:lnRef>
+          <a:fillRef idx="0">
+            <a:schemeClr val="accent1"/>
+          </a:fillRef>
+          <a:effectRef idx="1">
+            <a:schemeClr val="accent1"/>
+          </a:effectRef>
+          <a:fontRef idx="minor">
+            <a:schemeClr val="tx1"/>
+          </a:fontRef>
+        </p:style>
+      </p:cxnSp>
+      <p:sp>
+        <p:nvSpPr>
+          <p:cNvPr id="64" name="Right Arrow 63"/>
+          <p:cNvSpPr/>
+          <p:nvPr/>
+        </p:nvSpPr>
+        <p:spPr>
+          <a:xfrm>
+            <a:off x="7488000" y="8028000"/>
+            <a:ext cx="288000" cy="216000"/>
+          </a:xfrm>
+          <a:prstGeom prst="rightArrow">
             <a:avLst/>
           </a:prstGeom>
           <a:solidFill>
@@ -7149,14 +7010,1722 @@
       </p:sp>
       <p:sp>
         <p:nvSpPr>
-          <p:cNvPr id="67" name="Rectangle 66"/>
+          <p:cNvPr id="65" name="Rectangle 64"/>
           <p:cNvSpPr/>
           <p:nvPr/>
         </p:nvSpPr>
         <p:spPr>
           <a:xfrm>
-            <a:off x="576000" y="12636000"/>
-            <a:ext cx="13968000" cy="468000"/>
+            <a:off x="7848000" y="7704000"/>
+            <a:ext cx="3060000" cy="900000"/>
+          </a:xfrm>
+          <a:prstGeom prst="rect">
+            <a:avLst/>
+          </a:prstGeom>
+          <a:solidFill>
+            <a:srgbClr val="FFFFFF"/>
+          </a:solidFill>
+          <a:ln>
+            <a:noFill/>
+          </a:ln>
+          <a:effectLst/>
+        </p:spPr>
+        <p:style>
+          <a:lnRef idx="1">
+            <a:schemeClr val="accent1"/>
+          </a:lnRef>
+          <a:fillRef idx="3">
+            <a:schemeClr val="accent1"/>
+          </a:fillRef>
+          <a:effectRef idx="2">
+            <a:schemeClr val="accent1"/>
+          </a:effectRef>
+          <a:fontRef idx="minor">
+            <a:schemeClr val="lt1"/>
+          </a:fontRef>
+        </p:style>
+        <p:txBody>
+          <a:bodyPr rtlCol="0" anchor="ctr"/>
+          <a:lstStyle/>
+          <a:p>
+            <a:pPr algn="ctr"/>
+            <a:endParaRPr>
+              <a:latin typeface="Times New Roman"/>
+              <a:ea typeface="DFKai-SB"/>
+              <a:cs typeface="Times New Roman"/>
+            </a:endParaRPr>
+          </a:p>
+        </p:txBody>
+      </p:sp>
+      <p:sp>
+        <p:nvSpPr>
+          <p:cNvPr id="66" name="TextBox 65"/>
+          <p:cNvSpPr txBox="1"/>
+          <p:nvPr>
+            <p:custDataLst>
+              <p:tags r:id="rId29"/>
+            </p:custDataLst>
+          </p:nvPr>
+        </p:nvSpPr>
+        <p:spPr>
+          <a:xfrm>
+            <a:off x="7816250" y="7740000"/>
+            <a:ext cx="3060000" cy="504000"/>
+          </a:xfrm>
+          <a:prstGeom prst="rect">
+            <a:avLst/>
+          </a:prstGeom>
+          <a:noFill/>
+        </p:spPr>
+        <p:txBody>
+          <a:bodyPr wrap="none" lIns="0" tIns="0" rIns="0" bIns="0" anchor="ctr">
+            <a:spAutoFit/>
+          </a:bodyPr>
+          <a:lstStyle/>
+          <a:p>
+            <a:pPr algn="ctr">
+              <a:lnSpc>
+                <a:spcPct val="110000"/>
+              </a:lnSpc>
+              <a:spcBef>
+                <a:spcPts val="0"/>
+              </a:spcBef>
+              <a:spcAft>
+                <a:spcPts val="0"/>
+              </a:spcAft>
+            </a:pPr>
+            <a:r>
+              <a:rPr sz="2000" b="1">
+                <a:solidFill>
+                  <a:srgbClr val="105186"/>
+                </a:solidFill>
+                <a:latin typeface="Times New Roman"/>
+                <a:ea typeface="DFKai-SB"/>
+                <a:cs typeface="Times New Roman"/>
+              </a:rPr>
+              <a:t>529維向量</a:t>
+            </a:r>
+          </a:p>
+        </p:txBody>
+      </p:sp>
+      <p:sp>
+        <p:nvSpPr>
+          <p:cNvPr id="67" name="TextBox 66"/>
+          <p:cNvSpPr txBox="1"/>
+          <p:nvPr>
+            <p:custDataLst>
+              <p:tags r:id="rId30"/>
+            </p:custDataLst>
+          </p:nvPr>
+        </p:nvSpPr>
+        <p:spPr>
+          <a:xfrm>
+            <a:off x="7825775" y="8190000"/>
+            <a:ext cx="3060000" cy="387000"/>
+          </a:xfrm>
+          <a:prstGeom prst="rect">
+            <a:avLst/>
+          </a:prstGeom>
+          <a:noFill/>
+        </p:spPr>
+        <p:txBody>
+          <a:bodyPr wrap="none" lIns="0" tIns="0" rIns="0" bIns="0" anchor="ctr">
+            <a:spAutoFit/>
+          </a:bodyPr>
+          <a:lstStyle/>
+          <a:p>
+            <a:pPr algn="ctr">
+              <a:lnSpc>
+                <a:spcPct val="110000"/>
+              </a:lnSpc>
+              <a:spcBef>
+                <a:spcPts val="0"/>
+              </a:spcBef>
+              <a:spcAft>
+                <a:spcPts val="0"/>
+              </a:spcAft>
+            </a:pPr>
+            <a:r>
+              <a:rPr sz="1400" b="0">
+                <a:solidFill>
+                  <a:srgbClr val="53666E"/>
+                </a:solidFill>
+                <a:latin typeface="Times New Roman"/>
+                <a:ea typeface="DFKai-SB"/>
+                <a:cs typeface="Times New Roman"/>
+              </a:rPr>
+              <a:t>L2正規化</a:t>
+            </a:r>
+          </a:p>
+        </p:txBody>
+      </p:sp>
+      <p:sp>
+        <p:nvSpPr>
+          <p:cNvPr id="68" name="Right Arrow 67"/>
+          <p:cNvSpPr/>
+          <p:nvPr/>
+        </p:nvSpPr>
+        <p:spPr>
+          <a:xfrm>
+            <a:off x="10980000" y="8028000"/>
+            <a:ext cx="504000" cy="216000"/>
+          </a:xfrm>
+          <a:prstGeom prst="rightArrow">
+            <a:avLst/>
+          </a:prstGeom>
+          <a:solidFill>
+            <a:srgbClr val="105186"/>
+          </a:solidFill>
+          <a:ln>
+            <a:noFill/>
+          </a:ln>
+          <a:effectLst/>
+        </p:spPr>
+        <p:style>
+          <a:lnRef idx="1">
+            <a:schemeClr val="accent1"/>
+          </a:lnRef>
+          <a:fillRef idx="3">
+            <a:schemeClr val="accent1"/>
+          </a:fillRef>
+          <a:effectRef idx="2">
+            <a:schemeClr val="accent1"/>
+          </a:effectRef>
+          <a:fontRef idx="minor">
+            <a:schemeClr val="lt1"/>
+          </a:fontRef>
+        </p:style>
+        <p:txBody>
+          <a:bodyPr rtlCol="0" anchor="ctr"/>
+          <a:lstStyle/>
+          <a:p>
+            <a:pPr algn="ctr"/>
+            <a:endParaRPr>
+              <a:latin typeface="Times New Roman"/>
+              <a:ea typeface="DFKai-SB"/>
+              <a:cs typeface="Times New Roman"/>
+            </a:endParaRPr>
+          </a:p>
+        </p:txBody>
+      </p:sp>
+      <p:sp>
+        <p:nvSpPr>
+          <p:cNvPr id="69" name="Rectangle 68"/>
+          <p:cNvSpPr/>
+          <p:nvPr/>
+        </p:nvSpPr>
+        <p:spPr>
+          <a:xfrm>
+            <a:off x="11592000" y="7704000"/>
+            <a:ext cx="2736000" cy="900000"/>
+          </a:xfrm>
+          <a:prstGeom prst="rect">
+            <a:avLst/>
+          </a:prstGeom>
+          <a:solidFill>
+            <a:srgbClr val="FFFFFF"/>
+          </a:solidFill>
+          <a:ln>
+            <a:noFill/>
+          </a:ln>
+          <a:effectLst/>
+        </p:spPr>
+        <p:style>
+          <a:lnRef idx="1">
+            <a:schemeClr val="accent1"/>
+          </a:lnRef>
+          <a:fillRef idx="3">
+            <a:schemeClr val="accent1"/>
+          </a:fillRef>
+          <a:effectRef idx="2">
+            <a:schemeClr val="accent1"/>
+          </a:effectRef>
+          <a:fontRef idx="minor">
+            <a:schemeClr val="lt1"/>
+          </a:fontRef>
+        </p:style>
+        <p:txBody>
+          <a:bodyPr rtlCol="0" anchor="ctr"/>
+          <a:lstStyle/>
+          <a:p>
+            <a:pPr algn="ctr"/>
+            <a:endParaRPr>
+              <a:latin typeface="Times New Roman"/>
+              <a:ea typeface="DFKai-SB"/>
+              <a:cs typeface="Times New Roman"/>
+            </a:endParaRPr>
+          </a:p>
+        </p:txBody>
+      </p:sp>
+      <p:sp>
+        <p:nvSpPr>
+          <p:cNvPr id="70" name="TextBox 69"/>
+          <p:cNvSpPr txBox="1"/>
+          <p:nvPr>
+            <p:custDataLst>
+              <p:tags r:id="rId31"/>
+            </p:custDataLst>
+          </p:nvPr>
+        </p:nvSpPr>
+        <p:spPr>
+          <a:xfrm>
+            <a:off x="11560250" y="7740000"/>
+            <a:ext cx="2736000" cy="504000"/>
+          </a:xfrm>
+          <a:prstGeom prst="rect">
+            <a:avLst/>
+          </a:prstGeom>
+          <a:noFill/>
+        </p:spPr>
+        <p:txBody>
+          <a:bodyPr wrap="none" lIns="0" tIns="0" rIns="0" bIns="0" anchor="ctr">
+            <a:spAutoFit/>
+          </a:bodyPr>
+          <a:lstStyle/>
+          <a:p>
+            <a:pPr algn="ctr">
+              <a:lnSpc>
+                <a:spcPct val="110000"/>
+              </a:lnSpc>
+              <a:spcBef>
+                <a:spcPts val="0"/>
+              </a:spcBef>
+              <a:spcAft>
+                <a:spcPts val="0"/>
+              </a:spcAft>
+            </a:pPr>
+            <a:r>
+              <a:rPr sz="2000" b="1">
+                <a:solidFill>
+                  <a:srgbClr val="105186"/>
+                </a:solidFill>
+                <a:latin typeface="Times New Roman"/>
+                <a:ea typeface="DFKai-SB"/>
+                <a:cs typeface="Times New Roman"/>
+              </a:rPr>
+              <a:t>Top-5證據</a:t>
+            </a:r>
+          </a:p>
+        </p:txBody>
+      </p:sp>
+      <p:sp>
+        <p:nvSpPr>
+          <p:cNvPr id="71" name="TextBox 70"/>
+          <p:cNvSpPr txBox="1"/>
+          <p:nvPr>
+            <p:custDataLst>
+              <p:tags r:id="rId32"/>
+            </p:custDataLst>
+          </p:nvPr>
+        </p:nvSpPr>
+        <p:spPr>
+          <a:xfrm>
+            <a:off x="11569776" y="8190000"/>
+            <a:ext cx="2736000" cy="387000"/>
+          </a:xfrm>
+          <a:prstGeom prst="rect">
+            <a:avLst/>
+          </a:prstGeom>
+          <a:noFill/>
+        </p:spPr>
+        <p:txBody>
+          <a:bodyPr wrap="none" lIns="0" tIns="0" rIns="0" bIns="0" anchor="ctr">
+            <a:spAutoFit/>
+          </a:bodyPr>
+          <a:lstStyle/>
+          <a:p>
+            <a:pPr algn="ctr">
+              <a:lnSpc>
+                <a:spcPct val="110000"/>
+              </a:lnSpc>
+              <a:spcBef>
+                <a:spcPts val="0"/>
+              </a:spcBef>
+              <a:spcAft>
+                <a:spcPts val="0"/>
+              </a:spcAft>
+            </a:pPr>
+            <a:r>
+              <a:rPr sz="1400" b="0">
+                <a:solidFill>
+                  <a:srgbClr val="53666E"/>
+                </a:solidFill>
+                <a:latin typeface="Times New Roman"/>
+                <a:ea typeface="DFKai-SB"/>
+                <a:cs typeface="Times New Roman"/>
+              </a:rPr>
+              <a:t>僅檢索訓練案例</a:t>
+            </a:r>
+          </a:p>
+        </p:txBody>
+      </p:sp>
+      <p:sp>
+        <p:nvSpPr>
+          <p:cNvPr id="72" name="Rectangle 71"/>
+          <p:cNvSpPr/>
+          <p:nvPr/>
+        </p:nvSpPr>
+        <p:spPr>
+          <a:xfrm>
+            <a:off x="4320000" y="9432000"/>
+            <a:ext cx="2808000" cy="612000"/>
+          </a:xfrm>
+          <a:prstGeom prst="rect">
+            <a:avLst/>
+          </a:prstGeom>
+          <a:solidFill>
+            <a:srgbClr val="FFFFFF"/>
+          </a:solidFill>
+          <a:ln>
+            <a:noFill/>
+          </a:ln>
+          <a:effectLst/>
+        </p:spPr>
+        <p:style>
+          <a:lnRef idx="1">
+            <a:schemeClr val="accent1"/>
+          </a:lnRef>
+          <a:fillRef idx="3">
+            <a:schemeClr val="accent1"/>
+          </a:fillRef>
+          <a:effectRef idx="2">
+            <a:schemeClr val="accent1"/>
+          </a:effectRef>
+          <a:fontRef idx="minor">
+            <a:schemeClr val="lt1"/>
+          </a:fontRef>
+        </p:style>
+        <p:txBody>
+          <a:bodyPr rtlCol="0" anchor="ctr"/>
+          <a:lstStyle/>
+          <a:p>
+            <a:pPr algn="ctr"/>
+            <a:endParaRPr>
+              <a:latin typeface="Times New Roman"/>
+              <a:ea typeface="DFKai-SB"/>
+              <a:cs typeface="Times New Roman"/>
+            </a:endParaRPr>
+          </a:p>
+        </p:txBody>
+      </p:sp>
+      <p:sp>
+        <p:nvSpPr>
+          <p:cNvPr id="73" name="TextBox 72"/>
+          <p:cNvSpPr txBox="1"/>
+          <p:nvPr>
+            <p:custDataLst>
+              <p:tags r:id="rId33"/>
+            </p:custDataLst>
+          </p:nvPr>
+        </p:nvSpPr>
+        <p:spPr>
+          <a:xfrm>
+            <a:off x="4288250" y="9432000"/>
+            <a:ext cx="2808000" cy="612000"/>
+          </a:xfrm>
+          <a:prstGeom prst="rect">
+            <a:avLst/>
+          </a:prstGeom>
+          <a:noFill/>
+        </p:spPr>
+        <p:txBody>
+          <a:bodyPr wrap="none" lIns="0" tIns="0" rIns="0" bIns="0" anchor="ctr">
+            <a:spAutoFit/>
+          </a:bodyPr>
+          <a:lstStyle/>
+          <a:p>
+            <a:pPr algn="ctr">
+              <a:lnSpc>
+                <a:spcPct val="110000"/>
+              </a:lnSpc>
+              <a:spcBef>
+                <a:spcPts val="0"/>
+              </a:spcBef>
+              <a:spcAft>
+                <a:spcPts val="0"/>
+              </a:spcAft>
+            </a:pPr>
+            <a:r>
+              <a:rPr sz="2000" b="1">
+                <a:solidFill>
+                  <a:srgbClr val="105186"/>
+                </a:solidFill>
+                <a:latin typeface="Times New Roman"/>
+                <a:ea typeface="DFKai-SB"/>
+                <a:cs typeface="Times New Roman"/>
+              </a:rPr>
+              <a:t>正式判定</a:t>
+            </a:r>
+          </a:p>
+        </p:txBody>
+      </p:sp>
+      <p:sp>
+        <p:nvSpPr>
+          <p:cNvPr id="74" name="Rectangle 73"/>
+          <p:cNvSpPr/>
+          <p:nvPr/>
+        </p:nvSpPr>
+        <p:spPr>
+          <a:xfrm>
+            <a:off x="4320000" y="10260000"/>
+            <a:ext cx="2808000" cy="612000"/>
+          </a:xfrm>
+          <a:prstGeom prst="rect">
+            <a:avLst/>
+          </a:prstGeom>
+          <a:solidFill>
+            <a:srgbClr val="FFFFFF"/>
+          </a:solidFill>
+          <a:ln>
+            <a:noFill/>
+          </a:ln>
+          <a:effectLst/>
+        </p:spPr>
+        <p:style>
+          <a:lnRef idx="1">
+            <a:schemeClr val="accent1"/>
+          </a:lnRef>
+          <a:fillRef idx="3">
+            <a:schemeClr val="accent1"/>
+          </a:fillRef>
+          <a:effectRef idx="2">
+            <a:schemeClr val="accent1"/>
+          </a:effectRef>
+          <a:fontRef idx="minor">
+            <a:schemeClr val="lt1"/>
+          </a:fontRef>
+        </p:style>
+        <p:txBody>
+          <a:bodyPr rtlCol="0" anchor="ctr"/>
+          <a:lstStyle/>
+          <a:p>
+            <a:pPr algn="ctr"/>
+            <a:endParaRPr>
+              <a:latin typeface="Times New Roman"/>
+              <a:ea typeface="DFKai-SB"/>
+              <a:cs typeface="Times New Roman"/>
+            </a:endParaRPr>
+          </a:p>
+        </p:txBody>
+      </p:sp>
+      <p:sp>
+        <p:nvSpPr>
+          <p:cNvPr id="75" name="TextBox 74"/>
+          <p:cNvSpPr txBox="1"/>
+          <p:nvPr>
+            <p:custDataLst>
+              <p:tags r:id="rId34"/>
+            </p:custDataLst>
+          </p:nvPr>
+        </p:nvSpPr>
+        <p:spPr>
+          <a:xfrm>
+            <a:off x="4288250" y="10260000"/>
+            <a:ext cx="2808000" cy="612000"/>
+          </a:xfrm>
+          <a:prstGeom prst="rect">
+            <a:avLst/>
+          </a:prstGeom>
+          <a:noFill/>
+        </p:spPr>
+        <p:txBody>
+          <a:bodyPr wrap="none" lIns="0" tIns="0" rIns="0" bIns="0" anchor="ctr">
+            <a:spAutoFit/>
+          </a:bodyPr>
+          <a:lstStyle/>
+          <a:p>
+            <a:pPr algn="ctr">
+              <a:lnSpc>
+                <a:spcPct val="110000"/>
+              </a:lnSpc>
+              <a:spcBef>
+                <a:spcPts val="0"/>
+              </a:spcBef>
+              <a:spcAft>
+                <a:spcPts val="0"/>
+              </a:spcAft>
+            </a:pPr>
+            <a:r>
+              <a:rPr sz="2000" b="1">
+                <a:solidFill>
+                  <a:srgbClr val="105186"/>
+                </a:solidFill>
+                <a:latin typeface="Times New Roman"/>
+                <a:ea typeface="DFKai-SB"/>
+                <a:cs typeface="Times New Roman"/>
+              </a:rPr>
+              <a:t>案例證據</a:t>
+            </a:r>
+          </a:p>
+        </p:txBody>
+      </p:sp>
+      <p:cxnSp>
+        <p:nvCxnSpPr>
+          <p:cNvPr id="76" name="Connector 75"/>
+          <p:cNvCxnSpPr/>
+          <p:nvPr/>
+        </p:nvCxnSpPr>
+        <p:spPr>
+          <a:xfrm>
+            <a:off x="7128000" y="9738000"/>
+            <a:ext cx="324000" cy="0"/>
+          </a:xfrm>
+          <a:prstGeom prst="line">
+            <a:avLst/>
+          </a:prstGeom>
+          <a:ln w="12700">
+            <a:solidFill>
+              <a:srgbClr val="105186"/>
+            </a:solidFill>
+          </a:ln>
+          <a:effectLst/>
+        </p:spPr>
+        <p:style>
+          <a:lnRef idx="2">
+            <a:schemeClr val="accent1"/>
+          </a:lnRef>
+          <a:fillRef idx="0">
+            <a:schemeClr val="accent1"/>
+          </a:fillRef>
+          <a:effectRef idx="1">
+            <a:schemeClr val="accent1"/>
+          </a:effectRef>
+          <a:fontRef idx="minor">
+            <a:schemeClr val="tx1"/>
+          </a:fontRef>
+        </p:style>
+      </p:cxnSp>
+      <p:cxnSp>
+        <p:nvCxnSpPr>
+          <p:cNvPr id="77" name="Connector 76"/>
+          <p:cNvCxnSpPr/>
+          <p:nvPr/>
+        </p:nvCxnSpPr>
+        <p:spPr>
+          <a:xfrm>
+            <a:off x="7128000" y="10566000"/>
+            <a:ext cx="324000" cy="0"/>
+          </a:xfrm>
+          <a:prstGeom prst="line">
+            <a:avLst/>
+          </a:prstGeom>
+          <a:ln w="12700">
+            <a:solidFill>
+              <a:srgbClr val="105186"/>
+            </a:solidFill>
+          </a:ln>
+          <a:effectLst/>
+        </p:spPr>
+        <p:style>
+          <a:lnRef idx="2">
+            <a:schemeClr val="accent1"/>
+          </a:lnRef>
+          <a:fillRef idx="0">
+            <a:schemeClr val="accent1"/>
+          </a:fillRef>
+          <a:effectRef idx="1">
+            <a:schemeClr val="accent1"/>
+          </a:effectRef>
+          <a:fontRef idx="minor">
+            <a:schemeClr val="tx1"/>
+          </a:fontRef>
+        </p:style>
+      </p:cxnSp>
+      <p:cxnSp>
+        <p:nvCxnSpPr>
+          <p:cNvPr id="78" name="Connector 77"/>
+          <p:cNvCxnSpPr/>
+          <p:nvPr/>
+        </p:nvCxnSpPr>
+        <p:spPr>
+          <a:xfrm>
+            <a:off x="7452000" y="9738000"/>
+            <a:ext cx="0" cy="828000"/>
+          </a:xfrm>
+          <a:prstGeom prst="line">
+            <a:avLst/>
+          </a:prstGeom>
+          <a:ln w="12700">
+            <a:solidFill>
+              <a:srgbClr val="105186"/>
+            </a:solidFill>
+          </a:ln>
+          <a:effectLst/>
+        </p:spPr>
+        <p:style>
+          <a:lnRef idx="2">
+            <a:schemeClr val="accent1"/>
+          </a:lnRef>
+          <a:fillRef idx="0">
+            <a:schemeClr val="accent1"/>
+          </a:fillRef>
+          <a:effectRef idx="1">
+            <a:schemeClr val="accent1"/>
+          </a:effectRef>
+          <a:fontRef idx="minor">
+            <a:schemeClr val="tx1"/>
+          </a:fontRef>
+        </p:style>
+      </p:cxnSp>
+      <p:sp>
+        <p:nvSpPr>
+          <p:cNvPr id="79" name="Right Arrow 78"/>
+          <p:cNvSpPr/>
+          <p:nvPr/>
+        </p:nvSpPr>
+        <p:spPr>
+          <a:xfrm>
+            <a:off x="7488000" y="10044000"/>
+            <a:ext cx="288000" cy="216000"/>
+          </a:xfrm>
+          <a:prstGeom prst="rightArrow">
+            <a:avLst/>
+          </a:prstGeom>
+          <a:solidFill>
+            <a:srgbClr val="105186"/>
+          </a:solidFill>
+          <a:ln>
+            <a:noFill/>
+          </a:ln>
+          <a:effectLst/>
+        </p:spPr>
+        <p:style>
+          <a:lnRef idx="1">
+            <a:schemeClr val="accent1"/>
+          </a:lnRef>
+          <a:fillRef idx="3">
+            <a:schemeClr val="accent1"/>
+          </a:fillRef>
+          <a:effectRef idx="2">
+            <a:schemeClr val="accent1"/>
+          </a:effectRef>
+          <a:fontRef idx="minor">
+            <a:schemeClr val="lt1"/>
+          </a:fontRef>
+        </p:style>
+        <p:txBody>
+          <a:bodyPr rtlCol="0" anchor="ctr"/>
+          <a:lstStyle/>
+          <a:p>
+            <a:pPr algn="ctr"/>
+            <a:endParaRPr>
+              <a:latin typeface="Times New Roman"/>
+              <a:ea typeface="DFKai-SB"/>
+              <a:cs typeface="Times New Roman"/>
+            </a:endParaRPr>
+          </a:p>
+        </p:txBody>
+      </p:sp>
+      <p:sp>
+        <p:nvSpPr>
+          <p:cNvPr id="80" name="Rectangle 79"/>
+          <p:cNvSpPr/>
+          <p:nvPr/>
+        </p:nvSpPr>
+        <p:spPr>
+          <a:xfrm>
+            <a:off x="7848000" y="9720000"/>
+            <a:ext cx="3060000" cy="900000"/>
+          </a:xfrm>
+          <a:prstGeom prst="rect">
+            <a:avLst/>
+          </a:prstGeom>
+          <a:solidFill>
+            <a:srgbClr val="FFFFFF"/>
+          </a:solidFill>
+          <a:ln>
+            <a:noFill/>
+          </a:ln>
+          <a:effectLst/>
+        </p:spPr>
+        <p:style>
+          <a:lnRef idx="1">
+            <a:schemeClr val="accent1"/>
+          </a:lnRef>
+          <a:fillRef idx="3">
+            <a:schemeClr val="accent1"/>
+          </a:fillRef>
+          <a:effectRef idx="2">
+            <a:schemeClr val="accent1"/>
+          </a:effectRef>
+          <a:fontRef idx="minor">
+            <a:schemeClr val="lt1"/>
+          </a:fontRef>
+        </p:style>
+        <p:txBody>
+          <a:bodyPr rtlCol="0" anchor="ctr"/>
+          <a:lstStyle/>
+          <a:p>
+            <a:pPr algn="ctr"/>
+            <a:endParaRPr>
+              <a:latin typeface="Times New Roman"/>
+              <a:ea typeface="DFKai-SB"/>
+              <a:cs typeface="Times New Roman"/>
+            </a:endParaRPr>
+          </a:p>
+        </p:txBody>
+      </p:sp>
+      <p:sp>
+        <p:nvSpPr>
+          <p:cNvPr id="81" name="TextBox 80"/>
+          <p:cNvSpPr txBox="1"/>
+          <p:nvPr>
+            <p:custDataLst>
+              <p:tags r:id="rId35"/>
+            </p:custDataLst>
+          </p:nvPr>
+        </p:nvSpPr>
+        <p:spPr>
+          <a:xfrm>
+            <a:off x="7816250" y="9756000"/>
+            <a:ext cx="3060000" cy="504000"/>
+          </a:xfrm>
+          <a:prstGeom prst="rect">
+            <a:avLst/>
+          </a:prstGeom>
+          <a:noFill/>
+        </p:spPr>
+        <p:txBody>
+          <a:bodyPr wrap="none" lIns="0" tIns="0" rIns="0" bIns="0" anchor="ctr">
+            <a:spAutoFit/>
+          </a:bodyPr>
+          <a:lstStyle/>
+          <a:p>
+            <a:pPr algn="ctr">
+              <a:lnSpc>
+                <a:spcPct val="110000"/>
+              </a:lnSpc>
+              <a:spcBef>
+                <a:spcPts val="0"/>
+              </a:spcBef>
+              <a:spcAft>
+                <a:spcPts val="0"/>
+              </a:spcAft>
+            </a:pPr>
+            <a:r>
+              <a:rPr sz="2000" b="1">
+                <a:solidFill>
+                  <a:srgbClr val="105186"/>
+                </a:solidFill>
+                <a:latin typeface="Times New Roman"/>
+                <a:ea typeface="DFKai-SB"/>
+                <a:cs typeface="Times New Roman"/>
+              </a:rPr>
+              <a:t>本機AI稽核</a:t>
+            </a:r>
+          </a:p>
+        </p:txBody>
+      </p:sp>
+      <p:sp>
+        <p:nvSpPr>
+          <p:cNvPr id="82" name="TextBox 81"/>
+          <p:cNvSpPr txBox="1"/>
+          <p:nvPr>
+            <p:custDataLst>
+              <p:tags r:id="rId36"/>
+            </p:custDataLst>
+          </p:nvPr>
+        </p:nvSpPr>
+        <p:spPr>
+          <a:xfrm>
+            <a:off x="7825775" y="10206000"/>
+            <a:ext cx="3060000" cy="387000"/>
+          </a:xfrm>
+          <a:prstGeom prst="rect">
+            <a:avLst/>
+          </a:prstGeom>
+          <a:noFill/>
+        </p:spPr>
+        <p:txBody>
+          <a:bodyPr wrap="none" lIns="0" tIns="0" rIns="0" bIns="0" anchor="ctr">
+            <a:spAutoFit/>
+          </a:bodyPr>
+          <a:lstStyle/>
+          <a:p>
+            <a:pPr algn="ctr">
+              <a:lnSpc>
+                <a:spcPct val="110000"/>
+              </a:lnSpc>
+              <a:spcBef>
+                <a:spcPts val="0"/>
+              </a:spcBef>
+              <a:spcAft>
+                <a:spcPts val="0"/>
+              </a:spcAft>
+            </a:pPr>
+            <a:r>
+              <a:rPr sz="1400" b="0">
+                <a:solidFill>
+                  <a:srgbClr val="53666E"/>
+                </a:solidFill>
+                <a:latin typeface="Times New Roman"/>
+                <a:ea typeface="DFKai-SB"/>
+                <a:cs typeface="Times New Roman"/>
+              </a:rPr>
+              <a:t>核對同一事件</a:t>
+            </a:r>
+          </a:p>
+        </p:txBody>
+      </p:sp>
+      <p:sp>
+        <p:nvSpPr>
+          <p:cNvPr id="83" name="Right Arrow 82"/>
+          <p:cNvSpPr/>
+          <p:nvPr/>
+        </p:nvSpPr>
+        <p:spPr>
+          <a:xfrm>
+            <a:off x="10980000" y="10044000"/>
+            <a:ext cx="504000" cy="216000"/>
+          </a:xfrm>
+          <a:prstGeom prst="rightArrow">
+            <a:avLst/>
+          </a:prstGeom>
+          <a:solidFill>
+            <a:srgbClr val="105186"/>
+          </a:solidFill>
+          <a:ln>
+            <a:noFill/>
+          </a:ln>
+          <a:effectLst/>
+        </p:spPr>
+        <p:style>
+          <a:lnRef idx="1">
+            <a:schemeClr val="accent1"/>
+          </a:lnRef>
+          <a:fillRef idx="3">
+            <a:schemeClr val="accent1"/>
+          </a:fillRef>
+          <a:effectRef idx="2">
+            <a:schemeClr val="accent1"/>
+          </a:effectRef>
+          <a:fontRef idx="minor">
+            <a:schemeClr val="lt1"/>
+          </a:fontRef>
+        </p:style>
+        <p:txBody>
+          <a:bodyPr rtlCol="0" anchor="ctr"/>
+          <a:lstStyle/>
+          <a:p>
+            <a:pPr algn="ctr"/>
+            <a:endParaRPr>
+              <a:latin typeface="Times New Roman"/>
+              <a:ea typeface="DFKai-SB"/>
+              <a:cs typeface="Times New Roman"/>
+            </a:endParaRPr>
+          </a:p>
+        </p:txBody>
+      </p:sp>
+      <p:sp>
+        <p:nvSpPr>
+          <p:cNvPr id="84" name="Rectangle 83"/>
+          <p:cNvSpPr/>
+          <p:nvPr/>
+        </p:nvSpPr>
+        <p:spPr>
+          <a:xfrm>
+            <a:off x="11592000" y="9396000"/>
+            <a:ext cx="2736000" cy="432000"/>
+          </a:xfrm>
+          <a:prstGeom prst="rect">
+            <a:avLst/>
+          </a:prstGeom>
+          <a:solidFill>
+            <a:srgbClr val="FFFFFF"/>
+          </a:solidFill>
+          <a:ln>
+            <a:noFill/>
+          </a:ln>
+          <a:effectLst/>
+        </p:spPr>
+        <p:style>
+          <a:lnRef idx="1">
+            <a:schemeClr val="accent1"/>
+          </a:lnRef>
+          <a:fillRef idx="3">
+            <a:schemeClr val="accent1"/>
+          </a:fillRef>
+          <a:effectRef idx="2">
+            <a:schemeClr val="accent1"/>
+          </a:effectRef>
+          <a:fontRef idx="minor">
+            <a:schemeClr val="lt1"/>
+          </a:fontRef>
+        </p:style>
+        <p:txBody>
+          <a:bodyPr rtlCol="0" anchor="ctr"/>
+          <a:lstStyle/>
+          <a:p>
+            <a:pPr algn="ctr"/>
+            <a:endParaRPr>
+              <a:latin typeface="Times New Roman"/>
+              <a:ea typeface="DFKai-SB"/>
+              <a:cs typeface="Times New Roman"/>
+            </a:endParaRPr>
+          </a:p>
+        </p:txBody>
+      </p:sp>
+      <p:sp>
+        <p:nvSpPr>
+          <p:cNvPr id="85" name="TextBox 84"/>
+          <p:cNvSpPr txBox="1"/>
+          <p:nvPr>
+            <p:custDataLst>
+              <p:tags r:id="rId37"/>
+            </p:custDataLst>
+          </p:nvPr>
+        </p:nvSpPr>
+        <p:spPr>
+          <a:xfrm>
+            <a:off x="11560251" y="9396000"/>
+            <a:ext cx="2736000" cy="432000"/>
+          </a:xfrm>
+          <a:prstGeom prst="rect">
+            <a:avLst/>
+          </a:prstGeom>
+          <a:noFill/>
+        </p:spPr>
+        <p:txBody>
+          <a:bodyPr wrap="none" lIns="0" tIns="0" rIns="0" bIns="0" anchor="ctr">
+            <a:spAutoFit/>
+          </a:bodyPr>
+          <a:lstStyle/>
+          <a:p>
+            <a:pPr algn="ctr">
+              <a:lnSpc>
+                <a:spcPct val="110000"/>
+              </a:lnSpc>
+              <a:spcBef>
+                <a:spcPts val="0"/>
+              </a:spcBef>
+              <a:spcAft>
+                <a:spcPts val="0"/>
+              </a:spcAft>
+            </a:pPr>
+            <a:r>
+              <a:rPr sz="2000" b="1">
+                <a:solidFill>
+                  <a:srgbClr val="105186"/>
+                </a:solidFill>
+                <a:latin typeface="Times New Roman"/>
+                <a:ea typeface="DFKai-SB"/>
+                <a:cs typeface="Times New Roman"/>
+              </a:rPr>
+              <a:t>支持</a:t>
+            </a:r>
+          </a:p>
+        </p:txBody>
+      </p:sp>
+      <p:sp>
+        <p:nvSpPr>
+          <p:cNvPr id="86" name="Rectangle 85"/>
+          <p:cNvSpPr/>
+          <p:nvPr/>
+        </p:nvSpPr>
+        <p:spPr>
+          <a:xfrm>
+            <a:off x="11592000" y="9900000"/>
+            <a:ext cx="2736000" cy="432000"/>
+          </a:xfrm>
+          <a:prstGeom prst="rect">
+            <a:avLst/>
+          </a:prstGeom>
+          <a:solidFill>
+            <a:srgbClr val="FFFFFF"/>
+          </a:solidFill>
+          <a:ln>
+            <a:noFill/>
+          </a:ln>
+          <a:effectLst/>
+        </p:spPr>
+        <p:style>
+          <a:lnRef idx="1">
+            <a:schemeClr val="accent1"/>
+          </a:lnRef>
+          <a:fillRef idx="3">
+            <a:schemeClr val="accent1"/>
+          </a:fillRef>
+          <a:effectRef idx="2">
+            <a:schemeClr val="accent1"/>
+          </a:effectRef>
+          <a:fontRef idx="minor">
+            <a:schemeClr val="lt1"/>
+          </a:fontRef>
+        </p:style>
+        <p:txBody>
+          <a:bodyPr rtlCol="0" anchor="ctr"/>
+          <a:lstStyle/>
+          <a:p>
+            <a:pPr algn="ctr"/>
+            <a:endParaRPr>
+              <a:latin typeface="Times New Roman"/>
+              <a:ea typeface="DFKai-SB"/>
+              <a:cs typeface="Times New Roman"/>
+            </a:endParaRPr>
+          </a:p>
+        </p:txBody>
+      </p:sp>
+      <p:sp>
+        <p:nvSpPr>
+          <p:cNvPr id="87" name="TextBox 86"/>
+          <p:cNvSpPr txBox="1"/>
+          <p:nvPr>
+            <p:custDataLst>
+              <p:tags r:id="rId38"/>
+            </p:custDataLst>
+          </p:nvPr>
+        </p:nvSpPr>
+        <p:spPr>
+          <a:xfrm>
+            <a:off x="11560251" y="9900000"/>
+            <a:ext cx="2736000" cy="432000"/>
+          </a:xfrm>
+          <a:prstGeom prst="rect">
+            <a:avLst/>
+          </a:prstGeom>
+          <a:noFill/>
+        </p:spPr>
+        <p:txBody>
+          <a:bodyPr wrap="none" lIns="0" tIns="0" rIns="0" bIns="0" anchor="ctr">
+            <a:spAutoFit/>
+          </a:bodyPr>
+          <a:lstStyle/>
+          <a:p>
+            <a:pPr algn="ctr">
+              <a:lnSpc>
+                <a:spcPct val="110000"/>
+              </a:lnSpc>
+              <a:spcBef>
+                <a:spcPts val="0"/>
+              </a:spcBef>
+              <a:spcAft>
+                <a:spcPts val="0"/>
+              </a:spcAft>
+            </a:pPr>
+            <a:r>
+              <a:rPr sz="2000" b="1">
+                <a:solidFill>
+                  <a:srgbClr val="105186"/>
+                </a:solidFill>
+                <a:latin typeface="Times New Roman"/>
+                <a:ea typeface="DFKai-SB"/>
+                <a:cs typeface="Times New Roman"/>
+              </a:rPr>
+              <a:t>複核</a:t>
+            </a:r>
+          </a:p>
+        </p:txBody>
+      </p:sp>
+      <p:sp>
+        <p:nvSpPr>
+          <p:cNvPr id="88" name="Rectangle 87"/>
+          <p:cNvSpPr/>
+          <p:nvPr/>
+        </p:nvSpPr>
+        <p:spPr>
+          <a:xfrm>
+            <a:off x="11592000" y="10404000"/>
+            <a:ext cx="2736000" cy="432000"/>
+          </a:xfrm>
+          <a:prstGeom prst="rect">
+            <a:avLst/>
+          </a:prstGeom>
+          <a:solidFill>
+            <a:srgbClr val="FFFFFF"/>
+          </a:solidFill>
+          <a:ln>
+            <a:noFill/>
+          </a:ln>
+          <a:effectLst/>
+        </p:spPr>
+        <p:style>
+          <a:lnRef idx="1">
+            <a:schemeClr val="accent1"/>
+          </a:lnRef>
+          <a:fillRef idx="3">
+            <a:schemeClr val="accent1"/>
+          </a:fillRef>
+          <a:effectRef idx="2">
+            <a:schemeClr val="accent1"/>
+          </a:effectRef>
+          <a:fontRef idx="minor">
+            <a:schemeClr val="lt1"/>
+          </a:fontRef>
+        </p:style>
+        <p:txBody>
+          <a:bodyPr rtlCol="0" anchor="ctr"/>
+          <a:lstStyle/>
+          <a:p>
+            <a:pPr algn="ctr"/>
+            <a:endParaRPr>
+              <a:latin typeface="Times New Roman"/>
+              <a:ea typeface="DFKai-SB"/>
+              <a:cs typeface="Times New Roman"/>
+            </a:endParaRPr>
+          </a:p>
+        </p:txBody>
+      </p:sp>
+      <p:sp>
+        <p:nvSpPr>
+          <p:cNvPr id="89" name="TextBox 88"/>
+          <p:cNvSpPr txBox="1"/>
+          <p:nvPr>
+            <p:custDataLst>
+              <p:tags r:id="rId39"/>
+            </p:custDataLst>
+          </p:nvPr>
+        </p:nvSpPr>
+        <p:spPr>
+          <a:xfrm>
+            <a:off x="11560251" y="10404000"/>
+            <a:ext cx="2736000" cy="432000"/>
+          </a:xfrm>
+          <a:prstGeom prst="rect">
+            <a:avLst/>
+          </a:prstGeom>
+          <a:noFill/>
+        </p:spPr>
+        <p:txBody>
+          <a:bodyPr wrap="none" lIns="0" tIns="0" rIns="0" bIns="0" anchor="ctr">
+            <a:spAutoFit/>
+          </a:bodyPr>
+          <a:lstStyle/>
+          <a:p>
+            <a:pPr algn="ctr">
+              <a:lnSpc>
+                <a:spcPct val="110000"/>
+              </a:lnSpc>
+              <a:spcBef>
+                <a:spcPts val="0"/>
+              </a:spcBef>
+              <a:spcAft>
+                <a:spcPts val="0"/>
+              </a:spcAft>
+            </a:pPr>
+            <a:r>
+              <a:rPr sz="2000" b="1">
+                <a:solidFill>
+                  <a:srgbClr val="105186"/>
+                </a:solidFill>
+                <a:latin typeface="Times New Roman"/>
+                <a:ea typeface="DFKai-SB"/>
+                <a:cs typeface="Times New Roman"/>
+              </a:rPr>
+              <a:t>不確定</a:t>
+            </a:r>
+          </a:p>
+        </p:txBody>
+      </p:sp>
+      <p:sp>
+        <p:nvSpPr>
+          <p:cNvPr id="90" name="TextBox 89"/>
+          <p:cNvSpPr txBox="1"/>
+          <p:nvPr>
+            <p:custDataLst>
+              <p:tags r:id="rId40"/>
+            </p:custDataLst>
+          </p:nvPr>
+        </p:nvSpPr>
+        <p:spPr>
+          <a:xfrm>
+            <a:off x="4320000" y="11412000"/>
+            <a:ext cx="10008000" cy="360000"/>
+          </a:xfrm>
+          <a:prstGeom prst="rect">
+            <a:avLst/>
+          </a:prstGeom>
+          <a:noFill/>
+        </p:spPr>
+        <p:txBody>
+          <a:bodyPr wrap="none" lIns="0" tIns="0" rIns="0" bIns="0" anchor="ctr">
+            <a:spAutoFit/>
+          </a:bodyPr>
+          <a:lstStyle/>
+          <a:p>
+            <a:pPr algn="l">
+              <a:lnSpc>
+                <a:spcPct val="110000"/>
+              </a:lnSpc>
+              <a:spcBef>
+                <a:spcPts val="0"/>
+              </a:spcBef>
+              <a:spcAft>
+                <a:spcPts val="0"/>
+              </a:spcAft>
+            </a:pPr>
+            <a:r>
+              <a:rPr sz="1800" b="0">
+                <a:solidFill>
+                  <a:srgbClr val="171C1D"/>
+                </a:solidFill>
+                <a:latin typeface="Times New Roman"/>
+                <a:ea typeface="DFKai-SB"/>
+                <a:cs typeface="Times New Roman"/>
+              </a:rPr>
+              <a:t>策略檢查：範圍、允許動作與期限</a:t>
+            </a:r>
+          </a:p>
+        </p:txBody>
+      </p:sp>
+      <p:sp>
+        <p:nvSpPr>
+          <p:cNvPr id="91" name="Rectangle 90"/>
+          <p:cNvSpPr/>
+          <p:nvPr/>
+        </p:nvSpPr>
+        <p:spPr>
+          <a:xfrm>
+            <a:off x="4320000" y="11880000"/>
+            <a:ext cx="2808000" cy="576000"/>
+          </a:xfrm>
+          <a:prstGeom prst="rect">
+            <a:avLst/>
+          </a:prstGeom>
+          <a:solidFill>
+            <a:srgbClr val="FFFFFF"/>
+          </a:solidFill>
+          <a:ln>
+            <a:noFill/>
+          </a:ln>
+          <a:effectLst/>
+        </p:spPr>
+        <p:style>
+          <a:lnRef idx="1">
+            <a:schemeClr val="accent1"/>
+          </a:lnRef>
+          <a:fillRef idx="3">
+            <a:schemeClr val="accent1"/>
+          </a:fillRef>
+          <a:effectRef idx="2">
+            <a:schemeClr val="accent1"/>
+          </a:effectRef>
+          <a:fontRef idx="minor">
+            <a:schemeClr val="lt1"/>
+          </a:fontRef>
+        </p:style>
+        <p:txBody>
+          <a:bodyPr rtlCol="0" anchor="ctr"/>
+          <a:lstStyle/>
+          <a:p>
+            <a:pPr algn="ctr"/>
+            <a:endParaRPr>
+              <a:latin typeface="Times New Roman"/>
+              <a:ea typeface="DFKai-SB"/>
+              <a:cs typeface="Times New Roman"/>
+            </a:endParaRPr>
+          </a:p>
+        </p:txBody>
+      </p:sp>
+      <p:sp>
+        <p:nvSpPr>
+          <p:cNvPr id="92" name="TextBox 91"/>
+          <p:cNvSpPr txBox="1"/>
+          <p:nvPr>
+            <p:custDataLst>
+              <p:tags r:id="rId41"/>
+            </p:custDataLst>
+          </p:nvPr>
+        </p:nvSpPr>
+        <p:spPr>
+          <a:xfrm>
+            <a:off x="4288250" y="11880000"/>
+            <a:ext cx="2808000" cy="576000"/>
+          </a:xfrm>
+          <a:prstGeom prst="rect">
+            <a:avLst/>
+          </a:prstGeom>
+          <a:noFill/>
+        </p:spPr>
+        <p:txBody>
+          <a:bodyPr wrap="none" lIns="0" tIns="0" rIns="0" bIns="0" anchor="ctr">
+            <a:spAutoFit/>
+          </a:bodyPr>
+          <a:lstStyle/>
+          <a:p>
+            <a:pPr algn="ctr">
+              <a:lnSpc>
+                <a:spcPct val="110000"/>
+              </a:lnSpc>
+              <a:spcBef>
+                <a:spcPts val="0"/>
+              </a:spcBef>
+              <a:spcAft>
+                <a:spcPts val="0"/>
+              </a:spcAft>
+            </a:pPr>
+            <a:r>
+              <a:rPr sz="2000" b="1">
+                <a:solidFill>
+                  <a:srgbClr val="105186"/>
+                </a:solidFill>
+                <a:latin typeface="Times New Roman"/>
+                <a:ea typeface="DFKai-SB"/>
+                <a:cs typeface="Times New Roman"/>
+              </a:rPr>
+              <a:t>套用規則</a:t>
+            </a:r>
+          </a:p>
+        </p:txBody>
+      </p:sp>
+      <p:sp>
+        <p:nvSpPr>
+          <p:cNvPr id="93" name="Right Arrow 92"/>
+          <p:cNvSpPr/>
+          <p:nvPr/>
+        </p:nvSpPr>
+        <p:spPr>
+          <a:xfrm>
+            <a:off x="7236000" y="12060000"/>
+            <a:ext cx="504000" cy="216000"/>
+          </a:xfrm>
+          <a:prstGeom prst="rightArrow">
+            <a:avLst/>
+          </a:prstGeom>
+          <a:solidFill>
+            <a:srgbClr val="105186"/>
+          </a:solidFill>
+          <a:ln>
+            <a:noFill/>
+          </a:ln>
+          <a:effectLst/>
+        </p:spPr>
+        <p:style>
+          <a:lnRef idx="1">
+            <a:schemeClr val="accent1"/>
+          </a:lnRef>
+          <a:fillRef idx="3">
+            <a:schemeClr val="accent1"/>
+          </a:fillRef>
+          <a:effectRef idx="2">
+            <a:schemeClr val="accent1"/>
+          </a:effectRef>
+          <a:fontRef idx="minor">
+            <a:schemeClr val="lt1"/>
+          </a:fontRef>
+        </p:style>
+        <p:txBody>
+          <a:bodyPr rtlCol="0" anchor="ctr"/>
+          <a:lstStyle/>
+          <a:p>
+            <a:pPr algn="ctr"/>
+            <a:endParaRPr>
+              <a:latin typeface="Times New Roman"/>
+              <a:ea typeface="DFKai-SB"/>
+              <a:cs typeface="Times New Roman"/>
+            </a:endParaRPr>
+          </a:p>
+        </p:txBody>
+      </p:sp>
+      <p:sp>
+        <p:nvSpPr>
+          <p:cNvPr id="94" name="Rectangle 93"/>
+          <p:cNvSpPr/>
+          <p:nvPr/>
+        </p:nvSpPr>
+        <p:spPr>
+          <a:xfrm>
+            <a:off x="7848000" y="11880000"/>
+            <a:ext cx="2808000" cy="576000"/>
+          </a:xfrm>
+          <a:prstGeom prst="rect">
+            <a:avLst/>
+          </a:prstGeom>
+          <a:solidFill>
+            <a:srgbClr val="FFFFFF"/>
+          </a:solidFill>
+          <a:ln>
+            <a:noFill/>
+          </a:ln>
+          <a:effectLst/>
+        </p:spPr>
+        <p:style>
+          <a:lnRef idx="1">
+            <a:schemeClr val="accent1"/>
+          </a:lnRef>
+          <a:fillRef idx="3">
+            <a:schemeClr val="accent1"/>
+          </a:fillRef>
+          <a:effectRef idx="2">
+            <a:schemeClr val="accent1"/>
+          </a:effectRef>
+          <a:fontRef idx="minor">
+            <a:schemeClr val="lt1"/>
+          </a:fontRef>
+        </p:style>
+        <p:txBody>
+          <a:bodyPr rtlCol="0" anchor="ctr"/>
+          <a:lstStyle/>
+          <a:p>
+            <a:pPr algn="ctr"/>
+            <a:endParaRPr>
+              <a:latin typeface="Times New Roman"/>
+              <a:ea typeface="DFKai-SB"/>
+              <a:cs typeface="Times New Roman"/>
+            </a:endParaRPr>
+          </a:p>
+        </p:txBody>
+      </p:sp>
+      <p:sp>
+        <p:nvSpPr>
+          <p:cNvPr id="95" name="TextBox 94"/>
+          <p:cNvSpPr txBox="1"/>
+          <p:nvPr>
+            <p:custDataLst>
+              <p:tags r:id="rId42"/>
+            </p:custDataLst>
+          </p:nvPr>
+        </p:nvSpPr>
+        <p:spPr>
+          <a:xfrm>
+            <a:off x="7816250" y="11880000"/>
+            <a:ext cx="2808000" cy="576000"/>
+          </a:xfrm>
+          <a:prstGeom prst="rect">
+            <a:avLst/>
+          </a:prstGeom>
+          <a:noFill/>
+        </p:spPr>
+        <p:txBody>
+          <a:bodyPr wrap="none" lIns="0" tIns="0" rIns="0" bIns="0" anchor="ctr">
+            <a:spAutoFit/>
+          </a:bodyPr>
+          <a:lstStyle/>
+          <a:p>
+            <a:pPr algn="ctr">
+              <a:lnSpc>
+                <a:spcPct val="110000"/>
+              </a:lnSpc>
+              <a:spcBef>
+                <a:spcPts val="0"/>
+              </a:spcBef>
+              <a:spcAft>
+                <a:spcPts val="0"/>
+              </a:spcAft>
+            </a:pPr>
+            <a:r>
+              <a:rPr sz="2000" b="1">
+                <a:solidFill>
+                  <a:srgbClr val="105186"/>
+                </a:solidFill>
+                <a:latin typeface="Times New Roman"/>
+                <a:ea typeface="DFKai-SB"/>
+                <a:cs typeface="Times New Roman"/>
+              </a:rPr>
+              <a:t>讀回驗證</a:t>
+            </a:r>
+          </a:p>
+        </p:txBody>
+      </p:sp>
+      <p:sp>
+        <p:nvSpPr>
+          <p:cNvPr id="96" name="Right Arrow 95"/>
+          <p:cNvSpPr/>
+          <p:nvPr/>
+        </p:nvSpPr>
+        <p:spPr>
+          <a:xfrm>
+            <a:off x="10764000" y="12060000"/>
+            <a:ext cx="504000" cy="216000"/>
+          </a:xfrm>
+          <a:prstGeom prst="rightArrow">
+            <a:avLst/>
+          </a:prstGeom>
+          <a:solidFill>
+            <a:srgbClr val="105186"/>
+          </a:solidFill>
+          <a:ln>
+            <a:noFill/>
+          </a:ln>
+          <a:effectLst/>
+        </p:spPr>
+        <p:style>
+          <a:lnRef idx="1">
+            <a:schemeClr val="accent1"/>
+          </a:lnRef>
+          <a:fillRef idx="3">
+            <a:schemeClr val="accent1"/>
+          </a:fillRef>
+          <a:effectRef idx="2">
+            <a:schemeClr val="accent1"/>
+          </a:effectRef>
+          <a:fontRef idx="minor">
+            <a:schemeClr val="lt1"/>
+          </a:fontRef>
+        </p:style>
+        <p:txBody>
+          <a:bodyPr rtlCol="0" anchor="ctr"/>
+          <a:lstStyle/>
+          <a:p>
+            <a:pPr algn="ctr"/>
+            <a:endParaRPr>
+              <a:latin typeface="Times New Roman"/>
+              <a:ea typeface="DFKai-SB"/>
+              <a:cs typeface="Times New Roman"/>
+            </a:endParaRPr>
+          </a:p>
+        </p:txBody>
+      </p:sp>
+      <p:sp>
+        <p:nvSpPr>
+          <p:cNvPr id="97" name="Rectangle 96"/>
+          <p:cNvSpPr/>
+          <p:nvPr/>
+        </p:nvSpPr>
+        <p:spPr>
+          <a:xfrm>
+            <a:off x="11376000" y="11880000"/>
+            <a:ext cx="2808000" cy="576000"/>
+          </a:xfrm>
+          <a:prstGeom prst="rect">
+            <a:avLst/>
+          </a:prstGeom>
+          <a:solidFill>
+            <a:srgbClr val="FFFFFF"/>
+          </a:solidFill>
+          <a:ln>
+            <a:noFill/>
+          </a:ln>
+          <a:effectLst/>
+        </p:spPr>
+        <p:style>
+          <a:lnRef idx="1">
+            <a:schemeClr val="accent1"/>
+          </a:lnRef>
+          <a:fillRef idx="3">
+            <a:schemeClr val="accent1"/>
+          </a:fillRef>
+          <a:effectRef idx="2">
+            <a:schemeClr val="accent1"/>
+          </a:effectRef>
+          <a:fontRef idx="minor">
+            <a:schemeClr val="lt1"/>
+          </a:fontRef>
+        </p:style>
+        <p:txBody>
+          <a:bodyPr rtlCol="0" anchor="ctr"/>
+          <a:lstStyle/>
+          <a:p>
+            <a:pPr algn="ctr"/>
+            <a:endParaRPr>
+              <a:latin typeface="Times New Roman"/>
+              <a:ea typeface="DFKai-SB"/>
+              <a:cs typeface="Times New Roman"/>
+            </a:endParaRPr>
+          </a:p>
+        </p:txBody>
+      </p:sp>
+      <p:sp>
+        <p:nvSpPr>
+          <p:cNvPr id="98" name="TextBox 97"/>
+          <p:cNvSpPr txBox="1"/>
+          <p:nvPr>
+            <p:custDataLst>
+              <p:tags r:id="rId43"/>
+            </p:custDataLst>
+          </p:nvPr>
+        </p:nvSpPr>
+        <p:spPr>
+          <a:xfrm>
+            <a:off x="11344250" y="11880000"/>
+            <a:ext cx="2808000" cy="576000"/>
+          </a:xfrm>
+          <a:prstGeom prst="rect">
+            <a:avLst/>
+          </a:prstGeom>
+          <a:noFill/>
+        </p:spPr>
+        <p:txBody>
+          <a:bodyPr wrap="none" lIns="0" tIns="0" rIns="0" bIns="0" anchor="ctr">
+            <a:spAutoFit/>
+          </a:bodyPr>
+          <a:lstStyle/>
+          <a:p>
+            <a:pPr algn="ctr">
+              <a:lnSpc>
+                <a:spcPct val="110000"/>
+              </a:lnSpc>
+              <a:spcBef>
+                <a:spcPts val="0"/>
+              </a:spcBef>
+              <a:spcAft>
+                <a:spcPts val="0"/>
+              </a:spcAft>
+            </a:pPr>
+            <a:r>
+              <a:rPr sz="2000" b="1">
+                <a:solidFill>
+                  <a:srgbClr val="105186"/>
+                </a:solidFill>
+                <a:latin typeface="Times New Roman"/>
+                <a:ea typeface="DFKai-SB"/>
+                <a:cs typeface="Times New Roman"/>
+              </a:rPr>
+              <a:t>到期回復</a:t>
+            </a:r>
+          </a:p>
+        </p:txBody>
+      </p:sp>
+      <p:sp>
+        <p:nvSpPr>
+          <p:cNvPr id="99" name="TextBox 98"/>
+          <p:cNvSpPr txBox="1"/>
+          <p:nvPr>
+            <p:custDataLst>
+              <p:tags r:id="rId44"/>
+            </p:custDataLst>
+          </p:nvPr>
+        </p:nvSpPr>
+        <p:spPr>
+          <a:xfrm>
+            <a:off x="4320000" y="12564000"/>
+            <a:ext cx="10008000" cy="360000"/>
+          </a:xfrm>
+          <a:prstGeom prst="rect">
+            <a:avLst/>
+          </a:prstGeom>
+          <a:noFill/>
+        </p:spPr>
+        <p:txBody>
+          <a:bodyPr wrap="none" lIns="0" tIns="0" rIns="0" bIns="0" anchor="ctr">
+            <a:spAutoFit/>
+          </a:bodyPr>
+          <a:lstStyle/>
+          <a:p>
+            <a:pPr algn="l">
+              <a:lnSpc>
+                <a:spcPct val="110000"/>
+              </a:lnSpc>
+              <a:spcBef>
+                <a:spcPts val="0"/>
+              </a:spcBef>
+              <a:spcAft>
+                <a:spcPts val="0"/>
+              </a:spcAft>
+            </a:pPr>
+            <a:r>
+              <a:rPr sz="1500" b="0">
+                <a:solidFill>
+                  <a:srgbClr val="53666E"/>
+                </a:solidFill>
+                <a:latin typeface="Times New Roman"/>
+                <a:ea typeface="DFKai-SB"/>
+                <a:cs typeface="Times New Roman"/>
+              </a:rPr>
+              <a:t>複核／不確定 → 保留監測或蒐證</a:t>
+            </a:r>
+          </a:p>
+        </p:txBody>
+      </p:sp>
+      <p:sp>
+        <p:nvSpPr>
+          <p:cNvPr id="100" name="Rectangle 99"/>
+          <p:cNvSpPr/>
+          <p:nvPr/>
+        </p:nvSpPr>
+        <p:spPr>
+          <a:xfrm>
+            <a:off x="576000" y="13500000"/>
+            <a:ext cx="13968000" cy="504000"/>
           </a:xfrm>
           <a:prstGeom prst="rect">
             <a:avLst/>
@@ -7198,18 +8767,18 @@
       </p:sp>
       <p:sp>
         <p:nvSpPr>
-          <p:cNvPr id="68" name="TextBox 67"/>
+          <p:cNvPr id="101" name="TextBox 100"/>
           <p:cNvSpPr txBox="1"/>
           <p:nvPr>
             <p:custDataLst>
-              <p:tags r:id="rId36"/>
+              <p:tags r:id="rId45"/>
             </p:custDataLst>
           </p:nvPr>
         </p:nvSpPr>
         <p:spPr>
           <a:xfrm>
-            <a:off x="691425" y="12636000"/>
-            <a:ext cx="13680000" cy="468000"/>
+            <a:off x="691425" y="13500000"/>
+            <a:ext cx="13680000" cy="504000"/>
           </a:xfrm>
           <a:prstGeom prst="rect">
             <a:avLst/>
@@ -7249,17 +8818,17 @@
       </p:sp>
       <p:sp>
         <p:nvSpPr>
-          <p:cNvPr id="69" name="TextBox 68"/>
+          <p:cNvPr id="102" name="TextBox 101"/>
           <p:cNvSpPr txBox="1"/>
           <p:nvPr>
             <p:custDataLst>
-              <p:tags r:id="rId37"/>
+              <p:tags r:id="rId46"/>
             </p:custDataLst>
           </p:nvPr>
         </p:nvSpPr>
         <p:spPr>
           <a:xfrm>
-            <a:off x="576000" y="13536000"/>
+            <a:off x="576000" y="14364000"/>
             <a:ext cx="432000" cy="360000"/>
           </a:xfrm>
           <a:prstGeom prst="rect">
@@ -7300,17 +8869,17 @@
       </p:sp>
       <p:sp>
         <p:nvSpPr>
-          <p:cNvPr id="70" name="TextBox 69"/>
+          <p:cNvPr id="103" name="TextBox 102"/>
           <p:cNvSpPr txBox="1"/>
           <p:nvPr>
             <p:custDataLst>
-              <p:tags r:id="rId38"/>
+              <p:tags r:id="rId47"/>
             </p:custDataLst>
           </p:nvPr>
         </p:nvSpPr>
         <p:spPr>
           <a:xfrm>
-            <a:off x="1116000" y="13536000"/>
+            <a:off x="1116000" y="14364000"/>
             <a:ext cx="13320000" cy="360000"/>
           </a:xfrm>
           <a:prstGeom prst="rect">
@@ -7344,24 +8913,24 @@
                 <a:ea typeface="DFKai-SB"/>
                 <a:cs typeface="Times New Roman"/>
               </a:rPr>
-              <a:t>創新落在模型互補與證據銜接</a:t>
-            </a:r>
-          </a:p>
-        </p:txBody>
-      </p:sp>
-      <p:sp>
-        <p:nvSpPr>
-          <p:cNvPr id="71" name="TextBox 70"/>
+              <a:t>三項創新，直接對應可展示成果</a:t>
+            </a:r>
+          </a:p>
+        </p:txBody>
+      </p:sp>
+      <p:sp>
+        <p:nvSpPr>
+          <p:cNvPr id="104" name="TextBox 103"/>
           <p:cNvSpPr txBox="1"/>
           <p:nvPr>
             <p:custDataLst>
-              <p:tags r:id="rId39"/>
+              <p:tags r:id="rId48"/>
             </p:custDataLst>
           </p:nvPr>
         </p:nvSpPr>
         <p:spPr>
           <a:xfrm>
-            <a:off x="576000" y="14184000"/>
+            <a:off x="576000" y="14976000"/>
             <a:ext cx="4392000" cy="396000"/>
           </a:xfrm>
           <a:prstGeom prst="rect">
@@ -7387,7 +8956,7 @@
               </a:spcAft>
             </a:pPr>
             <a:r>
-              <a:rPr sz="2300" b="0">
+              <a:rPr sz="2200" b="0">
                 <a:solidFill>
                   <a:srgbClr val="105186"/>
                 </a:solidFill>
@@ -7402,17 +8971,17 @@
       </p:sp>
       <p:sp>
         <p:nvSpPr>
-          <p:cNvPr id="72" name="TextBox 71"/>
+          <p:cNvPr id="105" name="TextBox 104"/>
           <p:cNvSpPr txBox="1"/>
           <p:nvPr>
             <p:custDataLst>
-              <p:tags r:id="rId40"/>
+              <p:tags r:id="rId49"/>
             </p:custDataLst>
           </p:nvPr>
         </p:nvSpPr>
         <p:spPr>
           <a:xfrm>
-            <a:off x="576000" y="14688000"/>
+            <a:off x="576000" y="15516000"/>
             <a:ext cx="4464000" cy="828000"/>
           </a:xfrm>
           <a:prstGeom prst="rect">
@@ -7446,7 +9015,7 @@
                 <a:ea typeface="DFKai-SB"/>
                 <a:cs typeface="Times New Roman"/>
               </a:rPr>
-              <a:t>時序關係與局部內容共同判斷</a:t>
+              <a:t>時序與局部內容共同判斷</a:t>
             </a:r>
           </a:p>
           <a:p>
@@ -7470,21 +9039,21 @@
                 <a:ea typeface="DFKai-SB"/>
                 <a:cs typeface="Times New Roman"/>
               </a:rPr>
-              <a:t>由校準與Gate形成正式分類</a:t>
+              <a:t>校準後形成固定17類分類</a:t>
             </a:r>
           </a:p>
         </p:txBody>
       </p:sp>
       <p:cxnSp>
         <p:nvCxnSpPr>
-          <p:cNvPr id="73" name="Connector 72"/>
+          <p:cNvPr id="106" name="Connector 105"/>
           <p:cNvCxnSpPr/>
           <p:nvPr/>
         </p:nvCxnSpPr>
         <p:spPr>
           <a:xfrm>
-            <a:off x="5148000" y="14256000"/>
-            <a:ext cx="0" cy="1224000"/>
+            <a:off x="5148000" y="15012000"/>
+            <a:ext cx="0" cy="1368000"/>
           </a:xfrm>
           <a:prstGeom prst="line">
             <a:avLst/>
@@ -7513,17 +9082,17 @@
       </p:cxnSp>
       <p:sp>
         <p:nvSpPr>
-          <p:cNvPr id="74" name="TextBox 73"/>
+          <p:cNvPr id="107" name="TextBox 106"/>
           <p:cNvSpPr txBox="1"/>
           <p:nvPr>
             <p:custDataLst>
-              <p:tags r:id="rId41"/>
+              <p:tags r:id="rId50"/>
             </p:custDataLst>
           </p:nvPr>
         </p:nvSpPr>
         <p:spPr>
           <a:xfrm>
-            <a:off x="5364000" y="14184000"/>
+            <a:off x="5364000" y="14976000"/>
             <a:ext cx="4392000" cy="396000"/>
           </a:xfrm>
           <a:prstGeom prst="rect">
@@ -7549,7 +9118,7 @@
               </a:spcAft>
             </a:pPr>
             <a:r>
-              <a:rPr sz="2300" b="0">
+              <a:rPr sz="2200" b="0">
                 <a:solidFill>
                   <a:srgbClr val="105186"/>
                 </a:solidFill>
@@ -7564,17 +9133,17 @@
       </p:sp>
       <p:sp>
         <p:nvSpPr>
-          <p:cNvPr id="75" name="TextBox 74"/>
+          <p:cNvPr id="108" name="TextBox 107"/>
           <p:cNvSpPr txBox="1"/>
           <p:nvPr>
             <p:custDataLst>
-              <p:tags r:id="rId42"/>
+              <p:tags r:id="rId51"/>
             </p:custDataLst>
           </p:nvPr>
         </p:nvSpPr>
         <p:spPr>
           <a:xfrm>
-            <a:off x="5364000" y="14688000"/>
+            <a:off x="5364000" y="15516000"/>
             <a:ext cx="4464000" cy="828000"/>
           </a:xfrm>
           <a:prstGeom prst="rect">
@@ -7632,21 +9201,21 @@
                 <a:ea typeface="DFKai-SB"/>
                 <a:cs typeface="Times New Roman"/>
               </a:rPr>
-              <a:t>為每個事件找可核對的案例</a:t>
+              <a:t>為每個事件附上相關案例</a:t>
             </a:r>
           </a:p>
         </p:txBody>
       </p:sp>
       <p:cxnSp>
         <p:nvCxnSpPr>
-          <p:cNvPr id="76" name="Connector 75"/>
+          <p:cNvPr id="109" name="Connector 108"/>
           <p:cNvCxnSpPr/>
           <p:nvPr/>
         </p:nvCxnSpPr>
         <p:spPr>
           <a:xfrm>
-            <a:off x="9936000" y="14256000"/>
-            <a:ext cx="0" cy="1224000"/>
+            <a:off x="9936000" y="15012000"/>
+            <a:ext cx="0" cy="1368000"/>
           </a:xfrm>
           <a:prstGeom prst="line">
             <a:avLst/>
@@ -7675,17 +9244,17 @@
       </p:cxnSp>
       <p:sp>
         <p:nvSpPr>
-          <p:cNvPr id="77" name="TextBox 76"/>
+          <p:cNvPr id="110" name="TextBox 109"/>
           <p:cNvSpPr txBox="1"/>
           <p:nvPr>
             <p:custDataLst>
-              <p:tags r:id="rId43"/>
+              <p:tags r:id="rId52"/>
             </p:custDataLst>
           </p:nvPr>
         </p:nvSpPr>
         <p:spPr>
           <a:xfrm>
-            <a:off x="10152000" y="14184000"/>
+            <a:off x="10152000" y="14976000"/>
             <a:ext cx="4392000" cy="396000"/>
           </a:xfrm>
           <a:prstGeom prst="rect">
@@ -7711,7 +9280,7 @@
               </a:spcAft>
             </a:pPr>
             <a:r>
-              <a:rPr sz="2300" b="0">
+              <a:rPr sz="2200" b="0">
                 <a:solidFill>
                   <a:srgbClr val="105186"/>
                 </a:solidFill>
@@ -7726,17 +9295,17 @@
       </p:sp>
       <p:sp>
         <p:nvSpPr>
-          <p:cNvPr id="78" name="TextBox 77"/>
+          <p:cNvPr id="111" name="TextBox 110"/>
           <p:cNvSpPr txBox="1"/>
           <p:nvPr>
             <p:custDataLst>
-              <p:tags r:id="rId44"/>
+              <p:tags r:id="rId53"/>
             </p:custDataLst>
           </p:nvPr>
         </p:nvSpPr>
         <p:spPr>
           <a:xfrm>
-            <a:off x="10152000" y="14688000"/>
+            <a:off x="10152000" y="15516000"/>
             <a:ext cx="4464000" cy="828000"/>
           </a:xfrm>
           <a:prstGeom prst="rect">
@@ -7770,7 +9339,7 @@
                 <a:ea typeface="DFKai-SB"/>
                 <a:cs typeface="Times New Roman"/>
               </a:rPr>
-              <a:t>稽核附回原事件，策略另檢查</a:t>
+              <a:t>稽核附回原事件、策略另檢查</a:t>
             </a:r>
           </a:p>
           <a:p>
@@ -7801,17 +9370,17 @@
       </p:sp>
       <p:sp>
         <p:nvSpPr>
-          <p:cNvPr id="79" name="TextBox 78"/>
+          <p:cNvPr id="112" name="TextBox 111"/>
           <p:cNvSpPr txBox="1"/>
           <p:nvPr>
             <p:custDataLst>
-              <p:tags r:id="rId45"/>
+              <p:tags r:id="rId54"/>
             </p:custDataLst>
           </p:nvPr>
         </p:nvSpPr>
         <p:spPr>
           <a:xfrm>
-            <a:off x="576000" y="15948000"/>
+            <a:off x="576000" y="16740000"/>
             <a:ext cx="432000" cy="360000"/>
           </a:xfrm>
           <a:prstGeom prst="rect">
@@ -7852,17 +9421,17 @@
       </p:sp>
       <p:sp>
         <p:nvSpPr>
-          <p:cNvPr id="80" name="TextBox 79"/>
+          <p:cNvPr id="113" name="TextBox 112"/>
           <p:cNvSpPr txBox="1"/>
           <p:nvPr>
             <p:custDataLst>
-              <p:tags r:id="rId46"/>
+              <p:tags r:id="rId55"/>
             </p:custDataLst>
           </p:nvPr>
         </p:nvSpPr>
         <p:spPr>
           <a:xfrm>
-            <a:off x="1116000" y="15948000"/>
+            <a:off x="1116000" y="16740000"/>
             <a:ext cx="13320000" cy="360000"/>
           </a:xfrm>
           <a:prstGeom prst="rect">
@@ -7903,17 +9472,17 @@
       </p:sp>
       <p:sp>
         <p:nvSpPr>
-          <p:cNvPr id="81" name="TextBox 80"/>
+          <p:cNvPr id="114" name="TextBox 113"/>
           <p:cNvSpPr txBox="1"/>
           <p:nvPr>
             <p:custDataLst>
-              <p:tags r:id="rId47"/>
+              <p:tags r:id="rId56"/>
             </p:custDataLst>
           </p:nvPr>
         </p:nvSpPr>
         <p:spPr>
           <a:xfrm>
-            <a:off x="576000" y="16488000"/>
+            <a:off x="576000" y="17280000"/>
             <a:ext cx="6624000" cy="360000"/>
           </a:xfrm>
           <a:prstGeom prst="rect">
@@ -7939,7 +9508,7 @@
               </a:spcAft>
             </a:pPr>
             <a:r>
-              <a:rPr sz="1800" b="0">
+              <a:rPr sz="1700" b="0">
                 <a:solidFill>
                   <a:srgbClr val="171C1D"/>
                 </a:solidFill>
@@ -7954,17 +9523,17 @@
       </p:sp>
       <p:sp>
         <p:nvSpPr>
-          <p:cNvPr id="82" name="TextBox 81"/>
+          <p:cNvPr id="115" name="TextBox 114"/>
           <p:cNvSpPr txBox="1"/>
           <p:nvPr>
             <p:custDataLst>
-              <p:tags r:id="rId48"/>
+              <p:tags r:id="rId57"/>
             </p:custDataLst>
           </p:nvPr>
         </p:nvSpPr>
         <p:spPr>
           <a:xfrm>
-            <a:off x="576000" y="17136000"/>
+            <a:off x="576000" y="17784000"/>
             <a:ext cx="1584000" cy="360000"/>
           </a:xfrm>
           <a:prstGeom prst="rect">
@@ -8005,13 +9574,13 @@
       </p:sp>
       <p:sp>
         <p:nvSpPr>
-          <p:cNvPr id="83" name="Rectangle 82"/>
+          <p:cNvPr id="116" name="Rectangle 115"/>
           <p:cNvSpPr/>
           <p:nvPr/>
         </p:nvSpPr>
         <p:spPr>
           <a:xfrm>
-            <a:off x="2304000" y="17208000"/>
+            <a:off x="2304000" y="17856000"/>
             <a:ext cx="3384000" cy="216000"/>
           </a:xfrm>
           <a:prstGeom prst="rect">
@@ -8054,13 +9623,13 @@
       </p:sp>
       <p:sp>
         <p:nvSpPr>
-          <p:cNvPr id="84" name="Rectangle 83"/>
+          <p:cNvPr id="117" name="Rectangle 116"/>
           <p:cNvSpPr/>
           <p:nvPr/>
         </p:nvSpPr>
         <p:spPr>
           <a:xfrm>
-            <a:off x="2304000" y="17208000"/>
+            <a:off x="2304000" y="17856000"/>
             <a:ext cx="2698671" cy="216000"/>
           </a:xfrm>
           <a:prstGeom prst="rect">
@@ -8103,17 +9672,17 @@
       </p:sp>
       <p:sp>
         <p:nvSpPr>
-          <p:cNvPr id="85" name="TextBox 84"/>
+          <p:cNvPr id="118" name="TextBox 117"/>
           <p:cNvSpPr txBox="1"/>
           <p:nvPr>
             <p:custDataLst>
-              <p:tags r:id="rId49"/>
+              <p:tags r:id="rId58"/>
             </p:custDataLst>
           </p:nvPr>
         </p:nvSpPr>
         <p:spPr>
           <a:xfrm>
-            <a:off x="5729975" y="17136000"/>
+            <a:off x="5729975" y="17784000"/>
             <a:ext cx="1404000" cy="360000"/>
           </a:xfrm>
           <a:prstGeom prst="rect">
@@ -8154,17 +9723,17 @@
       </p:sp>
       <p:sp>
         <p:nvSpPr>
-          <p:cNvPr id="86" name="TextBox 85"/>
+          <p:cNvPr id="119" name="TextBox 118"/>
           <p:cNvSpPr txBox="1"/>
           <p:nvPr>
             <p:custDataLst>
-              <p:tags r:id="rId50"/>
+              <p:tags r:id="rId59"/>
             </p:custDataLst>
           </p:nvPr>
         </p:nvSpPr>
         <p:spPr>
           <a:xfrm>
-            <a:off x="576000" y="17748000"/>
+            <a:off x="576000" y="18396000"/>
             <a:ext cx="1584000" cy="360000"/>
           </a:xfrm>
           <a:prstGeom prst="rect">
@@ -8205,13 +9774,13 @@
       </p:sp>
       <p:sp>
         <p:nvSpPr>
-          <p:cNvPr id="87" name="Rectangle 86"/>
+          <p:cNvPr id="120" name="Rectangle 119"/>
           <p:cNvSpPr/>
           <p:nvPr/>
         </p:nvSpPr>
         <p:spPr>
           <a:xfrm>
-            <a:off x="2304000" y="17820000"/>
+            <a:off x="2304000" y="18468000"/>
             <a:ext cx="3384000" cy="216000"/>
           </a:xfrm>
           <a:prstGeom prst="rect">
@@ -8254,13 +9823,13 @@
       </p:sp>
       <p:sp>
         <p:nvSpPr>
-          <p:cNvPr id="88" name="Rectangle 87"/>
+          <p:cNvPr id="121" name="Rectangle 120"/>
           <p:cNvSpPr/>
           <p:nvPr/>
         </p:nvSpPr>
         <p:spPr>
           <a:xfrm>
-            <a:off x="2304000" y="17820000"/>
+            <a:off x="2304000" y="18468000"/>
             <a:ext cx="3116757" cy="216000"/>
           </a:xfrm>
           <a:prstGeom prst="rect">
@@ -8303,17 +9872,17 @@
       </p:sp>
       <p:sp>
         <p:nvSpPr>
-          <p:cNvPr id="89" name="TextBox 88"/>
+          <p:cNvPr id="122" name="TextBox 121"/>
           <p:cNvSpPr txBox="1"/>
           <p:nvPr>
             <p:custDataLst>
-              <p:tags r:id="rId51"/>
+              <p:tags r:id="rId60"/>
             </p:custDataLst>
           </p:nvPr>
         </p:nvSpPr>
         <p:spPr>
           <a:xfrm>
-            <a:off x="5729975" y="17748000"/>
+            <a:off x="5729975" y="18396000"/>
             <a:ext cx="1404000" cy="360000"/>
           </a:xfrm>
           <a:prstGeom prst="rect">
@@ -8354,17 +9923,17 @@
       </p:sp>
       <p:sp>
         <p:nvSpPr>
-          <p:cNvPr id="90" name="TextBox 89"/>
+          <p:cNvPr id="123" name="TextBox 122"/>
           <p:cNvSpPr txBox="1"/>
           <p:nvPr>
             <p:custDataLst>
-              <p:tags r:id="rId52"/>
+              <p:tags r:id="rId61"/>
             </p:custDataLst>
           </p:nvPr>
         </p:nvSpPr>
         <p:spPr>
           <a:xfrm>
-            <a:off x="576000" y="18360000"/>
+            <a:off x="576000" y="19008000"/>
             <a:ext cx="1584000" cy="360000"/>
           </a:xfrm>
           <a:prstGeom prst="rect">
@@ -8405,13 +9974,13 @@
       </p:sp>
       <p:sp>
         <p:nvSpPr>
-          <p:cNvPr id="91" name="Rectangle 90"/>
+          <p:cNvPr id="124" name="Rectangle 123"/>
           <p:cNvSpPr/>
           <p:nvPr/>
         </p:nvSpPr>
         <p:spPr>
           <a:xfrm>
-            <a:off x="2304000" y="18432000"/>
+            <a:off x="2304000" y="19080000"/>
             <a:ext cx="3384000" cy="216000"/>
           </a:xfrm>
           <a:prstGeom prst="rect">
@@ -8454,13 +10023,13 @@
       </p:sp>
       <p:sp>
         <p:nvSpPr>
-          <p:cNvPr id="92" name="Rectangle 91"/>
+          <p:cNvPr id="125" name="Rectangle 124"/>
           <p:cNvSpPr/>
           <p:nvPr/>
         </p:nvSpPr>
         <p:spPr>
           <a:xfrm>
-            <a:off x="2304000" y="18432000"/>
+            <a:off x="2304000" y="19080000"/>
             <a:ext cx="3148824" cy="216000"/>
           </a:xfrm>
           <a:prstGeom prst="rect">
@@ -8503,17 +10072,17 @@
       </p:sp>
       <p:sp>
         <p:nvSpPr>
-          <p:cNvPr id="93" name="TextBox 92"/>
+          <p:cNvPr id="126" name="TextBox 125"/>
           <p:cNvSpPr txBox="1"/>
           <p:nvPr>
             <p:custDataLst>
-              <p:tags r:id="rId53"/>
+              <p:tags r:id="rId62"/>
             </p:custDataLst>
           </p:nvPr>
         </p:nvSpPr>
         <p:spPr>
           <a:xfrm>
-            <a:off x="5729975" y="18360000"/>
+            <a:off x="5729975" y="19008000"/>
             <a:ext cx="1404000" cy="360000"/>
           </a:xfrm>
           <a:prstGeom prst="rect">
@@ -8554,17 +10123,17 @@
       </p:sp>
       <p:sp>
         <p:nvSpPr>
-          <p:cNvPr id="94" name="TextBox 93"/>
+          <p:cNvPr id="127" name="TextBox 126"/>
           <p:cNvSpPr txBox="1"/>
           <p:nvPr>
             <p:custDataLst>
-              <p:tags r:id="rId54"/>
+              <p:tags r:id="rId63"/>
             </p:custDataLst>
           </p:nvPr>
         </p:nvSpPr>
         <p:spPr>
           <a:xfrm>
-            <a:off x="576000" y="19080000"/>
+            <a:off x="576000" y="19620000"/>
             <a:ext cx="6624000" cy="324000"/>
           </a:xfrm>
           <a:prstGeom prst="rect">
@@ -8590,7 +10159,7 @@
               </a:spcAft>
             </a:pPr>
             <a:r>
-              <a:rPr sz="1700" b="0">
+              <a:rPr sz="1600" b="0">
                 <a:solidFill>
                   <a:srgbClr val="53666E"/>
                 </a:solidFill>
@@ -8598,72 +10167,21 @@
                 <a:ea typeface="DFKai-SB"/>
                 <a:cs typeface="Times New Roman"/>
               </a:rPr>
-              <a:t>融合判定 Accuracy 98.08%</a:t>
-            </a:r>
-          </a:p>
-        </p:txBody>
-      </p:sp>
-      <p:sp>
-        <p:nvSpPr>
-          <p:cNvPr id="95" name="TextBox 94"/>
-          <p:cNvSpPr txBox="1"/>
-          <p:nvPr>
-            <p:custDataLst>
-              <p:tags r:id="rId55"/>
-            </p:custDataLst>
-          </p:nvPr>
-        </p:nvSpPr>
-        <p:spPr>
-          <a:xfrm>
-            <a:off x="576000" y="19512000"/>
-            <a:ext cx="6624000" cy="324000"/>
-          </a:xfrm>
-          <a:prstGeom prst="rect">
-            <a:avLst/>
-          </a:prstGeom>
-          <a:noFill/>
-        </p:spPr>
-        <p:txBody>
-          <a:bodyPr wrap="none" lIns="0" tIns="0" rIns="0" bIns="0" anchor="ctr">
-            <a:spAutoFit/>
-          </a:bodyPr>
-          <a:lstStyle/>
-          <a:p>
-            <a:pPr algn="l">
-              <a:lnSpc>
-                <a:spcPct val="110000"/>
-              </a:lnSpc>
-              <a:spcBef>
-                <a:spcPts val="0"/>
-              </a:spcBef>
-              <a:spcAft>
-                <a:spcPts val="0"/>
-              </a:spcAft>
-            </a:pPr>
-            <a:r>
-              <a:rPr sz="1500" b="0">
-                <a:solidFill>
-                  <a:srgbClr val="53666E"/>
-                </a:solidFill>
-                <a:latin typeface="Times New Roman"/>
-                <a:ea typeface="DFKai-SB"/>
-                <a:cs typeface="Times New Roman"/>
-              </a:rPr>
-              <a:t>比較使用相同資料與17類標籤</a:t>
+              <a:t>整體準確率98.08%·固定17類分類</a:t>
             </a:r>
           </a:p>
         </p:txBody>
       </p:sp>
       <p:cxnSp>
         <p:nvCxnSpPr>
-          <p:cNvPr id="96" name="Connector 95"/>
+          <p:cNvPr id="128" name="Connector 127"/>
           <p:cNvCxnSpPr/>
           <p:nvPr/>
         </p:nvCxnSpPr>
         <p:spPr>
           <a:xfrm>
-            <a:off x="7560000" y="16488000"/>
-            <a:ext cx="0" cy="3312000"/>
+            <a:off x="7560000" y="17280000"/>
+            <a:ext cx="0" cy="2844000"/>
           </a:xfrm>
           <a:prstGeom prst="line">
             <a:avLst/>
@@ -8692,17 +10210,17 @@
       </p:cxnSp>
       <p:sp>
         <p:nvSpPr>
-          <p:cNvPr id="97" name="TextBox 96"/>
+          <p:cNvPr id="129" name="TextBox 128"/>
           <p:cNvSpPr txBox="1"/>
           <p:nvPr>
             <p:custDataLst>
-              <p:tags r:id="rId56"/>
+              <p:tags r:id="rId64"/>
             </p:custDataLst>
           </p:nvPr>
         </p:nvSpPr>
         <p:spPr>
           <a:xfrm>
-            <a:off x="7920000" y="16488000"/>
+            <a:off x="7920000" y="17280000"/>
             <a:ext cx="6624000" cy="360000"/>
           </a:xfrm>
           <a:prstGeom prst="rect">
@@ -8728,7 +10246,7 @@
               </a:spcAft>
             </a:pPr>
             <a:r>
-              <a:rPr sz="1800" b="0">
+              <a:rPr sz="1700" b="0">
                 <a:solidFill>
                   <a:srgbClr val="171C1D"/>
                 </a:solidFill>
@@ -8743,17 +10261,17 @@
       </p:sp>
       <p:sp>
         <p:nvSpPr>
-          <p:cNvPr id="98" name="TextBox 97"/>
+          <p:cNvPr id="130" name="TextBox 129"/>
           <p:cNvSpPr txBox="1"/>
           <p:nvPr>
             <p:custDataLst>
-              <p:tags r:id="rId57"/>
+              <p:tags r:id="rId65"/>
             </p:custDataLst>
           </p:nvPr>
         </p:nvSpPr>
         <p:spPr>
           <a:xfrm>
-            <a:off x="7920000" y="17028000"/>
+            <a:off x="7920000" y="17712000"/>
             <a:ext cx="6624000" cy="432000"/>
           </a:xfrm>
           <a:prstGeom prst="rect">
@@ -8794,17 +10312,17 @@
       </p:sp>
       <p:sp>
         <p:nvSpPr>
-          <p:cNvPr id="99" name="TextBox 98"/>
+          <p:cNvPr id="131" name="TextBox 130"/>
           <p:cNvSpPr txBox="1"/>
           <p:nvPr>
             <p:custDataLst>
-              <p:tags r:id="rId58"/>
+              <p:tags r:id="rId66"/>
             </p:custDataLst>
           </p:nvPr>
         </p:nvSpPr>
         <p:spPr>
           <a:xfrm>
-            <a:off x="7920000" y="17568000"/>
+            <a:off x="7920000" y="18252000"/>
             <a:ext cx="6624000" cy="360000"/>
           </a:xfrm>
           <a:prstGeom prst="rect">
@@ -8830,7 +10348,7 @@
               </a:spcAft>
             </a:pPr>
             <a:r>
-              <a:rPr sz="1600" b="0">
+              <a:rPr sz="1500" b="0">
                 <a:solidFill>
                   <a:srgbClr val="53666E"/>
                 </a:solidFill>
@@ -8838,24 +10356,24 @@
                 <a:ea typeface="DFKai-SB"/>
                 <a:cs typeface="Times New Roman"/>
               </a:rPr>
-              <a:t>MRR@5  93.89%　訓練／查詢重疊0</a:t>
-            </a:r>
-          </a:p>
-        </p:txBody>
-      </p:sp>
-      <p:sp>
-        <p:nvSpPr>
-          <p:cNvPr id="100" name="TextBox 99"/>
+              <a:t>MRR@5  93.89%·訓練／查詢重疊0</a:t>
+            </a:r>
+          </a:p>
+        </p:txBody>
+      </p:sp>
+      <p:sp>
+        <p:nvSpPr>
+          <p:cNvPr id="132" name="TextBox 131"/>
           <p:cNvSpPr txBox="1"/>
           <p:nvPr>
             <p:custDataLst>
-              <p:tags r:id="rId59"/>
+              <p:tags r:id="rId67"/>
             </p:custDataLst>
           </p:nvPr>
         </p:nvSpPr>
         <p:spPr>
           <a:xfrm>
-            <a:off x="7877138" y="18180000"/>
+            <a:off x="7878725" y="18720000"/>
             <a:ext cx="2088000" cy="432000"/>
           </a:xfrm>
           <a:prstGeom prst="rect">
@@ -8881,7 +10399,7 @@
               </a:spcAft>
             </a:pPr>
             <a:r>
-              <a:rPr sz="2700" b="0">
+              <a:rPr sz="2600" b="0">
                 <a:solidFill>
                   <a:srgbClr val="105186"/>
                 </a:solidFill>
@@ -8896,17 +10414,17 @@
       </p:sp>
       <p:sp>
         <p:nvSpPr>
-          <p:cNvPr id="101" name="TextBox 100"/>
+          <p:cNvPr id="133" name="TextBox 132"/>
           <p:cNvSpPr txBox="1"/>
           <p:nvPr>
             <p:custDataLst>
-              <p:tags r:id="rId60"/>
+              <p:tags r:id="rId68"/>
             </p:custDataLst>
           </p:nvPr>
         </p:nvSpPr>
         <p:spPr>
           <a:xfrm>
-            <a:off x="7891425" y="18720000"/>
+            <a:off x="7893013" y="19188000"/>
             <a:ext cx="2088000" cy="324000"/>
           </a:xfrm>
           <a:prstGeom prst="rect">
@@ -8932,7 +10450,7 @@
               </a:spcAft>
             </a:pPr>
             <a:r>
-              <a:rPr sz="1800" b="0">
+              <a:rPr sz="1700" b="0">
                 <a:solidFill>
                   <a:srgbClr val="171C1D"/>
                 </a:solidFill>
@@ -8947,17 +10465,17 @@
       </p:sp>
       <p:sp>
         <p:nvSpPr>
-          <p:cNvPr id="102" name="TextBox 101"/>
+          <p:cNvPr id="134" name="TextBox 133"/>
           <p:cNvSpPr txBox="1"/>
           <p:nvPr>
             <p:custDataLst>
-              <p:tags r:id="rId61"/>
+              <p:tags r:id="rId69"/>
             </p:custDataLst>
           </p:nvPr>
         </p:nvSpPr>
         <p:spPr>
           <a:xfrm>
-            <a:off x="10145137" y="18180000"/>
+            <a:off x="10146725" y="18720000"/>
             <a:ext cx="2088000" cy="432000"/>
           </a:xfrm>
           <a:prstGeom prst="rect">
@@ -8983,7 +10501,7 @@
               </a:spcAft>
             </a:pPr>
             <a:r>
-              <a:rPr sz="2700" b="0">
+              <a:rPr sz="2600" b="0">
                 <a:solidFill>
                   <a:srgbClr val="105186"/>
                 </a:solidFill>
@@ -8998,17 +10516,17 @@
       </p:sp>
       <p:sp>
         <p:nvSpPr>
-          <p:cNvPr id="103" name="TextBox 102"/>
+          <p:cNvPr id="135" name="TextBox 134"/>
           <p:cNvSpPr txBox="1"/>
           <p:nvPr>
             <p:custDataLst>
-              <p:tags r:id="rId62"/>
+              <p:tags r:id="rId70"/>
             </p:custDataLst>
           </p:nvPr>
         </p:nvSpPr>
         <p:spPr>
           <a:xfrm>
-            <a:off x="10159425" y="18720000"/>
+            <a:off x="10161012" y="19188000"/>
             <a:ext cx="2088000" cy="324000"/>
           </a:xfrm>
           <a:prstGeom prst="rect">
@@ -9034,7 +10552,7 @@
               </a:spcAft>
             </a:pPr>
             <a:r>
-              <a:rPr sz="1800" b="0">
+              <a:rPr sz="1700" b="0">
                 <a:solidFill>
                   <a:srgbClr val="171C1D"/>
                 </a:solidFill>
@@ -9049,17 +10567,17 @@
       </p:sp>
       <p:sp>
         <p:nvSpPr>
-          <p:cNvPr id="104" name="TextBox 103"/>
+          <p:cNvPr id="136" name="TextBox 135"/>
           <p:cNvSpPr txBox="1"/>
           <p:nvPr>
             <p:custDataLst>
-              <p:tags r:id="rId63"/>
+              <p:tags r:id="rId71"/>
             </p:custDataLst>
           </p:nvPr>
         </p:nvSpPr>
         <p:spPr>
           <a:xfrm>
-            <a:off x="12413138" y="18180000"/>
+            <a:off x="12414726" y="18720000"/>
             <a:ext cx="2088000" cy="432000"/>
           </a:xfrm>
           <a:prstGeom prst="rect">
@@ -9085,7 +10603,7 @@
               </a:spcAft>
             </a:pPr>
             <a:r>
-              <a:rPr sz="2700" b="0">
+              <a:rPr sz="2600" b="0">
                 <a:solidFill>
                   <a:srgbClr val="105186"/>
                 </a:solidFill>
@@ -9100,17 +10618,17 @@
       </p:sp>
       <p:sp>
         <p:nvSpPr>
-          <p:cNvPr id="105" name="TextBox 104"/>
+          <p:cNvPr id="137" name="TextBox 136"/>
           <p:cNvSpPr txBox="1"/>
           <p:nvPr>
             <p:custDataLst>
-              <p:tags r:id="rId64"/>
+              <p:tags r:id="rId72"/>
             </p:custDataLst>
           </p:nvPr>
         </p:nvSpPr>
         <p:spPr>
           <a:xfrm>
-            <a:off x="12427426" y="18720000"/>
+            <a:off x="12429013" y="19188000"/>
             <a:ext cx="2088000" cy="324000"/>
           </a:xfrm>
           <a:prstGeom prst="rect">
@@ -9136,7 +10654,7 @@
               </a:spcAft>
             </a:pPr>
             <a:r>
-              <a:rPr sz="1800" b="0">
+              <a:rPr sz="1700" b="0">
                 <a:solidFill>
                   <a:srgbClr val="171C1D"/>
                 </a:solidFill>
@@ -9151,17 +10669,17 @@
       </p:sp>
       <p:sp>
         <p:nvSpPr>
-          <p:cNvPr id="106" name="TextBox 105"/>
+          <p:cNvPr id="138" name="TextBox 137"/>
           <p:cNvSpPr txBox="1"/>
           <p:nvPr>
             <p:custDataLst>
-              <p:tags r:id="rId65"/>
+              <p:tags r:id="rId73"/>
             </p:custDataLst>
           </p:nvPr>
         </p:nvSpPr>
         <p:spPr>
           <a:xfrm>
-            <a:off x="7920000" y="19332000"/>
+            <a:off x="7920000" y="19656000"/>
             <a:ext cx="6624000" cy="504000"/>
           </a:xfrm>
           <a:prstGeom prst="rect">
@@ -9187,7 +10705,7 @@
               </a:spcAft>
             </a:pPr>
             <a:r>
-              <a:rPr sz="1400" b="0">
+              <a:rPr sz="1350" b="0">
                 <a:solidFill>
                   <a:srgbClr val="53666E"/>
                 </a:solidFill>
@@ -9211,7 +10729,7 @@
               </a:spcAft>
             </a:pPr>
             <a:r>
-              <a:rPr sz="1400" b="0">
+              <a:rPr sz="1350" b="0">
                 <a:solidFill>
                   <a:srgbClr val="53666E"/>
                 </a:solidFill>
@@ -9226,13 +10744,13 @@
       </p:sp>
       <p:cxnSp>
         <p:nvCxnSpPr>
-          <p:cNvPr id="107" name="Connector 106"/>
+          <p:cNvPr id="139" name="Connector 138"/>
           <p:cNvCxnSpPr/>
           <p:nvPr/>
         </p:nvCxnSpPr>
         <p:spPr>
           <a:xfrm>
-            <a:off x="576000" y="20088000"/>
+            <a:off x="576000" y="20232000"/>
             <a:ext cx="13968000" cy="0"/>
           </a:xfrm>
           <a:prstGeom prst="line">
@@ -9262,18 +10780,18 @@
       </p:cxnSp>
       <p:sp>
         <p:nvSpPr>
-          <p:cNvPr id="108" name="TextBox 107"/>
+          <p:cNvPr id="140" name="TextBox 139"/>
           <p:cNvSpPr txBox="1"/>
           <p:nvPr>
             <p:custDataLst>
-              <p:tags r:id="rId66"/>
+              <p:tags r:id="rId74"/>
             </p:custDataLst>
           </p:nvPr>
         </p:nvSpPr>
         <p:spPr>
           <a:xfrm>
-            <a:off x="576000" y="20268000"/>
-            <a:ext cx="13968000" cy="360000"/>
+            <a:off x="576000" y="20340000"/>
+            <a:ext cx="13968000" cy="324000"/>
           </a:xfrm>
           <a:prstGeom prst="rect">
             <a:avLst/>
@@ -9298,7 +10816,7 @@
               </a:spcAft>
             </a:pPr>
             <a:r>
-              <a:rPr sz="1700" b="0">
+              <a:rPr sz="1600" b="0">
                 <a:solidFill>
                   <a:srgbClr val="105186"/>
                 </a:solidFill>
@@ -9313,18 +10831,18 @@
       </p:sp>
       <p:sp>
         <p:nvSpPr>
-          <p:cNvPr id="109" name="TextBox 108"/>
+          <p:cNvPr id="141" name="TextBox 140"/>
           <p:cNvSpPr txBox="1"/>
           <p:nvPr>
             <p:custDataLst>
-              <p:tags r:id="rId67"/>
+              <p:tags r:id="rId75"/>
             </p:custDataLst>
           </p:nvPr>
         </p:nvSpPr>
         <p:spPr>
           <a:xfrm>
-            <a:off x="576000" y="20628000"/>
-            <a:ext cx="13968000" cy="216000"/>
+            <a:off x="576000" y="20664000"/>
+            <a:ext cx="13968000" cy="180000"/>
           </a:xfrm>
           <a:prstGeom prst="rect">
             <a:avLst/>
@@ -9349,7 +10867,7 @@
               </a:spcAft>
             </a:pPr>
             <a:r>
-              <a:rPr sz="1150" b="0">
+              <a:rPr sz="1100" b="0">
                 <a:solidFill>
                   <a:srgbClr val="53666E"/>
                 </a:solidFill>
@@ -9378,61 +10896,61 @@
 
 <file path=ppt/tags/tag10.xml><?xml version="1.0" encoding="utf-8"?>
 <p:tagLst xmlns:a="http://schemas.openxmlformats.org/drawingml/2006/main" xmlns:r="http://schemas.openxmlformats.org/officeDocument/2006/relationships" xmlns:p="http://schemas.openxmlformats.org/presentationml/2006/main">
-  <p:tag name="ALIGNMENT_TARGET_X" val="158.7401580810547"/>
+  <p:tag name="ALIGNMENT_TARGET_X" val="65.19685363769531"/>
 </p:tagLst>
 </file>
 
 <file path=ppt/tags/tag11.xml><?xml version="1.0" encoding="utf-8"?>
 <p:tagLst xmlns:a="http://schemas.openxmlformats.org/drawingml/2006/main" xmlns:r="http://schemas.openxmlformats.org/officeDocument/2006/relationships" xmlns:p="http://schemas.openxmlformats.org/presentationml/2006/main">
-  <p:tag name="ALIGNMENT_TARGET_X" val="158.7401580810547"/>
+  <p:tag name="ALIGNMENT_TARGET_X" val="104.88188934326172"/>
 </p:tagLst>
 </file>
 
 <file path=ppt/tags/tag12.xml><?xml version="1.0" encoding="utf-8"?>
 <p:tagLst xmlns:a="http://schemas.openxmlformats.org/drawingml/2006/main" xmlns:r="http://schemas.openxmlformats.org/officeDocument/2006/relationships" xmlns:p="http://schemas.openxmlformats.org/presentationml/2006/main">
-  <p:tag name="ALIGNMENT_TARGET_X" val="306.1417236328125"/>
+  <p:tag name="ALIGNMENT_TARGET_X" val="104.88188934326172"/>
 </p:tagLst>
 </file>
 
 <file path=ppt/tags/tag13.xml><?xml version="1.0" encoding="utf-8"?>
 <p:tagLst xmlns:a="http://schemas.openxmlformats.org/drawingml/2006/main" xmlns:r="http://schemas.openxmlformats.org/officeDocument/2006/relationships" xmlns:p="http://schemas.openxmlformats.org/presentationml/2006/main">
-  <p:tag name="ALIGNMENT_TARGET_X" val="306.1417236328125"/>
+  <p:tag name="ALIGNMENT_TARGET_X" val="65.19685363769531"/>
 </p:tagLst>
 </file>
 
 <file path=ppt/tags/tag14.xml><?xml version="1.0" encoding="utf-8"?>
 <p:tagLst xmlns:a="http://schemas.openxmlformats.org/drawingml/2006/main" xmlns:r="http://schemas.openxmlformats.org/officeDocument/2006/relationships" xmlns:p="http://schemas.openxmlformats.org/presentationml/2006/main">
-  <p:tag name="ALIGNMENT_TARGET_X" val="646.2991943359375"/>
+  <p:tag name="ALIGNMENT_TARGET_X" val="104.88188934326172"/>
 </p:tagLst>
 </file>
 
 <file path=ppt/tags/tag15.xml><?xml version="1.0" encoding="utf-8"?>
 <p:tagLst xmlns:a="http://schemas.openxmlformats.org/drawingml/2006/main" xmlns:r="http://schemas.openxmlformats.org/officeDocument/2006/relationships" xmlns:p="http://schemas.openxmlformats.org/presentationml/2006/main">
-  <p:tag name="ALIGNMENT_TARGET_X" val="688.8189086914062"/>
+  <p:tag name="ALIGNMENT_TARGET_X" val="104.88188934326172"/>
 </p:tagLst>
 </file>
 
 <file path=ppt/tags/tag16.xml><?xml version="1.0" encoding="utf-8"?>
 <p:tagLst xmlns:a="http://schemas.openxmlformats.org/drawingml/2006/main" xmlns:r="http://schemas.openxmlformats.org/officeDocument/2006/relationships" xmlns:p="http://schemas.openxmlformats.org/presentationml/2006/main">
-  <p:tag name="ALIGNMENT_TARGET_X" val="737.0078735351562"/>
+  <p:tag name="ALIGNMENT_TARGET_X" val="65.19685363769531"/>
 </p:tagLst>
 </file>
 
 <file path=ppt/tags/tag17.xml><?xml version="1.0" encoding="utf-8"?>
 <p:tagLst xmlns:a="http://schemas.openxmlformats.org/drawingml/2006/main" xmlns:r="http://schemas.openxmlformats.org/officeDocument/2006/relationships" xmlns:p="http://schemas.openxmlformats.org/presentationml/2006/main">
-  <p:tag name="ALIGNMENT_TARGET_X" val="737.0078735351562"/>
+  <p:tag name="ALIGNMENT_TARGET_X" val="104.88188934326172"/>
 </p:tagLst>
 </file>
 
 <file path=ppt/tags/tag18.xml><?xml version="1.0" encoding="utf-8"?>
 <p:tagLst xmlns:a="http://schemas.openxmlformats.org/drawingml/2006/main" xmlns:r="http://schemas.openxmlformats.org/officeDocument/2006/relationships" xmlns:p="http://schemas.openxmlformats.org/presentationml/2006/main">
-  <p:tag name="ALIGNMENT_TARGET_X" val="884.409423828125"/>
+  <p:tag name="ALIGNMENT_TARGET_X" val="104.88188934326172"/>
 </p:tagLst>
 </file>
 
 <file path=ppt/tags/tag19.xml><?xml version="1.0" encoding="utf-8"?>
 <p:tagLst xmlns:a="http://schemas.openxmlformats.org/drawingml/2006/main" xmlns:r="http://schemas.openxmlformats.org/officeDocument/2006/relationships" xmlns:p="http://schemas.openxmlformats.org/presentationml/2006/main">
-  <p:tag name="ALIGNMENT_TARGET_X" val="884.409423828125"/>
+  <p:tag name="ALIGNMENT_TARGET_X" val="450.7086486816406"/>
 </p:tagLst>
 </file>
 
@@ -9444,61 +10962,61 @@
 
 <file path=ppt/tags/tag20.xml><?xml version="1.0" encoding="utf-8"?>
 <p:tagLst xmlns:a="http://schemas.openxmlformats.org/drawingml/2006/main" xmlns:r="http://schemas.openxmlformats.org/officeDocument/2006/relationships" xmlns:p="http://schemas.openxmlformats.org/presentationml/2006/main">
-  <p:tag name="ALIGNMENT_TARGET_X" val="646.2991943359375"/>
+  <p:tag name="ALIGNMENT_TARGET_X" val="450.7086486816406"/>
 </p:tagLst>
 </file>
 
 <file path=ppt/tags/tag21.xml><?xml version="1.0" encoding="utf-8"?>
 <p:tagLst xmlns:a="http://schemas.openxmlformats.org/drawingml/2006/main" xmlns:r="http://schemas.openxmlformats.org/officeDocument/2006/relationships" xmlns:p="http://schemas.openxmlformats.org/presentationml/2006/main">
-  <p:tag name="ALIGNMENT_TARGET_X" val="688.8189086914062"/>
+  <p:tag name="ALIGNMENT_TARGET_X" val="450.7086486816406"/>
 </p:tagLst>
 </file>
 
 <file path=ppt/tags/tag22.xml><?xml version="1.0" encoding="utf-8"?>
 <p:tagLst xmlns:a="http://schemas.openxmlformats.org/drawingml/2006/main" xmlns:r="http://schemas.openxmlformats.org/officeDocument/2006/relationships" xmlns:p="http://schemas.openxmlformats.org/presentationml/2006/main">
-  <p:tag name="ALIGNMENT_TARGET_X" val="737.0078735351562"/>
+  <p:tag name="ALIGNMENT_TARGET_X" val="450.7086486816406"/>
 </p:tagLst>
 </file>
 
 <file path=ppt/tags/tag23.xml><?xml version="1.0" encoding="utf-8"?>
 <p:tagLst xmlns:a="http://schemas.openxmlformats.org/drawingml/2006/main" xmlns:r="http://schemas.openxmlformats.org/officeDocument/2006/relationships" xmlns:p="http://schemas.openxmlformats.org/presentationml/2006/main">
-  <p:tag name="ALIGNMENT_TARGET_X" val="737.0078735351562"/>
+  <p:tag name="ALIGNMENT_TARGET_X" val="738.4252014160156"/>
 </p:tagLst>
 </file>
 
 <file path=ppt/tags/tag24.xml><?xml version="1.0" encoding="utf-8"?>
 <p:tagLst xmlns:a="http://schemas.openxmlformats.org/drawingml/2006/main" xmlns:r="http://schemas.openxmlformats.org/officeDocument/2006/relationships" xmlns:p="http://schemas.openxmlformats.org/presentationml/2006/main">
-  <p:tag name="ALIGNMENT_TARGET_X" val="718.5826568603516"/>
+  <p:tag name="ALIGNMENT_TARGET_X" val="738.4252014160156"/>
 </p:tagLst>
 </file>
 
 <file path=ppt/tags/tag25.xml><?xml version="1.0" encoding="utf-8"?>
 <p:tagLst xmlns:a="http://schemas.openxmlformats.org/drawingml/2006/main" xmlns:r="http://schemas.openxmlformats.org/officeDocument/2006/relationships" xmlns:p="http://schemas.openxmlformats.org/presentationml/2006/main">
-  <p:tag name="ALIGNMENT_TARGET_X" val="884.4094390869141"/>
+  <p:tag name="ALIGNMENT_TARGET_X" val="1020.4724578857422"/>
 </p:tagLst>
 </file>
 
 <file path=ppt/tags/tag26.xml><?xml version="1.0" encoding="utf-8"?>
 <p:tagLst xmlns:a="http://schemas.openxmlformats.org/drawingml/2006/main" xmlns:r="http://schemas.openxmlformats.org/officeDocument/2006/relationships" xmlns:p="http://schemas.openxmlformats.org/presentationml/2006/main">
-  <p:tag name="ALIGNMENT_TARGET_X" val="1050.2362213134766"/>
+  <p:tag name="ALIGNMENT_TARGET_X" val="1020.4724578857422"/>
 </p:tagLst>
 </file>
 
 <file path=ppt/tags/tag27.xml><?xml version="1.0" encoding="utf-8"?>
 <p:tagLst xmlns:a="http://schemas.openxmlformats.org/drawingml/2006/main" xmlns:r="http://schemas.openxmlformats.org/officeDocument/2006/relationships" xmlns:p="http://schemas.openxmlformats.org/presentationml/2006/main">
-  <p:tag name="ALIGNMENT_TARGET_X" val="884.409423828125"/>
+  <p:tag name="ALIGNMENT_TARGET_X" val="450.7086486816406"/>
 </p:tagLst>
 </file>
 
 <file path=ppt/tags/tag28.xml><?xml version="1.0" encoding="utf-8"?>
 <p:tagLst xmlns:a="http://schemas.openxmlformats.org/drawingml/2006/main" xmlns:r="http://schemas.openxmlformats.org/officeDocument/2006/relationships" xmlns:p="http://schemas.openxmlformats.org/presentationml/2006/main">
-  <p:tag name="ALIGNMENT_TARGET_X" val="68.031494140625"/>
+  <p:tag name="ALIGNMENT_TARGET_X" val="450.7086486816406"/>
 </p:tagLst>
 </file>
 
 <file path=ppt/tags/tag29.xml><?xml version="1.0" encoding="utf-8"?>
 <p:tagLst xmlns:a="http://schemas.openxmlformats.org/drawingml/2006/main" xmlns:r="http://schemas.openxmlformats.org/officeDocument/2006/relationships" xmlns:p="http://schemas.openxmlformats.org/presentationml/2006/main">
-  <p:tag name="ALIGNMENT_TARGET_X" val="110.55117797851562"/>
+  <p:tag name="ALIGNMENT_TARGET_X" val="738.4252014160156"/>
 </p:tagLst>
 </file>
 
@@ -9510,115 +11028,115 @@
 
 <file path=ppt/tags/tag30.xml><?xml version="1.0" encoding="utf-8"?>
 <p:tagLst xmlns:a="http://schemas.openxmlformats.org/drawingml/2006/main" xmlns:r="http://schemas.openxmlformats.org/officeDocument/2006/relationships" xmlns:p="http://schemas.openxmlformats.org/presentationml/2006/main">
-  <p:tag name="ALIGNMENT_TARGET_X" val="158.7401580810547"/>
+  <p:tag name="ALIGNMENT_TARGET_X" val="738.4252014160156"/>
 </p:tagLst>
 </file>
 
 <file path=ppt/tags/tag31.xml><?xml version="1.0" encoding="utf-8"?>
 <p:tagLst xmlns:a="http://schemas.openxmlformats.org/drawingml/2006/main" xmlns:r="http://schemas.openxmlformats.org/officeDocument/2006/relationships" xmlns:p="http://schemas.openxmlformats.org/presentationml/2006/main">
-  <p:tag name="ALIGNMENT_TARGET_X" val="158.7401580810547"/>
+  <p:tag name="ALIGNMENT_TARGET_X" val="1020.4724578857422"/>
 </p:tagLst>
 </file>
 
 <file path=ppt/tags/tag32.xml><?xml version="1.0" encoding="utf-8"?>
 <p:tagLst xmlns:a="http://schemas.openxmlformats.org/drawingml/2006/main" xmlns:r="http://schemas.openxmlformats.org/officeDocument/2006/relationships" xmlns:p="http://schemas.openxmlformats.org/presentationml/2006/main">
-  <p:tag name="ALIGNMENT_TARGET_X" val="130.3936996459961"/>
+  <p:tag name="ALIGNMENT_TARGET_X" val="1020.4724578857422"/>
 </p:tagLst>
 </file>
 
 <file path=ppt/tags/tag33.xml><?xml version="1.0" encoding="utf-8"?>
 <p:tagLst xmlns:a="http://schemas.openxmlformats.org/drawingml/2006/main" xmlns:r="http://schemas.openxmlformats.org/officeDocument/2006/relationships" xmlns:p="http://schemas.openxmlformats.org/presentationml/2006/main">
-  <p:tag name="ALIGNMENT_TARGET_X" val="306.14173126220703"/>
+  <p:tag name="ALIGNMENT_TARGET_X" val="450.7086486816406"/>
 </p:tagLst>
 </file>
 
 <file path=ppt/tags/tag34.xml><?xml version="1.0" encoding="utf-8"?>
 <p:tagLst xmlns:a="http://schemas.openxmlformats.org/drawingml/2006/main" xmlns:r="http://schemas.openxmlformats.org/officeDocument/2006/relationships" xmlns:p="http://schemas.openxmlformats.org/presentationml/2006/main">
-  <p:tag name="ALIGNMENT_TARGET_X" val="481.88976287841797"/>
+  <p:tag name="ALIGNMENT_TARGET_X" val="450.7086486816406"/>
 </p:tagLst>
 </file>
 
 <file path=ppt/tags/tag35.xml><?xml version="1.0" encoding="utf-8"?>
 <p:tagLst xmlns:a="http://schemas.openxmlformats.org/drawingml/2006/main" xmlns:r="http://schemas.openxmlformats.org/officeDocument/2006/relationships" xmlns:p="http://schemas.openxmlformats.org/presentationml/2006/main">
-  <p:tag name="ALIGNMENT_TARGET_X" val="306.1417236328125"/>
+  <p:tag name="ALIGNMENT_TARGET_X" val="738.4252014160156"/>
 </p:tagLst>
 </file>
 
 <file path=ppt/tags/tag36.xml><?xml version="1.0" encoding="utf-8"?>
 <p:tagLst xmlns:a="http://schemas.openxmlformats.org/drawingml/2006/main" xmlns:r="http://schemas.openxmlformats.org/officeDocument/2006/relationships" xmlns:p="http://schemas.openxmlformats.org/presentationml/2006/main">
-  <p:tag name="ALIGNMENT_TARGET_X" val="595.2756156921387"/>
+  <p:tag name="ALIGNMENT_TARGET_X" val="738.4252014160156"/>
 </p:tagLst>
 </file>
 
 <file path=ppt/tags/tag37.xml><?xml version="1.0" encoding="utf-8"?>
 <p:tagLst xmlns:a="http://schemas.openxmlformats.org/drawingml/2006/main" xmlns:r="http://schemas.openxmlformats.org/officeDocument/2006/relationships" xmlns:p="http://schemas.openxmlformats.org/presentationml/2006/main">
-  <p:tag name="ALIGNMENT_TARGET_X" val="45.354331970214844"/>
+  <p:tag name="ALIGNMENT_TARGET_X" val="1020.4724578857422"/>
 </p:tagLst>
 </file>
 
 <file path=ppt/tags/tag38.xml><?xml version="1.0" encoding="utf-8"?>
 <p:tagLst xmlns:a="http://schemas.openxmlformats.org/drawingml/2006/main" xmlns:r="http://schemas.openxmlformats.org/officeDocument/2006/relationships" xmlns:p="http://schemas.openxmlformats.org/presentationml/2006/main">
-  <p:tag name="ALIGNMENT_TARGET_X" val="87.87401580810547"/>
+  <p:tag name="ALIGNMENT_TARGET_X" val="1020.4724578857422"/>
 </p:tagLst>
 </file>
 
 <file path=ppt/tags/tag39.xml><?xml version="1.0" encoding="utf-8"?>
 <p:tagLst xmlns:a="http://schemas.openxmlformats.org/drawingml/2006/main" xmlns:r="http://schemas.openxmlformats.org/officeDocument/2006/relationships" xmlns:p="http://schemas.openxmlformats.org/presentationml/2006/main">
-  <p:tag name="ALIGNMENT_TARGET_X" val="45.354331970214844"/>
+  <p:tag name="ALIGNMENT_TARGET_X" val="1020.4724578857422"/>
 </p:tagLst>
 </file>
 
 <file path=ppt/tags/tag4.xml><?xml version="1.0" encoding="utf-8"?>
 <p:tagLst xmlns:a="http://schemas.openxmlformats.org/drawingml/2006/main" xmlns:r="http://schemas.openxmlformats.org/officeDocument/2006/relationships" xmlns:p="http://schemas.openxmlformats.org/presentationml/2006/main">
-  <p:tag name="ALIGNMENT_TARGET_X" val="141.73228454589844"/>
+  <p:tag name="ALIGNMENT_TARGET_X" val="45.354331970214844"/>
 </p:tagLst>
 </file>
 
 <file path=ppt/tags/tag40.xml><?xml version="1.0" encoding="utf-8"?>
 <p:tagLst xmlns:a="http://schemas.openxmlformats.org/drawingml/2006/main" xmlns:r="http://schemas.openxmlformats.org/officeDocument/2006/relationships" xmlns:p="http://schemas.openxmlformats.org/presentationml/2006/main">
-  <p:tag name="ALIGNMENT_TARGET_X" val="45.354331970214844"/>
+  <p:tag name="ALIGNMENT_TARGET_X" val="340.157470703125"/>
 </p:tagLst>
 </file>
 
 <file path=ppt/tags/tag41.xml><?xml version="1.0" encoding="utf-8"?>
 <p:tagLst xmlns:a="http://schemas.openxmlformats.org/drawingml/2006/main" xmlns:r="http://schemas.openxmlformats.org/officeDocument/2006/relationships" xmlns:p="http://schemas.openxmlformats.org/presentationml/2006/main">
-  <p:tag name="ALIGNMENT_TARGET_X" val="422.3622131347656"/>
+  <p:tag name="ALIGNMENT_TARGET_X" val="450.7086486816406"/>
 </p:tagLst>
 </file>
 
 <file path=ppt/tags/tag42.xml><?xml version="1.0" encoding="utf-8"?>
 <p:tagLst xmlns:a="http://schemas.openxmlformats.org/drawingml/2006/main" xmlns:r="http://schemas.openxmlformats.org/officeDocument/2006/relationships" xmlns:p="http://schemas.openxmlformats.org/presentationml/2006/main">
-  <p:tag name="ALIGNMENT_TARGET_X" val="422.3622131347656"/>
+  <p:tag name="ALIGNMENT_TARGET_X" val="728.5039367675781"/>
 </p:tagLst>
 </file>
 
 <file path=ppt/tags/tag43.xml><?xml version="1.0" encoding="utf-8"?>
 <p:tagLst xmlns:a="http://schemas.openxmlformats.org/drawingml/2006/main" xmlns:r="http://schemas.openxmlformats.org/officeDocument/2006/relationships" xmlns:p="http://schemas.openxmlformats.org/presentationml/2006/main">
-  <p:tag name="ALIGNMENT_TARGET_X" val="799.3700561523438"/>
+  <p:tag name="ALIGNMENT_TARGET_X" val="1006.2992248535156"/>
 </p:tagLst>
 </file>
 
 <file path=ppt/tags/tag44.xml><?xml version="1.0" encoding="utf-8"?>
 <p:tagLst xmlns:a="http://schemas.openxmlformats.org/drawingml/2006/main" xmlns:r="http://schemas.openxmlformats.org/officeDocument/2006/relationships" xmlns:p="http://schemas.openxmlformats.org/presentationml/2006/main">
-  <p:tag name="ALIGNMENT_TARGET_X" val="799.3700561523438"/>
+  <p:tag name="ALIGNMENT_TARGET_X" val="340.157470703125"/>
 </p:tagLst>
 </file>
 
 <file path=ppt/tags/tag45.xml><?xml version="1.0" encoding="utf-8"?>
 <p:tagLst xmlns:a="http://schemas.openxmlformats.org/drawingml/2006/main" xmlns:r="http://schemas.openxmlformats.org/officeDocument/2006/relationships" xmlns:p="http://schemas.openxmlformats.org/presentationml/2006/main">
-  <p:tag name="ALIGNMENT_TARGET_X" val="45.354331970214844"/>
+  <p:tag name="ALIGNMENT_TARGET_X" val="595.2756156921387"/>
 </p:tagLst>
 </file>
 
 <file path=ppt/tags/tag46.xml><?xml version="1.0" encoding="utf-8"?>
 <p:tagLst xmlns:a="http://schemas.openxmlformats.org/drawingml/2006/main" xmlns:r="http://schemas.openxmlformats.org/officeDocument/2006/relationships" xmlns:p="http://schemas.openxmlformats.org/presentationml/2006/main">
-  <p:tag name="ALIGNMENT_TARGET_X" val="87.87401580810547"/>
+  <p:tag name="ALIGNMENT_TARGET_X" val="45.354331970214844"/>
 </p:tagLst>
 </file>
 
 <file path=ppt/tags/tag47.xml><?xml version="1.0" encoding="utf-8"?>
 <p:tagLst xmlns:a="http://schemas.openxmlformats.org/drawingml/2006/main" xmlns:r="http://schemas.openxmlformats.org/officeDocument/2006/relationships" xmlns:p="http://schemas.openxmlformats.org/presentationml/2006/main">
-  <p:tag name="ALIGNMENT_TARGET_X" val="45.354331970214844"/>
+  <p:tag name="ALIGNMENT_TARGET_X" val="87.87401580810547"/>
 </p:tagLst>
 </file>
 
@@ -9630,37 +11148,37 @@
 
 <file path=ppt/tags/tag49.xml><?xml version="1.0" encoding="utf-8"?>
 <p:tagLst xmlns:a="http://schemas.openxmlformats.org/drawingml/2006/main" xmlns:r="http://schemas.openxmlformats.org/officeDocument/2006/relationships" xmlns:p="http://schemas.openxmlformats.org/presentationml/2006/main">
-  <p:tag name="ALIGNMENT_TARGET_X" val="566.9291381835938"/>
+  <p:tag name="ALIGNMENT_TARGET_X" val="45.354331970214844"/>
 </p:tagLst>
 </file>
 
 <file path=ppt/tags/tag5.xml><?xml version="1.0" encoding="utf-8"?>
 <p:tagLst xmlns:a="http://schemas.openxmlformats.org/drawingml/2006/main" xmlns:r="http://schemas.openxmlformats.org/officeDocument/2006/relationships" xmlns:p="http://schemas.openxmlformats.org/presentationml/2006/main">
-  <p:tag name="ALIGNMENT_TARGET_X" val="141.73228454589844"/>
+  <p:tag name="ALIGNMENT_TARGET_X" val="45.354331970214844"/>
 </p:tagLst>
 </file>
 
 <file path=ppt/tags/tag50.xml><?xml version="1.0" encoding="utf-8"?>
 <p:tagLst xmlns:a="http://schemas.openxmlformats.org/drawingml/2006/main" xmlns:r="http://schemas.openxmlformats.org/officeDocument/2006/relationships" xmlns:p="http://schemas.openxmlformats.org/presentationml/2006/main">
-  <p:tag name="ALIGNMENT_TARGET_X" val="45.354331970214844"/>
+  <p:tag name="ALIGNMENT_TARGET_X" val="422.3622131347656"/>
 </p:tagLst>
 </file>
 
 <file path=ppt/tags/tag51.xml><?xml version="1.0" encoding="utf-8"?>
 <p:tagLst xmlns:a="http://schemas.openxmlformats.org/drawingml/2006/main" xmlns:r="http://schemas.openxmlformats.org/officeDocument/2006/relationships" xmlns:p="http://schemas.openxmlformats.org/presentationml/2006/main">
-  <p:tag name="ALIGNMENT_TARGET_X" val="566.9291381835938"/>
+  <p:tag name="ALIGNMENT_TARGET_X" val="422.3622131347656"/>
 </p:tagLst>
 </file>
 
 <file path=ppt/tags/tag52.xml><?xml version="1.0" encoding="utf-8"?>
 <p:tagLst xmlns:a="http://schemas.openxmlformats.org/drawingml/2006/main" xmlns:r="http://schemas.openxmlformats.org/officeDocument/2006/relationships" xmlns:p="http://schemas.openxmlformats.org/presentationml/2006/main">
-  <p:tag name="ALIGNMENT_TARGET_X" val="45.354331970214844"/>
+  <p:tag name="ALIGNMENT_TARGET_X" val="799.3700561523438"/>
 </p:tagLst>
 </file>
 
 <file path=ppt/tags/tag53.xml><?xml version="1.0" encoding="utf-8"?>
 <p:tagLst xmlns:a="http://schemas.openxmlformats.org/drawingml/2006/main" xmlns:r="http://schemas.openxmlformats.org/officeDocument/2006/relationships" xmlns:p="http://schemas.openxmlformats.org/presentationml/2006/main">
-  <p:tag name="ALIGNMENT_TARGET_X" val="566.9291381835938"/>
+  <p:tag name="ALIGNMENT_TARGET_X" val="799.3700561523438"/>
 </p:tagLst>
 </file>
 
@@ -9672,67 +11190,67 @@
 
 <file path=ppt/tags/tag55.xml><?xml version="1.0" encoding="utf-8"?>
 <p:tagLst xmlns:a="http://schemas.openxmlformats.org/drawingml/2006/main" xmlns:r="http://schemas.openxmlformats.org/officeDocument/2006/relationships" xmlns:p="http://schemas.openxmlformats.org/presentationml/2006/main">
-  <p:tag name="ALIGNMENT_TARGET_X" val="45.354331970214844"/>
+  <p:tag name="ALIGNMENT_TARGET_X" val="87.87401580810547"/>
 </p:tagLst>
 </file>
 
 <file path=ppt/tags/tag56.xml><?xml version="1.0" encoding="utf-8"?>
 <p:tagLst xmlns:a="http://schemas.openxmlformats.org/drawingml/2006/main" xmlns:r="http://schemas.openxmlformats.org/officeDocument/2006/relationships" xmlns:p="http://schemas.openxmlformats.org/presentationml/2006/main">
-  <p:tag name="ALIGNMENT_TARGET_X" val="623.6220703125"/>
+  <p:tag name="ALIGNMENT_TARGET_X" val="45.354331970214844"/>
 </p:tagLst>
 </file>
 
 <file path=ppt/tags/tag57.xml><?xml version="1.0" encoding="utf-8"?>
 <p:tagLst xmlns:a="http://schemas.openxmlformats.org/drawingml/2006/main" xmlns:r="http://schemas.openxmlformats.org/officeDocument/2006/relationships" xmlns:p="http://schemas.openxmlformats.org/presentationml/2006/main">
-  <p:tag name="ALIGNMENT_TARGET_X" val="623.6220703125"/>
+  <p:tag name="ALIGNMENT_TARGET_X" val="45.354331970214844"/>
 </p:tagLst>
 </file>
 
 <file path=ppt/tags/tag58.xml><?xml version="1.0" encoding="utf-8"?>
 <p:tagLst xmlns:a="http://schemas.openxmlformats.org/drawingml/2006/main" xmlns:r="http://schemas.openxmlformats.org/officeDocument/2006/relationships" xmlns:p="http://schemas.openxmlformats.org/presentationml/2006/main">
-  <p:tag name="ALIGNMENT_TARGET_X" val="623.6220703125"/>
+  <p:tag name="ALIGNMENT_TARGET_X" val="566.9291381835938"/>
 </p:tagLst>
 </file>
 
 <file path=ppt/tags/tag59.xml><?xml version="1.0" encoding="utf-8"?>
 <p:tagLst xmlns:a="http://schemas.openxmlformats.org/drawingml/2006/main" xmlns:r="http://schemas.openxmlformats.org/officeDocument/2006/relationships" xmlns:p="http://schemas.openxmlformats.org/presentationml/2006/main">
-  <p:tag name="ALIGNMENT_TARGET_X" val="705.8267974853516"/>
+  <p:tag name="ALIGNMENT_TARGET_X" val="45.354331970214844"/>
 </p:tagLst>
 </file>
 
 <file path=ppt/tags/tag6.xml><?xml version="1.0" encoding="utf-8"?>
 <p:tagLst xmlns:a="http://schemas.openxmlformats.org/drawingml/2006/main" xmlns:r="http://schemas.openxmlformats.org/officeDocument/2006/relationships" xmlns:p="http://schemas.openxmlformats.org/presentationml/2006/main">
-  <p:tag name="ALIGNMENT_TARGET_X" val="45.354331970214844"/>
+  <p:tag name="ALIGNMENT_TARGET_X" val="87.87401580810547"/>
 </p:tagLst>
 </file>
 
 <file path=ppt/tags/tag60.xml><?xml version="1.0" encoding="utf-8"?>
 <p:tagLst xmlns:a="http://schemas.openxmlformats.org/drawingml/2006/main" xmlns:r="http://schemas.openxmlformats.org/officeDocument/2006/relationships" xmlns:p="http://schemas.openxmlformats.org/presentationml/2006/main">
-  <p:tag name="ALIGNMENT_TARGET_X" val="705.8267974853516"/>
+  <p:tag name="ALIGNMENT_TARGET_X" val="566.9291381835938"/>
 </p:tagLst>
 </file>
 
 <file path=ppt/tags/tag61.xml><?xml version="1.0" encoding="utf-8"?>
 <p:tagLst xmlns:a="http://schemas.openxmlformats.org/drawingml/2006/main" xmlns:r="http://schemas.openxmlformats.org/officeDocument/2006/relationships" xmlns:p="http://schemas.openxmlformats.org/presentationml/2006/main">
-  <p:tag name="ALIGNMENT_TARGET_X" val="884.4094390869141"/>
+  <p:tag name="ALIGNMENT_TARGET_X" val="45.354331970214844"/>
 </p:tagLst>
 </file>
 
 <file path=ppt/tags/tag62.xml><?xml version="1.0" encoding="utf-8"?>
 <p:tagLst xmlns:a="http://schemas.openxmlformats.org/drawingml/2006/main" xmlns:r="http://schemas.openxmlformats.org/officeDocument/2006/relationships" xmlns:p="http://schemas.openxmlformats.org/presentationml/2006/main">
-  <p:tag name="ALIGNMENT_TARGET_X" val="884.4094390869141"/>
+  <p:tag name="ALIGNMENT_TARGET_X" val="566.9291381835938"/>
 </p:tagLst>
 </file>
 
 <file path=ppt/tags/tag63.xml><?xml version="1.0" encoding="utf-8"?>
 <p:tagLst xmlns:a="http://schemas.openxmlformats.org/drawingml/2006/main" xmlns:r="http://schemas.openxmlformats.org/officeDocument/2006/relationships" xmlns:p="http://schemas.openxmlformats.org/presentationml/2006/main">
-  <p:tag name="ALIGNMENT_TARGET_X" val="1062.9921417236328"/>
+  <p:tag name="ALIGNMENT_TARGET_X" val="45.354331970214844"/>
 </p:tagLst>
 </file>
 
 <file path=ppt/tags/tag64.xml><?xml version="1.0" encoding="utf-8"?>
 <p:tagLst xmlns:a="http://schemas.openxmlformats.org/drawingml/2006/main" xmlns:r="http://schemas.openxmlformats.org/officeDocument/2006/relationships" xmlns:p="http://schemas.openxmlformats.org/presentationml/2006/main">
-  <p:tag name="ALIGNMENT_TARGET_X" val="1062.9921417236328"/>
+  <p:tag name="ALIGNMENT_TARGET_X" val="623.6220703125"/>
 </p:tagLst>
 </file>
 
@@ -9744,31 +11262,79 @@
 
 <file path=ppt/tags/tag66.xml><?xml version="1.0" encoding="utf-8"?>
 <p:tagLst xmlns:a="http://schemas.openxmlformats.org/drawingml/2006/main" xmlns:r="http://schemas.openxmlformats.org/officeDocument/2006/relationships" xmlns:p="http://schemas.openxmlformats.org/presentationml/2006/main">
-  <p:tag name="ALIGNMENT_TARGET_X" val="45.354331970214844"/>
+  <p:tag name="ALIGNMENT_TARGET_X" val="623.6220703125"/>
 </p:tagLst>
 </file>
 
 <file path=ppt/tags/tag67.xml><?xml version="1.0" encoding="utf-8"?>
 <p:tagLst xmlns:a="http://schemas.openxmlformats.org/drawingml/2006/main" xmlns:r="http://schemas.openxmlformats.org/officeDocument/2006/relationships" xmlns:p="http://schemas.openxmlformats.org/presentationml/2006/main">
-  <p:tag name="ALIGNMENT_TARGET_X" val="45.354331970214844"/>
+  <p:tag name="ALIGNMENT_TARGET_X" val="705.8267974853516"/>
+</p:tagLst>
+</file>
+
+<file path=ppt/tags/tag68.xml><?xml version="1.0" encoding="utf-8"?>
+<p:tagLst xmlns:a="http://schemas.openxmlformats.org/drawingml/2006/main" xmlns:r="http://schemas.openxmlformats.org/officeDocument/2006/relationships" xmlns:p="http://schemas.openxmlformats.org/presentationml/2006/main">
+  <p:tag name="ALIGNMENT_TARGET_X" val="705.8267974853516"/>
+</p:tagLst>
+</file>
+
+<file path=ppt/tags/tag69.xml><?xml version="1.0" encoding="utf-8"?>
+<p:tagLst xmlns:a="http://schemas.openxmlformats.org/drawingml/2006/main" xmlns:r="http://schemas.openxmlformats.org/officeDocument/2006/relationships" xmlns:p="http://schemas.openxmlformats.org/presentationml/2006/main">
+  <p:tag name="ALIGNMENT_TARGET_X" val="884.4094390869141"/>
 </p:tagLst>
 </file>
 
 <file path=ppt/tags/tag7.xml><?xml version="1.0" encoding="utf-8"?>
 <p:tagLst xmlns:a="http://schemas.openxmlformats.org/drawingml/2006/main" xmlns:r="http://schemas.openxmlformats.org/officeDocument/2006/relationships" xmlns:p="http://schemas.openxmlformats.org/presentationml/2006/main">
-  <p:tag name="ALIGNMENT_TARGET_X" val="87.87401580810547"/>
+  <p:tag name="ALIGNMENT_TARGET_X" val="65.19685363769531"/>
+</p:tagLst>
+</file>
+
+<file path=ppt/tags/tag70.xml><?xml version="1.0" encoding="utf-8"?>
+<p:tagLst xmlns:a="http://schemas.openxmlformats.org/drawingml/2006/main" xmlns:r="http://schemas.openxmlformats.org/officeDocument/2006/relationships" xmlns:p="http://schemas.openxmlformats.org/presentationml/2006/main">
+  <p:tag name="ALIGNMENT_TARGET_X" val="884.4094390869141"/>
+</p:tagLst>
+</file>
+
+<file path=ppt/tags/tag71.xml><?xml version="1.0" encoding="utf-8"?>
+<p:tagLst xmlns:a="http://schemas.openxmlformats.org/drawingml/2006/main" xmlns:r="http://schemas.openxmlformats.org/officeDocument/2006/relationships" xmlns:p="http://schemas.openxmlformats.org/presentationml/2006/main">
+  <p:tag name="ALIGNMENT_TARGET_X" val="1062.9921417236328"/>
+</p:tagLst>
+</file>
+
+<file path=ppt/tags/tag72.xml><?xml version="1.0" encoding="utf-8"?>
+<p:tagLst xmlns:a="http://schemas.openxmlformats.org/drawingml/2006/main" xmlns:r="http://schemas.openxmlformats.org/officeDocument/2006/relationships" xmlns:p="http://schemas.openxmlformats.org/presentationml/2006/main">
+  <p:tag name="ALIGNMENT_TARGET_X" val="1062.9921417236328"/>
+</p:tagLst>
+</file>
+
+<file path=ppt/tags/tag73.xml><?xml version="1.0" encoding="utf-8"?>
+<p:tagLst xmlns:a="http://schemas.openxmlformats.org/drawingml/2006/main" xmlns:r="http://schemas.openxmlformats.org/officeDocument/2006/relationships" xmlns:p="http://schemas.openxmlformats.org/presentationml/2006/main">
+  <p:tag name="ALIGNMENT_TARGET_X" val="623.6220703125"/>
+</p:tagLst>
+</file>
+
+<file path=ppt/tags/tag74.xml><?xml version="1.0" encoding="utf-8"?>
+<p:tagLst xmlns:a="http://schemas.openxmlformats.org/drawingml/2006/main" xmlns:r="http://schemas.openxmlformats.org/officeDocument/2006/relationships" xmlns:p="http://schemas.openxmlformats.org/presentationml/2006/main">
+  <p:tag name="ALIGNMENT_TARGET_X" val="45.354331970214844"/>
+</p:tagLst>
+</file>
+
+<file path=ppt/tags/tag75.xml><?xml version="1.0" encoding="utf-8"?>
+<p:tagLst xmlns:a="http://schemas.openxmlformats.org/drawingml/2006/main" xmlns:r="http://schemas.openxmlformats.org/officeDocument/2006/relationships" xmlns:p="http://schemas.openxmlformats.org/presentationml/2006/main">
+  <p:tag name="ALIGNMENT_TARGET_X" val="45.354331970214844"/>
 </p:tagLst>
 </file>
 
 <file path=ppt/tags/tag8.xml><?xml version="1.0" encoding="utf-8"?>
 <p:tagLst xmlns:a="http://schemas.openxmlformats.org/drawingml/2006/main" xmlns:r="http://schemas.openxmlformats.org/officeDocument/2006/relationships" xmlns:p="http://schemas.openxmlformats.org/presentationml/2006/main">
-  <p:tag name="ALIGNMENT_TARGET_X" val="68.031494140625"/>
+  <p:tag name="ALIGNMENT_TARGET_X" val="104.88188934326172"/>
 </p:tagLst>
 </file>
 
 <file path=ppt/tags/tag9.xml><?xml version="1.0" encoding="utf-8"?>
 <p:tagLst xmlns:a="http://schemas.openxmlformats.org/drawingml/2006/main" xmlns:r="http://schemas.openxmlformats.org/officeDocument/2006/relationships" xmlns:p="http://schemas.openxmlformats.org/presentationml/2006/main">
-  <p:tag name="ALIGNMENT_TARGET_X" val="110.55117797851562"/>
+  <p:tag name="ALIGNMENT_TARGET_X" val="104.88188934326172"/>
 </p:tagLst>
 </file>
 

--- a/deliverables/決賽海報_AI資安框架_A2.pptx
+++ b/deliverables/決賽海報_AI資安框架_A2.pptx
@@ -8828,7 +8828,7 @@
         </p:nvSpPr>
         <p:spPr>
           <a:xfrm>
-            <a:off x="576000" y="14364000"/>
+            <a:off x="576000" y="14292000"/>
             <a:ext cx="432000" cy="360000"/>
           </a:xfrm>
           <a:prstGeom prst="rect">
@@ -8879,7 +8879,7 @@
         </p:nvSpPr>
         <p:spPr>
           <a:xfrm>
-            <a:off x="1116000" y="14364000"/>
+            <a:off x="1116000" y="14292000"/>
             <a:ext cx="13320000" cy="360000"/>
           </a:xfrm>
           <a:prstGeom prst="rect">
@@ -8930,7 +8930,7 @@
         </p:nvSpPr>
         <p:spPr>
           <a:xfrm>
-            <a:off x="576000" y="14976000"/>
+            <a:off x="576000" y="14868000"/>
             <a:ext cx="4392000" cy="396000"/>
           </a:xfrm>
           <a:prstGeom prst="rect">
@@ -8981,8 +8981,8 @@
         </p:nvSpPr>
         <p:spPr>
           <a:xfrm>
-            <a:off x="576000" y="15516000"/>
-            <a:ext cx="4464000" cy="828000"/>
+            <a:off x="576000" y="15336000"/>
+            <a:ext cx="4464000" cy="792000"/>
           </a:xfrm>
           <a:prstGeom prst="rect">
             <a:avLst/>
@@ -9052,8 +9052,8 @@
         </p:nvCxnSpPr>
         <p:spPr>
           <a:xfrm>
-            <a:off x="5148000" y="15012000"/>
-            <a:ext cx="0" cy="1368000"/>
+            <a:off x="5148000" y="14904000"/>
+            <a:ext cx="0" cy="1224000"/>
           </a:xfrm>
           <a:prstGeom prst="line">
             <a:avLst/>
@@ -9092,7 +9092,7 @@
         </p:nvSpPr>
         <p:spPr>
           <a:xfrm>
-            <a:off x="5364000" y="14976000"/>
+            <a:off x="5364000" y="14868000"/>
             <a:ext cx="4392000" cy="396000"/>
           </a:xfrm>
           <a:prstGeom prst="rect">
@@ -9143,8 +9143,8 @@
         </p:nvSpPr>
         <p:spPr>
           <a:xfrm>
-            <a:off x="5364000" y="15516000"/>
-            <a:ext cx="4464000" cy="828000"/>
+            <a:off x="5364000" y="15336000"/>
+            <a:ext cx="4464000" cy="792000"/>
           </a:xfrm>
           <a:prstGeom prst="rect">
             <a:avLst/>
@@ -9214,8 +9214,8 @@
         </p:nvCxnSpPr>
         <p:spPr>
           <a:xfrm>
-            <a:off x="9936000" y="15012000"/>
-            <a:ext cx="0" cy="1368000"/>
+            <a:off x="9936000" y="14904000"/>
+            <a:ext cx="0" cy="1224000"/>
           </a:xfrm>
           <a:prstGeom prst="line">
             <a:avLst/>
@@ -9254,7 +9254,7 @@
         </p:nvSpPr>
         <p:spPr>
           <a:xfrm>
-            <a:off x="10152000" y="14976000"/>
+            <a:off x="10152000" y="14868000"/>
             <a:ext cx="4392000" cy="396000"/>
           </a:xfrm>
           <a:prstGeom prst="rect">
@@ -9305,8 +9305,8 @@
         </p:nvSpPr>
         <p:spPr>
           <a:xfrm>
-            <a:off x="10152000" y="15516000"/>
-            <a:ext cx="4464000" cy="828000"/>
+            <a:off x="10152000" y="15336000"/>
+            <a:ext cx="4464000" cy="792000"/>
           </a:xfrm>
           <a:prstGeom prst="rect">
             <a:avLst/>
@@ -9380,7 +9380,7 @@
         </p:nvSpPr>
         <p:spPr>
           <a:xfrm>
-            <a:off x="576000" y="16740000"/>
+            <a:off x="576000" y="16380000"/>
             <a:ext cx="432000" cy="360000"/>
           </a:xfrm>
           <a:prstGeom prst="rect">
@@ -9431,7 +9431,7 @@
         </p:nvSpPr>
         <p:spPr>
           <a:xfrm>
-            <a:off x="1116000" y="16740000"/>
+            <a:off x="1116000" y="16380000"/>
             <a:ext cx="13320000" cy="360000"/>
           </a:xfrm>
           <a:prstGeom prst="rect">
@@ -9482,7 +9482,7 @@
         </p:nvSpPr>
         <p:spPr>
           <a:xfrm>
-            <a:off x="576000" y="17280000"/>
+            <a:off x="576000" y="16920000"/>
             <a:ext cx="6624000" cy="360000"/>
           </a:xfrm>
           <a:prstGeom prst="rect">
@@ -9533,7 +9533,7 @@
         </p:nvSpPr>
         <p:spPr>
           <a:xfrm>
-            <a:off x="576000" y="17784000"/>
+            <a:off x="576000" y="17424000"/>
             <a:ext cx="1584000" cy="360000"/>
           </a:xfrm>
           <a:prstGeom prst="rect">
@@ -9580,7 +9580,7 @@
         </p:nvSpPr>
         <p:spPr>
           <a:xfrm>
-            <a:off x="2304000" y="17856000"/>
+            <a:off x="2304000" y="17496000"/>
             <a:ext cx="3384000" cy="216000"/>
           </a:xfrm>
           <a:prstGeom prst="rect">
@@ -9629,7 +9629,7 @@
         </p:nvSpPr>
         <p:spPr>
           <a:xfrm>
-            <a:off x="2304000" y="17856000"/>
+            <a:off x="2304000" y="17496000"/>
             <a:ext cx="2698671" cy="216000"/>
           </a:xfrm>
           <a:prstGeom prst="rect">
@@ -9682,7 +9682,7 @@
         </p:nvSpPr>
         <p:spPr>
           <a:xfrm>
-            <a:off x="5729975" y="17784000"/>
+            <a:off x="5729975" y="17424000"/>
             <a:ext cx="1404000" cy="360000"/>
           </a:xfrm>
           <a:prstGeom prst="rect">
@@ -9733,7 +9733,7 @@
         </p:nvSpPr>
         <p:spPr>
           <a:xfrm>
-            <a:off x="576000" y="18396000"/>
+            <a:off x="576000" y="18036000"/>
             <a:ext cx="1584000" cy="360000"/>
           </a:xfrm>
           <a:prstGeom prst="rect">
@@ -9780,7 +9780,7 @@
         </p:nvSpPr>
         <p:spPr>
           <a:xfrm>
-            <a:off x="2304000" y="18468000"/>
+            <a:off x="2304000" y="18108000"/>
             <a:ext cx="3384000" cy="216000"/>
           </a:xfrm>
           <a:prstGeom prst="rect">
@@ -9829,7 +9829,7 @@
         </p:nvSpPr>
         <p:spPr>
           <a:xfrm>
-            <a:off x="2304000" y="18468000"/>
+            <a:off x="2304000" y="18108000"/>
             <a:ext cx="3116757" cy="216000"/>
           </a:xfrm>
           <a:prstGeom prst="rect">
@@ -9882,7 +9882,7 @@
         </p:nvSpPr>
         <p:spPr>
           <a:xfrm>
-            <a:off x="5729975" y="18396000"/>
+            <a:off x="5729975" y="18036000"/>
             <a:ext cx="1404000" cy="360000"/>
           </a:xfrm>
           <a:prstGeom prst="rect">
@@ -9933,7 +9933,7 @@
         </p:nvSpPr>
         <p:spPr>
           <a:xfrm>
-            <a:off x="576000" y="19008000"/>
+            <a:off x="576000" y="18648000"/>
             <a:ext cx="1584000" cy="360000"/>
           </a:xfrm>
           <a:prstGeom prst="rect">
@@ -9980,7 +9980,7 @@
         </p:nvSpPr>
         <p:spPr>
           <a:xfrm>
-            <a:off x="2304000" y="19080000"/>
+            <a:off x="2304000" y="18720000"/>
             <a:ext cx="3384000" cy="216000"/>
           </a:xfrm>
           <a:prstGeom prst="rect">
@@ -10029,7 +10029,7 @@
         </p:nvSpPr>
         <p:spPr>
           <a:xfrm>
-            <a:off x="2304000" y="19080000"/>
+            <a:off x="2304000" y="18720000"/>
             <a:ext cx="3148824" cy="216000"/>
           </a:xfrm>
           <a:prstGeom prst="rect">
@@ -10082,7 +10082,7 @@
         </p:nvSpPr>
         <p:spPr>
           <a:xfrm>
-            <a:off x="5729975" y="19008000"/>
+            <a:off x="5729975" y="18648000"/>
             <a:ext cx="1404000" cy="360000"/>
           </a:xfrm>
           <a:prstGeom prst="rect">
@@ -10133,7 +10133,7 @@
         </p:nvSpPr>
         <p:spPr>
           <a:xfrm>
-            <a:off x="576000" y="19620000"/>
+            <a:off x="576000" y="19260000"/>
             <a:ext cx="6624000" cy="324000"/>
           </a:xfrm>
           <a:prstGeom prst="rect">
@@ -10180,7 +10180,7 @@
         </p:nvCxnSpPr>
         <p:spPr>
           <a:xfrm>
-            <a:off x="7560000" y="17280000"/>
+            <a:off x="7560000" y="16920000"/>
             <a:ext cx="0" cy="2844000"/>
           </a:xfrm>
           <a:prstGeom prst="line">
@@ -10220,7 +10220,7 @@
         </p:nvSpPr>
         <p:spPr>
           <a:xfrm>
-            <a:off x="7920000" y="17280000"/>
+            <a:off x="7920000" y="16920000"/>
             <a:ext cx="6624000" cy="360000"/>
           </a:xfrm>
           <a:prstGeom prst="rect">
@@ -10271,7 +10271,7 @@
         </p:nvSpPr>
         <p:spPr>
           <a:xfrm>
-            <a:off x="7920000" y="17712000"/>
+            <a:off x="7920000" y="17352000"/>
             <a:ext cx="6624000" cy="432000"/>
           </a:xfrm>
           <a:prstGeom prst="rect">
@@ -10322,7 +10322,7 @@
         </p:nvSpPr>
         <p:spPr>
           <a:xfrm>
-            <a:off x="7920000" y="18252000"/>
+            <a:off x="7920000" y="17892000"/>
             <a:ext cx="6624000" cy="360000"/>
           </a:xfrm>
           <a:prstGeom prst="rect">
@@ -10373,7 +10373,7 @@
         </p:nvSpPr>
         <p:spPr>
           <a:xfrm>
-            <a:off x="7878725" y="18720000"/>
+            <a:off x="7878725" y="18360000"/>
             <a:ext cx="2088000" cy="432000"/>
           </a:xfrm>
           <a:prstGeom prst="rect">
@@ -10424,7 +10424,7 @@
         </p:nvSpPr>
         <p:spPr>
           <a:xfrm>
-            <a:off x="7893013" y="19188000"/>
+            <a:off x="7893013" y="18828000"/>
             <a:ext cx="2088000" cy="324000"/>
           </a:xfrm>
           <a:prstGeom prst="rect">
@@ -10475,7 +10475,7 @@
         </p:nvSpPr>
         <p:spPr>
           <a:xfrm>
-            <a:off x="10146725" y="18720000"/>
+            <a:off x="10146725" y="18360000"/>
             <a:ext cx="2088000" cy="432000"/>
           </a:xfrm>
           <a:prstGeom prst="rect">
@@ -10526,7 +10526,7 @@
         </p:nvSpPr>
         <p:spPr>
           <a:xfrm>
-            <a:off x="10161012" y="19188000"/>
+            <a:off x="10161012" y="18828000"/>
             <a:ext cx="2088000" cy="324000"/>
           </a:xfrm>
           <a:prstGeom prst="rect">
@@ -10577,7 +10577,7 @@
         </p:nvSpPr>
         <p:spPr>
           <a:xfrm>
-            <a:off x="12414726" y="18720000"/>
+            <a:off x="12414726" y="18360000"/>
             <a:ext cx="2088000" cy="432000"/>
           </a:xfrm>
           <a:prstGeom prst="rect">
@@ -10628,7 +10628,7 @@
         </p:nvSpPr>
         <p:spPr>
           <a:xfrm>
-            <a:off x="12429013" y="19188000"/>
+            <a:off x="12429013" y="18828000"/>
             <a:ext cx="2088000" cy="324000"/>
           </a:xfrm>
           <a:prstGeom prst="rect">
@@ -10679,7 +10679,7 @@
         </p:nvSpPr>
         <p:spPr>
           <a:xfrm>
-            <a:off x="7920000" y="19656000"/>
+            <a:off x="7920000" y="19296000"/>
             <a:ext cx="6624000" cy="504000"/>
           </a:xfrm>
           <a:prstGeom prst="rect">
@@ -10705,7 +10705,7 @@
               </a:spcAft>
             </a:pPr>
             <a:r>
-              <a:rPr sz="1350" b="0">
+              <a:rPr sz="1450" b="0">
                 <a:solidFill>
                   <a:srgbClr val="53666E"/>
                 </a:solidFill>
@@ -10729,7 +10729,7 @@
               </a:spcAft>
             </a:pPr>
             <a:r>
-              <a:rPr sz="1350" b="0">
+              <a:rPr sz="1450" b="0">
                 <a:solidFill>
                   <a:srgbClr val="53666E"/>
                 </a:solidFill>
@@ -10750,7 +10750,7 @@
         </p:nvCxnSpPr>
         <p:spPr>
           <a:xfrm>
-            <a:off x="576000" y="20232000"/>
+            <a:off x="576000" y="19872000"/>
             <a:ext cx="13968000" cy="0"/>
           </a:xfrm>
           <a:prstGeom prst="line">
@@ -10790,8 +10790,8 @@
         </p:nvSpPr>
         <p:spPr>
           <a:xfrm>
-            <a:off x="576000" y="20340000"/>
-            <a:ext cx="13968000" cy="324000"/>
+            <a:off x="576000" y="19980000"/>
+            <a:ext cx="13968000" cy="288000"/>
           </a:xfrm>
           <a:prstGeom prst="rect">
             <a:avLst/>
@@ -10841,8 +10841,8 @@
         </p:nvSpPr>
         <p:spPr>
           <a:xfrm>
-            <a:off x="576000" y="20664000"/>
-            <a:ext cx="13968000" cy="180000"/>
+            <a:off x="576000" y="20322000"/>
+            <a:ext cx="13968000" cy="504000"/>
           </a:xfrm>
           <a:prstGeom prst="rect">
             <a:avLst/>
@@ -10867,7 +10867,7 @@
               </a:spcAft>
             </a:pPr>
             <a:r>
-              <a:rPr sz="1100" b="0">
+              <a:rPr sz="1600" b="0">
                 <a:solidFill>
                   <a:srgbClr val="53666E"/>
                 </a:solidFill>
@@ -10875,7 +10875,31 @@
                 <a:ea typeface="DFKai-SB"/>
                 <a:cs typeface="Times New Roman"/>
               </a:rPr>
-              <a:t>6種情境含4種套用規則、2種監測或蒐證；6/6為隔離交易與回復結果，非原生攻擊防禦率。</a:t>
+              <a:t>6種隔離情境：4種套用規則、2種監測或蒐證。</a:t>
+            </a:r>
+          </a:p>
+          <a:p>
+            <a:pPr algn="l">
+              <a:lnSpc>
+                <a:spcPct val="110000"/>
+              </a:lnSpc>
+              <a:spcBef>
+                <a:spcPts val="0"/>
+              </a:spcBef>
+              <a:spcAft>
+                <a:spcPts val="0"/>
+              </a:spcAft>
+            </a:pPr>
+            <a:r>
+              <a:rPr sz="1600" b="0">
+                <a:solidFill>
+                  <a:srgbClr val="53666E"/>
+                </a:solidFill>
+                <a:latin typeface="Times New Roman"/>
+                <a:ea typeface="DFKai-SB"/>
+                <a:cs typeface="Times New Roman"/>
+              </a:rPr>
+              <a:t>6/6為隔離交易與回復結果，非原生攻擊防禦率。</a:t>
             </a:r>
           </a:p>
         </p:txBody>

--- a/deliverables/決賽海報_AI資安框架_A2.pptx
+++ b/deliverables/決賽海報_AI資安框架_A2.pptx
@@ -4039,7 +4039,56 @@
       </p:grpSpPr>
       <p:sp>
         <p:nvSpPr>
-          <p:cNvPr id="2" name="TextBox 1"/>
+          <p:cNvPr id="2" name="Rectangle 1"/>
+          <p:cNvSpPr/>
+          <p:nvPr/>
+        </p:nvSpPr>
+        <p:spPr>
+          <a:xfrm>
+            <a:off x="576000" y="360000"/>
+            <a:ext cx="13968000" cy="2484000"/>
+          </a:xfrm>
+          <a:prstGeom prst="rect">
+            <a:avLst/>
+          </a:prstGeom>
+          <a:solidFill>
+            <a:srgbClr val="F0F2F3"/>
+          </a:solidFill>
+          <a:ln>
+            <a:noFill/>
+          </a:ln>
+          <a:effectLst/>
+        </p:spPr>
+        <p:style>
+          <a:lnRef idx="1">
+            <a:schemeClr val="accent1"/>
+          </a:lnRef>
+          <a:fillRef idx="3">
+            <a:schemeClr val="accent1"/>
+          </a:fillRef>
+          <a:effectRef idx="2">
+            <a:schemeClr val="accent1"/>
+          </a:effectRef>
+          <a:fontRef idx="minor">
+            <a:schemeClr val="lt1"/>
+          </a:fontRef>
+        </p:style>
+        <p:txBody>
+          <a:bodyPr rtlCol="0" anchor="ctr"/>
+          <a:lstStyle/>
+          <a:p>
+            <a:pPr algn="ctr"/>
+            <a:endParaRPr>
+              <a:latin typeface="Times New Roman"/>
+              <a:ea typeface="DFKai-SB"/>
+              <a:cs typeface="Times New Roman"/>
+            </a:endParaRPr>
+          </a:p>
+        </p:txBody>
+      </p:sp>
+      <p:sp>
+        <p:nvSpPr>
+          <p:cNvPr id="3" name="TextBox 2"/>
           <p:cNvSpPr txBox="1"/>
           <p:nvPr>
             <p:custDataLst>
@@ -4049,8 +4098,243 @@
         </p:nvSpPr>
         <p:spPr>
           <a:xfrm>
-            <a:off x="576000" y="540000"/>
+            <a:off x="553775" y="540000"/>
             <a:ext cx="13968000" cy="288000"/>
+          </a:xfrm>
+          <a:prstGeom prst="rect">
+            <a:avLst/>
+          </a:prstGeom>
+          <a:noFill/>
+        </p:spPr>
+        <p:txBody>
+          <a:bodyPr wrap="none" lIns="0" tIns="0" rIns="0" bIns="0" anchor="ctr">
+            <a:spAutoFit/>
+          </a:bodyPr>
+          <a:lstStyle/>
+          <a:p>
+            <a:pPr algn="ctr">
+              <a:lnSpc>
+                <a:spcPct val="110000"/>
+              </a:lnSpc>
+              <a:spcBef>
+                <a:spcPts val="0"/>
+              </a:spcBef>
+              <a:spcAft>
+                <a:spcPts val="0"/>
+              </a:spcAft>
+            </a:pPr>
+            <a:r>
+              <a:rPr sz="1400" b="0">
+                <a:solidFill>
+                  <a:srgbClr val="105186"/>
+                </a:solidFill>
+                <a:latin typeface="Times New Roman"/>
+                <a:ea typeface="DFKai-SB"/>
+                <a:cs typeface="Times New Roman"/>
+              </a:rPr>
+              <a:t>資安技術組決賽作品</a:t>
+            </a:r>
+          </a:p>
+        </p:txBody>
+      </p:sp>
+      <p:sp>
+        <p:nvSpPr>
+          <p:cNvPr id="4" name="PosterTitle_Centered_210mm"/>
+          <p:cNvSpPr txBox="1"/>
+          <p:nvPr>
+            <p:custDataLst>
+              <p:tags r:id="rId2"/>
+            </p:custDataLst>
+          </p:nvPr>
+        </p:nvSpPr>
+        <p:spPr>
+          <a:xfrm>
+            <a:off x="522025" y="864000"/>
+            <a:ext cx="13968000" cy="1800000"/>
+          </a:xfrm>
+          <a:prstGeom prst="rect">
+            <a:avLst/>
+          </a:prstGeom>
+          <a:noFill/>
+        </p:spPr>
+        <p:txBody>
+          <a:bodyPr wrap="none" lIns="0" tIns="0" rIns="0" bIns="0" anchor="ctr">
+            <a:spAutoFit/>
+          </a:bodyPr>
+          <a:lstStyle/>
+          <a:p>
+            <a:pPr algn="ctr">
+              <a:lnSpc>
+                <a:spcPct val="110000"/>
+              </a:lnSpc>
+              <a:spcBef>
+                <a:spcPts val="0"/>
+              </a:spcBef>
+              <a:spcAft>
+                <a:spcPts val="0"/>
+              </a:spcAft>
+            </a:pPr>
+            <a:r>
+              <a:rPr sz="3400" b="0">
+                <a:solidFill>
+                  <a:srgbClr val="092B42"/>
+                </a:solidFill>
+                <a:latin typeface="Times New Roman"/>
+                <a:ea typeface="DFKai-SB"/>
+                <a:cs typeface="Times New Roman"/>
+              </a:rPr>
+              <a:t>融合新型內容相依時序方向模型</a:t>
+            </a:r>
+          </a:p>
+          <a:p>
+            <a:pPr algn="ctr">
+              <a:lnSpc>
+                <a:spcPct val="110000"/>
+              </a:lnSpc>
+              <a:spcBef>
+                <a:spcPts val="0"/>
+              </a:spcBef>
+              <a:spcAft>
+                <a:spcPts val="0"/>
+              </a:spcAft>
+            </a:pPr>
+            <a:r>
+              <a:rPr sz="3400" b="0">
+                <a:solidFill>
+                  <a:srgbClr val="092B42"/>
+                </a:solidFill>
+                <a:latin typeface="Times New Roman"/>
+                <a:ea typeface="DFKai-SB"/>
+                <a:cs typeface="Times New Roman"/>
+              </a:rPr>
+              <a:t>入侵偵測與任務導向檢索增強稽核</a:t>
+            </a:r>
+          </a:p>
+          <a:p>
+            <a:pPr algn="ctr">
+              <a:lnSpc>
+                <a:spcPct val="110000"/>
+              </a:lnSpc>
+              <a:spcBef>
+                <a:spcPts val="0"/>
+              </a:spcBef>
+              <a:spcAft>
+                <a:spcPts val="0"/>
+              </a:spcAft>
+            </a:pPr>
+            <a:r>
+              <a:rPr sz="3400" b="0">
+                <a:solidFill>
+                  <a:srgbClr val="092B42"/>
+                </a:solidFill>
+                <a:latin typeface="Times New Roman"/>
+                <a:ea typeface="DFKai-SB"/>
+                <a:cs typeface="Times New Roman"/>
+              </a:rPr>
+              <a:t>之 AI 資安框架</a:t>
+            </a:r>
+          </a:p>
+        </p:txBody>
+      </p:sp>
+      <p:sp>
+        <p:nvSpPr>
+          <p:cNvPr id="5" name="Rectangle 4"/>
+          <p:cNvSpPr/>
+          <p:nvPr/>
+        </p:nvSpPr>
+        <p:spPr>
+          <a:xfrm>
+            <a:off x="6840000" y="2808000"/>
+            <a:ext cx="1440000" cy="43200"/>
+          </a:xfrm>
+          <a:prstGeom prst="rect">
+            <a:avLst/>
+          </a:prstGeom>
+          <a:solidFill>
+            <a:srgbClr val="FDB338"/>
+          </a:solidFill>
+          <a:ln>
+            <a:noFill/>
+          </a:ln>
+          <a:effectLst/>
+        </p:spPr>
+        <p:style>
+          <a:lnRef idx="1">
+            <a:schemeClr val="accent1"/>
+          </a:lnRef>
+          <a:fillRef idx="3">
+            <a:schemeClr val="accent1"/>
+          </a:fillRef>
+          <a:effectRef idx="2">
+            <a:schemeClr val="accent1"/>
+          </a:effectRef>
+          <a:fontRef idx="minor">
+            <a:schemeClr val="lt1"/>
+          </a:fontRef>
+        </p:style>
+        <p:txBody>
+          <a:bodyPr rtlCol="0" anchor="ctr"/>
+          <a:lstStyle/>
+          <a:p>
+            <a:pPr algn="ctr"/>
+            <a:endParaRPr>
+              <a:latin typeface="Times New Roman"/>
+              <a:ea typeface="DFKai-SB"/>
+              <a:cs typeface="Times New Roman"/>
+            </a:endParaRPr>
+          </a:p>
+        </p:txBody>
+      </p:sp>
+      <p:cxnSp>
+        <p:nvCxnSpPr>
+          <p:cNvPr id="6" name="Connector 5"/>
+          <p:cNvCxnSpPr/>
+          <p:nvPr/>
+        </p:nvCxnSpPr>
+        <p:spPr>
+          <a:xfrm>
+            <a:off x="576000" y="3060000"/>
+            <a:ext cx="13968000" cy="0"/>
+          </a:xfrm>
+          <a:prstGeom prst="line">
+            <a:avLst/>
+          </a:prstGeom>
+          <a:ln w="12700">
+            <a:solidFill>
+              <a:srgbClr val="D6DDE0"/>
+            </a:solidFill>
+          </a:ln>
+          <a:effectLst/>
+        </p:spPr>
+        <p:style>
+          <a:lnRef idx="2">
+            <a:schemeClr val="accent1"/>
+          </a:lnRef>
+          <a:fillRef idx="0">
+            <a:schemeClr val="accent1"/>
+          </a:fillRef>
+          <a:effectRef idx="1">
+            <a:schemeClr val="accent1"/>
+          </a:effectRef>
+          <a:fontRef idx="minor">
+            <a:schemeClr val="tx1"/>
+          </a:fontRef>
+        </p:style>
+      </p:cxnSp>
+      <p:sp>
+        <p:nvSpPr>
+          <p:cNvPr id="7" name="TextBox 6"/>
+          <p:cNvSpPr txBox="1"/>
+          <p:nvPr>
+            <p:custDataLst>
+              <p:tags r:id="rId3"/>
+            </p:custDataLst>
+          </p:nvPr>
+        </p:nvSpPr>
+        <p:spPr>
+          <a:xfrm>
+            <a:off x="576000" y="3312000"/>
+            <a:ext cx="13968000" cy="468000"/>
           </a:xfrm>
           <a:prstGeom prst="rect">
             <a:avLst/>
@@ -4075,33 +4359,33 @@
               </a:spcAft>
             </a:pPr>
             <a:r>
-              <a:rPr sz="1400" b="0">
+              <a:rPr sz="2600" b="0">
                 <a:solidFill>
-                  <a:srgbClr val="105186"/>
+                  <a:srgbClr val="092B42"/>
                 </a:solidFill>
                 <a:latin typeface="Times New Roman"/>
                 <a:ea typeface="DFKai-SB"/>
                 <a:cs typeface="Times New Roman"/>
               </a:rPr>
-              <a:t>資安技術組決賽作品</a:t>
-            </a:r>
-          </a:p>
-        </p:txBody>
-      </p:sp>
-      <p:sp>
-        <p:nvSpPr>
-          <p:cNvPr id="3" name="TextBox 2"/>
+              <a:t>從流量告警，走到有證據、可回復的處置</a:t>
+            </a:r>
+          </a:p>
+        </p:txBody>
+      </p:sp>
+      <p:sp>
+        <p:nvSpPr>
+          <p:cNvPr id="8" name="TextBox 7"/>
           <p:cNvSpPr txBox="1"/>
           <p:nvPr>
             <p:custDataLst>
-              <p:tags r:id="rId2"/>
+              <p:tags r:id="rId4"/>
             </p:custDataLst>
           </p:nvPr>
         </p:nvSpPr>
         <p:spPr>
           <a:xfrm>
-            <a:off x="576000" y="864000"/>
-            <a:ext cx="13968000" cy="1656000"/>
+            <a:off x="576000" y="3888000"/>
+            <a:ext cx="13968000" cy="360000"/>
           </a:xfrm>
           <a:prstGeom prst="rect">
             <a:avLst/>
@@ -4126,17 +4410,44 @@
               </a:spcAft>
             </a:pPr>
             <a:r>
-              <a:rPr sz="3000" b="0">
+              <a:rPr sz="1900" b="0">
                 <a:solidFill>
-                  <a:srgbClr val="092B42"/>
+                  <a:srgbClr val="53666E"/>
                 </a:solidFill>
                 <a:latin typeface="Times New Roman"/>
                 <a:ea typeface="DFKai-SB"/>
                 <a:cs typeface="Times New Roman"/>
               </a:rPr>
-              <a:t>融合新型內容相依時序方向模型</a:t>
-            </a:r>
-          </a:p>
+              <a:t>同一事件串起模型判定、相似案例、AI稽核與處置回條。</a:t>
+            </a:r>
+          </a:p>
+        </p:txBody>
+      </p:sp>
+      <p:sp>
+        <p:nvSpPr>
+          <p:cNvPr id="9" name="TextBox 8"/>
+          <p:cNvSpPr txBox="1"/>
+          <p:nvPr>
+            <p:custDataLst>
+              <p:tags r:id="rId5"/>
+            </p:custDataLst>
+          </p:nvPr>
+        </p:nvSpPr>
+        <p:spPr>
+          <a:xfrm>
+            <a:off x="576000" y="4608000"/>
+            <a:ext cx="432000" cy="360000"/>
+          </a:xfrm>
+          <a:prstGeom prst="rect">
+            <a:avLst/>
+          </a:prstGeom>
+          <a:noFill/>
+        </p:spPr>
+        <p:txBody>
+          <a:bodyPr wrap="none" lIns="0" tIns="0" rIns="0" bIns="0" anchor="ctr">
+            <a:spAutoFit/>
+          </a:bodyPr>
+          <a:lstStyle/>
           <a:p>
             <a:pPr algn="l">
               <a:lnSpc>
@@ -4150,17 +4461,44 @@
               </a:spcAft>
             </a:pPr>
             <a:r>
-              <a:rPr sz="3000" b="0">
+              <a:rPr sz="2000" b="1">
                 <a:solidFill>
-                  <a:srgbClr val="092B42"/>
+                  <a:srgbClr val="105186"/>
                 </a:solidFill>
                 <a:latin typeface="Times New Roman"/>
                 <a:ea typeface="DFKai-SB"/>
                 <a:cs typeface="Times New Roman"/>
               </a:rPr>
-              <a:t>入侵偵測與任務導向檢索增強稽核</a:t>
-            </a:r>
-          </a:p>
+              <a:t>01</a:t>
+            </a:r>
+          </a:p>
+        </p:txBody>
+      </p:sp>
+      <p:sp>
+        <p:nvSpPr>
+          <p:cNvPr id="10" name="TextBox 9"/>
+          <p:cNvSpPr txBox="1"/>
+          <p:nvPr>
+            <p:custDataLst>
+              <p:tags r:id="rId6"/>
+            </p:custDataLst>
+          </p:nvPr>
+        </p:nvSpPr>
+        <p:spPr>
+          <a:xfrm>
+            <a:off x="1116000" y="4608000"/>
+            <a:ext cx="13320000" cy="360000"/>
+          </a:xfrm>
+          <a:prstGeom prst="rect">
+            <a:avLst/>
+          </a:prstGeom>
+          <a:noFill/>
+        </p:spPr>
+        <p:txBody>
+          <a:bodyPr wrap="none" lIns="0" tIns="0" rIns="0" bIns="0" anchor="ctr">
+            <a:spAutoFit/>
+          </a:bodyPr>
+          <a:lstStyle/>
           <a:p>
             <a:pPr algn="l">
               <a:lnSpc>
@@ -4174,7 +4512,7 @@
               </a:spcAft>
             </a:pPr>
             <a:r>
-              <a:rPr sz="3000" b="0">
+              <a:rPr sz="2400" b="0">
                 <a:solidFill>
                   <a:srgbClr val="092B42"/>
                 </a:solidFill>
@@ -4182,14 +4520,267 @@
                 <a:ea typeface="DFKai-SB"/>
                 <a:cs typeface="Times New Roman"/>
               </a:rPr>
-              <a:t>之 AI 資安框架</a:t>
+              <a:t>四階段方法，串成同一條事件鏈</a:t>
+            </a:r>
+          </a:p>
+        </p:txBody>
+      </p:sp>
+      <p:sp>
+        <p:nvSpPr>
+          <p:cNvPr id="11" name="Rectangle 10"/>
+          <p:cNvSpPr/>
+          <p:nvPr/>
+        </p:nvSpPr>
+        <p:spPr>
+          <a:xfrm>
+            <a:off x="576000" y="5220000"/>
+            <a:ext cx="13968000" cy="1800000"/>
+          </a:xfrm>
+          <a:prstGeom prst="rect">
+            <a:avLst/>
+          </a:prstGeom>
+          <a:solidFill>
+            <a:srgbClr val="EAF0F4"/>
+          </a:solidFill>
+          <a:ln w="10160">
+            <a:solidFill>
+              <a:srgbClr val="D6DDE0"/>
+            </a:solidFill>
+          </a:ln>
+          <a:effectLst/>
+        </p:spPr>
+        <p:style>
+          <a:lnRef idx="1">
+            <a:schemeClr val="accent1"/>
+          </a:lnRef>
+          <a:fillRef idx="3">
+            <a:schemeClr val="accent1"/>
+          </a:fillRef>
+          <a:effectRef idx="2">
+            <a:schemeClr val="accent1"/>
+          </a:effectRef>
+          <a:fontRef idx="minor">
+            <a:schemeClr val="lt1"/>
+          </a:fontRef>
+        </p:style>
+        <p:txBody>
+          <a:bodyPr rtlCol="0" anchor="ctr"/>
+          <a:lstStyle/>
+          <a:p>
+            <a:pPr algn="ctr"/>
+            <a:endParaRPr>
+              <a:latin typeface="Times New Roman"/>
+              <a:ea typeface="DFKai-SB"/>
+              <a:cs typeface="Times New Roman"/>
+            </a:endParaRPr>
+          </a:p>
+        </p:txBody>
+      </p:sp>
+      <p:sp>
+        <p:nvSpPr>
+          <p:cNvPr id="12" name="Rectangle 11"/>
+          <p:cNvSpPr/>
+          <p:nvPr/>
+        </p:nvSpPr>
+        <p:spPr>
+          <a:xfrm>
+            <a:off x="576000" y="5220000"/>
+            <a:ext cx="54000" cy="1800000"/>
+          </a:xfrm>
+          <a:prstGeom prst="rect">
+            <a:avLst/>
+          </a:prstGeom>
+          <a:solidFill>
+            <a:srgbClr val="105186"/>
+          </a:solidFill>
+          <a:ln>
+            <a:noFill/>
+          </a:ln>
+          <a:effectLst/>
+        </p:spPr>
+        <p:style>
+          <a:lnRef idx="1">
+            <a:schemeClr val="accent1"/>
+          </a:lnRef>
+          <a:fillRef idx="3">
+            <a:schemeClr val="accent1"/>
+          </a:fillRef>
+          <a:effectRef idx="2">
+            <a:schemeClr val="accent1"/>
+          </a:effectRef>
+          <a:fontRef idx="minor">
+            <a:schemeClr val="lt1"/>
+          </a:fontRef>
+        </p:style>
+        <p:txBody>
+          <a:bodyPr rtlCol="0" anchor="ctr"/>
+          <a:lstStyle/>
+          <a:p>
+            <a:pPr algn="ctr"/>
+            <a:endParaRPr>
+              <a:latin typeface="Times New Roman"/>
+              <a:ea typeface="DFKai-SB"/>
+              <a:cs typeface="Times New Roman"/>
+            </a:endParaRPr>
+          </a:p>
+        </p:txBody>
+      </p:sp>
+      <p:sp>
+        <p:nvSpPr>
+          <p:cNvPr id="13" name="TextBox 12"/>
+          <p:cNvSpPr txBox="1"/>
+          <p:nvPr>
+            <p:custDataLst>
+              <p:tags r:id="rId7"/>
+            </p:custDataLst>
+          </p:nvPr>
+        </p:nvSpPr>
+        <p:spPr>
+          <a:xfrm>
+            <a:off x="828000" y="5364000"/>
+            <a:ext cx="360000" cy="288000"/>
+          </a:xfrm>
+          <a:prstGeom prst="rect">
+            <a:avLst/>
+          </a:prstGeom>
+          <a:noFill/>
+        </p:spPr>
+        <p:txBody>
+          <a:bodyPr wrap="none" lIns="0" tIns="0" rIns="0" bIns="0" anchor="ctr">
+            <a:spAutoFit/>
+          </a:bodyPr>
+          <a:lstStyle/>
+          <a:p>
+            <a:pPr algn="l">
+              <a:lnSpc>
+                <a:spcPct val="110000"/>
+              </a:lnSpc>
+              <a:spcBef>
+                <a:spcPts val="0"/>
+              </a:spcBef>
+              <a:spcAft>
+                <a:spcPts val="0"/>
+              </a:spcAft>
+            </a:pPr>
+            <a:r>
+              <a:rPr sz="1600" b="1">
+                <a:solidFill>
+                  <a:srgbClr val="105186"/>
+                </a:solidFill>
+                <a:latin typeface="Times New Roman"/>
+                <a:ea typeface="DFKai-SB"/>
+                <a:cs typeface="Times New Roman"/>
+              </a:rPr>
+              <a:t>01</a:t>
+            </a:r>
+          </a:p>
+        </p:txBody>
+      </p:sp>
+      <p:sp>
+        <p:nvSpPr>
+          <p:cNvPr id="14" name="TextBox 13"/>
+          <p:cNvSpPr txBox="1"/>
+          <p:nvPr>
+            <p:custDataLst>
+              <p:tags r:id="rId8"/>
+            </p:custDataLst>
+          </p:nvPr>
+        </p:nvSpPr>
+        <p:spPr>
+          <a:xfrm>
+            <a:off x="1332000" y="5328000"/>
+            <a:ext cx="2628000" cy="360000"/>
+          </a:xfrm>
+          <a:prstGeom prst="rect">
+            <a:avLst/>
+          </a:prstGeom>
+          <a:noFill/>
+        </p:spPr>
+        <p:txBody>
+          <a:bodyPr wrap="none" lIns="0" tIns="0" rIns="0" bIns="0" anchor="ctr">
+            <a:spAutoFit/>
+          </a:bodyPr>
+          <a:lstStyle/>
+          <a:p>
+            <a:pPr algn="l">
+              <a:lnSpc>
+                <a:spcPct val="110000"/>
+              </a:lnSpc>
+              <a:spcBef>
+                <a:spcPts val="0"/>
+              </a:spcBef>
+              <a:spcAft>
+                <a:spcPts val="0"/>
+              </a:spcAft>
+            </a:pPr>
+            <a:r>
+              <a:rPr sz="2300" b="0">
+                <a:solidFill>
+                  <a:srgbClr val="105186"/>
+                </a:solidFill>
+                <a:latin typeface="Times New Roman"/>
+                <a:ea typeface="DFKai-SB"/>
+                <a:cs typeface="Times New Roman"/>
+              </a:rPr>
+              <a:t>互補判定</a:t>
+            </a:r>
+          </a:p>
+        </p:txBody>
+      </p:sp>
+      <p:sp>
+        <p:nvSpPr>
+          <p:cNvPr id="15" name="TextBox 14"/>
+          <p:cNvSpPr txBox="1"/>
+          <p:nvPr>
+            <p:custDataLst>
+              <p:tags r:id="rId9"/>
+            </p:custDataLst>
+          </p:nvPr>
+        </p:nvSpPr>
+        <p:spPr>
+          <a:xfrm>
+            <a:off x="1332000" y="5724000"/>
+            <a:ext cx="2628000" cy="288000"/>
+          </a:xfrm>
+          <a:prstGeom prst="rect">
+            <a:avLst/>
+          </a:prstGeom>
+          <a:noFill/>
+        </p:spPr>
+        <p:txBody>
+          <a:bodyPr wrap="none" lIns="0" tIns="0" rIns="0" bIns="0" anchor="ctr">
+            <a:spAutoFit/>
+          </a:bodyPr>
+          <a:lstStyle/>
+          <a:p>
+            <a:pPr algn="l">
+              <a:lnSpc>
+                <a:spcPct val="110000"/>
+              </a:lnSpc>
+              <a:spcBef>
+                <a:spcPts val="0"/>
+              </a:spcBef>
+              <a:spcAft>
+                <a:spcPts val="0"/>
+              </a:spcAft>
+            </a:pPr>
+            <a:r>
+              <a:rPr sz="1500" b="0">
+                <a:solidFill>
+                  <a:srgbClr val="53666E"/>
+                </a:solidFill>
+                <a:latin typeface="Times New Roman"/>
+                <a:ea typeface="DFKai-SB"/>
+                <a:cs typeface="Times New Roman"/>
+              </a:rPr>
+              <a:t>內容＋時序</a:t>
             </a:r>
           </a:p>
         </p:txBody>
       </p:sp>
       <p:pic>
         <p:nvPicPr>
-          <p:cNvPr id="4" name="Picture 3" descr="flat-icon-4.png"/>
+          <p:cNvPr id="16" name="Picture 15" descr="flat-icon-2.png"/>
           <p:cNvPicPr>
             <a:picLocks noChangeAspect="1"/>
           </p:cNvPicPr>
@@ -4203,263 +4794,72 @@
         </p:blipFill>
         <p:spPr>
           <a:xfrm>
-            <a:off x="12528000" y="1080000"/>
-            <a:ext cx="1656000" cy="1656000"/>
+            <a:off x="900000" y="6120000"/>
+            <a:ext cx="756000" cy="756000"/>
           </a:xfrm>
           <a:prstGeom prst="rect">
             <a:avLst/>
           </a:prstGeom>
         </p:spPr>
       </p:pic>
-      <p:cxnSp>
-        <p:nvCxnSpPr>
-          <p:cNvPr id="5" name="Connector 4"/>
-          <p:cNvCxnSpPr/>
+      <p:sp>
+        <p:nvSpPr>
+          <p:cNvPr id="17" name="Down Arrow 16"/>
+          <p:cNvSpPr/>
           <p:nvPr/>
-        </p:nvCxnSpPr>
-        <p:spPr>
-          <a:xfrm>
-            <a:off x="576000" y="3060000"/>
-            <a:ext cx="13968000" cy="0"/>
-          </a:xfrm>
-          <a:prstGeom prst="line">
-            <a:avLst/>
-          </a:prstGeom>
-          <a:ln w="12700">
-            <a:solidFill>
-              <a:srgbClr val="D6DDE0"/>
-            </a:solidFill>
+        </p:nvSpPr>
+        <p:spPr>
+          <a:xfrm>
+            <a:off x="9252000" y="7038000"/>
+            <a:ext cx="288000" cy="180000"/>
+          </a:xfrm>
+          <a:prstGeom prst="downArrow">
+            <a:avLst/>
+          </a:prstGeom>
+          <a:solidFill>
+            <a:srgbClr val="105186"/>
+          </a:solidFill>
+          <a:ln>
+            <a:noFill/>
           </a:ln>
           <a:effectLst/>
         </p:spPr>
         <p:style>
-          <a:lnRef idx="2">
+          <a:lnRef idx="1">
             <a:schemeClr val="accent1"/>
           </a:lnRef>
-          <a:fillRef idx="0">
+          <a:fillRef idx="3">
             <a:schemeClr val="accent1"/>
           </a:fillRef>
-          <a:effectRef idx="1">
+          <a:effectRef idx="2">
             <a:schemeClr val="accent1"/>
           </a:effectRef>
           <a:fontRef idx="minor">
-            <a:schemeClr val="tx1"/>
+            <a:schemeClr val="lt1"/>
           </a:fontRef>
         </p:style>
-      </p:cxnSp>
-      <p:sp>
-        <p:nvSpPr>
-          <p:cNvPr id="6" name="TextBox 5"/>
-          <p:cNvSpPr txBox="1"/>
-          <p:nvPr>
-            <p:custDataLst>
-              <p:tags r:id="rId3"/>
-            </p:custDataLst>
-          </p:nvPr>
-        </p:nvSpPr>
-        <p:spPr>
-          <a:xfrm>
-            <a:off x="576000" y="3312000"/>
-            <a:ext cx="13968000" cy="468000"/>
-          </a:xfrm>
-          <a:prstGeom prst="rect">
-            <a:avLst/>
-          </a:prstGeom>
-          <a:noFill/>
-        </p:spPr>
-        <p:txBody>
-          <a:bodyPr wrap="none" lIns="0" tIns="0" rIns="0" bIns="0" anchor="ctr">
-            <a:spAutoFit/>
-          </a:bodyPr>
-          <a:lstStyle/>
-          <a:p>
-            <a:pPr algn="l">
-              <a:lnSpc>
-                <a:spcPct val="110000"/>
-              </a:lnSpc>
-              <a:spcBef>
-                <a:spcPts val="0"/>
-              </a:spcBef>
-              <a:spcAft>
-                <a:spcPts val="0"/>
-              </a:spcAft>
-            </a:pPr>
-            <a:r>
-              <a:rPr sz="2600" b="0">
-                <a:solidFill>
-                  <a:srgbClr val="092B42"/>
-                </a:solidFill>
-                <a:latin typeface="Times New Roman"/>
-                <a:ea typeface="DFKai-SB"/>
-                <a:cs typeface="Times New Roman"/>
-              </a:rPr>
-              <a:t>從流量告警，走到有證據、可回復的處置</a:t>
-            </a:r>
-          </a:p>
-        </p:txBody>
-      </p:sp>
-      <p:sp>
-        <p:nvSpPr>
-          <p:cNvPr id="7" name="TextBox 6"/>
-          <p:cNvSpPr txBox="1"/>
-          <p:nvPr>
-            <p:custDataLst>
-              <p:tags r:id="rId4"/>
-            </p:custDataLst>
-          </p:nvPr>
-        </p:nvSpPr>
-        <p:spPr>
-          <a:xfrm>
-            <a:off x="576000" y="3888000"/>
-            <a:ext cx="13968000" cy="360000"/>
-          </a:xfrm>
-          <a:prstGeom prst="rect">
-            <a:avLst/>
-          </a:prstGeom>
-          <a:noFill/>
-        </p:spPr>
-        <p:txBody>
-          <a:bodyPr wrap="none" lIns="0" tIns="0" rIns="0" bIns="0" anchor="ctr">
-            <a:spAutoFit/>
-          </a:bodyPr>
-          <a:lstStyle/>
-          <a:p>
-            <a:pPr algn="l">
-              <a:lnSpc>
-                <a:spcPct val="110000"/>
-              </a:lnSpc>
-              <a:spcBef>
-                <a:spcPts val="0"/>
-              </a:spcBef>
-              <a:spcAft>
-                <a:spcPts val="0"/>
-              </a:spcAft>
-            </a:pPr>
-            <a:r>
-              <a:rPr sz="1900" b="0">
-                <a:solidFill>
-                  <a:srgbClr val="53666E"/>
-                </a:solidFill>
-                <a:latin typeface="Times New Roman"/>
-                <a:ea typeface="DFKai-SB"/>
-                <a:cs typeface="Times New Roman"/>
-              </a:rPr>
-              <a:t>同一事件串起模型判定、相似案例、AI稽核與處置回條。</a:t>
-            </a:r>
-          </a:p>
-        </p:txBody>
-      </p:sp>
-      <p:sp>
-        <p:nvSpPr>
-          <p:cNvPr id="8" name="TextBox 7"/>
-          <p:cNvSpPr txBox="1"/>
-          <p:nvPr>
-            <p:custDataLst>
-              <p:tags r:id="rId5"/>
-            </p:custDataLst>
-          </p:nvPr>
-        </p:nvSpPr>
-        <p:spPr>
-          <a:xfrm>
-            <a:off x="576000" y="4608000"/>
-            <a:ext cx="432000" cy="360000"/>
-          </a:xfrm>
-          <a:prstGeom prst="rect">
-            <a:avLst/>
-          </a:prstGeom>
-          <a:noFill/>
-        </p:spPr>
-        <p:txBody>
-          <a:bodyPr wrap="none" lIns="0" tIns="0" rIns="0" bIns="0" anchor="ctr">
-            <a:spAutoFit/>
-          </a:bodyPr>
-          <a:lstStyle/>
-          <a:p>
-            <a:pPr algn="l">
-              <a:lnSpc>
-                <a:spcPct val="110000"/>
-              </a:lnSpc>
-              <a:spcBef>
-                <a:spcPts val="0"/>
-              </a:spcBef>
-              <a:spcAft>
-                <a:spcPts val="0"/>
-              </a:spcAft>
-            </a:pPr>
-            <a:r>
-              <a:rPr sz="2000" b="1">
-                <a:solidFill>
-                  <a:srgbClr val="105186"/>
-                </a:solidFill>
-                <a:latin typeface="Times New Roman"/>
-                <a:ea typeface="DFKai-SB"/>
-                <a:cs typeface="Times New Roman"/>
-              </a:rPr>
-              <a:t>01</a:t>
-            </a:r>
-          </a:p>
-        </p:txBody>
-      </p:sp>
-      <p:sp>
-        <p:nvSpPr>
-          <p:cNvPr id="9" name="TextBox 8"/>
-          <p:cNvSpPr txBox="1"/>
-          <p:nvPr>
-            <p:custDataLst>
-              <p:tags r:id="rId6"/>
-            </p:custDataLst>
-          </p:nvPr>
-        </p:nvSpPr>
-        <p:spPr>
-          <a:xfrm>
-            <a:off x="1116000" y="4608000"/>
-            <a:ext cx="13320000" cy="360000"/>
-          </a:xfrm>
-          <a:prstGeom prst="rect">
-            <a:avLst/>
-          </a:prstGeom>
-          <a:noFill/>
-        </p:spPr>
-        <p:txBody>
-          <a:bodyPr wrap="none" lIns="0" tIns="0" rIns="0" bIns="0" anchor="ctr">
-            <a:spAutoFit/>
-          </a:bodyPr>
-          <a:lstStyle/>
-          <a:p>
-            <a:pPr algn="l">
-              <a:lnSpc>
-                <a:spcPct val="110000"/>
-              </a:lnSpc>
-              <a:spcBef>
-                <a:spcPts val="0"/>
-              </a:spcBef>
-              <a:spcAft>
-                <a:spcPts val="0"/>
-              </a:spcAft>
-            </a:pPr>
-            <a:r>
-              <a:rPr sz="2400" b="0">
-                <a:solidFill>
-                  <a:srgbClr val="092B42"/>
-                </a:solidFill>
-                <a:latin typeface="Times New Roman"/>
-                <a:ea typeface="DFKai-SB"/>
-                <a:cs typeface="Times New Roman"/>
-              </a:rPr>
-              <a:t>四階段方法，串成同一條事件鏈</a:t>
-            </a:r>
-          </a:p>
-        </p:txBody>
-      </p:sp>
-      <p:sp>
-        <p:nvSpPr>
-          <p:cNvPr id="10" name="Rectangle 9"/>
+        <p:txBody>
+          <a:bodyPr rtlCol="0" anchor="ctr"/>
+          <a:lstStyle/>
+          <a:p>
+            <a:pPr algn="ctr"/>
+            <a:endParaRPr>
+              <a:latin typeface="Times New Roman"/>
+              <a:ea typeface="DFKai-SB"/>
+              <a:cs typeface="Times New Roman"/>
+            </a:endParaRPr>
+          </a:p>
+        </p:txBody>
+      </p:sp>
+      <p:sp>
+        <p:nvSpPr>
+          <p:cNvPr id="18" name="Rectangle 17"/>
           <p:cNvSpPr/>
           <p:nvPr/>
         </p:nvSpPr>
         <p:spPr>
           <a:xfrm>
-            <a:off x="576000" y="5220000"/>
+            <a:off x="576000" y="7236000"/>
             <a:ext cx="13968000" cy="1800000"/>
           </a:xfrm>
           <a:prstGeom prst="rect">
@@ -4504,13 +4904,13 @@
       </p:sp>
       <p:sp>
         <p:nvSpPr>
-          <p:cNvPr id="11" name="Rectangle 10"/>
+          <p:cNvPr id="19" name="Rectangle 18"/>
           <p:cNvSpPr/>
           <p:nvPr/>
         </p:nvSpPr>
         <p:spPr>
           <a:xfrm>
-            <a:off x="576000" y="5220000"/>
+            <a:off x="576000" y="7236000"/>
             <a:ext cx="54000" cy="1800000"/>
           </a:xfrm>
           <a:prstGeom prst="rect">
@@ -4553,17 +4953,17 @@
       </p:sp>
       <p:sp>
         <p:nvSpPr>
-          <p:cNvPr id="12" name="TextBox 11"/>
+          <p:cNvPr id="20" name="TextBox 19"/>
           <p:cNvSpPr txBox="1"/>
           <p:nvPr>
             <p:custDataLst>
-              <p:tags r:id="rId7"/>
+              <p:tags r:id="rId10"/>
             </p:custDataLst>
           </p:nvPr>
         </p:nvSpPr>
         <p:spPr>
           <a:xfrm>
-            <a:off x="828000" y="5364000"/>
+            <a:off x="828000" y="7380000"/>
             <a:ext cx="360000" cy="288000"/>
           </a:xfrm>
           <a:prstGeom prst="rect">
@@ -4597,24 +4997,24 @@
                 <a:ea typeface="DFKai-SB"/>
                 <a:cs typeface="Times New Roman"/>
               </a:rPr>
-              <a:t>01</a:t>
-            </a:r>
-          </a:p>
-        </p:txBody>
-      </p:sp>
-      <p:sp>
-        <p:nvSpPr>
-          <p:cNvPr id="13" name="TextBox 12"/>
+              <a:t>02</a:t>
+            </a:r>
+          </a:p>
+        </p:txBody>
+      </p:sp>
+      <p:sp>
+        <p:nvSpPr>
+          <p:cNvPr id="21" name="TextBox 20"/>
           <p:cNvSpPr txBox="1"/>
           <p:nvPr>
             <p:custDataLst>
-              <p:tags r:id="rId8"/>
+              <p:tags r:id="rId11"/>
             </p:custDataLst>
           </p:nvPr>
         </p:nvSpPr>
         <p:spPr>
           <a:xfrm>
-            <a:off x="1332000" y="5328000"/>
+            <a:off x="1332000" y="7344000"/>
             <a:ext cx="2628000" cy="360000"/>
           </a:xfrm>
           <a:prstGeom prst="rect">
@@ -4648,24 +5048,24 @@
                 <a:ea typeface="DFKai-SB"/>
                 <a:cs typeface="Times New Roman"/>
               </a:rPr>
-              <a:t>互補判定</a:t>
-            </a:r>
-          </a:p>
-        </p:txBody>
-      </p:sp>
-      <p:sp>
-        <p:nvSpPr>
-          <p:cNvPr id="14" name="TextBox 13"/>
+              <a:t>任務檢索</a:t>
+            </a:r>
+          </a:p>
+        </p:txBody>
+      </p:sp>
+      <p:sp>
+        <p:nvSpPr>
+          <p:cNvPr id="22" name="TextBox 21"/>
           <p:cNvSpPr txBox="1"/>
           <p:nvPr>
             <p:custDataLst>
-              <p:tags r:id="rId9"/>
+              <p:tags r:id="rId12"/>
             </p:custDataLst>
           </p:nvPr>
         </p:nvSpPr>
         <p:spPr>
           <a:xfrm>
-            <a:off x="1332000" y="5724000"/>
+            <a:off x="1332000" y="7740000"/>
             <a:ext cx="2628000" cy="288000"/>
           </a:xfrm>
           <a:prstGeom prst="rect">
@@ -4699,14 +5099,14 @@
                 <a:ea typeface="DFKai-SB"/>
                 <a:cs typeface="Times New Roman"/>
               </a:rPr>
-              <a:t>內容＋時序</a:t>
+              <a:t>表徵＋機率</a:t>
             </a:r>
           </a:p>
         </p:txBody>
       </p:sp>
       <p:pic>
         <p:nvPicPr>
-          <p:cNvPr id="15" name="Picture 14" descr="flat-icon-2.png"/>
+          <p:cNvPr id="23" name="Picture 22" descr="flat-icon-3.png"/>
           <p:cNvPicPr>
             <a:picLocks noChangeAspect="1"/>
           </p:cNvPicPr>
@@ -4720,7 +5120,7 @@
         </p:blipFill>
         <p:spPr>
           <a:xfrm>
-            <a:off x="900000" y="6120000"/>
+            <a:off x="900000" y="8136000"/>
             <a:ext cx="756000" cy="756000"/>
           </a:xfrm>
           <a:prstGeom prst="rect">
@@ -4730,13 +5130,13 @@
       </p:pic>
       <p:sp>
         <p:nvSpPr>
-          <p:cNvPr id="16" name="Down Arrow 15"/>
+          <p:cNvPr id="24" name="Down Arrow 23"/>
           <p:cNvSpPr/>
           <p:nvPr/>
         </p:nvSpPr>
         <p:spPr>
           <a:xfrm>
-            <a:off x="9252000" y="7038000"/>
+            <a:off x="9252000" y="9054000"/>
             <a:ext cx="288000" cy="180000"/>
           </a:xfrm>
           <a:prstGeom prst="downArrow">
@@ -4779,13 +5179,13 @@
       </p:sp>
       <p:sp>
         <p:nvSpPr>
-          <p:cNvPr id="17" name="Rectangle 16"/>
+          <p:cNvPr id="25" name="Rectangle 24"/>
           <p:cNvSpPr/>
           <p:nvPr/>
         </p:nvSpPr>
         <p:spPr>
           <a:xfrm>
-            <a:off x="576000" y="7236000"/>
+            <a:off x="576000" y="9252000"/>
             <a:ext cx="13968000" cy="1800000"/>
           </a:xfrm>
           <a:prstGeom prst="rect">
@@ -4830,13 +5230,13 @@
       </p:sp>
       <p:sp>
         <p:nvSpPr>
-          <p:cNvPr id="18" name="Rectangle 17"/>
+          <p:cNvPr id="26" name="Rectangle 25"/>
           <p:cNvSpPr/>
           <p:nvPr/>
         </p:nvSpPr>
         <p:spPr>
           <a:xfrm>
-            <a:off x="576000" y="7236000"/>
+            <a:off x="576000" y="9252000"/>
             <a:ext cx="54000" cy="1800000"/>
           </a:xfrm>
           <a:prstGeom prst="rect">
@@ -4879,17 +5279,17 @@
       </p:sp>
       <p:sp>
         <p:nvSpPr>
-          <p:cNvPr id="19" name="TextBox 18"/>
+          <p:cNvPr id="27" name="TextBox 26"/>
           <p:cNvSpPr txBox="1"/>
           <p:nvPr>
             <p:custDataLst>
-              <p:tags r:id="rId10"/>
+              <p:tags r:id="rId13"/>
             </p:custDataLst>
           </p:nvPr>
         </p:nvSpPr>
         <p:spPr>
           <a:xfrm>
-            <a:off x="828000" y="7380000"/>
+            <a:off x="828000" y="9396000"/>
             <a:ext cx="360000" cy="288000"/>
           </a:xfrm>
           <a:prstGeom prst="rect">
@@ -4923,24 +5323,24 @@
                 <a:ea typeface="DFKai-SB"/>
                 <a:cs typeface="Times New Roman"/>
               </a:rPr>
-              <a:t>02</a:t>
-            </a:r>
-          </a:p>
-        </p:txBody>
-      </p:sp>
-      <p:sp>
-        <p:nvSpPr>
-          <p:cNvPr id="20" name="TextBox 19"/>
+              <a:t>03</a:t>
+            </a:r>
+          </a:p>
+        </p:txBody>
+      </p:sp>
+      <p:sp>
+        <p:nvSpPr>
+          <p:cNvPr id="28" name="TextBox 27"/>
           <p:cNvSpPr txBox="1"/>
           <p:nvPr>
             <p:custDataLst>
-              <p:tags r:id="rId11"/>
+              <p:tags r:id="rId14"/>
             </p:custDataLst>
           </p:nvPr>
         </p:nvSpPr>
         <p:spPr>
           <a:xfrm>
-            <a:off x="1332000" y="7344000"/>
+            <a:off x="1332000" y="9360000"/>
             <a:ext cx="2628000" cy="360000"/>
           </a:xfrm>
           <a:prstGeom prst="rect">
@@ -4974,24 +5374,24 @@
                 <a:ea typeface="DFKai-SB"/>
                 <a:cs typeface="Times New Roman"/>
               </a:rPr>
-              <a:t>任務檢索</a:t>
-            </a:r>
-          </a:p>
-        </p:txBody>
-      </p:sp>
-      <p:sp>
-        <p:nvSpPr>
-          <p:cNvPr id="21" name="TextBox 20"/>
+              <a:t>證據稽核</a:t>
+            </a:r>
+          </a:p>
+        </p:txBody>
+      </p:sp>
+      <p:sp>
+        <p:nvSpPr>
+          <p:cNvPr id="29" name="TextBox 28"/>
           <p:cNvSpPr txBox="1"/>
           <p:nvPr>
             <p:custDataLst>
-              <p:tags r:id="rId12"/>
+              <p:tags r:id="rId15"/>
             </p:custDataLst>
           </p:nvPr>
         </p:nvSpPr>
         <p:spPr>
           <a:xfrm>
-            <a:off x="1332000" y="7740000"/>
+            <a:off x="1332000" y="9756000"/>
             <a:ext cx="2628000" cy="288000"/>
           </a:xfrm>
           <a:prstGeom prst="rect">
@@ -5025,332 +5425,6 @@
                 <a:ea typeface="DFKai-SB"/>
                 <a:cs typeface="Times New Roman"/>
               </a:rPr>
-              <a:t>表徵＋機率</a:t>
-            </a:r>
-          </a:p>
-        </p:txBody>
-      </p:sp>
-      <p:pic>
-        <p:nvPicPr>
-          <p:cNvPr id="22" name="Picture 21" descr="flat-icon-3.png"/>
-          <p:cNvPicPr>
-            <a:picLocks noChangeAspect="1"/>
-          </p:cNvPicPr>
-          <p:nvPr/>
-        </p:nvPicPr>
-        <p:blipFill>
-          <a:blip r:embed="rId79"/>
-          <a:stretch>
-            <a:fillRect/>
-          </a:stretch>
-        </p:blipFill>
-        <p:spPr>
-          <a:xfrm>
-            <a:off x="900000" y="8136000"/>
-            <a:ext cx="756000" cy="756000"/>
-          </a:xfrm>
-          <a:prstGeom prst="rect">
-            <a:avLst/>
-          </a:prstGeom>
-        </p:spPr>
-      </p:pic>
-      <p:sp>
-        <p:nvSpPr>
-          <p:cNvPr id="23" name="Down Arrow 22"/>
-          <p:cNvSpPr/>
-          <p:nvPr/>
-        </p:nvSpPr>
-        <p:spPr>
-          <a:xfrm>
-            <a:off x="9252000" y="9054000"/>
-            <a:ext cx="288000" cy="180000"/>
-          </a:xfrm>
-          <a:prstGeom prst="downArrow">
-            <a:avLst/>
-          </a:prstGeom>
-          <a:solidFill>
-            <a:srgbClr val="105186"/>
-          </a:solidFill>
-          <a:ln>
-            <a:noFill/>
-          </a:ln>
-          <a:effectLst/>
-        </p:spPr>
-        <p:style>
-          <a:lnRef idx="1">
-            <a:schemeClr val="accent1"/>
-          </a:lnRef>
-          <a:fillRef idx="3">
-            <a:schemeClr val="accent1"/>
-          </a:fillRef>
-          <a:effectRef idx="2">
-            <a:schemeClr val="accent1"/>
-          </a:effectRef>
-          <a:fontRef idx="minor">
-            <a:schemeClr val="lt1"/>
-          </a:fontRef>
-        </p:style>
-        <p:txBody>
-          <a:bodyPr rtlCol="0" anchor="ctr"/>
-          <a:lstStyle/>
-          <a:p>
-            <a:pPr algn="ctr"/>
-            <a:endParaRPr>
-              <a:latin typeface="Times New Roman"/>
-              <a:ea typeface="DFKai-SB"/>
-              <a:cs typeface="Times New Roman"/>
-            </a:endParaRPr>
-          </a:p>
-        </p:txBody>
-      </p:sp>
-      <p:sp>
-        <p:nvSpPr>
-          <p:cNvPr id="24" name="Rectangle 23"/>
-          <p:cNvSpPr/>
-          <p:nvPr/>
-        </p:nvSpPr>
-        <p:spPr>
-          <a:xfrm>
-            <a:off x="576000" y="9252000"/>
-            <a:ext cx="13968000" cy="1800000"/>
-          </a:xfrm>
-          <a:prstGeom prst="rect">
-            <a:avLst/>
-          </a:prstGeom>
-          <a:solidFill>
-            <a:srgbClr val="F0F2F3"/>
-          </a:solidFill>
-          <a:ln w="10160">
-            <a:solidFill>
-              <a:srgbClr val="D6DDE0"/>
-            </a:solidFill>
-          </a:ln>
-          <a:effectLst/>
-        </p:spPr>
-        <p:style>
-          <a:lnRef idx="1">
-            <a:schemeClr val="accent1"/>
-          </a:lnRef>
-          <a:fillRef idx="3">
-            <a:schemeClr val="accent1"/>
-          </a:fillRef>
-          <a:effectRef idx="2">
-            <a:schemeClr val="accent1"/>
-          </a:effectRef>
-          <a:fontRef idx="minor">
-            <a:schemeClr val="lt1"/>
-          </a:fontRef>
-        </p:style>
-        <p:txBody>
-          <a:bodyPr rtlCol="0" anchor="ctr"/>
-          <a:lstStyle/>
-          <a:p>
-            <a:pPr algn="ctr"/>
-            <a:endParaRPr>
-              <a:latin typeface="Times New Roman"/>
-              <a:ea typeface="DFKai-SB"/>
-              <a:cs typeface="Times New Roman"/>
-            </a:endParaRPr>
-          </a:p>
-        </p:txBody>
-      </p:sp>
-      <p:sp>
-        <p:nvSpPr>
-          <p:cNvPr id="25" name="Rectangle 24"/>
-          <p:cNvSpPr/>
-          <p:nvPr/>
-        </p:nvSpPr>
-        <p:spPr>
-          <a:xfrm>
-            <a:off x="576000" y="9252000"/>
-            <a:ext cx="54000" cy="1800000"/>
-          </a:xfrm>
-          <a:prstGeom prst="rect">
-            <a:avLst/>
-          </a:prstGeom>
-          <a:solidFill>
-            <a:srgbClr val="105186"/>
-          </a:solidFill>
-          <a:ln>
-            <a:noFill/>
-          </a:ln>
-          <a:effectLst/>
-        </p:spPr>
-        <p:style>
-          <a:lnRef idx="1">
-            <a:schemeClr val="accent1"/>
-          </a:lnRef>
-          <a:fillRef idx="3">
-            <a:schemeClr val="accent1"/>
-          </a:fillRef>
-          <a:effectRef idx="2">
-            <a:schemeClr val="accent1"/>
-          </a:effectRef>
-          <a:fontRef idx="minor">
-            <a:schemeClr val="lt1"/>
-          </a:fontRef>
-        </p:style>
-        <p:txBody>
-          <a:bodyPr rtlCol="0" anchor="ctr"/>
-          <a:lstStyle/>
-          <a:p>
-            <a:pPr algn="ctr"/>
-            <a:endParaRPr>
-              <a:latin typeface="Times New Roman"/>
-              <a:ea typeface="DFKai-SB"/>
-              <a:cs typeface="Times New Roman"/>
-            </a:endParaRPr>
-          </a:p>
-        </p:txBody>
-      </p:sp>
-      <p:sp>
-        <p:nvSpPr>
-          <p:cNvPr id="26" name="TextBox 25"/>
-          <p:cNvSpPr txBox="1"/>
-          <p:nvPr>
-            <p:custDataLst>
-              <p:tags r:id="rId13"/>
-            </p:custDataLst>
-          </p:nvPr>
-        </p:nvSpPr>
-        <p:spPr>
-          <a:xfrm>
-            <a:off x="828000" y="9396000"/>
-            <a:ext cx="360000" cy="288000"/>
-          </a:xfrm>
-          <a:prstGeom prst="rect">
-            <a:avLst/>
-          </a:prstGeom>
-          <a:noFill/>
-        </p:spPr>
-        <p:txBody>
-          <a:bodyPr wrap="none" lIns="0" tIns="0" rIns="0" bIns="0" anchor="ctr">
-            <a:spAutoFit/>
-          </a:bodyPr>
-          <a:lstStyle/>
-          <a:p>
-            <a:pPr algn="l">
-              <a:lnSpc>
-                <a:spcPct val="110000"/>
-              </a:lnSpc>
-              <a:spcBef>
-                <a:spcPts val="0"/>
-              </a:spcBef>
-              <a:spcAft>
-                <a:spcPts val="0"/>
-              </a:spcAft>
-            </a:pPr>
-            <a:r>
-              <a:rPr sz="1600" b="1">
-                <a:solidFill>
-                  <a:srgbClr val="105186"/>
-                </a:solidFill>
-                <a:latin typeface="Times New Roman"/>
-                <a:ea typeface="DFKai-SB"/>
-                <a:cs typeface="Times New Roman"/>
-              </a:rPr>
-              <a:t>03</a:t>
-            </a:r>
-          </a:p>
-        </p:txBody>
-      </p:sp>
-      <p:sp>
-        <p:nvSpPr>
-          <p:cNvPr id="27" name="TextBox 26"/>
-          <p:cNvSpPr txBox="1"/>
-          <p:nvPr>
-            <p:custDataLst>
-              <p:tags r:id="rId14"/>
-            </p:custDataLst>
-          </p:nvPr>
-        </p:nvSpPr>
-        <p:spPr>
-          <a:xfrm>
-            <a:off x="1332000" y="9360000"/>
-            <a:ext cx="2628000" cy="360000"/>
-          </a:xfrm>
-          <a:prstGeom prst="rect">
-            <a:avLst/>
-          </a:prstGeom>
-          <a:noFill/>
-        </p:spPr>
-        <p:txBody>
-          <a:bodyPr wrap="none" lIns="0" tIns="0" rIns="0" bIns="0" anchor="ctr">
-            <a:spAutoFit/>
-          </a:bodyPr>
-          <a:lstStyle/>
-          <a:p>
-            <a:pPr algn="l">
-              <a:lnSpc>
-                <a:spcPct val="110000"/>
-              </a:lnSpc>
-              <a:spcBef>
-                <a:spcPts val="0"/>
-              </a:spcBef>
-              <a:spcAft>
-                <a:spcPts val="0"/>
-              </a:spcAft>
-            </a:pPr>
-            <a:r>
-              <a:rPr sz="2300" b="0">
-                <a:solidFill>
-                  <a:srgbClr val="105186"/>
-                </a:solidFill>
-                <a:latin typeface="Times New Roman"/>
-                <a:ea typeface="DFKai-SB"/>
-                <a:cs typeface="Times New Roman"/>
-              </a:rPr>
-              <a:t>證據稽核</a:t>
-            </a:r>
-          </a:p>
-        </p:txBody>
-      </p:sp>
-      <p:sp>
-        <p:nvSpPr>
-          <p:cNvPr id="28" name="TextBox 27"/>
-          <p:cNvSpPr txBox="1"/>
-          <p:nvPr>
-            <p:custDataLst>
-              <p:tags r:id="rId15"/>
-            </p:custDataLst>
-          </p:nvPr>
-        </p:nvSpPr>
-        <p:spPr>
-          <a:xfrm>
-            <a:off x="1332000" y="9756000"/>
-            <a:ext cx="2628000" cy="288000"/>
-          </a:xfrm>
-          <a:prstGeom prst="rect">
-            <a:avLst/>
-          </a:prstGeom>
-          <a:noFill/>
-        </p:spPr>
-        <p:txBody>
-          <a:bodyPr wrap="none" lIns="0" tIns="0" rIns="0" bIns="0" anchor="ctr">
-            <a:spAutoFit/>
-          </a:bodyPr>
-          <a:lstStyle/>
-          <a:p>
-            <a:pPr algn="l">
-              <a:lnSpc>
-                <a:spcPct val="110000"/>
-              </a:lnSpc>
-              <a:spcBef>
-                <a:spcPts val="0"/>
-              </a:spcBef>
-              <a:spcAft>
-                <a:spcPts val="0"/>
-              </a:spcAft>
-            </a:pPr>
-            <a:r>
-              <a:rPr sz="1500" b="0">
-                <a:solidFill>
-                  <a:srgbClr val="53666E"/>
-                </a:solidFill>
-                <a:latin typeface="Times New Roman"/>
-                <a:ea typeface="DFKai-SB"/>
-                <a:cs typeface="Times New Roman"/>
-              </a:rPr>
               <a:t>保留正式分類</a:t>
             </a:r>
           </a:p>
@@ -5358,7 +5432,7 @@
       </p:sp>
       <p:sp>
         <p:nvSpPr>
-          <p:cNvPr id="29" name="Rectangle 28"/>
+          <p:cNvPr id="30" name="Rectangle 29"/>
           <p:cNvSpPr/>
           <p:nvPr/>
         </p:nvSpPr>
@@ -5409,49 +5483,13 @@
       </p:sp>
       <p:cxnSp>
         <p:nvCxnSpPr>
-          <p:cNvPr id="30" name="Connector 29"/>
-          <p:cNvCxnSpPr/>
-          <p:nvPr/>
-        </p:nvCxnSpPr>
-        <p:spPr>
-          <a:xfrm>
-            <a:off x="1152000" y="10296000"/>
-            <a:ext cx="288000" cy="0"/>
-          </a:xfrm>
-          <a:prstGeom prst="line">
-            <a:avLst/>
-          </a:prstGeom>
-          <a:ln w="12700">
-            <a:solidFill>
-              <a:srgbClr val="105186"/>
-            </a:solidFill>
-          </a:ln>
-          <a:effectLst/>
-        </p:spPr>
-        <p:style>
-          <a:lnRef idx="2">
-            <a:schemeClr val="accent1"/>
-          </a:lnRef>
-          <a:fillRef idx="0">
-            <a:schemeClr val="accent1"/>
-          </a:fillRef>
-          <a:effectRef idx="1">
-            <a:schemeClr val="accent1"/>
-          </a:effectRef>
-          <a:fontRef idx="minor">
-            <a:schemeClr val="tx1"/>
-          </a:fontRef>
-        </p:style>
-      </p:cxnSp>
-      <p:cxnSp>
-        <p:nvCxnSpPr>
           <p:cNvPr id="31" name="Connector 30"/>
           <p:cNvCxnSpPr/>
           <p:nvPr/>
         </p:nvCxnSpPr>
         <p:spPr>
           <a:xfrm>
-            <a:off x="1152000" y="10476000"/>
+            <a:off x="1152000" y="10296000"/>
             <a:ext cx="288000" cy="0"/>
           </a:xfrm>
           <a:prstGeom prst="line">
@@ -5487,672 +5525,8 @@
         </p:nvCxnSpPr>
         <p:spPr>
           <a:xfrm>
-            <a:off x="1152000" y="10656000"/>
+            <a:off x="1152000" y="10476000"/>
             <a:ext cx="288000" cy="0"/>
-          </a:xfrm>
-          <a:prstGeom prst="line">
-            <a:avLst/>
-          </a:prstGeom>
-          <a:ln w="12700">
-            <a:solidFill>
-              <a:srgbClr val="105186"/>
-            </a:solidFill>
-          </a:ln>
-          <a:effectLst/>
-        </p:spPr>
-        <p:style>
-          <a:lnRef idx="2">
-            <a:schemeClr val="accent1"/>
-          </a:lnRef>
-          <a:fillRef idx="0">
-            <a:schemeClr val="accent1"/>
-          </a:fillRef>
-          <a:effectRef idx="1">
-            <a:schemeClr val="accent1"/>
-          </a:effectRef>
-          <a:fontRef idx="minor">
-            <a:schemeClr val="tx1"/>
-          </a:fontRef>
-        </p:style>
-      </p:cxnSp>
-      <p:sp>
-        <p:nvSpPr>
-          <p:cNvPr id="33" name="Down Arrow 32"/>
-          <p:cNvSpPr/>
-          <p:nvPr/>
-        </p:nvSpPr>
-        <p:spPr>
-          <a:xfrm>
-            <a:off x="9252000" y="11070000"/>
-            <a:ext cx="288000" cy="180000"/>
-          </a:xfrm>
-          <a:prstGeom prst="downArrow">
-            <a:avLst/>
-          </a:prstGeom>
-          <a:solidFill>
-            <a:srgbClr val="105186"/>
-          </a:solidFill>
-          <a:ln>
-            <a:noFill/>
-          </a:ln>
-          <a:effectLst/>
-        </p:spPr>
-        <p:style>
-          <a:lnRef idx="1">
-            <a:schemeClr val="accent1"/>
-          </a:lnRef>
-          <a:fillRef idx="3">
-            <a:schemeClr val="accent1"/>
-          </a:fillRef>
-          <a:effectRef idx="2">
-            <a:schemeClr val="accent1"/>
-          </a:effectRef>
-          <a:fontRef idx="minor">
-            <a:schemeClr val="lt1"/>
-          </a:fontRef>
-        </p:style>
-        <p:txBody>
-          <a:bodyPr rtlCol="0" anchor="ctr"/>
-          <a:lstStyle/>
-          <a:p>
-            <a:pPr algn="ctr"/>
-            <a:endParaRPr>
-              <a:latin typeface="Times New Roman"/>
-              <a:ea typeface="DFKai-SB"/>
-              <a:cs typeface="Times New Roman"/>
-            </a:endParaRPr>
-          </a:p>
-        </p:txBody>
-      </p:sp>
-      <p:sp>
-        <p:nvSpPr>
-          <p:cNvPr id="34" name="Rectangle 33"/>
-          <p:cNvSpPr/>
-          <p:nvPr/>
-        </p:nvSpPr>
-        <p:spPr>
-          <a:xfrm>
-            <a:off x="576000" y="11268000"/>
-            <a:ext cx="13968000" cy="1800000"/>
-          </a:xfrm>
-          <a:prstGeom prst="rect">
-            <a:avLst/>
-          </a:prstGeom>
-          <a:solidFill>
-            <a:srgbClr val="F0F2F3"/>
-          </a:solidFill>
-          <a:ln w="10160">
-            <a:solidFill>
-              <a:srgbClr val="D6DDE0"/>
-            </a:solidFill>
-          </a:ln>
-          <a:effectLst/>
-        </p:spPr>
-        <p:style>
-          <a:lnRef idx="1">
-            <a:schemeClr val="accent1"/>
-          </a:lnRef>
-          <a:fillRef idx="3">
-            <a:schemeClr val="accent1"/>
-          </a:fillRef>
-          <a:effectRef idx="2">
-            <a:schemeClr val="accent1"/>
-          </a:effectRef>
-          <a:fontRef idx="minor">
-            <a:schemeClr val="lt1"/>
-          </a:fontRef>
-        </p:style>
-        <p:txBody>
-          <a:bodyPr rtlCol="0" anchor="ctr"/>
-          <a:lstStyle/>
-          <a:p>
-            <a:pPr algn="ctr"/>
-            <a:endParaRPr>
-              <a:latin typeface="Times New Roman"/>
-              <a:ea typeface="DFKai-SB"/>
-              <a:cs typeface="Times New Roman"/>
-            </a:endParaRPr>
-          </a:p>
-        </p:txBody>
-      </p:sp>
-      <p:sp>
-        <p:nvSpPr>
-          <p:cNvPr id="35" name="Rectangle 34"/>
-          <p:cNvSpPr/>
-          <p:nvPr/>
-        </p:nvSpPr>
-        <p:spPr>
-          <a:xfrm>
-            <a:off x="576000" y="11268000"/>
-            <a:ext cx="54000" cy="1800000"/>
-          </a:xfrm>
-          <a:prstGeom prst="rect">
-            <a:avLst/>
-          </a:prstGeom>
-          <a:solidFill>
-            <a:srgbClr val="105186"/>
-          </a:solidFill>
-          <a:ln>
-            <a:noFill/>
-          </a:ln>
-          <a:effectLst/>
-        </p:spPr>
-        <p:style>
-          <a:lnRef idx="1">
-            <a:schemeClr val="accent1"/>
-          </a:lnRef>
-          <a:fillRef idx="3">
-            <a:schemeClr val="accent1"/>
-          </a:fillRef>
-          <a:effectRef idx="2">
-            <a:schemeClr val="accent1"/>
-          </a:effectRef>
-          <a:fontRef idx="minor">
-            <a:schemeClr val="lt1"/>
-          </a:fontRef>
-        </p:style>
-        <p:txBody>
-          <a:bodyPr rtlCol="0" anchor="ctr"/>
-          <a:lstStyle/>
-          <a:p>
-            <a:pPr algn="ctr"/>
-            <a:endParaRPr>
-              <a:latin typeface="Times New Roman"/>
-              <a:ea typeface="DFKai-SB"/>
-              <a:cs typeface="Times New Roman"/>
-            </a:endParaRPr>
-          </a:p>
-        </p:txBody>
-      </p:sp>
-      <p:sp>
-        <p:nvSpPr>
-          <p:cNvPr id="36" name="TextBox 35"/>
-          <p:cNvSpPr txBox="1"/>
-          <p:nvPr>
-            <p:custDataLst>
-              <p:tags r:id="rId16"/>
-            </p:custDataLst>
-          </p:nvPr>
-        </p:nvSpPr>
-        <p:spPr>
-          <a:xfrm>
-            <a:off x="828000" y="11412000"/>
-            <a:ext cx="360000" cy="288000"/>
-          </a:xfrm>
-          <a:prstGeom prst="rect">
-            <a:avLst/>
-          </a:prstGeom>
-          <a:noFill/>
-        </p:spPr>
-        <p:txBody>
-          <a:bodyPr wrap="none" lIns="0" tIns="0" rIns="0" bIns="0" anchor="ctr">
-            <a:spAutoFit/>
-          </a:bodyPr>
-          <a:lstStyle/>
-          <a:p>
-            <a:pPr algn="l">
-              <a:lnSpc>
-                <a:spcPct val="110000"/>
-              </a:lnSpc>
-              <a:spcBef>
-                <a:spcPts val="0"/>
-              </a:spcBef>
-              <a:spcAft>
-                <a:spcPts val="0"/>
-              </a:spcAft>
-            </a:pPr>
-            <a:r>
-              <a:rPr sz="1600" b="1">
-                <a:solidFill>
-                  <a:srgbClr val="105186"/>
-                </a:solidFill>
-                <a:latin typeface="Times New Roman"/>
-                <a:ea typeface="DFKai-SB"/>
-                <a:cs typeface="Times New Roman"/>
-              </a:rPr>
-              <a:t>04</a:t>
-            </a:r>
-          </a:p>
-        </p:txBody>
-      </p:sp>
-      <p:sp>
-        <p:nvSpPr>
-          <p:cNvPr id="37" name="TextBox 36"/>
-          <p:cNvSpPr txBox="1"/>
-          <p:nvPr>
-            <p:custDataLst>
-              <p:tags r:id="rId17"/>
-            </p:custDataLst>
-          </p:nvPr>
-        </p:nvSpPr>
-        <p:spPr>
-          <a:xfrm>
-            <a:off x="1332000" y="11376000"/>
-            <a:ext cx="2628000" cy="360000"/>
-          </a:xfrm>
-          <a:prstGeom prst="rect">
-            <a:avLst/>
-          </a:prstGeom>
-          <a:noFill/>
-        </p:spPr>
-        <p:txBody>
-          <a:bodyPr wrap="none" lIns="0" tIns="0" rIns="0" bIns="0" anchor="ctr">
-            <a:spAutoFit/>
-          </a:bodyPr>
-          <a:lstStyle/>
-          <a:p>
-            <a:pPr algn="l">
-              <a:lnSpc>
-                <a:spcPct val="110000"/>
-              </a:lnSpc>
-              <a:spcBef>
-                <a:spcPts val="0"/>
-              </a:spcBef>
-              <a:spcAft>
-                <a:spcPts val="0"/>
-              </a:spcAft>
-            </a:pPr>
-            <a:r>
-              <a:rPr sz="2300" b="0">
-                <a:solidFill>
-                  <a:srgbClr val="105186"/>
-                </a:solidFill>
-                <a:latin typeface="Times New Roman"/>
-                <a:ea typeface="DFKai-SB"/>
-                <a:cs typeface="Times New Roman"/>
-              </a:rPr>
-              <a:t>受控回復</a:t>
-            </a:r>
-          </a:p>
-        </p:txBody>
-      </p:sp>
-      <p:sp>
-        <p:nvSpPr>
-          <p:cNvPr id="38" name="TextBox 37"/>
-          <p:cNvSpPr txBox="1"/>
-          <p:nvPr>
-            <p:custDataLst>
-              <p:tags r:id="rId18"/>
-            </p:custDataLst>
-          </p:nvPr>
-        </p:nvSpPr>
-        <p:spPr>
-          <a:xfrm>
-            <a:off x="1332000" y="11772000"/>
-            <a:ext cx="2628000" cy="288000"/>
-          </a:xfrm>
-          <a:prstGeom prst="rect">
-            <a:avLst/>
-          </a:prstGeom>
-          <a:noFill/>
-        </p:spPr>
-        <p:txBody>
-          <a:bodyPr wrap="none" lIns="0" tIns="0" rIns="0" bIns="0" anchor="ctr">
-            <a:spAutoFit/>
-          </a:bodyPr>
-          <a:lstStyle/>
-          <a:p>
-            <a:pPr algn="l">
-              <a:lnSpc>
-                <a:spcPct val="110000"/>
-              </a:lnSpc>
-              <a:spcBef>
-                <a:spcPts val="0"/>
-              </a:spcBef>
-              <a:spcAft>
-                <a:spcPts val="0"/>
-              </a:spcAft>
-            </a:pPr>
-            <a:r>
-              <a:rPr sz="1500" b="0">
-                <a:solidFill>
-                  <a:srgbClr val="53666E"/>
-                </a:solidFill>
-                <a:latin typeface="Times New Roman"/>
-                <a:ea typeface="DFKai-SB"/>
-                <a:cs typeface="Times New Roman"/>
-              </a:rPr>
-              <a:t>策略＋期限</a:t>
-            </a:r>
-          </a:p>
-        </p:txBody>
-      </p:sp>
-      <p:pic>
-        <p:nvPicPr>
-          <p:cNvPr id="39" name="Picture 38" descr="flat-icon-4.png"/>
-          <p:cNvPicPr>
-            <a:picLocks noChangeAspect="1"/>
-          </p:cNvPicPr>
-          <p:nvPr/>
-        </p:nvPicPr>
-        <p:blipFill>
-          <a:blip r:embed="rId77"/>
-          <a:stretch>
-            <a:fillRect/>
-          </a:stretch>
-        </p:blipFill>
-        <p:spPr>
-          <a:xfrm>
-            <a:off x="900000" y="12168000"/>
-            <a:ext cx="756000" cy="756000"/>
-          </a:xfrm>
-          <a:prstGeom prst="rect">
-            <a:avLst/>
-          </a:prstGeom>
-        </p:spPr>
-      </p:pic>
-      <p:sp>
-        <p:nvSpPr>
-          <p:cNvPr id="40" name="Rectangle 39"/>
-          <p:cNvSpPr/>
-          <p:nvPr/>
-        </p:nvSpPr>
-        <p:spPr>
-          <a:xfrm>
-            <a:off x="4320000" y="5400000"/>
-            <a:ext cx="2808000" cy="612000"/>
-          </a:xfrm>
-          <a:prstGeom prst="rect">
-            <a:avLst/>
-          </a:prstGeom>
-          <a:solidFill>
-            <a:srgbClr val="FFFFFF"/>
-          </a:solidFill>
-          <a:ln>
-            <a:noFill/>
-          </a:ln>
-          <a:effectLst/>
-        </p:spPr>
-        <p:style>
-          <a:lnRef idx="1">
-            <a:schemeClr val="accent1"/>
-          </a:lnRef>
-          <a:fillRef idx="3">
-            <a:schemeClr val="accent1"/>
-          </a:fillRef>
-          <a:effectRef idx="2">
-            <a:schemeClr val="accent1"/>
-          </a:effectRef>
-          <a:fontRef idx="minor">
-            <a:schemeClr val="lt1"/>
-          </a:fontRef>
-        </p:style>
-        <p:txBody>
-          <a:bodyPr rtlCol="0" anchor="ctr"/>
-          <a:lstStyle/>
-          <a:p>
-            <a:pPr algn="ctr"/>
-            <a:endParaRPr>
-              <a:latin typeface="Times New Roman"/>
-              <a:ea typeface="DFKai-SB"/>
-              <a:cs typeface="Times New Roman"/>
-            </a:endParaRPr>
-          </a:p>
-        </p:txBody>
-      </p:sp>
-      <p:sp>
-        <p:nvSpPr>
-          <p:cNvPr id="41" name="TextBox 40"/>
-          <p:cNvSpPr txBox="1"/>
-          <p:nvPr>
-            <p:custDataLst>
-              <p:tags r:id="rId19"/>
-            </p:custDataLst>
-          </p:nvPr>
-        </p:nvSpPr>
-        <p:spPr>
-          <a:xfrm>
-            <a:off x="4288250" y="5436000"/>
-            <a:ext cx="2808000" cy="342720"/>
-          </a:xfrm>
-          <a:prstGeom prst="rect">
-            <a:avLst/>
-          </a:prstGeom>
-          <a:noFill/>
-        </p:spPr>
-        <p:txBody>
-          <a:bodyPr wrap="none" lIns="0" tIns="0" rIns="0" bIns="0" anchor="ctr">
-            <a:spAutoFit/>
-          </a:bodyPr>
-          <a:lstStyle/>
-          <a:p>
-            <a:pPr algn="ctr">
-              <a:lnSpc>
-                <a:spcPct val="110000"/>
-              </a:lnSpc>
-              <a:spcBef>
-                <a:spcPts val="0"/>
-              </a:spcBef>
-              <a:spcAft>
-                <a:spcPts val="0"/>
-              </a:spcAft>
-            </a:pPr>
-            <a:r>
-              <a:rPr sz="2000" b="1">
-                <a:solidFill>
-                  <a:srgbClr val="105186"/>
-                </a:solidFill>
-                <a:latin typeface="Times New Roman"/>
-                <a:ea typeface="DFKai-SB"/>
-                <a:cs typeface="Times New Roman"/>
-              </a:rPr>
-              <a:t>CTBM</a:t>
-            </a:r>
-          </a:p>
-        </p:txBody>
-      </p:sp>
-      <p:sp>
-        <p:nvSpPr>
-          <p:cNvPr id="42" name="TextBox 41"/>
-          <p:cNvSpPr txBox="1"/>
-          <p:nvPr>
-            <p:custDataLst>
-              <p:tags r:id="rId20"/>
-            </p:custDataLst>
-          </p:nvPr>
-        </p:nvSpPr>
-        <p:spPr>
-          <a:xfrm>
-            <a:off x="4297775" y="5730480"/>
-            <a:ext cx="2808000" cy="263160"/>
-          </a:xfrm>
-          <a:prstGeom prst="rect">
-            <a:avLst/>
-          </a:prstGeom>
-          <a:noFill/>
-        </p:spPr>
-        <p:txBody>
-          <a:bodyPr wrap="none" lIns="0" tIns="0" rIns="0" bIns="0" anchor="ctr">
-            <a:spAutoFit/>
-          </a:bodyPr>
-          <a:lstStyle/>
-          <a:p>
-            <a:pPr algn="ctr">
-              <a:lnSpc>
-                <a:spcPct val="110000"/>
-              </a:lnSpc>
-              <a:spcBef>
-                <a:spcPts val="0"/>
-              </a:spcBef>
-              <a:spcAft>
-                <a:spcPts val="0"/>
-              </a:spcAft>
-            </a:pPr>
-            <a:r>
-              <a:rPr sz="1400" b="0">
-                <a:solidFill>
-                  <a:srgbClr val="53666E"/>
-                </a:solidFill>
-                <a:latin typeface="Times New Roman"/>
-                <a:ea typeface="DFKai-SB"/>
-                <a:cs typeface="Times New Roman"/>
-              </a:rPr>
-              <a:t>內容·時間差·方向</a:t>
-            </a:r>
-          </a:p>
-        </p:txBody>
-      </p:sp>
-      <p:sp>
-        <p:nvSpPr>
-          <p:cNvPr id="43" name="Rectangle 42"/>
-          <p:cNvSpPr/>
-          <p:nvPr/>
-        </p:nvSpPr>
-        <p:spPr>
-          <a:xfrm>
-            <a:off x="4320000" y="6228000"/>
-            <a:ext cx="2808000" cy="612000"/>
-          </a:xfrm>
-          <a:prstGeom prst="rect">
-            <a:avLst/>
-          </a:prstGeom>
-          <a:solidFill>
-            <a:srgbClr val="FFFFFF"/>
-          </a:solidFill>
-          <a:ln>
-            <a:noFill/>
-          </a:ln>
-          <a:effectLst/>
-        </p:spPr>
-        <p:style>
-          <a:lnRef idx="1">
-            <a:schemeClr val="accent1"/>
-          </a:lnRef>
-          <a:fillRef idx="3">
-            <a:schemeClr val="accent1"/>
-          </a:fillRef>
-          <a:effectRef idx="2">
-            <a:schemeClr val="accent1"/>
-          </a:effectRef>
-          <a:fontRef idx="minor">
-            <a:schemeClr val="lt1"/>
-          </a:fontRef>
-        </p:style>
-        <p:txBody>
-          <a:bodyPr rtlCol="0" anchor="ctr"/>
-          <a:lstStyle/>
-          <a:p>
-            <a:pPr algn="ctr"/>
-            <a:endParaRPr>
-              <a:latin typeface="Times New Roman"/>
-              <a:ea typeface="DFKai-SB"/>
-              <a:cs typeface="Times New Roman"/>
-            </a:endParaRPr>
-          </a:p>
-        </p:txBody>
-      </p:sp>
-      <p:sp>
-        <p:nvSpPr>
-          <p:cNvPr id="44" name="TextBox 43"/>
-          <p:cNvSpPr txBox="1"/>
-          <p:nvPr>
-            <p:custDataLst>
-              <p:tags r:id="rId21"/>
-            </p:custDataLst>
-          </p:nvPr>
-        </p:nvSpPr>
-        <p:spPr>
-          <a:xfrm>
-            <a:off x="4288250" y="6264000"/>
-            <a:ext cx="2808000" cy="342720"/>
-          </a:xfrm>
-          <a:prstGeom prst="rect">
-            <a:avLst/>
-          </a:prstGeom>
-          <a:noFill/>
-        </p:spPr>
-        <p:txBody>
-          <a:bodyPr wrap="none" lIns="0" tIns="0" rIns="0" bIns="0" anchor="ctr">
-            <a:spAutoFit/>
-          </a:bodyPr>
-          <a:lstStyle/>
-          <a:p>
-            <a:pPr algn="ctr">
-              <a:lnSpc>
-                <a:spcPct val="110000"/>
-              </a:lnSpc>
-              <a:spcBef>
-                <a:spcPts val="0"/>
-              </a:spcBef>
-              <a:spcAft>
-                <a:spcPts val="0"/>
-              </a:spcAft>
-            </a:pPr>
-            <a:r>
-              <a:rPr sz="2000" b="1">
-                <a:solidFill>
-                  <a:srgbClr val="105186"/>
-                </a:solidFill>
-                <a:latin typeface="Times New Roman"/>
-                <a:ea typeface="DFKai-SB"/>
-                <a:cs typeface="Times New Roman"/>
-              </a:rPr>
-              <a:t>PBCNN</a:t>
-            </a:r>
-          </a:p>
-        </p:txBody>
-      </p:sp>
-      <p:sp>
-        <p:nvSpPr>
-          <p:cNvPr id="45" name="TextBox 44"/>
-          <p:cNvSpPr txBox="1"/>
-          <p:nvPr>
-            <p:custDataLst>
-              <p:tags r:id="rId22"/>
-            </p:custDataLst>
-          </p:nvPr>
-        </p:nvSpPr>
-        <p:spPr>
-          <a:xfrm>
-            <a:off x="4297775" y="6558480"/>
-            <a:ext cx="2808000" cy="263160"/>
-          </a:xfrm>
-          <a:prstGeom prst="rect">
-            <a:avLst/>
-          </a:prstGeom>
-          <a:noFill/>
-        </p:spPr>
-        <p:txBody>
-          <a:bodyPr wrap="none" lIns="0" tIns="0" rIns="0" bIns="0" anchor="ctr">
-            <a:spAutoFit/>
-          </a:bodyPr>
-          <a:lstStyle/>
-          <a:p>
-            <a:pPr algn="ctr">
-              <a:lnSpc>
-                <a:spcPct val="110000"/>
-              </a:lnSpc>
-              <a:spcBef>
-                <a:spcPts val="0"/>
-              </a:spcBef>
-              <a:spcAft>
-                <a:spcPts val="0"/>
-              </a:spcAft>
-            </a:pPr>
-            <a:r>
-              <a:rPr sz="1400" b="0">
-                <a:solidFill>
-                  <a:srgbClr val="53666E"/>
-                </a:solidFill>
-                <a:latin typeface="Times New Roman"/>
-                <a:ea typeface="DFKai-SB"/>
-                <a:cs typeface="Times New Roman"/>
-              </a:rPr>
-              <a:t>短窗位元組模式</a:t>
-            </a:r>
-          </a:p>
-        </p:txBody>
-      </p:sp>
-      <p:cxnSp>
-        <p:nvCxnSpPr>
-          <p:cNvPr id="46" name="Connector 45"/>
-          <p:cNvCxnSpPr/>
-          <p:nvPr/>
-        </p:nvCxnSpPr>
-        <p:spPr>
-          <a:xfrm>
-            <a:off x="7128000" y="5706000"/>
-            <a:ext cx="324000" cy="0"/>
           </a:xfrm>
           <a:prstGeom prst="line">
             <a:avLst/>
@@ -6181,13 +5555,677 @@
       </p:cxnSp>
       <p:cxnSp>
         <p:nvCxnSpPr>
+          <p:cNvPr id="33" name="Connector 32"/>
+          <p:cNvCxnSpPr/>
+          <p:nvPr/>
+        </p:nvCxnSpPr>
+        <p:spPr>
+          <a:xfrm>
+            <a:off x="1152000" y="10656000"/>
+            <a:ext cx="288000" cy="0"/>
+          </a:xfrm>
+          <a:prstGeom prst="line">
+            <a:avLst/>
+          </a:prstGeom>
+          <a:ln w="12700">
+            <a:solidFill>
+              <a:srgbClr val="105186"/>
+            </a:solidFill>
+          </a:ln>
+          <a:effectLst/>
+        </p:spPr>
+        <p:style>
+          <a:lnRef idx="2">
+            <a:schemeClr val="accent1"/>
+          </a:lnRef>
+          <a:fillRef idx="0">
+            <a:schemeClr val="accent1"/>
+          </a:fillRef>
+          <a:effectRef idx="1">
+            <a:schemeClr val="accent1"/>
+          </a:effectRef>
+          <a:fontRef idx="minor">
+            <a:schemeClr val="tx1"/>
+          </a:fontRef>
+        </p:style>
+      </p:cxnSp>
+      <p:sp>
+        <p:nvSpPr>
+          <p:cNvPr id="34" name="Down Arrow 33"/>
+          <p:cNvSpPr/>
+          <p:nvPr/>
+        </p:nvSpPr>
+        <p:spPr>
+          <a:xfrm>
+            <a:off x="9252000" y="11070000"/>
+            <a:ext cx="288000" cy="180000"/>
+          </a:xfrm>
+          <a:prstGeom prst="downArrow">
+            <a:avLst/>
+          </a:prstGeom>
+          <a:solidFill>
+            <a:srgbClr val="105186"/>
+          </a:solidFill>
+          <a:ln>
+            <a:noFill/>
+          </a:ln>
+          <a:effectLst/>
+        </p:spPr>
+        <p:style>
+          <a:lnRef idx="1">
+            <a:schemeClr val="accent1"/>
+          </a:lnRef>
+          <a:fillRef idx="3">
+            <a:schemeClr val="accent1"/>
+          </a:fillRef>
+          <a:effectRef idx="2">
+            <a:schemeClr val="accent1"/>
+          </a:effectRef>
+          <a:fontRef idx="minor">
+            <a:schemeClr val="lt1"/>
+          </a:fontRef>
+        </p:style>
+        <p:txBody>
+          <a:bodyPr rtlCol="0" anchor="ctr"/>
+          <a:lstStyle/>
+          <a:p>
+            <a:pPr algn="ctr"/>
+            <a:endParaRPr>
+              <a:latin typeface="Times New Roman"/>
+              <a:ea typeface="DFKai-SB"/>
+              <a:cs typeface="Times New Roman"/>
+            </a:endParaRPr>
+          </a:p>
+        </p:txBody>
+      </p:sp>
+      <p:sp>
+        <p:nvSpPr>
+          <p:cNvPr id="35" name="Rectangle 34"/>
+          <p:cNvSpPr/>
+          <p:nvPr/>
+        </p:nvSpPr>
+        <p:spPr>
+          <a:xfrm>
+            <a:off x="576000" y="11268000"/>
+            <a:ext cx="13968000" cy="1800000"/>
+          </a:xfrm>
+          <a:prstGeom prst="rect">
+            <a:avLst/>
+          </a:prstGeom>
+          <a:solidFill>
+            <a:srgbClr val="EAF0F4"/>
+          </a:solidFill>
+          <a:ln w="10160">
+            <a:solidFill>
+              <a:srgbClr val="D6DDE0"/>
+            </a:solidFill>
+          </a:ln>
+          <a:effectLst/>
+        </p:spPr>
+        <p:style>
+          <a:lnRef idx="1">
+            <a:schemeClr val="accent1"/>
+          </a:lnRef>
+          <a:fillRef idx="3">
+            <a:schemeClr val="accent1"/>
+          </a:fillRef>
+          <a:effectRef idx="2">
+            <a:schemeClr val="accent1"/>
+          </a:effectRef>
+          <a:fontRef idx="minor">
+            <a:schemeClr val="lt1"/>
+          </a:fontRef>
+        </p:style>
+        <p:txBody>
+          <a:bodyPr rtlCol="0" anchor="ctr"/>
+          <a:lstStyle/>
+          <a:p>
+            <a:pPr algn="ctr"/>
+            <a:endParaRPr>
+              <a:latin typeface="Times New Roman"/>
+              <a:ea typeface="DFKai-SB"/>
+              <a:cs typeface="Times New Roman"/>
+            </a:endParaRPr>
+          </a:p>
+        </p:txBody>
+      </p:sp>
+      <p:sp>
+        <p:nvSpPr>
+          <p:cNvPr id="36" name="Rectangle 35"/>
+          <p:cNvSpPr/>
+          <p:nvPr/>
+        </p:nvSpPr>
+        <p:spPr>
+          <a:xfrm>
+            <a:off x="576000" y="11268000"/>
+            <a:ext cx="54000" cy="1800000"/>
+          </a:xfrm>
+          <a:prstGeom prst="rect">
+            <a:avLst/>
+          </a:prstGeom>
+          <a:solidFill>
+            <a:srgbClr val="105186"/>
+          </a:solidFill>
+          <a:ln>
+            <a:noFill/>
+          </a:ln>
+          <a:effectLst/>
+        </p:spPr>
+        <p:style>
+          <a:lnRef idx="1">
+            <a:schemeClr val="accent1"/>
+          </a:lnRef>
+          <a:fillRef idx="3">
+            <a:schemeClr val="accent1"/>
+          </a:fillRef>
+          <a:effectRef idx="2">
+            <a:schemeClr val="accent1"/>
+          </a:effectRef>
+          <a:fontRef idx="minor">
+            <a:schemeClr val="lt1"/>
+          </a:fontRef>
+        </p:style>
+        <p:txBody>
+          <a:bodyPr rtlCol="0" anchor="ctr"/>
+          <a:lstStyle/>
+          <a:p>
+            <a:pPr algn="ctr"/>
+            <a:endParaRPr>
+              <a:latin typeface="Times New Roman"/>
+              <a:ea typeface="DFKai-SB"/>
+              <a:cs typeface="Times New Roman"/>
+            </a:endParaRPr>
+          </a:p>
+        </p:txBody>
+      </p:sp>
+      <p:sp>
+        <p:nvSpPr>
+          <p:cNvPr id="37" name="TextBox 36"/>
+          <p:cNvSpPr txBox="1"/>
+          <p:nvPr>
+            <p:custDataLst>
+              <p:tags r:id="rId16"/>
+            </p:custDataLst>
+          </p:nvPr>
+        </p:nvSpPr>
+        <p:spPr>
+          <a:xfrm>
+            <a:off x="828000" y="11412000"/>
+            <a:ext cx="360000" cy="288000"/>
+          </a:xfrm>
+          <a:prstGeom prst="rect">
+            <a:avLst/>
+          </a:prstGeom>
+          <a:noFill/>
+        </p:spPr>
+        <p:txBody>
+          <a:bodyPr wrap="none" lIns="0" tIns="0" rIns="0" bIns="0" anchor="ctr">
+            <a:spAutoFit/>
+          </a:bodyPr>
+          <a:lstStyle/>
+          <a:p>
+            <a:pPr algn="l">
+              <a:lnSpc>
+                <a:spcPct val="110000"/>
+              </a:lnSpc>
+              <a:spcBef>
+                <a:spcPts val="0"/>
+              </a:spcBef>
+              <a:spcAft>
+                <a:spcPts val="0"/>
+              </a:spcAft>
+            </a:pPr>
+            <a:r>
+              <a:rPr sz="1600" b="1">
+                <a:solidFill>
+                  <a:srgbClr val="105186"/>
+                </a:solidFill>
+                <a:latin typeface="Times New Roman"/>
+                <a:ea typeface="DFKai-SB"/>
+                <a:cs typeface="Times New Roman"/>
+              </a:rPr>
+              <a:t>04</a:t>
+            </a:r>
+          </a:p>
+        </p:txBody>
+      </p:sp>
+      <p:sp>
+        <p:nvSpPr>
+          <p:cNvPr id="38" name="TextBox 37"/>
+          <p:cNvSpPr txBox="1"/>
+          <p:nvPr>
+            <p:custDataLst>
+              <p:tags r:id="rId17"/>
+            </p:custDataLst>
+          </p:nvPr>
+        </p:nvSpPr>
+        <p:spPr>
+          <a:xfrm>
+            <a:off x="1332000" y="11376000"/>
+            <a:ext cx="2628000" cy="360000"/>
+          </a:xfrm>
+          <a:prstGeom prst="rect">
+            <a:avLst/>
+          </a:prstGeom>
+          <a:noFill/>
+        </p:spPr>
+        <p:txBody>
+          <a:bodyPr wrap="none" lIns="0" tIns="0" rIns="0" bIns="0" anchor="ctr">
+            <a:spAutoFit/>
+          </a:bodyPr>
+          <a:lstStyle/>
+          <a:p>
+            <a:pPr algn="l">
+              <a:lnSpc>
+                <a:spcPct val="110000"/>
+              </a:lnSpc>
+              <a:spcBef>
+                <a:spcPts val="0"/>
+              </a:spcBef>
+              <a:spcAft>
+                <a:spcPts val="0"/>
+              </a:spcAft>
+            </a:pPr>
+            <a:r>
+              <a:rPr sz="2300" b="0">
+                <a:solidFill>
+                  <a:srgbClr val="105186"/>
+                </a:solidFill>
+                <a:latin typeface="Times New Roman"/>
+                <a:ea typeface="DFKai-SB"/>
+                <a:cs typeface="Times New Roman"/>
+              </a:rPr>
+              <a:t>受控回復</a:t>
+            </a:r>
+          </a:p>
+        </p:txBody>
+      </p:sp>
+      <p:sp>
+        <p:nvSpPr>
+          <p:cNvPr id="39" name="TextBox 38"/>
+          <p:cNvSpPr txBox="1"/>
+          <p:nvPr>
+            <p:custDataLst>
+              <p:tags r:id="rId18"/>
+            </p:custDataLst>
+          </p:nvPr>
+        </p:nvSpPr>
+        <p:spPr>
+          <a:xfrm>
+            <a:off x="1332000" y="11772000"/>
+            <a:ext cx="2628000" cy="288000"/>
+          </a:xfrm>
+          <a:prstGeom prst="rect">
+            <a:avLst/>
+          </a:prstGeom>
+          <a:noFill/>
+        </p:spPr>
+        <p:txBody>
+          <a:bodyPr wrap="none" lIns="0" tIns="0" rIns="0" bIns="0" anchor="ctr">
+            <a:spAutoFit/>
+          </a:bodyPr>
+          <a:lstStyle/>
+          <a:p>
+            <a:pPr algn="l">
+              <a:lnSpc>
+                <a:spcPct val="110000"/>
+              </a:lnSpc>
+              <a:spcBef>
+                <a:spcPts val="0"/>
+              </a:spcBef>
+              <a:spcAft>
+                <a:spcPts val="0"/>
+              </a:spcAft>
+            </a:pPr>
+            <a:r>
+              <a:rPr sz="1500" b="0">
+                <a:solidFill>
+                  <a:srgbClr val="53666E"/>
+                </a:solidFill>
+                <a:latin typeface="Times New Roman"/>
+                <a:ea typeface="DFKai-SB"/>
+                <a:cs typeface="Times New Roman"/>
+              </a:rPr>
+              <a:t>策略＋期限</a:t>
+            </a:r>
+          </a:p>
+        </p:txBody>
+      </p:sp>
+      <p:pic>
+        <p:nvPicPr>
+          <p:cNvPr id="40" name="Picture 39" descr="flat-icon-4.png"/>
+          <p:cNvPicPr>
+            <a:picLocks noChangeAspect="1"/>
+          </p:cNvPicPr>
+          <p:nvPr/>
+        </p:nvPicPr>
+        <p:blipFill>
+          <a:blip r:embed="rId79"/>
+          <a:stretch>
+            <a:fillRect/>
+          </a:stretch>
+        </p:blipFill>
+        <p:spPr>
+          <a:xfrm>
+            <a:off x="900000" y="12168000"/>
+            <a:ext cx="756000" cy="756000"/>
+          </a:xfrm>
+          <a:prstGeom prst="rect">
+            <a:avLst/>
+          </a:prstGeom>
+        </p:spPr>
+      </p:pic>
+      <p:sp>
+        <p:nvSpPr>
+          <p:cNvPr id="41" name="Rectangle 40"/>
+          <p:cNvSpPr/>
+          <p:nvPr/>
+        </p:nvSpPr>
+        <p:spPr>
+          <a:xfrm>
+            <a:off x="4320000" y="5400000"/>
+            <a:ext cx="2808000" cy="612000"/>
+          </a:xfrm>
+          <a:prstGeom prst="rect">
+            <a:avLst/>
+          </a:prstGeom>
+          <a:solidFill>
+            <a:srgbClr val="FFFFFF"/>
+          </a:solidFill>
+          <a:ln>
+            <a:noFill/>
+          </a:ln>
+          <a:effectLst/>
+        </p:spPr>
+        <p:style>
+          <a:lnRef idx="1">
+            <a:schemeClr val="accent1"/>
+          </a:lnRef>
+          <a:fillRef idx="3">
+            <a:schemeClr val="accent1"/>
+          </a:fillRef>
+          <a:effectRef idx="2">
+            <a:schemeClr val="accent1"/>
+          </a:effectRef>
+          <a:fontRef idx="minor">
+            <a:schemeClr val="lt1"/>
+          </a:fontRef>
+        </p:style>
+        <p:txBody>
+          <a:bodyPr rtlCol="0" anchor="ctr"/>
+          <a:lstStyle/>
+          <a:p>
+            <a:pPr algn="ctr"/>
+            <a:endParaRPr>
+              <a:latin typeface="Times New Roman"/>
+              <a:ea typeface="DFKai-SB"/>
+              <a:cs typeface="Times New Roman"/>
+            </a:endParaRPr>
+          </a:p>
+        </p:txBody>
+      </p:sp>
+      <p:sp>
+        <p:nvSpPr>
+          <p:cNvPr id="42" name="TextBox 41"/>
+          <p:cNvSpPr txBox="1"/>
+          <p:nvPr>
+            <p:custDataLst>
+              <p:tags r:id="rId19"/>
+            </p:custDataLst>
+          </p:nvPr>
+        </p:nvSpPr>
+        <p:spPr>
+          <a:xfrm>
+            <a:off x="4288250" y="5436000"/>
+            <a:ext cx="2808000" cy="342720"/>
+          </a:xfrm>
+          <a:prstGeom prst="rect">
+            <a:avLst/>
+          </a:prstGeom>
+          <a:noFill/>
+        </p:spPr>
+        <p:txBody>
+          <a:bodyPr wrap="none" lIns="0" tIns="0" rIns="0" bIns="0" anchor="ctr">
+            <a:spAutoFit/>
+          </a:bodyPr>
+          <a:lstStyle/>
+          <a:p>
+            <a:pPr algn="ctr">
+              <a:lnSpc>
+                <a:spcPct val="110000"/>
+              </a:lnSpc>
+              <a:spcBef>
+                <a:spcPts val="0"/>
+              </a:spcBef>
+              <a:spcAft>
+                <a:spcPts val="0"/>
+              </a:spcAft>
+            </a:pPr>
+            <a:r>
+              <a:rPr sz="2000" b="1">
+                <a:solidFill>
+                  <a:srgbClr val="105186"/>
+                </a:solidFill>
+                <a:latin typeface="Times New Roman"/>
+                <a:ea typeface="DFKai-SB"/>
+                <a:cs typeface="Times New Roman"/>
+              </a:rPr>
+              <a:t>CTBM</a:t>
+            </a:r>
+          </a:p>
+        </p:txBody>
+      </p:sp>
+      <p:sp>
+        <p:nvSpPr>
+          <p:cNvPr id="43" name="TextBox 42"/>
+          <p:cNvSpPr txBox="1"/>
+          <p:nvPr>
+            <p:custDataLst>
+              <p:tags r:id="rId20"/>
+            </p:custDataLst>
+          </p:nvPr>
+        </p:nvSpPr>
+        <p:spPr>
+          <a:xfrm>
+            <a:off x="4297775" y="5730480"/>
+            <a:ext cx="2808000" cy="263160"/>
+          </a:xfrm>
+          <a:prstGeom prst="rect">
+            <a:avLst/>
+          </a:prstGeom>
+          <a:noFill/>
+        </p:spPr>
+        <p:txBody>
+          <a:bodyPr wrap="none" lIns="0" tIns="0" rIns="0" bIns="0" anchor="ctr">
+            <a:spAutoFit/>
+          </a:bodyPr>
+          <a:lstStyle/>
+          <a:p>
+            <a:pPr algn="ctr">
+              <a:lnSpc>
+                <a:spcPct val="110000"/>
+              </a:lnSpc>
+              <a:spcBef>
+                <a:spcPts val="0"/>
+              </a:spcBef>
+              <a:spcAft>
+                <a:spcPts val="0"/>
+              </a:spcAft>
+            </a:pPr>
+            <a:r>
+              <a:rPr sz="1400" b="0">
+                <a:solidFill>
+                  <a:srgbClr val="53666E"/>
+                </a:solidFill>
+                <a:latin typeface="Times New Roman"/>
+                <a:ea typeface="DFKai-SB"/>
+                <a:cs typeface="Times New Roman"/>
+              </a:rPr>
+              <a:t>內容·時間差·方向</a:t>
+            </a:r>
+          </a:p>
+        </p:txBody>
+      </p:sp>
+      <p:sp>
+        <p:nvSpPr>
+          <p:cNvPr id="44" name="Rectangle 43"/>
+          <p:cNvSpPr/>
+          <p:nvPr/>
+        </p:nvSpPr>
+        <p:spPr>
+          <a:xfrm>
+            <a:off x="4320000" y="6228000"/>
+            <a:ext cx="2808000" cy="612000"/>
+          </a:xfrm>
+          <a:prstGeom prst="rect">
+            <a:avLst/>
+          </a:prstGeom>
+          <a:solidFill>
+            <a:srgbClr val="FFFFFF"/>
+          </a:solidFill>
+          <a:ln>
+            <a:noFill/>
+          </a:ln>
+          <a:effectLst/>
+        </p:spPr>
+        <p:style>
+          <a:lnRef idx="1">
+            <a:schemeClr val="accent1"/>
+          </a:lnRef>
+          <a:fillRef idx="3">
+            <a:schemeClr val="accent1"/>
+          </a:fillRef>
+          <a:effectRef idx="2">
+            <a:schemeClr val="accent1"/>
+          </a:effectRef>
+          <a:fontRef idx="minor">
+            <a:schemeClr val="lt1"/>
+          </a:fontRef>
+        </p:style>
+        <p:txBody>
+          <a:bodyPr rtlCol="0" anchor="ctr"/>
+          <a:lstStyle/>
+          <a:p>
+            <a:pPr algn="ctr"/>
+            <a:endParaRPr>
+              <a:latin typeface="Times New Roman"/>
+              <a:ea typeface="DFKai-SB"/>
+              <a:cs typeface="Times New Roman"/>
+            </a:endParaRPr>
+          </a:p>
+        </p:txBody>
+      </p:sp>
+      <p:sp>
+        <p:nvSpPr>
+          <p:cNvPr id="45" name="TextBox 44"/>
+          <p:cNvSpPr txBox="1"/>
+          <p:nvPr>
+            <p:custDataLst>
+              <p:tags r:id="rId21"/>
+            </p:custDataLst>
+          </p:nvPr>
+        </p:nvSpPr>
+        <p:spPr>
+          <a:xfrm>
+            <a:off x="4288250" y="6264000"/>
+            <a:ext cx="2808000" cy="342720"/>
+          </a:xfrm>
+          <a:prstGeom prst="rect">
+            <a:avLst/>
+          </a:prstGeom>
+          <a:noFill/>
+        </p:spPr>
+        <p:txBody>
+          <a:bodyPr wrap="none" lIns="0" tIns="0" rIns="0" bIns="0" anchor="ctr">
+            <a:spAutoFit/>
+          </a:bodyPr>
+          <a:lstStyle/>
+          <a:p>
+            <a:pPr algn="ctr">
+              <a:lnSpc>
+                <a:spcPct val="110000"/>
+              </a:lnSpc>
+              <a:spcBef>
+                <a:spcPts val="0"/>
+              </a:spcBef>
+              <a:spcAft>
+                <a:spcPts val="0"/>
+              </a:spcAft>
+            </a:pPr>
+            <a:r>
+              <a:rPr sz="2000" b="1">
+                <a:solidFill>
+                  <a:srgbClr val="105186"/>
+                </a:solidFill>
+                <a:latin typeface="Times New Roman"/>
+                <a:ea typeface="DFKai-SB"/>
+                <a:cs typeface="Times New Roman"/>
+              </a:rPr>
+              <a:t>PBCNN</a:t>
+            </a:r>
+          </a:p>
+        </p:txBody>
+      </p:sp>
+      <p:sp>
+        <p:nvSpPr>
+          <p:cNvPr id="46" name="TextBox 45"/>
+          <p:cNvSpPr txBox="1"/>
+          <p:nvPr>
+            <p:custDataLst>
+              <p:tags r:id="rId22"/>
+            </p:custDataLst>
+          </p:nvPr>
+        </p:nvSpPr>
+        <p:spPr>
+          <a:xfrm>
+            <a:off x="4297775" y="6558480"/>
+            <a:ext cx="2808000" cy="263160"/>
+          </a:xfrm>
+          <a:prstGeom prst="rect">
+            <a:avLst/>
+          </a:prstGeom>
+          <a:noFill/>
+        </p:spPr>
+        <p:txBody>
+          <a:bodyPr wrap="none" lIns="0" tIns="0" rIns="0" bIns="0" anchor="ctr">
+            <a:spAutoFit/>
+          </a:bodyPr>
+          <a:lstStyle/>
+          <a:p>
+            <a:pPr algn="ctr">
+              <a:lnSpc>
+                <a:spcPct val="110000"/>
+              </a:lnSpc>
+              <a:spcBef>
+                <a:spcPts val="0"/>
+              </a:spcBef>
+              <a:spcAft>
+                <a:spcPts val="0"/>
+              </a:spcAft>
+            </a:pPr>
+            <a:r>
+              <a:rPr sz="1400" b="0">
+                <a:solidFill>
+                  <a:srgbClr val="53666E"/>
+                </a:solidFill>
+                <a:latin typeface="Times New Roman"/>
+                <a:ea typeface="DFKai-SB"/>
+                <a:cs typeface="Times New Roman"/>
+              </a:rPr>
+              <a:t>短窗位元組模式</a:t>
+            </a:r>
+          </a:p>
+        </p:txBody>
+      </p:sp>
+      <p:cxnSp>
+        <p:nvCxnSpPr>
           <p:cNvPr id="47" name="Connector 46"/>
           <p:cNvCxnSpPr/>
           <p:nvPr/>
         </p:nvCxnSpPr>
         <p:spPr>
           <a:xfrm>
-            <a:off x="7128000" y="6534000"/>
+            <a:off x="7128000" y="5706000"/>
             <a:ext cx="324000" cy="0"/>
           </a:xfrm>
           <a:prstGeom prst="line">
@@ -6223,643 +6261,7 @@
         </p:nvCxnSpPr>
         <p:spPr>
           <a:xfrm>
-            <a:off x="7452000" y="5706000"/>
-            <a:ext cx="0" cy="828000"/>
-          </a:xfrm>
-          <a:prstGeom prst="line">
-            <a:avLst/>
-          </a:prstGeom>
-          <a:ln w="12700">
-            <a:solidFill>
-              <a:srgbClr val="105186"/>
-            </a:solidFill>
-          </a:ln>
-          <a:effectLst/>
-        </p:spPr>
-        <p:style>
-          <a:lnRef idx="2">
-            <a:schemeClr val="accent1"/>
-          </a:lnRef>
-          <a:fillRef idx="0">
-            <a:schemeClr val="accent1"/>
-          </a:fillRef>
-          <a:effectRef idx="1">
-            <a:schemeClr val="accent1"/>
-          </a:effectRef>
-          <a:fontRef idx="minor">
-            <a:schemeClr val="tx1"/>
-          </a:fontRef>
-        </p:style>
-      </p:cxnSp>
-      <p:sp>
-        <p:nvSpPr>
-          <p:cNvPr id="49" name="Right Arrow 48"/>
-          <p:cNvSpPr/>
-          <p:nvPr/>
-        </p:nvSpPr>
-        <p:spPr>
-          <a:xfrm>
-            <a:off x="7488000" y="6012000"/>
-            <a:ext cx="288000" cy="216000"/>
-          </a:xfrm>
-          <a:prstGeom prst="rightArrow">
-            <a:avLst/>
-          </a:prstGeom>
-          <a:solidFill>
-            <a:srgbClr val="105186"/>
-          </a:solidFill>
-          <a:ln>
-            <a:noFill/>
-          </a:ln>
-          <a:effectLst/>
-        </p:spPr>
-        <p:style>
-          <a:lnRef idx="1">
-            <a:schemeClr val="accent1"/>
-          </a:lnRef>
-          <a:fillRef idx="3">
-            <a:schemeClr val="accent1"/>
-          </a:fillRef>
-          <a:effectRef idx="2">
-            <a:schemeClr val="accent1"/>
-          </a:effectRef>
-          <a:fontRef idx="minor">
-            <a:schemeClr val="lt1"/>
-          </a:fontRef>
-        </p:style>
-        <p:txBody>
-          <a:bodyPr rtlCol="0" anchor="ctr"/>
-          <a:lstStyle/>
-          <a:p>
-            <a:pPr algn="ctr"/>
-            <a:endParaRPr>
-              <a:latin typeface="Times New Roman"/>
-              <a:ea typeface="DFKai-SB"/>
-              <a:cs typeface="Times New Roman"/>
-            </a:endParaRPr>
-          </a:p>
-        </p:txBody>
-      </p:sp>
-      <p:sp>
-        <p:nvSpPr>
-          <p:cNvPr id="50" name="Rectangle 49"/>
-          <p:cNvSpPr/>
-          <p:nvPr/>
-        </p:nvSpPr>
-        <p:spPr>
-          <a:xfrm>
-            <a:off x="7848000" y="5688000"/>
-            <a:ext cx="3060000" cy="900000"/>
-          </a:xfrm>
-          <a:prstGeom prst="rect">
-            <a:avLst/>
-          </a:prstGeom>
-          <a:solidFill>
-            <a:srgbClr val="FFFFFF"/>
-          </a:solidFill>
-          <a:ln>
-            <a:noFill/>
-          </a:ln>
-          <a:effectLst/>
-        </p:spPr>
-        <p:style>
-          <a:lnRef idx="1">
-            <a:schemeClr val="accent1"/>
-          </a:lnRef>
-          <a:fillRef idx="3">
-            <a:schemeClr val="accent1"/>
-          </a:fillRef>
-          <a:effectRef idx="2">
-            <a:schemeClr val="accent1"/>
-          </a:effectRef>
-          <a:fontRef idx="minor">
-            <a:schemeClr val="lt1"/>
-          </a:fontRef>
-        </p:style>
-        <p:txBody>
-          <a:bodyPr rtlCol="0" anchor="ctr"/>
-          <a:lstStyle/>
-          <a:p>
-            <a:pPr algn="ctr"/>
-            <a:endParaRPr>
-              <a:latin typeface="Times New Roman"/>
-              <a:ea typeface="DFKai-SB"/>
-              <a:cs typeface="Times New Roman"/>
-            </a:endParaRPr>
-          </a:p>
-        </p:txBody>
-      </p:sp>
-      <p:sp>
-        <p:nvSpPr>
-          <p:cNvPr id="51" name="TextBox 50"/>
-          <p:cNvSpPr txBox="1"/>
-          <p:nvPr>
-            <p:custDataLst>
-              <p:tags r:id="rId23"/>
-            </p:custDataLst>
-          </p:nvPr>
-        </p:nvSpPr>
-        <p:spPr>
-          <a:xfrm>
-            <a:off x="7816250" y="5724000"/>
-            <a:ext cx="3060000" cy="504000"/>
-          </a:xfrm>
-          <a:prstGeom prst="rect">
-            <a:avLst/>
-          </a:prstGeom>
-          <a:noFill/>
-        </p:spPr>
-        <p:txBody>
-          <a:bodyPr wrap="none" lIns="0" tIns="0" rIns="0" bIns="0" anchor="ctr">
-            <a:spAutoFit/>
-          </a:bodyPr>
-          <a:lstStyle/>
-          <a:p>
-            <a:pPr algn="ctr">
-              <a:lnSpc>
-                <a:spcPct val="110000"/>
-              </a:lnSpc>
-              <a:spcBef>
-                <a:spcPts val="0"/>
-              </a:spcBef>
-              <a:spcAft>
-                <a:spcPts val="0"/>
-              </a:spcAft>
-            </a:pPr>
-            <a:r>
-              <a:rPr sz="2000" b="1">
-                <a:solidFill>
-                  <a:srgbClr val="105186"/>
-                </a:solidFill>
-                <a:latin typeface="Times New Roman"/>
-                <a:ea typeface="DFKai-SB"/>
-                <a:cs typeface="Times New Roman"/>
-              </a:rPr>
-              <a:t>校準＋融合</a:t>
-            </a:r>
-          </a:p>
-        </p:txBody>
-      </p:sp>
-      <p:sp>
-        <p:nvSpPr>
-          <p:cNvPr id="52" name="TextBox 51"/>
-          <p:cNvSpPr txBox="1"/>
-          <p:nvPr>
-            <p:custDataLst>
-              <p:tags r:id="rId24"/>
-            </p:custDataLst>
-          </p:nvPr>
-        </p:nvSpPr>
-        <p:spPr>
-          <a:xfrm>
-            <a:off x="7825775" y="6174000"/>
-            <a:ext cx="3060000" cy="387000"/>
-          </a:xfrm>
-          <a:prstGeom prst="rect">
-            <a:avLst/>
-          </a:prstGeom>
-          <a:noFill/>
-        </p:spPr>
-        <p:txBody>
-          <a:bodyPr wrap="none" lIns="0" tIns="0" rIns="0" bIns="0" anchor="ctr">
-            <a:spAutoFit/>
-          </a:bodyPr>
-          <a:lstStyle/>
-          <a:p>
-            <a:pPr algn="ctr">
-              <a:lnSpc>
-                <a:spcPct val="110000"/>
-              </a:lnSpc>
-              <a:spcBef>
-                <a:spcPts val="0"/>
-              </a:spcBef>
-              <a:spcAft>
-                <a:spcPts val="0"/>
-              </a:spcAft>
-            </a:pPr>
-            <a:r>
-              <a:rPr sz="1400" b="0">
-                <a:solidFill>
-                  <a:srgbClr val="53666E"/>
-                </a:solidFill>
-                <a:latin typeface="Times New Roman"/>
-                <a:ea typeface="DFKai-SB"/>
-                <a:cs typeface="Times New Roman"/>
-              </a:rPr>
-              <a:t>OOF Gate</a:t>
-            </a:r>
-          </a:p>
-        </p:txBody>
-      </p:sp>
-      <p:sp>
-        <p:nvSpPr>
-          <p:cNvPr id="53" name="Right Arrow 52"/>
-          <p:cNvSpPr/>
-          <p:nvPr/>
-        </p:nvSpPr>
-        <p:spPr>
-          <a:xfrm>
-            <a:off x="10980000" y="6012000"/>
-            <a:ext cx="504000" cy="216000"/>
-          </a:xfrm>
-          <a:prstGeom prst="rightArrow">
-            <a:avLst/>
-          </a:prstGeom>
-          <a:solidFill>
-            <a:srgbClr val="105186"/>
-          </a:solidFill>
-          <a:ln>
-            <a:noFill/>
-          </a:ln>
-          <a:effectLst/>
-        </p:spPr>
-        <p:style>
-          <a:lnRef idx="1">
-            <a:schemeClr val="accent1"/>
-          </a:lnRef>
-          <a:fillRef idx="3">
-            <a:schemeClr val="accent1"/>
-          </a:fillRef>
-          <a:effectRef idx="2">
-            <a:schemeClr val="accent1"/>
-          </a:effectRef>
-          <a:fontRef idx="minor">
-            <a:schemeClr val="lt1"/>
-          </a:fontRef>
-        </p:style>
-        <p:txBody>
-          <a:bodyPr rtlCol="0" anchor="ctr"/>
-          <a:lstStyle/>
-          <a:p>
-            <a:pPr algn="ctr"/>
-            <a:endParaRPr>
-              <a:latin typeface="Times New Roman"/>
-              <a:ea typeface="DFKai-SB"/>
-              <a:cs typeface="Times New Roman"/>
-            </a:endParaRPr>
-          </a:p>
-        </p:txBody>
-      </p:sp>
-      <p:sp>
-        <p:nvSpPr>
-          <p:cNvPr id="54" name="Rectangle 53"/>
-          <p:cNvSpPr/>
-          <p:nvPr/>
-        </p:nvSpPr>
-        <p:spPr>
-          <a:xfrm>
-            <a:off x="11592000" y="5688000"/>
-            <a:ext cx="2736000" cy="900000"/>
-          </a:xfrm>
-          <a:prstGeom prst="rect">
-            <a:avLst/>
-          </a:prstGeom>
-          <a:solidFill>
-            <a:srgbClr val="FFFFFF"/>
-          </a:solidFill>
-          <a:ln>
-            <a:noFill/>
-          </a:ln>
-          <a:effectLst/>
-        </p:spPr>
-        <p:style>
-          <a:lnRef idx="1">
-            <a:schemeClr val="accent1"/>
-          </a:lnRef>
-          <a:fillRef idx="3">
-            <a:schemeClr val="accent1"/>
-          </a:fillRef>
-          <a:effectRef idx="2">
-            <a:schemeClr val="accent1"/>
-          </a:effectRef>
-          <a:fontRef idx="minor">
-            <a:schemeClr val="lt1"/>
-          </a:fontRef>
-        </p:style>
-        <p:txBody>
-          <a:bodyPr rtlCol="0" anchor="ctr"/>
-          <a:lstStyle/>
-          <a:p>
-            <a:pPr algn="ctr"/>
-            <a:endParaRPr>
-              <a:latin typeface="Times New Roman"/>
-              <a:ea typeface="DFKai-SB"/>
-              <a:cs typeface="Times New Roman"/>
-            </a:endParaRPr>
-          </a:p>
-        </p:txBody>
-      </p:sp>
-      <p:sp>
-        <p:nvSpPr>
-          <p:cNvPr id="55" name="TextBox 54"/>
-          <p:cNvSpPr txBox="1"/>
-          <p:nvPr>
-            <p:custDataLst>
-              <p:tags r:id="rId25"/>
-            </p:custDataLst>
-          </p:nvPr>
-        </p:nvSpPr>
-        <p:spPr>
-          <a:xfrm>
-            <a:off x="11560251" y="5724000"/>
-            <a:ext cx="2736000" cy="504000"/>
-          </a:xfrm>
-          <a:prstGeom prst="rect">
-            <a:avLst/>
-          </a:prstGeom>
-          <a:noFill/>
-        </p:spPr>
-        <p:txBody>
-          <a:bodyPr wrap="none" lIns="0" tIns="0" rIns="0" bIns="0" anchor="ctr">
-            <a:spAutoFit/>
-          </a:bodyPr>
-          <a:lstStyle/>
-          <a:p>
-            <a:pPr algn="ctr">
-              <a:lnSpc>
-                <a:spcPct val="110000"/>
-              </a:lnSpc>
-              <a:spcBef>
-                <a:spcPts val="0"/>
-              </a:spcBef>
-              <a:spcAft>
-                <a:spcPts val="0"/>
-              </a:spcAft>
-            </a:pPr>
-            <a:r>
-              <a:rPr sz="2000" b="1">
-                <a:solidFill>
-                  <a:srgbClr val="105186"/>
-                </a:solidFill>
-                <a:latin typeface="Times New Roman"/>
-                <a:ea typeface="DFKai-SB"/>
-                <a:cs typeface="Times New Roman"/>
-              </a:rPr>
-              <a:t>17類判定</a:t>
-            </a:r>
-          </a:p>
-        </p:txBody>
-      </p:sp>
-      <p:sp>
-        <p:nvSpPr>
-          <p:cNvPr id="56" name="TextBox 55"/>
-          <p:cNvSpPr txBox="1"/>
-          <p:nvPr>
-            <p:custDataLst>
-              <p:tags r:id="rId26"/>
-            </p:custDataLst>
-          </p:nvPr>
-        </p:nvSpPr>
-        <p:spPr>
-          <a:xfrm>
-            <a:off x="11569776" y="6174000"/>
-            <a:ext cx="2736000" cy="387000"/>
-          </a:xfrm>
-          <a:prstGeom prst="rect">
-            <a:avLst/>
-          </a:prstGeom>
-          <a:noFill/>
-        </p:spPr>
-        <p:txBody>
-          <a:bodyPr wrap="none" lIns="0" tIns="0" rIns="0" bIns="0" anchor="ctr">
-            <a:spAutoFit/>
-          </a:bodyPr>
-          <a:lstStyle/>
-          <a:p>
-            <a:pPr algn="ctr">
-              <a:lnSpc>
-                <a:spcPct val="110000"/>
-              </a:lnSpc>
-              <a:spcBef>
-                <a:spcPts val="0"/>
-              </a:spcBef>
-              <a:spcAft>
-                <a:spcPts val="0"/>
-              </a:spcAft>
-            </a:pPr>
-            <a:r>
-              <a:rPr sz="1400" b="0">
-                <a:solidFill>
-                  <a:srgbClr val="53666E"/>
-                </a:solidFill>
-                <a:latin typeface="Times New Roman"/>
-                <a:ea typeface="DFKai-SB"/>
-                <a:cs typeface="Times New Roman"/>
-              </a:rPr>
-              <a:t>信心與512維表徵</a:t>
-            </a:r>
-          </a:p>
-        </p:txBody>
-      </p:sp>
-      <p:sp>
-        <p:nvSpPr>
-          <p:cNvPr id="57" name="Rectangle 56"/>
-          <p:cNvSpPr/>
-          <p:nvPr/>
-        </p:nvSpPr>
-        <p:spPr>
-          <a:xfrm>
-            <a:off x="4320000" y="7416000"/>
-            <a:ext cx="2808000" cy="612000"/>
-          </a:xfrm>
-          <a:prstGeom prst="rect">
-            <a:avLst/>
-          </a:prstGeom>
-          <a:solidFill>
-            <a:srgbClr val="FFFFFF"/>
-          </a:solidFill>
-          <a:ln>
-            <a:noFill/>
-          </a:ln>
-          <a:effectLst/>
-        </p:spPr>
-        <p:style>
-          <a:lnRef idx="1">
-            <a:schemeClr val="accent1"/>
-          </a:lnRef>
-          <a:fillRef idx="3">
-            <a:schemeClr val="accent1"/>
-          </a:fillRef>
-          <a:effectRef idx="2">
-            <a:schemeClr val="accent1"/>
-          </a:effectRef>
-          <a:fontRef idx="minor">
-            <a:schemeClr val="lt1"/>
-          </a:fontRef>
-        </p:style>
-        <p:txBody>
-          <a:bodyPr rtlCol="0" anchor="ctr"/>
-          <a:lstStyle/>
-          <a:p>
-            <a:pPr algn="ctr"/>
-            <a:endParaRPr>
-              <a:latin typeface="Times New Roman"/>
-              <a:ea typeface="DFKai-SB"/>
-              <a:cs typeface="Times New Roman"/>
-            </a:endParaRPr>
-          </a:p>
-        </p:txBody>
-      </p:sp>
-      <p:sp>
-        <p:nvSpPr>
-          <p:cNvPr id="58" name="TextBox 57"/>
-          <p:cNvSpPr txBox="1"/>
-          <p:nvPr>
-            <p:custDataLst>
-              <p:tags r:id="rId27"/>
-            </p:custDataLst>
-          </p:nvPr>
-        </p:nvSpPr>
-        <p:spPr>
-          <a:xfrm>
-            <a:off x="4288250" y="7416000"/>
-            <a:ext cx="2808000" cy="612000"/>
-          </a:xfrm>
-          <a:prstGeom prst="rect">
-            <a:avLst/>
-          </a:prstGeom>
-          <a:noFill/>
-        </p:spPr>
-        <p:txBody>
-          <a:bodyPr wrap="none" lIns="0" tIns="0" rIns="0" bIns="0" anchor="ctr">
-            <a:spAutoFit/>
-          </a:bodyPr>
-          <a:lstStyle/>
-          <a:p>
-            <a:pPr algn="ctr">
-              <a:lnSpc>
-                <a:spcPct val="110000"/>
-              </a:lnSpc>
-              <a:spcBef>
-                <a:spcPts val="0"/>
-              </a:spcBef>
-              <a:spcAft>
-                <a:spcPts val="0"/>
-              </a:spcAft>
-            </a:pPr>
-            <a:r>
-              <a:rPr sz="2000" b="1">
-                <a:solidFill>
-                  <a:srgbClr val="105186"/>
-                </a:solidFill>
-                <a:latin typeface="Times New Roman"/>
-                <a:ea typeface="DFKai-SB"/>
-                <a:cs typeface="Times New Roman"/>
-              </a:rPr>
-              <a:t>512維表徵</a:t>
-            </a:r>
-          </a:p>
-        </p:txBody>
-      </p:sp>
-      <p:sp>
-        <p:nvSpPr>
-          <p:cNvPr id="59" name="Rectangle 58"/>
-          <p:cNvSpPr/>
-          <p:nvPr/>
-        </p:nvSpPr>
-        <p:spPr>
-          <a:xfrm>
-            <a:off x="4320000" y="8244000"/>
-            <a:ext cx="2808000" cy="612000"/>
-          </a:xfrm>
-          <a:prstGeom prst="rect">
-            <a:avLst/>
-          </a:prstGeom>
-          <a:solidFill>
-            <a:srgbClr val="FFFFFF"/>
-          </a:solidFill>
-          <a:ln>
-            <a:noFill/>
-          </a:ln>
-          <a:effectLst/>
-        </p:spPr>
-        <p:style>
-          <a:lnRef idx="1">
-            <a:schemeClr val="accent1"/>
-          </a:lnRef>
-          <a:fillRef idx="3">
-            <a:schemeClr val="accent1"/>
-          </a:fillRef>
-          <a:effectRef idx="2">
-            <a:schemeClr val="accent1"/>
-          </a:effectRef>
-          <a:fontRef idx="minor">
-            <a:schemeClr val="lt1"/>
-          </a:fontRef>
-        </p:style>
-        <p:txBody>
-          <a:bodyPr rtlCol="0" anchor="ctr"/>
-          <a:lstStyle/>
-          <a:p>
-            <a:pPr algn="ctr"/>
-            <a:endParaRPr>
-              <a:latin typeface="Times New Roman"/>
-              <a:ea typeface="DFKai-SB"/>
-              <a:cs typeface="Times New Roman"/>
-            </a:endParaRPr>
-          </a:p>
-        </p:txBody>
-      </p:sp>
-      <p:sp>
-        <p:nvSpPr>
-          <p:cNvPr id="60" name="TextBox 59"/>
-          <p:cNvSpPr txBox="1"/>
-          <p:nvPr>
-            <p:custDataLst>
-              <p:tags r:id="rId28"/>
-            </p:custDataLst>
-          </p:nvPr>
-        </p:nvSpPr>
-        <p:spPr>
-          <a:xfrm>
-            <a:off x="4288250" y="8244000"/>
-            <a:ext cx="2808000" cy="612000"/>
-          </a:xfrm>
-          <a:prstGeom prst="rect">
-            <a:avLst/>
-          </a:prstGeom>
-          <a:noFill/>
-        </p:spPr>
-        <p:txBody>
-          <a:bodyPr wrap="none" lIns="0" tIns="0" rIns="0" bIns="0" anchor="ctr">
-            <a:spAutoFit/>
-          </a:bodyPr>
-          <a:lstStyle/>
-          <a:p>
-            <a:pPr algn="ctr">
-              <a:lnSpc>
-                <a:spcPct val="110000"/>
-              </a:lnSpc>
-              <a:spcBef>
-                <a:spcPts val="0"/>
-              </a:spcBef>
-              <a:spcAft>
-                <a:spcPts val="0"/>
-              </a:spcAft>
-            </a:pPr>
-            <a:r>
-              <a:rPr sz="2000" b="1">
-                <a:solidFill>
-                  <a:srgbClr val="105186"/>
-                </a:solidFill>
-                <a:latin typeface="Times New Roman"/>
-                <a:ea typeface="DFKai-SB"/>
-                <a:cs typeface="Times New Roman"/>
-              </a:rPr>
-              <a:t>17維機率</a:t>
-            </a:r>
-          </a:p>
-        </p:txBody>
-      </p:sp>
-      <p:cxnSp>
-        <p:nvCxnSpPr>
-          <p:cNvPr id="61" name="Connector 60"/>
-          <p:cNvCxnSpPr/>
-          <p:nvPr/>
-        </p:nvCxnSpPr>
-        <p:spPr>
-          <a:xfrm>
-            <a:off x="7128000" y="7722000"/>
+            <a:off x="7128000" y="6534000"/>
             <a:ext cx="324000" cy="0"/>
           </a:xfrm>
           <a:prstGeom prst="line">
@@ -6889,13 +6291,649 @@
       </p:cxnSp>
       <p:cxnSp>
         <p:nvCxnSpPr>
+          <p:cNvPr id="49" name="Connector 48"/>
+          <p:cNvCxnSpPr/>
+          <p:nvPr/>
+        </p:nvCxnSpPr>
+        <p:spPr>
+          <a:xfrm>
+            <a:off x="7452000" y="5706000"/>
+            <a:ext cx="0" cy="828000"/>
+          </a:xfrm>
+          <a:prstGeom prst="line">
+            <a:avLst/>
+          </a:prstGeom>
+          <a:ln w="12700">
+            <a:solidFill>
+              <a:srgbClr val="105186"/>
+            </a:solidFill>
+          </a:ln>
+          <a:effectLst/>
+        </p:spPr>
+        <p:style>
+          <a:lnRef idx="2">
+            <a:schemeClr val="accent1"/>
+          </a:lnRef>
+          <a:fillRef idx="0">
+            <a:schemeClr val="accent1"/>
+          </a:fillRef>
+          <a:effectRef idx="1">
+            <a:schemeClr val="accent1"/>
+          </a:effectRef>
+          <a:fontRef idx="minor">
+            <a:schemeClr val="tx1"/>
+          </a:fontRef>
+        </p:style>
+      </p:cxnSp>
+      <p:sp>
+        <p:nvSpPr>
+          <p:cNvPr id="50" name="Right Arrow 49"/>
+          <p:cNvSpPr/>
+          <p:nvPr/>
+        </p:nvSpPr>
+        <p:spPr>
+          <a:xfrm>
+            <a:off x="7488000" y="6012000"/>
+            <a:ext cx="288000" cy="216000"/>
+          </a:xfrm>
+          <a:prstGeom prst="rightArrow">
+            <a:avLst/>
+          </a:prstGeom>
+          <a:solidFill>
+            <a:srgbClr val="105186"/>
+          </a:solidFill>
+          <a:ln>
+            <a:noFill/>
+          </a:ln>
+          <a:effectLst/>
+        </p:spPr>
+        <p:style>
+          <a:lnRef idx="1">
+            <a:schemeClr val="accent1"/>
+          </a:lnRef>
+          <a:fillRef idx="3">
+            <a:schemeClr val="accent1"/>
+          </a:fillRef>
+          <a:effectRef idx="2">
+            <a:schemeClr val="accent1"/>
+          </a:effectRef>
+          <a:fontRef idx="minor">
+            <a:schemeClr val="lt1"/>
+          </a:fontRef>
+        </p:style>
+        <p:txBody>
+          <a:bodyPr rtlCol="0" anchor="ctr"/>
+          <a:lstStyle/>
+          <a:p>
+            <a:pPr algn="ctr"/>
+            <a:endParaRPr>
+              <a:latin typeface="Times New Roman"/>
+              <a:ea typeface="DFKai-SB"/>
+              <a:cs typeface="Times New Roman"/>
+            </a:endParaRPr>
+          </a:p>
+        </p:txBody>
+      </p:sp>
+      <p:sp>
+        <p:nvSpPr>
+          <p:cNvPr id="51" name="Rectangle 50"/>
+          <p:cNvSpPr/>
+          <p:nvPr/>
+        </p:nvSpPr>
+        <p:spPr>
+          <a:xfrm>
+            <a:off x="7848000" y="5688000"/>
+            <a:ext cx="3060000" cy="900000"/>
+          </a:xfrm>
+          <a:prstGeom prst="rect">
+            <a:avLst/>
+          </a:prstGeom>
+          <a:solidFill>
+            <a:srgbClr val="FFFFFF"/>
+          </a:solidFill>
+          <a:ln>
+            <a:noFill/>
+          </a:ln>
+          <a:effectLst/>
+        </p:spPr>
+        <p:style>
+          <a:lnRef idx="1">
+            <a:schemeClr val="accent1"/>
+          </a:lnRef>
+          <a:fillRef idx="3">
+            <a:schemeClr val="accent1"/>
+          </a:fillRef>
+          <a:effectRef idx="2">
+            <a:schemeClr val="accent1"/>
+          </a:effectRef>
+          <a:fontRef idx="minor">
+            <a:schemeClr val="lt1"/>
+          </a:fontRef>
+        </p:style>
+        <p:txBody>
+          <a:bodyPr rtlCol="0" anchor="ctr"/>
+          <a:lstStyle/>
+          <a:p>
+            <a:pPr algn="ctr"/>
+            <a:endParaRPr>
+              <a:latin typeface="Times New Roman"/>
+              <a:ea typeface="DFKai-SB"/>
+              <a:cs typeface="Times New Roman"/>
+            </a:endParaRPr>
+          </a:p>
+        </p:txBody>
+      </p:sp>
+      <p:sp>
+        <p:nvSpPr>
+          <p:cNvPr id="52" name="TextBox 51"/>
+          <p:cNvSpPr txBox="1"/>
+          <p:nvPr>
+            <p:custDataLst>
+              <p:tags r:id="rId23"/>
+            </p:custDataLst>
+          </p:nvPr>
+        </p:nvSpPr>
+        <p:spPr>
+          <a:xfrm>
+            <a:off x="7816250" y="5724000"/>
+            <a:ext cx="3060000" cy="504000"/>
+          </a:xfrm>
+          <a:prstGeom prst="rect">
+            <a:avLst/>
+          </a:prstGeom>
+          <a:noFill/>
+        </p:spPr>
+        <p:txBody>
+          <a:bodyPr wrap="none" lIns="0" tIns="0" rIns="0" bIns="0" anchor="ctr">
+            <a:spAutoFit/>
+          </a:bodyPr>
+          <a:lstStyle/>
+          <a:p>
+            <a:pPr algn="ctr">
+              <a:lnSpc>
+                <a:spcPct val="110000"/>
+              </a:lnSpc>
+              <a:spcBef>
+                <a:spcPts val="0"/>
+              </a:spcBef>
+              <a:spcAft>
+                <a:spcPts val="0"/>
+              </a:spcAft>
+            </a:pPr>
+            <a:r>
+              <a:rPr sz="2000" b="1">
+                <a:solidFill>
+                  <a:srgbClr val="105186"/>
+                </a:solidFill>
+                <a:latin typeface="Times New Roman"/>
+                <a:ea typeface="DFKai-SB"/>
+                <a:cs typeface="Times New Roman"/>
+              </a:rPr>
+              <a:t>校準＋融合</a:t>
+            </a:r>
+          </a:p>
+        </p:txBody>
+      </p:sp>
+      <p:sp>
+        <p:nvSpPr>
+          <p:cNvPr id="53" name="TextBox 52"/>
+          <p:cNvSpPr txBox="1"/>
+          <p:nvPr>
+            <p:custDataLst>
+              <p:tags r:id="rId24"/>
+            </p:custDataLst>
+          </p:nvPr>
+        </p:nvSpPr>
+        <p:spPr>
+          <a:xfrm>
+            <a:off x="7825775" y="6174000"/>
+            <a:ext cx="3060000" cy="387000"/>
+          </a:xfrm>
+          <a:prstGeom prst="rect">
+            <a:avLst/>
+          </a:prstGeom>
+          <a:noFill/>
+        </p:spPr>
+        <p:txBody>
+          <a:bodyPr wrap="none" lIns="0" tIns="0" rIns="0" bIns="0" anchor="ctr">
+            <a:spAutoFit/>
+          </a:bodyPr>
+          <a:lstStyle/>
+          <a:p>
+            <a:pPr algn="ctr">
+              <a:lnSpc>
+                <a:spcPct val="110000"/>
+              </a:lnSpc>
+              <a:spcBef>
+                <a:spcPts val="0"/>
+              </a:spcBef>
+              <a:spcAft>
+                <a:spcPts val="0"/>
+              </a:spcAft>
+            </a:pPr>
+            <a:r>
+              <a:rPr sz="1400" b="0">
+                <a:solidFill>
+                  <a:srgbClr val="53666E"/>
+                </a:solidFill>
+                <a:latin typeface="Times New Roman"/>
+                <a:ea typeface="DFKai-SB"/>
+                <a:cs typeface="Times New Roman"/>
+              </a:rPr>
+              <a:t>OOF Gate</a:t>
+            </a:r>
+          </a:p>
+        </p:txBody>
+      </p:sp>
+      <p:sp>
+        <p:nvSpPr>
+          <p:cNvPr id="54" name="Right Arrow 53"/>
+          <p:cNvSpPr/>
+          <p:nvPr/>
+        </p:nvSpPr>
+        <p:spPr>
+          <a:xfrm>
+            <a:off x="10980000" y="6012000"/>
+            <a:ext cx="504000" cy="216000"/>
+          </a:xfrm>
+          <a:prstGeom prst="rightArrow">
+            <a:avLst/>
+          </a:prstGeom>
+          <a:solidFill>
+            <a:srgbClr val="105186"/>
+          </a:solidFill>
+          <a:ln>
+            <a:noFill/>
+          </a:ln>
+          <a:effectLst/>
+        </p:spPr>
+        <p:style>
+          <a:lnRef idx="1">
+            <a:schemeClr val="accent1"/>
+          </a:lnRef>
+          <a:fillRef idx="3">
+            <a:schemeClr val="accent1"/>
+          </a:fillRef>
+          <a:effectRef idx="2">
+            <a:schemeClr val="accent1"/>
+          </a:effectRef>
+          <a:fontRef idx="minor">
+            <a:schemeClr val="lt1"/>
+          </a:fontRef>
+        </p:style>
+        <p:txBody>
+          <a:bodyPr rtlCol="0" anchor="ctr"/>
+          <a:lstStyle/>
+          <a:p>
+            <a:pPr algn="ctr"/>
+            <a:endParaRPr>
+              <a:latin typeface="Times New Roman"/>
+              <a:ea typeface="DFKai-SB"/>
+              <a:cs typeface="Times New Roman"/>
+            </a:endParaRPr>
+          </a:p>
+        </p:txBody>
+      </p:sp>
+      <p:sp>
+        <p:nvSpPr>
+          <p:cNvPr id="55" name="Rectangle 54"/>
+          <p:cNvSpPr/>
+          <p:nvPr/>
+        </p:nvSpPr>
+        <p:spPr>
+          <a:xfrm>
+            <a:off x="11592000" y="5688000"/>
+            <a:ext cx="2736000" cy="900000"/>
+          </a:xfrm>
+          <a:prstGeom prst="rect">
+            <a:avLst/>
+          </a:prstGeom>
+          <a:solidFill>
+            <a:srgbClr val="FFFFFF"/>
+          </a:solidFill>
+          <a:ln>
+            <a:noFill/>
+          </a:ln>
+          <a:effectLst/>
+        </p:spPr>
+        <p:style>
+          <a:lnRef idx="1">
+            <a:schemeClr val="accent1"/>
+          </a:lnRef>
+          <a:fillRef idx="3">
+            <a:schemeClr val="accent1"/>
+          </a:fillRef>
+          <a:effectRef idx="2">
+            <a:schemeClr val="accent1"/>
+          </a:effectRef>
+          <a:fontRef idx="minor">
+            <a:schemeClr val="lt1"/>
+          </a:fontRef>
+        </p:style>
+        <p:txBody>
+          <a:bodyPr rtlCol="0" anchor="ctr"/>
+          <a:lstStyle/>
+          <a:p>
+            <a:pPr algn="ctr"/>
+            <a:endParaRPr>
+              <a:latin typeface="Times New Roman"/>
+              <a:ea typeface="DFKai-SB"/>
+              <a:cs typeface="Times New Roman"/>
+            </a:endParaRPr>
+          </a:p>
+        </p:txBody>
+      </p:sp>
+      <p:sp>
+        <p:nvSpPr>
+          <p:cNvPr id="56" name="TextBox 55"/>
+          <p:cNvSpPr txBox="1"/>
+          <p:nvPr>
+            <p:custDataLst>
+              <p:tags r:id="rId25"/>
+            </p:custDataLst>
+          </p:nvPr>
+        </p:nvSpPr>
+        <p:spPr>
+          <a:xfrm>
+            <a:off x="11560251" y="5724000"/>
+            <a:ext cx="2736000" cy="504000"/>
+          </a:xfrm>
+          <a:prstGeom prst="rect">
+            <a:avLst/>
+          </a:prstGeom>
+          <a:noFill/>
+        </p:spPr>
+        <p:txBody>
+          <a:bodyPr wrap="none" lIns="0" tIns="0" rIns="0" bIns="0" anchor="ctr">
+            <a:spAutoFit/>
+          </a:bodyPr>
+          <a:lstStyle/>
+          <a:p>
+            <a:pPr algn="ctr">
+              <a:lnSpc>
+                <a:spcPct val="110000"/>
+              </a:lnSpc>
+              <a:spcBef>
+                <a:spcPts val="0"/>
+              </a:spcBef>
+              <a:spcAft>
+                <a:spcPts val="0"/>
+              </a:spcAft>
+            </a:pPr>
+            <a:r>
+              <a:rPr sz="2000" b="1">
+                <a:solidFill>
+                  <a:srgbClr val="105186"/>
+                </a:solidFill>
+                <a:latin typeface="Times New Roman"/>
+                <a:ea typeface="DFKai-SB"/>
+                <a:cs typeface="Times New Roman"/>
+              </a:rPr>
+              <a:t>17類判定</a:t>
+            </a:r>
+          </a:p>
+        </p:txBody>
+      </p:sp>
+      <p:sp>
+        <p:nvSpPr>
+          <p:cNvPr id="57" name="TextBox 56"/>
+          <p:cNvSpPr txBox="1"/>
+          <p:nvPr>
+            <p:custDataLst>
+              <p:tags r:id="rId26"/>
+            </p:custDataLst>
+          </p:nvPr>
+        </p:nvSpPr>
+        <p:spPr>
+          <a:xfrm>
+            <a:off x="11569776" y="6174000"/>
+            <a:ext cx="2736000" cy="387000"/>
+          </a:xfrm>
+          <a:prstGeom prst="rect">
+            <a:avLst/>
+          </a:prstGeom>
+          <a:noFill/>
+        </p:spPr>
+        <p:txBody>
+          <a:bodyPr wrap="none" lIns="0" tIns="0" rIns="0" bIns="0" anchor="ctr">
+            <a:spAutoFit/>
+          </a:bodyPr>
+          <a:lstStyle/>
+          <a:p>
+            <a:pPr algn="ctr">
+              <a:lnSpc>
+                <a:spcPct val="110000"/>
+              </a:lnSpc>
+              <a:spcBef>
+                <a:spcPts val="0"/>
+              </a:spcBef>
+              <a:spcAft>
+                <a:spcPts val="0"/>
+              </a:spcAft>
+            </a:pPr>
+            <a:r>
+              <a:rPr sz="1400" b="0">
+                <a:solidFill>
+                  <a:srgbClr val="53666E"/>
+                </a:solidFill>
+                <a:latin typeface="Times New Roman"/>
+                <a:ea typeface="DFKai-SB"/>
+                <a:cs typeface="Times New Roman"/>
+              </a:rPr>
+              <a:t>信心與512維表徵</a:t>
+            </a:r>
+          </a:p>
+        </p:txBody>
+      </p:sp>
+      <p:sp>
+        <p:nvSpPr>
+          <p:cNvPr id="58" name="Rectangle 57"/>
+          <p:cNvSpPr/>
+          <p:nvPr/>
+        </p:nvSpPr>
+        <p:spPr>
+          <a:xfrm>
+            <a:off x="4320000" y="7416000"/>
+            <a:ext cx="2808000" cy="612000"/>
+          </a:xfrm>
+          <a:prstGeom prst="rect">
+            <a:avLst/>
+          </a:prstGeom>
+          <a:solidFill>
+            <a:srgbClr val="FFFFFF"/>
+          </a:solidFill>
+          <a:ln>
+            <a:noFill/>
+          </a:ln>
+          <a:effectLst/>
+        </p:spPr>
+        <p:style>
+          <a:lnRef idx="1">
+            <a:schemeClr val="accent1"/>
+          </a:lnRef>
+          <a:fillRef idx="3">
+            <a:schemeClr val="accent1"/>
+          </a:fillRef>
+          <a:effectRef idx="2">
+            <a:schemeClr val="accent1"/>
+          </a:effectRef>
+          <a:fontRef idx="minor">
+            <a:schemeClr val="lt1"/>
+          </a:fontRef>
+        </p:style>
+        <p:txBody>
+          <a:bodyPr rtlCol="0" anchor="ctr"/>
+          <a:lstStyle/>
+          <a:p>
+            <a:pPr algn="ctr"/>
+            <a:endParaRPr>
+              <a:latin typeface="Times New Roman"/>
+              <a:ea typeface="DFKai-SB"/>
+              <a:cs typeface="Times New Roman"/>
+            </a:endParaRPr>
+          </a:p>
+        </p:txBody>
+      </p:sp>
+      <p:sp>
+        <p:nvSpPr>
+          <p:cNvPr id="59" name="TextBox 58"/>
+          <p:cNvSpPr txBox="1"/>
+          <p:nvPr>
+            <p:custDataLst>
+              <p:tags r:id="rId27"/>
+            </p:custDataLst>
+          </p:nvPr>
+        </p:nvSpPr>
+        <p:spPr>
+          <a:xfrm>
+            <a:off x="4288250" y="7416000"/>
+            <a:ext cx="2808000" cy="612000"/>
+          </a:xfrm>
+          <a:prstGeom prst="rect">
+            <a:avLst/>
+          </a:prstGeom>
+          <a:noFill/>
+        </p:spPr>
+        <p:txBody>
+          <a:bodyPr wrap="none" lIns="0" tIns="0" rIns="0" bIns="0" anchor="ctr">
+            <a:spAutoFit/>
+          </a:bodyPr>
+          <a:lstStyle/>
+          <a:p>
+            <a:pPr algn="ctr">
+              <a:lnSpc>
+                <a:spcPct val="110000"/>
+              </a:lnSpc>
+              <a:spcBef>
+                <a:spcPts val="0"/>
+              </a:spcBef>
+              <a:spcAft>
+                <a:spcPts val="0"/>
+              </a:spcAft>
+            </a:pPr>
+            <a:r>
+              <a:rPr sz="2000" b="1">
+                <a:solidFill>
+                  <a:srgbClr val="105186"/>
+                </a:solidFill>
+                <a:latin typeface="Times New Roman"/>
+                <a:ea typeface="DFKai-SB"/>
+                <a:cs typeface="Times New Roman"/>
+              </a:rPr>
+              <a:t>512維表徵</a:t>
+            </a:r>
+          </a:p>
+        </p:txBody>
+      </p:sp>
+      <p:sp>
+        <p:nvSpPr>
+          <p:cNvPr id="60" name="Rectangle 59"/>
+          <p:cNvSpPr/>
+          <p:nvPr/>
+        </p:nvSpPr>
+        <p:spPr>
+          <a:xfrm>
+            <a:off x="4320000" y="8244000"/>
+            <a:ext cx="2808000" cy="612000"/>
+          </a:xfrm>
+          <a:prstGeom prst="rect">
+            <a:avLst/>
+          </a:prstGeom>
+          <a:solidFill>
+            <a:srgbClr val="FFFFFF"/>
+          </a:solidFill>
+          <a:ln>
+            <a:noFill/>
+          </a:ln>
+          <a:effectLst/>
+        </p:spPr>
+        <p:style>
+          <a:lnRef idx="1">
+            <a:schemeClr val="accent1"/>
+          </a:lnRef>
+          <a:fillRef idx="3">
+            <a:schemeClr val="accent1"/>
+          </a:fillRef>
+          <a:effectRef idx="2">
+            <a:schemeClr val="accent1"/>
+          </a:effectRef>
+          <a:fontRef idx="minor">
+            <a:schemeClr val="lt1"/>
+          </a:fontRef>
+        </p:style>
+        <p:txBody>
+          <a:bodyPr rtlCol="0" anchor="ctr"/>
+          <a:lstStyle/>
+          <a:p>
+            <a:pPr algn="ctr"/>
+            <a:endParaRPr>
+              <a:latin typeface="Times New Roman"/>
+              <a:ea typeface="DFKai-SB"/>
+              <a:cs typeface="Times New Roman"/>
+            </a:endParaRPr>
+          </a:p>
+        </p:txBody>
+      </p:sp>
+      <p:sp>
+        <p:nvSpPr>
+          <p:cNvPr id="61" name="TextBox 60"/>
+          <p:cNvSpPr txBox="1"/>
+          <p:nvPr>
+            <p:custDataLst>
+              <p:tags r:id="rId28"/>
+            </p:custDataLst>
+          </p:nvPr>
+        </p:nvSpPr>
+        <p:spPr>
+          <a:xfrm>
+            <a:off x="4288250" y="8244000"/>
+            <a:ext cx="2808000" cy="612000"/>
+          </a:xfrm>
+          <a:prstGeom prst="rect">
+            <a:avLst/>
+          </a:prstGeom>
+          <a:noFill/>
+        </p:spPr>
+        <p:txBody>
+          <a:bodyPr wrap="none" lIns="0" tIns="0" rIns="0" bIns="0" anchor="ctr">
+            <a:spAutoFit/>
+          </a:bodyPr>
+          <a:lstStyle/>
+          <a:p>
+            <a:pPr algn="ctr">
+              <a:lnSpc>
+                <a:spcPct val="110000"/>
+              </a:lnSpc>
+              <a:spcBef>
+                <a:spcPts val="0"/>
+              </a:spcBef>
+              <a:spcAft>
+                <a:spcPts val="0"/>
+              </a:spcAft>
+            </a:pPr>
+            <a:r>
+              <a:rPr sz="2000" b="1">
+                <a:solidFill>
+                  <a:srgbClr val="105186"/>
+                </a:solidFill>
+                <a:latin typeface="Times New Roman"/>
+                <a:ea typeface="DFKai-SB"/>
+                <a:cs typeface="Times New Roman"/>
+              </a:rPr>
+              <a:t>17維機率</a:t>
+            </a:r>
+          </a:p>
+        </p:txBody>
+      </p:sp>
+      <p:cxnSp>
+        <p:nvCxnSpPr>
           <p:cNvPr id="62" name="Connector 61"/>
           <p:cNvCxnSpPr/>
           <p:nvPr/>
         </p:nvCxnSpPr>
         <p:spPr>
           <a:xfrm>
-            <a:off x="7128000" y="8550000"/>
+            <a:off x="7128000" y="7722000"/>
             <a:ext cx="324000" cy="0"/>
           </a:xfrm>
           <a:prstGeom prst="line">
@@ -6931,643 +6969,7 @@
         </p:nvCxnSpPr>
         <p:spPr>
           <a:xfrm>
-            <a:off x="7452000" y="7722000"/>
-            <a:ext cx="0" cy="828000"/>
-          </a:xfrm>
-          <a:prstGeom prst="line">
-            <a:avLst/>
-          </a:prstGeom>
-          <a:ln w="12700">
-            <a:solidFill>
-              <a:srgbClr val="105186"/>
-            </a:solidFill>
-          </a:ln>
-          <a:effectLst/>
-        </p:spPr>
-        <p:style>
-          <a:lnRef idx="2">
-            <a:schemeClr val="accent1"/>
-          </a:lnRef>
-          <a:fillRef idx="0">
-            <a:schemeClr val="accent1"/>
-          </a:fillRef>
-          <a:effectRef idx="1">
-            <a:schemeClr val="accent1"/>
-          </a:effectRef>
-          <a:fontRef idx="minor">
-            <a:schemeClr val="tx1"/>
-          </a:fontRef>
-        </p:style>
-      </p:cxnSp>
-      <p:sp>
-        <p:nvSpPr>
-          <p:cNvPr id="64" name="Right Arrow 63"/>
-          <p:cNvSpPr/>
-          <p:nvPr/>
-        </p:nvSpPr>
-        <p:spPr>
-          <a:xfrm>
-            <a:off x="7488000" y="8028000"/>
-            <a:ext cx="288000" cy="216000"/>
-          </a:xfrm>
-          <a:prstGeom prst="rightArrow">
-            <a:avLst/>
-          </a:prstGeom>
-          <a:solidFill>
-            <a:srgbClr val="105186"/>
-          </a:solidFill>
-          <a:ln>
-            <a:noFill/>
-          </a:ln>
-          <a:effectLst/>
-        </p:spPr>
-        <p:style>
-          <a:lnRef idx="1">
-            <a:schemeClr val="accent1"/>
-          </a:lnRef>
-          <a:fillRef idx="3">
-            <a:schemeClr val="accent1"/>
-          </a:fillRef>
-          <a:effectRef idx="2">
-            <a:schemeClr val="accent1"/>
-          </a:effectRef>
-          <a:fontRef idx="minor">
-            <a:schemeClr val="lt1"/>
-          </a:fontRef>
-        </p:style>
-        <p:txBody>
-          <a:bodyPr rtlCol="0" anchor="ctr"/>
-          <a:lstStyle/>
-          <a:p>
-            <a:pPr algn="ctr"/>
-            <a:endParaRPr>
-              <a:latin typeface="Times New Roman"/>
-              <a:ea typeface="DFKai-SB"/>
-              <a:cs typeface="Times New Roman"/>
-            </a:endParaRPr>
-          </a:p>
-        </p:txBody>
-      </p:sp>
-      <p:sp>
-        <p:nvSpPr>
-          <p:cNvPr id="65" name="Rectangle 64"/>
-          <p:cNvSpPr/>
-          <p:nvPr/>
-        </p:nvSpPr>
-        <p:spPr>
-          <a:xfrm>
-            <a:off x="7848000" y="7704000"/>
-            <a:ext cx="3060000" cy="900000"/>
-          </a:xfrm>
-          <a:prstGeom prst="rect">
-            <a:avLst/>
-          </a:prstGeom>
-          <a:solidFill>
-            <a:srgbClr val="FFFFFF"/>
-          </a:solidFill>
-          <a:ln>
-            <a:noFill/>
-          </a:ln>
-          <a:effectLst/>
-        </p:spPr>
-        <p:style>
-          <a:lnRef idx="1">
-            <a:schemeClr val="accent1"/>
-          </a:lnRef>
-          <a:fillRef idx="3">
-            <a:schemeClr val="accent1"/>
-          </a:fillRef>
-          <a:effectRef idx="2">
-            <a:schemeClr val="accent1"/>
-          </a:effectRef>
-          <a:fontRef idx="minor">
-            <a:schemeClr val="lt1"/>
-          </a:fontRef>
-        </p:style>
-        <p:txBody>
-          <a:bodyPr rtlCol="0" anchor="ctr"/>
-          <a:lstStyle/>
-          <a:p>
-            <a:pPr algn="ctr"/>
-            <a:endParaRPr>
-              <a:latin typeface="Times New Roman"/>
-              <a:ea typeface="DFKai-SB"/>
-              <a:cs typeface="Times New Roman"/>
-            </a:endParaRPr>
-          </a:p>
-        </p:txBody>
-      </p:sp>
-      <p:sp>
-        <p:nvSpPr>
-          <p:cNvPr id="66" name="TextBox 65"/>
-          <p:cNvSpPr txBox="1"/>
-          <p:nvPr>
-            <p:custDataLst>
-              <p:tags r:id="rId29"/>
-            </p:custDataLst>
-          </p:nvPr>
-        </p:nvSpPr>
-        <p:spPr>
-          <a:xfrm>
-            <a:off x="7816250" y="7740000"/>
-            <a:ext cx="3060000" cy="504000"/>
-          </a:xfrm>
-          <a:prstGeom prst="rect">
-            <a:avLst/>
-          </a:prstGeom>
-          <a:noFill/>
-        </p:spPr>
-        <p:txBody>
-          <a:bodyPr wrap="none" lIns="0" tIns="0" rIns="0" bIns="0" anchor="ctr">
-            <a:spAutoFit/>
-          </a:bodyPr>
-          <a:lstStyle/>
-          <a:p>
-            <a:pPr algn="ctr">
-              <a:lnSpc>
-                <a:spcPct val="110000"/>
-              </a:lnSpc>
-              <a:spcBef>
-                <a:spcPts val="0"/>
-              </a:spcBef>
-              <a:spcAft>
-                <a:spcPts val="0"/>
-              </a:spcAft>
-            </a:pPr>
-            <a:r>
-              <a:rPr sz="2000" b="1">
-                <a:solidFill>
-                  <a:srgbClr val="105186"/>
-                </a:solidFill>
-                <a:latin typeface="Times New Roman"/>
-                <a:ea typeface="DFKai-SB"/>
-                <a:cs typeface="Times New Roman"/>
-              </a:rPr>
-              <a:t>529維向量</a:t>
-            </a:r>
-          </a:p>
-        </p:txBody>
-      </p:sp>
-      <p:sp>
-        <p:nvSpPr>
-          <p:cNvPr id="67" name="TextBox 66"/>
-          <p:cNvSpPr txBox="1"/>
-          <p:nvPr>
-            <p:custDataLst>
-              <p:tags r:id="rId30"/>
-            </p:custDataLst>
-          </p:nvPr>
-        </p:nvSpPr>
-        <p:spPr>
-          <a:xfrm>
-            <a:off x="7825775" y="8190000"/>
-            <a:ext cx="3060000" cy="387000"/>
-          </a:xfrm>
-          <a:prstGeom prst="rect">
-            <a:avLst/>
-          </a:prstGeom>
-          <a:noFill/>
-        </p:spPr>
-        <p:txBody>
-          <a:bodyPr wrap="none" lIns="0" tIns="0" rIns="0" bIns="0" anchor="ctr">
-            <a:spAutoFit/>
-          </a:bodyPr>
-          <a:lstStyle/>
-          <a:p>
-            <a:pPr algn="ctr">
-              <a:lnSpc>
-                <a:spcPct val="110000"/>
-              </a:lnSpc>
-              <a:spcBef>
-                <a:spcPts val="0"/>
-              </a:spcBef>
-              <a:spcAft>
-                <a:spcPts val="0"/>
-              </a:spcAft>
-            </a:pPr>
-            <a:r>
-              <a:rPr sz="1400" b="0">
-                <a:solidFill>
-                  <a:srgbClr val="53666E"/>
-                </a:solidFill>
-                <a:latin typeface="Times New Roman"/>
-                <a:ea typeface="DFKai-SB"/>
-                <a:cs typeface="Times New Roman"/>
-              </a:rPr>
-              <a:t>L2正規化</a:t>
-            </a:r>
-          </a:p>
-        </p:txBody>
-      </p:sp>
-      <p:sp>
-        <p:nvSpPr>
-          <p:cNvPr id="68" name="Right Arrow 67"/>
-          <p:cNvSpPr/>
-          <p:nvPr/>
-        </p:nvSpPr>
-        <p:spPr>
-          <a:xfrm>
-            <a:off x="10980000" y="8028000"/>
-            <a:ext cx="504000" cy="216000"/>
-          </a:xfrm>
-          <a:prstGeom prst="rightArrow">
-            <a:avLst/>
-          </a:prstGeom>
-          <a:solidFill>
-            <a:srgbClr val="105186"/>
-          </a:solidFill>
-          <a:ln>
-            <a:noFill/>
-          </a:ln>
-          <a:effectLst/>
-        </p:spPr>
-        <p:style>
-          <a:lnRef idx="1">
-            <a:schemeClr val="accent1"/>
-          </a:lnRef>
-          <a:fillRef idx="3">
-            <a:schemeClr val="accent1"/>
-          </a:fillRef>
-          <a:effectRef idx="2">
-            <a:schemeClr val="accent1"/>
-          </a:effectRef>
-          <a:fontRef idx="minor">
-            <a:schemeClr val="lt1"/>
-          </a:fontRef>
-        </p:style>
-        <p:txBody>
-          <a:bodyPr rtlCol="0" anchor="ctr"/>
-          <a:lstStyle/>
-          <a:p>
-            <a:pPr algn="ctr"/>
-            <a:endParaRPr>
-              <a:latin typeface="Times New Roman"/>
-              <a:ea typeface="DFKai-SB"/>
-              <a:cs typeface="Times New Roman"/>
-            </a:endParaRPr>
-          </a:p>
-        </p:txBody>
-      </p:sp>
-      <p:sp>
-        <p:nvSpPr>
-          <p:cNvPr id="69" name="Rectangle 68"/>
-          <p:cNvSpPr/>
-          <p:nvPr/>
-        </p:nvSpPr>
-        <p:spPr>
-          <a:xfrm>
-            <a:off x="11592000" y="7704000"/>
-            <a:ext cx="2736000" cy="900000"/>
-          </a:xfrm>
-          <a:prstGeom prst="rect">
-            <a:avLst/>
-          </a:prstGeom>
-          <a:solidFill>
-            <a:srgbClr val="FFFFFF"/>
-          </a:solidFill>
-          <a:ln>
-            <a:noFill/>
-          </a:ln>
-          <a:effectLst/>
-        </p:spPr>
-        <p:style>
-          <a:lnRef idx="1">
-            <a:schemeClr val="accent1"/>
-          </a:lnRef>
-          <a:fillRef idx="3">
-            <a:schemeClr val="accent1"/>
-          </a:fillRef>
-          <a:effectRef idx="2">
-            <a:schemeClr val="accent1"/>
-          </a:effectRef>
-          <a:fontRef idx="minor">
-            <a:schemeClr val="lt1"/>
-          </a:fontRef>
-        </p:style>
-        <p:txBody>
-          <a:bodyPr rtlCol="0" anchor="ctr"/>
-          <a:lstStyle/>
-          <a:p>
-            <a:pPr algn="ctr"/>
-            <a:endParaRPr>
-              <a:latin typeface="Times New Roman"/>
-              <a:ea typeface="DFKai-SB"/>
-              <a:cs typeface="Times New Roman"/>
-            </a:endParaRPr>
-          </a:p>
-        </p:txBody>
-      </p:sp>
-      <p:sp>
-        <p:nvSpPr>
-          <p:cNvPr id="70" name="TextBox 69"/>
-          <p:cNvSpPr txBox="1"/>
-          <p:nvPr>
-            <p:custDataLst>
-              <p:tags r:id="rId31"/>
-            </p:custDataLst>
-          </p:nvPr>
-        </p:nvSpPr>
-        <p:spPr>
-          <a:xfrm>
-            <a:off x="11560250" y="7740000"/>
-            <a:ext cx="2736000" cy="504000"/>
-          </a:xfrm>
-          <a:prstGeom prst="rect">
-            <a:avLst/>
-          </a:prstGeom>
-          <a:noFill/>
-        </p:spPr>
-        <p:txBody>
-          <a:bodyPr wrap="none" lIns="0" tIns="0" rIns="0" bIns="0" anchor="ctr">
-            <a:spAutoFit/>
-          </a:bodyPr>
-          <a:lstStyle/>
-          <a:p>
-            <a:pPr algn="ctr">
-              <a:lnSpc>
-                <a:spcPct val="110000"/>
-              </a:lnSpc>
-              <a:spcBef>
-                <a:spcPts val="0"/>
-              </a:spcBef>
-              <a:spcAft>
-                <a:spcPts val="0"/>
-              </a:spcAft>
-            </a:pPr>
-            <a:r>
-              <a:rPr sz="2000" b="1">
-                <a:solidFill>
-                  <a:srgbClr val="105186"/>
-                </a:solidFill>
-                <a:latin typeface="Times New Roman"/>
-                <a:ea typeface="DFKai-SB"/>
-                <a:cs typeface="Times New Roman"/>
-              </a:rPr>
-              <a:t>Top-5證據</a:t>
-            </a:r>
-          </a:p>
-        </p:txBody>
-      </p:sp>
-      <p:sp>
-        <p:nvSpPr>
-          <p:cNvPr id="71" name="TextBox 70"/>
-          <p:cNvSpPr txBox="1"/>
-          <p:nvPr>
-            <p:custDataLst>
-              <p:tags r:id="rId32"/>
-            </p:custDataLst>
-          </p:nvPr>
-        </p:nvSpPr>
-        <p:spPr>
-          <a:xfrm>
-            <a:off x="11569776" y="8190000"/>
-            <a:ext cx="2736000" cy="387000"/>
-          </a:xfrm>
-          <a:prstGeom prst="rect">
-            <a:avLst/>
-          </a:prstGeom>
-          <a:noFill/>
-        </p:spPr>
-        <p:txBody>
-          <a:bodyPr wrap="none" lIns="0" tIns="0" rIns="0" bIns="0" anchor="ctr">
-            <a:spAutoFit/>
-          </a:bodyPr>
-          <a:lstStyle/>
-          <a:p>
-            <a:pPr algn="ctr">
-              <a:lnSpc>
-                <a:spcPct val="110000"/>
-              </a:lnSpc>
-              <a:spcBef>
-                <a:spcPts val="0"/>
-              </a:spcBef>
-              <a:spcAft>
-                <a:spcPts val="0"/>
-              </a:spcAft>
-            </a:pPr>
-            <a:r>
-              <a:rPr sz="1400" b="0">
-                <a:solidFill>
-                  <a:srgbClr val="53666E"/>
-                </a:solidFill>
-                <a:latin typeface="Times New Roman"/>
-                <a:ea typeface="DFKai-SB"/>
-                <a:cs typeface="Times New Roman"/>
-              </a:rPr>
-              <a:t>僅檢索訓練案例</a:t>
-            </a:r>
-          </a:p>
-        </p:txBody>
-      </p:sp>
-      <p:sp>
-        <p:nvSpPr>
-          <p:cNvPr id="72" name="Rectangle 71"/>
-          <p:cNvSpPr/>
-          <p:nvPr/>
-        </p:nvSpPr>
-        <p:spPr>
-          <a:xfrm>
-            <a:off x="4320000" y="9432000"/>
-            <a:ext cx="2808000" cy="612000"/>
-          </a:xfrm>
-          <a:prstGeom prst="rect">
-            <a:avLst/>
-          </a:prstGeom>
-          <a:solidFill>
-            <a:srgbClr val="FFFFFF"/>
-          </a:solidFill>
-          <a:ln>
-            <a:noFill/>
-          </a:ln>
-          <a:effectLst/>
-        </p:spPr>
-        <p:style>
-          <a:lnRef idx="1">
-            <a:schemeClr val="accent1"/>
-          </a:lnRef>
-          <a:fillRef idx="3">
-            <a:schemeClr val="accent1"/>
-          </a:fillRef>
-          <a:effectRef idx="2">
-            <a:schemeClr val="accent1"/>
-          </a:effectRef>
-          <a:fontRef idx="minor">
-            <a:schemeClr val="lt1"/>
-          </a:fontRef>
-        </p:style>
-        <p:txBody>
-          <a:bodyPr rtlCol="0" anchor="ctr"/>
-          <a:lstStyle/>
-          <a:p>
-            <a:pPr algn="ctr"/>
-            <a:endParaRPr>
-              <a:latin typeface="Times New Roman"/>
-              <a:ea typeface="DFKai-SB"/>
-              <a:cs typeface="Times New Roman"/>
-            </a:endParaRPr>
-          </a:p>
-        </p:txBody>
-      </p:sp>
-      <p:sp>
-        <p:nvSpPr>
-          <p:cNvPr id="73" name="TextBox 72"/>
-          <p:cNvSpPr txBox="1"/>
-          <p:nvPr>
-            <p:custDataLst>
-              <p:tags r:id="rId33"/>
-            </p:custDataLst>
-          </p:nvPr>
-        </p:nvSpPr>
-        <p:spPr>
-          <a:xfrm>
-            <a:off x="4288250" y="9432000"/>
-            <a:ext cx="2808000" cy="612000"/>
-          </a:xfrm>
-          <a:prstGeom prst="rect">
-            <a:avLst/>
-          </a:prstGeom>
-          <a:noFill/>
-        </p:spPr>
-        <p:txBody>
-          <a:bodyPr wrap="none" lIns="0" tIns="0" rIns="0" bIns="0" anchor="ctr">
-            <a:spAutoFit/>
-          </a:bodyPr>
-          <a:lstStyle/>
-          <a:p>
-            <a:pPr algn="ctr">
-              <a:lnSpc>
-                <a:spcPct val="110000"/>
-              </a:lnSpc>
-              <a:spcBef>
-                <a:spcPts val="0"/>
-              </a:spcBef>
-              <a:spcAft>
-                <a:spcPts val="0"/>
-              </a:spcAft>
-            </a:pPr>
-            <a:r>
-              <a:rPr sz="2000" b="1">
-                <a:solidFill>
-                  <a:srgbClr val="105186"/>
-                </a:solidFill>
-                <a:latin typeface="Times New Roman"/>
-                <a:ea typeface="DFKai-SB"/>
-                <a:cs typeface="Times New Roman"/>
-              </a:rPr>
-              <a:t>正式判定</a:t>
-            </a:r>
-          </a:p>
-        </p:txBody>
-      </p:sp>
-      <p:sp>
-        <p:nvSpPr>
-          <p:cNvPr id="74" name="Rectangle 73"/>
-          <p:cNvSpPr/>
-          <p:nvPr/>
-        </p:nvSpPr>
-        <p:spPr>
-          <a:xfrm>
-            <a:off x="4320000" y="10260000"/>
-            <a:ext cx="2808000" cy="612000"/>
-          </a:xfrm>
-          <a:prstGeom prst="rect">
-            <a:avLst/>
-          </a:prstGeom>
-          <a:solidFill>
-            <a:srgbClr val="FFFFFF"/>
-          </a:solidFill>
-          <a:ln>
-            <a:noFill/>
-          </a:ln>
-          <a:effectLst/>
-        </p:spPr>
-        <p:style>
-          <a:lnRef idx="1">
-            <a:schemeClr val="accent1"/>
-          </a:lnRef>
-          <a:fillRef idx="3">
-            <a:schemeClr val="accent1"/>
-          </a:fillRef>
-          <a:effectRef idx="2">
-            <a:schemeClr val="accent1"/>
-          </a:effectRef>
-          <a:fontRef idx="minor">
-            <a:schemeClr val="lt1"/>
-          </a:fontRef>
-        </p:style>
-        <p:txBody>
-          <a:bodyPr rtlCol="0" anchor="ctr"/>
-          <a:lstStyle/>
-          <a:p>
-            <a:pPr algn="ctr"/>
-            <a:endParaRPr>
-              <a:latin typeface="Times New Roman"/>
-              <a:ea typeface="DFKai-SB"/>
-              <a:cs typeface="Times New Roman"/>
-            </a:endParaRPr>
-          </a:p>
-        </p:txBody>
-      </p:sp>
-      <p:sp>
-        <p:nvSpPr>
-          <p:cNvPr id="75" name="TextBox 74"/>
-          <p:cNvSpPr txBox="1"/>
-          <p:nvPr>
-            <p:custDataLst>
-              <p:tags r:id="rId34"/>
-            </p:custDataLst>
-          </p:nvPr>
-        </p:nvSpPr>
-        <p:spPr>
-          <a:xfrm>
-            <a:off x="4288250" y="10260000"/>
-            <a:ext cx="2808000" cy="612000"/>
-          </a:xfrm>
-          <a:prstGeom prst="rect">
-            <a:avLst/>
-          </a:prstGeom>
-          <a:noFill/>
-        </p:spPr>
-        <p:txBody>
-          <a:bodyPr wrap="none" lIns="0" tIns="0" rIns="0" bIns="0" anchor="ctr">
-            <a:spAutoFit/>
-          </a:bodyPr>
-          <a:lstStyle/>
-          <a:p>
-            <a:pPr algn="ctr">
-              <a:lnSpc>
-                <a:spcPct val="110000"/>
-              </a:lnSpc>
-              <a:spcBef>
-                <a:spcPts val="0"/>
-              </a:spcBef>
-              <a:spcAft>
-                <a:spcPts val="0"/>
-              </a:spcAft>
-            </a:pPr>
-            <a:r>
-              <a:rPr sz="2000" b="1">
-                <a:solidFill>
-                  <a:srgbClr val="105186"/>
-                </a:solidFill>
-                <a:latin typeface="Times New Roman"/>
-                <a:ea typeface="DFKai-SB"/>
-                <a:cs typeface="Times New Roman"/>
-              </a:rPr>
-              <a:t>案例證據</a:t>
-            </a:r>
-          </a:p>
-        </p:txBody>
-      </p:sp>
-      <p:cxnSp>
-        <p:nvCxnSpPr>
-          <p:cNvPr id="76" name="Connector 75"/>
-          <p:cNvCxnSpPr/>
-          <p:nvPr/>
-        </p:nvCxnSpPr>
-        <p:spPr>
-          <a:xfrm>
-            <a:off x="7128000" y="9738000"/>
+            <a:off x="7128000" y="8550000"/>
             <a:ext cx="324000" cy="0"/>
           </a:xfrm>
           <a:prstGeom prst="line">
@@ -7597,13 +6999,649 @@
       </p:cxnSp>
       <p:cxnSp>
         <p:nvCxnSpPr>
+          <p:cNvPr id="64" name="Connector 63"/>
+          <p:cNvCxnSpPr/>
+          <p:nvPr/>
+        </p:nvCxnSpPr>
+        <p:spPr>
+          <a:xfrm>
+            <a:off x="7452000" y="7722000"/>
+            <a:ext cx="0" cy="828000"/>
+          </a:xfrm>
+          <a:prstGeom prst="line">
+            <a:avLst/>
+          </a:prstGeom>
+          <a:ln w="12700">
+            <a:solidFill>
+              <a:srgbClr val="105186"/>
+            </a:solidFill>
+          </a:ln>
+          <a:effectLst/>
+        </p:spPr>
+        <p:style>
+          <a:lnRef idx="2">
+            <a:schemeClr val="accent1"/>
+          </a:lnRef>
+          <a:fillRef idx="0">
+            <a:schemeClr val="accent1"/>
+          </a:fillRef>
+          <a:effectRef idx="1">
+            <a:schemeClr val="accent1"/>
+          </a:effectRef>
+          <a:fontRef idx="minor">
+            <a:schemeClr val="tx1"/>
+          </a:fontRef>
+        </p:style>
+      </p:cxnSp>
+      <p:sp>
+        <p:nvSpPr>
+          <p:cNvPr id="65" name="Right Arrow 64"/>
+          <p:cNvSpPr/>
+          <p:nvPr/>
+        </p:nvSpPr>
+        <p:spPr>
+          <a:xfrm>
+            <a:off x="7488000" y="8028000"/>
+            <a:ext cx="288000" cy="216000"/>
+          </a:xfrm>
+          <a:prstGeom prst="rightArrow">
+            <a:avLst/>
+          </a:prstGeom>
+          <a:solidFill>
+            <a:srgbClr val="105186"/>
+          </a:solidFill>
+          <a:ln>
+            <a:noFill/>
+          </a:ln>
+          <a:effectLst/>
+        </p:spPr>
+        <p:style>
+          <a:lnRef idx="1">
+            <a:schemeClr val="accent1"/>
+          </a:lnRef>
+          <a:fillRef idx="3">
+            <a:schemeClr val="accent1"/>
+          </a:fillRef>
+          <a:effectRef idx="2">
+            <a:schemeClr val="accent1"/>
+          </a:effectRef>
+          <a:fontRef idx="minor">
+            <a:schemeClr val="lt1"/>
+          </a:fontRef>
+        </p:style>
+        <p:txBody>
+          <a:bodyPr rtlCol="0" anchor="ctr"/>
+          <a:lstStyle/>
+          <a:p>
+            <a:pPr algn="ctr"/>
+            <a:endParaRPr>
+              <a:latin typeface="Times New Roman"/>
+              <a:ea typeface="DFKai-SB"/>
+              <a:cs typeface="Times New Roman"/>
+            </a:endParaRPr>
+          </a:p>
+        </p:txBody>
+      </p:sp>
+      <p:sp>
+        <p:nvSpPr>
+          <p:cNvPr id="66" name="Rectangle 65"/>
+          <p:cNvSpPr/>
+          <p:nvPr/>
+        </p:nvSpPr>
+        <p:spPr>
+          <a:xfrm>
+            <a:off x="7848000" y="7704000"/>
+            <a:ext cx="3060000" cy="900000"/>
+          </a:xfrm>
+          <a:prstGeom prst="rect">
+            <a:avLst/>
+          </a:prstGeom>
+          <a:solidFill>
+            <a:srgbClr val="FFFFFF"/>
+          </a:solidFill>
+          <a:ln>
+            <a:noFill/>
+          </a:ln>
+          <a:effectLst/>
+        </p:spPr>
+        <p:style>
+          <a:lnRef idx="1">
+            <a:schemeClr val="accent1"/>
+          </a:lnRef>
+          <a:fillRef idx="3">
+            <a:schemeClr val="accent1"/>
+          </a:fillRef>
+          <a:effectRef idx="2">
+            <a:schemeClr val="accent1"/>
+          </a:effectRef>
+          <a:fontRef idx="minor">
+            <a:schemeClr val="lt1"/>
+          </a:fontRef>
+        </p:style>
+        <p:txBody>
+          <a:bodyPr rtlCol="0" anchor="ctr"/>
+          <a:lstStyle/>
+          <a:p>
+            <a:pPr algn="ctr"/>
+            <a:endParaRPr>
+              <a:latin typeface="Times New Roman"/>
+              <a:ea typeface="DFKai-SB"/>
+              <a:cs typeface="Times New Roman"/>
+            </a:endParaRPr>
+          </a:p>
+        </p:txBody>
+      </p:sp>
+      <p:sp>
+        <p:nvSpPr>
+          <p:cNvPr id="67" name="TextBox 66"/>
+          <p:cNvSpPr txBox="1"/>
+          <p:nvPr>
+            <p:custDataLst>
+              <p:tags r:id="rId29"/>
+            </p:custDataLst>
+          </p:nvPr>
+        </p:nvSpPr>
+        <p:spPr>
+          <a:xfrm>
+            <a:off x="7816250" y="7740000"/>
+            <a:ext cx="3060000" cy="504000"/>
+          </a:xfrm>
+          <a:prstGeom prst="rect">
+            <a:avLst/>
+          </a:prstGeom>
+          <a:noFill/>
+        </p:spPr>
+        <p:txBody>
+          <a:bodyPr wrap="none" lIns="0" tIns="0" rIns="0" bIns="0" anchor="ctr">
+            <a:spAutoFit/>
+          </a:bodyPr>
+          <a:lstStyle/>
+          <a:p>
+            <a:pPr algn="ctr">
+              <a:lnSpc>
+                <a:spcPct val="110000"/>
+              </a:lnSpc>
+              <a:spcBef>
+                <a:spcPts val="0"/>
+              </a:spcBef>
+              <a:spcAft>
+                <a:spcPts val="0"/>
+              </a:spcAft>
+            </a:pPr>
+            <a:r>
+              <a:rPr sz="2000" b="1">
+                <a:solidFill>
+                  <a:srgbClr val="105186"/>
+                </a:solidFill>
+                <a:latin typeface="Times New Roman"/>
+                <a:ea typeface="DFKai-SB"/>
+                <a:cs typeface="Times New Roman"/>
+              </a:rPr>
+              <a:t>529維向量</a:t>
+            </a:r>
+          </a:p>
+        </p:txBody>
+      </p:sp>
+      <p:sp>
+        <p:nvSpPr>
+          <p:cNvPr id="68" name="TextBox 67"/>
+          <p:cNvSpPr txBox="1"/>
+          <p:nvPr>
+            <p:custDataLst>
+              <p:tags r:id="rId30"/>
+            </p:custDataLst>
+          </p:nvPr>
+        </p:nvSpPr>
+        <p:spPr>
+          <a:xfrm>
+            <a:off x="7825775" y="8190000"/>
+            <a:ext cx="3060000" cy="387000"/>
+          </a:xfrm>
+          <a:prstGeom prst="rect">
+            <a:avLst/>
+          </a:prstGeom>
+          <a:noFill/>
+        </p:spPr>
+        <p:txBody>
+          <a:bodyPr wrap="none" lIns="0" tIns="0" rIns="0" bIns="0" anchor="ctr">
+            <a:spAutoFit/>
+          </a:bodyPr>
+          <a:lstStyle/>
+          <a:p>
+            <a:pPr algn="ctr">
+              <a:lnSpc>
+                <a:spcPct val="110000"/>
+              </a:lnSpc>
+              <a:spcBef>
+                <a:spcPts val="0"/>
+              </a:spcBef>
+              <a:spcAft>
+                <a:spcPts val="0"/>
+              </a:spcAft>
+            </a:pPr>
+            <a:r>
+              <a:rPr sz="1400" b="0">
+                <a:solidFill>
+                  <a:srgbClr val="53666E"/>
+                </a:solidFill>
+                <a:latin typeface="Times New Roman"/>
+                <a:ea typeface="DFKai-SB"/>
+                <a:cs typeface="Times New Roman"/>
+              </a:rPr>
+              <a:t>L2正規化</a:t>
+            </a:r>
+          </a:p>
+        </p:txBody>
+      </p:sp>
+      <p:sp>
+        <p:nvSpPr>
+          <p:cNvPr id="69" name="Right Arrow 68"/>
+          <p:cNvSpPr/>
+          <p:nvPr/>
+        </p:nvSpPr>
+        <p:spPr>
+          <a:xfrm>
+            <a:off x="10980000" y="8028000"/>
+            <a:ext cx="504000" cy="216000"/>
+          </a:xfrm>
+          <a:prstGeom prst="rightArrow">
+            <a:avLst/>
+          </a:prstGeom>
+          <a:solidFill>
+            <a:srgbClr val="105186"/>
+          </a:solidFill>
+          <a:ln>
+            <a:noFill/>
+          </a:ln>
+          <a:effectLst/>
+        </p:spPr>
+        <p:style>
+          <a:lnRef idx="1">
+            <a:schemeClr val="accent1"/>
+          </a:lnRef>
+          <a:fillRef idx="3">
+            <a:schemeClr val="accent1"/>
+          </a:fillRef>
+          <a:effectRef idx="2">
+            <a:schemeClr val="accent1"/>
+          </a:effectRef>
+          <a:fontRef idx="minor">
+            <a:schemeClr val="lt1"/>
+          </a:fontRef>
+        </p:style>
+        <p:txBody>
+          <a:bodyPr rtlCol="0" anchor="ctr"/>
+          <a:lstStyle/>
+          <a:p>
+            <a:pPr algn="ctr"/>
+            <a:endParaRPr>
+              <a:latin typeface="Times New Roman"/>
+              <a:ea typeface="DFKai-SB"/>
+              <a:cs typeface="Times New Roman"/>
+            </a:endParaRPr>
+          </a:p>
+        </p:txBody>
+      </p:sp>
+      <p:sp>
+        <p:nvSpPr>
+          <p:cNvPr id="70" name="Rectangle 69"/>
+          <p:cNvSpPr/>
+          <p:nvPr/>
+        </p:nvSpPr>
+        <p:spPr>
+          <a:xfrm>
+            <a:off x="11592000" y="7704000"/>
+            <a:ext cx="2736000" cy="900000"/>
+          </a:xfrm>
+          <a:prstGeom prst="rect">
+            <a:avLst/>
+          </a:prstGeom>
+          <a:solidFill>
+            <a:srgbClr val="FFFFFF"/>
+          </a:solidFill>
+          <a:ln>
+            <a:noFill/>
+          </a:ln>
+          <a:effectLst/>
+        </p:spPr>
+        <p:style>
+          <a:lnRef idx="1">
+            <a:schemeClr val="accent1"/>
+          </a:lnRef>
+          <a:fillRef idx="3">
+            <a:schemeClr val="accent1"/>
+          </a:fillRef>
+          <a:effectRef idx="2">
+            <a:schemeClr val="accent1"/>
+          </a:effectRef>
+          <a:fontRef idx="minor">
+            <a:schemeClr val="lt1"/>
+          </a:fontRef>
+        </p:style>
+        <p:txBody>
+          <a:bodyPr rtlCol="0" anchor="ctr"/>
+          <a:lstStyle/>
+          <a:p>
+            <a:pPr algn="ctr"/>
+            <a:endParaRPr>
+              <a:latin typeface="Times New Roman"/>
+              <a:ea typeface="DFKai-SB"/>
+              <a:cs typeface="Times New Roman"/>
+            </a:endParaRPr>
+          </a:p>
+        </p:txBody>
+      </p:sp>
+      <p:sp>
+        <p:nvSpPr>
+          <p:cNvPr id="71" name="TextBox 70"/>
+          <p:cNvSpPr txBox="1"/>
+          <p:nvPr>
+            <p:custDataLst>
+              <p:tags r:id="rId31"/>
+            </p:custDataLst>
+          </p:nvPr>
+        </p:nvSpPr>
+        <p:spPr>
+          <a:xfrm>
+            <a:off x="11560250" y="7740000"/>
+            <a:ext cx="2736000" cy="504000"/>
+          </a:xfrm>
+          <a:prstGeom prst="rect">
+            <a:avLst/>
+          </a:prstGeom>
+          <a:noFill/>
+        </p:spPr>
+        <p:txBody>
+          <a:bodyPr wrap="none" lIns="0" tIns="0" rIns="0" bIns="0" anchor="ctr">
+            <a:spAutoFit/>
+          </a:bodyPr>
+          <a:lstStyle/>
+          <a:p>
+            <a:pPr algn="ctr">
+              <a:lnSpc>
+                <a:spcPct val="110000"/>
+              </a:lnSpc>
+              <a:spcBef>
+                <a:spcPts val="0"/>
+              </a:spcBef>
+              <a:spcAft>
+                <a:spcPts val="0"/>
+              </a:spcAft>
+            </a:pPr>
+            <a:r>
+              <a:rPr sz="2000" b="1">
+                <a:solidFill>
+                  <a:srgbClr val="105186"/>
+                </a:solidFill>
+                <a:latin typeface="Times New Roman"/>
+                <a:ea typeface="DFKai-SB"/>
+                <a:cs typeface="Times New Roman"/>
+              </a:rPr>
+              <a:t>Top-5證據</a:t>
+            </a:r>
+          </a:p>
+        </p:txBody>
+      </p:sp>
+      <p:sp>
+        <p:nvSpPr>
+          <p:cNvPr id="72" name="TextBox 71"/>
+          <p:cNvSpPr txBox="1"/>
+          <p:nvPr>
+            <p:custDataLst>
+              <p:tags r:id="rId32"/>
+            </p:custDataLst>
+          </p:nvPr>
+        </p:nvSpPr>
+        <p:spPr>
+          <a:xfrm>
+            <a:off x="11569776" y="8190000"/>
+            <a:ext cx="2736000" cy="387000"/>
+          </a:xfrm>
+          <a:prstGeom prst="rect">
+            <a:avLst/>
+          </a:prstGeom>
+          <a:noFill/>
+        </p:spPr>
+        <p:txBody>
+          <a:bodyPr wrap="none" lIns="0" tIns="0" rIns="0" bIns="0" anchor="ctr">
+            <a:spAutoFit/>
+          </a:bodyPr>
+          <a:lstStyle/>
+          <a:p>
+            <a:pPr algn="ctr">
+              <a:lnSpc>
+                <a:spcPct val="110000"/>
+              </a:lnSpc>
+              <a:spcBef>
+                <a:spcPts val="0"/>
+              </a:spcBef>
+              <a:spcAft>
+                <a:spcPts val="0"/>
+              </a:spcAft>
+            </a:pPr>
+            <a:r>
+              <a:rPr sz="1400" b="0">
+                <a:solidFill>
+                  <a:srgbClr val="53666E"/>
+                </a:solidFill>
+                <a:latin typeface="Times New Roman"/>
+                <a:ea typeface="DFKai-SB"/>
+                <a:cs typeface="Times New Roman"/>
+              </a:rPr>
+              <a:t>僅檢索訓練案例</a:t>
+            </a:r>
+          </a:p>
+        </p:txBody>
+      </p:sp>
+      <p:sp>
+        <p:nvSpPr>
+          <p:cNvPr id="73" name="Rectangle 72"/>
+          <p:cNvSpPr/>
+          <p:nvPr/>
+        </p:nvSpPr>
+        <p:spPr>
+          <a:xfrm>
+            <a:off x="4320000" y="9432000"/>
+            <a:ext cx="2808000" cy="612000"/>
+          </a:xfrm>
+          <a:prstGeom prst="rect">
+            <a:avLst/>
+          </a:prstGeom>
+          <a:solidFill>
+            <a:srgbClr val="FFFFFF"/>
+          </a:solidFill>
+          <a:ln>
+            <a:noFill/>
+          </a:ln>
+          <a:effectLst/>
+        </p:spPr>
+        <p:style>
+          <a:lnRef idx="1">
+            <a:schemeClr val="accent1"/>
+          </a:lnRef>
+          <a:fillRef idx="3">
+            <a:schemeClr val="accent1"/>
+          </a:fillRef>
+          <a:effectRef idx="2">
+            <a:schemeClr val="accent1"/>
+          </a:effectRef>
+          <a:fontRef idx="minor">
+            <a:schemeClr val="lt1"/>
+          </a:fontRef>
+        </p:style>
+        <p:txBody>
+          <a:bodyPr rtlCol="0" anchor="ctr"/>
+          <a:lstStyle/>
+          <a:p>
+            <a:pPr algn="ctr"/>
+            <a:endParaRPr>
+              <a:latin typeface="Times New Roman"/>
+              <a:ea typeface="DFKai-SB"/>
+              <a:cs typeface="Times New Roman"/>
+            </a:endParaRPr>
+          </a:p>
+        </p:txBody>
+      </p:sp>
+      <p:sp>
+        <p:nvSpPr>
+          <p:cNvPr id="74" name="TextBox 73"/>
+          <p:cNvSpPr txBox="1"/>
+          <p:nvPr>
+            <p:custDataLst>
+              <p:tags r:id="rId33"/>
+            </p:custDataLst>
+          </p:nvPr>
+        </p:nvSpPr>
+        <p:spPr>
+          <a:xfrm>
+            <a:off x="4288250" y="9432000"/>
+            <a:ext cx="2808000" cy="612000"/>
+          </a:xfrm>
+          <a:prstGeom prst="rect">
+            <a:avLst/>
+          </a:prstGeom>
+          <a:noFill/>
+        </p:spPr>
+        <p:txBody>
+          <a:bodyPr wrap="none" lIns="0" tIns="0" rIns="0" bIns="0" anchor="ctr">
+            <a:spAutoFit/>
+          </a:bodyPr>
+          <a:lstStyle/>
+          <a:p>
+            <a:pPr algn="ctr">
+              <a:lnSpc>
+                <a:spcPct val="110000"/>
+              </a:lnSpc>
+              <a:spcBef>
+                <a:spcPts val="0"/>
+              </a:spcBef>
+              <a:spcAft>
+                <a:spcPts val="0"/>
+              </a:spcAft>
+            </a:pPr>
+            <a:r>
+              <a:rPr sz="2000" b="1">
+                <a:solidFill>
+                  <a:srgbClr val="105186"/>
+                </a:solidFill>
+                <a:latin typeface="Times New Roman"/>
+                <a:ea typeface="DFKai-SB"/>
+                <a:cs typeface="Times New Roman"/>
+              </a:rPr>
+              <a:t>正式判定</a:t>
+            </a:r>
+          </a:p>
+        </p:txBody>
+      </p:sp>
+      <p:sp>
+        <p:nvSpPr>
+          <p:cNvPr id="75" name="Rectangle 74"/>
+          <p:cNvSpPr/>
+          <p:nvPr/>
+        </p:nvSpPr>
+        <p:spPr>
+          <a:xfrm>
+            <a:off x="4320000" y="10260000"/>
+            <a:ext cx="2808000" cy="612000"/>
+          </a:xfrm>
+          <a:prstGeom prst="rect">
+            <a:avLst/>
+          </a:prstGeom>
+          <a:solidFill>
+            <a:srgbClr val="FFFFFF"/>
+          </a:solidFill>
+          <a:ln>
+            <a:noFill/>
+          </a:ln>
+          <a:effectLst/>
+        </p:spPr>
+        <p:style>
+          <a:lnRef idx="1">
+            <a:schemeClr val="accent1"/>
+          </a:lnRef>
+          <a:fillRef idx="3">
+            <a:schemeClr val="accent1"/>
+          </a:fillRef>
+          <a:effectRef idx="2">
+            <a:schemeClr val="accent1"/>
+          </a:effectRef>
+          <a:fontRef idx="minor">
+            <a:schemeClr val="lt1"/>
+          </a:fontRef>
+        </p:style>
+        <p:txBody>
+          <a:bodyPr rtlCol="0" anchor="ctr"/>
+          <a:lstStyle/>
+          <a:p>
+            <a:pPr algn="ctr"/>
+            <a:endParaRPr>
+              <a:latin typeface="Times New Roman"/>
+              <a:ea typeface="DFKai-SB"/>
+              <a:cs typeface="Times New Roman"/>
+            </a:endParaRPr>
+          </a:p>
+        </p:txBody>
+      </p:sp>
+      <p:sp>
+        <p:nvSpPr>
+          <p:cNvPr id="76" name="TextBox 75"/>
+          <p:cNvSpPr txBox="1"/>
+          <p:nvPr>
+            <p:custDataLst>
+              <p:tags r:id="rId34"/>
+            </p:custDataLst>
+          </p:nvPr>
+        </p:nvSpPr>
+        <p:spPr>
+          <a:xfrm>
+            <a:off x="4288250" y="10260000"/>
+            <a:ext cx="2808000" cy="612000"/>
+          </a:xfrm>
+          <a:prstGeom prst="rect">
+            <a:avLst/>
+          </a:prstGeom>
+          <a:noFill/>
+        </p:spPr>
+        <p:txBody>
+          <a:bodyPr wrap="none" lIns="0" tIns="0" rIns="0" bIns="0" anchor="ctr">
+            <a:spAutoFit/>
+          </a:bodyPr>
+          <a:lstStyle/>
+          <a:p>
+            <a:pPr algn="ctr">
+              <a:lnSpc>
+                <a:spcPct val="110000"/>
+              </a:lnSpc>
+              <a:spcBef>
+                <a:spcPts val="0"/>
+              </a:spcBef>
+              <a:spcAft>
+                <a:spcPts val="0"/>
+              </a:spcAft>
+            </a:pPr>
+            <a:r>
+              <a:rPr sz="2000" b="1">
+                <a:solidFill>
+                  <a:srgbClr val="105186"/>
+                </a:solidFill>
+                <a:latin typeface="Times New Roman"/>
+                <a:ea typeface="DFKai-SB"/>
+                <a:cs typeface="Times New Roman"/>
+              </a:rPr>
+              <a:t>案例證據</a:t>
+            </a:r>
+          </a:p>
+        </p:txBody>
+      </p:sp>
+      <p:cxnSp>
+        <p:nvCxnSpPr>
           <p:cNvPr id="77" name="Connector 76"/>
           <p:cNvCxnSpPr/>
           <p:nvPr/>
         </p:nvCxnSpPr>
         <p:spPr>
           <a:xfrm>
-            <a:off x="7128000" y="10566000"/>
+            <a:off x="7128000" y="9738000"/>
             <a:ext cx="324000" cy="0"/>
           </a:xfrm>
           <a:prstGeom prst="line">
@@ -7639,8 +7677,8 @@
         </p:nvCxnSpPr>
         <p:spPr>
           <a:xfrm>
-            <a:off x="7452000" y="9738000"/>
-            <a:ext cx="0" cy="828000"/>
+            <a:off x="7128000" y="10566000"/>
+            <a:ext cx="324000" cy="0"/>
           </a:xfrm>
           <a:prstGeom prst="line">
             <a:avLst/>
@@ -7667,9 +7705,45 @@
           </a:fontRef>
         </p:style>
       </p:cxnSp>
-      <p:sp>
-        <p:nvSpPr>
-          <p:cNvPr id="79" name="Right Arrow 78"/>
+      <p:cxnSp>
+        <p:nvCxnSpPr>
+          <p:cNvPr id="79" name="Connector 78"/>
+          <p:cNvCxnSpPr/>
+          <p:nvPr/>
+        </p:nvCxnSpPr>
+        <p:spPr>
+          <a:xfrm>
+            <a:off x="7452000" y="9738000"/>
+            <a:ext cx="0" cy="828000"/>
+          </a:xfrm>
+          <a:prstGeom prst="line">
+            <a:avLst/>
+          </a:prstGeom>
+          <a:ln w="12700">
+            <a:solidFill>
+              <a:srgbClr val="105186"/>
+            </a:solidFill>
+          </a:ln>
+          <a:effectLst/>
+        </p:spPr>
+        <p:style>
+          <a:lnRef idx="2">
+            <a:schemeClr val="accent1"/>
+          </a:lnRef>
+          <a:fillRef idx="0">
+            <a:schemeClr val="accent1"/>
+          </a:fillRef>
+          <a:effectRef idx="1">
+            <a:schemeClr val="accent1"/>
+          </a:effectRef>
+          <a:fontRef idx="minor">
+            <a:schemeClr val="tx1"/>
+          </a:fontRef>
+        </p:style>
+      </p:cxnSp>
+      <p:sp>
+        <p:nvSpPr>
+          <p:cNvPr id="80" name="Right Arrow 79"/>
           <p:cNvSpPr/>
           <p:nvPr/>
         </p:nvSpPr>
@@ -7718,7 +7792,7 @@
       </p:sp>
       <p:sp>
         <p:nvSpPr>
-          <p:cNvPr id="80" name="Rectangle 79"/>
+          <p:cNvPr id="81" name="Rectangle 80"/>
           <p:cNvSpPr/>
           <p:nvPr/>
         </p:nvSpPr>
@@ -7767,7 +7841,7 @@
       </p:sp>
       <p:sp>
         <p:nvSpPr>
-          <p:cNvPr id="81" name="TextBox 80"/>
+          <p:cNvPr id="82" name="TextBox 81"/>
           <p:cNvSpPr txBox="1"/>
           <p:nvPr>
             <p:custDataLst>
@@ -7818,7 +7892,7 @@
       </p:sp>
       <p:sp>
         <p:nvSpPr>
-          <p:cNvPr id="82" name="TextBox 81"/>
+          <p:cNvPr id="83" name="TextBox 82"/>
           <p:cNvSpPr txBox="1"/>
           <p:nvPr>
             <p:custDataLst>
@@ -7869,7 +7943,7 @@
       </p:sp>
       <p:sp>
         <p:nvSpPr>
-          <p:cNvPr id="83" name="Right Arrow 82"/>
+          <p:cNvPr id="84" name="Right Arrow 83"/>
           <p:cNvSpPr/>
           <p:nvPr/>
         </p:nvSpPr>
@@ -7918,7 +7992,7 @@
       </p:sp>
       <p:sp>
         <p:nvSpPr>
-          <p:cNvPr id="84" name="Rectangle 83"/>
+          <p:cNvPr id="85" name="Rectangle 84"/>
           <p:cNvSpPr/>
           <p:nvPr/>
         </p:nvSpPr>
@@ -7967,7 +8041,7 @@
       </p:sp>
       <p:sp>
         <p:nvSpPr>
-          <p:cNvPr id="85" name="TextBox 84"/>
+          <p:cNvPr id="86" name="TextBox 85"/>
           <p:cNvSpPr txBox="1"/>
           <p:nvPr>
             <p:custDataLst>
@@ -8018,7 +8092,7 @@
       </p:sp>
       <p:sp>
         <p:nvSpPr>
-          <p:cNvPr id="86" name="Rectangle 85"/>
+          <p:cNvPr id="87" name="Rectangle 86"/>
           <p:cNvSpPr/>
           <p:nvPr/>
         </p:nvSpPr>
@@ -8067,7 +8141,7 @@
       </p:sp>
       <p:sp>
         <p:nvSpPr>
-          <p:cNvPr id="87" name="TextBox 86"/>
+          <p:cNvPr id="88" name="TextBox 87"/>
           <p:cNvSpPr txBox="1"/>
           <p:nvPr>
             <p:custDataLst>
@@ -8118,7 +8192,7 @@
       </p:sp>
       <p:sp>
         <p:nvSpPr>
-          <p:cNvPr id="88" name="Rectangle 87"/>
+          <p:cNvPr id="89" name="Rectangle 88"/>
           <p:cNvSpPr/>
           <p:nvPr/>
         </p:nvSpPr>
@@ -8167,7 +8241,7 @@
       </p:sp>
       <p:sp>
         <p:nvSpPr>
-          <p:cNvPr id="89" name="TextBox 88"/>
+          <p:cNvPr id="90" name="TextBox 89"/>
           <p:cNvSpPr txBox="1"/>
           <p:nvPr>
             <p:custDataLst>
@@ -8218,7 +8292,7 @@
       </p:sp>
       <p:sp>
         <p:nvSpPr>
-          <p:cNvPr id="90" name="TextBox 89"/>
+          <p:cNvPr id="91" name="TextBox 90"/>
           <p:cNvSpPr txBox="1"/>
           <p:nvPr>
             <p:custDataLst>
@@ -8269,7 +8343,7 @@
       </p:sp>
       <p:sp>
         <p:nvSpPr>
-          <p:cNvPr id="91" name="Rectangle 90"/>
+          <p:cNvPr id="92" name="Rectangle 91"/>
           <p:cNvSpPr/>
           <p:nvPr/>
         </p:nvSpPr>
@@ -8318,7 +8392,7 @@
       </p:sp>
       <p:sp>
         <p:nvSpPr>
-          <p:cNvPr id="92" name="TextBox 91"/>
+          <p:cNvPr id="93" name="TextBox 92"/>
           <p:cNvSpPr txBox="1"/>
           <p:nvPr>
             <p:custDataLst>
@@ -8369,7 +8443,7 @@
       </p:sp>
       <p:sp>
         <p:nvSpPr>
-          <p:cNvPr id="93" name="Right Arrow 92"/>
+          <p:cNvPr id="94" name="Right Arrow 93"/>
           <p:cNvSpPr/>
           <p:nvPr/>
         </p:nvSpPr>
@@ -8418,7 +8492,7 @@
       </p:sp>
       <p:sp>
         <p:nvSpPr>
-          <p:cNvPr id="94" name="Rectangle 93"/>
+          <p:cNvPr id="95" name="Rectangle 94"/>
           <p:cNvSpPr/>
           <p:nvPr/>
         </p:nvSpPr>
@@ -8467,7 +8541,7 @@
       </p:sp>
       <p:sp>
         <p:nvSpPr>
-          <p:cNvPr id="95" name="TextBox 94"/>
+          <p:cNvPr id="96" name="TextBox 95"/>
           <p:cNvSpPr txBox="1"/>
           <p:nvPr>
             <p:custDataLst>
@@ -8518,7 +8592,7 @@
       </p:sp>
       <p:sp>
         <p:nvSpPr>
-          <p:cNvPr id="96" name="Right Arrow 95"/>
+          <p:cNvPr id="97" name="Right Arrow 96"/>
           <p:cNvSpPr/>
           <p:nvPr/>
         </p:nvSpPr>
@@ -8567,7 +8641,7 @@
       </p:sp>
       <p:sp>
         <p:nvSpPr>
-          <p:cNvPr id="97" name="Rectangle 96"/>
+          <p:cNvPr id="98" name="Rectangle 97"/>
           <p:cNvSpPr/>
           <p:nvPr/>
         </p:nvSpPr>
@@ -8616,7 +8690,7 @@
       </p:sp>
       <p:sp>
         <p:nvSpPr>
-          <p:cNvPr id="98" name="TextBox 97"/>
+          <p:cNvPr id="99" name="TextBox 98"/>
           <p:cNvSpPr txBox="1"/>
           <p:nvPr>
             <p:custDataLst>
@@ -8667,7 +8741,7 @@
       </p:sp>
       <p:sp>
         <p:nvSpPr>
-          <p:cNvPr id="99" name="TextBox 98"/>
+          <p:cNvPr id="100" name="TextBox 99"/>
           <p:cNvSpPr txBox="1"/>
           <p:nvPr>
             <p:custDataLst>
@@ -8718,7 +8792,7 @@
       </p:sp>
       <p:sp>
         <p:nvSpPr>
-          <p:cNvPr id="100" name="Rectangle 99"/>
+          <p:cNvPr id="101" name="Rectangle 100"/>
           <p:cNvSpPr/>
           <p:nvPr/>
         </p:nvSpPr>
@@ -8767,7 +8841,7 @@
       </p:sp>
       <p:sp>
         <p:nvSpPr>
-          <p:cNvPr id="101" name="TextBox 100"/>
+          <p:cNvPr id="102" name="TextBox 101"/>
           <p:cNvSpPr txBox="1"/>
           <p:nvPr>
             <p:custDataLst>
@@ -8818,7 +8892,7 @@
       </p:sp>
       <p:sp>
         <p:nvSpPr>
-          <p:cNvPr id="102" name="TextBox 101"/>
+          <p:cNvPr id="103" name="TextBox 102"/>
           <p:cNvSpPr txBox="1"/>
           <p:nvPr>
             <p:custDataLst>
@@ -8869,7 +8943,7 @@
       </p:sp>
       <p:sp>
         <p:nvSpPr>
-          <p:cNvPr id="103" name="TextBox 102"/>
+          <p:cNvPr id="104" name="TextBox 103"/>
           <p:cNvSpPr txBox="1"/>
           <p:nvPr>
             <p:custDataLst>
@@ -8920,7 +8994,56 @@
       </p:sp>
       <p:sp>
         <p:nvSpPr>
-          <p:cNvPr id="104" name="TextBox 103"/>
+          <p:cNvPr id="105" name="Rectangle 104"/>
+          <p:cNvSpPr/>
+          <p:nvPr/>
+        </p:nvSpPr>
+        <p:spPr>
+          <a:xfrm>
+            <a:off x="576000" y="14796000"/>
+            <a:ext cx="504000" cy="36000"/>
+          </a:xfrm>
+          <a:prstGeom prst="rect">
+            <a:avLst/>
+          </a:prstGeom>
+          <a:solidFill>
+            <a:srgbClr val="FDB338"/>
+          </a:solidFill>
+          <a:ln>
+            <a:noFill/>
+          </a:ln>
+          <a:effectLst/>
+        </p:spPr>
+        <p:style>
+          <a:lnRef idx="1">
+            <a:schemeClr val="accent1"/>
+          </a:lnRef>
+          <a:fillRef idx="3">
+            <a:schemeClr val="accent1"/>
+          </a:fillRef>
+          <a:effectRef idx="2">
+            <a:schemeClr val="accent1"/>
+          </a:effectRef>
+          <a:fontRef idx="minor">
+            <a:schemeClr val="lt1"/>
+          </a:fontRef>
+        </p:style>
+        <p:txBody>
+          <a:bodyPr rtlCol="0" anchor="ctr"/>
+          <a:lstStyle/>
+          <a:p>
+            <a:pPr algn="ctr"/>
+            <a:endParaRPr>
+              <a:latin typeface="Times New Roman"/>
+              <a:ea typeface="DFKai-SB"/>
+              <a:cs typeface="Times New Roman"/>
+            </a:endParaRPr>
+          </a:p>
+        </p:txBody>
+      </p:sp>
+      <p:sp>
+        <p:nvSpPr>
+          <p:cNvPr id="106" name="TextBox 105"/>
           <p:cNvSpPr txBox="1"/>
           <p:nvPr>
             <p:custDataLst>
@@ -8971,7 +9094,7 @@
       </p:sp>
       <p:sp>
         <p:nvSpPr>
-          <p:cNvPr id="105" name="TextBox 104"/>
+          <p:cNvPr id="107" name="TextBox 106"/>
           <p:cNvSpPr txBox="1"/>
           <p:nvPr>
             <p:custDataLst>
@@ -9044,9 +9167,58 @@
           </a:p>
         </p:txBody>
       </p:sp>
+      <p:sp>
+        <p:nvSpPr>
+          <p:cNvPr id="108" name="Rectangle 107"/>
+          <p:cNvSpPr/>
+          <p:nvPr/>
+        </p:nvSpPr>
+        <p:spPr>
+          <a:xfrm>
+            <a:off x="5364000" y="14796000"/>
+            <a:ext cx="504000" cy="36000"/>
+          </a:xfrm>
+          <a:prstGeom prst="rect">
+            <a:avLst/>
+          </a:prstGeom>
+          <a:solidFill>
+            <a:srgbClr val="FDB338"/>
+          </a:solidFill>
+          <a:ln>
+            <a:noFill/>
+          </a:ln>
+          <a:effectLst/>
+        </p:spPr>
+        <p:style>
+          <a:lnRef idx="1">
+            <a:schemeClr val="accent1"/>
+          </a:lnRef>
+          <a:fillRef idx="3">
+            <a:schemeClr val="accent1"/>
+          </a:fillRef>
+          <a:effectRef idx="2">
+            <a:schemeClr val="accent1"/>
+          </a:effectRef>
+          <a:fontRef idx="minor">
+            <a:schemeClr val="lt1"/>
+          </a:fontRef>
+        </p:style>
+        <p:txBody>
+          <a:bodyPr rtlCol="0" anchor="ctr"/>
+          <a:lstStyle/>
+          <a:p>
+            <a:pPr algn="ctr"/>
+            <a:endParaRPr>
+              <a:latin typeface="Times New Roman"/>
+              <a:ea typeface="DFKai-SB"/>
+              <a:cs typeface="Times New Roman"/>
+            </a:endParaRPr>
+          </a:p>
+        </p:txBody>
+      </p:sp>
       <p:cxnSp>
         <p:nvCxnSpPr>
-          <p:cNvPr id="106" name="Connector 105"/>
+          <p:cNvPr id="109" name="Connector 108"/>
           <p:cNvCxnSpPr/>
           <p:nvPr/>
         </p:nvCxnSpPr>
@@ -9082,7 +9254,7 @@
       </p:cxnSp>
       <p:sp>
         <p:nvSpPr>
-          <p:cNvPr id="107" name="TextBox 106"/>
+          <p:cNvPr id="110" name="TextBox 109"/>
           <p:cNvSpPr txBox="1"/>
           <p:nvPr>
             <p:custDataLst>
@@ -9133,7 +9305,7 @@
       </p:sp>
       <p:sp>
         <p:nvSpPr>
-          <p:cNvPr id="108" name="TextBox 107"/>
+          <p:cNvPr id="111" name="TextBox 110"/>
           <p:cNvSpPr txBox="1"/>
           <p:nvPr>
             <p:custDataLst>
@@ -9206,9 +9378,58 @@
           </a:p>
         </p:txBody>
       </p:sp>
+      <p:sp>
+        <p:nvSpPr>
+          <p:cNvPr id="112" name="Rectangle 111"/>
+          <p:cNvSpPr/>
+          <p:nvPr/>
+        </p:nvSpPr>
+        <p:spPr>
+          <a:xfrm>
+            <a:off x="10152000" y="14796000"/>
+            <a:ext cx="504000" cy="36000"/>
+          </a:xfrm>
+          <a:prstGeom prst="rect">
+            <a:avLst/>
+          </a:prstGeom>
+          <a:solidFill>
+            <a:srgbClr val="FDB338"/>
+          </a:solidFill>
+          <a:ln>
+            <a:noFill/>
+          </a:ln>
+          <a:effectLst/>
+        </p:spPr>
+        <p:style>
+          <a:lnRef idx="1">
+            <a:schemeClr val="accent1"/>
+          </a:lnRef>
+          <a:fillRef idx="3">
+            <a:schemeClr val="accent1"/>
+          </a:fillRef>
+          <a:effectRef idx="2">
+            <a:schemeClr val="accent1"/>
+          </a:effectRef>
+          <a:fontRef idx="minor">
+            <a:schemeClr val="lt1"/>
+          </a:fontRef>
+        </p:style>
+        <p:txBody>
+          <a:bodyPr rtlCol="0" anchor="ctr"/>
+          <a:lstStyle/>
+          <a:p>
+            <a:pPr algn="ctr"/>
+            <a:endParaRPr>
+              <a:latin typeface="Times New Roman"/>
+              <a:ea typeface="DFKai-SB"/>
+              <a:cs typeface="Times New Roman"/>
+            </a:endParaRPr>
+          </a:p>
+        </p:txBody>
+      </p:sp>
       <p:cxnSp>
         <p:nvCxnSpPr>
-          <p:cNvPr id="109" name="Connector 108"/>
+          <p:cNvPr id="113" name="Connector 112"/>
           <p:cNvCxnSpPr/>
           <p:nvPr/>
         </p:nvCxnSpPr>
@@ -9244,7 +9465,7 @@
       </p:cxnSp>
       <p:sp>
         <p:nvSpPr>
-          <p:cNvPr id="110" name="TextBox 109"/>
+          <p:cNvPr id="114" name="TextBox 113"/>
           <p:cNvSpPr txBox="1"/>
           <p:nvPr>
             <p:custDataLst>
@@ -9295,7 +9516,7 @@
       </p:sp>
       <p:sp>
         <p:nvSpPr>
-          <p:cNvPr id="111" name="TextBox 110"/>
+          <p:cNvPr id="115" name="TextBox 114"/>
           <p:cNvSpPr txBox="1"/>
           <p:nvPr>
             <p:custDataLst>
@@ -9370,7 +9591,7 @@
       </p:sp>
       <p:sp>
         <p:nvSpPr>
-          <p:cNvPr id="112" name="TextBox 111"/>
+          <p:cNvPr id="116" name="TextBox 115"/>
           <p:cNvSpPr txBox="1"/>
           <p:nvPr>
             <p:custDataLst>
@@ -9421,7 +9642,7 @@
       </p:sp>
       <p:sp>
         <p:nvSpPr>
-          <p:cNvPr id="113" name="TextBox 112"/>
+          <p:cNvPr id="117" name="TextBox 116"/>
           <p:cNvSpPr txBox="1"/>
           <p:nvPr>
             <p:custDataLst>
@@ -9472,7 +9693,7 @@
       </p:sp>
       <p:sp>
         <p:nvSpPr>
-          <p:cNvPr id="114" name="TextBox 113"/>
+          <p:cNvPr id="118" name="TextBox 117"/>
           <p:cNvSpPr txBox="1"/>
           <p:nvPr>
             <p:custDataLst>
@@ -9523,7 +9744,7 @@
       </p:sp>
       <p:sp>
         <p:nvSpPr>
-          <p:cNvPr id="115" name="TextBox 114"/>
+          <p:cNvPr id="119" name="TextBox 118"/>
           <p:cNvSpPr txBox="1"/>
           <p:nvPr>
             <p:custDataLst>
@@ -9574,7 +9795,7 @@
       </p:sp>
       <p:sp>
         <p:nvSpPr>
-          <p:cNvPr id="116" name="Rectangle 115"/>
+          <p:cNvPr id="120" name="Rectangle 119"/>
           <p:cNvSpPr/>
           <p:nvPr/>
         </p:nvSpPr>
@@ -9623,7 +9844,7 @@
       </p:sp>
       <p:sp>
         <p:nvSpPr>
-          <p:cNvPr id="117" name="Rectangle 116"/>
+          <p:cNvPr id="121" name="Rectangle 120"/>
           <p:cNvSpPr/>
           <p:nvPr/>
         </p:nvSpPr>
@@ -9672,7 +9893,7 @@
       </p:sp>
       <p:sp>
         <p:nvSpPr>
-          <p:cNvPr id="118" name="TextBox 117"/>
+          <p:cNvPr id="122" name="TextBox 121"/>
           <p:cNvSpPr txBox="1"/>
           <p:nvPr>
             <p:custDataLst>
@@ -9723,7 +9944,7 @@
       </p:sp>
       <p:sp>
         <p:nvSpPr>
-          <p:cNvPr id="119" name="TextBox 118"/>
+          <p:cNvPr id="123" name="TextBox 122"/>
           <p:cNvSpPr txBox="1"/>
           <p:nvPr>
             <p:custDataLst>
@@ -9774,7 +9995,7 @@
       </p:sp>
       <p:sp>
         <p:nvSpPr>
-          <p:cNvPr id="120" name="Rectangle 119"/>
+          <p:cNvPr id="124" name="Rectangle 123"/>
           <p:cNvSpPr/>
           <p:nvPr/>
         </p:nvSpPr>
@@ -9823,7 +10044,7 @@
       </p:sp>
       <p:sp>
         <p:nvSpPr>
-          <p:cNvPr id="121" name="Rectangle 120"/>
+          <p:cNvPr id="125" name="Rectangle 124"/>
           <p:cNvSpPr/>
           <p:nvPr/>
         </p:nvSpPr>
@@ -9872,7 +10093,7 @@
       </p:sp>
       <p:sp>
         <p:nvSpPr>
-          <p:cNvPr id="122" name="TextBox 121"/>
+          <p:cNvPr id="126" name="TextBox 125"/>
           <p:cNvSpPr txBox="1"/>
           <p:nvPr>
             <p:custDataLst>
@@ -9923,7 +10144,7 @@
       </p:sp>
       <p:sp>
         <p:nvSpPr>
-          <p:cNvPr id="123" name="TextBox 122"/>
+          <p:cNvPr id="127" name="TextBox 126"/>
           <p:cNvSpPr txBox="1"/>
           <p:nvPr>
             <p:custDataLst>
@@ -9974,7 +10195,7 @@
       </p:sp>
       <p:sp>
         <p:nvSpPr>
-          <p:cNvPr id="124" name="Rectangle 123"/>
+          <p:cNvPr id="128" name="Rectangle 127"/>
           <p:cNvSpPr/>
           <p:nvPr/>
         </p:nvSpPr>
@@ -10023,7 +10244,7 @@
       </p:sp>
       <p:sp>
         <p:nvSpPr>
-          <p:cNvPr id="125" name="Rectangle 124"/>
+          <p:cNvPr id="129" name="Rectangle 128"/>
           <p:cNvSpPr/>
           <p:nvPr/>
         </p:nvSpPr>
@@ -10072,7 +10293,7 @@
       </p:sp>
       <p:sp>
         <p:nvSpPr>
-          <p:cNvPr id="126" name="TextBox 125"/>
+          <p:cNvPr id="130" name="TextBox 129"/>
           <p:cNvSpPr txBox="1"/>
           <p:nvPr>
             <p:custDataLst>
@@ -10123,7 +10344,7 @@
       </p:sp>
       <p:sp>
         <p:nvSpPr>
-          <p:cNvPr id="127" name="TextBox 126"/>
+          <p:cNvPr id="131" name="TextBox 130"/>
           <p:cNvSpPr txBox="1"/>
           <p:nvPr>
             <p:custDataLst>
@@ -10174,7 +10395,7 @@
       </p:sp>
       <p:cxnSp>
         <p:nvCxnSpPr>
-          <p:cNvPr id="128" name="Connector 127"/>
+          <p:cNvPr id="132" name="Connector 131"/>
           <p:cNvCxnSpPr/>
           <p:nvPr/>
         </p:nvCxnSpPr>
@@ -10210,7 +10431,7 @@
       </p:cxnSp>
       <p:sp>
         <p:nvSpPr>
-          <p:cNvPr id="129" name="TextBox 128"/>
+          <p:cNvPr id="133" name="TextBox 132"/>
           <p:cNvSpPr txBox="1"/>
           <p:nvPr>
             <p:custDataLst>
@@ -10261,7 +10482,7 @@
       </p:sp>
       <p:sp>
         <p:nvSpPr>
-          <p:cNvPr id="130" name="TextBox 129"/>
+          <p:cNvPr id="134" name="TextBox 133"/>
           <p:cNvSpPr txBox="1"/>
           <p:nvPr>
             <p:custDataLst>
@@ -10312,7 +10533,7 @@
       </p:sp>
       <p:sp>
         <p:nvSpPr>
-          <p:cNvPr id="131" name="TextBox 130"/>
+          <p:cNvPr id="135" name="TextBox 134"/>
           <p:cNvSpPr txBox="1"/>
           <p:nvPr>
             <p:custDataLst>
@@ -10363,7 +10584,7 @@
       </p:sp>
       <p:sp>
         <p:nvSpPr>
-          <p:cNvPr id="132" name="TextBox 131"/>
+          <p:cNvPr id="136" name="TextBox 135"/>
           <p:cNvSpPr txBox="1"/>
           <p:nvPr>
             <p:custDataLst>
@@ -10414,7 +10635,7 @@
       </p:sp>
       <p:sp>
         <p:nvSpPr>
-          <p:cNvPr id="133" name="TextBox 132"/>
+          <p:cNvPr id="137" name="TextBox 136"/>
           <p:cNvSpPr txBox="1"/>
           <p:nvPr>
             <p:custDataLst>
@@ -10465,7 +10686,7 @@
       </p:sp>
       <p:sp>
         <p:nvSpPr>
-          <p:cNvPr id="134" name="TextBox 133"/>
+          <p:cNvPr id="138" name="TextBox 137"/>
           <p:cNvSpPr txBox="1"/>
           <p:nvPr>
             <p:custDataLst>
@@ -10516,7 +10737,7 @@
       </p:sp>
       <p:sp>
         <p:nvSpPr>
-          <p:cNvPr id="135" name="TextBox 134"/>
+          <p:cNvPr id="139" name="TextBox 138"/>
           <p:cNvSpPr txBox="1"/>
           <p:nvPr>
             <p:custDataLst>
@@ -10567,7 +10788,7 @@
       </p:sp>
       <p:sp>
         <p:nvSpPr>
-          <p:cNvPr id="136" name="TextBox 135"/>
+          <p:cNvPr id="140" name="TextBox 139"/>
           <p:cNvSpPr txBox="1"/>
           <p:nvPr>
             <p:custDataLst>
@@ -10618,7 +10839,7 @@
       </p:sp>
       <p:sp>
         <p:nvSpPr>
-          <p:cNvPr id="137" name="TextBox 136"/>
+          <p:cNvPr id="141" name="TextBox 140"/>
           <p:cNvSpPr txBox="1"/>
           <p:nvPr>
             <p:custDataLst>
@@ -10669,7 +10890,7 @@
       </p:sp>
       <p:sp>
         <p:nvSpPr>
-          <p:cNvPr id="138" name="TextBox 137"/>
+          <p:cNvPr id="142" name="TextBox 141"/>
           <p:cNvSpPr txBox="1"/>
           <p:nvPr>
             <p:custDataLst>
@@ -10744,7 +10965,7 @@
       </p:sp>
       <p:cxnSp>
         <p:nvCxnSpPr>
-          <p:cNvPr id="139" name="Connector 138"/>
+          <p:cNvPr id="143" name="Connector 142"/>
           <p:cNvCxnSpPr/>
           <p:nvPr/>
         </p:nvCxnSpPr>
@@ -10780,7 +11001,7 @@
       </p:cxnSp>
       <p:sp>
         <p:nvSpPr>
-          <p:cNvPr id="140" name="TextBox 139"/>
+          <p:cNvPr id="144" name="TextBox 143"/>
           <p:cNvSpPr txBox="1"/>
           <p:nvPr>
             <p:custDataLst>
@@ -10831,7 +11052,7 @@
       </p:sp>
       <p:sp>
         <p:nvSpPr>
-          <p:cNvPr id="141" name="TextBox 140"/>
+          <p:cNvPr id="145" name="TextBox 144"/>
           <p:cNvSpPr txBox="1"/>
           <p:nvPr>
             <p:custDataLst>
@@ -10914,7 +11135,7 @@
 
 <file path=ppt/tags/tag1.xml><?xml version="1.0" encoding="utf-8"?>
 <p:tagLst xmlns:a="http://schemas.openxmlformats.org/drawingml/2006/main" xmlns:r="http://schemas.openxmlformats.org/officeDocument/2006/relationships" xmlns:p="http://schemas.openxmlformats.org/presentationml/2006/main">
-  <p:tag name="ALIGNMENT_TARGET_X" val="45.354331970214844"/>
+  <p:tag name="ALIGNMENT_TARGET_X" val="595.2755966186523"/>
 </p:tagLst>
 </file>
 
@@ -10980,7 +11201,7 @@
 
 <file path=ppt/tags/tag2.xml><?xml version="1.0" encoding="utf-8"?>
 <p:tagLst xmlns:a="http://schemas.openxmlformats.org/drawingml/2006/main" xmlns:r="http://schemas.openxmlformats.org/officeDocument/2006/relationships" xmlns:p="http://schemas.openxmlformats.org/presentationml/2006/main">
-  <p:tag name="ALIGNMENT_TARGET_X" val="45.354331970214844"/>
+  <p:tag name="ALIGNMENT_TARGET_X" val="595.2755966186523"/>
 </p:tagLst>
 </file>
 

--- a/deliverables/決賽海報_AI資安框架_A2.pptx
+++ b/deliverables/決賽海報_AI資安框架_A2.pptx
@@ -4384,8 +4384,8 @@
         </p:nvSpPr>
         <p:spPr>
           <a:xfrm>
-            <a:off x="576000" y="3888000"/>
-            <a:ext cx="13968000" cy="360000"/>
+            <a:off x="576000" y="3780000"/>
+            <a:ext cx="13968000" cy="324000"/>
           </a:xfrm>
           <a:prstGeom prst="rect">
             <a:avLst/>
@@ -4435,8 +4435,8 @@
         </p:nvSpPr>
         <p:spPr>
           <a:xfrm>
-            <a:off x="576000" y="4608000"/>
-            <a:ext cx="432000" cy="360000"/>
+            <a:off x="576000" y="4176000"/>
+            <a:ext cx="13968000" cy="288000"/>
           </a:xfrm>
           <a:prstGeom prst="rect">
             <a:avLst/>
@@ -4461,15 +4461,15 @@
               </a:spcAft>
             </a:pPr>
             <a:r>
-              <a:rPr sz="2000" b="1">
+              <a:rPr sz="1600" b="0">
                 <a:solidFill>
-                  <a:srgbClr val="105186"/>
+                  <a:srgbClr val="171C1D"/>
                 </a:solidFill>
                 <a:latin typeface="Times New Roman"/>
                 <a:ea typeface="DFKai-SB"/>
                 <a:cs typeface="Times New Roman"/>
               </a:rPr>
-              <a:t>01</a:t>
+              <a:t>面向校園與中小型組織的告警判讀，以案例證據協助核對事件，再依策略執行與回復。</a:t>
             </a:r>
           </a:p>
         </p:txBody>
@@ -4486,8 +4486,8 @@
         </p:nvSpPr>
         <p:spPr>
           <a:xfrm>
-            <a:off x="1116000" y="4608000"/>
-            <a:ext cx="13320000" cy="360000"/>
+            <a:off x="576000" y="4608000"/>
+            <a:ext cx="432000" cy="360000"/>
           </a:xfrm>
           <a:prstGeom prst="rect">
             <a:avLst/>
@@ -4512,6 +4512,57 @@
               </a:spcAft>
             </a:pPr>
             <a:r>
+              <a:rPr sz="2000" b="1">
+                <a:solidFill>
+                  <a:srgbClr val="105186"/>
+                </a:solidFill>
+                <a:latin typeface="Times New Roman"/>
+                <a:ea typeface="DFKai-SB"/>
+                <a:cs typeface="Times New Roman"/>
+              </a:rPr>
+              <a:t>01</a:t>
+            </a:r>
+          </a:p>
+        </p:txBody>
+      </p:sp>
+      <p:sp>
+        <p:nvSpPr>
+          <p:cNvPr id="11" name="TextBox 10"/>
+          <p:cNvSpPr txBox="1"/>
+          <p:nvPr>
+            <p:custDataLst>
+              <p:tags r:id="rId7"/>
+            </p:custDataLst>
+          </p:nvPr>
+        </p:nvSpPr>
+        <p:spPr>
+          <a:xfrm>
+            <a:off x="1116000" y="4608000"/>
+            <a:ext cx="13320000" cy="360000"/>
+          </a:xfrm>
+          <a:prstGeom prst="rect">
+            <a:avLst/>
+          </a:prstGeom>
+          <a:noFill/>
+        </p:spPr>
+        <p:txBody>
+          <a:bodyPr wrap="none" lIns="0" tIns="0" rIns="0" bIns="0" anchor="ctr">
+            <a:spAutoFit/>
+          </a:bodyPr>
+          <a:lstStyle/>
+          <a:p>
+            <a:pPr algn="l">
+              <a:lnSpc>
+                <a:spcPct val="110000"/>
+              </a:lnSpc>
+              <a:spcBef>
+                <a:spcPts val="0"/>
+              </a:spcBef>
+              <a:spcAft>
+                <a:spcPts val="0"/>
+              </a:spcAft>
+            </a:pPr>
+            <a:r>
               <a:rPr sz="2400" b="0">
                 <a:solidFill>
                   <a:srgbClr val="092B42"/>
@@ -4527,7 +4578,7 @@
       </p:sp>
       <p:sp>
         <p:nvSpPr>
-          <p:cNvPr id="11" name="Rectangle 10"/>
+          <p:cNvPr id="12" name="Rectangle 11"/>
           <p:cNvSpPr/>
           <p:nvPr/>
         </p:nvSpPr>
@@ -4578,7 +4629,7 @@
       </p:sp>
       <p:sp>
         <p:nvSpPr>
-          <p:cNvPr id="12" name="Rectangle 11"/>
+          <p:cNvPr id="13" name="Rectangle 12"/>
           <p:cNvSpPr/>
           <p:nvPr/>
         </p:nvSpPr>
@@ -4627,11 +4678,11 @@
       </p:sp>
       <p:sp>
         <p:nvSpPr>
-          <p:cNvPr id="13" name="TextBox 12"/>
+          <p:cNvPr id="14" name="TextBox 13"/>
           <p:cNvSpPr txBox="1"/>
           <p:nvPr>
             <p:custDataLst>
-              <p:tags r:id="rId7"/>
+              <p:tags r:id="rId8"/>
             </p:custDataLst>
           </p:nvPr>
         </p:nvSpPr>
@@ -4678,11 +4729,11 @@
       </p:sp>
       <p:sp>
         <p:nvSpPr>
-          <p:cNvPr id="14" name="TextBox 13"/>
+          <p:cNvPr id="15" name="TextBox 14"/>
           <p:cNvSpPr txBox="1"/>
           <p:nvPr>
             <p:custDataLst>
-              <p:tags r:id="rId8"/>
+              <p:tags r:id="rId9"/>
             </p:custDataLst>
           </p:nvPr>
         </p:nvSpPr>
@@ -4729,11 +4780,11 @@
       </p:sp>
       <p:sp>
         <p:nvSpPr>
-          <p:cNvPr id="15" name="TextBox 14"/>
+          <p:cNvPr id="16" name="TextBox 15"/>
           <p:cNvSpPr txBox="1"/>
           <p:nvPr>
             <p:custDataLst>
-              <p:tags r:id="rId9"/>
+              <p:tags r:id="rId10"/>
             </p:custDataLst>
           </p:nvPr>
         </p:nvSpPr>
@@ -4780,14 +4831,14 @@
       </p:sp>
       <p:pic>
         <p:nvPicPr>
-          <p:cNvPr id="16" name="Picture 15" descr="flat-icon-2.png"/>
+          <p:cNvPr id="17" name="Picture 16" descr="flat-icon-2.png"/>
           <p:cNvPicPr>
             <a:picLocks noChangeAspect="1"/>
           </p:cNvPicPr>
           <p:nvPr/>
         </p:nvPicPr>
         <p:blipFill>
-          <a:blip r:embed="rId77"/>
+          <a:blip r:embed="rId99"/>
           <a:stretch>
             <a:fillRect/>
           </a:stretch>
@@ -4804,7 +4855,82 @@
       </p:pic>
       <p:sp>
         <p:nvSpPr>
-          <p:cNvPr id="17" name="Down Arrow 16"/>
+          <p:cNvPr id="18" name="TextBox 17"/>
+          <p:cNvSpPr txBox="1"/>
+          <p:nvPr>
+            <p:custDataLst>
+              <p:tags r:id="rId11"/>
+            </p:custDataLst>
+          </p:nvPr>
+        </p:nvSpPr>
+        <p:spPr>
+          <a:xfrm>
+            <a:off x="1872000" y="6120000"/>
+            <a:ext cx="2196000" cy="756000"/>
+          </a:xfrm>
+          <a:prstGeom prst="rect">
+            <a:avLst/>
+          </a:prstGeom>
+          <a:noFill/>
+        </p:spPr>
+        <p:txBody>
+          <a:bodyPr wrap="none" lIns="0" tIns="0" rIns="0" bIns="0" anchor="ctr">
+            <a:spAutoFit/>
+          </a:bodyPr>
+          <a:lstStyle/>
+          <a:p>
+            <a:pPr algn="l">
+              <a:lnSpc>
+                <a:spcPct val="110000"/>
+              </a:lnSpc>
+              <a:spcBef>
+                <a:spcPts val="0"/>
+              </a:spcBef>
+              <a:spcAft>
+                <a:spcPts val="0"/>
+              </a:spcAft>
+            </a:pPr>
+            <a:r>
+              <a:rPr sz="1600" b="0">
+                <a:solidFill>
+                  <a:srgbClr val="171C1D"/>
+                </a:solidFill>
+                <a:latin typeface="Times New Roman"/>
+                <a:ea typeface="DFKai-SB"/>
+                <a:cs typeface="Times New Roman"/>
+              </a:rPr>
+              <a:t>產生正式類別、</a:t>
+            </a:r>
+          </a:p>
+          <a:p>
+            <a:pPr algn="l">
+              <a:lnSpc>
+                <a:spcPct val="110000"/>
+              </a:lnSpc>
+              <a:spcBef>
+                <a:spcPts val="0"/>
+              </a:spcBef>
+              <a:spcAft>
+                <a:spcPts val="0"/>
+              </a:spcAft>
+            </a:pPr>
+            <a:r>
+              <a:rPr sz="1600" b="0">
+                <a:solidFill>
+                  <a:srgbClr val="171C1D"/>
+                </a:solidFill>
+                <a:latin typeface="Times New Roman"/>
+                <a:ea typeface="DFKai-SB"/>
+                <a:cs typeface="Times New Roman"/>
+              </a:rPr>
+              <a:t>信心與流量表徵</a:t>
+            </a:r>
+          </a:p>
+        </p:txBody>
+      </p:sp>
+      <p:sp>
+        <p:nvSpPr>
+          <p:cNvPr id="19" name="Down Arrow 18"/>
           <p:cNvSpPr/>
           <p:nvPr/>
         </p:nvSpPr>
@@ -4853,7 +4979,7 @@
       </p:sp>
       <p:sp>
         <p:nvSpPr>
-          <p:cNvPr id="18" name="Rectangle 17"/>
+          <p:cNvPr id="20" name="Rectangle 19"/>
           <p:cNvSpPr/>
           <p:nvPr/>
         </p:nvSpPr>
@@ -4904,7 +5030,7 @@
       </p:sp>
       <p:sp>
         <p:nvSpPr>
-          <p:cNvPr id="19" name="Rectangle 18"/>
+          <p:cNvPr id="21" name="Rectangle 20"/>
           <p:cNvSpPr/>
           <p:nvPr/>
         </p:nvSpPr>
@@ -4953,11 +5079,11 @@
       </p:sp>
       <p:sp>
         <p:nvSpPr>
-          <p:cNvPr id="20" name="TextBox 19"/>
+          <p:cNvPr id="22" name="TextBox 21"/>
           <p:cNvSpPr txBox="1"/>
           <p:nvPr>
             <p:custDataLst>
-              <p:tags r:id="rId10"/>
+              <p:tags r:id="rId12"/>
             </p:custDataLst>
           </p:nvPr>
         </p:nvSpPr>
@@ -5004,11 +5130,11 @@
       </p:sp>
       <p:sp>
         <p:nvSpPr>
-          <p:cNvPr id="21" name="TextBox 20"/>
+          <p:cNvPr id="23" name="TextBox 22"/>
           <p:cNvSpPr txBox="1"/>
           <p:nvPr>
             <p:custDataLst>
-              <p:tags r:id="rId11"/>
+              <p:tags r:id="rId13"/>
             </p:custDataLst>
           </p:nvPr>
         </p:nvSpPr>
@@ -5055,11 +5181,11 @@
       </p:sp>
       <p:sp>
         <p:nvSpPr>
-          <p:cNvPr id="22" name="TextBox 21"/>
+          <p:cNvPr id="24" name="TextBox 23"/>
           <p:cNvSpPr txBox="1"/>
           <p:nvPr>
             <p:custDataLst>
-              <p:tags r:id="rId12"/>
+              <p:tags r:id="rId14"/>
             </p:custDataLst>
           </p:nvPr>
         </p:nvSpPr>
@@ -5106,14 +5232,14 @@
       </p:sp>
       <p:pic>
         <p:nvPicPr>
-          <p:cNvPr id="23" name="Picture 22" descr="flat-icon-3.png"/>
+          <p:cNvPr id="25" name="Picture 24" descr="flat-icon-3.png"/>
           <p:cNvPicPr>
             <a:picLocks noChangeAspect="1"/>
           </p:cNvPicPr>
           <p:nvPr/>
         </p:nvPicPr>
         <p:blipFill>
-          <a:blip r:embed="rId78"/>
+          <a:blip r:embed="rId100"/>
           <a:stretch>
             <a:fillRect/>
           </a:stretch>
@@ -5130,7 +5256,82 @@
       </p:pic>
       <p:sp>
         <p:nvSpPr>
-          <p:cNvPr id="24" name="Down Arrow 23"/>
+          <p:cNvPr id="26" name="TextBox 25"/>
+          <p:cNvSpPr txBox="1"/>
+          <p:nvPr>
+            <p:custDataLst>
+              <p:tags r:id="rId15"/>
+            </p:custDataLst>
+          </p:nvPr>
+        </p:nvSpPr>
+        <p:spPr>
+          <a:xfrm>
+            <a:off x="1872000" y="8136000"/>
+            <a:ext cx="2196000" cy="756000"/>
+          </a:xfrm>
+          <a:prstGeom prst="rect">
+            <a:avLst/>
+          </a:prstGeom>
+          <a:noFill/>
+        </p:spPr>
+        <p:txBody>
+          <a:bodyPr wrap="none" lIns="0" tIns="0" rIns="0" bIns="0" anchor="ctr">
+            <a:spAutoFit/>
+          </a:bodyPr>
+          <a:lstStyle/>
+          <a:p>
+            <a:pPr algn="l">
+              <a:lnSpc>
+                <a:spcPct val="110000"/>
+              </a:lnSpc>
+              <a:spcBef>
+                <a:spcPts val="0"/>
+              </a:spcBef>
+              <a:spcAft>
+                <a:spcPts val="0"/>
+              </a:spcAft>
+            </a:pPr>
+            <a:r>
+              <a:rPr sz="1600" b="0">
+                <a:solidFill>
+                  <a:srgbClr val="171C1D"/>
+                </a:solidFill>
+                <a:latin typeface="Times New Roman"/>
+                <a:ea typeface="DFKai-SB"/>
+                <a:cs typeface="Times New Roman"/>
+              </a:rPr>
+              <a:t>依事件任務找案例</a:t>
+            </a:r>
+          </a:p>
+          <a:p>
+            <a:pPr algn="l">
+              <a:lnSpc>
+                <a:spcPct val="110000"/>
+              </a:lnSpc>
+              <a:spcBef>
+                <a:spcPts val="0"/>
+              </a:spcBef>
+              <a:spcAft>
+                <a:spcPts val="0"/>
+              </a:spcAft>
+            </a:pPr>
+            <a:r>
+              <a:rPr sz="1600" b="0">
+                <a:solidFill>
+                  <a:srgbClr val="171C1D"/>
+                </a:solidFill>
+                <a:latin typeface="Times New Roman"/>
+                <a:ea typeface="DFKai-SB"/>
+                <a:cs typeface="Times New Roman"/>
+              </a:rPr>
+              <a:t>附上相似類別證據</a:t>
+            </a:r>
+          </a:p>
+        </p:txBody>
+      </p:sp>
+      <p:sp>
+        <p:nvSpPr>
+          <p:cNvPr id="27" name="Down Arrow 26"/>
           <p:cNvSpPr/>
           <p:nvPr/>
         </p:nvSpPr>
@@ -5179,7 +5380,7 @@
       </p:sp>
       <p:sp>
         <p:nvSpPr>
-          <p:cNvPr id="25" name="Rectangle 24"/>
+          <p:cNvPr id="28" name="Rectangle 27"/>
           <p:cNvSpPr/>
           <p:nvPr/>
         </p:nvSpPr>
@@ -5230,7 +5431,7 @@
       </p:sp>
       <p:sp>
         <p:nvSpPr>
-          <p:cNvPr id="26" name="Rectangle 25"/>
+          <p:cNvPr id="29" name="Rectangle 28"/>
           <p:cNvSpPr/>
           <p:nvPr/>
         </p:nvSpPr>
@@ -5279,11 +5480,11 @@
       </p:sp>
       <p:sp>
         <p:nvSpPr>
-          <p:cNvPr id="27" name="TextBox 26"/>
+          <p:cNvPr id="30" name="TextBox 29"/>
           <p:cNvSpPr txBox="1"/>
           <p:nvPr>
             <p:custDataLst>
-              <p:tags r:id="rId13"/>
+              <p:tags r:id="rId16"/>
             </p:custDataLst>
           </p:nvPr>
         </p:nvSpPr>
@@ -5330,11 +5531,11 @@
       </p:sp>
       <p:sp>
         <p:nvSpPr>
-          <p:cNvPr id="28" name="TextBox 27"/>
+          <p:cNvPr id="31" name="TextBox 30"/>
           <p:cNvSpPr txBox="1"/>
           <p:nvPr>
             <p:custDataLst>
-              <p:tags r:id="rId14"/>
+              <p:tags r:id="rId17"/>
             </p:custDataLst>
           </p:nvPr>
         </p:nvSpPr>
@@ -5381,11 +5582,11 @@
       </p:sp>
       <p:sp>
         <p:nvSpPr>
-          <p:cNvPr id="29" name="TextBox 28"/>
+          <p:cNvPr id="32" name="TextBox 31"/>
           <p:cNvSpPr txBox="1"/>
           <p:nvPr>
             <p:custDataLst>
-              <p:tags r:id="rId15"/>
+              <p:tags r:id="rId18"/>
             </p:custDataLst>
           </p:nvPr>
         </p:nvSpPr>
@@ -5432,7 +5633,7 @@
       </p:sp>
       <p:sp>
         <p:nvSpPr>
-          <p:cNvPr id="30" name="Rectangle 29"/>
+          <p:cNvPr id="33" name="Rectangle 32"/>
           <p:cNvSpPr/>
           <p:nvPr/>
         </p:nvSpPr>
@@ -5483,7 +5684,7 @@
       </p:sp>
       <p:cxnSp>
         <p:nvCxnSpPr>
-          <p:cNvPr id="31" name="Connector 30"/>
+          <p:cNvPr id="34" name="Connector 33"/>
           <p:cNvCxnSpPr/>
           <p:nvPr/>
         </p:nvCxnSpPr>
@@ -5519,7 +5720,7 @@
       </p:cxnSp>
       <p:cxnSp>
         <p:nvCxnSpPr>
-          <p:cNvPr id="32" name="Connector 31"/>
+          <p:cNvPr id="35" name="Connector 34"/>
           <p:cNvCxnSpPr/>
           <p:nvPr/>
         </p:nvCxnSpPr>
@@ -5555,7 +5756,7 @@
       </p:cxnSp>
       <p:cxnSp>
         <p:nvCxnSpPr>
-          <p:cNvPr id="33" name="Connector 32"/>
+          <p:cNvPr id="36" name="Connector 35"/>
           <p:cNvCxnSpPr/>
           <p:nvPr/>
         </p:nvCxnSpPr>
@@ -5591,7 +5792,82 @@
       </p:cxnSp>
       <p:sp>
         <p:nvSpPr>
-          <p:cNvPr id="34" name="Down Arrow 33"/>
+          <p:cNvPr id="37" name="TextBox 36"/>
+          <p:cNvSpPr txBox="1"/>
+          <p:nvPr>
+            <p:custDataLst>
+              <p:tags r:id="rId19"/>
+            </p:custDataLst>
+          </p:nvPr>
+        </p:nvSpPr>
+        <p:spPr>
+          <a:xfrm>
+            <a:off x="1872000" y="10152000"/>
+            <a:ext cx="2196000" cy="756000"/>
+          </a:xfrm>
+          <a:prstGeom prst="rect">
+            <a:avLst/>
+          </a:prstGeom>
+          <a:noFill/>
+        </p:spPr>
+        <p:txBody>
+          <a:bodyPr wrap="none" lIns="0" tIns="0" rIns="0" bIns="0" anchor="ctr">
+            <a:spAutoFit/>
+          </a:bodyPr>
+          <a:lstStyle/>
+          <a:p>
+            <a:pPr algn="l">
+              <a:lnSpc>
+                <a:spcPct val="110000"/>
+              </a:lnSpc>
+              <a:spcBef>
+                <a:spcPts val="0"/>
+              </a:spcBef>
+              <a:spcAft>
+                <a:spcPts val="0"/>
+              </a:spcAft>
+            </a:pPr>
+            <a:r>
+              <a:rPr sz="1600" b="0">
+                <a:solidFill>
+                  <a:srgbClr val="171C1D"/>
+                </a:solidFill>
+                <a:latin typeface="Times New Roman"/>
+                <a:ea typeface="DFKai-SB"/>
+                <a:cs typeface="Times New Roman"/>
+              </a:rPr>
+              <a:t>核對判定與案例</a:t>
+            </a:r>
+          </a:p>
+          <a:p>
+            <a:pPr algn="l">
+              <a:lnSpc>
+                <a:spcPct val="110000"/>
+              </a:lnSpc>
+              <a:spcBef>
+                <a:spcPts val="0"/>
+              </a:spcBef>
+              <a:spcAft>
+                <a:spcPts val="0"/>
+              </a:spcAft>
+            </a:pPr>
+            <a:r>
+              <a:rPr sz="1600" b="0">
+                <a:solidFill>
+                  <a:srgbClr val="171C1D"/>
+                </a:solidFill>
+                <a:latin typeface="Times New Roman"/>
+                <a:ea typeface="DFKai-SB"/>
+                <a:cs typeface="Times New Roman"/>
+              </a:rPr>
+              <a:t>附加三態稽核結論</a:t>
+            </a:r>
+          </a:p>
+        </p:txBody>
+      </p:sp>
+      <p:sp>
+        <p:nvSpPr>
+          <p:cNvPr id="38" name="Down Arrow 37"/>
           <p:cNvSpPr/>
           <p:nvPr/>
         </p:nvSpPr>
@@ -5640,7 +5916,7 @@
       </p:sp>
       <p:sp>
         <p:nvSpPr>
-          <p:cNvPr id="35" name="Rectangle 34"/>
+          <p:cNvPr id="39" name="Rectangle 38"/>
           <p:cNvSpPr/>
           <p:nvPr/>
         </p:nvSpPr>
@@ -5691,7 +5967,7 @@
       </p:sp>
       <p:sp>
         <p:nvSpPr>
-          <p:cNvPr id="36" name="Rectangle 35"/>
+          <p:cNvPr id="40" name="Rectangle 39"/>
           <p:cNvSpPr/>
           <p:nvPr/>
         </p:nvSpPr>
@@ -5740,11 +6016,11 @@
       </p:sp>
       <p:sp>
         <p:nvSpPr>
-          <p:cNvPr id="37" name="TextBox 36"/>
+          <p:cNvPr id="41" name="TextBox 40"/>
           <p:cNvSpPr txBox="1"/>
           <p:nvPr>
             <p:custDataLst>
-              <p:tags r:id="rId16"/>
+              <p:tags r:id="rId20"/>
             </p:custDataLst>
           </p:nvPr>
         </p:nvSpPr>
@@ -5791,11 +6067,11 @@
       </p:sp>
       <p:sp>
         <p:nvSpPr>
-          <p:cNvPr id="38" name="TextBox 37"/>
+          <p:cNvPr id="42" name="TextBox 41"/>
           <p:cNvSpPr txBox="1"/>
           <p:nvPr>
             <p:custDataLst>
-              <p:tags r:id="rId17"/>
+              <p:tags r:id="rId21"/>
             </p:custDataLst>
           </p:nvPr>
         </p:nvSpPr>
@@ -5842,11 +6118,11 @@
       </p:sp>
       <p:sp>
         <p:nvSpPr>
-          <p:cNvPr id="39" name="TextBox 38"/>
+          <p:cNvPr id="43" name="TextBox 42"/>
           <p:cNvSpPr txBox="1"/>
           <p:nvPr>
             <p:custDataLst>
-              <p:tags r:id="rId18"/>
+              <p:tags r:id="rId22"/>
             </p:custDataLst>
           </p:nvPr>
         </p:nvSpPr>
@@ -5893,14 +6169,14 @@
       </p:sp>
       <p:pic>
         <p:nvPicPr>
-          <p:cNvPr id="40" name="Picture 39" descr="flat-icon-4.png"/>
+          <p:cNvPr id="44" name="Picture 43" descr="flat-icon-4.png"/>
           <p:cNvPicPr>
             <a:picLocks noChangeAspect="1"/>
           </p:cNvPicPr>
           <p:nvPr/>
         </p:nvPicPr>
         <p:blipFill>
-          <a:blip r:embed="rId79"/>
+          <a:blip r:embed="rId101"/>
           <a:stretch>
             <a:fillRect/>
           </a:stretch>
@@ -5917,7 +6193,82 @@
       </p:pic>
       <p:sp>
         <p:nvSpPr>
-          <p:cNvPr id="41" name="Rectangle 40"/>
+          <p:cNvPr id="45" name="TextBox 44"/>
+          <p:cNvSpPr txBox="1"/>
+          <p:nvPr>
+            <p:custDataLst>
+              <p:tags r:id="rId23"/>
+            </p:custDataLst>
+          </p:nvPr>
+        </p:nvSpPr>
+        <p:spPr>
+          <a:xfrm>
+            <a:off x="1872000" y="12168000"/>
+            <a:ext cx="2196000" cy="756000"/>
+          </a:xfrm>
+          <a:prstGeom prst="rect">
+            <a:avLst/>
+          </a:prstGeom>
+          <a:noFill/>
+        </p:spPr>
+        <p:txBody>
+          <a:bodyPr wrap="none" lIns="0" tIns="0" rIns="0" bIns="0" anchor="ctr">
+            <a:spAutoFit/>
+          </a:bodyPr>
+          <a:lstStyle/>
+          <a:p>
+            <a:pPr algn="l">
+              <a:lnSpc>
+                <a:spcPct val="110000"/>
+              </a:lnSpc>
+              <a:spcBef>
+                <a:spcPts val="0"/>
+              </a:spcBef>
+              <a:spcAft>
+                <a:spcPts val="0"/>
+              </a:spcAft>
+            </a:pPr>
+            <a:r>
+              <a:rPr sz="1600" b="0">
+                <a:solidFill>
+                  <a:srgbClr val="171C1D"/>
+                </a:solidFill>
+                <a:latin typeface="Times New Roman"/>
+                <a:ea typeface="DFKai-SB"/>
+                <a:cs typeface="Times New Roman"/>
+              </a:rPr>
+              <a:t>策略允許才介入</a:t>
+            </a:r>
+          </a:p>
+          <a:p>
+            <a:pPr algn="l">
+              <a:lnSpc>
+                <a:spcPct val="110000"/>
+              </a:lnSpc>
+              <a:spcBef>
+                <a:spcPts val="0"/>
+              </a:spcBef>
+              <a:spcAft>
+                <a:spcPts val="0"/>
+              </a:spcAft>
+            </a:pPr>
+            <a:r>
+              <a:rPr sz="1600" b="0">
+                <a:solidFill>
+                  <a:srgbClr val="171C1D"/>
+                </a:solidFill>
+                <a:latin typeface="Times New Roman"/>
+                <a:ea typeface="DFKai-SB"/>
+                <a:cs typeface="Times New Roman"/>
+              </a:rPr>
+              <a:t>讀回並確認回復</a:t>
+            </a:r>
+          </a:p>
+        </p:txBody>
+      </p:sp>
+      <p:sp>
+        <p:nvSpPr>
+          <p:cNvPr id="46" name="Rectangle 45"/>
           <p:cNvSpPr/>
           <p:nvPr/>
         </p:nvSpPr>
@@ -5966,11 +6317,11 @@
       </p:sp>
       <p:sp>
         <p:nvSpPr>
-          <p:cNvPr id="42" name="TextBox 41"/>
+          <p:cNvPr id="47" name="TextBox 46"/>
           <p:cNvSpPr txBox="1"/>
           <p:nvPr>
             <p:custDataLst>
-              <p:tags r:id="rId19"/>
+              <p:tags r:id="rId24"/>
             </p:custDataLst>
           </p:nvPr>
         </p:nvSpPr>
@@ -6017,11 +6368,11 @@
       </p:sp>
       <p:sp>
         <p:nvSpPr>
-          <p:cNvPr id="43" name="TextBox 42"/>
+          <p:cNvPr id="48" name="TextBox 47"/>
           <p:cNvSpPr txBox="1"/>
           <p:nvPr>
             <p:custDataLst>
-              <p:tags r:id="rId20"/>
+              <p:tags r:id="rId25"/>
             </p:custDataLst>
           </p:nvPr>
         </p:nvSpPr>
@@ -6068,7 +6419,7 @@
       </p:sp>
       <p:sp>
         <p:nvSpPr>
-          <p:cNvPr id="44" name="Rectangle 43"/>
+          <p:cNvPr id="49" name="Rectangle 48"/>
           <p:cNvSpPr/>
           <p:nvPr/>
         </p:nvSpPr>
@@ -6117,11 +6468,11 @@
       </p:sp>
       <p:sp>
         <p:nvSpPr>
-          <p:cNvPr id="45" name="TextBox 44"/>
+          <p:cNvPr id="50" name="TextBox 49"/>
           <p:cNvSpPr txBox="1"/>
           <p:nvPr>
             <p:custDataLst>
-              <p:tags r:id="rId21"/>
+              <p:tags r:id="rId26"/>
             </p:custDataLst>
           </p:nvPr>
         </p:nvSpPr>
@@ -6168,11 +6519,11 @@
       </p:sp>
       <p:sp>
         <p:nvSpPr>
-          <p:cNvPr id="46" name="TextBox 45"/>
+          <p:cNvPr id="51" name="TextBox 50"/>
           <p:cNvSpPr txBox="1"/>
           <p:nvPr>
             <p:custDataLst>
-              <p:tags r:id="rId22"/>
+              <p:tags r:id="rId27"/>
             </p:custDataLst>
           </p:nvPr>
         </p:nvSpPr>
@@ -6219,7 +6570,7 @@
       </p:sp>
       <p:cxnSp>
         <p:nvCxnSpPr>
-          <p:cNvPr id="47" name="Connector 46"/>
+          <p:cNvPr id="52" name="Connector 51"/>
           <p:cNvCxnSpPr/>
           <p:nvPr/>
         </p:nvCxnSpPr>
@@ -6255,7 +6606,7 @@
       </p:cxnSp>
       <p:cxnSp>
         <p:nvCxnSpPr>
-          <p:cNvPr id="48" name="Connector 47"/>
+          <p:cNvPr id="53" name="Connector 52"/>
           <p:cNvCxnSpPr/>
           <p:nvPr/>
         </p:nvCxnSpPr>
@@ -6291,7 +6642,7 @@
       </p:cxnSp>
       <p:cxnSp>
         <p:nvCxnSpPr>
-          <p:cNvPr id="49" name="Connector 48"/>
+          <p:cNvPr id="54" name="Connector 53"/>
           <p:cNvCxnSpPr/>
           <p:nvPr/>
         </p:nvCxnSpPr>
@@ -6327,7 +6678,7 @@
       </p:cxnSp>
       <p:sp>
         <p:nvSpPr>
-          <p:cNvPr id="50" name="Right Arrow 49"/>
+          <p:cNvPr id="55" name="Right Arrow 54"/>
           <p:cNvSpPr/>
           <p:nvPr/>
         </p:nvSpPr>
@@ -6376,7 +6727,7 @@
       </p:sp>
       <p:sp>
         <p:nvSpPr>
-          <p:cNvPr id="51" name="Rectangle 50"/>
+          <p:cNvPr id="56" name="Rectangle 55"/>
           <p:cNvSpPr/>
           <p:nvPr/>
         </p:nvSpPr>
@@ -6425,11 +6776,11 @@
       </p:sp>
       <p:sp>
         <p:nvSpPr>
-          <p:cNvPr id="52" name="TextBox 51"/>
+          <p:cNvPr id="57" name="TextBox 56"/>
           <p:cNvSpPr txBox="1"/>
           <p:nvPr>
             <p:custDataLst>
-              <p:tags r:id="rId23"/>
+              <p:tags r:id="rId28"/>
             </p:custDataLst>
           </p:nvPr>
         </p:nvSpPr>
@@ -6476,11 +6827,11 @@
       </p:sp>
       <p:sp>
         <p:nvSpPr>
-          <p:cNvPr id="53" name="TextBox 52"/>
+          <p:cNvPr id="58" name="TextBox 57"/>
           <p:cNvSpPr txBox="1"/>
           <p:nvPr>
             <p:custDataLst>
-              <p:tags r:id="rId24"/>
+              <p:tags r:id="rId29"/>
             </p:custDataLst>
           </p:nvPr>
         </p:nvSpPr>
@@ -6527,7 +6878,7 @@
       </p:sp>
       <p:sp>
         <p:nvSpPr>
-          <p:cNvPr id="54" name="Right Arrow 53"/>
+          <p:cNvPr id="59" name="Right Arrow 58"/>
           <p:cNvSpPr/>
           <p:nvPr/>
         </p:nvSpPr>
@@ -6576,7 +6927,7 @@
       </p:sp>
       <p:sp>
         <p:nvSpPr>
-          <p:cNvPr id="55" name="Rectangle 54"/>
+          <p:cNvPr id="60" name="Rectangle 59"/>
           <p:cNvSpPr/>
           <p:nvPr/>
         </p:nvSpPr>
@@ -6625,11 +6976,11 @@
       </p:sp>
       <p:sp>
         <p:nvSpPr>
-          <p:cNvPr id="56" name="TextBox 55"/>
+          <p:cNvPr id="61" name="TextBox 60"/>
           <p:cNvSpPr txBox="1"/>
           <p:nvPr>
             <p:custDataLst>
-              <p:tags r:id="rId25"/>
+              <p:tags r:id="rId30"/>
             </p:custDataLst>
           </p:nvPr>
         </p:nvSpPr>
@@ -6676,11 +7027,11 @@
       </p:sp>
       <p:sp>
         <p:nvSpPr>
-          <p:cNvPr id="57" name="TextBox 56"/>
+          <p:cNvPr id="62" name="TextBox 61"/>
           <p:cNvSpPr txBox="1"/>
           <p:nvPr>
             <p:custDataLst>
-              <p:tags r:id="rId26"/>
+              <p:tags r:id="rId31"/>
             </p:custDataLst>
           </p:nvPr>
         </p:nvSpPr>
@@ -6727,7 +7078,7 @@
       </p:sp>
       <p:sp>
         <p:nvSpPr>
-          <p:cNvPr id="58" name="Rectangle 57"/>
+          <p:cNvPr id="63" name="Rectangle 62"/>
           <p:cNvSpPr/>
           <p:nvPr/>
         </p:nvSpPr>
@@ -6776,11 +7127,11 @@
       </p:sp>
       <p:sp>
         <p:nvSpPr>
-          <p:cNvPr id="59" name="TextBox 58"/>
+          <p:cNvPr id="64" name="TextBox 63"/>
           <p:cNvSpPr txBox="1"/>
           <p:nvPr>
             <p:custDataLst>
-              <p:tags r:id="rId27"/>
+              <p:tags r:id="rId32"/>
             </p:custDataLst>
           </p:nvPr>
         </p:nvSpPr>
@@ -6827,7 +7178,7 @@
       </p:sp>
       <p:sp>
         <p:nvSpPr>
-          <p:cNvPr id="60" name="Rectangle 59"/>
+          <p:cNvPr id="65" name="Rectangle 64"/>
           <p:cNvSpPr/>
           <p:nvPr/>
         </p:nvSpPr>
@@ -6876,11 +7227,11 @@
       </p:sp>
       <p:sp>
         <p:nvSpPr>
-          <p:cNvPr id="61" name="TextBox 60"/>
+          <p:cNvPr id="66" name="TextBox 65"/>
           <p:cNvSpPr txBox="1"/>
           <p:nvPr>
             <p:custDataLst>
-              <p:tags r:id="rId28"/>
+              <p:tags r:id="rId33"/>
             </p:custDataLst>
           </p:nvPr>
         </p:nvSpPr>
@@ -6927,7 +7278,7 @@
       </p:sp>
       <p:cxnSp>
         <p:nvCxnSpPr>
-          <p:cNvPr id="62" name="Connector 61"/>
+          <p:cNvPr id="67" name="Connector 66"/>
           <p:cNvCxnSpPr/>
           <p:nvPr/>
         </p:nvCxnSpPr>
@@ -6963,7 +7314,7 @@
       </p:cxnSp>
       <p:cxnSp>
         <p:nvCxnSpPr>
-          <p:cNvPr id="63" name="Connector 62"/>
+          <p:cNvPr id="68" name="Connector 67"/>
           <p:cNvCxnSpPr/>
           <p:nvPr/>
         </p:nvCxnSpPr>
@@ -6999,7 +7350,7 @@
       </p:cxnSp>
       <p:cxnSp>
         <p:nvCxnSpPr>
-          <p:cNvPr id="64" name="Connector 63"/>
+          <p:cNvPr id="69" name="Connector 68"/>
           <p:cNvCxnSpPr/>
           <p:nvPr/>
         </p:nvCxnSpPr>
@@ -7035,7 +7386,7 @@
       </p:cxnSp>
       <p:sp>
         <p:nvSpPr>
-          <p:cNvPr id="65" name="Right Arrow 64"/>
+          <p:cNvPr id="70" name="Right Arrow 69"/>
           <p:cNvSpPr/>
           <p:nvPr/>
         </p:nvSpPr>
@@ -7084,7 +7435,7 @@
       </p:sp>
       <p:sp>
         <p:nvSpPr>
-          <p:cNvPr id="66" name="Rectangle 65"/>
+          <p:cNvPr id="71" name="Rectangle 70"/>
           <p:cNvSpPr/>
           <p:nvPr/>
         </p:nvSpPr>
@@ -7133,11 +7484,11 @@
       </p:sp>
       <p:sp>
         <p:nvSpPr>
-          <p:cNvPr id="67" name="TextBox 66"/>
+          <p:cNvPr id="72" name="TextBox 71"/>
           <p:cNvSpPr txBox="1"/>
           <p:nvPr>
             <p:custDataLst>
-              <p:tags r:id="rId29"/>
+              <p:tags r:id="rId34"/>
             </p:custDataLst>
           </p:nvPr>
         </p:nvSpPr>
@@ -7184,11 +7535,11 @@
       </p:sp>
       <p:sp>
         <p:nvSpPr>
-          <p:cNvPr id="68" name="TextBox 67"/>
+          <p:cNvPr id="73" name="TextBox 72"/>
           <p:cNvSpPr txBox="1"/>
           <p:nvPr>
             <p:custDataLst>
-              <p:tags r:id="rId30"/>
+              <p:tags r:id="rId35"/>
             </p:custDataLst>
           </p:nvPr>
         </p:nvSpPr>
@@ -7235,7 +7586,7 @@
       </p:sp>
       <p:sp>
         <p:nvSpPr>
-          <p:cNvPr id="69" name="Right Arrow 68"/>
+          <p:cNvPr id="74" name="Right Arrow 73"/>
           <p:cNvSpPr/>
           <p:nvPr/>
         </p:nvSpPr>
@@ -7284,7 +7635,7 @@
       </p:sp>
       <p:sp>
         <p:nvSpPr>
-          <p:cNvPr id="70" name="Rectangle 69"/>
+          <p:cNvPr id="75" name="Rectangle 74"/>
           <p:cNvSpPr/>
           <p:nvPr/>
         </p:nvSpPr>
@@ -7333,18 +7684,18 @@
       </p:sp>
       <p:sp>
         <p:nvSpPr>
-          <p:cNvPr id="71" name="TextBox 70"/>
+          <p:cNvPr id="76" name="TextBox 75"/>
           <p:cNvSpPr txBox="1"/>
           <p:nvPr>
             <p:custDataLst>
-              <p:tags r:id="rId31"/>
+              <p:tags r:id="rId36"/>
             </p:custDataLst>
           </p:nvPr>
         </p:nvSpPr>
         <p:spPr>
           <a:xfrm>
-            <a:off x="11560250" y="7740000"/>
-            <a:ext cx="2736000" cy="504000"/>
+            <a:off x="11560250" y="7704000"/>
+            <a:ext cx="2736000" cy="360000"/>
           </a:xfrm>
           <a:prstGeom prst="rect">
             <a:avLst/>
@@ -7377,25 +7728,76 @@
                 <a:ea typeface="DFKai-SB"/>
                 <a:cs typeface="Times New Roman"/>
               </a:rPr>
-              <a:t>Top-5證據</a:t>
-            </a:r>
-          </a:p>
-        </p:txBody>
-      </p:sp>
-      <p:sp>
-        <p:nvSpPr>
-          <p:cNvPr id="72" name="TextBox 71"/>
+              <a:t>Top-5訓練案例</a:t>
+            </a:r>
+          </a:p>
+        </p:txBody>
+      </p:sp>
+      <p:sp>
+        <p:nvSpPr>
+          <p:cNvPr id="77" name="Rectangle 76"/>
+          <p:cNvSpPr/>
+          <p:nvPr/>
+        </p:nvSpPr>
+        <p:spPr>
+          <a:xfrm>
+            <a:off x="11664000" y="8136000"/>
+            <a:ext cx="432000" cy="360000"/>
+          </a:xfrm>
+          <a:prstGeom prst="rect">
+            <a:avLst/>
+          </a:prstGeom>
+          <a:solidFill>
+            <a:srgbClr val="EAF0F4"/>
+          </a:solidFill>
+          <a:ln w="10160">
+            <a:solidFill>
+              <a:srgbClr val="D6DDE0"/>
+            </a:solidFill>
+          </a:ln>
+          <a:effectLst/>
+        </p:spPr>
+        <p:style>
+          <a:lnRef idx="1">
+            <a:schemeClr val="accent1"/>
+          </a:lnRef>
+          <a:fillRef idx="3">
+            <a:schemeClr val="accent1"/>
+          </a:fillRef>
+          <a:effectRef idx="2">
+            <a:schemeClr val="accent1"/>
+          </a:effectRef>
+          <a:fontRef idx="minor">
+            <a:schemeClr val="lt1"/>
+          </a:fontRef>
+        </p:style>
+        <p:txBody>
+          <a:bodyPr rtlCol="0" anchor="ctr"/>
+          <a:lstStyle/>
+          <a:p>
+            <a:pPr algn="ctr"/>
+            <a:endParaRPr>
+              <a:latin typeface="Times New Roman"/>
+              <a:ea typeface="DFKai-SB"/>
+              <a:cs typeface="Times New Roman"/>
+            </a:endParaRPr>
+          </a:p>
+        </p:txBody>
+      </p:sp>
+      <p:sp>
+        <p:nvSpPr>
+          <p:cNvPr id="78" name="TextBox 77"/>
           <p:cNvSpPr txBox="1"/>
           <p:nvPr>
             <p:custDataLst>
-              <p:tags r:id="rId32"/>
+              <p:tags r:id="rId37"/>
             </p:custDataLst>
           </p:nvPr>
         </p:nvSpPr>
         <p:spPr>
           <a:xfrm>
-            <a:off x="11569776" y="8190000"/>
-            <a:ext cx="2736000" cy="387000"/>
+            <a:off x="11635425" y="8136000"/>
+            <a:ext cx="432000" cy="360000"/>
           </a:xfrm>
           <a:prstGeom prst="rect">
             <a:avLst/>
@@ -7420,22 +7822,430 @@
               </a:spcAft>
             </a:pPr>
             <a:r>
-              <a:rPr sz="1400" b="0">
+              <a:rPr sz="1800" b="0">
                 <a:solidFill>
-                  <a:srgbClr val="53666E"/>
+                  <a:srgbClr val="105186"/>
                 </a:solidFill>
                 <a:latin typeface="Times New Roman"/>
                 <a:ea typeface="DFKai-SB"/>
                 <a:cs typeface="Times New Roman"/>
               </a:rPr>
-              <a:t>僅檢索訓練案例</a:t>
-            </a:r>
-          </a:p>
-        </p:txBody>
-      </p:sp>
-      <p:sp>
-        <p:nvSpPr>
-          <p:cNvPr id="73" name="Rectangle 72"/>
+              <a:t>1</a:t>
+            </a:r>
+          </a:p>
+        </p:txBody>
+      </p:sp>
+      <p:sp>
+        <p:nvSpPr>
+          <p:cNvPr id="79" name="Rectangle 78"/>
+          <p:cNvSpPr/>
+          <p:nvPr/>
+        </p:nvSpPr>
+        <p:spPr>
+          <a:xfrm>
+            <a:off x="12186000" y="8136000"/>
+            <a:ext cx="432000" cy="360000"/>
+          </a:xfrm>
+          <a:prstGeom prst="rect">
+            <a:avLst/>
+          </a:prstGeom>
+          <a:solidFill>
+            <a:srgbClr val="EAF0F4"/>
+          </a:solidFill>
+          <a:ln w="10160">
+            <a:solidFill>
+              <a:srgbClr val="D6DDE0"/>
+            </a:solidFill>
+          </a:ln>
+          <a:effectLst/>
+        </p:spPr>
+        <p:style>
+          <a:lnRef idx="1">
+            <a:schemeClr val="accent1"/>
+          </a:lnRef>
+          <a:fillRef idx="3">
+            <a:schemeClr val="accent1"/>
+          </a:fillRef>
+          <a:effectRef idx="2">
+            <a:schemeClr val="accent1"/>
+          </a:effectRef>
+          <a:fontRef idx="minor">
+            <a:schemeClr val="lt1"/>
+          </a:fontRef>
+        </p:style>
+        <p:txBody>
+          <a:bodyPr rtlCol="0" anchor="ctr"/>
+          <a:lstStyle/>
+          <a:p>
+            <a:pPr algn="ctr"/>
+            <a:endParaRPr>
+              <a:latin typeface="Times New Roman"/>
+              <a:ea typeface="DFKai-SB"/>
+              <a:cs typeface="Times New Roman"/>
+            </a:endParaRPr>
+          </a:p>
+        </p:txBody>
+      </p:sp>
+      <p:sp>
+        <p:nvSpPr>
+          <p:cNvPr id="80" name="TextBox 79"/>
+          <p:cNvSpPr txBox="1"/>
+          <p:nvPr>
+            <p:custDataLst>
+              <p:tags r:id="rId38"/>
+            </p:custDataLst>
+          </p:nvPr>
+        </p:nvSpPr>
+        <p:spPr>
+          <a:xfrm>
+            <a:off x="12157425" y="8136000"/>
+            <a:ext cx="432000" cy="360000"/>
+          </a:xfrm>
+          <a:prstGeom prst="rect">
+            <a:avLst/>
+          </a:prstGeom>
+          <a:noFill/>
+        </p:spPr>
+        <p:txBody>
+          <a:bodyPr wrap="none" lIns="0" tIns="0" rIns="0" bIns="0" anchor="ctr">
+            <a:spAutoFit/>
+          </a:bodyPr>
+          <a:lstStyle/>
+          <a:p>
+            <a:pPr algn="ctr">
+              <a:lnSpc>
+                <a:spcPct val="110000"/>
+              </a:lnSpc>
+              <a:spcBef>
+                <a:spcPts val="0"/>
+              </a:spcBef>
+              <a:spcAft>
+                <a:spcPts val="0"/>
+              </a:spcAft>
+            </a:pPr>
+            <a:r>
+              <a:rPr sz="1800" b="0">
+                <a:solidFill>
+                  <a:srgbClr val="105186"/>
+                </a:solidFill>
+                <a:latin typeface="Times New Roman"/>
+                <a:ea typeface="DFKai-SB"/>
+                <a:cs typeface="Times New Roman"/>
+              </a:rPr>
+              <a:t>2</a:t>
+            </a:r>
+          </a:p>
+        </p:txBody>
+      </p:sp>
+      <p:sp>
+        <p:nvSpPr>
+          <p:cNvPr id="81" name="Rectangle 80"/>
+          <p:cNvSpPr/>
+          <p:nvPr/>
+        </p:nvSpPr>
+        <p:spPr>
+          <a:xfrm>
+            <a:off x="12708000" y="8136000"/>
+            <a:ext cx="432000" cy="360000"/>
+          </a:xfrm>
+          <a:prstGeom prst="rect">
+            <a:avLst/>
+          </a:prstGeom>
+          <a:solidFill>
+            <a:srgbClr val="EAF0F4"/>
+          </a:solidFill>
+          <a:ln w="10160">
+            <a:solidFill>
+              <a:srgbClr val="D6DDE0"/>
+            </a:solidFill>
+          </a:ln>
+          <a:effectLst/>
+        </p:spPr>
+        <p:style>
+          <a:lnRef idx="1">
+            <a:schemeClr val="accent1"/>
+          </a:lnRef>
+          <a:fillRef idx="3">
+            <a:schemeClr val="accent1"/>
+          </a:fillRef>
+          <a:effectRef idx="2">
+            <a:schemeClr val="accent1"/>
+          </a:effectRef>
+          <a:fontRef idx="minor">
+            <a:schemeClr val="lt1"/>
+          </a:fontRef>
+        </p:style>
+        <p:txBody>
+          <a:bodyPr rtlCol="0" anchor="ctr"/>
+          <a:lstStyle/>
+          <a:p>
+            <a:pPr algn="ctr"/>
+            <a:endParaRPr>
+              <a:latin typeface="Times New Roman"/>
+              <a:ea typeface="DFKai-SB"/>
+              <a:cs typeface="Times New Roman"/>
+            </a:endParaRPr>
+          </a:p>
+        </p:txBody>
+      </p:sp>
+      <p:sp>
+        <p:nvSpPr>
+          <p:cNvPr id="82" name="TextBox 81"/>
+          <p:cNvSpPr txBox="1"/>
+          <p:nvPr>
+            <p:custDataLst>
+              <p:tags r:id="rId39"/>
+            </p:custDataLst>
+          </p:nvPr>
+        </p:nvSpPr>
+        <p:spPr>
+          <a:xfrm>
+            <a:off x="12679425" y="8136000"/>
+            <a:ext cx="432000" cy="360000"/>
+          </a:xfrm>
+          <a:prstGeom prst="rect">
+            <a:avLst/>
+          </a:prstGeom>
+          <a:noFill/>
+        </p:spPr>
+        <p:txBody>
+          <a:bodyPr wrap="none" lIns="0" tIns="0" rIns="0" bIns="0" anchor="ctr">
+            <a:spAutoFit/>
+          </a:bodyPr>
+          <a:lstStyle/>
+          <a:p>
+            <a:pPr algn="ctr">
+              <a:lnSpc>
+                <a:spcPct val="110000"/>
+              </a:lnSpc>
+              <a:spcBef>
+                <a:spcPts val="0"/>
+              </a:spcBef>
+              <a:spcAft>
+                <a:spcPts val="0"/>
+              </a:spcAft>
+            </a:pPr>
+            <a:r>
+              <a:rPr sz="1800" b="0">
+                <a:solidFill>
+                  <a:srgbClr val="105186"/>
+                </a:solidFill>
+                <a:latin typeface="Times New Roman"/>
+                <a:ea typeface="DFKai-SB"/>
+                <a:cs typeface="Times New Roman"/>
+              </a:rPr>
+              <a:t>3</a:t>
+            </a:r>
+          </a:p>
+        </p:txBody>
+      </p:sp>
+      <p:sp>
+        <p:nvSpPr>
+          <p:cNvPr id="83" name="Rectangle 82"/>
+          <p:cNvSpPr/>
+          <p:nvPr/>
+        </p:nvSpPr>
+        <p:spPr>
+          <a:xfrm>
+            <a:off x="13230000" y="8136000"/>
+            <a:ext cx="432000" cy="360000"/>
+          </a:xfrm>
+          <a:prstGeom prst="rect">
+            <a:avLst/>
+          </a:prstGeom>
+          <a:solidFill>
+            <a:srgbClr val="EAF0F4"/>
+          </a:solidFill>
+          <a:ln w="10160">
+            <a:solidFill>
+              <a:srgbClr val="D6DDE0"/>
+            </a:solidFill>
+          </a:ln>
+          <a:effectLst/>
+        </p:spPr>
+        <p:style>
+          <a:lnRef idx="1">
+            <a:schemeClr val="accent1"/>
+          </a:lnRef>
+          <a:fillRef idx="3">
+            <a:schemeClr val="accent1"/>
+          </a:fillRef>
+          <a:effectRef idx="2">
+            <a:schemeClr val="accent1"/>
+          </a:effectRef>
+          <a:fontRef idx="minor">
+            <a:schemeClr val="lt1"/>
+          </a:fontRef>
+        </p:style>
+        <p:txBody>
+          <a:bodyPr rtlCol="0" anchor="ctr"/>
+          <a:lstStyle/>
+          <a:p>
+            <a:pPr algn="ctr"/>
+            <a:endParaRPr>
+              <a:latin typeface="Times New Roman"/>
+              <a:ea typeface="DFKai-SB"/>
+              <a:cs typeface="Times New Roman"/>
+            </a:endParaRPr>
+          </a:p>
+        </p:txBody>
+      </p:sp>
+      <p:sp>
+        <p:nvSpPr>
+          <p:cNvPr id="84" name="TextBox 83"/>
+          <p:cNvSpPr txBox="1"/>
+          <p:nvPr>
+            <p:custDataLst>
+              <p:tags r:id="rId40"/>
+            </p:custDataLst>
+          </p:nvPr>
+        </p:nvSpPr>
+        <p:spPr>
+          <a:xfrm>
+            <a:off x="13201427" y="8136000"/>
+            <a:ext cx="432000" cy="360000"/>
+          </a:xfrm>
+          <a:prstGeom prst="rect">
+            <a:avLst/>
+          </a:prstGeom>
+          <a:noFill/>
+        </p:spPr>
+        <p:txBody>
+          <a:bodyPr wrap="none" lIns="0" tIns="0" rIns="0" bIns="0" anchor="ctr">
+            <a:spAutoFit/>
+          </a:bodyPr>
+          <a:lstStyle/>
+          <a:p>
+            <a:pPr algn="ctr">
+              <a:lnSpc>
+                <a:spcPct val="110000"/>
+              </a:lnSpc>
+              <a:spcBef>
+                <a:spcPts val="0"/>
+              </a:spcBef>
+              <a:spcAft>
+                <a:spcPts val="0"/>
+              </a:spcAft>
+            </a:pPr>
+            <a:r>
+              <a:rPr sz="1800" b="0">
+                <a:solidFill>
+                  <a:srgbClr val="105186"/>
+                </a:solidFill>
+                <a:latin typeface="Times New Roman"/>
+                <a:ea typeface="DFKai-SB"/>
+                <a:cs typeface="Times New Roman"/>
+              </a:rPr>
+              <a:t>4</a:t>
+            </a:r>
+          </a:p>
+        </p:txBody>
+      </p:sp>
+      <p:sp>
+        <p:nvSpPr>
+          <p:cNvPr id="85" name="Rectangle 84"/>
+          <p:cNvSpPr/>
+          <p:nvPr/>
+        </p:nvSpPr>
+        <p:spPr>
+          <a:xfrm>
+            <a:off x="13752000" y="8136000"/>
+            <a:ext cx="432000" cy="360000"/>
+          </a:xfrm>
+          <a:prstGeom prst="rect">
+            <a:avLst/>
+          </a:prstGeom>
+          <a:solidFill>
+            <a:srgbClr val="EAF0F4"/>
+          </a:solidFill>
+          <a:ln w="10160">
+            <a:solidFill>
+              <a:srgbClr val="D6DDE0"/>
+            </a:solidFill>
+          </a:ln>
+          <a:effectLst/>
+        </p:spPr>
+        <p:style>
+          <a:lnRef idx="1">
+            <a:schemeClr val="accent1"/>
+          </a:lnRef>
+          <a:fillRef idx="3">
+            <a:schemeClr val="accent1"/>
+          </a:fillRef>
+          <a:effectRef idx="2">
+            <a:schemeClr val="accent1"/>
+          </a:effectRef>
+          <a:fontRef idx="minor">
+            <a:schemeClr val="lt1"/>
+          </a:fontRef>
+        </p:style>
+        <p:txBody>
+          <a:bodyPr rtlCol="0" anchor="ctr"/>
+          <a:lstStyle/>
+          <a:p>
+            <a:pPr algn="ctr"/>
+            <a:endParaRPr>
+              <a:latin typeface="Times New Roman"/>
+              <a:ea typeface="DFKai-SB"/>
+              <a:cs typeface="Times New Roman"/>
+            </a:endParaRPr>
+          </a:p>
+        </p:txBody>
+      </p:sp>
+      <p:sp>
+        <p:nvSpPr>
+          <p:cNvPr id="86" name="TextBox 85"/>
+          <p:cNvSpPr txBox="1"/>
+          <p:nvPr>
+            <p:custDataLst>
+              <p:tags r:id="rId41"/>
+            </p:custDataLst>
+          </p:nvPr>
+        </p:nvSpPr>
+        <p:spPr>
+          <a:xfrm>
+            <a:off x="13723423" y="8136000"/>
+            <a:ext cx="432000" cy="360000"/>
+          </a:xfrm>
+          <a:prstGeom prst="rect">
+            <a:avLst/>
+          </a:prstGeom>
+          <a:noFill/>
+        </p:spPr>
+        <p:txBody>
+          <a:bodyPr wrap="none" lIns="0" tIns="0" rIns="0" bIns="0" anchor="ctr">
+            <a:spAutoFit/>
+          </a:bodyPr>
+          <a:lstStyle/>
+          <a:p>
+            <a:pPr algn="ctr">
+              <a:lnSpc>
+                <a:spcPct val="110000"/>
+              </a:lnSpc>
+              <a:spcBef>
+                <a:spcPts val="0"/>
+              </a:spcBef>
+              <a:spcAft>
+                <a:spcPts val="0"/>
+              </a:spcAft>
+            </a:pPr>
+            <a:r>
+              <a:rPr sz="1800" b="0">
+                <a:solidFill>
+                  <a:srgbClr val="105186"/>
+                </a:solidFill>
+                <a:latin typeface="Times New Roman"/>
+                <a:ea typeface="DFKai-SB"/>
+                <a:cs typeface="Times New Roman"/>
+              </a:rPr>
+              <a:t>5</a:t>
+            </a:r>
+          </a:p>
+        </p:txBody>
+      </p:sp>
+      <p:sp>
+        <p:nvSpPr>
+          <p:cNvPr id="87" name="Rectangle 86"/>
           <p:cNvSpPr/>
           <p:nvPr/>
         </p:nvSpPr>
@@ -7484,11 +8294,11 @@
       </p:sp>
       <p:sp>
         <p:nvSpPr>
-          <p:cNvPr id="74" name="TextBox 73"/>
+          <p:cNvPr id="88" name="TextBox 87"/>
           <p:cNvSpPr txBox="1"/>
           <p:nvPr>
             <p:custDataLst>
-              <p:tags r:id="rId33"/>
+              <p:tags r:id="rId42"/>
             </p:custDataLst>
           </p:nvPr>
         </p:nvSpPr>
@@ -7535,7 +8345,7 @@
       </p:sp>
       <p:sp>
         <p:nvSpPr>
-          <p:cNvPr id="75" name="Rectangle 74"/>
+          <p:cNvPr id="89" name="Rectangle 88"/>
           <p:cNvSpPr/>
           <p:nvPr/>
         </p:nvSpPr>
@@ -7584,11 +8394,11 @@
       </p:sp>
       <p:sp>
         <p:nvSpPr>
-          <p:cNvPr id="76" name="TextBox 75"/>
+          <p:cNvPr id="90" name="TextBox 89"/>
           <p:cNvSpPr txBox="1"/>
           <p:nvPr>
             <p:custDataLst>
-              <p:tags r:id="rId34"/>
+              <p:tags r:id="rId43"/>
             </p:custDataLst>
           </p:nvPr>
         </p:nvSpPr>
@@ -7635,7 +8445,7 @@
       </p:sp>
       <p:cxnSp>
         <p:nvCxnSpPr>
-          <p:cNvPr id="77" name="Connector 76"/>
+          <p:cNvPr id="91" name="Connector 90"/>
           <p:cNvCxnSpPr/>
           <p:nvPr/>
         </p:nvCxnSpPr>
@@ -7671,7 +8481,7 @@
       </p:cxnSp>
       <p:cxnSp>
         <p:nvCxnSpPr>
-          <p:cNvPr id="78" name="Connector 77"/>
+          <p:cNvPr id="92" name="Connector 91"/>
           <p:cNvCxnSpPr/>
           <p:nvPr/>
         </p:nvCxnSpPr>
@@ -7707,7 +8517,7 @@
       </p:cxnSp>
       <p:cxnSp>
         <p:nvCxnSpPr>
-          <p:cNvPr id="79" name="Connector 78"/>
+          <p:cNvPr id="93" name="Connector 92"/>
           <p:cNvCxnSpPr/>
           <p:nvPr/>
         </p:nvCxnSpPr>
@@ -7743,7 +8553,7 @@
       </p:cxnSp>
       <p:sp>
         <p:nvSpPr>
-          <p:cNvPr id="80" name="Right Arrow 79"/>
+          <p:cNvPr id="94" name="Right Arrow 93"/>
           <p:cNvSpPr/>
           <p:nvPr/>
         </p:nvSpPr>
@@ -7792,7 +8602,7 @@
       </p:sp>
       <p:sp>
         <p:nvSpPr>
-          <p:cNvPr id="81" name="Rectangle 80"/>
+          <p:cNvPr id="95" name="Rectangle 94"/>
           <p:cNvSpPr/>
           <p:nvPr/>
         </p:nvSpPr>
@@ -7841,11 +8651,11 @@
       </p:sp>
       <p:sp>
         <p:nvSpPr>
-          <p:cNvPr id="82" name="TextBox 81"/>
+          <p:cNvPr id="96" name="TextBox 95"/>
           <p:cNvSpPr txBox="1"/>
           <p:nvPr>
             <p:custDataLst>
-              <p:tags r:id="rId35"/>
+              <p:tags r:id="rId44"/>
             </p:custDataLst>
           </p:nvPr>
         </p:nvSpPr>
@@ -7892,11 +8702,11 @@
       </p:sp>
       <p:sp>
         <p:nvSpPr>
-          <p:cNvPr id="83" name="TextBox 82"/>
+          <p:cNvPr id="97" name="TextBox 96"/>
           <p:cNvSpPr txBox="1"/>
           <p:nvPr>
             <p:custDataLst>
-              <p:tags r:id="rId36"/>
+              <p:tags r:id="rId45"/>
             </p:custDataLst>
           </p:nvPr>
         </p:nvSpPr>
@@ -7943,7 +8753,7 @@
       </p:sp>
       <p:sp>
         <p:nvSpPr>
-          <p:cNvPr id="84" name="Right Arrow 83"/>
+          <p:cNvPr id="98" name="Right Arrow 97"/>
           <p:cNvSpPr/>
           <p:nvPr/>
         </p:nvSpPr>
@@ -7992,7 +8802,7 @@
       </p:sp>
       <p:sp>
         <p:nvSpPr>
-          <p:cNvPr id="85" name="Rectangle 84"/>
+          <p:cNvPr id="99" name="Rectangle 98"/>
           <p:cNvSpPr/>
           <p:nvPr/>
         </p:nvSpPr>
@@ -8041,11 +8851,11 @@
       </p:sp>
       <p:sp>
         <p:nvSpPr>
-          <p:cNvPr id="86" name="TextBox 85"/>
+          <p:cNvPr id="100" name="TextBox 99"/>
           <p:cNvSpPr txBox="1"/>
           <p:nvPr>
             <p:custDataLst>
-              <p:tags r:id="rId37"/>
+              <p:tags r:id="rId46"/>
             </p:custDataLst>
           </p:nvPr>
         </p:nvSpPr>
@@ -8092,7 +8902,7 @@
       </p:sp>
       <p:sp>
         <p:nvSpPr>
-          <p:cNvPr id="87" name="Rectangle 86"/>
+          <p:cNvPr id="101" name="Rectangle 100"/>
           <p:cNvSpPr/>
           <p:nvPr/>
         </p:nvSpPr>
@@ -8141,11 +8951,11 @@
       </p:sp>
       <p:sp>
         <p:nvSpPr>
-          <p:cNvPr id="88" name="TextBox 87"/>
+          <p:cNvPr id="102" name="TextBox 101"/>
           <p:cNvSpPr txBox="1"/>
           <p:nvPr>
             <p:custDataLst>
-              <p:tags r:id="rId38"/>
+              <p:tags r:id="rId47"/>
             </p:custDataLst>
           </p:nvPr>
         </p:nvSpPr>
@@ -8192,7 +9002,7 @@
       </p:sp>
       <p:sp>
         <p:nvSpPr>
-          <p:cNvPr id="89" name="Rectangle 88"/>
+          <p:cNvPr id="103" name="Rectangle 102"/>
           <p:cNvSpPr/>
           <p:nvPr/>
         </p:nvSpPr>
@@ -8241,11 +9051,11 @@
       </p:sp>
       <p:sp>
         <p:nvSpPr>
-          <p:cNvPr id="90" name="TextBox 89"/>
+          <p:cNvPr id="104" name="TextBox 103"/>
           <p:cNvSpPr txBox="1"/>
           <p:nvPr>
             <p:custDataLst>
-              <p:tags r:id="rId39"/>
+              <p:tags r:id="rId48"/>
             </p:custDataLst>
           </p:nvPr>
         </p:nvSpPr>
@@ -8292,11 +9102,11 @@
       </p:sp>
       <p:sp>
         <p:nvSpPr>
-          <p:cNvPr id="91" name="TextBox 90"/>
+          <p:cNvPr id="105" name="TextBox 104"/>
           <p:cNvSpPr txBox="1"/>
           <p:nvPr>
             <p:custDataLst>
-              <p:tags r:id="rId40"/>
+              <p:tags r:id="rId49"/>
             </p:custDataLst>
           </p:nvPr>
         </p:nvSpPr>
@@ -8343,7 +9153,7 @@
       </p:sp>
       <p:sp>
         <p:nvSpPr>
-          <p:cNvPr id="92" name="Rectangle 91"/>
+          <p:cNvPr id="106" name="Rectangle 105"/>
           <p:cNvSpPr/>
           <p:nvPr/>
         </p:nvSpPr>
@@ -8392,11 +9202,11 @@
       </p:sp>
       <p:sp>
         <p:nvSpPr>
-          <p:cNvPr id="93" name="TextBox 92"/>
+          <p:cNvPr id="107" name="TextBox 106"/>
           <p:cNvSpPr txBox="1"/>
           <p:nvPr>
             <p:custDataLst>
-              <p:tags r:id="rId41"/>
+              <p:tags r:id="rId50"/>
             </p:custDataLst>
           </p:nvPr>
         </p:nvSpPr>
@@ -8443,7 +9253,7 @@
       </p:sp>
       <p:sp>
         <p:nvSpPr>
-          <p:cNvPr id="94" name="Right Arrow 93"/>
+          <p:cNvPr id="108" name="Right Arrow 107"/>
           <p:cNvSpPr/>
           <p:nvPr/>
         </p:nvSpPr>
@@ -8492,7 +9302,7 @@
       </p:sp>
       <p:sp>
         <p:nvSpPr>
-          <p:cNvPr id="95" name="Rectangle 94"/>
+          <p:cNvPr id="109" name="Rectangle 108"/>
           <p:cNvSpPr/>
           <p:nvPr/>
         </p:nvSpPr>
@@ -8541,11 +9351,11 @@
       </p:sp>
       <p:sp>
         <p:nvSpPr>
-          <p:cNvPr id="96" name="TextBox 95"/>
+          <p:cNvPr id="110" name="TextBox 109"/>
           <p:cNvSpPr txBox="1"/>
           <p:nvPr>
             <p:custDataLst>
-              <p:tags r:id="rId42"/>
+              <p:tags r:id="rId51"/>
             </p:custDataLst>
           </p:nvPr>
         </p:nvSpPr>
@@ -8592,7 +9402,7 @@
       </p:sp>
       <p:sp>
         <p:nvSpPr>
-          <p:cNvPr id="97" name="Right Arrow 96"/>
+          <p:cNvPr id="111" name="Right Arrow 110"/>
           <p:cNvSpPr/>
           <p:nvPr/>
         </p:nvSpPr>
@@ -8641,7 +9451,7 @@
       </p:sp>
       <p:sp>
         <p:nvSpPr>
-          <p:cNvPr id="98" name="Rectangle 97"/>
+          <p:cNvPr id="112" name="Rectangle 111"/>
           <p:cNvSpPr/>
           <p:nvPr/>
         </p:nvSpPr>
@@ -8690,11 +9500,11 @@
       </p:sp>
       <p:sp>
         <p:nvSpPr>
-          <p:cNvPr id="99" name="TextBox 98"/>
+          <p:cNvPr id="113" name="TextBox 112"/>
           <p:cNvSpPr txBox="1"/>
           <p:nvPr>
             <p:custDataLst>
-              <p:tags r:id="rId43"/>
+              <p:tags r:id="rId52"/>
             </p:custDataLst>
           </p:nvPr>
         </p:nvSpPr>
@@ -8741,11 +9551,11 @@
       </p:sp>
       <p:sp>
         <p:nvSpPr>
-          <p:cNvPr id="100" name="TextBox 99"/>
+          <p:cNvPr id="114" name="TextBox 113"/>
           <p:cNvSpPr txBox="1"/>
           <p:nvPr>
             <p:custDataLst>
-              <p:tags r:id="rId44"/>
+              <p:tags r:id="rId53"/>
             </p:custDataLst>
           </p:nvPr>
         </p:nvSpPr>
@@ -8792,7 +9602,7 @@
       </p:sp>
       <p:sp>
         <p:nvSpPr>
-          <p:cNvPr id="101" name="Rectangle 100"/>
+          <p:cNvPr id="115" name="Rectangle 114"/>
           <p:cNvSpPr/>
           <p:nvPr/>
         </p:nvSpPr>
@@ -8841,11 +9651,11 @@
       </p:sp>
       <p:sp>
         <p:nvSpPr>
-          <p:cNvPr id="102" name="TextBox 101"/>
+          <p:cNvPr id="116" name="TextBox 115"/>
           <p:cNvSpPr txBox="1"/>
           <p:nvPr>
             <p:custDataLst>
-              <p:tags r:id="rId45"/>
+              <p:tags r:id="rId54"/>
             </p:custDataLst>
           </p:nvPr>
         </p:nvSpPr>
@@ -8892,11 +9702,11 @@
       </p:sp>
       <p:sp>
         <p:nvSpPr>
-          <p:cNvPr id="103" name="TextBox 102"/>
+          <p:cNvPr id="117" name="TextBox 116"/>
           <p:cNvSpPr txBox="1"/>
           <p:nvPr>
             <p:custDataLst>
-              <p:tags r:id="rId46"/>
+              <p:tags r:id="rId55"/>
             </p:custDataLst>
           </p:nvPr>
         </p:nvSpPr>
@@ -8943,11 +9753,11 @@
       </p:sp>
       <p:sp>
         <p:nvSpPr>
-          <p:cNvPr id="104" name="TextBox 103"/>
+          <p:cNvPr id="118" name="TextBox 117"/>
           <p:cNvSpPr txBox="1"/>
           <p:nvPr>
             <p:custDataLst>
-              <p:tags r:id="rId47"/>
+              <p:tags r:id="rId56"/>
             </p:custDataLst>
           </p:nvPr>
         </p:nvSpPr>
@@ -8987,14 +9797,14 @@
                 <a:ea typeface="DFKai-SB"/>
                 <a:cs typeface="Times New Roman"/>
               </a:rPr>
-              <a:t>三項創新，直接對應可展示成果</a:t>
-            </a:r>
-          </a:p>
-        </p:txBody>
-      </p:sp>
-      <p:sp>
-        <p:nvSpPr>
-          <p:cNvPr id="105" name="Rectangle 104"/>
+              <a:t>三項創新，對應具體事件與產物</a:t>
+            </a:r>
+          </a:p>
+        </p:txBody>
+      </p:sp>
+      <p:sp>
+        <p:nvSpPr>
+          <p:cNvPr id="119" name="Rectangle 118"/>
           <p:cNvSpPr/>
           <p:nvPr/>
         </p:nvSpPr>
@@ -9043,11 +9853,11 @@
       </p:sp>
       <p:sp>
         <p:nvSpPr>
-          <p:cNvPr id="106" name="TextBox 105"/>
+          <p:cNvPr id="120" name="TextBox 119"/>
           <p:cNvSpPr txBox="1"/>
           <p:nvPr>
             <p:custDataLst>
-              <p:tags r:id="rId48"/>
+              <p:tags r:id="rId57"/>
             </p:custDataLst>
           </p:nvPr>
         </p:nvSpPr>
@@ -9094,18 +9904,18 @@
       </p:sp>
       <p:sp>
         <p:nvSpPr>
-          <p:cNvPr id="107" name="TextBox 106"/>
+          <p:cNvPr id="121" name="TextBox 120"/>
           <p:cNvSpPr txBox="1"/>
           <p:nvPr>
             <p:custDataLst>
-              <p:tags r:id="rId49"/>
+              <p:tags r:id="rId58"/>
             </p:custDataLst>
           </p:nvPr>
         </p:nvSpPr>
         <p:spPr>
           <a:xfrm>
-            <a:off x="576000" y="15336000"/>
-            <a:ext cx="4464000" cy="792000"/>
+            <a:off x="576000" y="15300000"/>
+            <a:ext cx="4464000" cy="900000"/>
           </a:xfrm>
           <a:prstGeom prst="rect">
             <a:avLst/>
@@ -9132,13 +9942,13 @@
             <a:r>
               <a:rPr sz="1600" b="0">
                 <a:solidFill>
-                  <a:srgbClr val="53666E"/>
+                  <a:srgbClr val="171C1D"/>
                 </a:solidFill>
                 <a:latin typeface="Times New Roman"/>
                 <a:ea typeface="DFKai-SB"/>
                 <a:cs typeface="Times New Roman"/>
               </a:rPr>
-              <a:t>時序與局部內容共同判斷</a:t>
+              <a:t>CTBM讀取內容、時序與方向</a:t>
             </a:r>
           </a:p>
           <a:p>
@@ -9156,20 +9966,44 @@
             <a:r>
               <a:rPr sz="1600" b="0">
                 <a:solidFill>
-                  <a:srgbClr val="53666E"/>
+                  <a:srgbClr val="171C1D"/>
                 </a:solidFill>
                 <a:latin typeface="Times New Roman"/>
                 <a:ea typeface="DFKai-SB"/>
                 <a:cs typeface="Times New Roman"/>
               </a:rPr>
-              <a:t>校準後形成固定17類分類</a:t>
-            </a:r>
-          </a:p>
-        </p:txBody>
-      </p:sp>
-      <p:sp>
-        <p:nvSpPr>
-          <p:cNvPr id="108" name="Rectangle 107"/>
+              <a:t>PBCNN補充局部位元組模式</a:t>
+            </a:r>
+          </a:p>
+          <a:p>
+            <a:pPr algn="l">
+              <a:lnSpc>
+                <a:spcPct val="110000"/>
+              </a:lnSpc>
+              <a:spcBef>
+                <a:spcPts val="0"/>
+              </a:spcBef>
+              <a:spcAft>
+                <a:spcPts val="0"/>
+              </a:spcAft>
+            </a:pPr>
+            <a:r>
+              <a:rPr sz="1600" b="0">
+                <a:solidFill>
+                  <a:srgbClr val="171C1D"/>
+                </a:solidFill>
+                <a:latin typeface="Times New Roman"/>
+                <a:ea typeface="DFKai-SB"/>
+                <a:cs typeface="Times New Roman"/>
+              </a:rPr>
+              <a:t>校準融合後輸出固定17類</a:t>
+            </a:r>
+          </a:p>
+        </p:txBody>
+      </p:sp>
+      <p:sp>
+        <p:nvSpPr>
+          <p:cNvPr id="122" name="Rectangle 121"/>
           <p:cNvSpPr/>
           <p:nvPr/>
         </p:nvSpPr>
@@ -9218,7 +10052,7 @@
       </p:sp>
       <p:cxnSp>
         <p:nvCxnSpPr>
-          <p:cNvPr id="109" name="Connector 108"/>
+          <p:cNvPr id="123" name="Connector 122"/>
           <p:cNvCxnSpPr/>
           <p:nvPr/>
         </p:nvCxnSpPr>
@@ -9254,11 +10088,11 @@
       </p:cxnSp>
       <p:sp>
         <p:nvSpPr>
-          <p:cNvPr id="110" name="TextBox 109"/>
+          <p:cNvPr id="124" name="TextBox 123"/>
           <p:cNvSpPr txBox="1"/>
           <p:nvPr>
             <p:custDataLst>
-              <p:tags r:id="rId50"/>
+              <p:tags r:id="rId59"/>
             </p:custDataLst>
           </p:nvPr>
         </p:nvSpPr>
@@ -9305,18 +10139,18 @@
       </p:sp>
       <p:sp>
         <p:nvSpPr>
-          <p:cNvPr id="111" name="TextBox 110"/>
+          <p:cNvPr id="125" name="TextBox 124"/>
           <p:cNvSpPr txBox="1"/>
           <p:nvPr>
             <p:custDataLst>
-              <p:tags r:id="rId51"/>
+              <p:tags r:id="rId60"/>
             </p:custDataLst>
           </p:nvPr>
         </p:nvSpPr>
         <p:spPr>
           <a:xfrm>
-            <a:off x="5364000" y="15336000"/>
-            <a:ext cx="4464000" cy="792000"/>
+            <a:off x="5364000" y="15300000"/>
+            <a:ext cx="4464000" cy="900000"/>
           </a:xfrm>
           <a:prstGeom prst="rect">
             <a:avLst/>
@@ -9343,13 +10177,13 @@
             <a:r>
               <a:rPr sz="1600" b="0">
                 <a:solidFill>
-                  <a:srgbClr val="53666E"/>
+                  <a:srgbClr val="171C1D"/>
                 </a:solidFill>
                 <a:latin typeface="Times New Roman"/>
                 <a:ea typeface="DFKai-SB"/>
                 <a:cs typeface="Times New Roman"/>
               </a:rPr>
-              <a:t>表徵與類別機率共同檢索</a:t>
+              <a:t>512維表徵＋17維類別機率</a:t>
             </a:r>
           </a:p>
           <a:p>
@@ -9367,20 +10201,44 @@
             <a:r>
               <a:rPr sz="1600" b="0">
                 <a:solidFill>
-                  <a:srgbClr val="53666E"/>
+                  <a:srgbClr val="171C1D"/>
                 </a:solidFill>
                 <a:latin typeface="Times New Roman"/>
                 <a:ea typeface="DFKai-SB"/>
                 <a:cs typeface="Times New Roman"/>
               </a:rPr>
-              <a:t>為每個事件附上相關案例</a:t>
-            </a:r>
-          </a:p>
-        </p:txBody>
-      </p:sp>
-      <p:sp>
-        <p:nvSpPr>
-          <p:cNvPr id="112" name="Rectangle 111"/>
+              <a:t>529維向量檢索Top-5案例</a:t>
+            </a:r>
+          </a:p>
+          <a:p>
+            <a:pPr algn="l">
+              <a:lnSpc>
+                <a:spcPct val="110000"/>
+              </a:lnSpc>
+              <a:spcBef>
+                <a:spcPts val="0"/>
+              </a:spcBef>
+              <a:spcAft>
+                <a:spcPts val="0"/>
+              </a:spcAft>
+            </a:pPr>
+            <a:r>
+              <a:rPr sz="1600" b="0">
+                <a:solidFill>
+                  <a:srgbClr val="171C1D"/>
+                </a:solidFill>
+                <a:latin typeface="Times New Roman"/>
+                <a:ea typeface="DFKai-SB"/>
+                <a:cs typeface="Times New Roman"/>
+              </a:rPr>
+              <a:t>AI附回支持／複核／不確定</a:t>
+            </a:r>
+          </a:p>
+        </p:txBody>
+      </p:sp>
+      <p:sp>
+        <p:nvSpPr>
+          <p:cNvPr id="126" name="Rectangle 125"/>
           <p:cNvSpPr/>
           <p:nvPr/>
         </p:nvSpPr>
@@ -9429,7 +10287,7 @@
       </p:sp>
       <p:cxnSp>
         <p:nvCxnSpPr>
-          <p:cNvPr id="113" name="Connector 112"/>
+          <p:cNvPr id="127" name="Connector 126"/>
           <p:cNvCxnSpPr/>
           <p:nvPr/>
         </p:nvCxnSpPr>
@@ -9465,11 +10323,11 @@
       </p:cxnSp>
       <p:sp>
         <p:nvSpPr>
-          <p:cNvPr id="114" name="TextBox 113"/>
+          <p:cNvPr id="128" name="TextBox 127"/>
           <p:cNvSpPr txBox="1"/>
           <p:nvPr>
             <p:custDataLst>
-              <p:tags r:id="rId52"/>
+              <p:tags r:id="rId61"/>
             </p:custDataLst>
           </p:nvPr>
         </p:nvSpPr>
@@ -9516,18 +10374,18 @@
       </p:sp>
       <p:sp>
         <p:nvSpPr>
-          <p:cNvPr id="115" name="TextBox 114"/>
+          <p:cNvPr id="129" name="TextBox 128"/>
           <p:cNvSpPr txBox="1"/>
           <p:nvPr>
             <p:custDataLst>
-              <p:tags r:id="rId53"/>
+              <p:tags r:id="rId62"/>
             </p:custDataLst>
           </p:nvPr>
         </p:nvSpPr>
         <p:spPr>
           <a:xfrm>
-            <a:off x="10152000" y="15336000"/>
-            <a:ext cx="4464000" cy="792000"/>
+            <a:off x="10152000" y="15300000"/>
+            <a:ext cx="4464000" cy="900000"/>
           </a:xfrm>
           <a:prstGeom prst="rect">
             <a:avLst/>
@@ -9554,13 +10412,13 @@
             <a:r>
               <a:rPr sz="1600" b="0">
                 <a:solidFill>
-                  <a:srgbClr val="53666E"/>
+                  <a:srgbClr val="171C1D"/>
                 </a:solidFill>
                 <a:latin typeface="Times New Roman"/>
                 <a:ea typeface="DFKai-SB"/>
                 <a:cs typeface="Times New Roman"/>
               </a:rPr>
-              <a:t>稽核附回原事件、策略另檢查</a:t>
+              <a:t>FTP／SSH：登入防護</a:t>
             </a:r>
           </a:p>
           <a:p>
@@ -9578,42 +10436,15 @@
             <a:r>
               <a:rPr sz="1600" b="0">
                 <a:solidFill>
-                  <a:srgbClr val="53666E"/>
+                  <a:srgbClr val="171C1D"/>
                 </a:solidFill>
                 <a:latin typeface="Times New Roman"/>
                 <a:ea typeface="DFKai-SB"/>
                 <a:cs typeface="Times New Roman"/>
               </a:rPr>
-              <a:t>讀回與到期回復留下紀錄</a:t>
-            </a:r>
-          </a:p>
-        </p:txBody>
-      </p:sp>
-      <p:sp>
-        <p:nvSpPr>
-          <p:cNvPr id="116" name="TextBox 115"/>
-          <p:cNvSpPr txBox="1"/>
-          <p:nvPr>
-            <p:custDataLst>
-              <p:tags r:id="rId54"/>
-            </p:custDataLst>
-          </p:nvPr>
-        </p:nvSpPr>
-        <p:spPr>
-          <a:xfrm>
-            <a:off x="576000" y="16380000"/>
-            <a:ext cx="432000" cy="360000"/>
-          </a:xfrm>
-          <a:prstGeom prst="rect">
-            <a:avLst/>
-          </a:prstGeom>
-          <a:noFill/>
-        </p:spPr>
-        <p:txBody>
-          <a:bodyPr wrap="none" lIns="0" tIns="0" rIns="0" bIns="0" anchor="ctr">
-            <a:spAutoFit/>
-          </a:bodyPr>
-          <a:lstStyle/>
+              <a:t>HTTP型DDoS：上游清洗</a:t>
+            </a:r>
+          </a:p>
           <a:p>
             <a:pPr algn="l">
               <a:lnSpc>
@@ -9627,33 +10458,33 @@
               </a:spcAft>
             </a:pPr>
             <a:r>
-              <a:rPr sz="2000" b="1">
+              <a:rPr sz="1600" b="0">
                 <a:solidFill>
-                  <a:srgbClr val="105186"/>
+                  <a:srgbClr val="171C1D"/>
                 </a:solidFill>
                 <a:latin typeface="Times New Roman"/>
                 <a:ea typeface="DFKai-SB"/>
                 <a:cs typeface="Times New Roman"/>
               </a:rPr>
-              <a:t>03</a:t>
-            </a:r>
-          </a:p>
-        </p:txBody>
-      </p:sp>
-      <p:sp>
-        <p:nvSpPr>
-          <p:cNvPr id="117" name="TextBox 116"/>
+              <a:t>Bot限制C2；讀回及到期回復</a:t>
+            </a:r>
+          </a:p>
+        </p:txBody>
+      </p:sp>
+      <p:sp>
+        <p:nvSpPr>
+          <p:cNvPr id="130" name="TextBox 129"/>
           <p:cNvSpPr txBox="1"/>
           <p:nvPr>
             <p:custDataLst>
-              <p:tags r:id="rId55"/>
+              <p:tags r:id="rId63"/>
             </p:custDataLst>
           </p:nvPr>
         </p:nvSpPr>
         <p:spPr>
           <a:xfrm>
-            <a:off x="1116000" y="16380000"/>
-            <a:ext cx="13320000" cy="360000"/>
+            <a:off x="576000" y="16380000"/>
+            <a:ext cx="432000" cy="360000"/>
           </a:xfrm>
           <a:prstGeom prst="rect">
             <a:avLst/>
@@ -9678,33 +10509,33 @@
               </a:spcAft>
             </a:pPr>
             <a:r>
-              <a:rPr sz="2400" b="0">
+              <a:rPr sz="2000" b="1">
                 <a:solidFill>
-                  <a:srgbClr val="092B42"/>
+                  <a:srgbClr val="105186"/>
                 </a:solidFill>
                 <a:latin typeface="Times New Roman"/>
                 <a:ea typeface="DFKai-SB"/>
                 <a:cs typeface="Times New Roman"/>
               </a:rPr>
-              <a:t>以分階段實測呈現效果</a:t>
-            </a:r>
-          </a:p>
-        </p:txBody>
-      </p:sp>
-      <p:sp>
-        <p:nvSpPr>
-          <p:cNvPr id="118" name="TextBox 117"/>
+              <a:t>03</a:t>
+            </a:r>
+          </a:p>
+        </p:txBody>
+      </p:sp>
+      <p:sp>
+        <p:nvSpPr>
+          <p:cNvPr id="131" name="TextBox 130"/>
           <p:cNvSpPr txBox="1"/>
           <p:nvPr>
             <p:custDataLst>
-              <p:tags r:id="rId56"/>
+              <p:tags r:id="rId64"/>
             </p:custDataLst>
           </p:nvPr>
         </p:nvSpPr>
         <p:spPr>
           <a:xfrm>
-            <a:off x="576000" y="16920000"/>
-            <a:ext cx="6624000" cy="360000"/>
+            <a:off x="1116000" y="16380000"/>
+            <a:ext cx="13320000" cy="360000"/>
           </a:xfrm>
           <a:prstGeom prst="rect">
             <a:avLst/>
@@ -9729,33 +10560,33 @@
               </a:spcAft>
             </a:pPr>
             <a:r>
-              <a:rPr sz="1700" b="0">
+              <a:rPr sz="2400" b="0">
                 <a:solidFill>
-                  <a:srgbClr val="171C1D"/>
+                  <a:srgbClr val="092B42"/>
                 </a:solidFill>
                 <a:latin typeface="Times New Roman"/>
                 <a:ea typeface="DFKai-SB"/>
                 <a:cs typeface="Times New Roman"/>
               </a:rPr>
-              <a:t>相同18,998筆測試的 Macro-F1</a:t>
-            </a:r>
-          </a:p>
-        </p:txBody>
-      </p:sp>
-      <p:sp>
-        <p:nvSpPr>
-          <p:cNvPr id="119" name="TextBox 118"/>
+              <a:t>以分階段實測呈現效果</a:t>
+            </a:r>
+          </a:p>
+        </p:txBody>
+      </p:sp>
+      <p:sp>
+        <p:nvSpPr>
+          <p:cNvPr id="132" name="TextBox 131"/>
           <p:cNvSpPr txBox="1"/>
           <p:nvPr>
             <p:custDataLst>
-              <p:tags r:id="rId57"/>
+              <p:tags r:id="rId65"/>
             </p:custDataLst>
           </p:nvPr>
         </p:nvSpPr>
         <p:spPr>
           <a:xfrm>
-            <a:off x="576000" y="17424000"/>
-            <a:ext cx="1584000" cy="360000"/>
+            <a:off x="576000" y="16920000"/>
+            <a:ext cx="6624000" cy="360000"/>
           </a:xfrm>
           <a:prstGeom prst="rect">
             <a:avLst/>
@@ -9780,6 +10611,57 @@
               </a:spcAft>
             </a:pPr>
             <a:r>
+              <a:rPr sz="1700" b="0">
+                <a:solidFill>
+                  <a:srgbClr val="171C1D"/>
+                </a:solidFill>
+                <a:latin typeface="Times New Roman"/>
+                <a:ea typeface="DFKai-SB"/>
+                <a:cs typeface="Times New Roman"/>
+              </a:rPr>
+              <a:t>相同18,998筆測試的 Macro-F1</a:t>
+            </a:r>
+          </a:p>
+        </p:txBody>
+      </p:sp>
+      <p:sp>
+        <p:nvSpPr>
+          <p:cNvPr id="133" name="TextBox 132"/>
+          <p:cNvSpPr txBox="1"/>
+          <p:nvPr>
+            <p:custDataLst>
+              <p:tags r:id="rId66"/>
+            </p:custDataLst>
+          </p:nvPr>
+        </p:nvSpPr>
+        <p:spPr>
+          <a:xfrm>
+            <a:off x="576000" y="17424000"/>
+            <a:ext cx="1584000" cy="360000"/>
+          </a:xfrm>
+          <a:prstGeom prst="rect">
+            <a:avLst/>
+          </a:prstGeom>
+          <a:noFill/>
+        </p:spPr>
+        <p:txBody>
+          <a:bodyPr wrap="none" lIns="0" tIns="0" rIns="0" bIns="0" anchor="ctr">
+            <a:spAutoFit/>
+          </a:bodyPr>
+          <a:lstStyle/>
+          <a:p>
+            <a:pPr algn="l">
+              <a:lnSpc>
+                <a:spcPct val="110000"/>
+              </a:lnSpc>
+              <a:spcBef>
+                <a:spcPts val="0"/>
+              </a:spcBef>
+              <a:spcAft>
+                <a:spcPts val="0"/>
+              </a:spcAft>
+            </a:pPr>
+            <a:r>
               <a:rPr sz="1800" b="0">
                 <a:solidFill>
                   <a:srgbClr val="171C1D"/>
@@ -9795,7 +10677,7 @@
       </p:sp>
       <p:sp>
         <p:nvSpPr>
-          <p:cNvPr id="120" name="Rectangle 119"/>
+          <p:cNvPr id="134" name="Rectangle 133"/>
           <p:cNvSpPr/>
           <p:nvPr/>
         </p:nvSpPr>
@@ -9844,7 +10726,7 @@
       </p:sp>
       <p:sp>
         <p:nvSpPr>
-          <p:cNvPr id="121" name="Rectangle 120"/>
+          <p:cNvPr id="135" name="Rectangle 134"/>
           <p:cNvSpPr/>
           <p:nvPr/>
         </p:nvSpPr>
@@ -9893,11 +10775,11 @@
       </p:sp>
       <p:sp>
         <p:nvSpPr>
-          <p:cNvPr id="122" name="TextBox 121"/>
+          <p:cNvPr id="136" name="TextBox 135"/>
           <p:cNvSpPr txBox="1"/>
           <p:nvPr>
             <p:custDataLst>
-              <p:tags r:id="rId58"/>
+              <p:tags r:id="rId67"/>
             </p:custDataLst>
           </p:nvPr>
         </p:nvSpPr>
@@ -9944,11 +10826,11 @@
       </p:sp>
       <p:sp>
         <p:nvSpPr>
-          <p:cNvPr id="123" name="TextBox 122"/>
+          <p:cNvPr id="137" name="TextBox 136"/>
           <p:cNvSpPr txBox="1"/>
           <p:nvPr>
             <p:custDataLst>
-              <p:tags r:id="rId59"/>
+              <p:tags r:id="rId68"/>
             </p:custDataLst>
           </p:nvPr>
         </p:nvSpPr>
@@ -9995,7 +10877,7 @@
       </p:sp>
       <p:sp>
         <p:nvSpPr>
-          <p:cNvPr id="124" name="Rectangle 123"/>
+          <p:cNvPr id="138" name="Rectangle 137"/>
           <p:cNvSpPr/>
           <p:nvPr/>
         </p:nvSpPr>
@@ -10044,7 +10926,7 @@
       </p:sp>
       <p:sp>
         <p:nvSpPr>
-          <p:cNvPr id="125" name="Rectangle 124"/>
+          <p:cNvPr id="139" name="Rectangle 138"/>
           <p:cNvSpPr/>
           <p:nvPr/>
         </p:nvSpPr>
@@ -10093,11 +10975,11 @@
       </p:sp>
       <p:sp>
         <p:nvSpPr>
-          <p:cNvPr id="126" name="TextBox 125"/>
+          <p:cNvPr id="140" name="TextBox 139"/>
           <p:cNvSpPr txBox="1"/>
           <p:nvPr>
             <p:custDataLst>
-              <p:tags r:id="rId60"/>
+              <p:tags r:id="rId69"/>
             </p:custDataLst>
           </p:nvPr>
         </p:nvSpPr>
@@ -10144,11 +11026,11 @@
       </p:sp>
       <p:sp>
         <p:nvSpPr>
-          <p:cNvPr id="127" name="TextBox 126"/>
+          <p:cNvPr id="141" name="TextBox 140"/>
           <p:cNvSpPr txBox="1"/>
           <p:nvPr>
             <p:custDataLst>
-              <p:tags r:id="rId61"/>
+              <p:tags r:id="rId70"/>
             </p:custDataLst>
           </p:nvPr>
         </p:nvSpPr>
@@ -10195,7 +11077,7 @@
       </p:sp>
       <p:sp>
         <p:nvSpPr>
-          <p:cNvPr id="128" name="Rectangle 127"/>
+          <p:cNvPr id="142" name="Rectangle 141"/>
           <p:cNvSpPr/>
           <p:nvPr/>
         </p:nvSpPr>
@@ -10244,7 +11126,7 @@
       </p:sp>
       <p:sp>
         <p:nvSpPr>
-          <p:cNvPr id="129" name="Rectangle 128"/>
+          <p:cNvPr id="143" name="Rectangle 142"/>
           <p:cNvSpPr/>
           <p:nvPr/>
         </p:nvSpPr>
@@ -10293,11 +11175,11 @@
       </p:sp>
       <p:sp>
         <p:nvSpPr>
-          <p:cNvPr id="130" name="TextBox 129"/>
+          <p:cNvPr id="144" name="TextBox 143"/>
           <p:cNvSpPr txBox="1"/>
           <p:nvPr>
             <p:custDataLst>
-              <p:tags r:id="rId62"/>
+              <p:tags r:id="rId71"/>
             </p:custDataLst>
           </p:nvPr>
         </p:nvSpPr>
@@ -10344,11 +11226,11 @@
       </p:sp>
       <p:sp>
         <p:nvSpPr>
-          <p:cNvPr id="131" name="TextBox 130"/>
+          <p:cNvPr id="145" name="TextBox 144"/>
           <p:cNvSpPr txBox="1"/>
           <p:nvPr>
             <p:custDataLst>
-              <p:tags r:id="rId63"/>
+              <p:tags r:id="rId72"/>
             </p:custDataLst>
           </p:nvPr>
         </p:nvSpPr>
@@ -10395,7 +11277,7 @@
       </p:sp>
       <p:cxnSp>
         <p:nvCxnSpPr>
-          <p:cNvPr id="132" name="Connector 131"/>
+          <p:cNvPr id="146" name="Connector 145"/>
           <p:cNvCxnSpPr/>
           <p:nvPr/>
         </p:nvCxnSpPr>
@@ -10431,11 +11313,11 @@
       </p:cxnSp>
       <p:sp>
         <p:nvSpPr>
-          <p:cNvPr id="133" name="TextBox 132"/>
+          <p:cNvPr id="147" name="TextBox 146"/>
           <p:cNvSpPr txBox="1"/>
           <p:nvPr>
             <p:custDataLst>
-              <p:tags r:id="rId64"/>
+              <p:tags r:id="rId73"/>
             </p:custDataLst>
           </p:nvPr>
         </p:nvSpPr>
@@ -10482,11 +11364,11 @@
       </p:sp>
       <p:sp>
         <p:nvSpPr>
-          <p:cNvPr id="134" name="TextBox 133"/>
+          <p:cNvPr id="148" name="TextBox 147"/>
           <p:cNvSpPr txBox="1"/>
           <p:nvPr>
             <p:custDataLst>
-              <p:tags r:id="rId65"/>
+              <p:tags r:id="rId74"/>
             </p:custDataLst>
           </p:nvPr>
         </p:nvSpPr>
@@ -10533,11 +11415,11 @@
       </p:sp>
       <p:sp>
         <p:nvSpPr>
-          <p:cNvPr id="135" name="TextBox 134"/>
+          <p:cNvPr id="149" name="TextBox 148"/>
           <p:cNvSpPr txBox="1"/>
           <p:nvPr>
             <p:custDataLst>
-              <p:tags r:id="rId66"/>
+              <p:tags r:id="rId75"/>
             </p:custDataLst>
           </p:nvPr>
         </p:nvSpPr>
@@ -10584,11 +11466,11 @@
       </p:sp>
       <p:sp>
         <p:nvSpPr>
-          <p:cNvPr id="136" name="TextBox 135"/>
+          <p:cNvPr id="150" name="TextBox 149"/>
           <p:cNvSpPr txBox="1"/>
           <p:nvPr>
             <p:custDataLst>
-              <p:tags r:id="rId67"/>
+              <p:tags r:id="rId76"/>
             </p:custDataLst>
           </p:nvPr>
         </p:nvSpPr>
@@ -10635,11 +11517,11 @@
       </p:sp>
       <p:sp>
         <p:nvSpPr>
-          <p:cNvPr id="137" name="TextBox 136"/>
+          <p:cNvPr id="151" name="TextBox 150"/>
           <p:cNvSpPr txBox="1"/>
           <p:nvPr>
             <p:custDataLst>
-              <p:tags r:id="rId68"/>
+              <p:tags r:id="rId77"/>
             </p:custDataLst>
           </p:nvPr>
         </p:nvSpPr>
@@ -10686,11 +11568,11 @@
       </p:sp>
       <p:sp>
         <p:nvSpPr>
-          <p:cNvPr id="138" name="TextBox 137"/>
+          <p:cNvPr id="152" name="TextBox 151"/>
           <p:cNvSpPr txBox="1"/>
           <p:nvPr>
             <p:custDataLst>
-              <p:tags r:id="rId69"/>
+              <p:tags r:id="rId78"/>
             </p:custDataLst>
           </p:nvPr>
         </p:nvSpPr>
@@ -10737,11 +11619,11 @@
       </p:sp>
       <p:sp>
         <p:nvSpPr>
-          <p:cNvPr id="139" name="TextBox 138"/>
+          <p:cNvPr id="153" name="TextBox 152"/>
           <p:cNvSpPr txBox="1"/>
           <p:nvPr>
             <p:custDataLst>
-              <p:tags r:id="rId70"/>
+              <p:tags r:id="rId79"/>
             </p:custDataLst>
           </p:nvPr>
         </p:nvSpPr>
@@ -10788,11 +11670,11 @@
       </p:sp>
       <p:sp>
         <p:nvSpPr>
-          <p:cNvPr id="140" name="TextBox 139"/>
+          <p:cNvPr id="154" name="TextBox 153"/>
           <p:cNvSpPr txBox="1"/>
           <p:nvPr>
             <p:custDataLst>
-              <p:tags r:id="rId71"/>
+              <p:tags r:id="rId80"/>
             </p:custDataLst>
           </p:nvPr>
         </p:nvSpPr>
@@ -10839,11 +11721,11 @@
       </p:sp>
       <p:sp>
         <p:nvSpPr>
-          <p:cNvPr id="141" name="TextBox 140"/>
+          <p:cNvPr id="155" name="TextBox 154"/>
           <p:cNvSpPr txBox="1"/>
           <p:nvPr>
             <p:custDataLst>
-              <p:tags r:id="rId72"/>
+              <p:tags r:id="rId81"/>
             </p:custDataLst>
           </p:nvPr>
         </p:nvSpPr>
@@ -10890,11 +11772,11 @@
       </p:sp>
       <p:sp>
         <p:nvSpPr>
-          <p:cNvPr id="142" name="TextBox 141"/>
+          <p:cNvPr id="156" name="TextBox 155"/>
           <p:cNvSpPr txBox="1"/>
           <p:nvPr>
             <p:custDataLst>
-              <p:tags r:id="rId73"/>
+              <p:tags r:id="rId82"/>
             </p:custDataLst>
           </p:nvPr>
         </p:nvSpPr>
@@ -10965,7 +11847,7 @@
       </p:sp>
       <p:cxnSp>
         <p:nvCxnSpPr>
-          <p:cNvPr id="143" name="Connector 142"/>
+          <p:cNvPr id="157" name="Connector 156"/>
           <p:cNvCxnSpPr/>
           <p:nvPr/>
         </p:nvCxnSpPr>
@@ -11001,18 +11883,18 @@
       </p:cxnSp>
       <p:sp>
         <p:nvSpPr>
-          <p:cNvPr id="144" name="TextBox 143"/>
+          <p:cNvPr id="158" name="TextBox 157"/>
           <p:cNvSpPr txBox="1"/>
           <p:nvPr>
             <p:custDataLst>
-              <p:tags r:id="rId74"/>
+              <p:tags r:id="rId83"/>
             </p:custDataLst>
           </p:nvPr>
         </p:nvSpPr>
         <p:spPr>
           <a:xfrm>
             <a:off x="576000" y="19980000"/>
-            <a:ext cx="13968000" cy="288000"/>
+            <a:ext cx="2412000" cy="576000"/>
           </a:xfrm>
           <a:prstGeom prst="rect">
             <a:avLst/>
@@ -11045,36 +11927,9 @@
                 <a:ea typeface="DFKai-SB"/>
                 <a:cs typeface="Times New Roman"/>
               </a:rPr>
-              <a:t>整合驗證：17類真實張量重跑；6種隔離TCP情境，背景保留與回復皆6/6。</a:t>
-            </a:r>
-          </a:p>
-        </p:txBody>
-      </p:sp>
-      <p:sp>
-        <p:nvSpPr>
-          <p:cNvPr id="145" name="TextBox 144"/>
-          <p:cNvSpPr txBox="1"/>
-          <p:nvPr>
-            <p:custDataLst>
-              <p:tags r:id="rId75"/>
-            </p:custDataLst>
-          </p:nvPr>
-        </p:nvSpPr>
-        <p:spPr>
-          <a:xfrm>
-            <a:off x="576000" y="20322000"/>
-            <a:ext cx="13968000" cy="504000"/>
-          </a:xfrm>
-          <a:prstGeom prst="rect">
-            <a:avLst/>
-          </a:prstGeom>
-          <a:noFill/>
-        </p:spPr>
-        <p:txBody>
-          <a:bodyPr wrap="none" lIns="0" tIns="0" rIns="0" bIns="0" anchor="ctr">
-            <a:spAutoFit/>
-          </a:bodyPr>
-          <a:lstStyle/>
+              <a:t>17類本機重跑</a:t>
+            </a:r>
+          </a:p>
           <a:p>
             <a:pPr algn="l">
               <a:lnSpc>
@@ -11090,15 +11945,1035 @@
             <a:r>
               <a:rPr sz="1600" b="0">
                 <a:solidFill>
-                  <a:srgbClr val="53666E"/>
+                  <a:srgbClr val="105186"/>
                 </a:solidFill>
                 <a:latin typeface="Times New Roman"/>
                 <a:ea typeface="DFKai-SB"/>
                 <a:cs typeface="Times New Roman"/>
               </a:rPr>
-              <a:t>6種隔離情境：4種套用規則、2種監測或蒐證。</a:t>
-            </a:r>
-          </a:p>
+              <a:t>6種隔離TCP情境</a:t>
+            </a:r>
+          </a:p>
+        </p:txBody>
+      </p:sp>
+      <p:sp>
+        <p:nvSpPr>
+          <p:cNvPr id="159" name="Rectangle 158"/>
+          <p:cNvSpPr/>
+          <p:nvPr/>
+        </p:nvSpPr>
+        <p:spPr>
+          <a:xfrm>
+            <a:off x="3240000" y="19980000"/>
+            <a:ext cx="1116000" cy="324000"/>
+          </a:xfrm>
+          <a:prstGeom prst="rect">
+            <a:avLst/>
+          </a:prstGeom>
+          <a:solidFill>
+            <a:srgbClr val="F0F2F3"/>
+          </a:solidFill>
+          <a:ln w="10160">
+            <a:solidFill>
+              <a:srgbClr val="D6DDE0"/>
+            </a:solidFill>
+          </a:ln>
+          <a:effectLst/>
+        </p:spPr>
+        <p:style>
+          <a:lnRef idx="1">
+            <a:schemeClr val="accent1"/>
+          </a:lnRef>
+          <a:fillRef idx="3">
+            <a:schemeClr val="accent1"/>
+          </a:fillRef>
+          <a:effectRef idx="2">
+            <a:schemeClr val="accent1"/>
+          </a:effectRef>
+          <a:fontRef idx="minor">
+            <a:schemeClr val="lt1"/>
+          </a:fontRef>
+        </p:style>
+        <p:txBody>
+          <a:bodyPr rtlCol="0" anchor="ctr"/>
+          <a:lstStyle/>
+          <a:p>
+            <a:pPr algn="ctr"/>
+            <a:endParaRPr>
+              <a:latin typeface="Times New Roman"/>
+              <a:ea typeface="DFKai-SB"/>
+              <a:cs typeface="Times New Roman"/>
+            </a:endParaRPr>
+          </a:p>
+        </p:txBody>
+      </p:sp>
+      <p:sp>
+        <p:nvSpPr>
+          <p:cNvPr id="160" name="TextBox 159"/>
+          <p:cNvSpPr txBox="1"/>
+          <p:nvPr>
+            <p:custDataLst>
+              <p:tags r:id="rId84"/>
+            </p:custDataLst>
+          </p:nvPr>
+        </p:nvSpPr>
+        <p:spPr>
+          <a:xfrm>
+            <a:off x="3214600" y="19980000"/>
+            <a:ext cx="1116000" cy="324000"/>
+          </a:xfrm>
+          <a:prstGeom prst="rect">
+            <a:avLst/>
+          </a:prstGeom>
+          <a:noFill/>
+        </p:spPr>
+        <p:txBody>
+          <a:bodyPr wrap="none" lIns="0" tIns="0" rIns="0" bIns="0" anchor="ctr">
+            <a:spAutoFit/>
+          </a:bodyPr>
+          <a:lstStyle/>
+          <a:p>
+            <a:pPr algn="ctr">
+              <a:lnSpc>
+                <a:spcPct val="110000"/>
+              </a:lnSpc>
+              <a:spcBef>
+                <a:spcPts val="0"/>
+              </a:spcBef>
+              <a:spcAft>
+                <a:spcPts val="0"/>
+              </a:spcAft>
+            </a:pPr>
+            <a:r>
+              <a:rPr sz="1600" b="0">
+                <a:solidFill>
+                  <a:srgbClr val="105186"/>
+                </a:solidFill>
+                <a:latin typeface="Times New Roman"/>
+                <a:ea typeface="DFKai-SB"/>
+                <a:cs typeface="Times New Roman"/>
+              </a:rPr>
+              <a:t>正常</a:t>
+            </a:r>
+          </a:p>
+        </p:txBody>
+      </p:sp>
+      <p:sp>
+        <p:nvSpPr>
+          <p:cNvPr id="161" name="TextBox 160"/>
+          <p:cNvSpPr txBox="1"/>
+          <p:nvPr>
+            <p:custDataLst>
+              <p:tags r:id="rId85"/>
+            </p:custDataLst>
+          </p:nvPr>
+        </p:nvSpPr>
+        <p:spPr>
+          <a:xfrm>
+            <a:off x="3217775" y="20304000"/>
+            <a:ext cx="1116000" cy="216000"/>
+          </a:xfrm>
+          <a:prstGeom prst="rect">
+            <a:avLst/>
+          </a:prstGeom>
+          <a:noFill/>
+        </p:spPr>
+        <p:txBody>
+          <a:bodyPr wrap="none" lIns="0" tIns="0" rIns="0" bIns="0" anchor="ctr">
+            <a:spAutoFit/>
+          </a:bodyPr>
+          <a:lstStyle/>
+          <a:p>
+            <a:pPr algn="ctr">
+              <a:lnSpc>
+                <a:spcPct val="110000"/>
+              </a:lnSpc>
+              <a:spcBef>
+                <a:spcPts val="0"/>
+              </a:spcBef>
+              <a:spcAft>
+                <a:spcPts val="0"/>
+              </a:spcAft>
+            </a:pPr>
+            <a:r>
+              <a:rPr sz="1400" b="0">
+                <a:solidFill>
+                  <a:srgbClr val="171C1D"/>
+                </a:solidFill>
+                <a:latin typeface="Times New Roman"/>
+                <a:ea typeface="DFKai-SB"/>
+                <a:cs typeface="Times New Roman"/>
+              </a:rPr>
+              <a:t>監測</a:t>
+            </a:r>
+          </a:p>
+        </p:txBody>
+      </p:sp>
+      <p:sp>
+        <p:nvSpPr>
+          <p:cNvPr id="162" name="Rectangle 161"/>
+          <p:cNvSpPr/>
+          <p:nvPr/>
+        </p:nvSpPr>
+        <p:spPr>
+          <a:xfrm>
+            <a:off x="4500000" y="19980000"/>
+            <a:ext cx="1116000" cy="324000"/>
+          </a:xfrm>
+          <a:prstGeom prst="rect">
+            <a:avLst/>
+          </a:prstGeom>
+          <a:solidFill>
+            <a:srgbClr val="FFF4DD"/>
+          </a:solidFill>
+          <a:ln w="10160">
+            <a:solidFill>
+              <a:srgbClr val="D6DDE0"/>
+            </a:solidFill>
+          </a:ln>
+          <a:effectLst/>
+        </p:spPr>
+        <p:style>
+          <a:lnRef idx="1">
+            <a:schemeClr val="accent1"/>
+          </a:lnRef>
+          <a:fillRef idx="3">
+            <a:schemeClr val="accent1"/>
+          </a:fillRef>
+          <a:effectRef idx="2">
+            <a:schemeClr val="accent1"/>
+          </a:effectRef>
+          <a:fontRef idx="minor">
+            <a:schemeClr val="lt1"/>
+          </a:fontRef>
+        </p:style>
+        <p:txBody>
+          <a:bodyPr rtlCol="0" anchor="ctr"/>
+          <a:lstStyle/>
+          <a:p>
+            <a:pPr algn="ctr"/>
+            <a:endParaRPr>
+              <a:latin typeface="Times New Roman"/>
+              <a:ea typeface="DFKai-SB"/>
+              <a:cs typeface="Times New Roman"/>
+            </a:endParaRPr>
+          </a:p>
+        </p:txBody>
+      </p:sp>
+      <p:sp>
+        <p:nvSpPr>
+          <p:cNvPr id="163" name="TextBox 162"/>
+          <p:cNvSpPr txBox="1"/>
+          <p:nvPr>
+            <p:custDataLst>
+              <p:tags r:id="rId86"/>
+            </p:custDataLst>
+          </p:nvPr>
+        </p:nvSpPr>
+        <p:spPr>
+          <a:xfrm>
+            <a:off x="4474600" y="19980000"/>
+            <a:ext cx="1116000" cy="324000"/>
+          </a:xfrm>
+          <a:prstGeom prst="rect">
+            <a:avLst/>
+          </a:prstGeom>
+          <a:noFill/>
+        </p:spPr>
+        <p:txBody>
+          <a:bodyPr wrap="none" lIns="0" tIns="0" rIns="0" bIns="0" anchor="ctr">
+            <a:spAutoFit/>
+          </a:bodyPr>
+          <a:lstStyle/>
+          <a:p>
+            <a:pPr algn="ctr">
+              <a:lnSpc>
+                <a:spcPct val="110000"/>
+              </a:lnSpc>
+              <a:spcBef>
+                <a:spcPts val="0"/>
+              </a:spcBef>
+              <a:spcAft>
+                <a:spcPts val="0"/>
+              </a:spcAft>
+            </a:pPr>
+            <a:r>
+              <a:rPr sz="1600" b="0">
+                <a:solidFill>
+                  <a:srgbClr val="105186"/>
+                </a:solidFill>
+                <a:latin typeface="Times New Roman"/>
+                <a:ea typeface="DFKai-SB"/>
+                <a:cs typeface="Times New Roman"/>
+              </a:rPr>
+              <a:t>FTP</a:t>
+            </a:r>
+          </a:p>
+        </p:txBody>
+      </p:sp>
+      <p:sp>
+        <p:nvSpPr>
+          <p:cNvPr id="164" name="TextBox 163"/>
+          <p:cNvSpPr txBox="1"/>
+          <p:nvPr>
+            <p:custDataLst>
+              <p:tags r:id="rId87"/>
+            </p:custDataLst>
+          </p:nvPr>
+        </p:nvSpPr>
+        <p:spPr>
+          <a:xfrm>
+            <a:off x="4477775" y="20304000"/>
+            <a:ext cx="1116000" cy="216000"/>
+          </a:xfrm>
+          <a:prstGeom prst="rect">
+            <a:avLst/>
+          </a:prstGeom>
+          <a:noFill/>
+        </p:spPr>
+        <p:txBody>
+          <a:bodyPr wrap="none" lIns="0" tIns="0" rIns="0" bIns="0" anchor="ctr">
+            <a:spAutoFit/>
+          </a:bodyPr>
+          <a:lstStyle/>
+          <a:p>
+            <a:pPr algn="ctr">
+              <a:lnSpc>
+                <a:spcPct val="110000"/>
+              </a:lnSpc>
+              <a:spcBef>
+                <a:spcPts val="0"/>
+              </a:spcBef>
+              <a:spcAft>
+                <a:spcPts val="0"/>
+              </a:spcAft>
+            </a:pPr>
+            <a:r>
+              <a:rPr sz="1400" b="0">
+                <a:solidFill>
+                  <a:srgbClr val="171C1D"/>
+                </a:solidFill>
+                <a:latin typeface="Times New Roman"/>
+                <a:ea typeface="DFKai-SB"/>
+                <a:cs typeface="Times New Roman"/>
+              </a:rPr>
+              <a:t>規則</a:t>
+            </a:r>
+          </a:p>
+        </p:txBody>
+      </p:sp>
+      <p:sp>
+        <p:nvSpPr>
+          <p:cNvPr id="165" name="Rectangle 164"/>
+          <p:cNvSpPr/>
+          <p:nvPr/>
+        </p:nvSpPr>
+        <p:spPr>
+          <a:xfrm>
+            <a:off x="5760000" y="19980000"/>
+            <a:ext cx="1116000" cy="324000"/>
+          </a:xfrm>
+          <a:prstGeom prst="rect">
+            <a:avLst/>
+          </a:prstGeom>
+          <a:solidFill>
+            <a:srgbClr val="FFF4DD"/>
+          </a:solidFill>
+          <a:ln w="10160">
+            <a:solidFill>
+              <a:srgbClr val="D6DDE0"/>
+            </a:solidFill>
+          </a:ln>
+          <a:effectLst/>
+        </p:spPr>
+        <p:style>
+          <a:lnRef idx="1">
+            <a:schemeClr val="accent1"/>
+          </a:lnRef>
+          <a:fillRef idx="3">
+            <a:schemeClr val="accent1"/>
+          </a:fillRef>
+          <a:effectRef idx="2">
+            <a:schemeClr val="accent1"/>
+          </a:effectRef>
+          <a:fontRef idx="minor">
+            <a:schemeClr val="lt1"/>
+          </a:fontRef>
+        </p:style>
+        <p:txBody>
+          <a:bodyPr rtlCol="0" anchor="ctr"/>
+          <a:lstStyle/>
+          <a:p>
+            <a:pPr algn="ctr"/>
+            <a:endParaRPr>
+              <a:latin typeface="Times New Roman"/>
+              <a:ea typeface="DFKai-SB"/>
+              <a:cs typeface="Times New Roman"/>
+            </a:endParaRPr>
+          </a:p>
+        </p:txBody>
+      </p:sp>
+      <p:sp>
+        <p:nvSpPr>
+          <p:cNvPr id="166" name="TextBox 165"/>
+          <p:cNvSpPr txBox="1"/>
+          <p:nvPr>
+            <p:custDataLst>
+              <p:tags r:id="rId88"/>
+            </p:custDataLst>
+          </p:nvPr>
+        </p:nvSpPr>
+        <p:spPr>
+          <a:xfrm>
+            <a:off x="5734600" y="19980000"/>
+            <a:ext cx="1116000" cy="324000"/>
+          </a:xfrm>
+          <a:prstGeom prst="rect">
+            <a:avLst/>
+          </a:prstGeom>
+          <a:noFill/>
+        </p:spPr>
+        <p:txBody>
+          <a:bodyPr wrap="none" lIns="0" tIns="0" rIns="0" bIns="0" anchor="ctr">
+            <a:spAutoFit/>
+          </a:bodyPr>
+          <a:lstStyle/>
+          <a:p>
+            <a:pPr algn="ctr">
+              <a:lnSpc>
+                <a:spcPct val="110000"/>
+              </a:lnSpc>
+              <a:spcBef>
+                <a:spcPts val="0"/>
+              </a:spcBef>
+              <a:spcAft>
+                <a:spcPts val="0"/>
+              </a:spcAft>
+            </a:pPr>
+            <a:r>
+              <a:rPr sz="1600" b="0">
+                <a:solidFill>
+                  <a:srgbClr val="105186"/>
+                </a:solidFill>
+                <a:latin typeface="Times New Roman"/>
+                <a:ea typeface="DFKai-SB"/>
+                <a:cs typeface="Times New Roman"/>
+              </a:rPr>
+              <a:t>SSH</a:t>
+            </a:r>
+          </a:p>
+        </p:txBody>
+      </p:sp>
+      <p:sp>
+        <p:nvSpPr>
+          <p:cNvPr id="167" name="TextBox 166"/>
+          <p:cNvSpPr txBox="1"/>
+          <p:nvPr>
+            <p:custDataLst>
+              <p:tags r:id="rId89"/>
+            </p:custDataLst>
+          </p:nvPr>
+        </p:nvSpPr>
+        <p:spPr>
+          <a:xfrm>
+            <a:off x="5737775" y="20304000"/>
+            <a:ext cx="1116000" cy="216000"/>
+          </a:xfrm>
+          <a:prstGeom prst="rect">
+            <a:avLst/>
+          </a:prstGeom>
+          <a:noFill/>
+        </p:spPr>
+        <p:txBody>
+          <a:bodyPr wrap="none" lIns="0" tIns="0" rIns="0" bIns="0" anchor="ctr">
+            <a:spAutoFit/>
+          </a:bodyPr>
+          <a:lstStyle/>
+          <a:p>
+            <a:pPr algn="ctr">
+              <a:lnSpc>
+                <a:spcPct val="110000"/>
+              </a:lnSpc>
+              <a:spcBef>
+                <a:spcPts val="0"/>
+              </a:spcBef>
+              <a:spcAft>
+                <a:spcPts val="0"/>
+              </a:spcAft>
+            </a:pPr>
+            <a:r>
+              <a:rPr sz="1400" b="0">
+                <a:solidFill>
+                  <a:srgbClr val="171C1D"/>
+                </a:solidFill>
+                <a:latin typeface="Times New Roman"/>
+                <a:ea typeface="DFKai-SB"/>
+                <a:cs typeface="Times New Roman"/>
+              </a:rPr>
+              <a:t>規則</a:t>
+            </a:r>
+          </a:p>
+        </p:txBody>
+      </p:sp>
+      <p:sp>
+        <p:nvSpPr>
+          <p:cNvPr id="168" name="Rectangle 167"/>
+          <p:cNvSpPr/>
+          <p:nvPr/>
+        </p:nvSpPr>
+        <p:spPr>
+          <a:xfrm>
+            <a:off x="7020000" y="19980000"/>
+            <a:ext cx="1116000" cy="324000"/>
+          </a:xfrm>
+          <a:prstGeom prst="rect">
+            <a:avLst/>
+          </a:prstGeom>
+          <a:solidFill>
+            <a:srgbClr val="FFF4DD"/>
+          </a:solidFill>
+          <a:ln w="10160">
+            <a:solidFill>
+              <a:srgbClr val="D6DDE0"/>
+            </a:solidFill>
+          </a:ln>
+          <a:effectLst/>
+        </p:spPr>
+        <p:style>
+          <a:lnRef idx="1">
+            <a:schemeClr val="accent1"/>
+          </a:lnRef>
+          <a:fillRef idx="3">
+            <a:schemeClr val="accent1"/>
+          </a:fillRef>
+          <a:effectRef idx="2">
+            <a:schemeClr val="accent1"/>
+          </a:effectRef>
+          <a:fontRef idx="minor">
+            <a:schemeClr val="lt1"/>
+          </a:fontRef>
+        </p:style>
+        <p:txBody>
+          <a:bodyPr rtlCol="0" anchor="ctr"/>
+          <a:lstStyle/>
+          <a:p>
+            <a:pPr algn="ctr"/>
+            <a:endParaRPr>
+              <a:latin typeface="Times New Roman"/>
+              <a:ea typeface="DFKai-SB"/>
+              <a:cs typeface="Times New Roman"/>
+            </a:endParaRPr>
+          </a:p>
+        </p:txBody>
+      </p:sp>
+      <p:sp>
+        <p:nvSpPr>
+          <p:cNvPr id="169" name="TextBox 168"/>
+          <p:cNvSpPr txBox="1"/>
+          <p:nvPr>
+            <p:custDataLst>
+              <p:tags r:id="rId90"/>
+            </p:custDataLst>
+          </p:nvPr>
+        </p:nvSpPr>
+        <p:spPr>
+          <a:xfrm>
+            <a:off x="6994600" y="19980000"/>
+            <a:ext cx="1116000" cy="324000"/>
+          </a:xfrm>
+          <a:prstGeom prst="rect">
+            <a:avLst/>
+          </a:prstGeom>
+          <a:noFill/>
+        </p:spPr>
+        <p:txBody>
+          <a:bodyPr wrap="none" lIns="0" tIns="0" rIns="0" bIns="0" anchor="ctr">
+            <a:spAutoFit/>
+          </a:bodyPr>
+          <a:lstStyle/>
+          <a:p>
+            <a:pPr algn="ctr">
+              <a:lnSpc>
+                <a:spcPct val="110000"/>
+              </a:lnSpc>
+              <a:spcBef>
+                <a:spcPts val="0"/>
+              </a:spcBef>
+              <a:spcAft>
+                <a:spcPts val="0"/>
+              </a:spcAft>
+            </a:pPr>
+            <a:r>
+              <a:rPr sz="1600" b="0">
+                <a:solidFill>
+                  <a:srgbClr val="105186"/>
+                </a:solidFill>
+                <a:latin typeface="Times New Roman"/>
+                <a:ea typeface="DFKai-SB"/>
+                <a:cs typeface="Times New Roman"/>
+              </a:rPr>
+              <a:t>HTTP</a:t>
+            </a:r>
+          </a:p>
+        </p:txBody>
+      </p:sp>
+      <p:sp>
+        <p:nvSpPr>
+          <p:cNvPr id="170" name="TextBox 169"/>
+          <p:cNvSpPr txBox="1"/>
+          <p:nvPr>
+            <p:custDataLst>
+              <p:tags r:id="rId91"/>
+            </p:custDataLst>
+          </p:nvPr>
+        </p:nvSpPr>
+        <p:spPr>
+          <a:xfrm>
+            <a:off x="6997775" y="20304000"/>
+            <a:ext cx="1116000" cy="216000"/>
+          </a:xfrm>
+          <a:prstGeom prst="rect">
+            <a:avLst/>
+          </a:prstGeom>
+          <a:noFill/>
+        </p:spPr>
+        <p:txBody>
+          <a:bodyPr wrap="none" lIns="0" tIns="0" rIns="0" bIns="0" anchor="ctr">
+            <a:spAutoFit/>
+          </a:bodyPr>
+          <a:lstStyle/>
+          <a:p>
+            <a:pPr algn="ctr">
+              <a:lnSpc>
+                <a:spcPct val="110000"/>
+              </a:lnSpc>
+              <a:spcBef>
+                <a:spcPts val="0"/>
+              </a:spcBef>
+              <a:spcAft>
+                <a:spcPts val="0"/>
+              </a:spcAft>
+            </a:pPr>
+            <a:r>
+              <a:rPr sz="1400" b="0">
+                <a:solidFill>
+                  <a:srgbClr val="171C1D"/>
+                </a:solidFill>
+                <a:latin typeface="Times New Roman"/>
+                <a:ea typeface="DFKai-SB"/>
+                <a:cs typeface="Times New Roman"/>
+              </a:rPr>
+              <a:t>規則</a:t>
+            </a:r>
+          </a:p>
+        </p:txBody>
+      </p:sp>
+      <p:sp>
+        <p:nvSpPr>
+          <p:cNvPr id="171" name="Rectangle 170"/>
+          <p:cNvSpPr/>
+          <p:nvPr/>
+        </p:nvSpPr>
+        <p:spPr>
+          <a:xfrm>
+            <a:off x="8280000" y="19980000"/>
+            <a:ext cx="1116000" cy="324000"/>
+          </a:xfrm>
+          <a:prstGeom prst="rect">
+            <a:avLst/>
+          </a:prstGeom>
+          <a:solidFill>
+            <a:srgbClr val="F0F2F3"/>
+          </a:solidFill>
+          <a:ln w="10160">
+            <a:solidFill>
+              <a:srgbClr val="D6DDE0"/>
+            </a:solidFill>
+          </a:ln>
+          <a:effectLst/>
+        </p:spPr>
+        <p:style>
+          <a:lnRef idx="1">
+            <a:schemeClr val="accent1"/>
+          </a:lnRef>
+          <a:fillRef idx="3">
+            <a:schemeClr val="accent1"/>
+          </a:fillRef>
+          <a:effectRef idx="2">
+            <a:schemeClr val="accent1"/>
+          </a:effectRef>
+          <a:fontRef idx="minor">
+            <a:schemeClr val="lt1"/>
+          </a:fontRef>
+        </p:style>
+        <p:txBody>
+          <a:bodyPr rtlCol="0" anchor="ctr"/>
+          <a:lstStyle/>
+          <a:p>
+            <a:pPr algn="ctr"/>
+            <a:endParaRPr>
+              <a:latin typeface="Times New Roman"/>
+              <a:ea typeface="DFKai-SB"/>
+              <a:cs typeface="Times New Roman"/>
+            </a:endParaRPr>
+          </a:p>
+        </p:txBody>
+      </p:sp>
+      <p:sp>
+        <p:nvSpPr>
+          <p:cNvPr id="172" name="TextBox 171"/>
+          <p:cNvSpPr txBox="1"/>
+          <p:nvPr>
+            <p:custDataLst>
+              <p:tags r:id="rId92"/>
+            </p:custDataLst>
+          </p:nvPr>
+        </p:nvSpPr>
+        <p:spPr>
+          <a:xfrm>
+            <a:off x="8254600" y="19980000"/>
+            <a:ext cx="1116000" cy="324000"/>
+          </a:xfrm>
+          <a:prstGeom prst="rect">
+            <a:avLst/>
+          </a:prstGeom>
+          <a:noFill/>
+        </p:spPr>
+        <p:txBody>
+          <a:bodyPr wrap="none" lIns="0" tIns="0" rIns="0" bIns="0" anchor="ctr">
+            <a:spAutoFit/>
+          </a:bodyPr>
+          <a:lstStyle/>
+          <a:p>
+            <a:pPr algn="ctr">
+              <a:lnSpc>
+                <a:spcPct val="110000"/>
+              </a:lnSpc>
+              <a:spcBef>
+                <a:spcPts val="0"/>
+              </a:spcBef>
+              <a:spcAft>
+                <a:spcPts val="0"/>
+              </a:spcAft>
+            </a:pPr>
+            <a:r>
+              <a:rPr sz="1600" b="0">
+                <a:solidFill>
+                  <a:srgbClr val="105186"/>
+                </a:solidFill>
+                <a:latin typeface="Times New Roman"/>
+                <a:ea typeface="DFKai-SB"/>
+                <a:cs typeface="Times New Roman"/>
+              </a:rPr>
+              <a:t>XSS</a:t>
+            </a:r>
+          </a:p>
+        </p:txBody>
+      </p:sp>
+      <p:sp>
+        <p:nvSpPr>
+          <p:cNvPr id="173" name="TextBox 172"/>
+          <p:cNvSpPr txBox="1"/>
+          <p:nvPr>
+            <p:custDataLst>
+              <p:tags r:id="rId93"/>
+            </p:custDataLst>
+          </p:nvPr>
+        </p:nvSpPr>
+        <p:spPr>
+          <a:xfrm>
+            <a:off x="8257775" y="20304000"/>
+            <a:ext cx="1116000" cy="216000"/>
+          </a:xfrm>
+          <a:prstGeom prst="rect">
+            <a:avLst/>
+          </a:prstGeom>
+          <a:noFill/>
+        </p:spPr>
+        <p:txBody>
+          <a:bodyPr wrap="none" lIns="0" tIns="0" rIns="0" bIns="0" anchor="ctr">
+            <a:spAutoFit/>
+          </a:bodyPr>
+          <a:lstStyle/>
+          <a:p>
+            <a:pPr algn="ctr">
+              <a:lnSpc>
+                <a:spcPct val="110000"/>
+              </a:lnSpc>
+              <a:spcBef>
+                <a:spcPts val="0"/>
+              </a:spcBef>
+              <a:spcAft>
+                <a:spcPts val="0"/>
+              </a:spcAft>
+            </a:pPr>
+            <a:r>
+              <a:rPr sz="1400" b="0">
+                <a:solidFill>
+                  <a:srgbClr val="171C1D"/>
+                </a:solidFill>
+                <a:latin typeface="Times New Roman"/>
+                <a:ea typeface="DFKai-SB"/>
+                <a:cs typeface="Times New Roman"/>
+              </a:rPr>
+              <a:t>蒐證</a:t>
+            </a:r>
+          </a:p>
+        </p:txBody>
+      </p:sp>
+      <p:sp>
+        <p:nvSpPr>
+          <p:cNvPr id="174" name="Rectangle 173"/>
+          <p:cNvSpPr/>
+          <p:nvPr/>
+        </p:nvSpPr>
+        <p:spPr>
+          <a:xfrm>
+            <a:off x="9540000" y="19980000"/>
+            <a:ext cx="1116000" cy="324000"/>
+          </a:xfrm>
+          <a:prstGeom prst="rect">
+            <a:avLst/>
+          </a:prstGeom>
+          <a:solidFill>
+            <a:srgbClr val="FFF4DD"/>
+          </a:solidFill>
+          <a:ln w="10160">
+            <a:solidFill>
+              <a:srgbClr val="D6DDE0"/>
+            </a:solidFill>
+          </a:ln>
+          <a:effectLst/>
+        </p:spPr>
+        <p:style>
+          <a:lnRef idx="1">
+            <a:schemeClr val="accent1"/>
+          </a:lnRef>
+          <a:fillRef idx="3">
+            <a:schemeClr val="accent1"/>
+          </a:fillRef>
+          <a:effectRef idx="2">
+            <a:schemeClr val="accent1"/>
+          </a:effectRef>
+          <a:fontRef idx="minor">
+            <a:schemeClr val="lt1"/>
+          </a:fontRef>
+        </p:style>
+        <p:txBody>
+          <a:bodyPr rtlCol="0" anchor="ctr"/>
+          <a:lstStyle/>
+          <a:p>
+            <a:pPr algn="ctr"/>
+            <a:endParaRPr>
+              <a:latin typeface="Times New Roman"/>
+              <a:ea typeface="DFKai-SB"/>
+              <a:cs typeface="Times New Roman"/>
+            </a:endParaRPr>
+          </a:p>
+        </p:txBody>
+      </p:sp>
+      <p:sp>
+        <p:nvSpPr>
+          <p:cNvPr id="175" name="TextBox 174"/>
+          <p:cNvSpPr txBox="1"/>
+          <p:nvPr>
+            <p:custDataLst>
+              <p:tags r:id="rId94"/>
+            </p:custDataLst>
+          </p:nvPr>
+        </p:nvSpPr>
+        <p:spPr>
+          <a:xfrm>
+            <a:off x="9514600" y="19980000"/>
+            <a:ext cx="1116000" cy="324000"/>
+          </a:xfrm>
+          <a:prstGeom prst="rect">
+            <a:avLst/>
+          </a:prstGeom>
+          <a:noFill/>
+        </p:spPr>
+        <p:txBody>
+          <a:bodyPr wrap="none" lIns="0" tIns="0" rIns="0" bIns="0" anchor="ctr">
+            <a:spAutoFit/>
+          </a:bodyPr>
+          <a:lstStyle/>
+          <a:p>
+            <a:pPr algn="ctr">
+              <a:lnSpc>
+                <a:spcPct val="110000"/>
+              </a:lnSpc>
+              <a:spcBef>
+                <a:spcPts val="0"/>
+              </a:spcBef>
+              <a:spcAft>
+                <a:spcPts val="0"/>
+              </a:spcAft>
+            </a:pPr>
+            <a:r>
+              <a:rPr sz="1600" b="0">
+                <a:solidFill>
+                  <a:srgbClr val="105186"/>
+                </a:solidFill>
+                <a:latin typeface="Times New Roman"/>
+                <a:ea typeface="DFKai-SB"/>
+                <a:cs typeface="Times New Roman"/>
+              </a:rPr>
+              <a:t>Bot</a:t>
+            </a:r>
+          </a:p>
+        </p:txBody>
+      </p:sp>
+      <p:sp>
+        <p:nvSpPr>
+          <p:cNvPr id="176" name="TextBox 175"/>
+          <p:cNvSpPr txBox="1"/>
+          <p:nvPr>
+            <p:custDataLst>
+              <p:tags r:id="rId95"/>
+            </p:custDataLst>
+          </p:nvPr>
+        </p:nvSpPr>
+        <p:spPr>
+          <a:xfrm>
+            <a:off x="9517775" y="20304000"/>
+            <a:ext cx="1116000" cy="216000"/>
+          </a:xfrm>
+          <a:prstGeom prst="rect">
+            <a:avLst/>
+          </a:prstGeom>
+          <a:noFill/>
+        </p:spPr>
+        <p:txBody>
+          <a:bodyPr wrap="none" lIns="0" tIns="0" rIns="0" bIns="0" anchor="ctr">
+            <a:spAutoFit/>
+          </a:bodyPr>
+          <a:lstStyle/>
+          <a:p>
+            <a:pPr algn="ctr">
+              <a:lnSpc>
+                <a:spcPct val="110000"/>
+              </a:lnSpc>
+              <a:spcBef>
+                <a:spcPts val="0"/>
+              </a:spcBef>
+              <a:spcAft>
+                <a:spcPts val="0"/>
+              </a:spcAft>
+            </a:pPr>
+            <a:r>
+              <a:rPr sz="1400" b="0">
+                <a:solidFill>
+                  <a:srgbClr val="171C1D"/>
+                </a:solidFill>
+                <a:latin typeface="Times New Roman"/>
+                <a:ea typeface="DFKai-SB"/>
+                <a:cs typeface="Times New Roman"/>
+              </a:rPr>
+              <a:t>規則</a:t>
+            </a:r>
+          </a:p>
+        </p:txBody>
+      </p:sp>
+      <p:sp>
+        <p:nvSpPr>
+          <p:cNvPr id="177" name="TextBox 176"/>
+          <p:cNvSpPr txBox="1"/>
+          <p:nvPr>
+            <p:custDataLst>
+              <p:tags r:id="rId96"/>
+            </p:custDataLst>
+          </p:nvPr>
+        </p:nvSpPr>
+        <p:spPr>
+          <a:xfrm>
+            <a:off x="11030862" y="19980000"/>
+            <a:ext cx="3456000" cy="576000"/>
+          </a:xfrm>
+          <a:prstGeom prst="rect">
+            <a:avLst/>
+          </a:prstGeom>
+          <a:noFill/>
+        </p:spPr>
+        <p:txBody>
+          <a:bodyPr wrap="none" lIns="0" tIns="0" rIns="0" bIns="0" anchor="ctr">
+            <a:spAutoFit/>
+          </a:bodyPr>
+          <a:lstStyle/>
+          <a:p>
+            <a:pPr algn="r">
+              <a:lnSpc>
+                <a:spcPct val="110000"/>
+              </a:lnSpc>
+              <a:spcBef>
+                <a:spcPts val="0"/>
+              </a:spcBef>
+              <a:spcAft>
+                <a:spcPts val="0"/>
+              </a:spcAft>
+            </a:pPr>
+            <a:r>
+              <a:rPr sz="1800" b="1">
+                <a:solidFill>
+                  <a:srgbClr val="105186"/>
+                </a:solidFill>
+                <a:latin typeface="Times New Roman"/>
+                <a:ea typeface="DFKai-SB"/>
+                <a:cs typeface="Times New Roman"/>
+              </a:rPr>
+              <a:t>背景保留 6/6</a:t>
+            </a:r>
+          </a:p>
+          <a:p>
+            <a:pPr algn="r">
+              <a:lnSpc>
+                <a:spcPct val="110000"/>
+              </a:lnSpc>
+              <a:spcBef>
+                <a:spcPts val="0"/>
+              </a:spcBef>
+              <a:spcAft>
+                <a:spcPts val="0"/>
+              </a:spcAft>
+            </a:pPr>
+            <a:r>
+              <a:rPr sz="1800" b="1">
+                <a:solidFill>
+                  <a:srgbClr val="105186"/>
+                </a:solidFill>
+                <a:latin typeface="Times New Roman"/>
+                <a:ea typeface="DFKai-SB"/>
+                <a:cs typeface="Times New Roman"/>
+              </a:rPr>
+              <a:t>到期回復 6/6</a:t>
+            </a:r>
+          </a:p>
+        </p:txBody>
+      </p:sp>
+      <p:sp>
+        <p:nvSpPr>
+          <p:cNvPr id="178" name="TextBox 177"/>
+          <p:cNvSpPr txBox="1"/>
+          <p:nvPr>
+            <p:custDataLst>
+              <p:tags r:id="rId97"/>
+            </p:custDataLst>
+          </p:nvPr>
+        </p:nvSpPr>
+        <p:spPr>
+          <a:xfrm>
+            <a:off x="576000" y="20592000"/>
+            <a:ext cx="13968000" cy="252000"/>
+          </a:xfrm>
+          <a:prstGeom prst="rect">
+            <a:avLst/>
+          </a:prstGeom>
+          <a:noFill/>
+        </p:spPr>
+        <p:txBody>
+          <a:bodyPr wrap="none" lIns="0" tIns="0" rIns="0" bIns="0" anchor="ctr">
+            <a:spAutoFit/>
+          </a:bodyPr>
+          <a:lstStyle/>
           <a:p>
             <a:pPr algn="l">
               <a:lnSpc>
@@ -11120,7 +12995,7 @@
                 <a:ea typeface="DFKai-SB"/>
                 <a:cs typeface="Times New Roman"/>
               </a:rPr>
-              <a:t>6/6為隔離交易與回復結果，非原生攻擊防禦率。</a:t>
+              <a:t>4種套用規則、2種監測或蒐證；6/6為隔離交易與回復結果，非原生攻擊防禦率。</a:t>
             </a:r>
           </a:p>
         </p:txBody>
@@ -11141,25 +13016,25 @@
 
 <file path=ppt/tags/tag10.xml><?xml version="1.0" encoding="utf-8"?>
 <p:tagLst xmlns:a="http://schemas.openxmlformats.org/drawingml/2006/main" xmlns:r="http://schemas.openxmlformats.org/officeDocument/2006/relationships" xmlns:p="http://schemas.openxmlformats.org/presentationml/2006/main">
-  <p:tag name="ALIGNMENT_TARGET_X" val="65.19685363769531"/>
+  <p:tag name="ALIGNMENT_TARGET_X" val="104.88188934326172"/>
 </p:tagLst>
 </file>
 
 <file path=ppt/tags/tag11.xml><?xml version="1.0" encoding="utf-8"?>
 <p:tagLst xmlns:a="http://schemas.openxmlformats.org/drawingml/2006/main" xmlns:r="http://schemas.openxmlformats.org/officeDocument/2006/relationships" xmlns:p="http://schemas.openxmlformats.org/presentationml/2006/main">
-  <p:tag name="ALIGNMENT_TARGET_X" val="104.88188934326172"/>
+  <p:tag name="ALIGNMENT_TARGET_X" val="147.40158081054688"/>
 </p:tagLst>
 </file>
 
 <file path=ppt/tags/tag12.xml><?xml version="1.0" encoding="utf-8"?>
 <p:tagLst xmlns:a="http://schemas.openxmlformats.org/drawingml/2006/main" xmlns:r="http://schemas.openxmlformats.org/officeDocument/2006/relationships" xmlns:p="http://schemas.openxmlformats.org/presentationml/2006/main">
-  <p:tag name="ALIGNMENT_TARGET_X" val="104.88188934326172"/>
+  <p:tag name="ALIGNMENT_TARGET_X" val="65.19685363769531"/>
 </p:tagLst>
 </file>
 
 <file path=ppt/tags/tag13.xml><?xml version="1.0" encoding="utf-8"?>
 <p:tagLst xmlns:a="http://schemas.openxmlformats.org/drawingml/2006/main" xmlns:r="http://schemas.openxmlformats.org/officeDocument/2006/relationships" xmlns:p="http://schemas.openxmlformats.org/presentationml/2006/main">
-  <p:tag name="ALIGNMENT_TARGET_X" val="65.19685363769531"/>
+  <p:tag name="ALIGNMENT_TARGET_X" val="104.88188934326172"/>
 </p:tagLst>
 </file>
 
@@ -11171,7 +13046,7 @@
 
 <file path=ppt/tags/tag15.xml><?xml version="1.0" encoding="utf-8"?>
 <p:tagLst xmlns:a="http://schemas.openxmlformats.org/drawingml/2006/main" xmlns:r="http://schemas.openxmlformats.org/officeDocument/2006/relationships" xmlns:p="http://schemas.openxmlformats.org/presentationml/2006/main">
-  <p:tag name="ALIGNMENT_TARGET_X" val="104.88188934326172"/>
+  <p:tag name="ALIGNMENT_TARGET_X" val="147.40158081054688"/>
 </p:tagLst>
 </file>
 
@@ -11195,7 +13070,7 @@
 
 <file path=ppt/tags/tag19.xml><?xml version="1.0" encoding="utf-8"?>
 <p:tagLst xmlns:a="http://schemas.openxmlformats.org/drawingml/2006/main" xmlns:r="http://schemas.openxmlformats.org/officeDocument/2006/relationships" xmlns:p="http://schemas.openxmlformats.org/presentationml/2006/main">
-  <p:tag name="ALIGNMENT_TARGET_X" val="450.7086486816406"/>
+  <p:tag name="ALIGNMENT_TARGET_X" val="147.40158081054688"/>
 </p:tagLst>
 </file>
 
@@ -11207,43 +13082,43 @@
 
 <file path=ppt/tags/tag20.xml><?xml version="1.0" encoding="utf-8"?>
 <p:tagLst xmlns:a="http://schemas.openxmlformats.org/drawingml/2006/main" xmlns:r="http://schemas.openxmlformats.org/officeDocument/2006/relationships" xmlns:p="http://schemas.openxmlformats.org/presentationml/2006/main">
-  <p:tag name="ALIGNMENT_TARGET_X" val="450.7086486816406"/>
+  <p:tag name="ALIGNMENT_TARGET_X" val="65.19685363769531"/>
 </p:tagLst>
 </file>
 
 <file path=ppt/tags/tag21.xml><?xml version="1.0" encoding="utf-8"?>
 <p:tagLst xmlns:a="http://schemas.openxmlformats.org/drawingml/2006/main" xmlns:r="http://schemas.openxmlformats.org/officeDocument/2006/relationships" xmlns:p="http://schemas.openxmlformats.org/presentationml/2006/main">
-  <p:tag name="ALIGNMENT_TARGET_X" val="450.7086486816406"/>
+  <p:tag name="ALIGNMENT_TARGET_X" val="104.88188934326172"/>
 </p:tagLst>
 </file>
 
 <file path=ppt/tags/tag22.xml><?xml version="1.0" encoding="utf-8"?>
 <p:tagLst xmlns:a="http://schemas.openxmlformats.org/drawingml/2006/main" xmlns:r="http://schemas.openxmlformats.org/officeDocument/2006/relationships" xmlns:p="http://schemas.openxmlformats.org/presentationml/2006/main">
-  <p:tag name="ALIGNMENT_TARGET_X" val="450.7086486816406"/>
+  <p:tag name="ALIGNMENT_TARGET_X" val="104.88188934326172"/>
 </p:tagLst>
 </file>
 
 <file path=ppt/tags/tag23.xml><?xml version="1.0" encoding="utf-8"?>
 <p:tagLst xmlns:a="http://schemas.openxmlformats.org/drawingml/2006/main" xmlns:r="http://schemas.openxmlformats.org/officeDocument/2006/relationships" xmlns:p="http://schemas.openxmlformats.org/presentationml/2006/main">
-  <p:tag name="ALIGNMENT_TARGET_X" val="738.4252014160156"/>
+  <p:tag name="ALIGNMENT_TARGET_X" val="147.40158081054688"/>
 </p:tagLst>
 </file>
 
 <file path=ppt/tags/tag24.xml><?xml version="1.0" encoding="utf-8"?>
 <p:tagLst xmlns:a="http://schemas.openxmlformats.org/drawingml/2006/main" xmlns:r="http://schemas.openxmlformats.org/officeDocument/2006/relationships" xmlns:p="http://schemas.openxmlformats.org/presentationml/2006/main">
-  <p:tag name="ALIGNMENT_TARGET_X" val="738.4252014160156"/>
+  <p:tag name="ALIGNMENT_TARGET_X" val="450.7086486816406"/>
 </p:tagLst>
 </file>
 
 <file path=ppt/tags/tag25.xml><?xml version="1.0" encoding="utf-8"?>
 <p:tagLst xmlns:a="http://schemas.openxmlformats.org/drawingml/2006/main" xmlns:r="http://schemas.openxmlformats.org/officeDocument/2006/relationships" xmlns:p="http://schemas.openxmlformats.org/presentationml/2006/main">
-  <p:tag name="ALIGNMENT_TARGET_X" val="1020.4724578857422"/>
+  <p:tag name="ALIGNMENT_TARGET_X" val="450.7086486816406"/>
 </p:tagLst>
 </file>
 
 <file path=ppt/tags/tag26.xml><?xml version="1.0" encoding="utf-8"?>
 <p:tagLst xmlns:a="http://schemas.openxmlformats.org/drawingml/2006/main" xmlns:r="http://schemas.openxmlformats.org/officeDocument/2006/relationships" xmlns:p="http://schemas.openxmlformats.org/presentationml/2006/main">
-  <p:tag name="ALIGNMENT_TARGET_X" val="1020.4724578857422"/>
+  <p:tag name="ALIGNMENT_TARGET_X" val="450.7086486816406"/>
 </p:tagLst>
 </file>
 
@@ -11255,7 +13130,7 @@
 
 <file path=ppt/tags/tag28.xml><?xml version="1.0" encoding="utf-8"?>
 <p:tagLst xmlns:a="http://schemas.openxmlformats.org/drawingml/2006/main" xmlns:r="http://schemas.openxmlformats.org/officeDocument/2006/relationships" xmlns:p="http://schemas.openxmlformats.org/presentationml/2006/main">
-  <p:tag name="ALIGNMENT_TARGET_X" val="450.7086486816406"/>
+  <p:tag name="ALIGNMENT_TARGET_X" val="738.4252014160156"/>
 </p:tagLst>
 </file>
 
@@ -11273,7 +13148,7 @@
 
 <file path=ppt/tags/tag30.xml><?xml version="1.0" encoding="utf-8"?>
 <p:tagLst xmlns:a="http://schemas.openxmlformats.org/drawingml/2006/main" xmlns:r="http://schemas.openxmlformats.org/officeDocument/2006/relationships" xmlns:p="http://schemas.openxmlformats.org/presentationml/2006/main">
-  <p:tag name="ALIGNMENT_TARGET_X" val="738.4252014160156"/>
+  <p:tag name="ALIGNMENT_TARGET_X" val="1020.4724578857422"/>
 </p:tagLst>
 </file>
 
@@ -11285,7 +13160,7 @@
 
 <file path=ppt/tags/tag32.xml><?xml version="1.0" encoding="utf-8"?>
 <p:tagLst xmlns:a="http://schemas.openxmlformats.org/drawingml/2006/main" xmlns:r="http://schemas.openxmlformats.org/officeDocument/2006/relationships" xmlns:p="http://schemas.openxmlformats.org/presentationml/2006/main">
-  <p:tag name="ALIGNMENT_TARGET_X" val="1020.4724578857422"/>
+  <p:tag name="ALIGNMENT_TARGET_X" val="450.7086486816406"/>
 </p:tagLst>
 </file>
 
@@ -11297,7 +13172,7 @@
 
 <file path=ppt/tags/tag34.xml><?xml version="1.0" encoding="utf-8"?>
 <p:tagLst xmlns:a="http://schemas.openxmlformats.org/drawingml/2006/main" xmlns:r="http://schemas.openxmlformats.org/officeDocument/2006/relationships" xmlns:p="http://schemas.openxmlformats.org/presentationml/2006/main">
-  <p:tag name="ALIGNMENT_TARGET_X" val="450.7086486816406"/>
+  <p:tag name="ALIGNMENT_TARGET_X" val="738.4252014160156"/>
 </p:tagLst>
 </file>
 
@@ -11309,25 +13184,25 @@
 
 <file path=ppt/tags/tag36.xml><?xml version="1.0" encoding="utf-8"?>
 <p:tagLst xmlns:a="http://schemas.openxmlformats.org/drawingml/2006/main" xmlns:r="http://schemas.openxmlformats.org/officeDocument/2006/relationships" xmlns:p="http://schemas.openxmlformats.org/presentationml/2006/main">
-  <p:tag name="ALIGNMENT_TARGET_X" val="738.4252014160156"/>
+  <p:tag name="ALIGNMENT_TARGET_X" val="1020.4724578857422"/>
 </p:tagLst>
 </file>
 
 <file path=ppt/tags/tag37.xml><?xml version="1.0" encoding="utf-8"?>
 <p:tagLst xmlns:a="http://schemas.openxmlformats.org/drawingml/2006/main" xmlns:r="http://schemas.openxmlformats.org/officeDocument/2006/relationships" xmlns:p="http://schemas.openxmlformats.org/presentationml/2006/main">
-  <p:tag name="ALIGNMENT_TARGET_X" val="1020.4724578857422"/>
+  <p:tag name="ALIGNMENT_TARGET_X" val="935.4330444335938"/>
 </p:tagLst>
 </file>
 
 <file path=ppt/tags/tag38.xml><?xml version="1.0" encoding="utf-8"?>
 <p:tagLst xmlns:a="http://schemas.openxmlformats.org/drawingml/2006/main" xmlns:r="http://schemas.openxmlformats.org/officeDocument/2006/relationships" xmlns:p="http://schemas.openxmlformats.org/presentationml/2006/main">
-  <p:tag name="ALIGNMENT_TARGET_X" val="1020.4724578857422"/>
+  <p:tag name="ALIGNMENT_TARGET_X" val="976.5354614257812"/>
 </p:tagLst>
 </file>
 
 <file path=ppt/tags/tag39.xml><?xml version="1.0" encoding="utf-8"?>
 <p:tagLst xmlns:a="http://schemas.openxmlformats.org/drawingml/2006/main" xmlns:r="http://schemas.openxmlformats.org/officeDocument/2006/relationships" xmlns:p="http://schemas.openxmlformats.org/presentationml/2006/main">
-  <p:tag name="ALIGNMENT_TARGET_X" val="1020.4724578857422"/>
+  <p:tag name="ALIGNMENT_TARGET_X" val="1017.6378173828125"/>
 </p:tagLst>
 </file>
 
@@ -11339,61 +13214,61 @@
 
 <file path=ppt/tags/tag40.xml><?xml version="1.0" encoding="utf-8"?>
 <p:tagLst xmlns:a="http://schemas.openxmlformats.org/drawingml/2006/main" xmlns:r="http://schemas.openxmlformats.org/officeDocument/2006/relationships" xmlns:p="http://schemas.openxmlformats.org/presentationml/2006/main">
-  <p:tag name="ALIGNMENT_TARGET_X" val="340.157470703125"/>
+  <p:tag name="ALIGNMENT_TARGET_X" val="1058.7401733398438"/>
 </p:tagLst>
 </file>
 
 <file path=ppt/tags/tag41.xml><?xml version="1.0" encoding="utf-8"?>
 <p:tagLst xmlns:a="http://schemas.openxmlformats.org/drawingml/2006/main" xmlns:r="http://schemas.openxmlformats.org/officeDocument/2006/relationships" xmlns:p="http://schemas.openxmlformats.org/presentationml/2006/main">
-  <p:tag name="ALIGNMENT_TARGET_X" val="450.7086486816406"/>
+  <p:tag name="ALIGNMENT_TARGET_X" val="1099.8424682617188"/>
 </p:tagLst>
 </file>
 
 <file path=ppt/tags/tag42.xml><?xml version="1.0" encoding="utf-8"?>
 <p:tagLst xmlns:a="http://schemas.openxmlformats.org/drawingml/2006/main" xmlns:r="http://schemas.openxmlformats.org/officeDocument/2006/relationships" xmlns:p="http://schemas.openxmlformats.org/presentationml/2006/main">
-  <p:tag name="ALIGNMENT_TARGET_X" val="728.5039367675781"/>
+  <p:tag name="ALIGNMENT_TARGET_X" val="450.7086486816406"/>
 </p:tagLst>
 </file>
 
 <file path=ppt/tags/tag43.xml><?xml version="1.0" encoding="utf-8"?>
 <p:tagLst xmlns:a="http://schemas.openxmlformats.org/drawingml/2006/main" xmlns:r="http://schemas.openxmlformats.org/officeDocument/2006/relationships" xmlns:p="http://schemas.openxmlformats.org/presentationml/2006/main">
-  <p:tag name="ALIGNMENT_TARGET_X" val="1006.2992248535156"/>
+  <p:tag name="ALIGNMENT_TARGET_X" val="450.7086486816406"/>
 </p:tagLst>
 </file>
 
 <file path=ppt/tags/tag44.xml><?xml version="1.0" encoding="utf-8"?>
 <p:tagLst xmlns:a="http://schemas.openxmlformats.org/drawingml/2006/main" xmlns:r="http://schemas.openxmlformats.org/officeDocument/2006/relationships" xmlns:p="http://schemas.openxmlformats.org/presentationml/2006/main">
-  <p:tag name="ALIGNMENT_TARGET_X" val="340.157470703125"/>
+  <p:tag name="ALIGNMENT_TARGET_X" val="738.4252014160156"/>
 </p:tagLst>
 </file>
 
 <file path=ppt/tags/tag45.xml><?xml version="1.0" encoding="utf-8"?>
 <p:tagLst xmlns:a="http://schemas.openxmlformats.org/drawingml/2006/main" xmlns:r="http://schemas.openxmlformats.org/officeDocument/2006/relationships" xmlns:p="http://schemas.openxmlformats.org/presentationml/2006/main">
-  <p:tag name="ALIGNMENT_TARGET_X" val="595.2756156921387"/>
+  <p:tag name="ALIGNMENT_TARGET_X" val="738.4252014160156"/>
 </p:tagLst>
 </file>
 
 <file path=ppt/tags/tag46.xml><?xml version="1.0" encoding="utf-8"?>
 <p:tagLst xmlns:a="http://schemas.openxmlformats.org/drawingml/2006/main" xmlns:r="http://schemas.openxmlformats.org/officeDocument/2006/relationships" xmlns:p="http://schemas.openxmlformats.org/presentationml/2006/main">
-  <p:tag name="ALIGNMENT_TARGET_X" val="45.354331970214844"/>
+  <p:tag name="ALIGNMENT_TARGET_X" val="1020.4724578857422"/>
 </p:tagLst>
 </file>
 
 <file path=ppt/tags/tag47.xml><?xml version="1.0" encoding="utf-8"?>
 <p:tagLst xmlns:a="http://schemas.openxmlformats.org/drawingml/2006/main" xmlns:r="http://schemas.openxmlformats.org/officeDocument/2006/relationships" xmlns:p="http://schemas.openxmlformats.org/presentationml/2006/main">
-  <p:tag name="ALIGNMENT_TARGET_X" val="87.87401580810547"/>
+  <p:tag name="ALIGNMENT_TARGET_X" val="1020.4724578857422"/>
 </p:tagLst>
 </file>
 
 <file path=ppt/tags/tag48.xml><?xml version="1.0" encoding="utf-8"?>
 <p:tagLst xmlns:a="http://schemas.openxmlformats.org/drawingml/2006/main" xmlns:r="http://schemas.openxmlformats.org/officeDocument/2006/relationships" xmlns:p="http://schemas.openxmlformats.org/presentationml/2006/main">
-  <p:tag name="ALIGNMENT_TARGET_X" val="45.354331970214844"/>
+  <p:tag name="ALIGNMENT_TARGET_X" val="1020.4724578857422"/>
 </p:tagLst>
 </file>
 
 <file path=ppt/tags/tag49.xml><?xml version="1.0" encoding="utf-8"?>
 <p:tagLst xmlns:a="http://schemas.openxmlformats.org/drawingml/2006/main" xmlns:r="http://schemas.openxmlformats.org/officeDocument/2006/relationships" xmlns:p="http://schemas.openxmlformats.org/presentationml/2006/main">
-  <p:tag name="ALIGNMENT_TARGET_X" val="45.354331970214844"/>
+  <p:tag name="ALIGNMENT_TARGET_X" val="340.157470703125"/>
 </p:tagLst>
 </file>
 
@@ -11405,43 +13280,43 @@
 
 <file path=ppt/tags/tag50.xml><?xml version="1.0" encoding="utf-8"?>
 <p:tagLst xmlns:a="http://schemas.openxmlformats.org/drawingml/2006/main" xmlns:r="http://schemas.openxmlformats.org/officeDocument/2006/relationships" xmlns:p="http://schemas.openxmlformats.org/presentationml/2006/main">
-  <p:tag name="ALIGNMENT_TARGET_X" val="422.3622131347656"/>
+  <p:tag name="ALIGNMENT_TARGET_X" val="450.7086486816406"/>
 </p:tagLst>
 </file>
 
 <file path=ppt/tags/tag51.xml><?xml version="1.0" encoding="utf-8"?>
 <p:tagLst xmlns:a="http://schemas.openxmlformats.org/drawingml/2006/main" xmlns:r="http://schemas.openxmlformats.org/officeDocument/2006/relationships" xmlns:p="http://schemas.openxmlformats.org/presentationml/2006/main">
-  <p:tag name="ALIGNMENT_TARGET_X" val="422.3622131347656"/>
+  <p:tag name="ALIGNMENT_TARGET_X" val="728.5039367675781"/>
 </p:tagLst>
 </file>
 
 <file path=ppt/tags/tag52.xml><?xml version="1.0" encoding="utf-8"?>
 <p:tagLst xmlns:a="http://schemas.openxmlformats.org/drawingml/2006/main" xmlns:r="http://schemas.openxmlformats.org/officeDocument/2006/relationships" xmlns:p="http://schemas.openxmlformats.org/presentationml/2006/main">
-  <p:tag name="ALIGNMENT_TARGET_X" val="799.3700561523438"/>
+  <p:tag name="ALIGNMENT_TARGET_X" val="1006.2992248535156"/>
 </p:tagLst>
 </file>
 
 <file path=ppt/tags/tag53.xml><?xml version="1.0" encoding="utf-8"?>
 <p:tagLst xmlns:a="http://schemas.openxmlformats.org/drawingml/2006/main" xmlns:r="http://schemas.openxmlformats.org/officeDocument/2006/relationships" xmlns:p="http://schemas.openxmlformats.org/presentationml/2006/main">
-  <p:tag name="ALIGNMENT_TARGET_X" val="799.3700561523438"/>
+  <p:tag name="ALIGNMENT_TARGET_X" val="340.157470703125"/>
 </p:tagLst>
 </file>
 
 <file path=ppt/tags/tag54.xml><?xml version="1.0" encoding="utf-8"?>
 <p:tagLst xmlns:a="http://schemas.openxmlformats.org/drawingml/2006/main" xmlns:r="http://schemas.openxmlformats.org/officeDocument/2006/relationships" xmlns:p="http://schemas.openxmlformats.org/presentationml/2006/main">
-  <p:tag name="ALIGNMENT_TARGET_X" val="45.354331970214844"/>
+  <p:tag name="ALIGNMENT_TARGET_X" val="595.2756156921387"/>
 </p:tagLst>
 </file>
 
 <file path=ppt/tags/tag55.xml><?xml version="1.0" encoding="utf-8"?>
 <p:tagLst xmlns:a="http://schemas.openxmlformats.org/drawingml/2006/main" xmlns:r="http://schemas.openxmlformats.org/officeDocument/2006/relationships" xmlns:p="http://schemas.openxmlformats.org/presentationml/2006/main">
-  <p:tag name="ALIGNMENT_TARGET_X" val="87.87401580810547"/>
+  <p:tag name="ALIGNMENT_TARGET_X" val="45.354331970214844"/>
 </p:tagLst>
 </file>
 
 <file path=ppt/tags/tag56.xml><?xml version="1.0" encoding="utf-8"?>
 <p:tagLst xmlns:a="http://schemas.openxmlformats.org/drawingml/2006/main" xmlns:r="http://schemas.openxmlformats.org/officeDocument/2006/relationships" xmlns:p="http://schemas.openxmlformats.org/presentationml/2006/main">
-  <p:tag name="ALIGNMENT_TARGET_X" val="45.354331970214844"/>
+  <p:tag name="ALIGNMENT_TARGET_X" val="87.87401580810547"/>
 </p:tagLst>
 </file>
 
@@ -11453,37 +13328,37 @@
 
 <file path=ppt/tags/tag58.xml><?xml version="1.0" encoding="utf-8"?>
 <p:tagLst xmlns:a="http://schemas.openxmlformats.org/drawingml/2006/main" xmlns:r="http://schemas.openxmlformats.org/officeDocument/2006/relationships" xmlns:p="http://schemas.openxmlformats.org/presentationml/2006/main">
-  <p:tag name="ALIGNMENT_TARGET_X" val="566.9291381835938"/>
+  <p:tag name="ALIGNMENT_TARGET_X" val="45.354331970214844"/>
 </p:tagLst>
 </file>
 
 <file path=ppt/tags/tag59.xml><?xml version="1.0" encoding="utf-8"?>
 <p:tagLst xmlns:a="http://schemas.openxmlformats.org/drawingml/2006/main" xmlns:r="http://schemas.openxmlformats.org/officeDocument/2006/relationships" xmlns:p="http://schemas.openxmlformats.org/presentationml/2006/main">
-  <p:tag name="ALIGNMENT_TARGET_X" val="45.354331970214844"/>
+  <p:tag name="ALIGNMENT_TARGET_X" val="422.3622131347656"/>
 </p:tagLst>
 </file>
 
 <file path=ppt/tags/tag6.xml><?xml version="1.0" encoding="utf-8"?>
 <p:tagLst xmlns:a="http://schemas.openxmlformats.org/drawingml/2006/main" xmlns:r="http://schemas.openxmlformats.org/officeDocument/2006/relationships" xmlns:p="http://schemas.openxmlformats.org/presentationml/2006/main">
-  <p:tag name="ALIGNMENT_TARGET_X" val="87.87401580810547"/>
+  <p:tag name="ALIGNMENT_TARGET_X" val="45.354331970214844"/>
 </p:tagLst>
 </file>
 
 <file path=ppt/tags/tag60.xml><?xml version="1.0" encoding="utf-8"?>
 <p:tagLst xmlns:a="http://schemas.openxmlformats.org/drawingml/2006/main" xmlns:r="http://schemas.openxmlformats.org/officeDocument/2006/relationships" xmlns:p="http://schemas.openxmlformats.org/presentationml/2006/main">
-  <p:tag name="ALIGNMENT_TARGET_X" val="566.9291381835938"/>
+  <p:tag name="ALIGNMENT_TARGET_X" val="422.3622131347656"/>
 </p:tagLst>
 </file>
 
 <file path=ppt/tags/tag61.xml><?xml version="1.0" encoding="utf-8"?>
 <p:tagLst xmlns:a="http://schemas.openxmlformats.org/drawingml/2006/main" xmlns:r="http://schemas.openxmlformats.org/officeDocument/2006/relationships" xmlns:p="http://schemas.openxmlformats.org/presentationml/2006/main">
-  <p:tag name="ALIGNMENT_TARGET_X" val="45.354331970214844"/>
+  <p:tag name="ALIGNMENT_TARGET_X" val="799.3700561523438"/>
 </p:tagLst>
 </file>
 
 <file path=ppt/tags/tag62.xml><?xml version="1.0" encoding="utf-8"?>
 <p:tagLst xmlns:a="http://schemas.openxmlformats.org/drawingml/2006/main" xmlns:r="http://schemas.openxmlformats.org/officeDocument/2006/relationships" xmlns:p="http://schemas.openxmlformats.org/presentationml/2006/main">
-  <p:tag name="ALIGNMENT_TARGET_X" val="566.9291381835938"/>
+  <p:tag name="ALIGNMENT_TARGET_X" val="799.3700561523438"/>
 </p:tagLst>
 </file>
 
@@ -11495,61 +13370,61 @@
 
 <file path=ppt/tags/tag64.xml><?xml version="1.0" encoding="utf-8"?>
 <p:tagLst xmlns:a="http://schemas.openxmlformats.org/drawingml/2006/main" xmlns:r="http://schemas.openxmlformats.org/officeDocument/2006/relationships" xmlns:p="http://schemas.openxmlformats.org/presentationml/2006/main">
-  <p:tag name="ALIGNMENT_TARGET_X" val="623.6220703125"/>
+  <p:tag name="ALIGNMENT_TARGET_X" val="87.87401580810547"/>
 </p:tagLst>
 </file>
 
 <file path=ppt/tags/tag65.xml><?xml version="1.0" encoding="utf-8"?>
 <p:tagLst xmlns:a="http://schemas.openxmlformats.org/drawingml/2006/main" xmlns:r="http://schemas.openxmlformats.org/officeDocument/2006/relationships" xmlns:p="http://schemas.openxmlformats.org/presentationml/2006/main">
-  <p:tag name="ALIGNMENT_TARGET_X" val="623.6220703125"/>
+  <p:tag name="ALIGNMENT_TARGET_X" val="45.354331970214844"/>
 </p:tagLst>
 </file>
 
 <file path=ppt/tags/tag66.xml><?xml version="1.0" encoding="utf-8"?>
 <p:tagLst xmlns:a="http://schemas.openxmlformats.org/drawingml/2006/main" xmlns:r="http://schemas.openxmlformats.org/officeDocument/2006/relationships" xmlns:p="http://schemas.openxmlformats.org/presentationml/2006/main">
-  <p:tag name="ALIGNMENT_TARGET_X" val="623.6220703125"/>
+  <p:tag name="ALIGNMENT_TARGET_X" val="45.354331970214844"/>
 </p:tagLst>
 </file>
 
 <file path=ppt/tags/tag67.xml><?xml version="1.0" encoding="utf-8"?>
 <p:tagLst xmlns:a="http://schemas.openxmlformats.org/drawingml/2006/main" xmlns:r="http://schemas.openxmlformats.org/officeDocument/2006/relationships" xmlns:p="http://schemas.openxmlformats.org/presentationml/2006/main">
-  <p:tag name="ALIGNMENT_TARGET_X" val="705.8267974853516"/>
+  <p:tag name="ALIGNMENT_TARGET_X" val="566.9291381835938"/>
 </p:tagLst>
 </file>
 
 <file path=ppt/tags/tag68.xml><?xml version="1.0" encoding="utf-8"?>
 <p:tagLst xmlns:a="http://schemas.openxmlformats.org/drawingml/2006/main" xmlns:r="http://schemas.openxmlformats.org/officeDocument/2006/relationships" xmlns:p="http://schemas.openxmlformats.org/presentationml/2006/main">
-  <p:tag name="ALIGNMENT_TARGET_X" val="705.8267974853516"/>
+  <p:tag name="ALIGNMENT_TARGET_X" val="45.354331970214844"/>
 </p:tagLst>
 </file>
 
 <file path=ppt/tags/tag69.xml><?xml version="1.0" encoding="utf-8"?>
 <p:tagLst xmlns:a="http://schemas.openxmlformats.org/drawingml/2006/main" xmlns:r="http://schemas.openxmlformats.org/officeDocument/2006/relationships" xmlns:p="http://schemas.openxmlformats.org/presentationml/2006/main">
-  <p:tag name="ALIGNMENT_TARGET_X" val="884.4094390869141"/>
+  <p:tag name="ALIGNMENT_TARGET_X" val="566.9291381835938"/>
 </p:tagLst>
 </file>
 
 <file path=ppt/tags/tag7.xml><?xml version="1.0" encoding="utf-8"?>
 <p:tagLst xmlns:a="http://schemas.openxmlformats.org/drawingml/2006/main" xmlns:r="http://schemas.openxmlformats.org/officeDocument/2006/relationships" xmlns:p="http://schemas.openxmlformats.org/presentationml/2006/main">
-  <p:tag name="ALIGNMENT_TARGET_X" val="65.19685363769531"/>
+  <p:tag name="ALIGNMENT_TARGET_X" val="87.87401580810547"/>
 </p:tagLst>
 </file>
 
 <file path=ppt/tags/tag70.xml><?xml version="1.0" encoding="utf-8"?>
 <p:tagLst xmlns:a="http://schemas.openxmlformats.org/drawingml/2006/main" xmlns:r="http://schemas.openxmlformats.org/officeDocument/2006/relationships" xmlns:p="http://schemas.openxmlformats.org/presentationml/2006/main">
-  <p:tag name="ALIGNMENT_TARGET_X" val="884.4094390869141"/>
+  <p:tag name="ALIGNMENT_TARGET_X" val="45.354331970214844"/>
 </p:tagLst>
 </file>
 
 <file path=ppt/tags/tag71.xml><?xml version="1.0" encoding="utf-8"?>
 <p:tagLst xmlns:a="http://schemas.openxmlformats.org/drawingml/2006/main" xmlns:r="http://schemas.openxmlformats.org/officeDocument/2006/relationships" xmlns:p="http://schemas.openxmlformats.org/presentationml/2006/main">
-  <p:tag name="ALIGNMENT_TARGET_X" val="1062.9921417236328"/>
+  <p:tag name="ALIGNMENT_TARGET_X" val="566.9291381835938"/>
 </p:tagLst>
 </file>
 
 <file path=ppt/tags/tag72.xml><?xml version="1.0" encoding="utf-8"?>
 <p:tagLst xmlns:a="http://schemas.openxmlformats.org/drawingml/2006/main" xmlns:r="http://schemas.openxmlformats.org/officeDocument/2006/relationships" xmlns:p="http://schemas.openxmlformats.org/presentationml/2006/main">
-  <p:tag name="ALIGNMENT_TARGET_X" val="1062.9921417236328"/>
+  <p:tag name="ALIGNMENT_TARGET_X" val="45.354331970214844"/>
 </p:tagLst>
 </file>
 
@@ -11561,25 +13436,157 @@
 
 <file path=ppt/tags/tag74.xml><?xml version="1.0" encoding="utf-8"?>
 <p:tagLst xmlns:a="http://schemas.openxmlformats.org/drawingml/2006/main" xmlns:r="http://schemas.openxmlformats.org/officeDocument/2006/relationships" xmlns:p="http://schemas.openxmlformats.org/presentationml/2006/main">
-  <p:tag name="ALIGNMENT_TARGET_X" val="45.354331970214844"/>
+  <p:tag name="ALIGNMENT_TARGET_X" val="623.6220703125"/>
 </p:tagLst>
 </file>
 
 <file path=ppt/tags/tag75.xml><?xml version="1.0" encoding="utf-8"?>
 <p:tagLst xmlns:a="http://schemas.openxmlformats.org/drawingml/2006/main" xmlns:r="http://schemas.openxmlformats.org/officeDocument/2006/relationships" xmlns:p="http://schemas.openxmlformats.org/presentationml/2006/main">
-  <p:tag name="ALIGNMENT_TARGET_X" val="45.354331970214844"/>
+  <p:tag name="ALIGNMENT_TARGET_X" val="623.6220703125"/>
+</p:tagLst>
+</file>
+
+<file path=ppt/tags/tag76.xml><?xml version="1.0" encoding="utf-8"?>
+<p:tagLst xmlns:a="http://schemas.openxmlformats.org/drawingml/2006/main" xmlns:r="http://schemas.openxmlformats.org/officeDocument/2006/relationships" xmlns:p="http://schemas.openxmlformats.org/presentationml/2006/main">
+  <p:tag name="ALIGNMENT_TARGET_X" val="705.8267974853516"/>
+</p:tagLst>
+</file>
+
+<file path=ppt/tags/tag77.xml><?xml version="1.0" encoding="utf-8"?>
+<p:tagLst xmlns:a="http://schemas.openxmlformats.org/drawingml/2006/main" xmlns:r="http://schemas.openxmlformats.org/officeDocument/2006/relationships" xmlns:p="http://schemas.openxmlformats.org/presentationml/2006/main">
+  <p:tag name="ALIGNMENT_TARGET_X" val="705.8267974853516"/>
+</p:tagLst>
+</file>
+
+<file path=ppt/tags/tag78.xml><?xml version="1.0" encoding="utf-8"?>
+<p:tagLst xmlns:a="http://schemas.openxmlformats.org/drawingml/2006/main" xmlns:r="http://schemas.openxmlformats.org/officeDocument/2006/relationships" xmlns:p="http://schemas.openxmlformats.org/presentationml/2006/main">
+  <p:tag name="ALIGNMENT_TARGET_X" val="884.4094390869141"/>
+</p:tagLst>
+</file>
+
+<file path=ppt/tags/tag79.xml><?xml version="1.0" encoding="utf-8"?>
+<p:tagLst xmlns:a="http://schemas.openxmlformats.org/drawingml/2006/main" xmlns:r="http://schemas.openxmlformats.org/officeDocument/2006/relationships" xmlns:p="http://schemas.openxmlformats.org/presentationml/2006/main">
+  <p:tag name="ALIGNMENT_TARGET_X" val="884.4094390869141"/>
 </p:tagLst>
 </file>
 
 <file path=ppt/tags/tag8.xml><?xml version="1.0" encoding="utf-8"?>
 <p:tagLst xmlns:a="http://schemas.openxmlformats.org/drawingml/2006/main" xmlns:r="http://schemas.openxmlformats.org/officeDocument/2006/relationships" xmlns:p="http://schemas.openxmlformats.org/presentationml/2006/main">
-  <p:tag name="ALIGNMENT_TARGET_X" val="104.88188934326172"/>
+  <p:tag name="ALIGNMENT_TARGET_X" val="65.19685363769531"/>
+</p:tagLst>
+</file>
+
+<file path=ppt/tags/tag80.xml><?xml version="1.0" encoding="utf-8"?>
+<p:tagLst xmlns:a="http://schemas.openxmlformats.org/drawingml/2006/main" xmlns:r="http://schemas.openxmlformats.org/officeDocument/2006/relationships" xmlns:p="http://schemas.openxmlformats.org/presentationml/2006/main">
+  <p:tag name="ALIGNMENT_TARGET_X" val="1062.9921417236328"/>
+</p:tagLst>
+</file>
+
+<file path=ppt/tags/tag81.xml><?xml version="1.0" encoding="utf-8"?>
+<p:tagLst xmlns:a="http://schemas.openxmlformats.org/drawingml/2006/main" xmlns:r="http://schemas.openxmlformats.org/officeDocument/2006/relationships" xmlns:p="http://schemas.openxmlformats.org/presentationml/2006/main">
+  <p:tag name="ALIGNMENT_TARGET_X" val="1062.9921417236328"/>
+</p:tagLst>
+</file>
+
+<file path=ppt/tags/tag82.xml><?xml version="1.0" encoding="utf-8"?>
+<p:tagLst xmlns:a="http://schemas.openxmlformats.org/drawingml/2006/main" xmlns:r="http://schemas.openxmlformats.org/officeDocument/2006/relationships" xmlns:p="http://schemas.openxmlformats.org/presentationml/2006/main">
+  <p:tag name="ALIGNMENT_TARGET_X" val="623.6220703125"/>
+</p:tagLst>
+</file>
+
+<file path=ppt/tags/tag83.xml><?xml version="1.0" encoding="utf-8"?>
+<p:tagLst xmlns:a="http://schemas.openxmlformats.org/drawingml/2006/main" xmlns:r="http://schemas.openxmlformats.org/officeDocument/2006/relationships" xmlns:p="http://schemas.openxmlformats.org/presentationml/2006/main">
+  <p:tag name="ALIGNMENT_TARGET_X" val="45.354331970214844"/>
+</p:tagLst>
+</file>
+
+<file path=ppt/tags/tag84.xml><?xml version="1.0" encoding="utf-8"?>
+<p:tagLst xmlns:a="http://schemas.openxmlformats.org/drawingml/2006/main" xmlns:r="http://schemas.openxmlformats.org/officeDocument/2006/relationships" xmlns:p="http://schemas.openxmlformats.org/presentationml/2006/main">
+  <p:tag name="ALIGNMENT_TARGET_X" val="299.0551109313965"/>
+</p:tagLst>
+</file>
+
+<file path=ppt/tags/tag85.xml><?xml version="1.0" encoding="utf-8"?>
+<p:tagLst xmlns:a="http://schemas.openxmlformats.org/drawingml/2006/main" xmlns:r="http://schemas.openxmlformats.org/officeDocument/2006/relationships" xmlns:p="http://schemas.openxmlformats.org/presentationml/2006/main">
+  <p:tag name="ALIGNMENT_TARGET_X" val="299.0551109313965"/>
+</p:tagLst>
+</file>
+
+<file path=ppt/tags/tag86.xml><?xml version="1.0" encoding="utf-8"?>
+<p:tagLst xmlns:a="http://schemas.openxmlformats.org/drawingml/2006/main" xmlns:r="http://schemas.openxmlformats.org/officeDocument/2006/relationships" xmlns:p="http://schemas.openxmlformats.org/presentationml/2006/main">
+  <p:tag name="ALIGNMENT_TARGET_X" val="398.26772689819336"/>
+</p:tagLst>
+</file>
+
+<file path=ppt/tags/tag87.xml><?xml version="1.0" encoding="utf-8"?>
+<p:tagLst xmlns:a="http://schemas.openxmlformats.org/drawingml/2006/main" xmlns:r="http://schemas.openxmlformats.org/officeDocument/2006/relationships" xmlns:p="http://schemas.openxmlformats.org/presentationml/2006/main">
+  <p:tag name="ALIGNMENT_TARGET_X" val="398.26772689819336"/>
+</p:tagLst>
+</file>
+
+<file path=ppt/tags/tag88.xml><?xml version="1.0" encoding="utf-8"?>
+<p:tagLst xmlns:a="http://schemas.openxmlformats.org/drawingml/2006/main" xmlns:r="http://schemas.openxmlformats.org/officeDocument/2006/relationships" xmlns:p="http://schemas.openxmlformats.org/presentationml/2006/main">
+  <p:tag name="ALIGNMENT_TARGET_X" val="497.4803123474121"/>
+</p:tagLst>
+</file>
+
+<file path=ppt/tags/tag89.xml><?xml version="1.0" encoding="utf-8"?>
+<p:tagLst xmlns:a="http://schemas.openxmlformats.org/drawingml/2006/main" xmlns:r="http://schemas.openxmlformats.org/officeDocument/2006/relationships" xmlns:p="http://schemas.openxmlformats.org/presentationml/2006/main">
+  <p:tag name="ALIGNMENT_TARGET_X" val="497.4803123474121"/>
 </p:tagLst>
 </file>
 
 <file path=ppt/tags/tag9.xml><?xml version="1.0" encoding="utf-8"?>
 <p:tagLst xmlns:a="http://schemas.openxmlformats.org/drawingml/2006/main" xmlns:r="http://schemas.openxmlformats.org/officeDocument/2006/relationships" xmlns:p="http://schemas.openxmlformats.org/presentationml/2006/main">
   <p:tag name="ALIGNMENT_TARGET_X" val="104.88188934326172"/>
+</p:tagLst>
+</file>
+
+<file path=ppt/tags/tag90.xml><?xml version="1.0" encoding="utf-8"?>
+<p:tagLst xmlns:a="http://schemas.openxmlformats.org/drawingml/2006/main" xmlns:r="http://schemas.openxmlformats.org/officeDocument/2006/relationships" xmlns:p="http://schemas.openxmlformats.org/presentationml/2006/main">
+  <p:tag name="ALIGNMENT_TARGET_X" val="596.692928314209"/>
+</p:tagLst>
+</file>
+
+<file path=ppt/tags/tag91.xml><?xml version="1.0" encoding="utf-8"?>
+<p:tagLst xmlns:a="http://schemas.openxmlformats.org/drawingml/2006/main" xmlns:r="http://schemas.openxmlformats.org/officeDocument/2006/relationships" xmlns:p="http://schemas.openxmlformats.org/presentationml/2006/main">
+  <p:tag name="ALIGNMENT_TARGET_X" val="596.692928314209"/>
+</p:tagLst>
+</file>
+
+<file path=ppt/tags/tag92.xml><?xml version="1.0" encoding="utf-8"?>
+<p:tagLst xmlns:a="http://schemas.openxmlformats.org/drawingml/2006/main" xmlns:r="http://schemas.openxmlformats.org/officeDocument/2006/relationships" xmlns:p="http://schemas.openxmlformats.org/presentationml/2006/main">
+  <p:tag name="ALIGNMENT_TARGET_X" val="695.9055137634277"/>
+</p:tagLst>
+</file>
+
+<file path=ppt/tags/tag93.xml><?xml version="1.0" encoding="utf-8"?>
+<p:tagLst xmlns:a="http://schemas.openxmlformats.org/drawingml/2006/main" xmlns:r="http://schemas.openxmlformats.org/officeDocument/2006/relationships" xmlns:p="http://schemas.openxmlformats.org/presentationml/2006/main">
+  <p:tag name="ALIGNMENT_TARGET_X" val="695.9055137634277"/>
+</p:tagLst>
+</file>
+
+<file path=ppt/tags/tag94.xml><?xml version="1.0" encoding="utf-8"?>
+<p:tagLst xmlns:a="http://schemas.openxmlformats.org/drawingml/2006/main" xmlns:r="http://schemas.openxmlformats.org/officeDocument/2006/relationships" xmlns:p="http://schemas.openxmlformats.org/presentationml/2006/main">
+  <p:tag name="ALIGNMENT_TARGET_X" val="795.1180992126465"/>
+</p:tagLst>
+</file>
+
+<file path=ppt/tags/tag95.xml><?xml version="1.0" encoding="utf-8"?>
+<p:tagLst xmlns:a="http://schemas.openxmlformats.org/drawingml/2006/main" xmlns:r="http://schemas.openxmlformats.org/officeDocument/2006/relationships" xmlns:p="http://schemas.openxmlformats.org/presentationml/2006/main">
+  <p:tag name="ALIGNMENT_TARGET_X" val="795.1180992126465"/>
+</p:tagLst>
+</file>
+
+<file path=ppt/tags/tag96.xml><?xml version="1.0" encoding="utf-8"?>
+<p:tagLst xmlns:a="http://schemas.openxmlformats.org/drawingml/2006/main" xmlns:r="http://schemas.openxmlformats.org/officeDocument/2006/relationships" xmlns:p="http://schemas.openxmlformats.org/presentationml/2006/main">
+  <p:tag name="ALIGNMENT_TARGET_X" val="1145.1968383789062"/>
+</p:tagLst>
+</file>
+
+<file path=ppt/tags/tag97.xml><?xml version="1.0" encoding="utf-8"?>
+<p:tagLst xmlns:a="http://schemas.openxmlformats.org/drawingml/2006/main" xmlns:r="http://schemas.openxmlformats.org/officeDocument/2006/relationships" xmlns:p="http://schemas.openxmlformats.org/presentationml/2006/main">
+  <p:tag name="ALIGNMENT_TARGET_X" val="45.354331970214844"/>
 </p:tagLst>
 </file>
 

--- a/deliverables/決賽海報_AI資安框架_A2.pptx
+++ b/deliverables/決賽海報_AI資安框架_A2.pptx
@@ -10375,7 +10375,7 @@
       <p:sp>
         <p:nvSpPr>
           <p:cNvPr id="129" name="TextBox 128"/>
-          <p:cNvSpPr txBox="1"/>
+          <p:cNvSpPr/>
           <p:nvPr>
             <p:custDataLst>
               <p:tags r:id="rId62"/>
@@ -10384,33 +10384,30 @@
         </p:nvSpPr>
         <p:spPr>
           <a:xfrm>
-            <a:off x="10152000" y="15300000"/>
-            <a:ext cx="4464000" cy="900000"/>
+            <a:off x="10152031" y="15300008"/>
+            <a:ext cx="4463986" cy="900017"/>
           </a:xfrm>
           <a:prstGeom prst="rect">
             <a:avLst/>
           </a:prstGeom>
           <a:noFill/>
-        </p:spPr>
-        <p:txBody>
-          <a:bodyPr wrap="none" lIns="0" tIns="0" rIns="0" bIns="0" anchor="ctr">
-            <a:spAutoFit/>
+          <a:ln>
+            <a:noFill/>
+          </a:ln>
+        </p:spPr>
+        <p:txBody>
+          <a:bodyPr wrap="none" lIns="0" tIns="47657" rIns="0" bIns="0" anchor="t" anchorCtr="0">
+            <a:noAutofit/>
           </a:bodyPr>
           <a:lstStyle/>
           <a:p>
             <a:pPr algn="l">
               <a:lnSpc>
-                <a:spcPct val="110000"/>
+                <a:spcPts val="2112"/>
               </a:lnSpc>
-              <a:spcBef>
-                <a:spcPts val="0"/>
-              </a:spcBef>
-              <a:spcAft>
-                <a:spcPts val="0"/>
-              </a:spcAft>
             </a:pPr>
             <a:r>
-              <a:rPr sz="1600" b="0">
+              <a:rPr lang="zh-CN" sz="1600" dirty="0">
                 <a:solidFill>
                   <a:srgbClr val="171C1D"/>
                 </a:solidFill>
@@ -10424,17 +10421,11 @@
           <a:p>
             <a:pPr algn="l">
               <a:lnSpc>
-                <a:spcPct val="110000"/>
+                <a:spcPts val="2112"/>
               </a:lnSpc>
-              <a:spcBef>
-                <a:spcPts val="0"/>
-              </a:spcBef>
-              <a:spcAft>
-                <a:spcPts val="0"/>
-              </a:spcAft>
             </a:pPr>
             <a:r>
-              <a:rPr sz="1600" b="0">
+              <a:rPr lang="zh-CN" sz="1600" dirty="0">
                 <a:solidFill>
                   <a:srgbClr val="171C1D"/>
                 </a:solidFill>
@@ -10442,23 +10433,17 @@
                 <a:ea typeface="DFKai-SB"/>
                 <a:cs typeface="Times New Roman"/>
               </a:rPr>
-              <a:t>HTTP型DDoS：上游清洗</a:t>
+              <a:t>HTTP型DDoS：來源限速</a:t>
             </a:r>
           </a:p>
           <a:p>
             <a:pPr algn="l">
               <a:lnSpc>
-                <a:spcPct val="110000"/>
+                <a:spcPts val="2112"/>
               </a:lnSpc>
-              <a:spcBef>
-                <a:spcPts val="0"/>
-              </a:spcBef>
-              <a:spcAft>
-                <a:spcPts val="0"/>
-              </a:spcAft>
             </a:pPr>
             <a:r>
-              <a:rPr sz="1600" b="0">
+              <a:rPr lang="zh-CN" sz="1600" dirty="0">
                 <a:solidFill>
                   <a:srgbClr val="171C1D"/>
                 </a:solidFill>
@@ -13358,7 +13343,7 @@
 
 <file path=ppt/tags/tag62.xml><?xml version="1.0" encoding="utf-8"?>
 <p:tagLst xmlns:a="http://schemas.openxmlformats.org/drawingml/2006/main" xmlns:r="http://schemas.openxmlformats.org/officeDocument/2006/relationships" xmlns:p="http://schemas.openxmlformats.org/presentationml/2006/main">
-  <p:tag name="ALIGNMENT_TARGET_X" val="799.3700561523438"/>
+  <p:tag name="ALIGNMENT_TARGET_X" val="799.3724975585938"/>
 </p:tagLst>
 </file>
 

--- a/deliverables/決賽海報_AI資安框架_A2.pptx
+++ b/deliverables/決賽海報_AI資安框架_A2.pptx
@@ -345,7 +345,7 @@
                 <a:ea typeface="DFKai-SB"/>
                 <a:cs typeface="Times New Roman"/>
               </a:rPr>
-              <a:t>10/29/2026</a:t>
+              <a:t>10/30/2026</a:t>
             </a:fld>
             <a:endParaRPr lang="en-US">
               <a:latin typeface="Times New Roman"/>
@@ -557,7 +557,7 @@
                 <a:ea typeface="DFKai-SB"/>
                 <a:cs typeface="Times New Roman"/>
               </a:rPr>
-              <a:t>10/29/2026</a:t>
+              <a:t>10/30/2026</a:t>
             </a:fld>
             <a:endParaRPr lang="en-US">
               <a:latin typeface="Times New Roman"/>
@@ -779,7 +779,7 @@
                 <a:ea typeface="DFKai-SB"/>
                 <a:cs typeface="Times New Roman"/>
               </a:rPr>
-              <a:t>10/29/2026</a:t>
+              <a:t>10/30/2026</a:t>
             </a:fld>
             <a:endParaRPr lang="en-US">
               <a:latin typeface="Times New Roman"/>
@@ -991,7 +991,7 @@
                 <a:ea typeface="DFKai-SB"/>
                 <a:cs typeface="Times New Roman"/>
               </a:rPr>
-              <a:t>10/29/2026</a:t>
+              <a:t>10/30/2026</a:t>
             </a:fld>
             <a:endParaRPr lang="en-US">
               <a:latin typeface="Times New Roman"/>
@@ -1295,7 +1295,7 @@
                 <a:ea typeface="DFKai-SB"/>
                 <a:cs typeface="Times New Roman"/>
               </a:rPr>
-              <a:t>10/29/2026</a:t>
+              <a:t>10/30/2026</a:t>
             </a:fld>
             <a:endParaRPr lang="en-US">
               <a:latin typeface="Times New Roman"/>
@@ -1716,7 +1716,7 @@
                 <a:ea typeface="DFKai-SB"/>
                 <a:cs typeface="Times New Roman"/>
               </a:rPr>
-              <a:t>10/29/2026</a:t>
+              <a:t>10/30/2026</a:t>
             </a:fld>
             <a:endParaRPr lang="en-US">
               <a:latin typeface="Times New Roman"/>
@@ -2355,7 +2355,7 @@
                 <a:ea typeface="DFKai-SB"/>
                 <a:cs typeface="Times New Roman"/>
               </a:rPr>
-              <a:t>10/29/2026</a:t>
+              <a:t>10/30/2026</a:t>
             </a:fld>
             <a:endParaRPr lang="en-US">
               <a:latin typeface="Times New Roman"/>
@@ -2496,7 +2496,7 @@
                 <a:ea typeface="DFKai-SB"/>
                 <a:cs typeface="Times New Roman"/>
               </a:rPr>
-              <a:t>10/29/2026</a:t>
+              <a:t>10/30/2026</a:t>
             </a:fld>
             <a:endParaRPr lang="en-US">
               <a:latin typeface="Times New Roman"/>
@@ -2611,7 +2611,7 @@
                 <a:ea typeface="DFKai-SB"/>
                 <a:cs typeface="Times New Roman"/>
               </a:rPr>
-              <a:t>10/29/2026</a:t>
+              <a:t>10/30/2026</a:t>
             </a:fld>
             <a:endParaRPr lang="en-US">
               <a:latin typeface="Times New Roman"/>
@@ -3010,7 +3010,7 @@
                 <a:ea typeface="DFKai-SB"/>
                 <a:cs typeface="Times New Roman"/>
               </a:rPr>
-              <a:t>10/29/2026</a:t>
+              <a:t>10/30/2026</a:t>
             </a:fld>
             <a:endParaRPr lang="en-US">
               <a:latin typeface="Times New Roman"/>
@@ -3370,7 +3370,7 @@
                 <a:ea typeface="DFKai-SB"/>
                 <a:cs typeface="Times New Roman"/>
               </a:rPr>
-              <a:t>10/29/2026</a:t>
+              <a:t>10/30/2026</a:t>
             </a:fld>
             <a:endParaRPr lang="en-US">
               <a:latin typeface="Times New Roman"/>
@@ -3628,7 +3628,7 @@
                 <a:ea typeface="DFKai-SB"/>
                 <a:cs typeface="Times New Roman"/>
               </a:rPr>
-              <a:t>10/29/2026</a:t>
+              <a:t>10/30/2026</a:t>
             </a:fld>
             <a:endParaRPr lang="en-US">
               <a:latin typeface="Times New Roman"/>
@@ -9909,9 +9909,9 @@
           <a:p>
             <a:pPr algn="r"/>
             <a:r>
-              <a:rPr lang="zh-TW" sz="2100" b="1" dirty="0">
-                <a:solidFill>
-                  <a:srgbClr val="245EA8"/>
+              <a:rPr lang="en-US" sz="2100" b="1" dirty="0">
+                <a:solidFill>
+                  <a:srgbClr val="087F8C"/>
                 </a:solidFill>
                 <a:latin typeface="Times New Roman"/>
                 <a:ea typeface="DFKai-SB"/>
@@ -10056,16 +10056,16 @@
           </a:ln>
         </p:spPr>
         <p:txBody>
-          <a:bodyPr wrap="none" lIns="0" tIns="-5974" rIns="0" bIns="0" anchor="t" anchorCtr="0">
+          <a:bodyPr wrap="none" lIns="0" tIns="-56774" rIns="0" bIns="0" anchor="t" anchorCtr="0">
             <a:noAutofit/>
           </a:bodyPr>
           <a:lstStyle/>
           <a:p>
             <a:pPr algn="l"/>
             <a:r>
-              <a:rPr lang="en-US" sz="2800" b="1" dirty="0">
-                <a:solidFill>
-                  <a:srgbClr val="245EA8"/>
+              <a:rPr lang="en-US" sz="3200" b="1" dirty="0">
+                <a:solidFill>
+                  <a:srgbClr val="087F8C"/>
                 </a:solidFill>
                 <a:latin typeface="Times New Roman"/>
                 <a:ea typeface="DFKai-SB"/>

--- a/deliverables/決賽海報_AI資安框架_A2.pptx
+++ b/deliverables/決賽海報_AI資安框架_A2.pptx
@@ -4736,7 +4736,7 @@
           <p:nvPr/>
         </p:nvPicPr>
         <p:blipFill>
-          <a:blip r:embed="rId92"/>
+          <a:blip r:embed="rId95"/>
           <a:stretch>
             <a:fillRect/>
           </a:stretch>
@@ -5086,7 +5086,7 @@
           <p:nvPr/>
         </p:nvPicPr>
         <p:blipFill>
-          <a:blip r:embed="rId93"/>
+          <a:blip r:embed="rId96"/>
           <a:stretch>
             <a:fillRect/>
           </a:stretch>
@@ -5921,7 +5921,7 @@
           <p:nvPr/>
         </p:nvPicPr>
         <p:blipFill>
-          <a:blip r:embed="rId94"/>
+          <a:blip r:embed="rId97"/>
           <a:stretch>
             <a:fillRect/>
           </a:stretch>
@@ -10942,9 +10942,45 @@
           </a:p>
         </p:txBody>
       </p:sp>
-      <p:sp>
-        <p:nvSpPr>
-          <p:cNvPr id="139" name="TextBox 138"/>
+      <p:cxnSp>
+        <p:nvCxnSpPr>
+          <p:cNvPr id="139" name="Connector 138"/>
+          <p:cNvCxnSpPr/>
+          <p:nvPr/>
+        </p:nvCxnSpPr>
+        <p:spPr>
+          <a:xfrm>
+            <a:off x="2304000" y="19080000"/>
+            <a:ext cx="0" cy="72000"/>
+          </a:xfrm>
+          <a:prstGeom prst="line">
+            <a:avLst/>
+          </a:prstGeom>
+          <a:ln w="7620">
+            <a:solidFill>
+              <a:srgbClr val="D7E1EA"/>
+            </a:solidFill>
+          </a:ln>
+          <a:effectLst/>
+        </p:spPr>
+        <p:style>
+          <a:lnRef idx="2">
+            <a:schemeClr val="accent1"/>
+          </a:lnRef>
+          <a:fillRef idx="0">
+            <a:schemeClr val="accent1"/>
+          </a:fillRef>
+          <a:effectRef idx="1">
+            <a:schemeClr val="accent1"/>
+          </a:effectRef>
+          <a:fontRef idx="minor">
+            <a:schemeClr val="tx1"/>
+          </a:fontRef>
+        </p:style>
+      </p:cxnSp>
+      <p:sp>
+        <p:nvSpPr>
+          <p:cNvPr id="140" name="TextBox 139"/>
           <p:cNvSpPr txBox="1"/>
           <p:nvPr>
             <p:custDataLst>
@@ -10954,8 +10990,8 @@
         </p:nvSpPr>
         <p:spPr>
           <a:xfrm>
-            <a:off x="550600" y="19260000"/>
-            <a:ext cx="6624000" cy="324000"/>
+            <a:off x="1960950" y="19152000"/>
+            <a:ext cx="648000" cy="216000"/>
           </a:xfrm>
           <a:prstGeom prst="rect">
             <a:avLst/>
@@ -10980,6 +11016,231 @@
               </a:spcAft>
             </a:pPr>
             <a:r>
+              <a:rPr sz="1200" b="0">
+                <a:solidFill>
+                  <a:srgbClr val="526477"/>
+                </a:solidFill>
+                <a:latin typeface="Times New Roman"/>
+                <a:ea typeface="DFKai-SB"/>
+                <a:cs typeface="Times New Roman"/>
+              </a:rPr>
+              <a:t>0%</a:t>
+            </a:r>
+          </a:p>
+        </p:txBody>
+      </p:sp>
+      <p:cxnSp>
+        <p:nvCxnSpPr>
+          <p:cNvPr id="141" name="Connector 140"/>
+          <p:cNvCxnSpPr/>
+          <p:nvPr/>
+        </p:nvCxnSpPr>
+        <p:spPr>
+          <a:xfrm>
+            <a:off x="3996000" y="19080000"/>
+            <a:ext cx="0" cy="72000"/>
+          </a:xfrm>
+          <a:prstGeom prst="line">
+            <a:avLst/>
+          </a:prstGeom>
+          <a:ln w="7620">
+            <a:solidFill>
+              <a:srgbClr val="D7E1EA"/>
+            </a:solidFill>
+          </a:ln>
+          <a:effectLst/>
+        </p:spPr>
+        <p:style>
+          <a:lnRef idx="2">
+            <a:schemeClr val="accent1"/>
+          </a:lnRef>
+          <a:fillRef idx="0">
+            <a:schemeClr val="accent1"/>
+          </a:fillRef>
+          <a:effectRef idx="1">
+            <a:schemeClr val="accent1"/>
+          </a:effectRef>
+          <a:fontRef idx="minor">
+            <a:schemeClr val="tx1"/>
+          </a:fontRef>
+        </p:style>
+      </p:cxnSp>
+      <p:sp>
+        <p:nvSpPr>
+          <p:cNvPr id="142" name="TextBox 141"/>
+          <p:cNvSpPr txBox="1"/>
+          <p:nvPr>
+            <p:custDataLst>
+              <p:tags r:id="rId66"/>
+            </p:custDataLst>
+          </p:nvPr>
+        </p:nvSpPr>
+        <p:spPr>
+          <a:xfrm>
+            <a:off x="3652950" y="19152000"/>
+            <a:ext cx="648000" cy="216000"/>
+          </a:xfrm>
+          <a:prstGeom prst="rect">
+            <a:avLst/>
+          </a:prstGeom>
+          <a:noFill/>
+        </p:spPr>
+        <p:txBody>
+          <a:bodyPr wrap="none" lIns="0" tIns="0" rIns="0" bIns="0" anchor="ctr">
+            <a:spAutoFit/>
+          </a:bodyPr>
+          <a:lstStyle/>
+          <a:p>
+            <a:pPr algn="ctr">
+              <a:lnSpc>
+                <a:spcPct val="110000"/>
+              </a:lnSpc>
+              <a:spcBef>
+                <a:spcPts val="0"/>
+              </a:spcBef>
+              <a:spcAft>
+                <a:spcPts val="0"/>
+              </a:spcAft>
+            </a:pPr>
+            <a:r>
+              <a:rPr sz="1200" b="0">
+                <a:solidFill>
+                  <a:srgbClr val="526477"/>
+                </a:solidFill>
+                <a:latin typeface="Times New Roman"/>
+                <a:ea typeface="DFKai-SB"/>
+                <a:cs typeface="Times New Roman"/>
+              </a:rPr>
+              <a:t>50%</a:t>
+            </a:r>
+          </a:p>
+        </p:txBody>
+      </p:sp>
+      <p:cxnSp>
+        <p:nvCxnSpPr>
+          <p:cNvPr id="143" name="Connector 142"/>
+          <p:cNvCxnSpPr/>
+          <p:nvPr/>
+        </p:nvCxnSpPr>
+        <p:spPr>
+          <a:xfrm>
+            <a:off x="5688000" y="19080000"/>
+            <a:ext cx="0" cy="72000"/>
+          </a:xfrm>
+          <a:prstGeom prst="line">
+            <a:avLst/>
+          </a:prstGeom>
+          <a:ln w="7620">
+            <a:solidFill>
+              <a:srgbClr val="D7E1EA"/>
+            </a:solidFill>
+          </a:ln>
+          <a:effectLst/>
+        </p:spPr>
+        <p:style>
+          <a:lnRef idx="2">
+            <a:schemeClr val="accent1"/>
+          </a:lnRef>
+          <a:fillRef idx="0">
+            <a:schemeClr val="accent1"/>
+          </a:fillRef>
+          <a:effectRef idx="1">
+            <a:schemeClr val="accent1"/>
+          </a:effectRef>
+          <a:fontRef idx="minor">
+            <a:schemeClr val="tx1"/>
+          </a:fontRef>
+        </p:style>
+      </p:cxnSp>
+      <p:sp>
+        <p:nvSpPr>
+          <p:cNvPr id="144" name="TextBox 143"/>
+          <p:cNvSpPr txBox="1"/>
+          <p:nvPr>
+            <p:custDataLst>
+              <p:tags r:id="rId67"/>
+            </p:custDataLst>
+          </p:nvPr>
+        </p:nvSpPr>
+        <p:spPr>
+          <a:xfrm>
+            <a:off x="5344950" y="19152000"/>
+            <a:ext cx="648000" cy="216000"/>
+          </a:xfrm>
+          <a:prstGeom prst="rect">
+            <a:avLst/>
+          </a:prstGeom>
+          <a:noFill/>
+        </p:spPr>
+        <p:txBody>
+          <a:bodyPr wrap="none" lIns="0" tIns="0" rIns="0" bIns="0" anchor="ctr">
+            <a:spAutoFit/>
+          </a:bodyPr>
+          <a:lstStyle/>
+          <a:p>
+            <a:pPr algn="ctr">
+              <a:lnSpc>
+                <a:spcPct val="110000"/>
+              </a:lnSpc>
+              <a:spcBef>
+                <a:spcPts val="0"/>
+              </a:spcBef>
+              <a:spcAft>
+                <a:spcPts val="0"/>
+              </a:spcAft>
+            </a:pPr>
+            <a:r>
+              <a:rPr sz="1200" b="0">
+                <a:solidFill>
+                  <a:srgbClr val="526477"/>
+                </a:solidFill>
+                <a:latin typeface="Times New Roman"/>
+                <a:ea typeface="DFKai-SB"/>
+                <a:cs typeface="Times New Roman"/>
+              </a:rPr>
+              <a:t>100%</a:t>
+            </a:r>
+          </a:p>
+        </p:txBody>
+      </p:sp>
+      <p:sp>
+        <p:nvSpPr>
+          <p:cNvPr id="145" name="TextBox 144"/>
+          <p:cNvSpPr txBox="1"/>
+          <p:nvPr>
+            <p:custDataLst>
+              <p:tags r:id="rId68"/>
+            </p:custDataLst>
+          </p:nvPr>
+        </p:nvSpPr>
+        <p:spPr>
+          <a:xfrm>
+            <a:off x="550600" y="19440000"/>
+            <a:ext cx="6624000" cy="324000"/>
+          </a:xfrm>
+          <a:prstGeom prst="rect">
+            <a:avLst/>
+          </a:prstGeom>
+          <a:noFill/>
+        </p:spPr>
+        <p:txBody>
+          <a:bodyPr wrap="none" lIns="0" tIns="0" rIns="0" bIns="0" anchor="ctr">
+            <a:spAutoFit/>
+          </a:bodyPr>
+          <a:lstStyle/>
+          <a:p>
+            <a:pPr algn="ctr">
+              <a:lnSpc>
+                <a:spcPct val="110000"/>
+              </a:lnSpc>
+              <a:spcBef>
+                <a:spcPts val="0"/>
+              </a:spcBef>
+              <a:spcAft>
+                <a:spcPts val="0"/>
+              </a:spcAft>
+            </a:pPr>
+            <a:r>
               <a:rPr sz="1600" b="0">
                 <a:solidFill>
                   <a:srgbClr val="526477"/>
@@ -10995,7 +11256,7 @@
       </p:sp>
       <p:cxnSp>
         <p:nvCxnSpPr>
-          <p:cNvPr id="140" name="Connector 139"/>
+          <p:cNvPr id="146" name="Connector 145"/>
           <p:cNvCxnSpPr/>
           <p:nvPr/>
         </p:nvCxnSpPr>
@@ -11031,11 +11292,11 @@
       </p:cxnSp>
       <p:sp>
         <p:nvSpPr>
-          <p:cNvPr id="141" name="TextBox 140"/>
+          <p:cNvPr id="147" name="TextBox 146"/>
           <p:cNvSpPr txBox="1"/>
           <p:nvPr>
             <p:custDataLst>
-              <p:tags r:id="rId66"/>
+              <p:tags r:id="rId69"/>
             </p:custDataLst>
           </p:nvPr>
         </p:nvSpPr>
@@ -11082,11 +11343,11 @@
       </p:sp>
       <p:sp>
         <p:nvSpPr>
-          <p:cNvPr id="142" name="TextBox 141"/>
+          <p:cNvPr id="148" name="TextBox 147"/>
           <p:cNvSpPr txBox="1"/>
           <p:nvPr>
             <p:custDataLst>
-              <p:tags r:id="rId67"/>
+              <p:tags r:id="rId70"/>
             </p:custDataLst>
           </p:nvPr>
         </p:nvSpPr>
@@ -11133,11 +11394,11 @@
       </p:sp>
       <p:sp>
         <p:nvSpPr>
-          <p:cNvPr id="143" name="TextBox 142"/>
+          <p:cNvPr id="149" name="TextBox 148"/>
           <p:cNvSpPr txBox="1"/>
           <p:nvPr>
             <p:custDataLst>
-              <p:tags r:id="rId68"/>
+              <p:tags r:id="rId71"/>
             </p:custDataLst>
           </p:nvPr>
         </p:nvSpPr>
@@ -11184,11 +11445,11 @@
       </p:sp>
       <p:sp>
         <p:nvSpPr>
-          <p:cNvPr id="144" name="TextBox 143"/>
+          <p:cNvPr id="150" name="TextBox 149"/>
           <p:cNvSpPr txBox="1"/>
           <p:nvPr>
             <p:custDataLst>
-              <p:tags r:id="rId69"/>
+              <p:tags r:id="rId72"/>
             </p:custDataLst>
           </p:nvPr>
         </p:nvSpPr>
@@ -11235,11 +11496,11 @@
       </p:sp>
       <p:sp>
         <p:nvSpPr>
-          <p:cNvPr id="145" name="TextBox 144"/>
+          <p:cNvPr id="151" name="TextBox 150"/>
           <p:cNvSpPr txBox="1"/>
           <p:nvPr>
             <p:custDataLst>
-              <p:tags r:id="rId70"/>
+              <p:tags r:id="rId73"/>
             </p:custDataLst>
           </p:nvPr>
         </p:nvSpPr>
@@ -11286,11 +11547,11 @@
       </p:sp>
       <p:sp>
         <p:nvSpPr>
-          <p:cNvPr id="146" name="TextBox 145"/>
+          <p:cNvPr id="152" name="TextBox 151"/>
           <p:cNvSpPr txBox="1"/>
           <p:nvPr>
             <p:custDataLst>
-              <p:tags r:id="rId71"/>
+              <p:tags r:id="rId74"/>
             </p:custDataLst>
           </p:nvPr>
         </p:nvSpPr>
@@ -11337,11 +11598,11 @@
       </p:sp>
       <p:sp>
         <p:nvSpPr>
-          <p:cNvPr id="147" name="TextBox 146"/>
+          <p:cNvPr id="153" name="TextBox 152"/>
           <p:cNvSpPr txBox="1"/>
           <p:nvPr>
             <p:custDataLst>
-              <p:tags r:id="rId72"/>
+              <p:tags r:id="rId75"/>
             </p:custDataLst>
           </p:nvPr>
         </p:nvSpPr>
@@ -11388,11 +11649,11 @@
       </p:sp>
       <p:sp>
         <p:nvSpPr>
-          <p:cNvPr id="148" name="TextBox 147"/>
+          <p:cNvPr id="154" name="TextBox 153"/>
           <p:cNvSpPr txBox="1"/>
           <p:nvPr>
             <p:custDataLst>
-              <p:tags r:id="rId73"/>
+              <p:tags r:id="rId76"/>
             </p:custDataLst>
           </p:nvPr>
         </p:nvSpPr>
@@ -11439,11 +11700,11 @@
       </p:sp>
       <p:sp>
         <p:nvSpPr>
-          <p:cNvPr id="149" name="TextBox 148"/>
+          <p:cNvPr id="155" name="TextBox 154"/>
           <p:cNvSpPr txBox="1"/>
           <p:nvPr>
             <p:custDataLst>
-              <p:tags r:id="rId74"/>
+              <p:tags r:id="rId77"/>
             </p:custDataLst>
           </p:nvPr>
         </p:nvSpPr>
@@ -11490,11 +11751,11 @@
       </p:sp>
       <p:sp>
         <p:nvSpPr>
-          <p:cNvPr id="150" name="TextBox 149"/>
+          <p:cNvPr id="156" name="TextBox 155"/>
           <p:cNvSpPr txBox="1"/>
           <p:nvPr>
             <p:custDataLst>
-              <p:tags r:id="rId75"/>
+              <p:tags r:id="rId78"/>
             </p:custDataLst>
           </p:nvPr>
         </p:nvSpPr>
@@ -11565,7 +11826,7 @@
       </p:sp>
       <p:cxnSp>
         <p:nvCxnSpPr>
-          <p:cNvPr id="151" name="Connector 150"/>
+          <p:cNvPr id="157" name="Connector 156"/>
           <p:cNvCxnSpPr/>
           <p:nvPr/>
         </p:nvCxnSpPr>
@@ -11601,11 +11862,11 @@
       </p:cxnSp>
       <p:sp>
         <p:nvSpPr>
-          <p:cNvPr id="152" name="TextBox 151"/>
+          <p:cNvPr id="158" name="TextBox 157"/>
           <p:cNvSpPr txBox="1"/>
           <p:nvPr>
             <p:custDataLst>
-              <p:tags r:id="rId76"/>
+              <p:tags r:id="rId79"/>
             </p:custDataLst>
           </p:nvPr>
         </p:nvSpPr>
@@ -11676,7 +11937,7 @@
       </p:sp>
       <p:sp>
         <p:nvSpPr>
-          <p:cNvPr id="153" name="Rectangle 152"/>
+          <p:cNvPr id="159" name="Rectangle 158"/>
           <p:cNvSpPr/>
           <p:nvPr/>
         </p:nvSpPr>
@@ -11727,11 +11988,11 @@
       </p:sp>
       <p:sp>
         <p:nvSpPr>
-          <p:cNvPr id="154" name="TextBox 153"/>
+          <p:cNvPr id="160" name="TextBox 159"/>
           <p:cNvSpPr txBox="1"/>
           <p:nvPr>
             <p:custDataLst>
-              <p:tags r:id="rId77"/>
+              <p:tags r:id="rId80"/>
             </p:custDataLst>
           </p:nvPr>
         </p:nvSpPr>
@@ -11778,11 +12039,11 @@
       </p:sp>
       <p:sp>
         <p:nvSpPr>
-          <p:cNvPr id="155" name="TextBox 154"/>
+          <p:cNvPr id="161" name="TextBox 160"/>
           <p:cNvSpPr txBox="1"/>
           <p:nvPr>
             <p:custDataLst>
-              <p:tags r:id="rId78"/>
+              <p:tags r:id="rId81"/>
             </p:custDataLst>
           </p:nvPr>
         </p:nvSpPr>
@@ -11829,7 +12090,7 @@
       </p:sp>
       <p:sp>
         <p:nvSpPr>
-          <p:cNvPr id="156" name="Rectangle 155"/>
+          <p:cNvPr id="162" name="Rectangle 161"/>
           <p:cNvSpPr/>
           <p:nvPr/>
         </p:nvSpPr>
@@ -11880,11 +12141,11 @@
       </p:sp>
       <p:sp>
         <p:nvSpPr>
-          <p:cNvPr id="157" name="TextBox 156"/>
+          <p:cNvPr id="163" name="TextBox 162"/>
           <p:cNvSpPr txBox="1"/>
           <p:nvPr>
             <p:custDataLst>
-              <p:tags r:id="rId79"/>
+              <p:tags r:id="rId82"/>
             </p:custDataLst>
           </p:nvPr>
         </p:nvSpPr>
@@ -11931,11 +12192,11 @@
       </p:sp>
       <p:sp>
         <p:nvSpPr>
-          <p:cNvPr id="158" name="TextBox 157"/>
+          <p:cNvPr id="164" name="TextBox 163"/>
           <p:cNvSpPr txBox="1"/>
           <p:nvPr>
             <p:custDataLst>
-              <p:tags r:id="rId80"/>
+              <p:tags r:id="rId83"/>
             </p:custDataLst>
           </p:nvPr>
         </p:nvSpPr>
@@ -11982,7 +12243,7 @@
       </p:sp>
       <p:sp>
         <p:nvSpPr>
-          <p:cNvPr id="159" name="Rectangle 158"/>
+          <p:cNvPr id="165" name="Rectangle 164"/>
           <p:cNvSpPr/>
           <p:nvPr/>
         </p:nvSpPr>
@@ -12033,11 +12294,11 @@
       </p:sp>
       <p:sp>
         <p:nvSpPr>
-          <p:cNvPr id="160" name="TextBox 159"/>
+          <p:cNvPr id="166" name="TextBox 165"/>
           <p:cNvSpPr txBox="1"/>
           <p:nvPr>
             <p:custDataLst>
-              <p:tags r:id="rId81"/>
+              <p:tags r:id="rId84"/>
             </p:custDataLst>
           </p:nvPr>
         </p:nvSpPr>
@@ -12084,11 +12345,11 @@
       </p:sp>
       <p:sp>
         <p:nvSpPr>
-          <p:cNvPr id="161" name="TextBox 160"/>
+          <p:cNvPr id="167" name="TextBox 166"/>
           <p:cNvSpPr txBox="1"/>
           <p:nvPr>
             <p:custDataLst>
-              <p:tags r:id="rId82"/>
+              <p:tags r:id="rId85"/>
             </p:custDataLst>
           </p:nvPr>
         </p:nvSpPr>
@@ -12135,7 +12396,7 @@
       </p:sp>
       <p:sp>
         <p:nvSpPr>
-          <p:cNvPr id="162" name="Rectangle 161"/>
+          <p:cNvPr id="168" name="Rectangle 167"/>
           <p:cNvSpPr/>
           <p:nvPr/>
         </p:nvSpPr>
@@ -12186,11 +12447,11 @@
       </p:sp>
       <p:sp>
         <p:nvSpPr>
-          <p:cNvPr id="163" name="TextBox 162"/>
+          <p:cNvPr id="169" name="TextBox 168"/>
           <p:cNvSpPr txBox="1"/>
           <p:nvPr>
             <p:custDataLst>
-              <p:tags r:id="rId83"/>
+              <p:tags r:id="rId86"/>
             </p:custDataLst>
           </p:nvPr>
         </p:nvSpPr>
@@ -12237,11 +12498,11 @@
       </p:sp>
       <p:sp>
         <p:nvSpPr>
-          <p:cNvPr id="164" name="TextBox 163"/>
+          <p:cNvPr id="170" name="TextBox 169"/>
           <p:cNvSpPr txBox="1"/>
           <p:nvPr>
             <p:custDataLst>
-              <p:tags r:id="rId84"/>
+              <p:tags r:id="rId87"/>
             </p:custDataLst>
           </p:nvPr>
         </p:nvSpPr>
@@ -12288,7 +12549,7 @@
       </p:sp>
       <p:sp>
         <p:nvSpPr>
-          <p:cNvPr id="165" name="Rectangle 164"/>
+          <p:cNvPr id="171" name="Rectangle 170"/>
           <p:cNvSpPr/>
           <p:nvPr/>
         </p:nvSpPr>
@@ -12339,11 +12600,11 @@
       </p:sp>
       <p:sp>
         <p:nvSpPr>
-          <p:cNvPr id="166" name="TextBox 165"/>
+          <p:cNvPr id="172" name="TextBox 171"/>
           <p:cNvSpPr txBox="1"/>
           <p:nvPr>
             <p:custDataLst>
-              <p:tags r:id="rId85"/>
+              <p:tags r:id="rId88"/>
             </p:custDataLst>
           </p:nvPr>
         </p:nvSpPr>
@@ -12390,11 +12651,11 @@
       </p:sp>
       <p:sp>
         <p:nvSpPr>
-          <p:cNvPr id="167" name="TextBox 166"/>
+          <p:cNvPr id="173" name="TextBox 172"/>
           <p:cNvSpPr txBox="1"/>
           <p:nvPr>
             <p:custDataLst>
-              <p:tags r:id="rId86"/>
+              <p:tags r:id="rId89"/>
             </p:custDataLst>
           </p:nvPr>
         </p:nvSpPr>
@@ -12441,7 +12702,7 @@
       </p:sp>
       <p:sp>
         <p:nvSpPr>
-          <p:cNvPr id="168" name="Rectangle 167"/>
+          <p:cNvPr id="174" name="Rectangle 173"/>
           <p:cNvSpPr/>
           <p:nvPr/>
         </p:nvSpPr>
@@ -12492,11 +12753,11 @@
       </p:sp>
       <p:sp>
         <p:nvSpPr>
-          <p:cNvPr id="169" name="TextBox 168"/>
+          <p:cNvPr id="175" name="TextBox 174"/>
           <p:cNvSpPr txBox="1"/>
           <p:nvPr>
             <p:custDataLst>
-              <p:tags r:id="rId87"/>
+              <p:tags r:id="rId90"/>
             </p:custDataLst>
           </p:nvPr>
         </p:nvSpPr>
@@ -12543,11 +12804,11 @@
       </p:sp>
       <p:sp>
         <p:nvSpPr>
-          <p:cNvPr id="170" name="TextBox 169"/>
+          <p:cNvPr id="176" name="TextBox 175"/>
           <p:cNvSpPr txBox="1"/>
           <p:nvPr>
             <p:custDataLst>
-              <p:tags r:id="rId88"/>
+              <p:tags r:id="rId91"/>
             </p:custDataLst>
           </p:nvPr>
         </p:nvSpPr>
@@ -12594,11 +12855,11 @@
       </p:sp>
       <p:sp>
         <p:nvSpPr>
-          <p:cNvPr id="171" name="TextBox 170"/>
+          <p:cNvPr id="177" name="TextBox 176"/>
           <p:cNvSpPr txBox="1"/>
           <p:nvPr>
             <p:custDataLst>
-              <p:tags r:id="rId89"/>
+              <p:tags r:id="rId92"/>
             </p:custDataLst>
           </p:nvPr>
         </p:nvSpPr>
@@ -12669,11 +12930,11 @@
       </p:sp>
       <p:sp>
         <p:nvSpPr>
-          <p:cNvPr id="172" name="TextBox 171"/>
+          <p:cNvPr id="178" name="TextBox 177"/>
           <p:cNvSpPr txBox="1"/>
           <p:nvPr>
             <p:custDataLst>
-              <p:tags r:id="rId90"/>
+              <p:tags r:id="rId93"/>
             </p:custDataLst>
           </p:nvPr>
         </p:nvSpPr>
@@ -13094,31 +13355,31 @@
 
 <file path=ppt/tags/tag65.xml><?xml version="1.0" encoding="utf-8"?>
 <p:tagLst xmlns:a="http://schemas.openxmlformats.org/drawingml/2006/main" xmlns:r="http://schemas.openxmlformats.org/officeDocument/2006/relationships" xmlns:p="http://schemas.openxmlformats.org/presentationml/2006/main">
-  <p:tag name="ALIGNMENT_TARGET_X" val="306.1417465209961"/>
+  <p:tag name="ALIGNMENT_TARGET_X" val="181.41732788085938"/>
 </p:tagLst>
 </file>
 
 <file path=ppt/tags/tag66.xml><?xml version="1.0" encoding="utf-8"?>
 <p:tagLst xmlns:a="http://schemas.openxmlformats.org/drawingml/2006/main" xmlns:r="http://schemas.openxmlformats.org/officeDocument/2006/relationships" xmlns:p="http://schemas.openxmlformats.org/presentationml/2006/main">
-  <p:tag name="ALIGNMENT_TARGET_X" val="884.4094848632812"/>
+  <p:tag name="ALIGNMENT_TARGET_X" val="314.6456604003906"/>
 </p:tagLst>
 </file>
 
 <file path=ppt/tags/tag67.xml><?xml version="1.0" encoding="utf-8"?>
 <p:tagLst xmlns:a="http://schemas.openxmlformats.org/drawingml/2006/main" xmlns:r="http://schemas.openxmlformats.org/officeDocument/2006/relationships" xmlns:p="http://schemas.openxmlformats.org/presentationml/2006/main">
-  <p:tag name="ALIGNMENT_TARGET_X" val="884.4094848632812"/>
+  <p:tag name="ALIGNMENT_TARGET_X" val="447.8740234375"/>
 </p:tagLst>
 </file>
 
 <file path=ppt/tags/tag68.xml><?xml version="1.0" encoding="utf-8"?>
 <p:tagLst xmlns:a="http://schemas.openxmlformats.org/drawingml/2006/main" xmlns:r="http://schemas.openxmlformats.org/officeDocument/2006/relationships" xmlns:p="http://schemas.openxmlformats.org/presentationml/2006/main">
-  <p:tag name="ALIGNMENT_TARGET_X" val="884.4094848632812"/>
+  <p:tag name="ALIGNMENT_TARGET_X" val="306.1417465209961"/>
 </p:tagLst>
 </file>
 
 <file path=ppt/tags/tag69.xml><?xml version="1.0" encoding="utf-8"?>
 <p:tagLst xmlns:a="http://schemas.openxmlformats.org/drawingml/2006/main" xmlns:r="http://schemas.openxmlformats.org/officeDocument/2006/relationships" xmlns:p="http://schemas.openxmlformats.org/presentationml/2006/main">
-  <p:tag name="ALIGNMENT_TARGET_X" val="705.8267974853516"/>
+  <p:tag name="ALIGNMENT_TARGET_X" val="884.4094848632812"/>
 </p:tagLst>
 </file>
 
@@ -13130,61 +13391,61 @@
 
 <file path=ppt/tags/tag70.xml><?xml version="1.0" encoding="utf-8"?>
 <p:tagLst xmlns:a="http://schemas.openxmlformats.org/drawingml/2006/main" xmlns:r="http://schemas.openxmlformats.org/officeDocument/2006/relationships" xmlns:p="http://schemas.openxmlformats.org/presentationml/2006/main">
-  <p:tag name="ALIGNMENT_TARGET_X" val="705.8267974853516"/>
+  <p:tag name="ALIGNMENT_TARGET_X" val="884.4094848632812"/>
 </p:tagLst>
 </file>
 
 <file path=ppt/tags/tag71.xml><?xml version="1.0" encoding="utf-8"?>
 <p:tagLst xmlns:a="http://schemas.openxmlformats.org/drawingml/2006/main" xmlns:r="http://schemas.openxmlformats.org/officeDocument/2006/relationships" xmlns:p="http://schemas.openxmlformats.org/presentationml/2006/main">
-  <p:tag name="ALIGNMENT_TARGET_X" val="884.4094390869141"/>
+  <p:tag name="ALIGNMENT_TARGET_X" val="884.4094848632812"/>
 </p:tagLst>
 </file>
 
 <file path=ppt/tags/tag72.xml><?xml version="1.0" encoding="utf-8"?>
 <p:tagLst xmlns:a="http://schemas.openxmlformats.org/drawingml/2006/main" xmlns:r="http://schemas.openxmlformats.org/officeDocument/2006/relationships" xmlns:p="http://schemas.openxmlformats.org/presentationml/2006/main">
-  <p:tag name="ALIGNMENT_TARGET_X" val="884.4094390869141"/>
+  <p:tag name="ALIGNMENT_TARGET_X" val="705.8267974853516"/>
 </p:tagLst>
 </file>
 
 <file path=ppt/tags/tag73.xml><?xml version="1.0" encoding="utf-8"?>
 <p:tagLst xmlns:a="http://schemas.openxmlformats.org/drawingml/2006/main" xmlns:r="http://schemas.openxmlformats.org/officeDocument/2006/relationships" xmlns:p="http://schemas.openxmlformats.org/presentationml/2006/main">
-  <p:tag name="ALIGNMENT_TARGET_X" val="1062.9921417236328"/>
+  <p:tag name="ALIGNMENT_TARGET_X" val="705.8267974853516"/>
 </p:tagLst>
 </file>
 
 <file path=ppt/tags/tag74.xml><?xml version="1.0" encoding="utf-8"?>
 <p:tagLst xmlns:a="http://schemas.openxmlformats.org/drawingml/2006/main" xmlns:r="http://schemas.openxmlformats.org/officeDocument/2006/relationships" xmlns:p="http://schemas.openxmlformats.org/presentationml/2006/main">
-  <p:tag name="ALIGNMENT_TARGET_X" val="1062.9921417236328"/>
+  <p:tag name="ALIGNMENT_TARGET_X" val="884.4094390869141"/>
 </p:tagLst>
 </file>
 
 <file path=ppt/tags/tag75.xml><?xml version="1.0" encoding="utf-8"?>
 <p:tagLst xmlns:a="http://schemas.openxmlformats.org/drawingml/2006/main" xmlns:r="http://schemas.openxmlformats.org/officeDocument/2006/relationships" xmlns:p="http://schemas.openxmlformats.org/presentationml/2006/main">
-  <p:tag name="ALIGNMENT_TARGET_X" val="884.4094848632812"/>
+  <p:tag name="ALIGNMENT_TARGET_X" val="884.4094390869141"/>
 </p:tagLst>
 </file>
 
 <file path=ppt/tags/tag76.xml><?xml version="1.0" encoding="utf-8"?>
 <p:tagLst xmlns:a="http://schemas.openxmlformats.org/drawingml/2006/main" xmlns:r="http://schemas.openxmlformats.org/officeDocument/2006/relationships" xmlns:p="http://schemas.openxmlformats.org/presentationml/2006/main">
-  <p:tag name="ALIGNMENT_TARGET_X" val="140.3149642944336"/>
+  <p:tag name="ALIGNMENT_TARGET_X" val="1062.9921417236328"/>
 </p:tagLst>
 </file>
 
 <file path=ppt/tags/tag77.xml><?xml version="1.0" encoding="utf-8"?>
 <p:tagLst xmlns:a="http://schemas.openxmlformats.org/drawingml/2006/main" xmlns:r="http://schemas.openxmlformats.org/officeDocument/2006/relationships" xmlns:p="http://schemas.openxmlformats.org/presentationml/2006/main">
-  <p:tag name="ALIGNMENT_TARGET_X" val="299.0551109313965"/>
+  <p:tag name="ALIGNMENT_TARGET_X" val="1062.9921417236328"/>
 </p:tagLst>
 </file>
 
 <file path=ppt/tags/tag78.xml><?xml version="1.0" encoding="utf-8"?>
 <p:tagLst xmlns:a="http://schemas.openxmlformats.org/drawingml/2006/main" xmlns:r="http://schemas.openxmlformats.org/officeDocument/2006/relationships" xmlns:p="http://schemas.openxmlformats.org/presentationml/2006/main">
-  <p:tag name="ALIGNMENT_TARGET_X" val="299.0551109313965"/>
+  <p:tag name="ALIGNMENT_TARGET_X" val="884.4094848632812"/>
 </p:tagLst>
 </file>
 
 <file path=ppt/tags/tag79.xml><?xml version="1.0" encoding="utf-8"?>
 <p:tagLst xmlns:a="http://schemas.openxmlformats.org/drawingml/2006/main" xmlns:r="http://schemas.openxmlformats.org/officeDocument/2006/relationships" xmlns:p="http://schemas.openxmlformats.org/presentationml/2006/main">
-  <p:tag name="ALIGNMENT_TARGET_X" val="398.26772689819336"/>
+  <p:tag name="ALIGNMENT_TARGET_X" val="140.3149642944336"/>
 </p:tagLst>
 </file>
 
@@ -13196,61 +13457,61 @@
 
 <file path=ppt/tags/tag80.xml><?xml version="1.0" encoding="utf-8"?>
 <p:tagLst xmlns:a="http://schemas.openxmlformats.org/drawingml/2006/main" xmlns:r="http://schemas.openxmlformats.org/officeDocument/2006/relationships" xmlns:p="http://schemas.openxmlformats.org/presentationml/2006/main">
-  <p:tag name="ALIGNMENT_TARGET_X" val="398.26772689819336"/>
+  <p:tag name="ALIGNMENT_TARGET_X" val="299.0551109313965"/>
 </p:tagLst>
 </file>
 
 <file path=ppt/tags/tag81.xml><?xml version="1.0" encoding="utf-8"?>
 <p:tagLst xmlns:a="http://schemas.openxmlformats.org/drawingml/2006/main" xmlns:r="http://schemas.openxmlformats.org/officeDocument/2006/relationships" xmlns:p="http://schemas.openxmlformats.org/presentationml/2006/main">
-  <p:tag name="ALIGNMENT_TARGET_X" val="497.4803123474121"/>
+  <p:tag name="ALIGNMENT_TARGET_X" val="299.0551109313965"/>
 </p:tagLst>
 </file>
 
 <file path=ppt/tags/tag82.xml><?xml version="1.0" encoding="utf-8"?>
 <p:tagLst xmlns:a="http://schemas.openxmlformats.org/drawingml/2006/main" xmlns:r="http://schemas.openxmlformats.org/officeDocument/2006/relationships" xmlns:p="http://schemas.openxmlformats.org/presentationml/2006/main">
-  <p:tag name="ALIGNMENT_TARGET_X" val="497.4803123474121"/>
+  <p:tag name="ALIGNMENT_TARGET_X" val="398.26772689819336"/>
 </p:tagLst>
 </file>
 
 <file path=ppt/tags/tag83.xml><?xml version="1.0" encoding="utf-8"?>
 <p:tagLst xmlns:a="http://schemas.openxmlformats.org/drawingml/2006/main" xmlns:r="http://schemas.openxmlformats.org/officeDocument/2006/relationships" xmlns:p="http://schemas.openxmlformats.org/presentationml/2006/main">
-  <p:tag name="ALIGNMENT_TARGET_X" val="596.692928314209"/>
+  <p:tag name="ALIGNMENT_TARGET_X" val="398.26772689819336"/>
 </p:tagLst>
 </file>
 
 <file path=ppt/tags/tag84.xml><?xml version="1.0" encoding="utf-8"?>
 <p:tagLst xmlns:a="http://schemas.openxmlformats.org/drawingml/2006/main" xmlns:r="http://schemas.openxmlformats.org/officeDocument/2006/relationships" xmlns:p="http://schemas.openxmlformats.org/presentationml/2006/main">
-  <p:tag name="ALIGNMENT_TARGET_X" val="596.692928314209"/>
+  <p:tag name="ALIGNMENT_TARGET_X" val="497.4803123474121"/>
 </p:tagLst>
 </file>
 
 <file path=ppt/tags/tag85.xml><?xml version="1.0" encoding="utf-8"?>
 <p:tagLst xmlns:a="http://schemas.openxmlformats.org/drawingml/2006/main" xmlns:r="http://schemas.openxmlformats.org/officeDocument/2006/relationships" xmlns:p="http://schemas.openxmlformats.org/presentationml/2006/main">
-  <p:tag name="ALIGNMENT_TARGET_X" val="695.9055137634277"/>
+  <p:tag name="ALIGNMENT_TARGET_X" val="497.4803123474121"/>
 </p:tagLst>
 </file>
 
 <file path=ppt/tags/tag86.xml><?xml version="1.0" encoding="utf-8"?>
 <p:tagLst xmlns:a="http://schemas.openxmlformats.org/drawingml/2006/main" xmlns:r="http://schemas.openxmlformats.org/officeDocument/2006/relationships" xmlns:p="http://schemas.openxmlformats.org/presentationml/2006/main">
-  <p:tag name="ALIGNMENT_TARGET_X" val="695.9055137634277"/>
+  <p:tag name="ALIGNMENT_TARGET_X" val="596.692928314209"/>
 </p:tagLst>
 </file>
 
 <file path=ppt/tags/tag87.xml><?xml version="1.0" encoding="utf-8"?>
 <p:tagLst xmlns:a="http://schemas.openxmlformats.org/drawingml/2006/main" xmlns:r="http://schemas.openxmlformats.org/officeDocument/2006/relationships" xmlns:p="http://schemas.openxmlformats.org/presentationml/2006/main">
-  <p:tag name="ALIGNMENT_TARGET_X" val="795.1180992126465"/>
+  <p:tag name="ALIGNMENT_TARGET_X" val="596.692928314209"/>
 </p:tagLst>
 </file>
 
 <file path=ppt/tags/tag88.xml><?xml version="1.0" encoding="utf-8"?>
 <p:tagLst xmlns:a="http://schemas.openxmlformats.org/drawingml/2006/main" xmlns:r="http://schemas.openxmlformats.org/officeDocument/2006/relationships" xmlns:p="http://schemas.openxmlformats.org/presentationml/2006/main">
-  <p:tag name="ALIGNMENT_TARGET_X" val="795.1180992126465"/>
+  <p:tag name="ALIGNMENT_TARGET_X" val="695.9055137634277"/>
 </p:tagLst>
 </file>
 
 <file path=ppt/tags/tag89.xml><?xml version="1.0" encoding="utf-8"?>
 <p:tagLst xmlns:a="http://schemas.openxmlformats.org/drawingml/2006/main" xmlns:r="http://schemas.openxmlformats.org/officeDocument/2006/relationships" xmlns:p="http://schemas.openxmlformats.org/presentationml/2006/main">
-  <p:tag name="ALIGNMENT_TARGET_X" val="1145.1968383789062"/>
+  <p:tag name="ALIGNMENT_TARGET_X" val="695.9055137634277"/>
 </p:tagLst>
 </file>
 
@@ -13261,6 +13522,24 @@
 </file>
 
 <file path=ppt/tags/tag90.xml><?xml version="1.0" encoding="utf-8"?>
+<p:tagLst xmlns:a="http://schemas.openxmlformats.org/drawingml/2006/main" xmlns:r="http://schemas.openxmlformats.org/officeDocument/2006/relationships" xmlns:p="http://schemas.openxmlformats.org/presentationml/2006/main">
+  <p:tag name="ALIGNMENT_TARGET_X" val="795.1180992126465"/>
+</p:tagLst>
+</file>
+
+<file path=ppt/tags/tag91.xml><?xml version="1.0" encoding="utf-8"?>
+<p:tagLst xmlns:a="http://schemas.openxmlformats.org/drawingml/2006/main" xmlns:r="http://schemas.openxmlformats.org/officeDocument/2006/relationships" xmlns:p="http://schemas.openxmlformats.org/presentationml/2006/main">
+  <p:tag name="ALIGNMENT_TARGET_X" val="795.1180992126465"/>
+</p:tagLst>
+</file>
+
+<file path=ppt/tags/tag92.xml><?xml version="1.0" encoding="utf-8"?>
+<p:tagLst xmlns:a="http://schemas.openxmlformats.org/drawingml/2006/main" xmlns:r="http://schemas.openxmlformats.org/officeDocument/2006/relationships" xmlns:p="http://schemas.openxmlformats.org/presentationml/2006/main">
+  <p:tag name="ALIGNMENT_TARGET_X" val="1145.1968383789062"/>
+</p:tagLst>
+</file>
+
+<file path=ppt/tags/tag93.xml><?xml version="1.0" encoding="utf-8"?>
 <p:tagLst xmlns:a="http://schemas.openxmlformats.org/drawingml/2006/main" xmlns:r="http://schemas.openxmlformats.org/officeDocument/2006/relationships" xmlns:p="http://schemas.openxmlformats.org/presentationml/2006/main">
   <p:tag name="ALIGNMENT_TARGET_X" val="595.2755966186523"/>
 </p:tagLst>

--- a/deliverables/決賽海報_AI資安框架_A2.pptx
+++ b/deliverables/決賽海報_AI資安框架_A2.pptx
@@ -11445,7 +11445,56 @@
       </p:sp>
       <p:sp>
         <p:nvSpPr>
-          <p:cNvPr id="150" name="TextBox 149"/>
+          <p:cNvPr id="150" name="Rectangle 149"/>
+          <p:cNvSpPr/>
+          <p:nvPr/>
+        </p:nvSpPr>
+        <p:spPr>
+          <a:xfrm>
+            <a:off x="7920000" y="18324000"/>
+            <a:ext cx="2088000" cy="864000"/>
+          </a:xfrm>
+          <a:prstGeom prst="rect">
+            <a:avLst/>
+          </a:prstGeom>
+          <a:solidFill>
+            <a:srgbClr val="E9F5F3"/>
+          </a:solidFill>
+          <a:ln>
+            <a:noFill/>
+          </a:ln>
+          <a:effectLst/>
+        </p:spPr>
+        <p:style>
+          <a:lnRef idx="1">
+            <a:schemeClr val="accent1"/>
+          </a:lnRef>
+          <a:fillRef idx="3">
+            <a:schemeClr val="accent1"/>
+          </a:fillRef>
+          <a:effectRef idx="2">
+            <a:schemeClr val="accent1"/>
+          </a:effectRef>
+          <a:fontRef idx="minor">
+            <a:schemeClr val="lt1"/>
+          </a:fontRef>
+        </p:style>
+        <p:txBody>
+          <a:bodyPr rtlCol="0" anchor="ctr"/>
+          <a:lstStyle/>
+          <a:p>
+            <a:pPr algn="ctr"/>
+            <a:endParaRPr>
+              <a:latin typeface="Times New Roman"/>
+              <a:ea typeface="DFKai-SB"/>
+              <a:cs typeface="Times New Roman"/>
+            </a:endParaRPr>
+          </a:p>
+        </p:txBody>
+      </p:sp>
+      <p:sp>
+        <p:nvSpPr>
+          <p:cNvPr id="151" name="TextBox 150"/>
           <p:cNvSpPr txBox="1"/>
           <p:nvPr>
             <p:custDataLst>
@@ -11483,7 +11532,7 @@
             <a:r>
               <a:rPr sz="2600" b="0">
                 <a:solidFill>
-                  <a:srgbClr val="245EA8"/>
+                  <a:srgbClr val="087F8C"/>
                 </a:solidFill>
                 <a:latin typeface="Times New Roman"/>
                 <a:ea typeface="DFKai-SB"/>
@@ -11496,7 +11545,7 @@
       </p:sp>
       <p:sp>
         <p:nvSpPr>
-          <p:cNvPr id="151" name="TextBox 150"/>
+          <p:cNvPr id="152" name="TextBox 151"/>
           <p:cNvSpPr txBox="1"/>
           <p:nvPr>
             <p:custDataLst>
@@ -11547,7 +11596,56 @@
       </p:sp>
       <p:sp>
         <p:nvSpPr>
-          <p:cNvPr id="152" name="TextBox 151"/>
+          <p:cNvPr id="153" name="Rectangle 152"/>
+          <p:cNvSpPr/>
+          <p:nvPr/>
+        </p:nvSpPr>
+        <p:spPr>
+          <a:xfrm>
+            <a:off x="10188000" y="18324000"/>
+            <a:ext cx="2088000" cy="864000"/>
+          </a:xfrm>
+          <a:prstGeom prst="rect">
+            <a:avLst/>
+          </a:prstGeom>
+          <a:solidFill>
+            <a:srgbClr val="F4F7FA"/>
+          </a:solidFill>
+          <a:ln>
+            <a:noFill/>
+          </a:ln>
+          <a:effectLst/>
+        </p:spPr>
+        <p:style>
+          <a:lnRef idx="1">
+            <a:schemeClr val="accent1"/>
+          </a:lnRef>
+          <a:fillRef idx="3">
+            <a:schemeClr val="accent1"/>
+          </a:fillRef>
+          <a:effectRef idx="2">
+            <a:schemeClr val="accent1"/>
+          </a:effectRef>
+          <a:fontRef idx="minor">
+            <a:schemeClr val="lt1"/>
+          </a:fontRef>
+        </p:style>
+        <p:txBody>
+          <a:bodyPr rtlCol="0" anchor="ctr"/>
+          <a:lstStyle/>
+          <a:p>
+            <a:pPr algn="ctr"/>
+            <a:endParaRPr>
+              <a:latin typeface="Times New Roman"/>
+              <a:ea typeface="DFKai-SB"/>
+              <a:cs typeface="Times New Roman"/>
+            </a:endParaRPr>
+          </a:p>
+        </p:txBody>
+      </p:sp>
+      <p:sp>
+        <p:nvSpPr>
+          <p:cNvPr id="154" name="TextBox 153"/>
           <p:cNvSpPr txBox="1"/>
           <p:nvPr>
             <p:custDataLst>
@@ -11598,7 +11696,7 @@
       </p:sp>
       <p:sp>
         <p:nvSpPr>
-          <p:cNvPr id="153" name="TextBox 152"/>
+          <p:cNvPr id="155" name="TextBox 154"/>
           <p:cNvSpPr txBox="1"/>
           <p:nvPr>
             <p:custDataLst>
@@ -11649,7 +11747,56 @@
       </p:sp>
       <p:sp>
         <p:nvSpPr>
-          <p:cNvPr id="154" name="TextBox 153"/>
+          <p:cNvPr id="156" name="Rectangle 155"/>
+          <p:cNvSpPr/>
+          <p:nvPr/>
+        </p:nvSpPr>
+        <p:spPr>
+          <a:xfrm>
+            <a:off x="12456000" y="18324000"/>
+            <a:ext cx="2088000" cy="864000"/>
+          </a:xfrm>
+          <a:prstGeom prst="rect">
+            <a:avLst/>
+          </a:prstGeom>
+          <a:solidFill>
+            <a:srgbClr val="F4F7FA"/>
+          </a:solidFill>
+          <a:ln>
+            <a:noFill/>
+          </a:ln>
+          <a:effectLst/>
+        </p:spPr>
+        <p:style>
+          <a:lnRef idx="1">
+            <a:schemeClr val="accent1"/>
+          </a:lnRef>
+          <a:fillRef idx="3">
+            <a:schemeClr val="accent1"/>
+          </a:fillRef>
+          <a:effectRef idx="2">
+            <a:schemeClr val="accent1"/>
+          </a:effectRef>
+          <a:fontRef idx="minor">
+            <a:schemeClr val="lt1"/>
+          </a:fontRef>
+        </p:style>
+        <p:txBody>
+          <a:bodyPr rtlCol="0" anchor="ctr"/>
+          <a:lstStyle/>
+          <a:p>
+            <a:pPr algn="ctr"/>
+            <a:endParaRPr>
+              <a:latin typeface="Times New Roman"/>
+              <a:ea typeface="DFKai-SB"/>
+              <a:cs typeface="Times New Roman"/>
+            </a:endParaRPr>
+          </a:p>
+        </p:txBody>
+      </p:sp>
+      <p:sp>
+        <p:nvSpPr>
+          <p:cNvPr id="157" name="TextBox 156"/>
           <p:cNvSpPr txBox="1"/>
           <p:nvPr>
             <p:custDataLst>
@@ -11700,7 +11847,7 @@
       </p:sp>
       <p:sp>
         <p:nvSpPr>
-          <p:cNvPr id="155" name="TextBox 154"/>
+          <p:cNvPr id="158" name="TextBox 157"/>
           <p:cNvSpPr txBox="1"/>
           <p:nvPr>
             <p:custDataLst>
@@ -11751,7 +11898,7 @@
       </p:sp>
       <p:sp>
         <p:nvSpPr>
-          <p:cNvPr id="156" name="TextBox 155"/>
+          <p:cNvPr id="159" name="TextBox 158"/>
           <p:cNvSpPr txBox="1"/>
           <p:nvPr>
             <p:custDataLst>
@@ -11826,7 +11973,7 @@
       </p:sp>
       <p:cxnSp>
         <p:nvCxnSpPr>
-          <p:cNvPr id="157" name="Connector 156"/>
+          <p:cNvPr id="160" name="Connector 159"/>
           <p:cNvCxnSpPr/>
           <p:nvPr/>
         </p:nvCxnSpPr>
@@ -11862,7 +12009,7 @@
       </p:cxnSp>
       <p:sp>
         <p:nvSpPr>
-          <p:cNvPr id="158" name="TextBox 157"/>
+          <p:cNvPr id="161" name="TextBox 160"/>
           <p:cNvSpPr txBox="1"/>
           <p:nvPr>
             <p:custDataLst>
@@ -11937,7 +12084,7 @@
       </p:sp>
       <p:sp>
         <p:nvSpPr>
-          <p:cNvPr id="159" name="Rectangle 158"/>
+          <p:cNvPr id="162" name="Rectangle 161"/>
           <p:cNvSpPr/>
           <p:nvPr/>
         </p:nvSpPr>
@@ -11988,7 +12135,7 @@
       </p:sp>
       <p:sp>
         <p:nvSpPr>
-          <p:cNvPr id="160" name="TextBox 159"/>
+          <p:cNvPr id="163" name="TextBox 162"/>
           <p:cNvSpPr txBox="1"/>
           <p:nvPr>
             <p:custDataLst>
@@ -12039,7 +12186,7 @@
       </p:sp>
       <p:sp>
         <p:nvSpPr>
-          <p:cNvPr id="161" name="TextBox 160"/>
+          <p:cNvPr id="164" name="TextBox 163"/>
           <p:cNvSpPr txBox="1"/>
           <p:nvPr>
             <p:custDataLst>
@@ -12090,7 +12237,7 @@
       </p:sp>
       <p:sp>
         <p:nvSpPr>
-          <p:cNvPr id="162" name="Rectangle 161"/>
+          <p:cNvPr id="165" name="Rectangle 164"/>
           <p:cNvSpPr/>
           <p:nvPr/>
         </p:nvSpPr>
@@ -12141,7 +12288,7 @@
       </p:sp>
       <p:sp>
         <p:nvSpPr>
-          <p:cNvPr id="163" name="TextBox 162"/>
+          <p:cNvPr id="166" name="TextBox 165"/>
           <p:cNvSpPr txBox="1"/>
           <p:nvPr>
             <p:custDataLst>
@@ -12192,7 +12339,7 @@
       </p:sp>
       <p:sp>
         <p:nvSpPr>
-          <p:cNvPr id="164" name="TextBox 163"/>
+          <p:cNvPr id="167" name="TextBox 166"/>
           <p:cNvSpPr txBox="1"/>
           <p:nvPr>
             <p:custDataLst>
@@ -12243,7 +12390,7 @@
       </p:sp>
       <p:sp>
         <p:nvSpPr>
-          <p:cNvPr id="165" name="Rectangle 164"/>
+          <p:cNvPr id="168" name="Rectangle 167"/>
           <p:cNvSpPr/>
           <p:nvPr/>
         </p:nvSpPr>
@@ -12294,7 +12441,7 @@
       </p:sp>
       <p:sp>
         <p:nvSpPr>
-          <p:cNvPr id="166" name="TextBox 165"/>
+          <p:cNvPr id="169" name="TextBox 168"/>
           <p:cNvSpPr txBox="1"/>
           <p:nvPr>
             <p:custDataLst>
@@ -12345,7 +12492,7 @@
       </p:sp>
       <p:sp>
         <p:nvSpPr>
-          <p:cNvPr id="167" name="TextBox 166"/>
+          <p:cNvPr id="170" name="TextBox 169"/>
           <p:cNvSpPr txBox="1"/>
           <p:nvPr>
             <p:custDataLst>
@@ -12396,7 +12543,7 @@
       </p:sp>
       <p:sp>
         <p:nvSpPr>
-          <p:cNvPr id="168" name="Rectangle 167"/>
+          <p:cNvPr id="171" name="Rectangle 170"/>
           <p:cNvSpPr/>
           <p:nvPr/>
         </p:nvSpPr>
@@ -12447,7 +12594,7 @@
       </p:sp>
       <p:sp>
         <p:nvSpPr>
-          <p:cNvPr id="169" name="TextBox 168"/>
+          <p:cNvPr id="172" name="TextBox 171"/>
           <p:cNvSpPr txBox="1"/>
           <p:nvPr>
             <p:custDataLst>
@@ -12498,7 +12645,7 @@
       </p:sp>
       <p:sp>
         <p:nvSpPr>
-          <p:cNvPr id="170" name="TextBox 169"/>
+          <p:cNvPr id="173" name="TextBox 172"/>
           <p:cNvSpPr txBox="1"/>
           <p:nvPr>
             <p:custDataLst>
@@ -12549,7 +12696,7 @@
       </p:sp>
       <p:sp>
         <p:nvSpPr>
-          <p:cNvPr id="171" name="Rectangle 170"/>
+          <p:cNvPr id="174" name="Rectangle 173"/>
           <p:cNvSpPr/>
           <p:nvPr/>
         </p:nvSpPr>
@@ -12600,7 +12747,7 @@
       </p:sp>
       <p:sp>
         <p:nvSpPr>
-          <p:cNvPr id="172" name="TextBox 171"/>
+          <p:cNvPr id="175" name="TextBox 174"/>
           <p:cNvSpPr txBox="1"/>
           <p:nvPr>
             <p:custDataLst>
@@ -12651,7 +12798,7 @@
       </p:sp>
       <p:sp>
         <p:nvSpPr>
-          <p:cNvPr id="173" name="TextBox 172"/>
+          <p:cNvPr id="176" name="TextBox 175"/>
           <p:cNvSpPr txBox="1"/>
           <p:nvPr>
             <p:custDataLst>
@@ -12702,7 +12849,7 @@
       </p:sp>
       <p:sp>
         <p:nvSpPr>
-          <p:cNvPr id="174" name="Rectangle 173"/>
+          <p:cNvPr id="177" name="Rectangle 176"/>
           <p:cNvSpPr/>
           <p:nvPr/>
         </p:nvSpPr>
@@ -12753,7 +12900,7 @@
       </p:sp>
       <p:sp>
         <p:nvSpPr>
-          <p:cNvPr id="175" name="TextBox 174"/>
+          <p:cNvPr id="178" name="TextBox 177"/>
           <p:cNvSpPr txBox="1"/>
           <p:nvPr>
             <p:custDataLst>
@@ -12804,7 +12951,7 @@
       </p:sp>
       <p:sp>
         <p:nvSpPr>
-          <p:cNvPr id="176" name="TextBox 175"/>
+          <p:cNvPr id="179" name="TextBox 178"/>
           <p:cNvSpPr txBox="1"/>
           <p:nvPr>
             <p:custDataLst>
@@ -12855,7 +13002,7 @@
       </p:sp>
       <p:sp>
         <p:nvSpPr>
-          <p:cNvPr id="177" name="TextBox 176"/>
+          <p:cNvPr id="180" name="TextBox 179"/>
           <p:cNvSpPr txBox="1"/>
           <p:nvPr>
             <p:custDataLst>
@@ -12930,7 +13077,7 @@
       </p:sp>
       <p:sp>
         <p:nvSpPr>
-          <p:cNvPr id="178" name="TextBox 177"/>
+          <p:cNvPr id="181" name="TextBox 180"/>
           <p:cNvSpPr txBox="1"/>
           <p:nvPr>
             <p:custDataLst>

--- a/deliverables/決賽海報_AI資安框架_A2.pptx
+++ b/deliverables/決賽海報_AI資安框架_A2.pptx
@@ -345,7 +345,7 @@
                 <a:ea typeface="Microsoft JhengHei"/>
                 <a:cs typeface="Segoe UI"/>
               </a:rPr>
-              <a:t>10/30/2026</a:t>
+              <a:t>10/31/2026</a:t>
             </a:fld>
             <a:endParaRPr lang="en-US">
               <a:latin typeface="Segoe UI"/>
@@ -557,7 +557,7 @@
                 <a:ea typeface="Microsoft JhengHei"/>
                 <a:cs typeface="Segoe UI"/>
               </a:rPr>
-              <a:t>10/30/2026</a:t>
+              <a:t>10/31/2026</a:t>
             </a:fld>
             <a:endParaRPr lang="en-US">
               <a:latin typeface="Segoe UI"/>
@@ -779,7 +779,7 @@
                 <a:ea typeface="Microsoft JhengHei"/>
                 <a:cs typeface="Segoe UI"/>
               </a:rPr>
-              <a:t>10/30/2026</a:t>
+              <a:t>10/31/2026</a:t>
             </a:fld>
             <a:endParaRPr lang="en-US">
               <a:latin typeface="Segoe UI"/>
@@ -991,7 +991,7 @@
                 <a:ea typeface="Microsoft JhengHei"/>
                 <a:cs typeface="Segoe UI"/>
               </a:rPr>
-              <a:t>10/30/2026</a:t>
+              <a:t>10/31/2026</a:t>
             </a:fld>
             <a:endParaRPr lang="en-US">
               <a:latin typeface="Segoe UI"/>
@@ -1295,7 +1295,7 @@
                 <a:ea typeface="Microsoft JhengHei"/>
                 <a:cs typeface="Segoe UI"/>
               </a:rPr>
-              <a:t>10/30/2026</a:t>
+              <a:t>10/31/2026</a:t>
             </a:fld>
             <a:endParaRPr lang="en-US">
               <a:latin typeface="Segoe UI"/>
@@ -1716,7 +1716,7 @@
                 <a:ea typeface="Microsoft JhengHei"/>
                 <a:cs typeface="Segoe UI"/>
               </a:rPr>
-              <a:t>10/30/2026</a:t>
+              <a:t>10/31/2026</a:t>
             </a:fld>
             <a:endParaRPr lang="en-US">
               <a:latin typeface="Segoe UI"/>
@@ -2355,7 +2355,7 @@
                 <a:ea typeface="Microsoft JhengHei"/>
                 <a:cs typeface="Segoe UI"/>
               </a:rPr>
-              <a:t>10/30/2026</a:t>
+              <a:t>10/31/2026</a:t>
             </a:fld>
             <a:endParaRPr lang="en-US">
               <a:latin typeface="Segoe UI"/>
@@ -2496,7 +2496,7 @@
                 <a:ea typeface="Microsoft JhengHei"/>
                 <a:cs typeface="Segoe UI"/>
               </a:rPr>
-              <a:t>10/30/2026</a:t>
+              <a:t>10/31/2026</a:t>
             </a:fld>
             <a:endParaRPr lang="en-US">
               <a:latin typeface="Segoe UI"/>
@@ -2611,7 +2611,7 @@
                 <a:ea typeface="Microsoft JhengHei"/>
                 <a:cs typeface="Segoe UI"/>
               </a:rPr>
-              <a:t>10/30/2026</a:t>
+              <a:t>10/31/2026</a:t>
             </a:fld>
             <a:endParaRPr lang="en-US">
               <a:latin typeface="Segoe UI"/>
@@ -3010,7 +3010,7 @@
                 <a:ea typeface="Microsoft JhengHei"/>
                 <a:cs typeface="Segoe UI"/>
               </a:rPr>
-              <a:t>10/30/2026</a:t>
+              <a:t>10/31/2026</a:t>
             </a:fld>
             <a:endParaRPr lang="en-US">
               <a:latin typeface="Segoe UI"/>
@@ -3370,7 +3370,7 @@
                 <a:ea typeface="Microsoft JhengHei"/>
                 <a:cs typeface="Segoe UI"/>
               </a:rPr>
-              <a:t>10/30/2026</a:t>
+              <a:t>10/31/2026</a:t>
             </a:fld>
             <a:endParaRPr lang="en-US">
               <a:latin typeface="Segoe UI"/>
@@ -3628,7 +3628,7 @@
                 <a:ea typeface="Microsoft JhengHei"/>
                 <a:cs typeface="Segoe UI"/>
               </a:rPr>
-              <a:t>10/30/2026</a:t>
+              <a:t>10/31/2026</a:t>
             </a:fld>
             <a:endParaRPr lang="en-US">
               <a:latin typeface="Segoe UI"/>

--- a/deliverables/決賽海報_AI資安框架_A2.pptx
+++ b/deliverables/決賽海報_AI資安框架_A2.pptx
@@ -4052,7 +4052,7 @@
             <a:avLst/>
           </a:prstGeom>
           <a:solidFill>
-            <a:srgbClr val="0B1B2E"/>
+            <a:srgbClr val="F3F6FA"/>
           </a:solidFill>
           <a:ln>
             <a:noFill/>
@@ -4086,9 +4086,45 @@
           </a:p>
         </p:txBody>
       </p:sp>
-      <p:sp>
-        <p:nvSpPr>
-          <p:cNvPr id="3" name="TextBox 2"/>
+      <p:cxnSp>
+        <p:nvCxnSpPr>
+          <p:cNvPr id="3" name="Connector 2"/>
+          <p:cNvCxnSpPr/>
+          <p:nvPr/>
+        </p:nvCxnSpPr>
+        <p:spPr>
+          <a:xfrm>
+            <a:off x="0" y="5832000"/>
+            <a:ext cx="15120000" cy="0"/>
+          </a:xfrm>
+          <a:prstGeom prst="line">
+            <a:avLst/>
+          </a:prstGeom>
+          <a:ln w="19050">
+            <a:solidFill>
+              <a:srgbClr val="DCE3EC"/>
+            </a:solidFill>
+          </a:ln>
+          <a:effectLst/>
+        </p:spPr>
+        <p:style>
+          <a:lnRef idx="2">
+            <a:schemeClr val="accent1"/>
+          </a:lnRef>
+          <a:fillRef idx="0">
+            <a:schemeClr val="accent1"/>
+          </a:fillRef>
+          <a:effectRef idx="1">
+            <a:schemeClr val="accent1"/>
+          </a:effectRef>
+          <a:fontRef idx="minor">
+            <a:schemeClr val="tx1"/>
+          </a:fontRef>
+        </p:style>
+      </p:cxnSp>
+      <p:sp>
+        <p:nvSpPr>
+          <p:cNvPr id="4" name="TextBox 3"/>
           <p:cNvSpPr txBox="1"/>
           <p:nvPr>
             <p:custDataLst>
@@ -4126,7 +4162,7 @@
             <a:r>
               <a:rPr sz="1800" b="1">
                 <a:solidFill>
-                  <a:srgbClr val="5EEAD4"/>
+                  <a:srgbClr val="0F766E"/>
                 </a:solidFill>
                 <a:latin typeface="Segoe UI"/>
                 <a:ea typeface="Microsoft JhengHei"/>
@@ -4139,7 +4175,7 @@
       </p:sp>
       <p:sp>
         <p:nvSpPr>
-          <p:cNvPr id="4" name="PosterTitle_Masthead"/>
+          <p:cNvPr id="5" name="PosterTitle_Masthead"/>
           <p:cNvSpPr txBox="1"/>
           <p:nvPr>
             <p:custDataLst>
@@ -4177,7 +4213,7 @@
             <a:r>
               <a:rPr sz="4600" b="1">
                 <a:solidFill>
-                  <a:srgbClr val="FFFFFF"/>
+                  <a:srgbClr val="0B1B2E"/>
                 </a:solidFill>
                 <a:latin typeface="Segoe UI"/>
                 <a:ea typeface="Microsoft JhengHei"/>
@@ -4201,7 +4237,7 @@
             <a:r>
               <a:rPr sz="4600" b="1">
                 <a:solidFill>
-                  <a:srgbClr val="FFFFFF"/>
+                  <a:srgbClr val="0B1B2E"/>
                 </a:solidFill>
                 <a:latin typeface="Segoe UI"/>
                 <a:ea typeface="Microsoft JhengHei"/>
@@ -4225,7 +4261,7 @@
             <a:r>
               <a:rPr sz="4600" b="1">
                 <a:solidFill>
-                  <a:srgbClr val="FFFFFF"/>
+                  <a:srgbClr val="0B1B2E"/>
                 </a:solidFill>
                 <a:latin typeface="Segoe UI"/>
                 <a:ea typeface="Microsoft JhengHei"/>
@@ -4238,7 +4274,7 @@
       </p:sp>
       <p:sp>
         <p:nvSpPr>
-          <p:cNvPr id="5" name="Rectangle 4"/>
+          <p:cNvPr id="6" name="Rectangle 5"/>
           <p:cNvSpPr/>
           <p:nvPr/>
         </p:nvSpPr>
@@ -4287,7 +4323,7 @@
       </p:sp>
       <p:sp>
         <p:nvSpPr>
-          <p:cNvPr id="6" name="TextBox 5"/>
+          <p:cNvPr id="7" name="TextBox 6"/>
           <p:cNvSpPr txBox="1"/>
           <p:nvPr>
             <p:custDataLst>
@@ -4325,7 +4361,7 @@
             <a:r>
               <a:rPr sz="2700" b="1">
                 <a:solidFill>
-                  <a:srgbClr val="FFFFFF"/>
+                  <a:srgbClr val="1D4ED8"/>
                 </a:solidFill>
                 <a:latin typeface="Segoe UI"/>
                 <a:ea typeface="Microsoft JhengHei"/>
@@ -4338,7 +4374,7 @@
       </p:sp>
       <p:sp>
         <p:nvSpPr>
-          <p:cNvPr id="7" name="TextBox 6"/>
+          <p:cNvPr id="8" name="TextBox 7"/>
           <p:cNvSpPr txBox="1"/>
           <p:nvPr>
             <p:custDataLst>
@@ -4376,7 +4412,7 @@
             <a:r>
               <a:rPr sz="1800" b="0">
                 <a:solidFill>
-                  <a:srgbClr val="A8B8CC"/>
+                  <a:srgbClr val="52637A"/>
                 </a:solidFill>
                 <a:latin typeface="Segoe UI"/>
                 <a:ea typeface="Microsoft JhengHei"/>
@@ -4389,7 +4425,7 @@
       </p:sp>
       <p:cxnSp>
         <p:nvCxnSpPr>
-          <p:cNvPr id="8" name="Connector 7"/>
+          <p:cNvPr id="9" name="Connector 8"/>
           <p:cNvCxnSpPr/>
           <p:nvPr/>
         </p:nvCxnSpPr>
@@ -4403,7 +4439,7 @@
           </a:prstGeom>
           <a:ln w="25400">
             <a:solidFill>
-              <a:srgbClr val="2A4260"/>
+              <a:srgbClr val="DCE3EC"/>
             </a:solidFill>
           </a:ln>
           <a:effectLst/>
@@ -4425,7 +4461,7 @@
       </p:cxnSp>
       <p:sp>
         <p:nvSpPr>
-          <p:cNvPr id="9" name="Oval 8"/>
+          <p:cNvPr id="10" name="Oval 9"/>
           <p:cNvSpPr/>
           <p:nvPr/>
         </p:nvSpPr>
@@ -4442,7 +4478,7 @@
           </a:solidFill>
           <a:ln w="10160">
             <a:solidFill>
-              <a:srgbClr val="5EEAD4"/>
+              <a:srgbClr val="1D4ED8"/>
             </a:solidFill>
           </a:ln>
           <a:effectLst/>
@@ -4476,7 +4512,7 @@
       </p:sp>
       <p:pic>
         <p:nvPicPr>
-          <p:cNvPr id="10" name="Picture 9" descr="flat-icon-2.png"/>
+          <p:cNvPr id="11" name="Picture 10" descr="flat-icon-2.png"/>
           <p:cNvPicPr>
             <a:picLocks noChangeAspect="1"/>
           </p:cNvPicPr>
@@ -4500,7 +4536,7 @@
       </p:pic>
       <p:sp>
         <p:nvSpPr>
-          <p:cNvPr id="11" name="TextBox 10"/>
+          <p:cNvPr id="12" name="TextBox 11"/>
           <p:cNvSpPr txBox="1"/>
           <p:nvPr>
             <p:custDataLst>
@@ -4538,7 +4574,7 @@
             <a:r>
               <a:rPr sz="2000" b="1">
                 <a:solidFill>
-                  <a:srgbClr val="FFFFFF"/>
+                  <a:srgbClr val="0B1B2E"/>
                 </a:solidFill>
                 <a:latin typeface="Segoe UI"/>
                 <a:ea typeface="Microsoft JhengHei"/>
@@ -4551,7 +4587,7 @@
       </p:sp>
       <p:sp>
         <p:nvSpPr>
-          <p:cNvPr id="12" name="Oval 11"/>
+          <p:cNvPr id="13" name="Oval 12"/>
           <p:cNvSpPr/>
           <p:nvPr/>
         </p:nvSpPr>
@@ -4568,7 +4604,7 @@
           </a:solidFill>
           <a:ln w="10160">
             <a:solidFill>
-              <a:srgbClr val="5EEAD4"/>
+              <a:srgbClr val="1D4ED8"/>
             </a:solidFill>
           </a:ln>
           <a:effectLst/>
@@ -4602,7 +4638,7 @@
       </p:sp>
       <p:pic>
         <p:nvPicPr>
-          <p:cNvPr id="13" name="Picture 12" descr="flat-icon-3.png"/>
+          <p:cNvPr id="14" name="Picture 13" descr="flat-icon-3.png"/>
           <p:cNvPicPr>
             <a:picLocks noChangeAspect="1"/>
           </p:cNvPicPr>
@@ -4626,7 +4662,7 @@
       </p:pic>
       <p:sp>
         <p:nvSpPr>
-          <p:cNvPr id="14" name="TextBox 13"/>
+          <p:cNvPr id="15" name="TextBox 14"/>
           <p:cNvSpPr txBox="1"/>
           <p:nvPr>
             <p:custDataLst>
@@ -4664,7 +4700,7 @@
             <a:r>
               <a:rPr sz="2000" b="1">
                 <a:solidFill>
-                  <a:srgbClr val="FFFFFF"/>
+                  <a:srgbClr val="0B1B2E"/>
                 </a:solidFill>
                 <a:latin typeface="Segoe UI"/>
                 <a:ea typeface="Microsoft JhengHei"/>
@@ -4677,7 +4713,7 @@
       </p:sp>
       <p:sp>
         <p:nvSpPr>
-          <p:cNvPr id="15" name="Oval 14"/>
+          <p:cNvPr id="16" name="Oval 15"/>
           <p:cNvSpPr/>
           <p:nvPr/>
         </p:nvSpPr>
@@ -4687,57 +4723,6 @@
             <a:ext cx="576000" cy="576000"/>
           </a:xfrm>
           <a:prstGeom prst="ellipse">
-            <a:avLst/>
-          </a:prstGeom>
-          <a:solidFill>
-            <a:srgbClr val="FFFFFF"/>
-          </a:solidFill>
-          <a:ln w="10160">
-            <a:solidFill>
-              <a:srgbClr val="5EEAD4"/>
-            </a:solidFill>
-          </a:ln>
-          <a:effectLst/>
-        </p:spPr>
-        <p:style>
-          <a:lnRef idx="1">
-            <a:schemeClr val="accent1"/>
-          </a:lnRef>
-          <a:fillRef idx="3">
-            <a:schemeClr val="accent1"/>
-          </a:fillRef>
-          <a:effectRef idx="2">
-            <a:schemeClr val="accent1"/>
-          </a:effectRef>
-          <a:fontRef idx="minor">
-            <a:schemeClr val="lt1"/>
-          </a:fontRef>
-        </p:style>
-        <p:txBody>
-          <a:bodyPr rtlCol="0" anchor="ctr"/>
-          <a:lstStyle/>
-          <a:p>
-            <a:pPr algn="ctr"/>
-            <a:endParaRPr>
-              <a:latin typeface="Segoe UI"/>
-              <a:ea typeface="Microsoft JhengHei"/>
-              <a:cs typeface="Segoe UI"/>
-            </a:endParaRPr>
-          </a:p>
-        </p:txBody>
-      </p:sp>
-      <p:sp>
-        <p:nvSpPr>
-          <p:cNvPr id="16" name="Rectangle 15"/>
-          <p:cNvSpPr/>
-          <p:nvPr/>
-        </p:nvSpPr>
-        <p:spPr>
-          <a:xfrm>
-            <a:off x="9295200" y="4716000"/>
-            <a:ext cx="230400" cy="360000"/>
-          </a:xfrm>
-          <a:prstGeom prst="rect">
             <a:avLst/>
           </a:prstGeom>
           <a:solidFill>
@@ -4777,20 +4762,23 @@
           </a:p>
         </p:txBody>
       </p:sp>
-      <p:cxnSp>
-        <p:nvCxnSpPr>
-          <p:cNvPr id="17" name="Connector 16"/>
-          <p:cNvCxnSpPr/>
+      <p:sp>
+        <p:nvSpPr>
+          <p:cNvPr id="17" name="Rectangle 16"/>
+          <p:cNvSpPr/>
           <p:nvPr/>
-        </p:nvCxnSpPr>
-        <p:spPr>
-          <a:xfrm>
-            <a:off x="9345888" y="4806000"/>
-            <a:ext cx="129024" cy="0"/>
-          </a:xfrm>
-          <a:prstGeom prst="line">
-            <a:avLst/>
-          </a:prstGeom>
+        </p:nvSpPr>
+        <p:spPr>
+          <a:xfrm>
+            <a:off x="9295200" y="4716000"/>
+            <a:ext cx="230400" cy="360000"/>
+          </a:xfrm>
+          <a:prstGeom prst="rect">
+            <a:avLst/>
+          </a:prstGeom>
+          <a:solidFill>
+            <a:srgbClr val="FFFFFF"/>
+          </a:solidFill>
           <a:ln w="10160">
             <a:solidFill>
               <a:srgbClr val="1D4ED8"/>
@@ -4799,20 +4787,32 @@
           <a:effectLst/>
         </p:spPr>
         <p:style>
-          <a:lnRef idx="2">
+          <a:lnRef idx="1">
             <a:schemeClr val="accent1"/>
           </a:lnRef>
-          <a:fillRef idx="0">
+          <a:fillRef idx="3">
             <a:schemeClr val="accent1"/>
           </a:fillRef>
-          <a:effectRef idx="1">
+          <a:effectRef idx="2">
             <a:schemeClr val="accent1"/>
           </a:effectRef>
           <a:fontRef idx="minor">
-            <a:schemeClr val="tx1"/>
+            <a:schemeClr val="lt1"/>
           </a:fontRef>
         </p:style>
-      </p:cxnSp>
+        <p:txBody>
+          <a:bodyPr rtlCol="0" anchor="ctr"/>
+          <a:lstStyle/>
+          <a:p>
+            <a:pPr algn="ctr"/>
+            <a:endParaRPr>
+              <a:latin typeface="Segoe UI"/>
+              <a:ea typeface="Microsoft JhengHei"/>
+              <a:cs typeface="Segoe UI"/>
+            </a:endParaRPr>
+          </a:p>
+        </p:txBody>
+      </p:sp>
       <p:cxnSp>
         <p:nvCxnSpPr>
           <p:cNvPr id="18" name="Connector 17"/>
@@ -4821,7 +4821,7 @@
         </p:nvCxnSpPr>
         <p:spPr>
           <a:xfrm>
-            <a:off x="9345888" y="4896000"/>
+            <a:off x="9345888" y="4806000"/>
             <a:ext cx="129024" cy="0"/>
           </a:xfrm>
           <a:prstGeom prst="line">
@@ -4857,7 +4857,7 @@
         </p:nvCxnSpPr>
         <p:spPr>
           <a:xfrm>
-            <a:off x="9345888" y="4986000"/>
+            <a:off x="9345888" y="4896000"/>
             <a:ext cx="129024" cy="0"/>
           </a:xfrm>
           <a:prstGeom prst="line">
@@ -4885,9 +4885,45 @@
           </a:fontRef>
         </p:style>
       </p:cxnSp>
-      <p:sp>
-        <p:nvSpPr>
-          <p:cNvPr id="20" name="TextBox 19"/>
+      <p:cxnSp>
+        <p:nvCxnSpPr>
+          <p:cNvPr id="20" name="Connector 19"/>
+          <p:cNvCxnSpPr/>
+          <p:nvPr/>
+        </p:nvCxnSpPr>
+        <p:spPr>
+          <a:xfrm>
+            <a:off x="9345888" y="4986000"/>
+            <a:ext cx="129024" cy="0"/>
+          </a:xfrm>
+          <a:prstGeom prst="line">
+            <a:avLst/>
+          </a:prstGeom>
+          <a:ln w="10160">
+            <a:solidFill>
+              <a:srgbClr val="1D4ED8"/>
+            </a:solidFill>
+          </a:ln>
+          <a:effectLst/>
+        </p:spPr>
+        <p:style>
+          <a:lnRef idx="2">
+            <a:schemeClr val="accent1"/>
+          </a:lnRef>
+          <a:fillRef idx="0">
+            <a:schemeClr val="accent1"/>
+          </a:fillRef>
+          <a:effectRef idx="1">
+            <a:schemeClr val="accent1"/>
+          </a:effectRef>
+          <a:fontRef idx="minor">
+            <a:schemeClr val="tx1"/>
+          </a:fontRef>
+        </p:style>
+      </p:cxnSp>
+      <p:sp>
+        <p:nvSpPr>
+          <p:cNvPr id="21" name="TextBox 20"/>
           <p:cNvSpPr txBox="1"/>
           <p:nvPr>
             <p:custDataLst>
@@ -4925,7 +4961,7 @@
             <a:r>
               <a:rPr sz="2000" b="1">
                 <a:solidFill>
-                  <a:srgbClr val="FFFFFF"/>
+                  <a:srgbClr val="0B1B2E"/>
                 </a:solidFill>
                 <a:latin typeface="Segoe UI"/>
                 <a:ea typeface="Microsoft JhengHei"/>
@@ -4938,7 +4974,7 @@
       </p:sp>
       <p:sp>
         <p:nvSpPr>
-          <p:cNvPr id="21" name="Oval 20"/>
+          <p:cNvPr id="22" name="Oval 21"/>
           <p:cNvSpPr/>
           <p:nvPr/>
         </p:nvSpPr>
@@ -4955,7 +4991,7 @@
           </a:solidFill>
           <a:ln w="10160">
             <a:solidFill>
-              <a:srgbClr val="5EEAD4"/>
+              <a:srgbClr val="1D4ED8"/>
             </a:solidFill>
           </a:ln>
           <a:effectLst/>
@@ -4989,7 +5025,7 @@
       </p:sp>
       <p:pic>
         <p:nvPicPr>
-          <p:cNvPr id="22" name="Picture 21" descr="flat-icon-4.png"/>
+          <p:cNvPr id="23" name="Picture 22" descr="flat-icon-4.png"/>
           <p:cNvPicPr>
             <a:picLocks noChangeAspect="1"/>
           </p:cNvPicPr>
@@ -5013,7 +5049,7 @@
       </p:pic>
       <p:sp>
         <p:nvSpPr>
-          <p:cNvPr id="23" name="TextBox 22"/>
+          <p:cNvPr id="24" name="TextBox 23"/>
           <p:cNvSpPr txBox="1"/>
           <p:nvPr>
             <p:custDataLst>
@@ -5051,7 +5087,7 @@
             <a:r>
               <a:rPr sz="2000" b="1">
                 <a:solidFill>
-                  <a:srgbClr val="FFFFFF"/>
+                  <a:srgbClr val="0B1B2E"/>
                 </a:solidFill>
                 <a:latin typeface="Segoe UI"/>
                 <a:ea typeface="Microsoft JhengHei"/>
@@ -5064,7 +5100,7 @@
       </p:sp>
       <p:sp>
         <p:nvSpPr>
-          <p:cNvPr id="24" name="TextBox 23"/>
+          <p:cNvPr id="25" name="TextBox 24"/>
           <p:cNvSpPr txBox="1"/>
           <p:nvPr>
             <p:custDataLst>
@@ -5115,7 +5151,7 @@
       </p:sp>
       <p:sp>
         <p:nvSpPr>
-          <p:cNvPr id="25" name="TextBox 24"/>
+          <p:cNvPr id="26" name="TextBox 25"/>
           <p:cNvSpPr txBox="1"/>
           <p:nvPr>
             <p:custDataLst>
@@ -5166,7 +5202,7 @@
       </p:sp>
       <p:cxnSp>
         <p:nvCxnSpPr>
-          <p:cNvPr id="26" name="Connector 25"/>
+          <p:cNvPr id="27" name="Connector 26"/>
           <p:cNvCxnSpPr/>
           <p:nvPr/>
         </p:nvCxnSpPr>
@@ -5202,7 +5238,7 @@
       </p:cxnSp>
       <p:sp>
         <p:nvSpPr>
-          <p:cNvPr id="27" name="Rounded Rectangle 26"/>
+          <p:cNvPr id="28" name="Rounded Rectangle 27"/>
           <p:cNvSpPr/>
           <p:nvPr/>
         </p:nvSpPr>
@@ -5253,7 +5289,7 @@
       </p:sp>
       <p:pic>
         <p:nvPicPr>
-          <p:cNvPr id="28" name="Picture 27" descr="flat-icon-2.png"/>
+          <p:cNvPr id="29" name="Picture 28" descr="flat-icon-2.png"/>
           <p:cNvPicPr>
             <a:picLocks noChangeAspect="1"/>
           </p:cNvPicPr>
@@ -5277,7 +5313,7 @@
       </p:pic>
       <p:sp>
         <p:nvSpPr>
-          <p:cNvPr id="29" name="TextBox 28"/>
+          <p:cNvPr id="30" name="TextBox 29"/>
           <p:cNvSpPr txBox="1"/>
           <p:nvPr>
             <p:custDataLst>
@@ -5328,7 +5364,7 @@
       </p:sp>
       <p:sp>
         <p:nvSpPr>
-          <p:cNvPr id="30" name="TextBox 29"/>
+          <p:cNvPr id="31" name="TextBox 30"/>
           <p:cNvSpPr txBox="1"/>
           <p:nvPr>
             <p:custDataLst>
@@ -5379,7 +5415,7 @@
       </p:sp>
       <p:sp>
         <p:nvSpPr>
-          <p:cNvPr id="31" name="TextBox 30"/>
+          <p:cNvPr id="32" name="TextBox 31"/>
           <p:cNvSpPr txBox="1"/>
           <p:nvPr>
             <p:custDataLst>
@@ -5454,7 +5490,7 @@
       </p:sp>
       <p:sp>
         <p:nvSpPr>
-          <p:cNvPr id="32" name="Down Arrow 31"/>
+          <p:cNvPr id="33" name="Down Arrow 32"/>
           <p:cNvSpPr/>
           <p:nvPr/>
         </p:nvSpPr>
@@ -5503,7 +5539,7 @@
       </p:sp>
       <p:sp>
         <p:nvSpPr>
-          <p:cNvPr id="33" name="Rounded Rectangle 32"/>
+          <p:cNvPr id="34" name="Rounded Rectangle 33"/>
           <p:cNvSpPr/>
           <p:nvPr/>
         </p:nvSpPr>
@@ -5554,7 +5590,7 @@
       </p:sp>
       <p:pic>
         <p:nvPicPr>
-          <p:cNvPr id="34" name="Picture 33" descr="flat-icon-3.png"/>
+          <p:cNvPr id="35" name="Picture 34" descr="flat-icon-3.png"/>
           <p:cNvPicPr>
             <a:picLocks noChangeAspect="1"/>
           </p:cNvPicPr>
@@ -5578,7 +5614,7 @@
       </p:pic>
       <p:sp>
         <p:nvSpPr>
-          <p:cNvPr id="35" name="TextBox 34"/>
+          <p:cNvPr id="36" name="TextBox 35"/>
           <p:cNvSpPr txBox="1"/>
           <p:nvPr>
             <p:custDataLst>
@@ -5629,7 +5665,7 @@
       </p:sp>
       <p:sp>
         <p:nvSpPr>
-          <p:cNvPr id="36" name="TextBox 35"/>
+          <p:cNvPr id="37" name="TextBox 36"/>
           <p:cNvSpPr txBox="1"/>
           <p:nvPr>
             <p:custDataLst>
@@ -5680,7 +5716,7 @@
       </p:sp>
       <p:sp>
         <p:nvSpPr>
-          <p:cNvPr id="37" name="TextBox 36"/>
+          <p:cNvPr id="38" name="TextBox 37"/>
           <p:cNvSpPr txBox="1"/>
           <p:nvPr>
             <p:custDataLst>
@@ -5755,7 +5791,7 @@
       </p:sp>
       <p:sp>
         <p:nvSpPr>
-          <p:cNvPr id="38" name="Down Arrow 37"/>
+          <p:cNvPr id="39" name="Down Arrow 38"/>
           <p:cNvSpPr/>
           <p:nvPr/>
         </p:nvSpPr>
@@ -5804,7 +5840,7 @@
       </p:sp>
       <p:sp>
         <p:nvSpPr>
-          <p:cNvPr id="39" name="Rounded Rectangle 38"/>
+          <p:cNvPr id="40" name="Rounded Rectangle 39"/>
           <p:cNvSpPr/>
           <p:nvPr/>
         </p:nvSpPr>
@@ -5855,7 +5891,7 @@
       </p:sp>
       <p:sp>
         <p:nvSpPr>
-          <p:cNvPr id="40" name="Rectangle 39"/>
+          <p:cNvPr id="41" name="Rectangle 40"/>
           <p:cNvSpPr/>
           <p:nvPr/>
         </p:nvSpPr>
@@ -5906,49 +5942,13 @@
       </p:sp>
       <p:cxnSp>
         <p:nvCxnSpPr>
-          <p:cNvPr id="41" name="Connector 40"/>
-          <p:cNvCxnSpPr/>
-          <p:nvPr/>
-        </p:nvCxnSpPr>
-        <p:spPr>
-          <a:xfrm>
-            <a:off x="1187280" y="10440000"/>
-            <a:ext cx="181440" cy="0"/>
-          </a:xfrm>
-          <a:prstGeom prst="line">
-            <a:avLst/>
-          </a:prstGeom>
-          <a:ln w="10160">
-            <a:solidFill>
-              <a:srgbClr val="1D4ED8"/>
-            </a:solidFill>
-          </a:ln>
-          <a:effectLst/>
-        </p:spPr>
-        <p:style>
-          <a:lnRef idx="2">
-            <a:schemeClr val="accent1"/>
-          </a:lnRef>
-          <a:fillRef idx="0">
-            <a:schemeClr val="accent1"/>
-          </a:fillRef>
-          <a:effectRef idx="1">
-            <a:schemeClr val="accent1"/>
-          </a:effectRef>
-          <a:fontRef idx="minor">
-            <a:schemeClr val="tx1"/>
-          </a:fontRef>
-        </p:style>
-      </p:cxnSp>
-      <p:cxnSp>
-        <p:nvCxnSpPr>
           <p:cNvPr id="42" name="Connector 41"/>
           <p:cNvCxnSpPr/>
           <p:nvPr/>
         </p:nvCxnSpPr>
         <p:spPr>
           <a:xfrm>
-            <a:off x="1187280" y="10548000"/>
+            <a:off x="1187280" y="10440000"/>
             <a:ext cx="181440" cy="0"/>
           </a:xfrm>
           <a:prstGeom prst="line">
@@ -5984,7 +5984,7 @@
         </p:nvCxnSpPr>
         <p:spPr>
           <a:xfrm>
-            <a:off x="1187280" y="10656000"/>
+            <a:off x="1187280" y="10548000"/>
             <a:ext cx="181440" cy="0"/>
           </a:xfrm>
           <a:prstGeom prst="line">
@@ -6012,9 +6012,45 @@
           </a:fontRef>
         </p:style>
       </p:cxnSp>
-      <p:sp>
-        <p:nvSpPr>
-          <p:cNvPr id="44" name="TextBox 43"/>
+      <p:cxnSp>
+        <p:nvCxnSpPr>
+          <p:cNvPr id="44" name="Connector 43"/>
+          <p:cNvCxnSpPr/>
+          <p:nvPr/>
+        </p:nvCxnSpPr>
+        <p:spPr>
+          <a:xfrm>
+            <a:off x="1187280" y="10656000"/>
+            <a:ext cx="181440" cy="0"/>
+          </a:xfrm>
+          <a:prstGeom prst="line">
+            <a:avLst/>
+          </a:prstGeom>
+          <a:ln w="10160">
+            <a:solidFill>
+              <a:srgbClr val="1D4ED8"/>
+            </a:solidFill>
+          </a:ln>
+          <a:effectLst/>
+        </p:spPr>
+        <p:style>
+          <a:lnRef idx="2">
+            <a:schemeClr val="accent1"/>
+          </a:lnRef>
+          <a:fillRef idx="0">
+            <a:schemeClr val="accent1"/>
+          </a:fillRef>
+          <a:effectRef idx="1">
+            <a:schemeClr val="accent1"/>
+          </a:effectRef>
+          <a:fontRef idx="minor">
+            <a:schemeClr val="tx1"/>
+          </a:fontRef>
+        </p:style>
+      </p:cxnSp>
+      <p:sp>
+        <p:nvSpPr>
+          <p:cNvPr id="45" name="TextBox 44"/>
           <p:cNvSpPr txBox="1"/>
           <p:nvPr>
             <p:custDataLst>
@@ -6065,7 +6101,7 @@
       </p:sp>
       <p:sp>
         <p:nvSpPr>
-          <p:cNvPr id="45" name="TextBox 44"/>
+          <p:cNvPr id="46" name="TextBox 45"/>
           <p:cNvSpPr txBox="1"/>
           <p:nvPr>
             <p:custDataLst>
@@ -6116,7 +6152,7 @@
       </p:sp>
       <p:sp>
         <p:nvSpPr>
-          <p:cNvPr id="46" name="TextBox 45"/>
+          <p:cNvPr id="47" name="TextBox 46"/>
           <p:cNvSpPr txBox="1"/>
           <p:nvPr>
             <p:custDataLst>
@@ -6191,7 +6227,7 @@
       </p:sp>
       <p:sp>
         <p:nvSpPr>
-          <p:cNvPr id="47" name="Down Arrow 46"/>
+          <p:cNvPr id="48" name="Down Arrow 47"/>
           <p:cNvSpPr/>
           <p:nvPr/>
         </p:nvSpPr>
@@ -6240,7 +6276,7 @@
       </p:sp>
       <p:sp>
         <p:nvSpPr>
-          <p:cNvPr id="48" name="Rounded Rectangle 47"/>
+          <p:cNvPr id="49" name="Rounded Rectangle 48"/>
           <p:cNvSpPr/>
           <p:nvPr/>
         </p:nvSpPr>
@@ -6291,7 +6327,7 @@
       </p:sp>
       <p:pic>
         <p:nvPicPr>
-          <p:cNvPr id="49" name="Picture 48" descr="flat-icon-4.png"/>
+          <p:cNvPr id="50" name="Picture 49" descr="flat-icon-4.png"/>
           <p:cNvPicPr>
             <a:picLocks noChangeAspect="1"/>
           </p:cNvPicPr>
@@ -6315,7 +6351,7 @@
       </p:pic>
       <p:sp>
         <p:nvSpPr>
-          <p:cNvPr id="50" name="TextBox 49"/>
+          <p:cNvPr id="51" name="TextBox 50"/>
           <p:cNvSpPr txBox="1"/>
           <p:nvPr>
             <p:custDataLst>
@@ -6366,7 +6402,7 @@
       </p:sp>
       <p:sp>
         <p:nvSpPr>
-          <p:cNvPr id="51" name="TextBox 50"/>
+          <p:cNvPr id="52" name="TextBox 51"/>
           <p:cNvSpPr txBox="1"/>
           <p:nvPr>
             <p:custDataLst>
@@ -6417,7 +6453,7 @@
       </p:sp>
       <p:sp>
         <p:nvSpPr>
-          <p:cNvPr id="52" name="TextBox 51"/>
+          <p:cNvPr id="53" name="TextBox 52"/>
           <p:cNvSpPr txBox="1"/>
           <p:nvPr>
             <p:custDataLst>
@@ -6492,7 +6528,7 @@
       </p:sp>
       <p:sp>
         <p:nvSpPr>
-          <p:cNvPr id="53" name="Rounded Rectangle 52"/>
+          <p:cNvPr id="54" name="Rounded Rectangle 53"/>
           <p:cNvSpPr/>
           <p:nvPr/>
         </p:nvSpPr>
@@ -6545,7 +6581,7 @@
       </p:sp>
       <p:sp>
         <p:nvSpPr>
-          <p:cNvPr id="54" name="TextBox 53"/>
+          <p:cNvPr id="55" name="TextBox 54"/>
           <p:cNvSpPr txBox="1"/>
           <p:nvPr>
             <p:custDataLst>
@@ -6596,7 +6632,7 @@
       </p:sp>
       <p:sp>
         <p:nvSpPr>
-          <p:cNvPr id="55" name="TextBox 54"/>
+          <p:cNvPr id="56" name="TextBox 55"/>
           <p:cNvSpPr txBox="1"/>
           <p:nvPr>
             <p:custDataLst>
@@ -6647,7 +6683,7 @@
       </p:sp>
       <p:sp>
         <p:nvSpPr>
-          <p:cNvPr id="56" name="Rounded Rectangle 55"/>
+          <p:cNvPr id="57" name="Rounded Rectangle 56"/>
           <p:cNvSpPr/>
           <p:nvPr/>
         </p:nvSpPr>
@@ -6700,7 +6736,7 @@
       </p:sp>
       <p:sp>
         <p:nvSpPr>
-          <p:cNvPr id="57" name="TextBox 56"/>
+          <p:cNvPr id="58" name="TextBox 57"/>
           <p:cNvSpPr txBox="1"/>
           <p:nvPr>
             <p:custDataLst>
@@ -6751,7 +6787,7 @@
       </p:sp>
       <p:sp>
         <p:nvSpPr>
-          <p:cNvPr id="58" name="TextBox 57"/>
+          <p:cNvPr id="59" name="TextBox 58"/>
           <p:cNvSpPr txBox="1"/>
           <p:nvPr>
             <p:custDataLst>
@@ -6800,42 +6836,6 @@
           </a:p>
         </p:txBody>
       </p:sp>
-      <p:cxnSp>
-        <p:nvCxnSpPr>
-          <p:cNvPr id="59" name="Connector 58"/>
-          <p:cNvCxnSpPr/>
-          <p:nvPr/>
-        </p:nvCxnSpPr>
-        <p:spPr>
-          <a:xfrm>
-            <a:off x="7344000" y="7164000"/>
-            <a:ext cx="288000" cy="0"/>
-          </a:xfrm>
-          <a:prstGeom prst="line">
-            <a:avLst/>
-          </a:prstGeom>
-          <a:ln w="15240">
-            <a:solidFill>
-              <a:srgbClr val="1D4ED8"/>
-            </a:solidFill>
-          </a:ln>
-          <a:effectLst/>
-        </p:spPr>
-        <p:style>
-          <a:lnRef idx="2">
-            <a:schemeClr val="accent1"/>
-          </a:lnRef>
-          <a:fillRef idx="0">
-            <a:schemeClr val="accent1"/>
-          </a:fillRef>
-          <a:effectRef idx="1">
-            <a:schemeClr val="accent1"/>
-          </a:effectRef>
-          <a:fontRef idx="minor">
-            <a:schemeClr val="tx1"/>
-          </a:fontRef>
-        </p:style>
-      </p:cxnSp>
       <p:cxnSp>
         <p:nvCxnSpPr>
           <p:cNvPr id="60" name="Connector 59"/>
@@ -6844,7 +6844,7 @@
         </p:nvCxnSpPr>
         <p:spPr>
           <a:xfrm>
-            <a:off x="7344000" y="7884000"/>
+            <a:off x="7344000" y="7164000"/>
             <a:ext cx="288000" cy="0"/>
           </a:xfrm>
           <a:prstGeom prst="line">
@@ -6880,8 +6880,8 @@
         </p:nvCxnSpPr>
         <p:spPr>
           <a:xfrm>
-            <a:off x="7632000" y="7164000"/>
-            <a:ext cx="0" cy="720000"/>
+            <a:off x="7344000" y="7884000"/>
+            <a:ext cx="288000" cy="0"/>
           </a:xfrm>
           <a:prstGeom prst="line">
             <a:avLst/>
@@ -6908,9 +6908,45 @@
           </a:fontRef>
         </p:style>
       </p:cxnSp>
-      <p:sp>
-        <p:nvSpPr>
-          <p:cNvPr id="62" name="Right Arrow 61"/>
+      <p:cxnSp>
+        <p:nvCxnSpPr>
+          <p:cNvPr id="62" name="Connector 61"/>
+          <p:cNvCxnSpPr/>
+          <p:nvPr/>
+        </p:nvCxnSpPr>
+        <p:spPr>
+          <a:xfrm>
+            <a:off x="7632000" y="7164000"/>
+            <a:ext cx="0" cy="720000"/>
+          </a:xfrm>
+          <a:prstGeom prst="line">
+            <a:avLst/>
+          </a:prstGeom>
+          <a:ln w="15240">
+            <a:solidFill>
+              <a:srgbClr val="1D4ED8"/>
+            </a:solidFill>
+          </a:ln>
+          <a:effectLst/>
+        </p:spPr>
+        <p:style>
+          <a:lnRef idx="2">
+            <a:schemeClr val="accent1"/>
+          </a:lnRef>
+          <a:fillRef idx="0">
+            <a:schemeClr val="accent1"/>
+          </a:fillRef>
+          <a:effectRef idx="1">
+            <a:schemeClr val="accent1"/>
+          </a:effectRef>
+          <a:fontRef idx="minor">
+            <a:schemeClr val="tx1"/>
+          </a:fontRef>
+        </p:style>
+      </p:cxnSp>
+      <p:sp>
+        <p:nvSpPr>
+          <p:cNvPr id="63" name="Right Arrow 62"/>
           <p:cNvSpPr/>
           <p:nvPr/>
         </p:nvSpPr>
@@ -6959,7 +6995,7 @@
       </p:sp>
       <p:sp>
         <p:nvSpPr>
-          <p:cNvPr id="63" name="Rounded Rectangle 62"/>
+          <p:cNvPr id="64" name="Rounded Rectangle 63"/>
           <p:cNvSpPr/>
           <p:nvPr/>
         </p:nvSpPr>
@@ -7010,7 +7046,7 @@
       </p:sp>
       <p:sp>
         <p:nvSpPr>
-          <p:cNvPr id="64" name="TextBox 63"/>
+          <p:cNvPr id="65" name="TextBox 64"/>
           <p:cNvSpPr txBox="1"/>
           <p:nvPr>
             <p:custDataLst>
@@ -7061,7 +7097,7 @@
       </p:sp>
       <p:sp>
         <p:nvSpPr>
-          <p:cNvPr id="65" name="TextBox 64"/>
+          <p:cNvPr id="66" name="TextBox 65"/>
           <p:cNvSpPr txBox="1"/>
           <p:nvPr>
             <p:custDataLst>
@@ -7112,7 +7148,7 @@
       </p:sp>
       <p:sp>
         <p:nvSpPr>
-          <p:cNvPr id="66" name="Right Arrow 65"/>
+          <p:cNvPr id="67" name="Right Arrow 66"/>
           <p:cNvSpPr/>
           <p:nvPr/>
         </p:nvSpPr>
@@ -7161,7 +7197,7 @@
       </p:sp>
       <p:sp>
         <p:nvSpPr>
-          <p:cNvPr id="67" name="Rounded Rectangle 66"/>
+          <p:cNvPr id="68" name="Rounded Rectangle 67"/>
           <p:cNvSpPr/>
           <p:nvPr/>
         </p:nvSpPr>
@@ -7212,7 +7248,7 @@
       </p:sp>
       <p:sp>
         <p:nvSpPr>
-          <p:cNvPr id="68" name="TextBox 67"/>
+          <p:cNvPr id="69" name="TextBox 68"/>
           <p:cNvSpPr txBox="1"/>
           <p:nvPr>
             <p:custDataLst>
@@ -7263,7 +7299,7 @@
       </p:sp>
       <p:sp>
         <p:nvSpPr>
-          <p:cNvPr id="69" name="TextBox 68"/>
+          <p:cNvPr id="70" name="TextBox 69"/>
           <p:cNvSpPr txBox="1"/>
           <p:nvPr>
             <p:custDataLst>
@@ -7314,7 +7350,7 @@
       </p:sp>
       <p:sp>
         <p:nvSpPr>
-          <p:cNvPr id="70" name="Rounded Rectangle 69"/>
+          <p:cNvPr id="71" name="Rounded Rectangle 70"/>
           <p:cNvSpPr/>
           <p:nvPr/>
         </p:nvSpPr>
@@ -7367,7 +7403,7 @@
       </p:sp>
       <p:sp>
         <p:nvSpPr>
-          <p:cNvPr id="71" name="TextBox 70"/>
+          <p:cNvPr id="72" name="TextBox 71"/>
           <p:cNvSpPr txBox="1"/>
           <p:nvPr>
             <p:custDataLst>
@@ -7418,7 +7454,7 @@
       </p:sp>
       <p:sp>
         <p:nvSpPr>
-          <p:cNvPr id="72" name="Rounded Rectangle 71"/>
+          <p:cNvPr id="73" name="Rounded Rectangle 72"/>
           <p:cNvSpPr/>
           <p:nvPr/>
         </p:nvSpPr>
@@ -7471,7 +7507,7 @@
       </p:sp>
       <p:sp>
         <p:nvSpPr>
-          <p:cNvPr id="73" name="TextBox 72"/>
+          <p:cNvPr id="74" name="TextBox 73"/>
           <p:cNvSpPr txBox="1"/>
           <p:nvPr>
             <p:custDataLst>
@@ -7520,42 +7556,6 @@
           </a:p>
         </p:txBody>
       </p:sp>
-      <p:cxnSp>
-        <p:nvCxnSpPr>
-          <p:cNvPr id="74" name="Connector 73"/>
-          <p:cNvCxnSpPr/>
-          <p:nvPr/>
-        </p:nvCxnSpPr>
-        <p:spPr>
-          <a:xfrm>
-            <a:off x="7344000" y="8856000"/>
-            <a:ext cx="288000" cy="0"/>
-          </a:xfrm>
-          <a:prstGeom prst="line">
-            <a:avLst/>
-          </a:prstGeom>
-          <a:ln w="15240">
-            <a:solidFill>
-              <a:srgbClr val="1D4ED8"/>
-            </a:solidFill>
-          </a:ln>
-          <a:effectLst/>
-        </p:spPr>
-        <p:style>
-          <a:lnRef idx="2">
-            <a:schemeClr val="accent1"/>
-          </a:lnRef>
-          <a:fillRef idx="0">
-            <a:schemeClr val="accent1"/>
-          </a:fillRef>
-          <a:effectRef idx="1">
-            <a:schemeClr val="accent1"/>
-          </a:effectRef>
-          <a:fontRef idx="minor">
-            <a:schemeClr val="tx1"/>
-          </a:fontRef>
-        </p:style>
-      </p:cxnSp>
       <p:cxnSp>
         <p:nvCxnSpPr>
           <p:cNvPr id="75" name="Connector 74"/>
@@ -7564,7 +7564,7 @@
         </p:nvCxnSpPr>
         <p:spPr>
           <a:xfrm>
-            <a:off x="7344000" y="9576000"/>
+            <a:off x="7344000" y="8856000"/>
             <a:ext cx="288000" cy="0"/>
           </a:xfrm>
           <a:prstGeom prst="line">
@@ -7600,8 +7600,8 @@
         </p:nvCxnSpPr>
         <p:spPr>
           <a:xfrm>
-            <a:off x="7632000" y="8856000"/>
-            <a:ext cx="0" cy="720000"/>
+            <a:off x="7344000" y="9576000"/>
+            <a:ext cx="288000" cy="0"/>
           </a:xfrm>
           <a:prstGeom prst="line">
             <a:avLst/>
@@ -7628,9 +7628,45 @@
           </a:fontRef>
         </p:style>
       </p:cxnSp>
-      <p:sp>
-        <p:nvSpPr>
-          <p:cNvPr id="77" name="Right Arrow 76"/>
+      <p:cxnSp>
+        <p:nvCxnSpPr>
+          <p:cNvPr id="77" name="Connector 76"/>
+          <p:cNvCxnSpPr/>
+          <p:nvPr/>
+        </p:nvCxnSpPr>
+        <p:spPr>
+          <a:xfrm>
+            <a:off x="7632000" y="8856000"/>
+            <a:ext cx="0" cy="720000"/>
+          </a:xfrm>
+          <a:prstGeom prst="line">
+            <a:avLst/>
+          </a:prstGeom>
+          <a:ln w="15240">
+            <a:solidFill>
+              <a:srgbClr val="1D4ED8"/>
+            </a:solidFill>
+          </a:ln>
+          <a:effectLst/>
+        </p:spPr>
+        <p:style>
+          <a:lnRef idx="2">
+            <a:schemeClr val="accent1"/>
+          </a:lnRef>
+          <a:fillRef idx="0">
+            <a:schemeClr val="accent1"/>
+          </a:fillRef>
+          <a:effectRef idx="1">
+            <a:schemeClr val="accent1"/>
+          </a:effectRef>
+          <a:fontRef idx="minor">
+            <a:schemeClr val="tx1"/>
+          </a:fontRef>
+        </p:style>
+      </p:cxnSp>
+      <p:sp>
+        <p:nvSpPr>
+          <p:cNvPr id="78" name="Right Arrow 77"/>
           <p:cNvSpPr/>
           <p:nvPr/>
         </p:nvSpPr>
@@ -7679,7 +7715,7 @@
       </p:sp>
       <p:sp>
         <p:nvSpPr>
-          <p:cNvPr id="78" name="Rounded Rectangle 77"/>
+          <p:cNvPr id="79" name="Rounded Rectangle 78"/>
           <p:cNvSpPr/>
           <p:nvPr/>
         </p:nvSpPr>
@@ -7730,7 +7766,7 @@
       </p:sp>
       <p:sp>
         <p:nvSpPr>
-          <p:cNvPr id="79" name="TextBox 78"/>
+          <p:cNvPr id="80" name="TextBox 79"/>
           <p:cNvSpPr txBox="1"/>
           <p:nvPr>
             <p:custDataLst>
@@ -7781,7 +7817,7 @@
       </p:sp>
       <p:sp>
         <p:nvSpPr>
-          <p:cNvPr id="80" name="TextBox 79"/>
+          <p:cNvPr id="81" name="TextBox 80"/>
           <p:cNvSpPr txBox="1"/>
           <p:nvPr>
             <p:custDataLst>
@@ -7832,7 +7868,7 @@
       </p:sp>
       <p:sp>
         <p:nvSpPr>
-          <p:cNvPr id="81" name="Right Arrow 80"/>
+          <p:cNvPr id="82" name="Right Arrow 81"/>
           <p:cNvSpPr/>
           <p:nvPr/>
         </p:nvSpPr>
@@ -7881,7 +7917,7 @@
       </p:sp>
       <p:sp>
         <p:nvSpPr>
-          <p:cNvPr id="82" name="Rounded Rectangle 81"/>
+          <p:cNvPr id="83" name="Rounded Rectangle 82"/>
           <p:cNvSpPr/>
           <p:nvPr/>
         </p:nvSpPr>
@@ -7932,7 +7968,7 @@
       </p:sp>
       <p:sp>
         <p:nvSpPr>
-          <p:cNvPr id="83" name="TextBox 82"/>
+          <p:cNvPr id="84" name="TextBox 83"/>
           <p:cNvSpPr txBox="1"/>
           <p:nvPr>
             <p:custDataLst>
@@ -7983,7 +8019,7 @@
       </p:sp>
       <p:sp>
         <p:nvSpPr>
-          <p:cNvPr id="84" name="Rounded Rectangle 83"/>
+          <p:cNvPr id="85" name="Rounded Rectangle 84"/>
           <p:cNvSpPr/>
           <p:nvPr/>
         </p:nvSpPr>
@@ -8034,7 +8070,7 @@
       </p:sp>
       <p:sp>
         <p:nvSpPr>
-          <p:cNvPr id="85" name="TextBox 84"/>
+          <p:cNvPr id="86" name="TextBox 85"/>
           <p:cNvSpPr txBox="1"/>
           <p:nvPr>
             <p:custDataLst>
@@ -8085,7 +8121,7 @@
       </p:sp>
       <p:sp>
         <p:nvSpPr>
-          <p:cNvPr id="86" name="Rounded Rectangle 85"/>
+          <p:cNvPr id="87" name="Rounded Rectangle 86"/>
           <p:cNvSpPr/>
           <p:nvPr/>
         </p:nvSpPr>
@@ -8136,7 +8172,7 @@
       </p:sp>
       <p:sp>
         <p:nvSpPr>
-          <p:cNvPr id="87" name="TextBox 86"/>
+          <p:cNvPr id="88" name="TextBox 87"/>
           <p:cNvSpPr txBox="1"/>
           <p:nvPr>
             <p:custDataLst>
@@ -8187,7 +8223,7 @@
       </p:sp>
       <p:sp>
         <p:nvSpPr>
-          <p:cNvPr id="88" name="Rounded Rectangle 87"/>
+          <p:cNvPr id="89" name="Rounded Rectangle 88"/>
           <p:cNvSpPr/>
           <p:nvPr/>
         </p:nvSpPr>
@@ -8238,7 +8274,7 @@
       </p:sp>
       <p:sp>
         <p:nvSpPr>
-          <p:cNvPr id="89" name="TextBox 88"/>
+          <p:cNvPr id="90" name="TextBox 89"/>
           <p:cNvSpPr txBox="1"/>
           <p:nvPr>
             <p:custDataLst>
@@ -8289,7 +8325,7 @@
       </p:sp>
       <p:sp>
         <p:nvSpPr>
-          <p:cNvPr id="90" name="Rounded Rectangle 89"/>
+          <p:cNvPr id="91" name="Rounded Rectangle 90"/>
           <p:cNvSpPr/>
           <p:nvPr/>
         </p:nvSpPr>
@@ -8340,7 +8376,7 @@
       </p:sp>
       <p:sp>
         <p:nvSpPr>
-          <p:cNvPr id="91" name="TextBox 90"/>
+          <p:cNvPr id="92" name="TextBox 91"/>
           <p:cNvSpPr txBox="1"/>
           <p:nvPr>
             <p:custDataLst>
@@ -8391,7 +8427,7 @@
       </p:sp>
       <p:sp>
         <p:nvSpPr>
-          <p:cNvPr id="92" name="Rounded Rectangle 91"/>
+          <p:cNvPr id="93" name="Rounded Rectangle 92"/>
           <p:cNvSpPr/>
           <p:nvPr/>
         </p:nvSpPr>
@@ -8442,7 +8478,7 @@
       </p:sp>
       <p:sp>
         <p:nvSpPr>
-          <p:cNvPr id="93" name="TextBox 92"/>
+          <p:cNvPr id="94" name="TextBox 93"/>
           <p:cNvSpPr txBox="1"/>
           <p:nvPr>
             <p:custDataLst>
@@ -8493,7 +8529,7 @@
       </p:sp>
       <p:sp>
         <p:nvSpPr>
-          <p:cNvPr id="94" name="Rounded Rectangle 93"/>
+          <p:cNvPr id="95" name="Rounded Rectangle 94"/>
           <p:cNvSpPr/>
           <p:nvPr/>
         </p:nvSpPr>
@@ -8546,7 +8582,7 @@
       </p:sp>
       <p:sp>
         <p:nvSpPr>
-          <p:cNvPr id="95" name="TextBox 94"/>
+          <p:cNvPr id="96" name="TextBox 95"/>
           <p:cNvSpPr txBox="1"/>
           <p:nvPr>
             <p:custDataLst>
@@ -8597,7 +8633,7 @@
       </p:sp>
       <p:sp>
         <p:nvSpPr>
-          <p:cNvPr id="96" name="Rounded Rectangle 95"/>
+          <p:cNvPr id="97" name="Rounded Rectangle 96"/>
           <p:cNvSpPr/>
           <p:nvPr/>
         </p:nvSpPr>
@@ -8650,7 +8686,7 @@
       </p:sp>
       <p:sp>
         <p:nvSpPr>
-          <p:cNvPr id="97" name="TextBox 96"/>
+          <p:cNvPr id="98" name="TextBox 97"/>
           <p:cNvSpPr txBox="1"/>
           <p:nvPr>
             <p:custDataLst>
@@ -8699,42 +8735,6 @@
           </a:p>
         </p:txBody>
       </p:sp>
-      <p:cxnSp>
-        <p:nvCxnSpPr>
-          <p:cNvPr id="98" name="Connector 97"/>
-          <p:cNvCxnSpPr/>
-          <p:nvPr/>
-        </p:nvCxnSpPr>
-        <p:spPr>
-          <a:xfrm>
-            <a:off x="7344000" y="10548000"/>
-            <a:ext cx="288000" cy="0"/>
-          </a:xfrm>
-          <a:prstGeom prst="line">
-            <a:avLst/>
-          </a:prstGeom>
-          <a:ln w="15240">
-            <a:solidFill>
-              <a:srgbClr val="1D4ED8"/>
-            </a:solidFill>
-          </a:ln>
-          <a:effectLst/>
-        </p:spPr>
-        <p:style>
-          <a:lnRef idx="2">
-            <a:schemeClr val="accent1"/>
-          </a:lnRef>
-          <a:fillRef idx="0">
-            <a:schemeClr val="accent1"/>
-          </a:fillRef>
-          <a:effectRef idx="1">
-            <a:schemeClr val="accent1"/>
-          </a:effectRef>
-          <a:fontRef idx="minor">
-            <a:schemeClr val="tx1"/>
-          </a:fontRef>
-        </p:style>
-      </p:cxnSp>
       <p:cxnSp>
         <p:nvCxnSpPr>
           <p:cNvPr id="99" name="Connector 98"/>
@@ -8743,7 +8743,7 @@
         </p:nvCxnSpPr>
         <p:spPr>
           <a:xfrm>
-            <a:off x="7344000" y="11268000"/>
+            <a:off x="7344000" y="10548000"/>
             <a:ext cx="288000" cy="0"/>
           </a:xfrm>
           <a:prstGeom prst="line">
@@ -8779,8 +8779,8 @@
         </p:nvCxnSpPr>
         <p:spPr>
           <a:xfrm>
-            <a:off x="7632000" y="10548000"/>
-            <a:ext cx="0" cy="720000"/>
+            <a:off x="7344000" y="11268000"/>
+            <a:ext cx="288000" cy="0"/>
           </a:xfrm>
           <a:prstGeom prst="line">
             <a:avLst/>
@@ -8807,9 +8807,45 @@
           </a:fontRef>
         </p:style>
       </p:cxnSp>
-      <p:sp>
-        <p:nvSpPr>
-          <p:cNvPr id="101" name="Right Arrow 100"/>
+      <p:cxnSp>
+        <p:nvCxnSpPr>
+          <p:cNvPr id="101" name="Connector 100"/>
+          <p:cNvCxnSpPr/>
+          <p:nvPr/>
+        </p:nvCxnSpPr>
+        <p:spPr>
+          <a:xfrm>
+            <a:off x="7632000" y="10548000"/>
+            <a:ext cx="0" cy="720000"/>
+          </a:xfrm>
+          <a:prstGeom prst="line">
+            <a:avLst/>
+          </a:prstGeom>
+          <a:ln w="15240">
+            <a:solidFill>
+              <a:srgbClr val="1D4ED8"/>
+            </a:solidFill>
+          </a:ln>
+          <a:effectLst/>
+        </p:spPr>
+        <p:style>
+          <a:lnRef idx="2">
+            <a:schemeClr val="accent1"/>
+          </a:lnRef>
+          <a:fillRef idx="0">
+            <a:schemeClr val="accent1"/>
+          </a:fillRef>
+          <a:effectRef idx="1">
+            <a:schemeClr val="accent1"/>
+          </a:effectRef>
+          <a:fontRef idx="minor">
+            <a:schemeClr val="tx1"/>
+          </a:fontRef>
+        </p:style>
+      </p:cxnSp>
+      <p:sp>
+        <p:nvSpPr>
+          <p:cNvPr id="102" name="Right Arrow 101"/>
           <p:cNvSpPr/>
           <p:nvPr/>
         </p:nvSpPr>
@@ -8858,7 +8894,7 @@
       </p:sp>
       <p:sp>
         <p:nvSpPr>
-          <p:cNvPr id="102" name="Rounded Rectangle 101"/>
+          <p:cNvPr id="103" name="Rounded Rectangle 102"/>
           <p:cNvSpPr/>
           <p:nvPr/>
         </p:nvSpPr>
@@ -8909,7 +8945,7 @@
       </p:sp>
       <p:sp>
         <p:nvSpPr>
-          <p:cNvPr id="103" name="TextBox 102"/>
+          <p:cNvPr id="104" name="TextBox 103"/>
           <p:cNvSpPr txBox="1"/>
           <p:nvPr>
             <p:custDataLst>
@@ -8960,7 +8996,7 @@
       </p:sp>
       <p:sp>
         <p:nvSpPr>
-          <p:cNvPr id="104" name="TextBox 103"/>
+          <p:cNvPr id="105" name="TextBox 104"/>
           <p:cNvSpPr txBox="1"/>
           <p:nvPr>
             <p:custDataLst>
@@ -9011,7 +9047,7 @@
       </p:sp>
       <p:sp>
         <p:nvSpPr>
-          <p:cNvPr id="105" name="Right Arrow 104"/>
+          <p:cNvPr id="106" name="Right Arrow 105"/>
           <p:cNvSpPr/>
           <p:nvPr/>
         </p:nvSpPr>
@@ -9060,7 +9096,7 @@
       </p:sp>
       <p:sp>
         <p:nvSpPr>
-          <p:cNvPr id="106" name="Rounded Rectangle 105"/>
+          <p:cNvPr id="107" name="Rounded Rectangle 106"/>
           <p:cNvSpPr/>
           <p:nvPr/>
         </p:nvSpPr>
@@ -9111,7 +9147,7 @@
       </p:sp>
       <p:sp>
         <p:nvSpPr>
-          <p:cNvPr id="107" name="TextBox 106"/>
+          <p:cNvPr id="108" name="TextBox 107"/>
           <p:cNvSpPr txBox="1"/>
           <p:nvPr>
             <p:custDataLst>
@@ -9162,7 +9198,7 @@
       </p:sp>
       <p:sp>
         <p:nvSpPr>
-          <p:cNvPr id="108" name="Rounded Rectangle 107"/>
+          <p:cNvPr id="109" name="Rounded Rectangle 108"/>
           <p:cNvSpPr/>
           <p:nvPr/>
         </p:nvSpPr>
@@ -9213,7 +9249,7 @@
       </p:sp>
       <p:sp>
         <p:nvSpPr>
-          <p:cNvPr id="109" name="TextBox 108"/>
+          <p:cNvPr id="110" name="TextBox 109"/>
           <p:cNvSpPr txBox="1"/>
           <p:nvPr>
             <p:custDataLst>
@@ -9264,7 +9300,7 @@
       </p:sp>
       <p:sp>
         <p:nvSpPr>
-          <p:cNvPr id="110" name="Rounded Rectangle 109"/>
+          <p:cNvPr id="111" name="Rounded Rectangle 110"/>
           <p:cNvSpPr/>
           <p:nvPr/>
         </p:nvSpPr>
@@ -9315,7 +9351,7 @@
       </p:sp>
       <p:sp>
         <p:nvSpPr>
-          <p:cNvPr id="111" name="TextBox 110"/>
+          <p:cNvPr id="112" name="TextBox 111"/>
           <p:cNvSpPr txBox="1"/>
           <p:nvPr>
             <p:custDataLst>
@@ -9366,7 +9402,7 @@
       </p:sp>
       <p:sp>
         <p:nvSpPr>
-          <p:cNvPr id="112" name="TextBox 111"/>
+          <p:cNvPr id="113" name="TextBox 112"/>
           <p:cNvSpPr txBox="1"/>
           <p:nvPr>
             <p:custDataLst>
@@ -9417,7 +9453,7 @@
       </p:sp>
       <p:sp>
         <p:nvSpPr>
-          <p:cNvPr id="113" name="Rounded Rectangle 112"/>
+          <p:cNvPr id="114" name="Rounded Rectangle 113"/>
           <p:cNvSpPr/>
           <p:nvPr/>
         </p:nvSpPr>
@@ -9470,7 +9506,7 @@
       </p:sp>
       <p:sp>
         <p:nvSpPr>
-          <p:cNvPr id="114" name="TextBox 113"/>
+          <p:cNvPr id="115" name="TextBox 114"/>
           <p:cNvSpPr txBox="1"/>
           <p:nvPr>
             <p:custDataLst>
@@ -9521,7 +9557,7 @@
       </p:sp>
       <p:sp>
         <p:nvSpPr>
-          <p:cNvPr id="115" name="Right Arrow 114"/>
+          <p:cNvPr id="116" name="Right Arrow 115"/>
           <p:cNvSpPr/>
           <p:nvPr/>
         </p:nvSpPr>
@@ -9570,7 +9606,7 @@
       </p:sp>
       <p:sp>
         <p:nvSpPr>
-          <p:cNvPr id="116" name="Rounded Rectangle 115"/>
+          <p:cNvPr id="117" name="Rounded Rectangle 116"/>
           <p:cNvSpPr/>
           <p:nvPr/>
         </p:nvSpPr>
@@ -9623,7 +9659,7 @@
       </p:sp>
       <p:sp>
         <p:nvSpPr>
-          <p:cNvPr id="117" name="TextBox 116"/>
+          <p:cNvPr id="118" name="TextBox 117"/>
           <p:cNvSpPr txBox="1"/>
           <p:nvPr>
             <p:custDataLst>
@@ -9674,7 +9710,7 @@
       </p:sp>
       <p:sp>
         <p:nvSpPr>
-          <p:cNvPr id="118" name="Right Arrow 117"/>
+          <p:cNvPr id="119" name="Right Arrow 118"/>
           <p:cNvSpPr/>
           <p:nvPr/>
         </p:nvSpPr>
@@ -9723,7 +9759,7 @@
       </p:sp>
       <p:sp>
         <p:nvSpPr>
-          <p:cNvPr id="119" name="Rounded Rectangle 118"/>
+          <p:cNvPr id="120" name="Rounded Rectangle 119"/>
           <p:cNvSpPr/>
           <p:nvPr/>
         </p:nvSpPr>
@@ -9774,7 +9810,7 @@
       </p:sp>
       <p:sp>
         <p:nvSpPr>
-          <p:cNvPr id="120" name="TextBox 119"/>
+          <p:cNvPr id="121" name="TextBox 120"/>
           <p:cNvSpPr txBox="1"/>
           <p:nvPr>
             <p:custDataLst>
@@ -9825,7 +9861,7 @@
       </p:sp>
       <p:sp>
         <p:nvSpPr>
-          <p:cNvPr id="121" name="TextBox 120"/>
+          <p:cNvPr id="122" name="TextBox 121"/>
           <p:cNvSpPr txBox="1"/>
           <p:nvPr>
             <p:custDataLst>
@@ -9876,7 +9912,7 @@
       </p:sp>
       <p:sp>
         <p:nvSpPr>
-          <p:cNvPr id="122" name="Rounded Rectangle 121"/>
+          <p:cNvPr id="123" name="Rounded Rectangle 122"/>
           <p:cNvSpPr/>
           <p:nvPr/>
         </p:nvSpPr>
@@ -9927,7 +9963,7 @@
       </p:sp>
       <p:sp>
         <p:nvSpPr>
-          <p:cNvPr id="123" name="Oval 122"/>
+          <p:cNvPr id="124" name="Oval 123"/>
           <p:cNvSpPr/>
           <p:nvPr/>
         </p:nvSpPr>
@@ -9976,7 +10012,7 @@
       </p:sp>
       <p:sp>
         <p:nvSpPr>
-          <p:cNvPr id="124" name="Oval 123"/>
+          <p:cNvPr id="125" name="Oval 124"/>
           <p:cNvSpPr/>
           <p:nvPr/>
         </p:nvSpPr>
@@ -10025,7 +10061,7 @@
       </p:sp>
       <p:sp>
         <p:nvSpPr>
-          <p:cNvPr id="125" name="Oval 124"/>
+          <p:cNvPr id="126" name="Oval 125"/>
           <p:cNvSpPr/>
           <p:nvPr/>
         </p:nvSpPr>
@@ -10074,7 +10110,7 @@
       </p:sp>
       <p:sp>
         <p:nvSpPr>
-          <p:cNvPr id="126" name="Oval 125"/>
+          <p:cNvPr id="127" name="Oval 126"/>
           <p:cNvSpPr/>
           <p:nvPr/>
         </p:nvSpPr>
@@ -10123,7 +10159,7 @@
       </p:sp>
       <p:sp>
         <p:nvSpPr>
-          <p:cNvPr id="127" name="TextBox 126"/>
+          <p:cNvPr id="128" name="TextBox 127"/>
           <p:cNvSpPr txBox="1"/>
           <p:nvPr>
             <p:custDataLst>
@@ -10174,7 +10210,7 @@
       </p:sp>
       <p:sp>
         <p:nvSpPr>
-          <p:cNvPr id="128" name="TextBox 127"/>
+          <p:cNvPr id="129" name="TextBox 128"/>
           <p:cNvSpPr txBox="1"/>
           <p:nvPr>
             <p:custDataLst>
@@ -10225,7 +10261,7 @@
       </p:sp>
       <p:sp>
         <p:nvSpPr>
-          <p:cNvPr id="129" name="TextBox 128"/>
+          <p:cNvPr id="130" name="TextBox 129"/>
           <p:cNvSpPr txBox="1"/>
           <p:nvPr>
             <p:custDataLst>
@@ -10276,7 +10312,7 @@
       </p:sp>
       <p:cxnSp>
         <p:nvCxnSpPr>
-          <p:cNvPr id="130" name="Connector 129"/>
+          <p:cNvPr id="131" name="Connector 130"/>
           <p:cNvCxnSpPr/>
           <p:nvPr/>
         </p:nvCxnSpPr>
@@ -10312,7 +10348,7 @@
       </p:cxnSp>
       <p:sp>
         <p:nvSpPr>
-          <p:cNvPr id="131" name="Rounded Rectangle 130"/>
+          <p:cNvPr id="132" name="Rounded Rectangle 131"/>
           <p:cNvSpPr/>
           <p:nvPr/>
         </p:nvSpPr>
@@ -10365,7 +10401,7 @@
       </p:sp>
       <p:sp>
         <p:nvSpPr>
-          <p:cNvPr id="132" name="Rectangle 131"/>
+          <p:cNvPr id="133" name="Rectangle 132"/>
           <p:cNvSpPr/>
           <p:nvPr/>
         </p:nvSpPr>
@@ -10414,7 +10450,7 @@
       </p:sp>
       <p:sp>
         <p:nvSpPr>
-          <p:cNvPr id="133" name="TextBox 132"/>
+          <p:cNvPr id="134" name="TextBox 133"/>
           <p:cNvSpPr txBox="1"/>
           <p:nvPr>
             <p:custDataLst>
@@ -10465,7 +10501,7 @@
       </p:sp>
       <p:sp>
         <p:nvSpPr>
-          <p:cNvPr id="134" name="TextBox 133"/>
+          <p:cNvPr id="135" name="TextBox 134"/>
           <p:cNvSpPr txBox="1"/>
           <p:nvPr>
             <p:custDataLst>
@@ -10564,7 +10600,7 @@
       </p:sp>
       <p:sp>
         <p:nvSpPr>
-          <p:cNvPr id="135" name="Rounded Rectangle 134"/>
+          <p:cNvPr id="136" name="Rounded Rectangle 135"/>
           <p:cNvSpPr/>
           <p:nvPr/>
         </p:nvSpPr>
@@ -10617,7 +10653,7 @@
       </p:sp>
       <p:sp>
         <p:nvSpPr>
-          <p:cNvPr id="136" name="Rectangle 135"/>
+          <p:cNvPr id="137" name="Rectangle 136"/>
           <p:cNvSpPr/>
           <p:nvPr/>
         </p:nvSpPr>
@@ -10666,7 +10702,7 @@
       </p:sp>
       <p:sp>
         <p:nvSpPr>
-          <p:cNvPr id="137" name="TextBox 136"/>
+          <p:cNvPr id="138" name="TextBox 137"/>
           <p:cNvSpPr txBox="1"/>
           <p:nvPr>
             <p:custDataLst>
@@ -10717,7 +10753,7 @@
       </p:sp>
       <p:sp>
         <p:nvSpPr>
-          <p:cNvPr id="138" name="TextBox 137"/>
+          <p:cNvPr id="139" name="TextBox 138"/>
           <p:cNvSpPr txBox="1"/>
           <p:nvPr>
             <p:custDataLst>
@@ -10816,7 +10852,7 @@
       </p:sp>
       <p:sp>
         <p:nvSpPr>
-          <p:cNvPr id="139" name="Rounded Rectangle 138"/>
+          <p:cNvPr id="140" name="Rounded Rectangle 139"/>
           <p:cNvSpPr/>
           <p:nvPr/>
         </p:nvSpPr>
@@ -10869,7 +10905,7 @@
       </p:sp>
       <p:sp>
         <p:nvSpPr>
-          <p:cNvPr id="140" name="Rectangle 139"/>
+          <p:cNvPr id="141" name="Rectangle 140"/>
           <p:cNvSpPr/>
           <p:nvPr/>
         </p:nvSpPr>
@@ -10918,7 +10954,7 @@
       </p:sp>
       <p:sp>
         <p:nvSpPr>
-          <p:cNvPr id="141" name="TextBox 140"/>
+          <p:cNvPr id="142" name="TextBox 141"/>
           <p:cNvSpPr txBox="1"/>
           <p:nvPr>
             <p:custDataLst>
@@ -10969,7 +11005,7 @@
       </p:sp>
       <p:sp>
         <p:nvSpPr>
-          <p:cNvPr id="142" name="TextBox 141"/>
+          <p:cNvPr id="143" name="TextBox 142"/>
           <p:cNvSpPr txBox="1"/>
           <p:nvPr>
             <p:custDataLst>
@@ -11068,7 +11104,7 @@
       </p:sp>
       <p:sp>
         <p:nvSpPr>
-          <p:cNvPr id="143" name="TextBox 142"/>
+          <p:cNvPr id="144" name="TextBox 143"/>
           <p:cNvSpPr txBox="1"/>
           <p:nvPr>
             <p:custDataLst>
@@ -11119,7 +11155,7 @@
       </p:sp>
       <p:sp>
         <p:nvSpPr>
-          <p:cNvPr id="144" name="TextBox 143"/>
+          <p:cNvPr id="145" name="TextBox 144"/>
           <p:cNvSpPr txBox="1"/>
           <p:nvPr>
             <p:custDataLst>
@@ -11170,7 +11206,7 @@
       </p:sp>
       <p:cxnSp>
         <p:nvCxnSpPr>
-          <p:cNvPr id="145" name="Connector 144"/>
+          <p:cNvPr id="146" name="Connector 145"/>
           <p:cNvCxnSpPr/>
           <p:nvPr/>
         </p:nvCxnSpPr>
@@ -11206,7 +11242,7 @@
       </p:cxnSp>
       <p:sp>
         <p:nvSpPr>
-          <p:cNvPr id="146" name="TextBox 145"/>
+          <p:cNvPr id="147" name="TextBox 146"/>
           <p:cNvSpPr txBox="1"/>
           <p:nvPr>
             <p:custDataLst>
@@ -11257,7 +11293,7 @@
       </p:sp>
       <p:sp>
         <p:nvSpPr>
-          <p:cNvPr id="147" name="TextBox 146"/>
+          <p:cNvPr id="148" name="TextBox 147"/>
           <p:cNvSpPr txBox="1"/>
           <p:nvPr>
             <p:custDataLst>
@@ -11308,7 +11344,7 @@
       </p:sp>
       <p:sp>
         <p:nvSpPr>
-          <p:cNvPr id="148" name="Rectangle 147"/>
+          <p:cNvPr id="149" name="Rectangle 148"/>
           <p:cNvSpPr/>
           <p:nvPr/>
         </p:nvSpPr>
@@ -11357,7 +11393,7 @@
       </p:sp>
       <p:sp>
         <p:nvSpPr>
-          <p:cNvPr id="149" name="Rectangle 148"/>
+          <p:cNvPr id="150" name="Rectangle 149"/>
           <p:cNvSpPr/>
           <p:nvPr/>
         </p:nvSpPr>
@@ -11406,7 +11442,7 @@
       </p:sp>
       <p:sp>
         <p:nvSpPr>
-          <p:cNvPr id="150" name="TextBox 149"/>
+          <p:cNvPr id="151" name="TextBox 150"/>
           <p:cNvSpPr txBox="1"/>
           <p:nvPr>
             <p:custDataLst>
@@ -11457,7 +11493,7 @@
       </p:sp>
       <p:sp>
         <p:nvSpPr>
-          <p:cNvPr id="151" name="TextBox 150"/>
+          <p:cNvPr id="152" name="TextBox 151"/>
           <p:cNvSpPr txBox="1"/>
           <p:nvPr>
             <p:custDataLst>
@@ -11508,7 +11544,7 @@
       </p:sp>
       <p:sp>
         <p:nvSpPr>
-          <p:cNvPr id="152" name="Rectangle 151"/>
+          <p:cNvPr id="153" name="Rectangle 152"/>
           <p:cNvSpPr/>
           <p:nvPr/>
         </p:nvSpPr>
@@ -11557,7 +11593,7 @@
       </p:sp>
       <p:sp>
         <p:nvSpPr>
-          <p:cNvPr id="153" name="Rectangle 152"/>
+          <p:cNvPr id="154" name="Rectangle 153"/>
           <p:cNvSpPr/>
           <p:nvPr/>
         </p:nvSpPr>
@@ -11606,7 +11642,7 @@
       </p:sp>
       <p:sp>
         <p:nvSpPr>
-          <p:cNvPr id="154" name="TextBox 153"/>
+          <p:cNvPr id="155" name="TextBox 154"/>
           <p:cNvSpPr txBox="1"/>
           <p:nvPr>
             <p:custDataLst>
@@ -11657,7 +11693,7 @@
       </p:sp>
       <p:sp>
         <p:nvSpPr>
-          <p:cNvPr id="155" name="TextBox 154"/>
+          <p:cNvPr id="156" name="TextBox 155"/>
           <p:cNvSpPr txBox="1"/>
           <p:nvPr>
             <p:custDataLst>
@@ -11708,7 +11744,7 @@
       </p:sp>
       <p:sp>
         <p:nvSpPr>
-          <p:cNvPr id="156" name="Rectangle 155"/>
+          <p:cNvPr id="157" name="Rectangle 156"/>
           <p:cNvSpPr/>
           <p:nvPr/>
         </p:nvSpPr>
@@ -11757,7 +11793,7 @@
       </p:sp>
       <p:sp>
         <p:nvSpPr>
-          <p:cNvPr id="157" name="Rectangle 156"/>
+          <p:cNvPr id="158" name="Rectangle 157"/>
           <p:cNvSpPr/>
           <p:nvPr/>
         </p:nvSpPr>
@@ -11806,7 +11842,7 @@
       </p:sp>
       <p:sp>
         <p:nvSpPr>
-          <p:cNvPr id="158" name="TextBox 157"/>
+          <p:cNvPr id="159" name="TextBox 158"/>
           <p:cNvSpPr txBox="1"/>
           <p:nvPr>
             <p:custDataLst>
@@ -11857,7 +11893,7 @@
       </p:sp>
       <p:cxnSp>
         <p:nvCxnSpPr>
-          <p:cNvPr id="159" name="Connector 158"/>
+          <p:cNvPr id="160" name="Connector 159"/>
           <p:cNvCxnSpPr/>
           <p:nvPr/>
         </p:nvCxnSpPr>
@@ -11893,7 +11929,7 @@
       </p:cxnSp>
       <p:sp>
         <p:nvSpPr>
-          <p:cNvPr id="160" name="TextBox 159"/>
+          <p:cNvPr id="161" name="TextBox 160"/>
           <p:cNvSpPr txBox="1"/>
           <p:nvPr>
             <p:custDataLst>
@@ -11944,7 +11980,7 @@
       </p:sp>
       <p:cxnSp>
         <p:nvCxnSpPr>
-          <p:cNvPr id="161" name="Connector 160"/>
+          <p:cNvPr id="162" name="Connector 161"/>
           <p:cNvCxnSpPr/>
           <p:nvPr/>
         </p:nvCxnSpPr>
@@ -11980,7 +12016,7 @@
       </p:cxnSp>
       <p:sp>
         <p:nvSpPr>
-          <p:cNvPr id="162" name="TextBox 161"/>
+          <p:cNvPr id="163" name="TextBox 162"/>
           <p:cNvSpPr txBox="1"/>
           <p:nvPr>
             <p:custDataLst>
@@ -12031,7 +12067,7 @@
       </p:sp>
       <p:cxnSp>
         <p:nvCxnSpPr>
-          <p:cNvPr id="163" name="Connector 162"/>
+          <p:cNvPr id="164" name="Connector 163"/>
           <p:cNvCxnSpPr/>
           <p:nvPr/>
         </p:nvCxnSpPr>
@@ -12067,7 +12103,7 @@
       </p:cxnSp>
       <p:sp>
         <p:nvSpPr>
-          <p:cNvPr id="164" name="TextBox 163"/>
+          <p:cNvPr id="165" name="TextBox 164"/>
           <p:cNvSpPr txBox="1"/>
           <p:nvPr>
             <p:custDataLst>
@@ -12118,7 +12154,7 @@
       </p:sp>
       <p:sp>
         <p:nvSpPr>
-          <p:cNvPr id="165" name="TextBox 164"/>
+          <p:cNvPr id="166" name="TextBox 165"/>
           <p:cNvSpPr txBox="1"/>
           <p:nvPr>
             <p:custDataLst>
@@ -12169,7 +12205,7 @@
       </p:sp>
       <p:cxnSp>
         <p:nvCxnSpPr>
-          <p:cNvPr id="166" name="Connector 165"/>
+          <p:cNvPr id="167" name="Connector 166"/>
           <p:cNvCxnSpPr/>
           <p:nvPr/>
         </p:nvCxnSpPr>
@@ -12205,7 +12241,7 @@
       </p:cxnSp>
       <p:sp>
         <p:nvSpPr>
-          <p:cNvPr id="167" name="TextBox 166"/>
+          <p:cNvPr id="168" name="TextBox 167"/>
           <p:cNvSpPr txBox="1"/>
           <p:nvPr>
             <p:custDataLst>
@@ -12256,7 +12292,7 @@
       </p:sp>
       <p:sp>
         <p:nvSpPr>
-          <p:cNvPr id="168" name="TextBox 167"/>
+          <p:cNvPr id="169" name="TextBox 168"/>
           <p:cNvSpPr txBox="1"/>
           <p:nvPr>
             <p:custDataLst>
@@ -12307,7 +12343,7 @@
       </p:sp>
       <p:sp>
         <p:nvSpPr>
-          <p:cNvPr id="169" name="TextBox 168"/>
+          <p:cNvPr id="170" name="TextBox 169"/>
           <p:cNvSpPr txBox="1"/>
           <p:nvPr>
             <p:custDataLst>
@@ -12358,7 +12394,7 @@
       </p:sp>
       <p:sp>
         <p:nvSpPr>
-          <p:cNvPr id="170" name="Rounded Rectangle 169"/>
+          <p:cNvPr id="171" name="Rounded Rectangle 170"/>
           <p:cNvSpPr/>
           <p:nvPr/>
         </p:nvSpPr>
@@ -12409,7 +12445,7 @@
       </p:sp>
       <p:sp>
         <p:nvSpPr>
-          <p:cNvPr id="171" name="TextBox 170"/>
+          <p:cNvPr id="172" name="TextBox 171"/>
           <p:cNvSpPr txBox="1"/>
           <p:nvPr>
             <p:custDataLst>
@@ -12460,7 +12496,7 @@
       </p:sp>
       <p:sp>
         <p:nvSpPr>
-          <p:cNvPr id="172" name="TextBox 171"/>
+          <p:cNvPr id="173" name="TextBox 172"/>
           <p:cNvSpPr txBox="1"/>
           <p:nvPr>
             <p:custDataLst>
@@ -12511,7 +12547,7 @@
       </p:sp>
       <p:sp>
         <p:nvSpPr>
-          <p:cNvPr id="173" name="Rounded Rectangle 172"/>
+          <p:cNvPr id="174" name="Rounded Rectangle 173"/>
           <p:cNvSpPr/>
           <p:nvPr/>
         </p:nvSpPr>
@@ -12562,7 +12598,7 @@
       </p:sp>
       <p:sp>
         <p:nvSpPr>
-          <p:cNvPr id="174" name="TextBox 173"/>
+          <p:cNvPr id="175" name="TextBox 174"/>
           <p:cNvSpPr txBox="1"/>
           <p:nvPr>
             <p:custDataLst>
@@ -12613,7 +12649,7 @@
       </p:sp>
       <p:sp>
         <p:nvSpPr>
-          <p:cNvPr id="175" name="TextBox 174"/>
+          <p:cNvPr id="176" name="TextBox 175"/>
           <p:cNvSpPr txBox="1"/>
           <p:nvPr>
             <p:custDataLst>
@@ -12664,7 +12700,7 @@
       </p:sp>
       <p:sp>
         <p:nvSpPr>
-          <p:cNvPr id="176" name="Rounded Rectangle 175"/>
+          <p:cNvPr id="177" name="Rounded Rectangle 176"/>
           <p:cNvSpPr/>
           <p:nvPr/>
         </p:nvSpPr>
@@ -12715,7 +12751,7 @@
       </p:sp>
       <p:sp>
         <p:nvSpPr>
-          <p:cNvPr id="177" name="TextBox 176"/>
+          <p:cNvPr id="178" name="TextBox 177"/>
           <p:cNvSpPr txBox="1"/>
           <p:nvPr>
             <p:custDataLst>
@@ -12766,7 +12802,7 @@
       </p:sp>
       <p:sp>
         <p:nvSpPr>
-          <p:cNvPr id="178" name="TextBox 177"/>
+          <p:cNvPr id="179" name="TextBox 178"/>
           <p:cNvSpPr txBox="1"/>
           <p:nvPr>
             <p:custDataLst>
@@ -12817,7 +12853,7 @@
       </p:sp>
       <p:sp>
         <p:nvSpPr>
-          <p:cNvPr id="179" name="TextBox 178"/>
+          <p:cNvPr id="180" name="TextBox 179"/>
           <p:cNvSpPr txBox="1"/>
           <p:nvPr>
             <p:custDataLst>
@@ -12868,7 +12904,7 @@
       </p:sp>
       <p:sp>
         <p:nvSpPr>
-          <p:cNvPr id="180" name="Rounded Rectangle 179"/>
+          <p:cNvPr id="181" name="Rounded Rectangle 180"/>
           <p:cNvSpPr/>
           <p:nvPr/>
         </p:nvSpPr>
@@ -12919,7 +12955,7 @@
       </p:sp>
       <p:sp>
         <p:nvSpPr>
-          <p:cNvPr id="181" name="TextBox 180"/>
+          <p:cNvPr id="182" name="TextBox 181"/>
           <p:cNvSpPr txBox="1"/>
           <p:nvPr>
             <p:custDataLst>
@@ -12994,7 +13030,7 @@
       </p:sp>
       <p:sp>
         <p:nvSpPr>
-          <p:cNvPr id="182" name="Rounded Rectangle 181"/>
+          <p:cNvPr id="183" name="Rounded Rectangle 182"/>
           <p:cNvSpPr/>
           <p:nvPr/>
         </p:nvSpPr>
@@ -13047,7 +13083,7 @@
       </p:sp>
       <p:sp>
         <p:nvSpPr>
-          <p:cNvPr id="183" name="TextBox 182"/>
+          <p:cNvPr id="184" name="TextBox 183"/>
           <p:cNvSpPr txBox="1"/>
           <p:nvPr>
             <p:custDataLst>
@@ -13098,7 +13134,7 @@
       </p:sp>
       <p:sp>
         <p:nvSpPr>
-          <p:cNvPr id="184" name="TextBox 183"/>
+          <p:cNvPr id="185" name="TextBox 184"/>
           <p:cNvSpPr txBox="1"/>
           <p:nvPr>
             <p:custDataLst>
@@ -13149,7 +13185,7 @@
       </p:sp>
       <p:sp>
         <p:nvSpPr>
-          <p:cNvPr id="185" name="Rounded Rectangle 184"/>
+          <p:cNvPr id="186" name="Rounded Rectangle 185"/>
           <p:cNvSpPr/>
           <p:nvPr/>
         </p:nvSpPr>
@@ -13200,7 +13236,7 @@
       </p:sp>
       <p:sp>
         <p:nvSpPr>
-          <p:cNvPr id="186" name="TextBox 185"/>
+          <p:cNvPr id="187" name="TextBox 186"/>
           <p:cNvSpPr txBox="1"/>
           <p:nvPr>
             <p:custDataLst>
@@ -13251,7 +13287,7 @@
       </p:sp>
       <p:sp>
         <p:nvSpPr>
-          <p:cNvPr id="187" name="TextBox 186"/>
+          <p:cNvPr id="188" name="TextBox 187"/>
           <p:cNvSpPr txBox="1"/>
           <p:nvPr>
             <p:custDataLst>
@@ -13302,7 +13338,7 @@
       </p:sp>
       <p:sp>
         <p:nvSpPr>
-          <p:cNvPr id="188" name="Rounded Rectangle 187"/>
+          <p:cNvPr id="189" name="Rounded Rectangle 188"/>
           <p:cNvSpPr/>
           <p:nvPr/>
         </p:nvSpPr>
@@ -13353,7 +13389,7 @@
       </p:sp>
       <p:sp>
         <p:nvSpPr>
-          <p:cNvPr id="189" name="TextBox 188"/>
+          <p:cNvPr id="190" name="TextBox 189"/>
           <p:cNvSpPr txBox="1"/>
           <p:nvPr>
             <p:custDataLst>
@@ -13404,7 +13440,7 @@
       </p:sp>
       <p:sp>
         <p:nvSpPr>
-          <p:cNvPr id="190" name="TextBox 189"/>
+          <p:cNvPr id="191" name="TextBox 190"/>
           <p:cNvSpPr txBox="1"/>
           <p:nvPr>
             <p:custDataLst>
@@ -13455,7 +13491,7 @@
       </p:sp>
       <p:sp>
         <p:nvSpPr>
-          <p:cNvPr id="191" name="Rounded Rectangle 190"/>
+          <p:cNvPr id="192" name="Rounded Rectangle 191"/>
           <p:cNvSpPr/>
           <p:nvPr/>
         </p:nvSpPr>
@@ -13506,7 +13542,7 @@
       </p:sp>
       <p:sp>
         <p:nvSpPr>
-          <p:cNvPr id="192" name="TextBox 191"/>
+          <p:cNvPr id="193" name="TextBox 192"/>
           <p:cNvSpPr txBox="1"/>
           <p:nvPr>
             <p:custDataLst>
@@ -13557,7 +13593,7 @@
       </p:sp>
       <p:sp>
         <p:nvSpPr>
-          <p:cNvPr id="193" name="TextBox 192"/>
+          <p:cNvPr id="194" name="TextBox 193"/>
           <p:cNvSpPr txBox="1"/>
           <p:nvPr>
             <p:custDataLst>
@@ -13608,7 +13644,7 @@
       </p:sp>
       <p:sp>
         <p:nvSpPr>
-          <p:cNvPr id="194" name="Rounded Rectangle 193"/>
+          <p:cNvPr id="195" name="Rounded Rectangle 194"/>
           <p:cNvSpPr/>
           <p:nvPr/>
         </p:nvSpPr>
@@ -13661,7 +13697,7 @@
       </p:sp>
       <p:sp>
         <p:nvSpPr>
-          <p:cNvPr id="195" name="TextBox 194"/>
+          <p:cNvPr id="196" name="TextBox 195"/>
           <p:cNvSpPr txBox="1"/>
           <p:nvPr>
             <p:custDataLst>
@@ -13712,7 +13748,7 @@
       </p:sp>
       <p:sp>
         <p:nvSpPr>
-          <p:cNvPr id="196" name="TextBox 195"/>
+          <p:cNvPr id="197" name="TextBox 196"/>
           <p:cNvSpPr txBox="1"/>
           <p:nvPr>
             <p:custDataLst>
@@ -13763,7 +13799,7 @@
       </p:sp>
       <p:sp>
         <p:nvSpPr>
-          <p:cNvPr id="197" name="Rounded Rectangle 196"/>
+          <p:cNvPr id="198" name="Rounded Rectangle 197"/>
           <p:cNvSpPr/>
           <p:nvPr/>
         </p:nvSpPr>
@@ -13814,7 +13850,7 @@
       </p:sp>
       <p:sp>
         <p:nvSpPr>
-          <p:cNvPr id="198" name="TextBox 197"/>
+          <p:cNvPr id="199" name="TextBox 198"/>
           <p:cNvSpPr txBox="1"/>
           <p:nvPr>
             <p:custDataLst>
@@ -13865,7 +13901,7 @@
       </p:sp>
       <p:sp>
         <p:nvSpPr>
-          <p:cNvPr id="199" name="TextBox 198"/>
+          <p:cNvPr id="200" name="TextBox 199"/>
           <p:cNvSpPr txBox="1"/>
           <p:nvPr>
             <p:custDataLst>
@@ -13916,7 +13952,7 @@
       </p:sp>
       <p:sp>
         <p:nvSpPr>
-          <p:cNvPr id="200" name="TextBox 199"/>
+          <p:cNvPr id="201" name="TextBox 200"/>
           <p:cNvSpPr txBox="1"/>
           <p:nvPr>
             <p:custDataLst>
@@ -13991,7 +14027,7 @@
       </p:sp>
       <p:sp>
         <p:nvSpPr>
-          <p:cNvPr id="201" name="TextBox 200"/>
+          <p:cNvPr id="202" name="TextBox 201"/>
           <p:cNvSpPr txBox="1"/>
           <p:nvPr>
             <p:custDataLst>

--- a/deliverables/決賽海報_AI資安框架_A2.pptx
+++ b/deliverables/決賽海報_AI資安框架_A2.pptx
@@ -4134,8 +4134,8 @@
         </p:nvSpPr>
         <p:spPr>
           <a:xfrm>
-            <a:off x="864000" y="432000"/>
-            <a:ext cx="10800000" cy="288000"/>
+            <a:off x="832250" y="432000"/>
+            <a:ext cx="13392000" cy="288000"/>
           </a:xfrm>
           <a:prstGeom prst="rect">
             <a:avLst/>
@@ -4148,7 +4148,7 @@
           </a:bodyPr>
           <a:lstStyle/>
           <a:p>
-            <a:pPr algn="l">
+            <a:pPr algn="ctr">
               <a:lnSpc>
                 <a:spcPct val="110000"/>
               </a:lnSpc>
@@ -4185,7 +4185,7 @@
         </p:nvSpPr>
         <p:spPr>
           <a:xfrm>
-            <a:off x="864000" y="720000"/>
+            <a:off x="783037" y="720000"/>
             <a:ext cx="13392000" cy="2556000"/>
           </a:xfrm>
           <a:prstGeom prst="rect">
@@ -4199,7 +4199,7 @@
           </a:bodyPr>
           <a:lstStyle/>
           <a:p>
-            <a:pPr algn="l">
+            <a:pPr algn="ctr">
               <a:lnSpc>
                 <a:spcPct val="110000"/>
               </a:lnSpc>
@@ -4223,7 +4223,7 @@
             </a:r>
           </a:p>
           <a:p>
-            <a:pPr algn="l">
+            <a:pPr algn="ctr">
               <a:lnSpc>
                 <a:spcPct val="110000"/>
               </a:lnSpc>
@@ -4247,7 +4247,7 @@
             </a:r>
           </a:p>
           <a:p>
-            <a:pPr algn="l">
+            <a:pPr algn="ctr">
               <a:lnSpc>
                 <a:spcPct val="110000"/>
               </a:lnSpc>
@@ -4280,7 +4280,7 @@
         </p:nvSpPr>
         <p:spPr>
           <a:xfrm>
-            <a:off x="864000" y="3384000"/>
+            <a:off x="7128000" y="3384000"/>
             <a:ext cx="864000" cy="57600"/>
           </a:xfrm>
           <a:prstGeom prst="rect">
@@ -4333,7 +4333,7 @@
         </p:nvSpPr>
         <p:spPr>
           <a:xfrm>
-            <a:off x="864000" y="3492000"/>
+            <a:off x="816375" y="3492000"/>
             <a:ext cx="13392000" cy="396000"/>
           </a:xfrm>
           <a:prstGeom prst="rect">
@@ -4347,7 +4347,7 @@
           </a:bodyPr>
           <a:lstStyle/>
           <a:p>
-            <a:pPr algn="l">
+            <a:pPr algn="ctr">
               <a:lnSpc>
                 <a:spcPct val="110000"/>
               </a:lnSpc>
@@ -4384,7 +4384,7 @@
         </p:nvSpPr>
         <p:spPr>
           <a:xfrm>
-            <a:off x="864000" y="3924000"/>
+            <a:off x="833044" y="3924000"/>
             <a:ext cx="13392000" cy="288000"/>
           </a:xfrm>
           <a:prstGeom prst="rect">
@@ -4398,7 +4398,7 @@
           </a:bodyPr>
           <a:lstStyle/>
           <a:p>
-            <a:pPr algn="l">
+            <a:pPr algn="ctr">
               <a:lnSpc>
                 <a:spcPct val="110000"/>
               </a:lnSpc>
@@ -4519,7 +4519,7 @@
           <p:nvPr/>
         </p:nvPicPr>
         <p:blipFill>
-          <a:blip r:embed="rId101"/>
+          <a:blip r:embed="rId98"/>
           <a:stretch>
             <a:fillRect/>
           </a:stretch>
@@ -4645,7 +4645,7 @@
           <p:nvPr/>
         </p:nvPicPr>
         <p:blipFill>
-          <a:blip r:embed="rId102"/>
+          <a:blip r:embed="rId99"/>
           <a:stretch>
             <a:fillRect/>
           </a:stretch>
@@ -5032,7 +5032,7 @@
           <p:nvPr/>
         </p:nvPicPr>
         <p:blipFill>
-          <a:blip r:embed="rId103"/>
+          <a:blip r:embed="rId100"/>
           <a:stretch>
             <a:fillRect/>
           </a:stretch>
@@ -5110,8 +5110,8 @@
         </p:nvSpPr>
         <p:spPr>
           <a:xfrm>
-            <a:off x="864000" y="6030000"/>
-            <a:ext cx="576000" cy="468000"/>
+            <a:off x="818756" y="6030000"/>
+            <a:ext cx="13392000" cy="468000"/>
           </a:xfrm>
           <a:prstGeom prst="rect">
             <a:avLst/>
@@ -5124,7 +5124,7 @@
           </a:bodyPr>
           <a:lstStyle/>
           <a:p>
-            <a:pPr algn="l">
+            <a:pPr algn="ctr">
               <a:lnSpc>
                 <a:spcPct val="110000"/>
               </a:lnSpc>
@@ -5136,7 +5136,7 @@
               </a:spcAft>
             </a:pPr>
             <a:r>
-              <a:rPr sz="2200" b="1">
+              <a:rPr sz="2600" b="1">
                 <a:solidFill>
                   <a:srgbClr val="0F766E"/>
                 </a:solidFill>
@@ -5144,48 +5144,8 @@
                 <a:ea typeface="Microsoft JhengHei"/>
                 <a:cs typeface="Segoe UI"/>
               </a:rPr>
-              <a:t>01</a:t>
-            </a:r>
-          </a:p>
-        </p:txBody>
-      </p:sp>
-      <p:sp>
-        <p:nvSpPr>
-          <p:cNvPr id="26" name="TextBox 25"/>
-          <p:cNvSpPr txBox="1"/>
-          <p:nvPr>
-            <p:custDataLst>
-              <p:tags r:id="rId10"/>
-            </p:custDataLst>
-          </p:nvPr>
-        </p:nvSpPr>
-        <p:spPr>
-          <a:xfrm>
-            <a:off x="1476000" y="6030000"/>
-            <a:ext cx="10800000" cy="468000"/>
-          </a:xfrm>
-          <a:prstGeom prst="rect">
-            <a:avLst/>
-          </a:prstGeom>
-          <a:noFill/>
-        </p:spPr>
-        <p:txBody>
-          <a:bodyPr wrap="none" lIns="0" tIns="0" rIns="0" bIns="0" anchor="ctr">
-            <a:spAutoFit/>
-          </a:bodyPr>
-          <a:lstStyle/>
-          <a:p>
-            <a:pPr algn="l">
-              <a:lnSpc>
-                <a:spcPct val="110000"/>
-              </a:lnSpc>
-              <a:spcBef>
-                <a:spcPts val="0"/>
-              </a:spcBef>
-              <a:spcAft>
-                <a:spcPts val="0"/>
-              </a:spcAft>
-            </a:pPr>
+              <a:t>01　</a:t>
+            </a:r>
             <a:r>
               <a:rPr sz="2600" b="1">
                 <a:solidFill>
@@ -5202,7 +5162,7 @@
       </p:sp>
       <p:cxnSp>
         <p:nvCxnSpPr>
-          <p:cNvPr id="27" name="Connector 26"/>
+          <p:cNvPr id="26" name="Connector 25"/>
           <p:cNvCxnSpPr/>
           <p:nvPr/>
         </p:nvCxnSpPr>
@@ -5238,7 +5198,7 @@
       </p:cxnSp>
       <p:sp>
         <p:nvSpPr>
-          <p:cNvPr id="28" name="Rounded Rectangle 27"/>
+          <p:cNvPr id="27" name="Rounded Rectangle 26"/>
           <p:cNvSpPr/>
           <p:nvPr/>
         </p:nvSpPr>
@@ -5287,44 +5247,20 @@
           </a:p>
         </p:txBody>
       </p:sp>
-      <p:pic>
-        <p:nvPicPr>
-          <p:cNvPr id="29" name="Picture 28" descr="flat-icon-2.png"/>
-          <p:cNvPicPr>
-            <a:picLocks noChangeAspect="1"/>
-          </p:cNvPicPr>
-          <p:nvPr/>
-        </p:nvPicPr>
-        <p:blipFill>
-          <a:blip r:embed="rId101"/>
-          <a:stretch>
-            <a:fillRect/>
-          </a:stretch>
-        </p:blipFill>
-        <p:spPr>
-          <a:xfrm>
-            <a:off x="1044000" y="6912000"/>
-            <a:ext cx="468000" cy="468000"/>
-          </a:xfrm>
-          <a:prstGeom prst="rect">
-            <a:avLst/>
-          </a:prstGeom>
-        </p:spPr>
-      </p:pic>
-      <p:sp>
-        <p:nvSpPr>
-          <p:cNvPr id="30" name="TextBox 29"/>
+      <p:sp>
+        <p:nvSpPr>
+          <p:cNvPr id="28" name="TextBox 27"/>
           <p:cNvSpPr txBox="1"/>
           <p:nvPr>
             <p:custDataLst>
-              <p:tags r:id="rId11"/>
+              <p:tags r:id="rId10"/>
             </p:custDataLst>
           </p:nvPr>
         </p:nvSpPr>
         <p:spPr>
           <a:xfrm>
-            <a:off x="1656000" y="6876000"/>
-            <a:ext cx="2592000" cy="324000"/>
+            <a:off x="897106" y="6876000"/>
+            <a:ext cx="3456000" cy="324000"/>
           </a:xfrm>
           <a:prstGeom prst="rect">
             <a:avLst/>
@@ -5337,7 +5273,7 @@
           </a:bodyPr>
           <a:lstStyle/>
           <a:p>
-            <a:pPr algn="l">
+            <a:pPr algn="ctr">
               <a:lnSpc>
                 <a:spcPct val="110000"/>
               </a:lnSpc>
@@ -5351,31 +5287,42 @@
             <a:r>
               <a:rPr sz="2200" b="1">
                 <a:solidFill>
+                  <a:srgbClr val="0F766E"/>
+                </a:solidFill>
+                <a:latin typeface="Segoe UI"/>
+                <a:ea typeface="Microsoft JhengHei"/>
+                <a:cs typeface="Segoe UI"/>
+              </a:rPr>
+              <a:t>01 </a:t>
+            </a:r>
+            <a:r>
+              <a:rPr sz="2200" b="1">
+                <a:solidFill>
                   <a:srgbClr val="0B1B2E"/>
                 </a:solidFill>
                 <a:latin typeface="Segoe UI"/>
                 <a:ea typeface="Microsoft JhengHei"/>
                 <a:cs typeface="Segoe UI"/>
               </a:rPr>
-              <a:t>01  互補判定</a:t>
-            </a:r>
-          </a:p>
-        </p:txBody>
-      </p:sp>
-      <p:sp>
-        <p:nvSpPr>
-          <p:cNvPr id="31" name="TextBox 30"/>
+              <a:t>互補判定</a:t>
+            </a:r>
+          </a:p>
+        </p:txBody>
+      </p:sp>
+      <p:sp>
+        <p:nvSpPr>
+          <p:cNvPr id="29" name="TextBox 28"/>
           <p:cNvSpPr txBox="1"/>
           <p:nvPr>
             <p:custDataLst>
-              <p:tags r:id="rId12"/>
+              <p:tags r:id="rId11"/>
             </p:custDataLst>
           </p:nvPr>
         </p:nvSpPr>
         <p:spPr>
           <a:xfrm>
-            <a:off x="1656000" y="7200000"/>
-            <a:ext cx="2592000" cy="216000"/>
+            <a:off x="911394" y="7200000"/>
+            <a:ext cx="3456000" cy="216000"/>
           </a:xfrm>
           <a:prstGeom prst="rect">
             <a:avLst/>
@@ -5388,7 +5335,7 @@
           </a:bodyPr>
           <a:lstStyle/>
           <a:p>
-            <a:pPr algn="l">
+            <a:pPr algn="ctr">
               <a:lnSpc>
                 <a:spcPct val="110000"/>
               </a:lnSpc>
@@ -5415,18 +5362,18 @@
       </p:sp>
       <p:sp>
         <p:nvSpPr>
-          <p:cNvPr id="32" name="TextBox 31"/>
+          <p:cNvPr id="30" name="TextBox 29"/>
           <p:cNvSpPr txBox="1"/>
           <p:nvPr>
             <p:custDataLst>
-              <p:tags r:id="rId13"/>
+              <p:tags r:id="rId12"/>
             </p:custDataLst>
           </p:nvPr>
         </p:nvSpPr>
         <p:spPr>
           <a:xfrm>
-            <a:off x="1080000" y="7560000"/>
-            <a:ext cx="3240000" cy="540000"/>
+            <a:off x="909806" y="7524000"/>
+            <a:ext cx="3456000" cy="540000"/>
           </a:xfrm>
           <a:prstGeom prst="rect">
             <a:avLst/>
@@ -5439,7 +5386,7 @@
           </a:bodyPr>
           <a:lstStyle/>
           <a:p>
-            <a:pPr algn="l">
+            <a:pPr algn="ctr">
               <a:lnSpc>
                 <a:spcPct val="110000"/>
               </a:lnSpc>
@@ -5463,7 +5410,7 @@
             </a:r>
           </a:p>
           <a:p>
-            <a:pPr algn="l">
+            <a:pPr algn="ctr">
               <a:lnSpc>
                 <a:spcPct val="110000"/>
               </a:lnSpc>
@@ -5490,7 +5437,7 @@
       </p:sp>
       <p:sp>
         <p:nvSpPr>
-          <p:cNvPr id="33" name="Down Arrow 32"/>
+          <p:cNvPr id="31" name="Down Arrow 30"/>
           <p:cNvSpPr/>
           <p:nvPr/>
         </p:nvSpPr>
@@ -5539,7 +5486,7 @@
       </p:sp>
       <p:sp>
         <p:nvSpPr>
-          <p:cNvPr id="34" name="Rounded Rectangle 33"/>
+          <p:cNvPr id="32" name="Rounded Rectangle 31"/>
           <p:cNvSpPr/>
           <p:nvPr/>
         </p:nvSpPr>
@@ -5588,44 +5535,20 @@
           </a:p>
         </p:txBody>
       </p:sp>
-      <p:pic>
-        <p:nvPicPr>
-          <p:cNvPr id="35" name="Picture 34" descr="flat-icon-3.png"/>
-          <p:cNvPicPr>
-            <a:picLocks noChangeAspect="1"/>
-          </p:cNvPicPr>
-          <p:nvPr/>
-        </p:nvPicPr>
-        <p:blipFill>
-          <a:blip r:embed="rId102"/>
-          <a:stretch>
-            <a:fillRect/>
-          </a:stretch>
-        </p:blipFill>
-        <p:spPr>
-          <a:xfrm>
-            <a:off x="1044000" y="8604000"/>
-            <a:ext cx="468000" cy="468000"/>
-          </a:xfrm>
-          <a:prstGeom prst="rect">
-            <a:avLst/>
-          </a:prstGeom>
-        </p:spPr>
-      </p:pic>
-      <p:sp>
-        <p:nvSpPr>
-          <p:cNvPr id="36" name="TextBox 35"/>
+      <p:sp>
+        <p:nvSpPr>
+          <p:cNvPr id="33" name="TextBox 32"/>
           <p:cNvSpPr txBox="1"/>
           <p:nvPr>
             <p:custDataLst>
-              <p:tags r:id="rId14"/>
+              <p:tags r:id="rId13"/>
             </p:custDataLst>
           </p:nvPr>
         </p:nvSpPr>
         <p:spPr>
           <a:xfrm>
-            <a:off x="1656000" y="8568000"/>
-            <a:ext cx="2592000" cy="324000"/>
+            <a:off x="897106" y="8568000"/>
+            <a:ext cx="3456000" cy="324000"/>
           </a:xfrm>
           <a:prstGeom prst="rect">
             <a:avLst/>
@@ -5638,7 +5561,7 @@
           </a:bodyPr>
           <a:lstStyle/>
           <a:p>
-            <a:pPr algn="l">
+            <a:pPr algn="ctr">
               <a:lnSpc>
                 <a:spcPct val="110000"/>
               </a:lnSpc>
@@ -5652,31 +5575,42 @@
             <a:r>
               <a:rPr sz="2200" b="1">
                 <a:solidFill>
+                  <a:srgbClr val="0F766E"/>
+                </a:solidFill>
+                <a:latin typeface="Segoe UI"/>
+                <a:ea typeface="Microsoft JhengHei"/>
+                <a:cs typeface="Segoe UI"/>
+              </a:rPr>
+              <a:t>02 </a:t>
+            </a:r>
+            <a:r>
+              <a:rPr sz="2200" b="1">
+                <a:solidFill>
                   <a:srgbClr val="0B1B2E"/>
                 </a:solidFill>
                 <a:latin typeface="Segoe UI"/>
                 <a:ea typeface="Microsoft JhengHei"/>
                 <a:cs typeface="Segoe UI"/>
               </a:rPr>
-              <a:t>02  任務檢索</a:t>
-            </a:r>
-          </a:p>
-        </p:txBody>
-      </p:sp>
-      <p:sp>
-        <p:nvSpPr>
-          <p:cNvPr id="37" name="TextBox 36"/>
+              <a:t>任務檢索</a:t>
+            </a:r>
+          </a:p>
+        </p:txBody>
+      </p:sp>
+      <p:sp>
+        <p:nvSpPr>
+          <p:cNvPr id="34" name="TextBox 33"/>
           <p:cNvSpPr txBox="1"/>
           <p:nvPr>
             <p:custDataLst>
-              <p:tags r:id="rId15"/>
+              <p:tags r:id="rId14"/>
             </p:custDataLst>
           </p:nvPr>
         </p:nvSpPr>
         <p:spPr>
           <a:xfrm>
-            <a:off x="1656000" y="8892000"/>
-            <a:ext cx="2592000" cy="216000"/>
+            <a:off x="911394" y="8892000"/>
+            <a:ext cx="3456000" cy="216000"/>
           </a:xfrm>
           <a:prstGeom prst="rect">
             <a:avLst/>
@@ -5689,7 +5623,7 @@
           </a:bodyPr>
           <a:lstStyle/>
           <a:p>
-            <a:pPr algn="l">
+            <a:pPr algn="ctr">
               <a:lnSpc>
                 <a:spcPct val="110000"/>
               </a:lnSpc>
@@ -5716,18 +5650,18 @@
       </p:sp>
       <p:sp>
         <p:nvSpPr>
-          <p:cNvPr id="38" name="TextBox 37"/>
+          <p:cNvPr id="35" name="TextBox 34"/>
           <p:cNvSpPr txBox="1"/>
           <p:nvPr>
             <p:custDataLst>
-              <p:tags r:id="rId16"/>
+              <p:tags r:id="rId15"/>
             </p:custDataLst>
           </p:nvPr>
         </p:nvSpPr>
         <p:spPr>
           <a:xfrm>
-            <a:off x="1080000" y="9252000"/>
-            <a:ext cx="3240000" cy="540000"/>
+            <a:off x="909806" y="9216000"/>
+            <a:ext cx="3456000" cy="540000"/>
           </a:xfrm>
           <a:prstGeom prst="rect">
             <a:avLst/>
@@ -5740,7 +5674,7 @@
           </a:bodyPr>
           <a:lstStyle/>
           <a:p>
-            <a:pPr algn="l">
+            <a:pPr algn="ctr">
               <a:lnSpc>
                 <a:spcPct val="110000"/>
               </a:lnSpc>
@@ -5764,7 +5698,7 @@
             </a:r>
           </a:p>
           <a:p>
-            <a:pPr algn="l">
+            <a:pPr algn="ctr">
               <a:lnSpc>
                 <a:spcPct val="110000"/>
               </a:lnSpc>
@@ -5791,7 +5725,7 @@
       </p:sp>
       <p:sp>
         <p:nvSpPr>
-          <p:cNvPr id="39" name="Down Arrow 38"/>
+          <p:cNvPr id="36" name="Down Arrow 35"/>
           <p:cNvSpPr/>
           <p:nvPr/>
         </p:nvSpPr>
@@ -5840,7 +5774,7 @@
       </p:sp>
       <p:sp>
         <p:nvSpPr>
-          <p:cNvPr id="40" name="Rounded Rectangle 39"/>
+          <p:cNvPr id="37" name="Rounded Rectangle 36"/>
           <p:cNvSpPr/>
           <p:nvPr/>
         </p:nvSpPr>
@@ -5891,177 +5825,18 @@
       </p:sp>
       <p:sp>
         <p:nvSpPr>
-          <p:cNvPr id="41" name="Rectangle 40"/>
-          <p:cNvSpPr/>
-          <p:nvPr/>
-        </p:nvSpPr>
-        <p:spPr>
-          <a:xfrm>
-            <a:off x="1116000" y="10332000"/>
-            <a:ext cx="324000" cy="432000"/>
-          </a:xfrm>
-          <a:prstGeom prst="rect">
-            <a:avLst/>
-          </a:prstGeom>
-          <a:solidFill>
-            <a:srgbClr val="FFFFFF"/>
-          </a:solidFill>
-          <a:ln w="10160">
-            <a:solidFill>
-              <a:srgbClr val="1D4ED8"/>
-            </a:solidFill>
-          </a:ln>
-          <a:effectLst/>
-        </p:spPr>
-        <p:style>
-          <a:lnRef idx="1">
-            <a:schemeClr val="accent1"/>
-          </a:lnRef>
-          <a:fillRef idx="3">
-            <a:schemeClr val="accent1"/>
-          </a:fillRef>
-          <a:effectRef idx="2">
-            <a:schemeClr val="accent1"/>
-          </a:effectRef>
-          <a:fontRef idx="minor">
-            <a:schemeClr val="lt1"/>
-          </a:fontRef>
-        </p:style>
-        <p:txBody>
-          <a:bodyPr rtlCol="0" anchor="ctr"/>
-          <a:lstStyle/>
-          <a:p>
-            <a:pPr algn="ctr"/>
-            <a:endParaRPr>
-              <a:latin typeface="Segoe UI"/>
-              <a:ea typeface="Microsoft JhengHei"/>
-              <a:cs typeface="Segoe UI"/>
-            </a:endParaRPr>
-          </a:p>
-        </p:txBody>
-      </p:sp>
-      <p:cxnSp>
-        <p:nvCxnSpPr>
-          <p:cNvPr id="42" name="Connector 41"/>
-          <p:cNvCxnSpPr/>
-          <p:nvPr/>
-        </p:nvCxnSpPr>
-        <p:spPr>
-          <a:xfrm>
-            <a:off x="1187280" y="10440000"/>
-            <a:ext cx="181440" cy="0"/>
-          </a:xfrm>
-          <a:prstGeom prst="line">
-            <a:avLst/>
-          </a:prstGeom>
-          <a:ln w="10160">
-            <a:solidFill>
-              <a:srgbClr val="1D4ED8"/>
-            </a:solidFill>
-          </a:ln>
-          <a:effectLst/>
-        </p:spPr>
-        <p:style>
-          <a:lnRef idx="2">
-            <a:schemeClr val="accent1"/>
-          </a:lnRef>
-          <a:fillRef idx="0">
-            <a:schemeClr val="accent1"/>
-          </a:fillRef>
-          <a:effectRef idx="1">
-            <a:schemeClr val="accent1"/>
-          </a:effectRef>
-          <a:fontRef idx="minor">
-            <a:schemeClr val="tx1"/>
-          </a:fontRef>
-        </p:style>
-      </p:cxnSp>
-      <p:cxnSp>
-        <p:nvCxnSpPr>
-          <p:cNvPr id="43" name="Connector 42"/>
-          <p:cNvCxnSpPr/>
-          <p:nvPr/>
-        </p:nvCxnSpPr>
-        <p:spPr>
-          <a:xfrm>
-            <a:off x="1187280" y="10548000"/>
-            <a:ext cx="181440" cy="0"/>
-          </a:xfrm>
-          <a:prstGeom prst="line">
-            <a:avLst/>
-          </a:prstGeom>
-          <a:ln w="10160">
-            <a:solidFill>
-              <a:srgbClr val="1D4ED8"/>
-            </a:solidFill>
-          </a:ln>
-          <a:effectLst/>
-        </p:spPr>
-        <p:style>
-          <a:lnRef idx="2">
-            <a:schemeClr val="accent1"/>
-          </a:lnRef>
-          <a:fillRef idx="0">
-            <a:schemeClr val="accent1"/>
-          </a:fillRef>
-          <a:effectRef idx="1">
-            <a:schemeClr val="accent1"/>
-          </a:effectRef>
-          <a:fontRef idx="minor">
-            <a:schemeClr val="tx1"/>
-          </a:fontRef>
-        </p:style>
-      </p:cxnSp>
-      <p:cxnSp>
-        <p:nvCxnSpPr>
-          <p:cNvPr id="44" name="Connector 43"/>
-          <p:cNvCxnSpPr/>
-          <p:nvPr/>
-        </p:nvCxnSpPr>
-        <p:spPr>
-          <a:xfrm>
-            <a:off x="1187280" y="10656000"/>
-            <a:ext cx="181440" cy="0"/>
-          </a:xfrm>
-          <a:prstGeom prst="line">
-            <a:avLst/>
-          </a:prstGeom>
-          <a:ln w="10160">
-            <a:solidFill>
-              <a:srgbClr val="1D4ED8"/>
-            </a:solidFill>
-          </a:ln>
-          <a:effectLst/>
-        </p:spPr>
-        <p:style>
-          <a:lnRef idx="2">
-            <a:schemeClr val="accent1"/>
-          </a:lnRef>
-          <a:fillRef idx="0">
-            <a:schemeClr val="accent1"/>
-          </a:fillRef>
-          <a:effectRef idx="1">
-            <a:schemeClr val="accent1"/>
-          </a:effectRef>
-          <a:fontRef idx="minor">
-            <a:schemeClr val="tx1"/>
-          </a:fontRef>
-        </p:style>
-      </p:cxnSp>
-      <p:sp>
-        <p:nvSpPr>
-          <p:cNvPr id="45" name="TextBox 44"/>
+          <p:cNvPr id="38" name="TextBox 37"/>
           <p:cNvSpPr txBox="1"/>
           <p:nvPr>
             <p:custDataLst>
-              <p:tags r:id="rId17"/>
+              <p:tags r:id="rId16"/>
             </p:custDataLst>
           </p:nvPr>
         </p:nvSpPr>
         <p:spPr>
           <a:xfrm>
-            <a:off x="1656000" y="10260000"/>
-            <a:ext cx="2592000" cy="324000"/>
+            <a:off x="897106" y="10260000"/>
+            <a:ext cx="3456000" cy="324000"/>
           </a:xfrm>
           <a:prstGeom prst="rect">
             <a:avLst/>
@@ -6074,7 +5849,7 @@
           </a:bodyPr>
           <a:lstStyle/>
           <a:p>
-            <a:pPr algn="l">
+            <a:pPr algn="ctr">
               <a:lnSpc>
                 <a:spcPct val="110000"/>
               </a:lnSpc>
@@ -6088,31 +5863,42 @@
             <a:r>
               <a:rPr sz="2200" b="1">
                 <a:solidFill>
+                  <a:srgbClr val="0F766E"/>
+                </a:solidFill>
+                <a:latin typeface="Segoe UI"/>
+                <a:ea typeface="Microsoft JhengHei"/>
+                <a:cs typeface="Segoe UI"/>
+              </a:rPr>
+              <a:t>03 </a:t>
+            </a:r>
+            <a:r>
+              <a:rPr sz="2200" b="1">
+                <a:solidFill>
                   <a:srgbClr val="0B1B2E"/>
                 </a:solidFill>
                 <a:latin typeface="Segoe UI"/>
                 <a:ea typeface="Microsoft JhengHei"/>
                 <a:cs typeface="Segoe UI"/>
               </a:rPr>
-              <a:t>03  證據稽核</a:t>
-            </a:r>
-          </a:p>
-        </p:txBody>
-      </p:sp>
-      <p:sp>
-        <p:nvSpPr>
-          <p:cNvPr id="46" name="TextBox 45"/>
+              <a:t>證據稽核</a:t>
+            </a:r>
+          </a:p>
+        </p:txBody>
+      </p:sp>
+      <p:sp>
+        <p:nvSpPr>
+          <p:cNvPr id="39" name="TextBox 38"/>
           <p:cNvSpPr txBox="1"/>
           <p:nvPr>
             <p:custDataLst>
-              <p:tags r:id="rId18"/>
+              <p:tags r:id="rId17"/>
             </p:custDataLst>
           </p:nvPr>
         </p:nvSpPr>
         <p:spPr>
           <a:xfrm>
-            <a:off x="1656000" y="10584000"/>
-            <a:ext cx="2592000" cy="216000"/>
+            <a:off x="911394" y="10584000"/>
+            <a:ext cx="3456000" cy="216000"/>
           </a:xfrm>
           <a:prstGeom prst="rect">
             <a:avLst/>
@@ -6125,7 +5911,7 @@
           </a:bodyPr>
           <a:lstStyle/>
           <a:p>
-            <a:pPr algn="l">
+            <a:pPr algn="ctr">
               <a:lnSpc>
                 <a:spcPct val="110000"/>
               </a:lnSpc>
@@ -6152,18 +5938,18 @@
       </p:sp>
       <p:sp>
         <p:nvSpPr>
-          <p:cNvPr id="47" name="TextBox 46"/>
+          <p:cNvPr id="40" name="TextBox 39"/>
           <p:cNvSpPr txBox="1"/>
           <p:nvPr>
             <p:custDataLst>
-              <p:tags r:id="rId19"/>
+              <p:tags r:id="rId18"/>
             </p:custDataLst>
           </p:nvPr>
         </p:nvSpPr>
         <p:spPr>
           <a:xfrm>
-            <a:off x="1080000" y="10944000"/>
-            <a:ext cx="3240000" cy="540000"/>
+            <a:off x="909806" y="10908000"/>
+            <a:ext cx="3456000" cy="540000"/>
           </a:xfrm>
           <a:prstGeom prst="rect">
             <a:avLst/>
@@ -6176,7 +5962,7 @@
           </a:bodyPr>
           <a:lstStyle/>
           <a:p>
-            <a:pPr algn="l">
+            <a:pPr algn="ctr">
               <a:lnSpc>
                 <a:spcPct val="110000"/>
               </a:lnSpc>
@@ -6200,7 +5986,7 @@
             </a:r>
           </a:p>
           <a:p>
-            <a:pPr algn="l">
+            <a:pPr algn="ctr">
               <a:lnSpc>
                 <a:spcPct val="110000"/>
               </a:lnSpc>
@@ -6227,7 +6013,7 @@
       </p:sp>
       <p:sp>
         <p:nvSpPr>
-          <p:cNvPr id="48" name="Down Arrow 47"/>
+          <p:cNvPr id="41" name="Down Arrow 40"/>
           <p:cNvSpPr/>
           <p:nvPr/>
         </p:nvSpPr>
@@ -6276,7 +6062,7 @@
       </p:sp>
       <p:sp>
         <p:nvSpPr>
-          <p:cNvPr id="49" name="Rounded Rectangle 48"/>
+          <p:cNvPr id="42" name="Rounded Rectangle 41"/>
           <p:cNvSpPr/>
           <p:nvPr/>
         </p:nvSpPr>
@@ -6325,44 +6111,20 @@
           </a:p>
         </p:txBody>
       </p:sp>
-      <p:pic>
-        <p:nvPicPr>
-          <p:cNvPr id="50" name="Picture 49" descr="flat-icon-4.png"/>
-          <p:cNvPicPr>
-            <a:picLocks noChangeAspect="1"/>
-          </p:cNvPicPr>
-          <p:nvPr/>
-        </p:nvPicPr>
-        <p:blipFill>
-          <a:blip r:embed="rId103"/>
-          <a:stretch>
-            <a:fillRect/>
-          </a:stretch>
-        </p:blipFill>
-        <p:spPr>
-          <a:xfrm>
-            <a:off x="1044000" y="11988000"/>
-            <a:ext cx="468000" cy="468000"/>
-          </a:xfrm>
-          <a:prstGeom prst="rect">
-            <a:avLst/>
-          </a:prstGeom>
-        </p:spPr>
-      </p:pic>
-      <p:sp>
-        <p:nvSpPr>
-          <p:cNvPr id="51" name="TextBox 50"/>
+      <p:sp>
+        <p:nvSpPr>
+          <p:cNvPr id="43" name="TextBox 42"/>
           <p:cNvSpPr txBox="1"/>
           <p:nvPr>
             <p:custDataLst>
-              <p:tags r:id="rId20"/>
+              <p:tags r:id="rId19"/>
             </p:custDataLst>
           </p:nvPr>
         </p:nvSpPr>
         <p:spPr>
           <a:xfrm>
-            <a:off x="1656000" y="11952000"/>
-            <a:ext cx="2592000" cy="324000"/>
+            <a:off x="897106" y="11952000"/>
+            <a:ext cx="3456000" cy="324000"/>
           </a:xfrm>
           <a:prstGeom prst="rect">
             <a:avLst/>
@@ -6375,7 +6137,7 @@
           </a:bodyPr>
           <a:lstStyle/>
           <a:p>
-            <a:pPr algn="l">
+            <a:pPr algn="ctr">
               <a:lnSpc>
                 <a:spcPct val="110000"/>
               </a:lnSpc>
@@ -6389,31 +6151,42 @@
             <a:r>
               <a:rPr sz="2200" b="1">
                 <a:solidFill>
+                  <a:srgbClr val="0F766E"/>
+                </a:solidFill>
+                <a:latin typeface="Segoe UI"/>
+                <a:ea typeface="Microsoft JhengHei"/>
+                <a:cs typeface="Segoe UI"/>
+              </a:rPr>
+              <a:t>04 </a:t>
+            </a:r>
+            <a:r>
+              <a:rPr sz="2200" b="1">
+                <a:solidFill>
                   <a:srgbClr val="0B1B2E"/>
                 </a:solidFill>
                 <a:latin typeface="Segoe UI"/>
                 <a:ea typeface="Microsoft JhengHei"/>
                 <a:cs typeface="Segoe UI"/>
               </a:rPr>
-              <a:t>04  受控回復</a:t>
-            </a:r>
-          </a:p>
-        </p:txBody>
-      </p:sp>
-      <p:sp>
-        <p:nvSpPr>
-          <p:cNvPr id="52" name="TextBox 51"/>
+              <a:t>受控回復</a:t>
+            </a:r>
+          </a:p>
+        </p:txBody>
+      </p:sp>
+      <p:sp>
+        <p:nvSpPr>
+          <p:cNvPr id="44" name="TextBox 43"/>
           <p:cNvSpPr txBox="1"/>
           <p:nvPr>
             <p:custDataLst>
-              <p:tags r:id="rId21"/>
+              <p:tags r:id="rId20"/>
             </p:custDataLst>
           </p:nvPr>
         </p:nvSpPr>
         <p:spPr>
           <a:xfrm>
-            <a:off x="1656000" y="12276000"/>
-            <a:ext cx="2592000" cy="216000"/>
+            <a:off x="911394" y="12276000"/>
+            <a:ext cx="3456000" cy="216000"/>
           </a:xfrm>
           <a:prstGeom prst="rect">
             <a:avLst/>
@@ -6426,7 +6199,7 @@
           </a:bodyPr>
           <a:lstStyle/>
           <a:p>
-            <a:pPr algn="l">
+            <a:pPr algn="ctr">
               <a:lnSpc>
                 <a:spcPct val="110000"/>
               </a:lnSpc>
@@ -6453,18 +6226,18 @@
       </p:sp>
       <p:sp>
         <p:nvSpPr>
-          <p:cNvPr id="53" name="TextBox 52"/>
+          <p:cNvPr id="45" name="TextBox 44"/>
           <p:cNvSpPr txBox="1"/>
           <p:nvPr>
             <p:custDataLst>
-              <p:tags r:id="rId22"/>
+              <p:tags r:id="rId21"/>
             </p:custDataLst>
           </p:nvPr>
         </p:nvSpPr>
         <p:spPr>
           <a:xfrm>
-            <a:off x="1080000" y="12636000"/>
-            <a:ext cx="3240000" cy="540000"/>
+            <a:off x="909806" y="12600000"/>
+            <a:ext cx="3456000" cy="540000"/>
           </a:xfrm>
           <a:prstGeom prst="rect">
             <a:avLst/>
@@ -6477,7 +6250,7 @@
           </a:bodyPr>
           <a:lstStyle/>
           <a:p>
-            <a:pPr algn="l">
+            <a:pPr algn="ctr">
               <a:lnSpc>
                 <a:spcPct val="110000"/>
               </a:lnSpc>
@@ -6501,7 +6274,7 @@
             </a:r>
           </a:p>
           <a:p>
-            <a:pPr algn="l">
+            <a:pPr algn="ctr">
               <a:lnSpc>
                 <a:spcPct val="110000"/>
               </a:lnSpc>
@@ -6528,7 +6301,7 @@
       </p:sp>
       <p:sp>
         <p:nvSpPr>
-          <p:cNvPr id="54" name="Rounded Rectangle 53"/>
+          <p:cNvPr id="46" name="Rounded Rectangle 45"/>
           <p:cNvSpPr/>
           <p:nvPr/>
         </p:nvSpPr>
@@ -6581,11 +6354,11 @@
       </p:sp>
       <p:sp>
         <p:nvSpPr>
-          <p:cNvPr id="55" name="TextBox 54"/>
+          <p:cNvPr id="47" name="TextBox 46"/>
           <p:cNvSpPr txBox="1"/>
           <p:nvPr>
             <p:custDataLst>
-              <p:tags r:id="rId23"/>
+              <p:tags r:id="rId22"/>
             </p:custDataLst>
           </p:nvPr>
         </p:nvSpPr>
@@ -6632,11 +6405,11 @@
       </p:sp>
       <p:sp>
         <p:nvSpPr>
-          <p:cNvPr id="56" name="TextBox 55"/>
+          <p:cNvPr id="48" name="TextBox 47"/>
           <p:cNvSpPr txBox="1"/>
           <p:nvPr>
             <p:custDataLst>
-              <p:tags r:id="rId24"/>
+              <p:tags r:id="rId23"/>
             </p:custDataLst>
           </p:nvPr>
         </p:nvSpPr>
@@ -6683,7 +6456,7 @@
       </p:sp>
       <p:sp>
         <p:nvSpPr>
-          <p:cNvPr id="57" name="Rounded Rectangle 56"/>
+          <p:cNvPr id="49" name="Rounded Rectangle 48"/>
           <p:cNvSpPr/>
           <p:nvPr/>
         </p:nvSpPr>
@@ -6736,11 +6509,11 @@
       </p:sp>
       <p:sp>
         <p:nvSpPr>
-          <p:cNvPr id="58" name="TextBox 57"/>
+          <p:cNvPr id="50" name="TextBox 49"/>
           <p:cNvSpPr txBox="1"/>
           <p:nvPr>
             <p:custDataLst>
-              <p:tags r:id="rId25"/>
+              <p:tags r:id="rId24"/>
             </p:custDataLst>
           </p:nvPr>
         </p:nvSpPr>
@@ -6787,11 +6560,11 @@
       </p:sp>
       <p:sp>
         <p:nvSpPr>
-          <p:cNvPr id="59" name="TextBox 58"/>
+          <p:cNvPr id="51" name="TextBox 50"/>
           <p:cNvSpPr txBox="1"/>
           <p:nvPr>
             <p:custDataLst>
-              <p:tags r:id="rId26"/>
+              <p:tags r:id="rId25"/>
             </p:custDataLst>
           </p:nvPr>
         </p:nvSpPr>
@@ -6838,7 +6611,7 @@
       </p:sp>
       <p:cxnSp>
         <p:nvCxnSpPr>
-          <p:cNvPr id="60" name="Connector 59"/>
+          <p:cNvPr id="52" name="Connector 51"/>
           <p:cNvCxnSpPr/>
           <p:nvPr/>
         </p:nvCxnSpPr>
@@ -6874,7 +6647,7 @@
       </p:cxnSp>
       <p:cxnSp>
         <p:nvCxnSpPr>
-          <p:cNvPr id="61" name="Connector 60"/>
+          <p:cNvPr id="53" name="Connector 52"/>
           <p:cNvCxnSpPr/>
           <p:nvPr/>
         </p:nvCxnSpPr>
@@ -6910,7 +6683,7 @@
       </p:cxnSp>
       <p:cxnSp>
         <p:nvCxnSpPr>
-          <p:cNvPr id="62" name="Connector 61"/>
+          <p:cNvPr id="54" name="Connector 53"/>
           <p:cNvCxnSpPr/>
           <p:nvPr/>
         </p:nvCxnSpPr>
@@ -6946,7 +6719,7 @@
       </p:cxnSp>
       <p:sp>
         <p:nvSpPr>
-          <p:cNvPr id="63" name="Right Arrow 62"/>
+          <p:cNvPr id="55" name="Right Arrow 54"/>
           <p:cNvSpPr/>
           <p:nvPr/>
         </p:nvSpPr>
@@ -6995,7 +6768,7 @@
       </p:sp>
       <p:sp>
         <p:nvSpPr>
-          <p:cNvPr id="64" name="Rounded Rectangle 63"/>
+          <p:cNvPr id="56" name="Rounded Rectangle 55"/>
           <p:cNvSpPr/>
           <p:nvPr/>
         </p:nvSpPr>
@@ -7046,11 +6819,11 @@
       </p:sp>
       <p:sp>
         <p:nvSpPr>
-          <p:cNvPr id="65" name="TextBox 64"/>
+          <p:cNvPr id="57" name="TextBox 56"/>
           <p:cNvSpPr txBox="1"/>
           <p:nvPr>
             <p:custDataLst>
-              <p:tags r:id="rId27"/>
+              <p:tags r:id="rId26"/>
             </p:custDataLst>
           </p:nvPr>
         </p:nvSpPr>
@@ -7097,11 +6870,11 @@
       </p:sp>
       <p:sp>
         <p:nvSpPr>
-          <p:cNvPr id="66" name="TextBox 65"/>
+          <p:cNvPr id="58" name="TextBox 57"/>
           <p:cNvSpPr txBox="1"/>
           <p:nvPr>
             <p:custDataLst>
-              <p:tags r:id="rId28"/>
+              <p:tags r:id="rId27"/>
             </p:custDataLst>
           </p:nvPr>
         </p:nvSpPr>
@@ -7148,7 +6921,7 @@
       </p:sp>
       <p:sp>
         <p:nvSpPr>
-          <p:cNvPr id="67" name="Right Arrow 66"/>
+          <p:cNvPr id="59" name="Right Arrow 58"/>
           <p:cNvSpPr/>
           <p:nvPr/>
         </p:nvSpPr>
@@ -7197,7 +6970,7 @@
       </p:sp>
       <p:sp>
         <p:nvSpPr>
-          <p:cNvPr id="68" name="Rounded Rectangle 67"/>
+          <p:cNvPr id="60" name="Rounded Rectangle 59"/>
           <p:cNvSpPr/>
           <p:nvPr/>
         </p:nvSpPr>
@@ -7248,11 +7021,11 @@
       </p:sp>
       <p:sp>
         <p:nvSpPr>
-          <p:cNvPr id="69" name="TextBox 68"/>
+          <p:cNvPr id="61" name="TextBox 60"/>
           <p:cNvSpPr txBox="1"/>
           <p:nvPr>
             <p:custDataLst>
-              <p:tags r:id="rId29"/>
+              <p:tags r:id="rId28"/>
             </p:custDataLst>
           </p:nvPr>
         </p:nvSpPr>
@@ -7299,11 +7072,11 @@
       </p:sp>
       <p:sp>
         <p:nvSpPr>
-          <p:cNvPr id="70" name="TextBox 69"/>
+          <p:cNvPr id="62" name="TextBox 61"/>
           <p:cNvSpPr txBox="1"/>
           <p:nvPr>
             <p:custDataLst>
-              <p:tags r:id="rId30"/>
+              <p:tags r:id="rId29"/>
             </p:custDataLst>
           </p:nvPr>
         </p:nvSpPr>
@@ -7350,7 +7123,7 @@
       </p:sp>
       <p:sp>
         <p:nvSpPr>
-          <p:cNvPr id="71" name="Rounded Rectangle 70"/>
+          <p:cNvPr id="63" name="Rounded Rectangle 62"/>
           <p:cNvSpPr/>
           <p:nvPr/>
         </p:nvSpPr>
@@ -7403,11 +7176,11 @@
       </p:sp>
       <p:sp>
         <p:nvSpPr>
-          <p:cNvPr id="72" name="TextBox 71"/>
+          <p:cNvPr id="64" name="TextBox 63"/>
           <p:cNvSpPr txBox="1"/>
           <p:nvPr>
             <p:custDataLst>
-              <p:tags r:id="rId31"/>
+              <p:tags r:id="rId30"/>
             </p:custDataLst>
           </p:nvPr>
         </p:nvSpPr>
@@ -7454,7 +7227,7 @@
       </p:sp>
       <p:sp>
         <p:nvSpPr>
-          <p:cNvPr id="73" name="Rounded Rectangle 72"/>
+          <p:cNvPr id="65" name="Rounded Rectangle 64"/>
           <p:cNvSpPr/>
           <p:nvPr/>
         </p:nvSpPr>
@@ -7507,11 +7280,11 @@
       </p:sp>
       <p:sp>
         <p:nvSpPr>
-          <p:cNvPr id="74" name="TextBox 73"/>
+          <p:cNvPr id="66" name="TextBox 65"/>
           <p:cNvSpPr txBox="1"/>
           <p:nvPr>
             <p:custDataLst>
-              <p:tags r:id="rId32"/>
+              <p:tags r:id="rId31"/>
             </p:custDataLst>
           </p:nvPr>
         </p:nvSpPr>
@@ -7558,7 +7331,7 @@
       </p:sp>
       <p:cxnSp>
         <p:nvCxnSpPr>
-          <p:cNvPr id="75" name="Connector 74"/>
+          <p:cNvPr id="67" name="Connector 66"/>
           <p:cNvCxnSpPr/>
           <p:nvPr/>
         </p:nvCxnSpPr>
@@ -7594,7 +7367,7 @@
       </p:cxnSp>
       <p:cxnSp>
         <p:nvCxnSpPr>
-          <p:cNvPr id="76" name="Connector 75"/>
+          <p:cNvPr id="68" name="Connector 67"/>
           <p:cNvCxnSpPr/>
           <p:nvPr/>
         </p:nvCxnSpPr>
@@ -7630,7 +7403,7 @@
       </p:cxnSp>
       <p:cxnSp>
         <p:nvCxnSpPr>
-          <p:cNvPr id="77" name="Connector 76"/>
+          <p:cNvPr id="69" name="Connector 68"/>
           <p:cNvCxnSpPr/>
           <p:nvPr/>
         </p:nvCxnSpPr>
@@ -7666,7 +7439,7 @@
       </p:cxnSp>
       <p:sp>
         <p:nvSpPr>
-          <p:cNvPr id="78" name="Right Arrow 77"/>
+          <p:cNvPr id="70" name="Right Arrow 69"/>
           <p:cNvSpPr/>
           <p:nvPr/>
         </p:nvSpPr>
@@ -7715,7 +7488,7 @@
       </p:sp>
       <p:sp>
         <p:nvSpPr>
-          <p:cNvPr id="79" name="Rounded Rectangle 78"/>
+          <p:cNvPr id="71" name="Rounded Rectangle 70"/>
           <p:cNvSpPr/>
           <p:nvPr/>
         </p:nvSpPr>
@@ -7766,11 +7539,11 @@
       </p:sp>
       <p:sp>
         <p:nvSpPr>
-          <p:cNvPr id="80" name="TextBox 79"/>
+          <p:cNvPr id="72" name="TextBox 71"/>
           <p:cNvSpPr txBox="1"/>
           <p:nvPr>
             <p:custDataLst>
-              <p:tags r:id="rId33"/>
+              <p:tags r:id="rId32"/>
             </p:custDataLst>
           </p:nvPr>
         </p:nvSpPr>
@@ -7817,11 +7590,11 @@
       </p:sp>
       <p:sp>
         <p:nvSpPr>
-          <p:cNvPr id="81" name="TextBox 80"/>
+          <p:cNvPr id="73" name="TextBox 72"/>
           <p:cNvSpPr txBox="1"/>
           <p:nvPr>
             <p:custDataLst>
-              <p:tags r:id="rId34"/>
+              <p:tags r:id="rId33"/>
             </p:custDataLst>
           </p:nvPr>
         </p:nvSpPr>
@@ -7868,7 +7641,7 @@
       </p:sp>
       <p:sp>
         <p:nvSpPr>
-          <p:cNvPr id="82" name="Right Arrow 81"/>
+          <p:cNvPr id="74" name="Right Arrow 73"/>
           <p:cNvSpPr/>
           <p:nvPr/>
         </p:nvSpPr>
@@ -7917,7 +7690,7 @@
       </p:sp>
       <p:sp>
         <p:nvSpPr>
-          <p:cNvPr id="83" name="Rounded Rectangle 82"/>
+          <p:cNvPr id="75" name="Rounded Rectangle 74"/>
           <p:cNvSpPr/>
           <p:nvPr/>
         </p:nvSpPr>
@@ -7968,11 +7741,11 @@
       </p:sp>
       <p:sp>
         <p:nvSpPr>
-          <p:cNvPr id="84" name="TextBox 83"/>
+          <p:cNvPr id="76" name="TextBox 75"/>
           <p:cNvSpPr txBox="1"/>
           <p:nvPr>
             <p:custDataLst>
-              <p:tags r:id="rId35"/>
+              <p:tags r:id="rId34"/>
             </p:custDataLst>
           </p:nvPr>
         </p:nvSpPr>
@@ -8019,7 +7792,7 @@
       </p:sp>
       <p:sp>
         <p:nvSpPr>
-          <p:cNvPr id="85" name="Rounded Rectangle 84"/>
+          <p:cNvPr id="77" name="Rounded Rectangle 76"/>
           <p:cNvSpPr/>
           <p:nvPr/>
         </p:nvSpPr>
@@ -8070,11 +7843,11 @@
       </p:sp>
       <p:sp>
         <p:nvSpPr>
-          <p:cNvPr id="86" name="TextBox 85"/>
+          <p:cNvPr id="78" name="TextBox 77"/>
           <p:cNvSpPr txBox="1"/>
           <p:nvPr>
             <p:custDataLst>
-              <p:tags r:id="rId36"/>
+              <p:tags r:id="rId35"/>
             </p:custDataLst>
           </p:nvPr>
         </p:nvSpPr>
@@ -8121,7 +7894,7 @@
       </p:sp>
       <p:sp>
         <p:nvSpPr>
-          <p:cNvPr id="87" name="Rounded Rectangle 86"/>
+          <p:cNvPr id="79" name="Rounded Rectangle 78"/>
           <p:cNvSpPr/>
           <p:nvPr/>
         </p:nvSpPr>
@@ -8172,11 +7945,11 @@
       </p:sp>
       <p:sp>
         <p:nvSpPr>
-          <p:cNvPr id="88" name="TextBox 87"/>
+          <p:cNvPr id="80" name="TextBox 79"/>
           <p:cNvSpPr txBox="1"/>
           <p:nvPr>
             <p:custDataLst>
-              <p:tags r:id="rId37"/>
+              <p:tags r:id="rId36"/>
             </p:custDataLst>
           </p:nvPr>
         </p:nvSpPr>
@@ -8223,7 +7996,7 @@
       </p:sp>
       <p:sp>
         <p:nvSpPr>
-          <p:cNvPr id="89" name="Rounded Rectangle 88"/>
+          <p:cNvPr id="81" name="Rounded Rectangle 80"/>
           <p:cNvSpPr/>
           <p:nvPr/>
         </p:nvSpPr>
@@ -8274,11 +8047,11 @@
       </p:sp>
       <p:sp>
         <p:nvSpPr>
-          <p:cNvPr id="90" name="TextBox 89"/>
+          <p:cNvPr id="82" name="TextBox 81"/>
           <p:cNvSpPr txBox="1"/>
           <p:nvPr>
             <p:custDataLst>
-              <p:tags r:id="rId38"/>
+              <p:tags r:id="rId37"/>
             </p:custDataLst>
           </p:nvPr>
         </p:nvSpPr>
@@ -8325,7 +8098,7 @@
       </p:sp>
       <p:sp>
         <p:nvSpPr>
-          <p:cNvPr id="91" name="Rounded Rectangle 90"/>
+          <p:cNvPr id="83" name="Rounded Rectangle 82"/>
           <p:cNvSpPr/>
           <p:nvPr/>
         </p:nvSpPr>
@@ -8376,11 +8149,11 @@
       </p:sp>
       <p:sp>
         <p:nvSpPr>
-          <p:cNvPr id="92" name="TextBox 91"/>
+          <p:cNvPr id="84" name="TextBox 83"/>
           <p:cNvSpPr txBox="1"/>
           <p:nvPr>
             <p:custDataLst>
-              <p:tags r:id="rId39"/>
+              <p:tags r:id="rId38"/>
             </p:custDataLst>
           </p:nvPr>
         </p:nvSpPr>
@@ -8427,7 +8200,7 @@
       </p:sp>
       <p:sp>
         <p:nvSpPr>
-          <p:cNvPr id="93" name="Rounded Rectangle 92"/>
+          <p:cNvPr id="85" name="Rounded Rectangle 84"/>
           <p:cNvSpPr/>
           <p:nvPr/>
         </p:nvSpPr>
@@ -8478,11 +8251,11 @@
       </p:sp>
       <p:sp>
         <p:nvSpPr>
-          <p:cNvPr id="94" name="TextBox 93"/>
+          <p:cNvPr id="86" name="TextBox 85"/>
           <p:cNvSpPr txBox="1"/>
           <p:nvPr>
             <p:custDataLst>
-              <p:tags r:id="rId40"/>
+              <p:tags r:id="rId39"/>
             </p:custDataLst>
           </p:nvPr>
         </p:nvSpPr>
@@ -8529,7 +8302,7 @@
       </p:sp>
       <p:sp>
         <p:nvSpPr>
-          <p:cNvPr id="95" name="Rounded Rectangle 94"/>
+          <p:cNvPr id="87" name="Rounded Rectangle 86"/>
           <p:cNvSpPr/>
           <p:nvPr/>
         </p:nvSpPr>
@@ -8582,11 +8355,11 @@
       </p:sp>
       <p:sp>
         <p:nvSpPr>
-          <p:cNvPr id="96" name="TextBox 95"/>
+          <p:cNvPr id="88" name="TextBox 87"/>
           <p:cNvSpPr txBox="1"/>
           <p:nvPr>
             <p:custDataLst>
-              <p:tags r:id="rId41"/>
+              <p:tags r:id="rId40"/>
             </p:custDataLst>
           </p:nvPr>
         </p:nvSpPr>
@@ -8633,7 +8406,7 @@
       </p:sp>
       <p:sp>
         <p:nvSpPr>
-          <p:cNvPr id="97" name="Rounded Rectangle 96"/>
+          <p:cNvPr id="89" name="Rounded Rectangle 88"/>
           <p:cNvSpPr/>
           <p:nvPr/>
         </p:nvSpPr>
@@ -8686,11 +8459,11 @@
       </p:sp>
       <p:sp>
         <p:nvSpPr>
-          <p:cNvPr id="98" name="TextBox 97"/>
+          <p:cNvPr id="90" name="TextBox 89"/>
           <p:cNvSpPr txBox="1"/>
           <p:nvPr>
             <p:custDataLst>
-              <p:tags r:id="rId42"/>
+              <p:tags r:id="rId41"/>
             </p:custDataLst>
           </p:nvPr>
         </p:nvSpPr>
@@ -8737,7 +8510,7 @@
       </p:sp>
       <p:cxnSp>
         <p:nvCxnSpPr>
-          <p:cNvPr id="99" name="Connector 98"/>
+          <p:cNvPr id="91" name="Connector 90"/>
           <p:cNvCxnSpPr/>
           <p:nvPr/>
         </p:nvCxnSpPr>
@@ -8773,7 +8546,7 @@
       </p:cxnSp>
       <p:cxnSp>
         <p:nvCxnSpPr>
-          <p:cNvPr id="100" name="Connector 99"/>
+          <p:cNvPr id="92" name="Connector 91"/>
           <p:cNvCxnSpPr/>
           <p:nvPr/>
         </p:nvCxnSpPr>
@@ -8809,7 +8582,7 @@
       </p:cxnSp>
       <p:cxnSp>
         <p:nvCxnSpPr>
-          <p:cNvPr id="101" name="Connector 100"/>
+          <p:cNvPr id="93" name="Connector 92"/>
           <p:cNvCxnSpPr/>
           <p:nvPr/>
         </p:nvCxnSpPr>
@@ -8845,7 +8618,7 @@
       </p:cxnSp>
       <p:sp>
         <p:nvSpPr>
-          <p:cNvPr id="102" name="Right Arrow 101"/>
+          <p:cNvPr id="94" name="Right Arrow 93"/>
           <p:cNvSpPr/>
           <p:nvPr/>
         </p:nvSpPr>
@@ -8894,7 +8667,7 @@
       </p:sp>
       <p:sp>
         <p:nvSpPr>
-          <p:cNvPr id="103" name="Rounded Rectangle 102"/>
+          <p:cNvPr id="95" name="Rounded Rectangle 94"/>
           <p:cNvSpPr/>
           <p:nvPr/>
         </p:nvSpPr>
@@ -8945,11 +8718,11 @@
       </p:sp>
       <p:sp>
         <p:nvSpPr>
-          <p:cNvPr id="104" name="TextBox 103"/>
+          <p:cNvPr id="96" name="TextBox 95"/>
           <p:cNvSpPr txBox="1"/>
           <p:nvPr>
             <p:custDataLst>
-              <p:tags r:id="rId43"/>
+              <p:tags r:id="rId42"/>
             </p:custDataLst>
           </p:nvPr>
         </p:nvSpPr>
@@ -8996,11 +8769,11 @@
       </p:sp>
       <p:sp>
         <p:nvSpPr>
-          <p:cNvPr id="105" name="TextBox 104"/>
+          <p:cNvPr id="97" name="TextBox 96"/>
           <p:cNvSpPr txBox="1"/>
           <p:nvPr>
             <p:custDataLst>
-              <p:tags r:id="rId44"/>
+              <p:tags r:id="rId43"/>
             </p:custDataLst>
           </p:nvPr>
         </p:nvSpPr>
@@ -9047,7 +8820,7 @@
       </p:sp>
       <p:sp>
         <p:nvSpPr>
-          <p:cNvPr id="106" name="Right Arrow 105"/>
+          <p:cNvPr id="98" name="Right Arrow 97"/>
           <p:cNvSpPr/>
           <p:nvPr/>
         </p:nvSpPr>
@@ -9096,7 +8869,7 @@
       </p:sp>
       <p:sp>
         <p:nvSpPr>
-          <p:cNvPr id="107" name="Rounded Rectangle 106"/>
+          <p:cNvPr id="99" name="Rounded Rectangle 98"/>
           <p:cNvSpPr/>
           <p:nvPr/>
         </p:nvSpPr>
@@ -9147,11 +8920,11 @@
       </p:sp>
       <p:sp>
         <p:nvSpPr>
-          <p:cNvPr id="108" name="TextBox 107"/>
+          <p:cNvPr id="100" name="TextBox 99"/>
           <p:cNvSpPr txBox="1"/>
           <p:nvPr>
             <p:custDataLst>
-              <p:tags r:id="rId45"/>
+              <p:tags r:id="rId44"/>
             </p:custDataLst>
           </p:nvPr>
         </p:nvSpPr>
@@ -9198,7 +8971,7 @@
       </p:sp>
       <p:sp>
         <p:nvSpPr>
-          <p:cNvPr id="109" name="Rounded Rectangle 108"/>
+          <p:cNvPr id="101" name="Rounded Rectangle 100"/>
           <p:cNvSpPr/>
           <p:nvPr/>
         </p:nvSpPr>
@@ -9249,11 +9022,11 @@
       </p:sp>
       <p:sp>
         <p:nvSpPr>
-          <p:cNvPr id="110" name="TextBox 109"/>
+          <p:cNvPr id="102" name="TextBox 101"/>
           <p:cNvSpPr txBox="1"/>
           <p:nvPr>
             <p:custDataLst>
-              <p:tags r:id="rId46"/>
+              <p:tags r:id="rId45"/>
             </p:custDataLst>
           </p:nvPr>
         </p:nvSpPr>
@@ -9300,7 +9073,7 @@
       </p:sp>
       <p:sp>
         <p:nvSpPr>
-          <p:cNvPr id="111" name="Rounded Rectangle 110"/>
+          <p:cNvPr id="103" name="Rounded Rectangle 102"/>
           <p:cNvSpPr/>
           <p:nvPr/>
         </p:nvSpPr>
@@ -9351,11 +9124,11 @@
       </p:sp>
       <p:sp>
         <p:nvSpPr>
-          <p:cNvPr id="112" name="TextBox 111"/>
+          <p:cNvPr id="104" name="TextBox 103"/>
           <p:cNvSpPr txBox="1"/>
           <p:nvPr>
             <p:custDataLst>
-              <p:tags r:id="rId47"/>
+              <p:tags r:id="rId46"/>
             </p:custDataLst>
           </p:nvPr>
         </p:nvSpPr>
@@ -9402,17 +9175,17 @@
       </p:sp>
       <p:sp>
         <p:nvSpPr>
-          <p:cNvPr id="113" name="TextBox 112"/>
+          <p:cNvPr id="105" name="TextBox 104"/>
           <p:cNvSpPr txBox="1"/>
           <p:nvPr>
             <p:custDataLst>
-              <p:tags r:id="rId48"/>
+              <p:tags r:id="rId47"/>
             </p:custDataLst>
           </p:nvPr>
         </p:nvSpPr>
         <p:spPr>
           <a:xfrm>
-            <a:off x="4536000" y="11880000"/>
+            <a:off x="4508219" y="11880000"/>
             <a:ext cx="9576000" cy="288000"/>
           </a:xfrm>
           <a:prstGeom prst="rect">
@@ -9426,7 +9199,7 @@
           </a:bodyPr>
           <a:lstStyle/>
           <a:p>
-            <a:pPr algn="l">
+            <a:pPr algn="ctr">
               <a:lnSpc>
                 <a:spcPct val="110000"/>
               </a:lnSpc>
@@ -9453,7 +9226,7 @@
       </p:sp>
       <p:sp>
         <p:nvSpPr>
-          <p:cNvPr id="114" name="Rounded Rectangle 113"/>
+          <p:cNvPr id="106" name="Rounded Rectangle 105"/>
           <p:cNvSpPr/>
           <p:nvPr/>
         </p:nvSpPr>
@@ -9506,11 +9279,11 @@
       </p:sp>
       <p:sp>
         <p:nvSpPr>
-          <p:cNvPr id="115" name="TextBox 114"/>
+          <p:cNvPr id="107" name="TextBox 106"/>
           <p:cNvSpPr txBox="1"/>
           <p:nvPr>
             <p:custDataLst>
-              <p:tags r:id="rId49"/>
+              <p:tags r:id="rId48"/>
             </p:custDataLst>
           </p:nvPr>
         </p:nvSpPr>
@@ -9557,14 +9330,14 @@
       </p:sp>
       <p:sp>
         <p:nvSpPr>
-          <p:cNvPr id="116" name="Right Arrow 115"/>
+          <p:cNvPr id="108" name="Right Arrow 107"/>
           <p:cNvSpPr/>
           <p:nvPr/>
         </p:nvSpPr>
         <p:spPr>
           <a:xfrm>
-            <a:off x="7452000" y="12402000"/>
-            <a:ext cx="432000" cy="180000"/>
+            <a:off x="7434000" y="12402000"/>
+            <a:ext cx="396000" cy="180000"/>
           </a:xfrm>
           <a:prstGeom prst="rightArrow">
             <a:avLst/>
@@ -9606,13 +9379,13 @@
       </p:sp>
       <p:sp>
         <p:nvSpPr>
-          <p:cNvPr id="117" name="Rounded Rectangle 116"/>
+          <p:cNvPr id="109" name="Rounded Rectangle 108"/>
           <p:cNvSpPr/>
           <p:nvPr/>
         </p:nvSpPr>
         <p:spPr>
           <a:xfrm>
-            <a:off x="7992000" y="12240000"/>
+            <a:off x="7920000" y="12240000"/>
             <a:ext cx="2808000" cy="504000"/>
           </a:xfrm>
           <a:prstGeom prst="roundRect">
@@ -9659,17 +9432,17 @@
       </p:sp>
       <p:sp>
         <p:nvSpPr>
-          <p:cNvPr id="118" name="TextBox 117"/>
+          <p:cNvPr id="110" name="TextBox 109"/>
           <p:cNvSpPr txBox="1"/>
           <p:nvPr>
             <p:custDataLst>
-              <p:tags r:id="rId50"/>
+              <p:tags r:id="rId49"/>
             </p:custDataLst>
           </p:nvPr>
         </p:nvSpPr>
         <p:spPr>
           <a:xfrm>
-            <a:off x="7958661" y="12240000"/>
+            <a:off x="7886663" y="12240000"/>
             <a:ext cx="2808000" cy="504000"/>
           </a:xfrm>
           <a:prstGeom prst="rect">
@@ -9710,14 +9483,14 @@
       </p:sp>
       <p:sp>
         <p:nvSpPr>
-          <p:cNvPr id="119" name="Right Arrow 118"/>
+          <p:cNvPr id="111" name="Right Arrow 110"/>
           <p:cNvSpPr/>
           <p:nvPr/>
         </p:nvSpPr>
         <p:spPr>
           <a:xfrm>
-            <a:off x="10908000" y="12402000"/>
-            <a:ext cx="432000" cy="180000"/>
+            <a:off x="10818000" y="12402000"/>
+            <a:ext cx="396000" cy="180000"/>
           </a:xfrm>
           <a:prstGeom prst="rightArrow">
             <a:avLst/>
@@ -9759,13 +9532,13 @@
       </p:sp>
       <p:sp>
         <p:nvSpPr>
-          <p:cNvPr id="120" name="Rounded Rectangle 119"/>
+          <p:cNvPr id="112" name="Rounded Rectangle 111"/>
           <p:cNvSpPr/>
           <p:nvPr/>
         </p:nvSpPr>
         <p:spPr>
           <a:xfrm>
-            <a:off x="11448000" y="12240000"/>
+            <a:off x="11304000" y="12240000"/>
             <a:ext cx="2808000" cy="504000"/>
           </a:xfrm>
           <a:prstGeom prst="roundRect">
@@ -9810,17 +9583,17 @@
       </p:sp>
       <p:sp>
         <p:nvSpPr>
-          <p:cNvPr id="121" name="TextBox 120"/>
+          <p:cNvPr id="113" name="TextBox 112"/>
           <p:cNvSpPr txBox="1"/>
           <p:nvPr>
             <p:custDataLst>
-              <p:tags r:id="rId51"/>
+              <p:tags r:id="rId50"/>
             </p:custDataLst>
           </p:nvPr>
         </p:nvSpPr>
         <p:spPr>
           <a:xfrm>
-            <a:off x="11414661" y="12240000"/>
+            <a:off x="11270662" y="12240000"/>
             <a:ext cx="2808000" cy="504000"/>
           </a:xfrm>
           <a:prstGeom prst="rect">
@@ -9861,17 +9634,17 @@
       </p:sp>
       <p:sp>
         <p:nvSpPr>
-          <p:cNvPr id="122" name="TextBox 121"/>
+          <p:cNvPr id="114" name="TextBox 113"/>
           <p:cNvSpPr txBox="1"/>
           <p:nvPr>
             <p:custDataLst>
-              <p:tags r:id="rId52"/>
+              <p:tags r:id="rId51"/>
             </p:custDataLst>
           </p:nvPr>
         </p:nvSpPr>
         <p:spPr>
           <a:xfrm>
-            <a:off x="4536000" y="12816000"/>
+            <a:off x="4511394" y="12816000"/>
             <a:ext cx="9576000" cy="252000"/>
           </a:xfrm>
           <a:prstGeom prst="rect">
@@ -9885,7 +9658,7 @@
           </a:bodyPr>
           <a:lstStyle/>
           <a:p>
-            <a:pPr algn="l">
+            <a:pPr algn="ctr">
               <a:lnSpc>
                 <a:spcPct val="110000"/>
               </a:lnSpc>
@@ -9912,7 +9685,7 @@
       </p:sp>
       <p:sp>
         <p:nvSpPr>
-          <p:cNvPr id="123" name="Rounded Rectangle 122"/>
+          <p:cNvPr id="115" name="Rounded Rectangle 114"/>
           <p:cNvSpPr/>
           <p:nvPr/>
         </p:nvSpPr>
@@ -9963,7 +9736,7 @@
       </p:sp>
       <p:sp>
         <p:nvSpPr>
-          <p:cNvPr id="124" name="Oval 123"/>
+          <p:cNvPr id="116" name="Oval 115"/>
           <p:cNvSpPr/>
           <p:nvPr/>
         </p:nvSpPr>
@@ -10012,7 +9785,7 @@
       </p:sp>
       <p:sp>
         <p:nvSpPr>
-          <p:cNvPr id="125" name="Oval 124"/>
+          <p:cNvPr id="117" name="Oval 116"/>
           <p:cNvSpPr/>
           <p:nvPr/>
         </p:nvSpPr>
@@ -10061,7 +9834,7 @@
       </p:sp>
       <p:sp>
         <p:nvSpPr>
-          <p:cNvPr id="126" name="Oval 125"/>
+          <p:cNvPr id="118" name="Oval 117"/>
           <p:cNvSpPr/>
           <p:nvPr/>
         </p:nvSpPr>
@@ -10110,7 +9883,7 @@
       </p:sp>
       <p:sp>
         <p:nvSpPr>
-          <p:cNvPr id="127" name="Oval 126"/>
+          <p:cNvPr id="119" name="Oval 118"/>
           <p:cNvSpPr/>
           <p:nvPr/>
         </p:nvSpPr>
@@ -10159,11 +9932,11 @@
       </p:sp>
       <p:sp>
         <p:nvSpPr>
-          <p:cNvPr id="128" name="TextBox 127"/>
+          <p:cNvPr id="120" name="TextBox 119"/>
           <p:cNvSpPr txBox="1"/>
           <p:nvPr>
             <p:custDataLst>
-              <p:tags r:id="rId53"/>
+              <p:tags r:id="rId52"/>
             </p:custDataLst>
           </p:nvPr>
         </p:nvSpPr>
@@ -10210,18 +9983,18 @@
       </p:sp>
       <p:sp>
         <p:nvSpPr>
-          <p:cNvPr id="129" name="TextBox 128"/>
+          <p:cNvPr id="121" name="TextBox 120"/>
           <p:cNvSpPr txBox="1"/>
           <p:nvPr>
             <p:custDataLst>
-              <p:tags r:id="rId54"/>
+              <p:tags r:id="rId53"/>
             </p:custDataLst>
           </p:nvPr>
         </p:nvSpPr>
         <p:spPr>
           <a:xfrm>
-            <a:off x="864000" y="14274000"/>
-            <a:ext cx="576000" cy="468000"/>
+            <a:off x="818756" y="14274000"/>
+            <a:ext cx="13392000" cy="468000"/>
           </a:xfrm>
           <a:prstGeom prst="rect">
             <a:avLst/>
@@ -10234,7 +10007,7 @@
           </a:bodyPr>
           <a:lstStyle/>
           <a:p>
-            <a:pPr algn="l">
+            <a:pPr algn="ctr">
               <a:lnSpc>
                 <a:spcPct val="110000"/>
               </a:lnSpc>
@@ -10246,7 +10019,7 @@
               </a:spcAft>
             </a:pPr>
             <a:r>
-              <a:rPr sz="2200" b="1">
+              <a:rPr sz="2600" b="1">
                 <a:solidFill>
                   <a:srgbClr val="0F766E"/>
                 </a:solidFill>
@@ -10254,48 +10027,8 @@
                 <a:ea typeface="Microsoft JhengHei"/>
                 <a:cs typeface="Segoe UI"/>
               </a:rPr>
-              <a:t>02</a:t>
-            </a:r>
-          </a:p>
-        </p:txBody>
-      </p:sp>
-      <p:sp>
-        <p:nvSpPr>
-          <p:cNvPr id="130" name="TextBox 129"/>
-          <p:cNvSpPr txBox="1"/>
-          <p:nvPr>
-            <p:custDataLst>
-              <p:tags r:id="rId55"/>
-            </p:custDataLst>
-          </p:nvPr>
-        </p:nvSpPr>
-        <p:spPr>
-          <a:xfrm>
-            <a:off x="1476000" y="14274000"/>
-            <a:ext cx="10800000" cy="468000"/>
-          </a:xfrm>
-          <a:prstGeom prst="rect">
-            <a:avLst/>
-          </a:prstGeom>
-          <a:noFill/>
-        </p:spPr>
-        <p:txBody>
-          <a:bodyPr wrap="none" lIns="0" tIns="0" rIns="0" bIns="0" anchor="ctr">
-            <a:spAutoFit/>
-          </a:bodyPr>
-          <a:lstStyle/>
-          <a:p>
-            <a:pPr algn="l">
-              <a:lnSpc>
-                <a:spcPct val="110000"/>
-              </a:lnSpc>
-              <a:spcBef>
-                <a:spcPts val="0"/>
-              </a:spcBef>
-              <a:spcAft>
-                <a:spcPts val="0"/>
-              </a:spcAft>
-            </a:pPr>
+              <a:t>02　</a:t>
+            </a:r>
             <a:r>
               <a:rPr sz="2600" b="1">
                 <a:solidFill>
@@ -10312,7 +10045,7 @@
       </p:sp>
       <p:cxnSp>
         <p:nvCxnSpPr>
-          <p:cNvPr id="131" name="Connector 130"/>
+          <p:cNvPr id="122" name="Connector 121"/>
           <p:cNvCxnSpPr/>
           <p:nvPr/>
         </p:nvCxnSpPr>
@@ -10348,7 +10081,7 @@
       </p:cxnSp>
       <p:sp>
         <p:nvSpPr>
-          <p:cNvPr id="132" name="Rounded Rectangle 131"/>
+          <p:cNvPr id="123" name="Rounded Rectangle 122"/>
           <p:cNvSpPr/>
           <p:nvPr/>
         </p:nvSpPr>
@@ -10401,13 +10134,13 @@
       </p:sp>
       <p:sp>
         <p:nvSpPr>
-          <p:cNvPr id="133" name="Rectangle 132"/>
+          <p:cNvPr id="124" name="Rectangle 123"/>
           <p:cNvSpPr/>
           <p:nvPr/>
         </p:nvSpPr>
         <p:spPr>
           <a:xfrm>
-            <a:off x="1080000" y="15120000"/>
+            <a:off x="2772000" y="15120000"/>
             <a:ext cx="504000" cy="50400"/>
           </a:xfrm>
           <a:prstGeom prst="rect">
@@ -10450,18 +10183,18 @@
       </p:sp>
       <p:sp>
         <p:nvSpPr>
-          <p:cNvPr id="134" name="TextBox 133"/>
+          <p:cNvPr id="125" name="TextBox 124"/>
           <p:cNvSpPr txBox="1"/>
           <p:nvPr>
             <p:custDataLst>
-              <p:tags r:id="rId56"/>
+              <p:tags r:id="rId54"/>
             </p:custDataLst>
           </p:nvPr>
         </p:nvSpPr>
         <p:spPr>
           <a:xfrm>
-            <a:off x="1080000" y="15228000"/>
-            <a:ext cx="3888000" cy="360000"/>
+            <a:off x="969107" y="15228000"/>
+            <a:ext cx="4032000" cy="360000"/>
           </a:xfrm>
           <a:prstGeom prst="rect">
             <a:avLst/>
@@ -10474,7 +10207,7 @@
           </a:bodyPr>
           <a:lstStyle/>
           <a:p>
-            <a:pPr algn="l">
+            <a:pPr algn="ctr">
               <a:lnSpc>
                 <a:spcPct val="110000"/>
               </a:lnSpc>
@@ -10501,18 +10234,18 @@
       </p:sp>
       <p:sp>
         <p:nvSpPr>
-          <p:cNvPr id="135" name="TextBox 134"/>
+          <p:cNvPr id="126" name="TextBox 125"/>
           <p:cNvSpPr txBox="1"/>
           <p:nvPr>
             <p:custDataLst>
-              <p:tags r:id="rId57"/>
+              <p:tags r:id="rId55"/>
             </p:custDataLst>
           </p:nvPr>
         </p:nvSpPr>
         <p:spPr>
           <a:xfrm>
-            <a:off x="1080000" y="15624000"/>
-            <a:ext cx="3960000" cy="828000"/>
+            <a:off x="981806" y="15624000"/>
+            <a:ext cx="4032000" cy="828000"/>
           </a:xfrm>
           <a:prstGeom prst="rect">
             <a:avLst/>
@@ -10525,7 +10258,7 @@
           </a:bodyPr>
           <a:lstStyle/>
           <a:p>
-            <a:pPr algn="l">
+            <a:pPr algn="ctr">
               <a:lnSpc>
                 <a:spcPct val="110000"/>
               </a:lnSpc>
@@ -10549,7 +10282,7 @@
             </a:r>
           </a:p>
           <a:p>
-            <a:pPr algn="l">
+            <a:pPr algn="ctr">
               <a:lnSpc>
                 <a:spcPct val="110000"/>
               </a:lnSpc>
@@ -10573,7 +10306,7 @@
             </a:r>
           </a:p>
           <a:p>
-            <a:pPr algn="l">
+            <a:pPr algn="ctr">
               <a:lnSpc>
                 <a:spcPct val="110000"/>
               </a:lnSpc>
@@ -10600,7 +10333,7 @@
       </p:sp>
       <p:sp>
         <p:nvSpPr>
-          <p:cNvPr id="136" name="Rounded Rectangle 135"/>
+          <p:cNvPr id="127" name="Rounded Rectangle 126"/>
           <p:cNvSpPr/>
           <p:nvPr/>
         </p:nvSpPr>
@@ -10653,13 +10386,13 @@
       </p:sp>
       <p:sp>
         <p:nvSpPr>
-          <p:cNvPr id="137" name="Rectangle 136"/>
+          <p:cNvPr id="128" name="Rectangle 127"/>
           <p:cNvSpPr/>
           <p:nvPr/>
         </p:nvSpPr>
         <p:spPr>
           <a:xfrm>
-            <a:off x="5616000" y="15120000"/>
+            <a:off x="7308000" y="15120000"/>
             <a:ext cx="504000" cy="50400"/>
           </a:xfrm>
           <a:prstGeom prst="rect">
@@ -10702,18 +10435,18 @@
       </p:sp>
       <p:sp>
         <p:nvSpPr>
-          <p:cNvPr id="138" name="TextBox 137"/>
+          <p:cNvPr id="129" name="TextBox 128"/>
           <p:cNvSpPr txBox="1"/>
           <p:nvPr>
             <p:custDataLst>
-              <p:tags r:id="rId58"/>
+              <p:tags r:id="rId56"/>
             </p:custDataLst>
           </p:nvPr>
         </p:nvSpPr>
         <p:spPr>
           <a:xfrm>
-            <a:off x="5616000" y="15228000"/>
-            <a:ext cx="3888000" cy="360000"/>
+            <a:off x="5505107" y="15228000"/>
+            <a:ext cx="4032000" cy="360000"/>
           </a:xfrm>
           <a:prstGeom prst="rect">
             <a:avLst/>
@@ -10726,7 +10459,7 @@
           </a:bodyPr>
           <a:lstStyle/>
           <a:p>
-            <a:pPr algn="l">
+            <a:pPr algn="ctr">
               <a:lnSpc>
                 <a:spcPct val="110000"/>
               </a:lnSpc>
@@ -10753,18 +10486,18 @@
       </p:sp>
       <p:sp>
         <p:nvSpPr>
-          <p:cNvPr id="139" name="TextBox 138"/>
+          <p:cNvPr id="130" name="TextBox 129"/>
           <p:cNvSpPr txBox="1"/>
           <p:nvPr>
             <p:custDataLst>
-              <p:tags r:id="rId59"/>
+              <p:tags r:id="rId57"/>
             </p:custDataLst>
           </p:nvPr>
         </p:nvSpPr>
         <p:spPr>
           <a:xfrm>
-            <a:off x="5616000" y="15624000"/>
-            <a:ext cx="3960000" cy="828000"/>
+            <a:off x="5517807" y="15624000"/>
+            <a:ext cx="4032000" cy="828000"/>
           </a:xfrm>
           <a:prstGeom prst="rect">
             <a:avLst/>
@@ -10777,7 +10510,7 @@
           </a:bodyPr>
           <a:lstStyle/>
           <a:p>
-            <a:pPr algn="l">
+            <a:pPr algn="ctr">
               <a:lnSpc>
                 <a:spcPct val="110000"/>
               </a:lnSpc>
@@ -10801,7 +10534,7 @@
             </a:r>
           </a:p>
           <a:p>
-            <a:pPr algn="l">
+            <a:pPr algn="ctr">
               <a:lnSpc>
                 <a:spcPct val="110000"/>
               </a:lnSpc>
@@ -10825,7 +10558,7 @@
             </a:r>
           </a:p>
           <a:p>
-            <a:pPr algn="l">
+            <a:pPr algn="ctr">
               <a:lnSpc>
                 <a:spcPct val="110000"/>
               </a:lnSpc>
@@ -10852,7 +10585,7 @@
       </p:sp>
       <p:sp>
         <p:nvSpPr>
-          <p:cNvPr id="140" name="Rounded Rectangle 139"/>
+          <p:cNvPr id="131" name="Rounded Rectangle 130"/>
           <p:cNvSpPr/>
           <p:nvPr/>
         </p:nvSpPr>
@@ -10905,13 +10638,13 @@
       </p:sp>
       <p:sp>
         <p:nvSpPr>
-          <p:cNvPr id="141" name="Rectangle 140"/>
+          <p:cNvPr id="132" name="Rectangle 131"/>
           <p:cNvSpPr/>
           <p:nvPr/>
         </p:nvSpPr>
         <p:spPr>
           <a:xfrm>
-            <a:off x="10152000" y="15120000"/>
+            <a:off x="11844000" y="15120000"/>
             <a:ext cx="504000" cy="50400"/>
           </a:xfrm>
           <a:prstGeom prst="rect">
@@ -10954,18 +10687,18 @@
       </p:sp>
       <p:sp>
         <p:nvSpPr>
-          <p:cNvPr id="142" name="TextBox 141"/>
+          <p:cNvPr id="133" name="TextBox 132"/>
           <p:cNvSpPr txBox="1"/>
           <p:nvPr>
             <p:custDataLst>
-              <p:tags r:id="rId60"/>
+              <p:tags r:id="rId58"/>
             </p:custDataLst>
           </p:nvPr>
         </p:nvSpPr>
         <p:spPr>
           <a:xfrm>
-            <a:off x="10152000" y="15228000"/>
-            <a:ext cx="3888000" cy="360000"/>
+            <a:off x="10041107" y="15228000"/>
+            <a:ext cx="4032000" cy="360000"/>
           </a:xfrm>
           <a:prstGeom prst="rect">
             <a:avLst/>
@@ -10978,7 +10711,7 @@
           </a:bodyPr>
           <a:lstStyle/>
           <a:p>
-            <a:pPr algn="l">
+            <a:pPr algn="ctr">
               <a:lnSpc>
                 <a:spcPct val="110000"/>
               </a:lnSpc>
@@ -11005,18 +10738,18 @@
       </p:sp>
       <p:sp>
         <p:nvSpPr>
-          <p:cNvPr id="143" name="TextBox 142"/>
+          <p:cNvPr id="134" name="TextBox 133"/>
           <p:cNvSpPr txBox="1"/>
           <p:nvPr>
             <p:custDataLst>
-              <p:tags r:id="rId61"/>
+              <p:tags r:id="rId59"/>
             </p:custDataLst>
           </p:nvPr>
         </p:nvSpPr>
         <p:spPr>
           <a:xfrm>
-            <a:off x="10152000" y="15624000"/>
-            <a:ext cx="3960000" cy="828000"/>
+            <a:off x="10053807" y="15624000"/>
+            <a:ext cx="4032000" cy="828000"/>
           </a:xfrm>
           <a:prstGeom prst="rect">
             <a:avLst/>
@@ -11029,7 +10762,7 @@
           </a:bodyPr>
           <a:lstStyle/>
           <a:p>
-            <a:pPr algn="l">
+            <a:pPr algn="ctr">
               <a:lnSpc>
                 <a:spcPct val="110000"/>
               </a:lnSpc>
@@ -11053,7 +10786,7 @@
             </a:r>
           </a:p>
           <a:p>
-            <a:pPr algn="l">
+            <a:pPr algn="ctr">
               <a:lnSpc>
                 <a:spcPct val="110000"/>
               </a:lnSpc>
@@ -11077,7 +10810,7 @@
             </a:r>
           </a:p>
           <a:p>
-            <a:pPr algn="l">
+            <a:pPr algn="ctr">
               <a:lnSpc>
                 <a:spcPct val="110000"/>
               </a:lnSpc>
@@ -11104,18 +10837,18 @@
       </p:sp>
       <p:sp>
         <p:nvSpPr>
-          <p:cNvPr id="144" name="TextBox 143"/>
+          <p:cNvPr id="135" name="TextBox 134"/>
           <p:cNvSpPr txBox="1"/>
           <p:nvPr>
             <p:custDataLst>
-              <p:tags r:id="rId62"/>
+              <p:tags r:id="rId60"/>
             </p:custDataLst>
           </p:nvPr>
         </p:nvSpPr>
         <p:spPr>
           <a:xfrm>
-            <a:off x="864000" y="16794000"/>
-            <a:ext cx="576000" cy="468000"/>
+            <a:off x="818756" y="16794000"/>
+            <a:ext cx="13392000" cy="468000"/>
           </a:xfrm>
           <a:prstGeom prst="rect">
             <a:avLst/>
@@ -11128,7 +10861,7 @@
           </a:bodyPr>
           <a:lstStyle/>
           <a:p>
-            <a:pPr algn="l">
+            <a:pPr algn="ctr">
               <a:lnSpc>
                 <a:spcPct val="110000"/>
               </a:lnSpc>
@@ -11140,7 +10873,7 @@
               </a:spcAft>
             </a:pPr>
             <a:r>
-              <a:rPr sz="2200" b="1">
+              <a:rPr sz="2600" b="1">
                 <a:solidFill>
                   <a:srgbClr val="0F766E"/>
                 </a:solidFill>
@@ -11148,48 +10881,8 @@
                 <a:ea typeface="Microsoft JhengHei"/>
                 <a:cs typeface="Segoe UI"/>
               </a:rPr>
-              <a:t>03</a:t>
-            </a:r>
-          </a:p>
-        </p:txBody>
-      </p:sp>
-      <p:sp>
-        <p:nvSpPr>
-          <p:cNvPr id="145" name="TextBox 144"/>
-          <p:cNvSpPr txBox="1"/>
-          <p:nvPr>
-            <p:custDataLst>
-              <p:tags r:id="rId63"/>
-            </p:custDataLst>
-          </p:nvPr>
-        </p:nvSpPr>
-        <p:spPr>
-          <a:xfrm>
-            <a:off x="1476000" y="16794000"/>
-            <a:ext cx="10800000" cy="468000"/>
-          </a:xfrm>
-          <a:prstGeom prst="rect">
-            <a:avLst/>
-          </a:prstGeom>
-          <a:noFill/>
-        </p:spPr>
-        <p:txBody>
-          <a:bodyPr wrap="none" lIns="0" tIns="0" rIns="0" bIns="0" anchor="ctr">
-            <a:spAutoFit/>
-          </a:bodyPr>
-          <a:lstStyle/>
-          <a:p>
-            <a:pPr algn="l">
-              <a:lnSpc>
-                <a:spcPct val="110000"/>
-              </a:lnSpc>
-              <a:spcBef>
-                <a:spcPts val="0"/>
-              </a:spcBef>
-              <a:spcAft>
-                <a:spcPts val="0"/>
-              </a:spcAft>
-            </a:pPr>
+              <a:t>03　</a:t>
+            </a:r>
             <a:r>
               <a:rPr sz="2600" b="1">
                 <a:solidFill>
@@ -11206,7 +10899,7 @@
       </p:sp>
       <p:cxnSp>
         <p:nvCxnSpPr>
-          <p:cNvPr id="146" name="Connector 145"/>
+          <p:cNvPr id="136" name="Connector 135"/>
           <p:cNvCxnSpPr/>
           <p:nvPr/>
         </p:nvCxnSpPr>
@@ -11242,18 +10935,69 @@
       </p:cxnSp>
       <p:sp>
         <p:nvSpPr>
-          <p:cNvPr id="147" name="TextBox 146"/>
+          <p:cNvPr id="137" name="TextBox 136"/>
           <p:cNvSpPr txBox="1"/>
           <p:nvPr>
             <p:custDataLst>
-              <p:tags r:id="rId64"/>
+              <p:tags r:id="rId61"/>
             </p:custDataLst>
           </p:nvPr>
         </p:nvSpPr>
         <p:spPr>
           <a:xfrm>
-            <a:off x="864000" y="17460000"/>
+            <a:off x="837806" y="17460000"/>
             <a:ext cx="6624000" cy="252000"/>
+          </a:xfrm>
+          <a:prstGeom prst="rect">
+            <a:avLst/>
+          </a:prstGeom>
+          <a:noFill/>
+        </p:spPr>
+        <p:txBody>
+          <a:bodyPr wrap="none" lIns="0" tIns="0" rIns="0" bIns="0" anchor="ctr">
+            <a:spAutoFit/>
+          </a:bodyPr>
+          <a:lstStyle/>
+          <a:p>
+            <a:pPr algn="ctr">
+              <a:lnSpc>
+                <a:spcPct val="110000"/>
+              </a:lnSpc>
+              <a:spcBef>
+                <a:spcPts val="0"/>
+              </a:spcBef>
+              <a:spcAft>
+                <a:spcPts val="0"/>
+              </a:spcAft>
+            </a:pPr>
+            <a:r>
+              <a:rPr sz="1500" b="0">
+                <a:solidFill>
+                  <a:srgbClr val="52637A"/>
+                </a:solidFill>
+                <a:latin typeface="Segoe UI"/>
+                <a:ea typeface="Microsoft JhengHei"/>
+                <a:cs typeface="Segoe UI"/>
+              </a:rPr>
+              <a:t>相同18,998筆測試的 Macro-F1</a:t>
+            </a:r>
+          </a:p>
+        </p:txBody>
+      </p:sp>
+      <p:sp>
+        <p:nvSpPr>
+          <p:cNvPr id="138" name="TextBox 137"/>
+          <p:cNvSpPr txBox="1"/>
+          <p:nvPr>
+            <p:custDataLst>
+              <p:tags r:id="rId62"/>
+            </p:custDataLst>
+          </p:nvPr>
+        </p:nvSpPr>
+        <p:spPr>
+          <a:xfrm>
+            <a:off x="864000" y="17784000"/>
+            <a:ext cx="1440000" cy="288000"/>
           </a:xfrm>
           <a:prstGeom prst="rect">
             <a:avLst/>
@@ -11278,57 +11022,6 @@
               </a:spcAft>
             </a:pPr>
             <a:r>
-              <a:rPr sz="1500" b="0">
-                <a:solidFill>
-                  <a:srgbClr val="52637A"/>
-                </a:solidFill>
-                <a:latin typeface="Segoe UI"/>
-                <a:ea typeface="Microsoft JhengHei"/>
-                <a:cs typeface="Segoe UI"/>
-              </a:rPr>
-              <a:t>相同18,998筆測試的 Macro-F1</a:t>
-            </a:r>
-          </a:p>
-        </p:txBody>
-      </p:sp>
-      <p:sp>
-        <p:nvSpPr>
-          <p:cNvPr id="148" name="TextBox 147"/>
-          <p:cNvSpPr txBox="1"/>
-          <p:nvPr>
-            <p:custDataLst>
-              <p:tags r:id="rId65"/>
-            </p:custDataLst>
-          </p:nvPr>
-        </p:nvSpPr>
-        <p:spPr>
-          <a:xfrm>
-            <a:off x="864000" y="17784000"/>
-            <a:ext cx="1440000" cy="288000"/>
-          </a:xfrm>
-          <a:prstGeom prst="rect">
-            <a:avLst/>
-          </a:prstGeom>
-          <a:noFill/>
-        </p:spPr>
-        <p:txBody>
-          <a:bodyPr wrap="none" lIns="0" tIns="0" rIns="0" bIns="0" anchor="ctr">
-            <a:spAutoFit/>
-          </a:bodyPr>
-          <a:lstStyle/>
-          <a:p>
-            <a:pPr algn="l">
-              <a:lnSpc>
-                <a:spcPct val="110000"/>
-              </a:lnSpc>
-              <a:spcBef>
-                <a:spcPts val="0"/>
-              </a:spcBef>
-              <a:spcAft>
-                <a:spcPts val="0"/>
-              </a:spcAft>
-            </a:pPr>
-            <a:r>
               <a:rPr sz="1700" b="1">
                 <a:solidFill>
                   <a:srgbClr val="15233A"/>
@@ -11344,7 +11037,7 @@
       </p:sp>
       <p:sp>
         <p:nvSpPr>
-          <p:cNvPr id="149" name="Rectangle 148"/>
+          <p:cNvPr id="139" name="Rectangle 138"/>
           <p:cNvSpPr/>
           <p:nvPr/>
         </p:nvSpPr>
@@ -11393,7 +11086,7 @@
       </p:sp>
       <p:sp>
         <p:nvSpPr>
-          <p:cNvPr id="150" name="Rectangle 149"/>
+          <p:cNvPr id="140" name="Rectangle 139"/>
           <p:cNvSpPr/>
           <p:nvPr/>
         </p:nvSpPr>
@@ -11442,11 +11135,11 @@
       </p:sp>
       <p:sp>
         <p:nvSpPr>
-          <p:cNvPr id="151" name="TextBox 150"/>
+          <p:cNvPr id="141" name="TextBox 140"/>
           <p:cNvSpPr txBox="1"/>
           <p:nvPr>
             <p:custDataLst>
-              <p:tags r:id="rId66"/>
+              <p:tags r:id="rId63"/>
             </p:custDataLst>
           </p:nvPr>
         </p:nvSpPr>
@@ -11493,11 +11186,11 @@
       </p:sp>
       <p:sp>
         <p:nvSpPr>
-          <p:cNvPr id="152" name="TextBox 151"/>
+          <p:cNvPr id="142" name="TextBox 141"/>
           <p:cNvSpPr txBox="1"/>
           <p:nvPr>
             <p:custDataLst>
-              <p:tags r:id="rId67"/>
+              <p:tags r:id="rId64"/>
             </p:custDataLst>
           </p:nvPr>
         </p:nvSpPr>
@@ -11544,7 +11237,7 @@
       </p:sp>
       <p:sp>
         <p:nvSpPr>
-          <p:cNvPr id="153" name="Rectangle 152"/>
+          <p:cNvPr id="143" name="Rectangle 142"/>
           <p:cNvSpPr/>
           <p:nvPr/>
         </p:nvSpPr>
@@ -11593,7 +11286,7 @@
       </p:sp>
       <p:sp>
         <p:nvSpPr>
-          <p:cNvPr id="154" name="Rectangle 153"/>
+          <p:cNvPr id="144" name="Rectangle 143"/>
           <p:cNvSpPr/>
           <p:nvPr/>
         </p:nvSpPr>
@@ -11642,11 +11335,11 @@
       </p:sp>
       <p:sp>
         <p:nvSpPr>
-          <p:cNvPr id="155" name="TextBox 154"/>
+          <p:cNvPr id="145" name="TextBox 144"/>
           <p:cNvSpPr txBox="1"/>
           <p:nvPr>
             <p:custDataLst>
-              <p:tags r:id="rId68"/>
+              <p:tags r:id="rId65"/>
             </p:custDataLst>
           </p:nvPr>
         </p:nvSpPr>
@@ -11693,11 +11386,11 @@
       </p:sp>
       <p:sp>
         <p:nvSpPr>
-          <p:cNvPr id="156" name="TextBox 155"/>
+          <p:cNvPr id="146" name="TextBox 145"/>
           <p:cNvSpPr txBox="1"/>
           <p:nvPr>
             <p:custDataLst>
-              <p:tags r:id="rId69"/>
+              <p:tags r:id="rId66"/>
             </p:custDataLst>
           </p:nvPr>
         </p:nvSpPr>
@@ -11744,7 +11437,7 @@
       </p:sp>
       <p:sp>
         <p:nvSpPr>
-          <p:cNvPr id="157" name="Rectangle 156"/>
+          <p:cNvPr id="147" name="Rectangle 146"/>
           <p:cNvSpPr/>
           <p:nvPr/>
         </p:nvSpPr>
@@ -11793,7 +11486,7 @@
       </p:sp>
       <p:sp>
         <p:nvSpPr>
-          <p:cNvPr id="158" name="Rectangle 157"/>
+          <p:cNvPr id="148" name="Rectangle 147"/>
           <p:cNvSpPr/>
           <p:nvPr/>
         </p:nvSpPr>
@@ -11842,11 +11535,11 @@
       </p:sp>
       <p:sp>
         <p:nvSpPr>
-          <p:cNvPr id="159" name="TextBox 158"/>
+          <p:cNvPr id="149" name="TextBox 148"/>
           <p:cNvSpPr txBox="1"/>
           <p:nvPr>
             <p:custDataLst>
-              <p:tags r:id="rId70"/>
+              <p:tags r:id="rId67"/>
             </p:custDataLst>
           </p:nvPr>
         </p:nvSpPr>
@@ -11893,7 +11586,7 @@
       </p:sp>
       <p:cxnSp>
         <p:nvCxnSpPr>
-          <p:cNvPr id="160" name="Connector 159"/>
+          <p:cNvPr id="150" name="Connector 149"/>
           <p:cNvCxnSpPr/>
           <p:nvPr/>
         </p:nvCxnSpPr>
@@ -11929,11 +11622,11 @@
       </p:cxnSp>
       <p:sp>
         <p:nvSpPr>
-          <p:cNvPr id="161" name="TextBox 160"/>
+          <p:cNvPr id="151" name="TextBox 150"/>
           <p:cNvSpPr txBox="1"/>
           <p:nvPr>
             <p:custDataLst>
-              <p:tags r:id="rId71"/>
+              <p:tags r:id="rId68"/>
             </p:custDataLst>
           </p:nvPr>
         </p:nvSpPr>
@@ -11980,7 +11673,7 @@
       </p:sp>
       <p:cxnSp>
         <p:nvCxnSpPr>
-          <p:cNvPr id="162" name="Connector 161"/>
+          <p:cNvPr id="152" name="Connector 151"/>
           <p:cNvCxnSpPr/>
           <p:nvPr/>
         </p:nvCxnSpPr>
@@ -12016,11 +11709,11 @@
       </p:cxnSp>
       <p:sp>
         <p:nvSpPr>
-          <p:cNvPr id="163" name="TextBox 162"/>
+          <p:cNvPr id="153" name="TextBox 152"/>
           <p:cNvSpPr txBox="1"/>
           <p:nvPr>
             <p:custDataLst>
-              <p:tags r:id="rId72"/>
+              <p:tags r:id="rId69"/>
             </p:custDataLst>
           </p:nvPr>
         </p:nvSpPr>
@@ -12067,7 +11760,7 @@
       </p:sp>
       <p:cxnSp>
         <p:nvCxnSpPr>
-          <p:cNvPr id="164" name="Connector 163"/>
+          <p:cNvPr id="154" name="Connector 153"/>
           <p:cNvCxnSpPr/>
           <p:nvPr/>
         </p:nvCxnSpPr>
@@ -12103,11 +11796,11 @@
       </p:cxnSp>
       <p:sp>
         <p:nvSpPr>
-          <p:cNvPr id="165" name="TextBox 164"/>
+          <p:cNvPr id="155" name="TextBox 154"/>
           <p:cNvSpPr txBox="1"/>
           <p:nvPr>
             <p:custDataLst>
-              <p:tags r:id="rId73"/>
+              <p:tags r:id="rId70"/>
             </p:custDataLst>
           </p:nvPr>
         </p:nvSpPr>
@@ -12154,17 +11847,17 @@
       </p:sp>
       <p:sp>
         <p:nvSpPr>
-          <p:cNvPr id="166" name="TextBox 165"/>
+          <p:cNvPr id="156" name="TextBox 155"/>
           <p:cNvSpPr txBox="1"/>
           <p:nvPr>
             <p:custDataLst>
-              <p:tags r:id="rId74"/>
+              <p:tags r:id="rId71"/>
             </p:custDataLst>
           </p:nvPr>
         </p:nvSpPr>
         <p:spPr>
           <a:xfrm>
-            <a:off x="864000" y="19404000"/>
+            <a:off x="837806" y="19404000"/>
             <a:ext cx="6624000" cy="252000"/>
           </a:xfrm>
           <a:prstGeom prst="rect">
@@ -12178,7 +11871,7 @@
           </a:bodyPr>
           <a:lstStyle/>
           <a:p>
-            <a:pPr algn="l">
+            <a:pPr algn="ctr">
               <a:lnSpc>
                 <a:spcPct val="110000"/>
               </a:lnSpc>
@@ -12205,7 +11898,7 @@
       </p:sp>
       <p:cxnSp>
         <p:nvCxnSpPr>
-          <p:cNvPr id="167" name="Connector 166"/>
+          <p:cNvPr id="157" name="Connector 156"/>
           <p:cNvCxnSpPr/>
           <p:nvPr/>
         </p:nvCxnSpPr>
@@ -12241,17 +11934,17 @@
       </p:cxnSp>
       <p:sp>
         <p:nvSpPr>
-          <p:cNvPr id="168" name="TextBox 167"/>
+          <p:cNvPr id="158" name="TextBox 157"/>
           <p:cNvSpPr txBox="1"/>
           <p:nvPr>
             <p:custDataLst>
-              <p:tags r:id="rId75"/>
+              <p:tags r:id="rId72"/>
             </p:custDataLst>
           </p:nvPr>
         </p:nvSpPr>
         <p:spPr>
           <a:xfrm>
-            <a:off x="7920000" y="17460000"/>
+            <a:off x="7893807" y="17460000"/>
             <a:ext cx="6336000" cy="252000"/>
           </a:xfrm>
           <a:prstGeom prst="rect">
@@ -12265,7 +11958,7 @@
           </a:bodyPr>
           <a:lstStyle/>
           <a:p>
-            <a:pPr algn="l">
+            <a:pPr algn="ctr">
               <a:lnSpc>
                 <a:spcPct val="110000"/>
               </a:lnSpc>
@@ -12292,17 +11985,17 @@
       </p:sp>
       <p:sp>
         <p:nvSpPr>
-          <p:cNvPr id="169" name="TextBox 168"/>
+          <p:cNvPr id="159" name="TextBox 158"/>
           <p:cNvSpPr txBox="1"/>
           <p:nvPr>
             <p:custDataLst>
-              <p:tags r:id="rId76"/>
+              <p:tags r:id="rId73"/>
             </p:custDataLst>
           </p:nvPr>
         </p:nvSpPr>
         <p:spPr>
           <a:xfrm>
-            <a:off x="7920000" y="17712000"/>
+            <a:off x="7860469" y="17712000"/>
             <a:ext cx="6336000" cy="504000"/>
           </a:xfrm>
           <a:prstGeom prst="rect">
@@ -12316,7 +12009,7 @@
           </a:bodyPr>
           <a:lstStyle/>
           <a:p>
-            <a:pPr algn="l">
+            <a:pPr algn="ctr">
               <a:lnSpc>
                 <a:spcPct val="110000"/>
               </a:lnSpc>
@@ -12343,17 +12036,17 @@
       </p:sp>
       <p:sp>
         <p:nvSpPr>
-          <p:cNvPr id="170" name="TextBox 169"/>
+          <p:cNvPr id="160" name="TextBox 159"/>
           <p:cNvSpPr txBox="1"/>
           <p:nvPr>
             <p:custDataLst>
-              <p:tags r:id="rId77"/>
+              <p:tags r:id="rId74"/>
             </p:custDataLst>
           </p:nvPr>
         </p:nvSpPr>
         <p:spPr>
           <a:xfrm>
-            <a:off x="7920000" y="18216000"/>
+            <a:off x="7895395" y="18216000"/>
             <a:ext cx="6336000" cy="252000"/>
           </a:xfrm>
           <a:prstGeom prst="rect">
@@ -12367,7 +12060,7 @@
           </a:bodyPr>
           <a:lstStyle/>
           <a:p>
-            <a:pPr algn="l">
+            <a:pPr algn="ctr">
               <a:lnSpc>
                 <a:spcPct val="110000"/>
               </a:lnSpc>
@@ -12394,7 +12087,7 @@
       </p:sp>
       <p:sp>
         <p:nvSpPr>
-          <p:cNvPr id="171" name="Rounded Rectangle 170"/>
+          <p:cNvPr id="161" name="Rounded Rectangle 160"/>
           <p:cNvSpPr/>
           <p:nvPr/>
         </p:nvSpPr>
@@ -12445,11 +12138,11 @@
       </p:sp>
       <p:sp>
         <p:nvSpPr>
-          <p:cNvPr id="172" name="TextBox 171"/>
+          <p:cNvPr id="162" name="TextBox 161"/>
           <p:cNvSpPr txBox="1"/>
           <p:nvPr>
             <p:custDataLst>
-              <p:tags r:id="rId78"/>
+              <p:tags r:id="rId75"/>
             </p:custDataLst>
           </p:nvPr>
         </p:nvSpPr>
@@ -12496,11 +12189,11 @@
       </p:sp>
       <p:sp>
         <p:nvSpPr>
-          <p:cNvPr id="173" name="TextBox 172"/>
+          <p:cNvPr id="163" name="TextBox 162"/>
           <p:cNvSpPr txBox="1"/>
           <p:nvPr>
             <p:custDataLst>
-              <p:tags r:id="rId79"/>
+              <p:tags r:id="rId76"/>
             </p:custDataLst>
           </p:nvPr>
         </p:nvSpPr>
@@ -12547,7 +12240,7 @@
       </p:sp>
       <p:sp>
         <p:nvSpPr>
-          <p:cNvPr id="174" name="Rounded Rectangle 173"/>
+          <p:cNvPr id="164" name="Rounded Rectangle 163"/>
           <p:cNvSpPr/>
           <p:nvPr/>
         </p:nvSpPr>
@@ -12598,11 +12291,11 @@
       </p:sp>
       <p:sp>
         <p:nvSpPr>
-          <p:cNvPr id="175" name="TextBox 174"/>
+          <p:cNvPr id="165" name="TextBox 164"/>
           <p:cNvSpPr txBox="1"/>
           <p:nvPr>
             <p:custDataLst>
-              <p:tags r:id="rId80"/>
+              <p:tags r:id="rId77"/>
             </p:custDataLst>
           </p:nvPr>
         </p:nvSpPr>
@@ -12649,11 +12342,11 @@
       </p:sp>
       <p:sp>
         <p:nvSpPr>
-          <p:cNvPr id="176" name="TextBox 175"/>
+          <p:cNvPr id="166" name="TextBox 165"/>
           <p:cNvSpPr txBox="1"/>
           <p:nvPr>
             <p:custDataLst>
-              <p:tags r:id="rId81"/>
+              <p:tags r:id="rId78"/>
             </p:custDataLst>
           </p:nvPr>
         </p:nvSpPr>
@@ -12700,7 +12393,7 @@
       </p:sp>
       <p:sp>
         <p:nvSpPr>
-          <p:cNvPr id="177" name="Rounded Rectangle 176"/>
+          <p:cNvPr id="167" name="Rounded Rectangle 166"/>
           <p:cNvSpPr/>
           <p:nvPr/>
         </p:nvSpPr>
@@ -12751,11 +12444,11 @@
       </p:sp>
       <p:sp>
         <p:nvSpPr>
-          <p:cNvPr id="178" name="TextBox 177"/>
+          <p:cNvPr id="168" name="TextBox 167"/>
           <p:cNvSpPr txBox="1"/>
           <p:nvPr>
             <p:custDataLst>
-              <p:tags r:id="rId82"/>
+              <p:tags r:id="rId79"/>
             </p:custDataLst>
           </p:nvPr>
         </p:nvSpPr>
@@ -12802,11 +12495,11 @@
       </p:sp>
       <p:sp>
         <p:nvSpPr>
-          <p:cNvPr id="179" name="TextBox 178"/>
+          <p:cNvPr id="169" name="TextBox 168"/>
           <p:cNvSpPr txBox="1"/>
           <p:nvPr>
             <p:custDataLst>
-              <p:tags r:id="rId83"/>
+              <p:tags r:id="rId80"/>
             </p:custDataLst>
           </p:nvPr>
         </p:nvSpPr>
@@ -12853,17 +12546,17 @@
       </p:sp>
       <p:sp>
         <p:nvSpPr>
-          <p:cNvPr id="180" name="TextBox 179"/>
+          <p:cNvPr id="170" name="TextBox 169"/>
           <p:cNvSpPr txBox="1"/>
           <p:nvPr>
             <p:custDataLst>
-              <p:tags r:id="rId84"/>
+              <p:tags r:id="rId81"/>
             </p:custDataLst>
           </p:nvPr>
         </p:nvSpPr>
         <p:spPr>
           <a:xfrm>
-            <a:off x="7920000" y="19404000"/>
+            <a:off x="7896188" y="19404000"/>
             <a:ext cx="6336000" cy="252000"/>
           </a:xfrm>
           <a:prstGeom prst="rect">
@@ -12877,7 +12570,7 @@
           </a:bodyPr>
           <a:lstStyle/>
           <a:p>
-            <a:pPr algn="l">
+            <a:pPr algn="ctr">
               <a:lnSpc>
                 <a:spcPct val="110000"/>
               </a:lnSpc>
@@ -12904,7 +12597,7 @@
       </p:sp>
       <p:sp>
         <p:nvSpPr>
-          <p:cNvPr id="181" name="Rounded Rectangle 180"/>
+          <p:cNvPr id="171" name="Rounded Rectangle 170"/>
           <p:cNvSpPr/>
           <p:nvPr/>
         </p:nvSpPr>
@@ -12955,17 +12648,17 @@
       </p:sp>
       <p:sp>
         <p:nvSpPr>
-          <p:cNvPr id="182" name="TextBox 181"/>
+          <p:cNvPr id="172" name="TextBox 171"/>
           <p:cNvSpPr txBox="1"/>
           <p:nvPr>
             <p:custDataLst>
-              <p:tags r:id="rId85"/>
+              <p:tags r:id="rId82"/>
             </p:custDataLst>
           </p:nvPr>
         </p:nvSpPr>
         <p:spPr>
           <a:xfrm>
-            <a:off x="1008000" y="19836000"/>
+            <a:off x="981807" y="19836000"/>
             <a:ext cx="2304000" cy="720000"/>
           </a:xfrm>
           <a:prstGeom prst="rect">
@@ -12979,7 +12672,7 @@
           </a:bodyPr>
           <a:lstStyle/>
           <a:p>
-            <a:pPr algn="l">
+            <a:pPr algn="ctr">
               <a:lnSpc>
                 <a:spcPct val="110000"/>
               </a:lnSpc>
@@ -13003,7 +12696,7 @@
             </a:r>
           </a:p>
           <a:p>
-            <a:pPr algn="l">
+            <a:pPr algn="ctr">
               <a:lnSpc>
                 <a:spcPct val="110000"/>
               </a:lnSpc>
@@ -13030,7 +12723,7 @@
       </p:sp>
       <p:sp>
         <p:nvSpPr>
-          <p:cNvPr id="183" name="Rounded Rectangle 182"/>
+          <p:cNvPr id="173" name="Rounded Rectangle 172"/>
           <p:cNvSpPr/>
           <p:nvPr/>
         </p:nvSpPr>
@@ -13083,11 +12776,11 @@
       </p:sp>
       <p:sp>
         <p:nvSpPr>
-          <p:cNvPr id="184" name="TextBox 183"/>
+          <p:cNvPr id="174" name="TextBox 173"/>
           <p:cNvSpPr txBox="1"/>
           <p:nvPr>
             <p:custDataLst>
-              <p:tags r:id="rId86"/>
+              <p:tags r:id="rId83"/>
             </p:custDataLst>
           </p:nvPr>
         </p:nvSpPr>
@@ -13134,11 +12827,11 @@
       </p:sp>
       <p:sp>
         <p:nvSpPr>
-          <p:cNvPr id="185" name="TextBox 184"/>
+          <p:cNvPr id="175" name="TextBox 174"/>
           <p:cNvSpPr txBox="1"/>
           <p:nvPr>
             <p:custDataLst>
-              <p:tags r:id="rId87"/>
+              <p:tags r:id="rId84"/>
             </p:custDataLst>
           </p:nvPr>
         </p:nvSpPr>
@@ -13185,7 +12878,7 @@
       </p:sp>
       <p:sp>
         <p:nvSpPr>
-          <p:cNvPr id="186" name="Rounded Rectangle 185"/>
+          <p:cNvPr id="176" name="Rounded Rectangle 175"/>
           <p:cNvSpPr/>
           <p:nvPr/>
         </p:nvSpPr>
@@ -13236,11 +12929,11 @@
       </p:sp>
       <p:sp>
         <p:nvSpPr>
-          <p:cNvPr id="187" name="TextBox 186"/>
+          <p:cNvPr id="177" name="TextBox 176"/>
           <p:cNvSpPr txBox="1"/>
           <p:nvPr>
             <p:custDataLst>
-              <p:tags r:id="rId88"/>
+              <p:tags r:id="rId85"/>
             </p:custDataLst>
           </p:nvPr>
         </p:nvSpPr>
@@ -13287,11 +12980,11 @@
       </p:sp>
       <p:sp>
         <p:nvSpPr>
-          <p:cNvPr id="188" name="TextBox 187"/>
+          <p:cNvPr id="178" name="TextBox 177"/>
           <p:cNvSpPr txBox="1"/>
           <p:nvPr>
             <p:custDataLst>
-              <p:tags r:id="rId89"/>
+              <p:tags r:id="rId86"/>
             </p:custDataLst>
           </p:nvPr>
         </p:nvSpPr>
@@ -13338,7 +13031,7 @@
       </p:sp>
       <p:sp>
         <p:nvSpPr>
-          <p:cNvPr id="189" name="Rounded Rectangle 188"/>
+          <p:cNvPr id="179" name="Rounded Rectangle 178"/>
           <p:cNvSpPr/>
           <p:nvPr/>
         </p:nvSpPr>
@@ -13389,11 +13082,11 @@
       </p:sp>
       <p:sp>
         <p:nvSpPr>
-          <p:cNvPr id="190" name="TextBox 189"/>
+          <p:cNvPr id="180" name="TextBox 179"/>
           <p:cNvSpPr txBox="1"/>
           <p:nvPr>
             <p:custDataLst>
-              <p:tags r:id="rId90"/>
+              <p:tags r:id="rId87"/>
             </p:custDataLst>
           </p:nvPr>
         </p:nvSpPr>
@@ -13440,11 +13133,11 @@
       </p:sp>
       <p:sp>
         <p:nvSpPr>
-          <p:cNvPr id="191" name="TextBox 190"/>
+          <p:cNvPr id="181" name="TextBox 180"/>
           <p:cNvSpPr txBox="1"/>
           <p:nvPr>
             <p:custDataLst>
-              <p:tags r:id="rId91"/>
+              <p:tags r:id="rId88"/>
             </p:custDataLst>
           </p:nvPr>
         </p:nvSpPr>
@@ -13491,7 +13184,7 @@
       </p:sp>
       <p:sp>
         <p:nvSpPr>
-          <p:cNvPr id="192" name="Rounded Rectangle 191"/>
+          <p:cNvPr id="182" name="Rounded Rectangle 181"/>
           <p:cNvSpPr/>
           <p:nvPr/>
         </p:nvSpPr>
@@ -13542,11 +13235,11 @@
       </p:sp>
       <p:sp>
         <p:nvSpPr>
-          <p:cNvPr id="193" name="TextBox 192"/>
+          <p:cNvPr id="183" name="TextBox 182"/>
           <p:cNvSpPr txBox="1"/>
           <p:nvPr>
             <p:custDataLst>
-              <p:tags r:id="rId92"/>
+              <p:tags r:id="rId89"/>
             </p:custDataLst>
           </p:nvPr>
         </p:nvSpPr>
@@ -13593,11 +13286,11 @@
       </p:sp>
       <p:sp>
         <p:nvSpPr>
-          <p:cNvPr id="194" name="TextBox 193"/>
+          <p:cNvPr id="184" name="TextBox 183"/>
           <p:cNvSpPr txBox="1"/>
           <p:nvPr>
             <p:custDataLst>
-              <p:tags r:id="rId93"/>
+              <p:tags r:id="rId90"/>
             </p:custDataLst>
           </p:nvPr>
         </p:nvSpPr>
@@ -13644,7 +13337,7 @@
       </p:sp>
       <p:sp>
         <p:nvSpPr>
-          <p:cNvPr id="195" name="Rounded Rectangle 194"/>
+          <p:cNvPr id="185" name="Rounded Rectangle 184"/>
           <p:cNvSpPr/>
           <p:nvPr/>
         </p:nvSpPr>
@@ -13697,11 +13390,11 @@
       </p:sp>
       <p:sp>
         <p:nvSpPr>
-          <p:cNvPr id="196" name="TextBox 195"/>
+          <p:cNvPr id="186" name="TextBox 185"/>
           <p:cNvSpPr txBox="1"/>
           <p:nvPr>
             <p:custDataLst>
-              <p:tags r:id="rId94"/>
+              <p:tags r:id="rId91"/>
             </p:custDataLst>
           </p:nvPr>
         </p:nvSpPr>
@@ -13748,11 +13441,11 @@
       </p:sp>
       <p:sp>
         <p:nvSpPr>
-          <p:cNvPr id="197" name="TextBox 196"/>
+          <p:cNvPr id="187" name="TextBox 186"/>
           <p:cNvSpPr txBox="1"/>
           <p:nvPr>
             <p:custDataLst>
-              <p:tags r:id="rId95"/>
+              <p:tags r:id="rId92"/>
             </p:custDataLst>
           </p:nvPr>
         </p:nvSpPr>
@@ -13799,7 +13492,7 @@
       </p:sp>
       <p:sp>
         <p:nvSpPr>
-          <p:cNvPr id="198" name="Rounded Rectangle 197"/>
+          <p:cNvPr id="188" name="Rounded Rectangle 187"/>
           <p:cNvSpPr/>
           <p:nvPr/>
         </p:nvSpPr>
@@ -13850,11 +13543,11 @@
       </p:sp>
       <p:sp>
         <p:nvSpPr>
-          <p:cNvPr id="199" name="TextBox 198"/>
+          <p:cNvPr id="189" name="TextBox 188"/>
           <p:cNvSpPr txBox="1"/>
           <p:nvPr>
             <p:custDataLst>
-              <p:tags r:id="rId96"/>
+              <p:tags r:id="rId93"/>
             </p:custDataLst>
           </p:nvPr>
         </p:nvSpPr>
@@ -13901,11 +13594,11 @@
       </p:sp>
       <p:sp>
         <p:nvSpPr>
-          <p:cNvPr id="200" name="TextBox 199"/>
+          <p:cNvPr id="190" name="TextBox 189"/>
           <p:cNvSpPr txBox="1"/>
           <p:nvPr>
             <p:custDataLst>
-              <p:tags r:id="rId97"/>
+              <p:tags r:id="rId94"/>
             </p:custDataLst>
           </p:nvPr>
         </p:nvSpPr>
@@ -13952,17 +13645,17 @@
       </p:sp>
       <p:sp>
         <p:nvSpPr>
-          <p:cNvPr id="201" name="TextBox 200"/>
+          <p:cNvPr id="191" name="TextBox 190"/>
           <p:cNvSpPr txBox="1"/>
           <p:nvPr>
             <p:custDataLst>
-              <p:tags r:id="rId98"/>
+              <p:tags r:id="rId95"/>
             </p:custDataLst>
           </p:nvPr>
         </p:nvSpPr>
         <p:spPr>
           <a:xfrm>
-            <a:off x="10592512" y="19836000"/>
+            <a:off x="10624250" y="19836000"/>
             <a:ext cx="3456000" cy="720000"/>
           </a:xfrm>
           <a:prstGeom prst="rect">
@@ -13976,7 +13669,7 @@
           </a:bodyPr>
           <a:lstStyle/>
           <a:p>
-            <a:pPr algn="r">
+            <a:pPr algn="ctr">
               <a:lnSpc>
                 <a:spcPct val="110000"/>
               </a:lnSpc>
@@ -14000,7 +13693,7 @@
             </a:r>
           </a:p>
           <a:p>
-            <a:pPr algn="r">
+            <a:pPr algn="ctr">
               <a:lnSpc>
                 <a:spcPct val="110000"/>
               </a:lnSpc>
@@ -14027,11 +13720,11 @@
       </p:sp>
       <p:sp>
         <p:nvSpPr>
-          <p:cNvPr id="202" name="TextBox 201"/>
+          <p:cNvPr id="192" name="TextBox 191"/>
           <p:cNvSpPr txBox="1"/>
           <p:nvPr>
             <p:custDataLst>
-              <p:tags r:id="rId99"/>
+              <p:tags r:id="rId96"/>
             </p:custDataLst>
           </p:nvPr>
         </p:nvSpPr>
@@ -14086,91 +13779,91 @@
 
 <file path=ppt/tags/tag1.xml><?xml version="1.0" encoding="utf-8"?>
 <p:tagLst xmlns:a="http://schemas.openxmlformats.org/drawingml/2006/main" xmlns:r="http://schemas.openxmlformats.org/officeDocument/2006/relationships" xmlns:p="http://schemas.openxmlformats.org/presentationml/2006/main">
-  <p:tag name="ALIGNMENT_TARGET_X" val="68.031494140625"/>
+  <p:tag name="ALIGNMENT_TARGET_X" val="595.27557373046875"/>
 </p:tagLst>
 </file>
 
 <file path=ppt/tags/tag10.xml><?xml version="1.0" encoding="utf-8"?>
 <p:tagLst xmlns:a="http://schemas.openxmlformats.org/drawingml/2006/main" xmlns:r="http://schemas.openxmlformats.org/officeDocument/2006/relationships" xmlns:p="http://schemas.openxmlformats.org/presentationml/2006/main">
-  <p:tag name="ALIGNMENT_TARGET_X" val="116.22047424316406"/>
+  <p:tag name="ALIGNMENT_TARGET_X" val="209.76377868652344"/>
 </p:tagLst>
 </file>
 
 <file path=ppt/tags/tag11.xml><?xml version="1.0" encoding="utf-8"?>
 <p:tagLst xmlns:a="http://schemas.openxmlformats.org/drawingml/2006/main" xmlns:r="http://schemas.openxmlformats.org/officeDocument/2006/relationships" xmlns:p="http://schemas.openxmlformats.org/presentationml/2006/main">
-  <p:tag name="ALIGNMENT_TARGET_X" val="130.39370727539063"/>
+  <p:tag name="ALIGNMENT_TARGET_X" val="209.76377868652344"/>
 </p:tagLst>
 </file>
 
 <file path=ppt/tags/tag12.xml><?xml version="1.0" encoding="utf-8"?>
 <p:tagLst xmlns:a="http://schemas.openxmlformats.org/drawingml/2006/main" xmlns:r="http://schemas.openxmlformats.org/officeDocument/2006/relationships" xmlns:p="http://schemas.openxmlformats.org/presentationml/2006/main">
-  <p:tag name="ALIGNMENT_TARGET_X" val="130.39370727539063"/>
+  <p:tag name="ALIGNMENT_TARGET_X" val="209.76377868652344"/>
 </p:tagLst>
 </file>
 
 <file path=ppt/tags/tag13.xml><?xml version="1.0" encoding="utf-8"?>
 <p:tagLst xmlns:a="http://schemas.openxmlformats.org/drawingml/2006/main" xmlns:r="http://schemas.openxmlformats.org/officeDocument/2006/relationships" xmlns:p="http://schemas.openxmlformats.org/presentationml/2006/main">
-  <p:tag name="ALIGNMENT_TARGET_X" val="85.03936767578125"/>
+  <p:tag name="ALIGNMENT_TARGET_X" val="209.76377868652344"/>
 </p:tagLst>
 </file>
 
 <file path=ppt/tags/tag14.xml><?xml version="1.0" encoding="utf-8"?>
 <p:tagLst xmlns:a="http://schemas.openxmlformats.org/drawingml/2006/main" xmlns:r="http://schemas.openxmlformats.org/officeDocument/2006/relationships" xmlns:p="http://schemas.openxmlformats.org/presentationml/2006/main">
-  <p:tag name="ALIGNMENT_TARGET_X" val="130.39370727539063"/>
+  <p:tag name="ALIGNMENT_TARGET_X" val="209.76377868652344"/>
 </p:tagLst>
 </file>
 
 <file path=ppt/tags/tag15.xml><?xml version="1.0" encoding="utf-8"?>
 <p:tagLst xmlns:a="http://schemas.openxmlformats.org/drawingml/2006/main" xmlns:r="http://schemas.openxmlformats.org/officeDocument/2006/relationships" xmlns:p="http://schemas.openxmlformats.org/presentationml/2006/main">
-  <p:tag name="ALIGNMENT_TARGET_X" val="130.39370727539063"/>
+  <p:tag name="ALIGNMENT_TARGET_X" val="209.76377868652344"/>
 </p:tagLst>
 </file>
 
 <file path=ppt/tags/tag16.xml><?xml version="1.0" encoding="utf-8"?>
 <p:tagLst xmlns:a="http://schemas.openxmlformats.org/drawingml/2006/main" xmlns:r="http://schemas.openxmlformats.org/officeDocument/2006/relationships" xmlns:p="http://schemas.openxmlformats.org/presentationml/2006/main">
-  <p:tag name="ALIGNMENT_TARGET_X" val="85.03936767578125"/>
+  <p:tag name="ALIGNMENT_TARGET_X" val="209.76377868652344"/>
 </p:tagLst>
 </file>
 
 <file path=ppt/tags/tag17.xml><?xml version="1.0" encoding="utf-8"?>
 <p:tagLst xmlns:a="http://schemas.openxmlformats.org/drawingml/2006/main" xmlns:r="http://schemas.openxmlformats.org/officeDocument/2006/relationships" xmlns:p="http://schemas.openxmlformats.org/presentationml/2006/main">
-  <p:tag name="ALIGNMENT_TARGET_X" val="130.39370727539063"/>
+  <p:tag name="ALIGNMENT_TARGET_X" val="209.76377868652344"/>
 </p:tagLst>
 </file>
 
 <file path=ppt/tags/tag18.xml><?xml version="1.0" encoding="utf-8"?>
 <p:tagLst xmlns:a="http://schemas.openxmlformats.org/drawingml/2006/main" xmlns:r="http://schemas.openxmlformats.org/officeDocument/2006/relationships" xmlns:p="http://schemas.openxmlformats.org/presentationml/2006/main">
-  <p:tag name="ALIGNMENT_TARGET_X" val="130.39370727539063"/>
+  <p:tag name="ALIGNMENT_TARGET_X" val="209.76377868652344"/>
 </p:tagLst>
 </file>
 
 <file path=ppt/tags/tag19.xml><?xml version="1.0" encoding="utf-8"?>
 <p:tagLst xmlns:a="http://schemas.openxmlformats.org/drawingml/2006/main" xmlns:r="http://schemas.openxmlformats.org/officeDocument/2006/relationships" xmlns:p="http://schemas.openxmlformats.org/presentationml/2006/main">
-  <p:tag name="ALIGNMENT_TARGET_X" val="85.03936767578125"/>
+  <p:tag name="ALIGNMENT_TARGET_X" val="209.76377868652344"/>
 </p:tagLst>
 </file>
 
 <file path=ppt/tags/tag2.xml><?xml version="1.0" encoding="utf-8"?>
 <p:tagLst xmlns:a="http://schemas.openxmlformats.org/drawingml/2006/main" xmlns:r="http://schemas.openxmlformats.org/officeDocument/2006/relationships" xmlns:p="http://schemas.openxmlformats.org/presentationml/2006/main">
-  <p:tag name="ALIGNMENT_TARGET_X" val="68.031494140625"/>
+  <p:tag name="ALIGNMENT_TARGET_X" val="595.27557373046875"/>
 </p:tagLst>
 </file>
 
 <file path=ppt/tags/tag20.xml><?xml version="1.0" encoding="utf-8"?>
 <p:tagLst xmlns:a="http://schemas.openxmlformats.org/drawingml/2006/main" xmlns:r="http://schemas.openxmlformats.org/officeDocument/2006/relationships" xmlns:p="http://schemas.openxmlformats.org/presentationml/2006/main">
-  <p:tag name="ALIGNMENT_TARGET_X" val="130.39370727539063"/>
+  <p:tag name="ALIGNMENT_TARGET_X" val="209.76377868652344"/>
 </p:tagLst>
 </file>
 
 <file path=ppt/tags/tag21.xml><?xml version="1.0" encoding="utf-8"?>
 <p:tagLst xmlns:a="http://schemas.openxmlformats.org/drawingml/2006/main" xmlns:r="http://schemas.openxmlformats.org/officeDocument/2006/relationships" xmlns:p="http://schemas.openxmlformats.org/presentationml/2006/main">
-  <p:tag name="ALIGNMENT_TARGET_X" val="130.39370727539063"/>
+  <p:tag name="ALIGNMENT_TARGET_X" val="209.76377868652344"/>
 </p:tagLst>
 </file>
 
 <file path=ppt/tags/tag22.xml><?xml version="1.0" encoding="utf-8"?>
 <p:tagLst xmlns:a="http://schemas.openxmlformats.org/drawingml/2006/main" xmlns:r="http://schemas.openxmlformats.org/officeDocument/2006/relationships" xmlns:p="http://schemas.openxmlformats.org/presentationml/2006/main">
-  <p:tag name="ALIGNMENT_TARGET_X" val="85.03936767578125"/>
+  <p:tag name="ALIGNMENT_TARGET_X" val="467.71652221679688"/>
 </p:tagLst>
 </file>
 
@@ -14194,7 +13887,7 @@
 
 <file path=ppt/tags/tag26.xml><?xml version="1.0" encoding="utf-8"?>
 <p:tagLst xmlns:a="http://schemas.openxmlformats.org/drawingml/2006/main" xmlns:r="http://schemas.openxmlformats.org/officeDocument/2006/relationships" xmlns:p="http://schemas.openxmlformats.org/presentationml/2006/main">
-  <p:tag name="ALIGNMENT_TARGET_X" val="467.71652221679688"/>
+  <p:tag name="ALIGNMENT_TARGET_X" val="748.346435546875"/>
 </p:tagLst>
 </file>
 
@@ -14206,7 +13899,7 @@
 
 <file path=ppt/tags/tag28.xml><?xml version="1.0" encoding="utf-8"?>
 <p:tagLst xmlns:a="http://schemas.openxmlformats.org/drawingml/2006/main" xmlns:r="http://schemas.openxmlformats.org/officeDocument/2006/relationships" xmlns:p="http://schemas.openxmlformats.org/presentationml/2006/main">
-  <p:tag name="ALIGNMENT_TARGET_X" val="748.346435546875"/>
+  <p:tag name="ALIGNMENT_TARGET_X" val="1009.1338500976563"/>
 </p:tagLst>
 </file>
 
@@ -14218,13 +13911,13 @@
 
 <file path=ppt/tags/tag3.xml><?xml version="1.0" encoding="utf-8"?>
 <p:tagLst xmlns:a="http://schemas.openxmlformats.org/drawingml/2006/main" xmlns:r="http://schemas.openxmlformats.org/officeDocument/2006/relationships" xmlns:p="http://schemas.openxmlformats.org/presentationml/2006/main">
-  <p:tag name="ALIGNMENT_TARGET_X" val="68.031494140625"/>
+  <p:tag name="ALIGNMENT_TARGET_X" val="595.27557373046875"/>
 </p:tagLst>
 </file>
 
 <file path=ppt/tags/tag30.xml><?xml version="1.0" encoding="utf-8"?>
 <p:tagLst xmlns:a="http://schemas.openxmlformats.org/drawingml/2006/main" xmlns:r="http://schemas.openxmlformats.org/officeDocument/2006/relationships" xmlns:p="http://schemas.openxmlformats.org/presentationml/2006/main">
-  <p:tag name="ALIGNMENT_TARGET_X" val="1009.1338500976563"/>
+  <p:tag name="ALIGNMENT_TARGET_X" val="467.71652221679688"/>
 </p:tagLst>
 </file>
 
@@ -14236,7 +13929,7 @@
 
 <file path=ppt/tags/tag32.xml><?xml version="1.0" encoding="utf-8"?>
 <p:tagLst xmlns:a="http://schemas.openxmlformats.org/drawingml/2006/main" xmlns:r="http://schemas.openxmlformats.org/officeDocument/2006/relationships" xmlns:p="http://schemas.openxmlformats.org/presentationml/2006/main">
-  <p:tag name="ALIGNMENT_TARGET_X" val="467.71652221679688"/>
+  <p:tag name="ALIGNMENT_TARGET_X" val="748.346435546875"/>
 </p:tagLst>
 </file>
 
@@ -14248,49 +13941,49 @@
 
 <file path=ppt/tags/tag34.xml><?xml version="1.0" encoding="utf-8"?>
 <p:tagLst xmlns:a="http://schemas.openxmlformats.org/drawingml/2006/main" xmlns:r="http://schemas.openxmlformats.org/officeDocument/2006/relationships" xmlns:p="http://schemas.openxmlformats.org/presentationml/2006/main">
-  <p:tag name="ALIGNMENT_TARGET_X" val="748.346435546875"/>
+  <p:tag name="ALIGNMENT_TARGET_X" val="1009.1338500976563"/>
 </p:tagLst>
 </file>
 
 <file path=ppt/tags/tag35.xml><?xml version="1.0" encoding="utf-8"?>
 <p:tagLst xmlns:a="http://schemas.openxmlformats.org/drawingml/2006/main" xmlns:r="http://schemas.openxmlformats.org/officeDocument/2006/relationships" xmlns:p="http://schemas.openxmlformats.org/presentationml/2006/main">
-  <p:tag name="ALIGNMENT_TARGET_X" val="1009.1338500976563"/>
+  <p:tag name="ALIGNMENT_TARGET_X" val="931.18112754821777"/>
 </p:tagLst>
 </file>
 
 <file path=ppt/tags/tag36.xml><?xml version="1.0" encoding="utf-8"?>
 <p:tagLst xmlns:a="http://schemas.openxmlformats.org/drawingml/2006/main" xmlns:r="http://schemas.openxmlformats.org/officeDocument/2006/relationships" xmlns:p="http://schemas.openxmlformats.org/presentationml/2006/main">
-  <p:tag name="ALIGNMENT_TARGET_X" val="931.18112754821777"/>
+  <p:tag name="ALIGNMENT_TARGET_X" val="969.16538047790527"/>
 </p:tagLst>
 </file>
 
 <file path=ppt/tags/tag37.xml><?xml version="1.0" encoding="utf-8"?>
 <p:tagLst xmlns:a="http://schemas.openxmlformats.org/drawingml/2006/main" xmlns:r="http://schemas.openxmlformats.org/officeDocument/2006/relationships" xmlns:p="http://schemas.openxmlformats.org/presentationml/2006/main">
-  <p:tag name="ALIGNMENT_TARGET_X" val="969.16538047790527"/>
+  <p:tag name="ALIGNMENT_TARGET_X" val="1007.1496334075928"/>
 </p:tagLst>
 </file>
 
 <file path=ppt/tags/tag38.xml><?xml version="1.0" encoding="utf-8"?>
 <p:tagLst xmlns:a="http://schemas.openxmlformats.org/drawingml/2006/main" xmlns:r="http://schemas.openxmlformats.org/officeDocument/2006/relationships" xmlns:p="http://schemas.openxmlformats.org/presentationml/2006/main">
-  <p:tag name="ALIGNMENT_TARGET_X" val="1007.1496334075928"/>
+  <p:tag name="ALIGNMENT_TARGET_X" val="1045.1338863372803"/>
 </p:tagLst>
 </file>
 
 <file path=ppt/tags/tag39.xml><?xml version="1.0" encoding="utf-8"?>
 <p:tagLst xmlns:a="http://schemas.openxmlformats.org/drawingml/2006/main" xmlns:r="http://schemas.openxmlformats.org/officeDocument/2006/relationships" xmlns:p="http://schemas.openxmlformats.org/presentationml/2006/main">
-  <p:tag name="ALIGNMENT_TARGET_X" val="1045.1338863372803"/>
+  <p:tag name="ALIGNMENT_TARGET_X" val="1083.1181392669678"/>
 </p:tagLst>
 </file>
 
 <file path=ppt/tags/tag4.xml><?xml version="1.0" encoding="utf-8"?>
 <p:tagLst xmlns:a="http://schemas.openxmlformats.org/drawingml/2006/main" xmlns:r="http://schemas.openxmlformats.org/officeDocument/2006/relationships" xmlns:p="http://schemas.openxmlformats.org/presentationml/2006/main">
-  <p:tag name="ALIGNMENT_TARGET_X" val="68.031494140625"/>
+  <p:tag name="ALIGNMENT_TARGET_X" val="595.27557373046875"/>
 </p:tagLst>
 </file>
 
 <file path=ppt/tags/tag40.xml><?xml version="1.0" encoding="utf-8"?>
 <p:tagLst xmlns:a="http://schemas.openxmlformats.org/drawingml/2006/main" xmlns:r="http://schemas.openxmlformats.org/officeDocument/2006/relationships" xmlns:p="http://schemas.openxmlformats.org/presentationml/2006/main">
-  <p:tag name="ALIGNMENT_TARGET_X" val="1083.1181392669678"/>
+  <p:tag name="ALIGNMENT_TARGET_X" val="467.71652221679688"/>
 </p:tagLst>
 </file>
 
@@ -14302,7 +13995,7 @@
 
 <file path=ppt/tags/tag42.xml><?xml version="1.0" encoding="utf-8"?>
 <p:tagLst xmlns:a="http://schemas.openxmlformats.org/drawingml/2006/main" xmlns:r="http://schemas.openxmlformats.org/officeDocument/2006/relationships" xmlns:p="http://schemas.openxmlformats.org/presentationml/2006/main">
-  <p:tag name="ALIGNMENT_TARGET_X" val="467.71652221679688"/>
+  <p:tag name="ALIGNMENT_TARGET_X" val="748.346435546875"/>
 </p:tagLst>
 </file>
 
@@ -14314,7 +14007,7 @@
 
 <file path=ppt/tags/tag44.xml><?xml version="1.0" encoding="utf-8"?>
 <p:tagLst xmlns:a="http://schemas.openxmlformats.org/drawingml/2006/main" xmlns:r="http://schemas.openxmlformats.org/officeDocument/2006/relationships" xmlns:p="http://schemas.openxmlformats.org/presentationml/2006/main">
-  <p:tag name="ALIGNMENT_TARGET_X" val="748.346435546875"/>
+  <p:tag name="ALIGNMENT_TARGET_X" val="1009.1338500976563"/>
 </p:tagLst>
 </file>
 
@@ -14332,19 +14025,19 @@
 
 <file path=ppt/tags/tag47.xml><?xml version="1.0" encoding="utf-8"?>
 <p:tagLst xmlns:a="http://schemas.openxmlformats.org/drawingml/2006/main" xmlns:r="http://schemas.openxmlformats.org/officeDocument/2006/relationships" xmlns:p="http://schemas.openxmlformats.org/presentationml/2006/main">
-  <p:tag name="ALIGNMENT_TARGET_X" val="1009.1338500976563"/>
+  <p:tag name="ALIGNMENT_TARGET_X" val="734.1732177734375"/>
 </p:tagLst>
 </file>
 
 <file path=ppt/tags/tag48.xml><?xml version="1.0" encoding="utf-8"?>
 <p:tagLst xmlns:a="http://schemas.openxmlformats.org/drawingml/2006/main" xmlns:r="http://schemas.openxmlformats.org/officeDocument/2006/relationships" xmlns:p="http://schemas.openxmlformats.org/presentationml/2006/main">
-  <p:tag name="ALIGNMENT_TARGET_X" val="357.16534423828125"/>
+  <p:tag name="ALIGNMENT_TARGET_X" val="467.71652221679688"/>
 </p:tagLst>
 </file>
 
 <file path=ppt/tags/tag49.xml><?xml version="1.0" encoding="utf-8"?>
 <p:tagLst xmlns:a="http://schemas.openxmlformats.org/drawingml/2006/main" xmlns:r="http://schemas.openxmlformats.org/officeDocument/2006/relationships" xmlns:p="http://schemas.openxmlformats.org/presentationml/2006/main">
-  <p:tag name="ALIGNMENT_TARGET_X" val="467.71652221679688"/>
+  <p:tag name="ALIGNMENT_TARGET_X" val="734.17324829101563"/>
 </p:tagLst>
 </file>
 
@@ -14356,19 +14049,19 @@
 
 <file path=ppt/tags/tag50.xml><?xml version="1.0" encoding="utf-8"?>
 <p:tagLst xmlns:a="http://schemas.openxmlformats.org/drawingml/2006/main" xmlns:r="http://schemas.openxmlformats.org/officeDocument/2006/relationships" xmlns:p="http://schemas.openxmlformats.org/presentationml/2006/main">
-  <p:tag name="ALIGNMENT_TARGET_X" val="739.84249877929688"/>
+  <p:tag name="ALIGNMENT_TARGET_X" val="1000.6299133300781"/>
 </p:tagLst>
 </file>
 
 <file path=ppt/tags/tag51.xml><?xml version="1.0" encoding="utf-8"?>
 <p:tagLst xmlns:a="http://schemas.openxmlformats.org/drawingml/2006/main" xmlns:r="http://schemas.openxmlformats.org/officeDocument/2006/relationships" xmlns:p="http://schemas.openxmlformats.org/presentationml/2006/main">
-  <p:tag name="ALIGNMENT_TARGET_X" val="1011.9684753417969"/>
+  <p:tag name="ALIGNMENT_TARGET_X" val="734.1732177734375"/>
 </p:tagLst>
 </file>
 
 <file path=ppt/tags/tag52.xml><?xml version="1.0" encoding="utf-8"?>
 <p:tagLst xmlns:a="http://schemas.openxmlformats.org/drawingml/2006/main" xmlns:r="http://schemas.openxmlformats.org/officeDocument/2006/relationships" xmlns:p="http://schemas.openxmlformats.org/presentationml/2006/main">
-  <p:tag name="ALIGNMENT_TARGET_X" val="357.16534423828125"/>
+  <p:tag name="ALIGNMENT_TARGET_X" val="595.27557373046875"/>
 </p:tagLst>
 </file>
 
@@ -14380,37 +14073,37 @@
 
 <file path=ppt/tags/tag54.xml><?xml version="1.0" encoding="utf-8"?>
 <p:tagLst xmlns:a="http://schemas.openxmlformats.org/drawingml/2006/main" xmlns:r="http://schemas.openxmlformats.org/officeDocument/2006/relationships" xmlns:p="http://schemas.openxmlformats.org/presentationml/2006/main">
-  <p:tag name="ALIGNMENT_TARGET_X" val="68.031494140625"/>
+  <p:tag name="ALIGNMENT_TARGET_X" val="238.11023712158203"/>
 </p:tagLst>
 </file>
 
 <file path=ppt/tags/tag55.xml><?xml version="1.0" encoding="utf-8"?>
 <p:tagLst xmlns:a="http://schemas.openxmlformats.org/drawingml/2006/main" xmlns:r="http://schemas.openxmlformats.org/officeDocument/2006/relationships" xmlns:p="http://schemas.openxmlformats.org/presentationml/2006/main">
-  <p:tag name="ALIGNMENT_TARGET_X" val="116.22047424316406"/>
+  <p:tag name="ALIGNMENT_TARGET_X" val="238.11023712158203"/>
 </p:tagLst>
 </file>
 
 <file path=ppt/tags/tag56.xml><?xml version="1.0" encoding="utf-8"?>
 <p:tagLst xmlns:a="http://schemas.openxmlformats.org/drawingml/2006/main" xmlns:r="http://schemas.openxmlformats.org/officeDocument/2006/relationships" xmlns:p="http://schemas.openxmlformats.org/presentationml/2006/main">
-  <p:tag name="ALIGNMENT_TARGET_X" val="85.03936767578125"/>
+  <p:tag name="ALIGNMENT_TARGET_X" val="595.27558898925781"/>
 </p:tagLst>
 </file>
 
 <file path=ppt/tags/tag57.xml><?xml version="1.0" encoding="utf-8"?>
 <p:tagLst xmlns:a="http://schemas.openxmlformats.org/drawingml/2006/main" xmlns:r="http://schemas.openxmlformats.org/officeDocument/2006/relationships" xmlns:p="http://schemas.openxmlformats.org/presentationml/2006/main">
-  <p:tag name="ALIGNMENT_TARGET_X" val="85.03936767578125"/>
+  <p:tag name="ALIGNMENT_TARGET_X" val="595.27558898925781"/>
 </p:tagLst>
 </file>
 
 <file path=ppt/tags/tag58.xml><?xml version="1.0" encoding="utf-8"?>
 <p:tagLst xmlns:a="http://schemas.openxmlformats.org/drawingml/2006/main" xmlns:r="http://schemas.openxmlformats.org/officeDocument/2006/relationships" xmlns:p="http://schemas.openxmlformats.org/presentationml/2006/main">
-  <p:tag name="ALIGNMENT_TARGET_X" val="442.2047119140625"/>
+  <p:tag name="ALIGNMENT_TARGET_X" val="952.44096374511719"/>
 </p:tagLst>
 </file>
 
 <file path=ppt/tags/tag59.xml><?xml version="1.0" encoding="utf-8"?>
 <p:tagLst xmlns:a="http://schemas.openxmlformats.org/drawingml/2006/main" xmlns:r="http://schemas.openxmlformats.org/officeDocument/2006/relationships" xmlns:p="http://schemas.openxmlformats.org/presentationml/2006/main">
-  <p:tag name="ALIGNMENT_TARGET_X" val="442.2047119140625"/>
+  <p:tag name="ALIGNMENT_TARGET_X" val="952.44096374511719"/>
 </p:tagLst>
 </file>
 
@@ -14422,13 +14115,13 @@
 
 <file path=ppt/tags/tag60.xml><?xml version="1.0" encoding="utf-8"?>
 <p:tagLst xmlns:a="http://schemas.openxmlformats.org/drawingml/2006/main" xmlns:r="http://schemas.openxmlformats.org/officeDocument/2006/relationships" xmlns:p="http://schemas.openxmlformats.org/presentationml/2006/main">
-  <p:tag name="ALIGNMENT_TARGET_X" val="799.37005615234375"/>
+  <p:tag name="ALIGNMENT_TARGET_X" val="595.27557373046875"/>
 </p:tagLst>
 </file>
 
 <file path=ppt/tags/tag61.xml><?xml version="1.0" encoding="utf-8"?>
 <p:tagLst xmlns:a="http://schemas.openxmlformats.org/drawingml/2006/main" xmlns:r="http://schemas.openxmlformats.org/officeDocument/2006/relationships" xmlns:p="http://schemas.openxmlformats.org/presentationml/2006/main">
-  <p:tag name="ALIGNMENT_TARGET_X" val="799.37005615234375"/>
+  <p:tag name="ALIGNMENT_TARGET_X" val="328.81890869140625"/>
 </p:tagLst>
 </file>
 
@@ -14440,7 +14133,7 @@
 
 <file path=ppt/tags/tag63.xml><?xml version="1.0" encoding="utf-8"?>
 <p:tagLst xmlns:a="http://schemas.openxmlformats.org/drawingml/2006/main" xmlns:r="http://schemas.openxmlformats.org/officeDocument/2006/relationships" xmlns:p="http://schemas.openxmlformats.org/presentationml/2006/main">
-  <p:tag name="ALIGNMENT_TARGET_X" val="116.22047424316406"/>
+  <p:tag name="ALIGNMENT_TARGET_X" val="583.93700408935547"/>
 </p:tagLst>
 </file>
 
@@ -14452,31 +14145,31 @@
 
 <file path=ppt/tags/tag65.xml><?xml version="1.0" encoding="utf-8"?>
 <p:tagLst xmlns:a="http://schemas.openxmlformats.org/drawingml/2006/main" xmlns:r="http://schemas.openxmlformats.org/officeDocument/2006/relationships" xmlns:p="http://schemas.openxmlformats.org/presentationml/2006/main">
-  <p:tag name="ALIGNMENT_TARGET_X" val="68.031494140625"/>
+  <p:tag name="ALIGNMENT_TARGET_X" val="583.93700408935547"/>
 </p:tagLst>
 </file>
 
 <file path=ppt/tags/tag66.xml><?xml version="1.0" encoding="utf-8"?>
 <p:tagLst xmlns:a="http://schemas.openxmlformats.org/drawingml/2006/main" xmlns:r="http://schemas.openxmlformats.org/officeDocument/2006/relationships" xmlns:p="http://schemas.openxmlformats.org/presentationml/2006/main">
-  <p:tag name="ALIGNMENT_TARGET_X" val="583.93700408935547"/>
+  <p:tag name="ALIGNMENT_TARGET_X" val="68.031494140625"/>
 </p:tagLst>
 </file>
 
 <file path=ppt/tags/tag67.xml><?xml version="1.0" encoding="utf-8"?>
 <p:tagLst xmlns:a="http://schemas.openxmlformats.org/drawingml/2006/main" xmlns:r="http://schemas.openxmlformats.org/officeDocument/2006/relationships" xmlns:p="http://schemas.openxmlformats.org/presentationml/2006/main">
-  <p:tag name="ALIGNMENT_TARGET_X" val="68.031494140625"/>
+  <p:tag name="ALIGNMENT_TARGET_X" val="583.93700408935547"/>
 </p:tagLst>
 </file>
 
 <file path=ppt/tags/tag68.xml><?xml version="1.0" encoding="utf-8"?>
 <p:tagLst xmlns:a="http://schemas.openxmlformats.org/drawingml/2006/main" xmlns:r="http://schemas.openxmlformats.org/officeDocument/2006/relationships" xmlns:p="http://schemas.openxmlformats.org/presentationml/2006/main">
-  <p:tag name="ALIGNMENT_TARGET_X" val="583.93700408935547"/>
+  <p:tag name="ALIGNMENT_TARGET_X" val="187.08660888671875"/>
 </p:tagLst>
 </file>
 
 <file path=ppt/tags/tag69.xml><?xml version="1.0" encoding="utf-8"?>
 <p:tagLst xmlns:a="http://schemas.openxmlformats.org/drawingml/2006/main" xmlns:r="http://schemas.openxmlformats.org/officeDocument/2006/relationships" xmlns:p="http://schemas.openxmlformats.org/presentationml/2006/main">
-  <p:tag name="ALIGNMENT_TARGET_X" val="68.031494140625"/>
+  <p:tag name="ALIGNMENT_TARGET_X" val="320.31497192382813"/>
 </p:tagLst>
 </file>
 
@@ -14488,61 +14181,61 @@
 
 <file path=ppt/tags/tag70.xml><?xml version="1.0" encoding="utf-8"?>
 <p:tagLst xmlns:a="http://schemas.openxmlformats.org/drawingml/2006/main" xmlns:r="http://schemas.openxmlformats.org/officeDocument/2006/relationships" xmlns:p="http://schemas.openxmlformats.org/presentationml/2006/main">
-  <p:tag name="ALIGNMENT_TARGET_X" val="583.93700408935547"/>
+  <p:tag name="ALIGNMENT_TARGET_X" val="453.54330444335938"/>
 </p:tagLst>
 </file>
 
 <file path=ppt/tags/tag71.xml><?xml version="1.0" encoding="utf-8"?>
 <p:tagLst xmlns:a="http://schemas.openxmlformats.org/drawingml/2006/main" xmlns:r="http://schemas.openxmlformats.org/officeDocument/2006/relationships" xmlns:p="http://schemas.openxmlformats.org/presentationml/2006/main">
-  <p:tag name="ALIGNMENT_TARGET_X" val="187.08660888671875"/>
+  <p:tag name="ALIGNMENT_TARGET_X" val="328.81890869140625"/>
 </p:tagLst>
 </file>
 
 <file path=ppt/tags/tag72.xml><?xml version="1.0" encoding="utf-8"?>
 <p:tagLst xmlns:a="http://schemas.openxmlformats.org/drawingml/2006/main" xmlns:r="http://schemas.openxmlformats.org/officeDocument/2006/relationships" xmlns:p="http://schemas.openxmlformats.org/presentationml/2006/main">
-  <p:tag name="ALIGNMENT_TARGET_X" val="320.31497192382813"/>
+  <p:tag name="ALIGNMENT_TARGET_X" val="873.07089233398438"/>
 </p:tagLst>
 </file>
 
 <file path=ppt/tags/tag73.xml><?xml version="1.0" encoding="utf-8"?>
 <p:tagLst xmlns:a="http://schemas.openxmlformats.org/drawingml/2006/main" xmlns:r="http://schemas.openxmlformats.org/officeDocument/2006/relationships" xmlns:p="http://schemas.openxmlformats.org/presentationml/2006/main">
-  <p:tag name="ALIGNMENT_TARGET_X" val="453.54330444335938"/>
+  <p:tag name="ALIGNMENT_TARGET_X" val="873.07089233398438"/>
 </p:tagLst>
 </file>
 
 <file path=ppt/tags/tag74.xml><?xml version="1.0" encoding="utf-8"?>
 <p:tagLst xmlns:a="http://schemas.openxmlformats.org/drawingml/2006/main" xmlns:r="http://schemas.openxmlformats.org/officeDocument/2006/relationships" xmlns:p="http://schemas.openxmlformats.org/presentationml/2006/main">
-  <p:tag name="ALIGNMENT_TARGET_X" val="68.031494140625"/>
+  <p:tag name="ALIGNMENT_TARGET_X" val="873.07089233398438"/>
 </p:tagLst>
 </file>
 
 <file path=ppt/tags/tag75.xml><?xml version="1.0" encoding="utf-8"?>
 <p:tagLst xmlns:a="http://schemas.openxmlformats.org/drawingml/2006/main" xmlns:r="http://schemas.openxmlformats.org/officeDocument/2006/relationships" xmlns:p="http://schemas.openxmlformats.org/presentationml/2006/main">
-  <p:tag name="ALIGNMENT_TARGET_X" val="623.6220703125"/>
+  <p:tag name="ALIGNMENT_TARGET_X" val="701.5748291015625"/>
 </p:tagLst>
 </file>
 
 <file path=ppt/tags/tag76.xml><?xml version="1.0" encoding="utf-8"?>
 <p:tagLst xmlns:a="http://schemas.openxmlformats.org/drawingml/2006/main" xmlns:r="http://schemas.openxmlformats.org/officeDocument/2006/relationships" xmlns:p="http://schemas.openxmlformats.org/presentationml/2006/main">
-  <p:tag name="ALIGNMENT_TARGET_X" val="623.6220703125"/>
+  <p:tag name="ALIGNMENT_TARGET_X" val="701.5748291015625"/>
 </p:tagLst>
 </file>
 
 <file path=ppt/tags/tag77.xml><?xml version="1.0" encoding="utf-8"?>
 <p:tagLst xmlns:a="http://schemas.openxmlformats.org/drawingml/2006/main" xmlns:r="http://schemas.openxmlformats.org/officeDocument/2006/relationships" xmlns:p="http://schemas.openxmlformats.org/presentationml/2006/main">
-  <p:tag name="ALIGNMENT_TARGET_X" val="623.6220703125"/>
+  <p:tag name="ALIGNMENT_TARGET_X" val="869.6693115234375"/>
 </p:tagLst>
 </file>
 
 <file path=ppt/tags/tag78.xml><?xml version="1.0" encoding="utf-8"?>
 <p:tagLst xmlns:a="http://schemas.openxmlformats.org/drawingml/2006/main" xmlns:r="http://schemas.openxmlformats.org/officeDocument/2006/relationships" xmlns:p="http://schemas.openxmlformats.org/presentationml/2006/main">
-  <p:tag name="ALIGNMENT_TARGET_X" val="701.5748291015625"/>
+  <p:tag name="ALIGNMENT_TARGET_X" val="869.6693115234375"/>
 </p:tagLst>
 </file>
 
 <file path=ppt/tags/tag79.xml><?xml version="1.0" encoding="utf-8"?>
 <p:tagLst xmlns:a="http://schemas.openxmlformats.org/drawingml/2006/main" xmlns:r="http://schemas.openxmlformats.org/officeDocument/2006/relationships" xmlns:p="http://schemas.openxmlformats.org/presentationml/2006/main">
-  <p:tag name="ALIGNMENT_TARGET_X" val="701.5748291015625"/>
+  <p:tag name="ALIGNMENT_TARGET_X" val="1037.7637939453125"/>
 </p:tagLst>
 </file>
 
@@ -14554,125 +14247,107 @@
 
 <file path=ppt/tags/tag80.xml><?xml version="1.0" encoding="utf-8"?>
 <p:tagLst xmlns:a="http://schemas.openxmlformats.org/drawingml/2006/main" xmlns:r="http://schemas.openxmlformats.org/officeDocument/2006/relationships" xmlns:p="http://schemas.openxmlformats.org/presentationml/2006/main">
-  <p:tag name="ALIGNMENT_TARGET_X" val="869.6693115234375"/>
+  <p:tag name="ALIGNMENT_TARGET_X" val="1037.7637939453125"/>
 </p:tagLst>
 </file>
 
 <file path=ppt/tags/tag81.xml><?xml version="1.0" encoding="utf-8"?>
 <p:tagLst xmlns:a="http://schemas.openxmlformats.org/drawingml/2006/main" xmlns:r="http://schemas.openxmlformats.org/officeDocument/2006/relationships" xmlns:p="http://schemas.openxmlformats.org/presentationml/2006/main">
-  <p:tag name="ALIGNMENT_TARGET_X" val="869.6693115234375"/>
+  <p:tag name="ALIGNMENT_TARGET_X" val="873.07089233398438"/>
 </p:tagLst>
 </file>
 
 <file path=ppt/tags/tag82.xml><?xml version="1.0" encoding="utf-8"?>
 <p:tagLst xmlns:a="http://schemas.openxmlformats.org/drawingml/2006/main" xmlns:r="http://schemas.openxmlformats.org/officeDocument/2006/relationships" xmlns:p="http://schemas.openxmlformats.org/presentationml/2006/main">
-  <p:tag name="ALIGNMENT_TARGET_X" val="1037.7637939453125"/>
+  <p:tag name="ALIGNMENT_TARGET_X" val="170.07874298095703"/>
 </p:tagLst>
 </file>
 
 <file path=ppt/tags/tag83.xml><?xml version="1.0" encoding="utf-8"?>
 <p:tagLst xmlns:a="http://schemas.openxmlformats.org/drawingml/2006/main" xmlns:r="http://schemas.openxmlformats.org/officeDocument/2006/relationships" xmlns:p="http://schemas.openxmlformats.org/presentationml/2006/main">
-  <p:tag name="ALIGNMENT_TARGET_X" val="1037.7637939453125"/>
+  <p:tag name="ALIGNMENT_TARGET_X" val="308.97637939453125"/>
 </p:tagLst>
 </file>
 
 <file path=ppt/tags/tag84.xml><?xml version="1.0" encoding="utf-8"?>
 <p:tagLst xmlns:a="http://schemas.openxmlformats.org/drawingml/2006/main" xmlns:r="http://schemas.openxmlformats.org/officeDocument/2006/relationships" xmlns:p="http://schemas.openxmlformats.org/presentationml/2006/main">
-  <p:tag name="ALIGNMENT_TARGET_X" val="623.6220703125"/>
+  <p:tag name="ALIGNMENT_TARGET_X" val="308.97637939453125"/>
 </p:tagLst>
 </file>
 
 <file path=ppt/tags/tag85.xml><?xml version="1.0" encoding="utf-8"?>
 <p:tagLst xmlns:a="http://schemas.openxmlformats.org/drawingml/2006/main" xmlns:r="http://schemas.openxmlformats.org/officeDocument/2006/relationships" xmlns:p="http://schemas.openxmlformats.org/presentationml/2006/main">
-  <p:tag name="ALIGNMENT_TARGET_X" val="79.370079040527344"/>
+  <p:tag name="ALIGNMENT_TARGET_X" val="402.51968383789063"/>
 </p:tagLst>
 </file>
 
 <file path=ppt/tags/tag86.xml><?xml version="1.0" encoding="utf-8"?>
 <p:tagLst xmlns:a="http://schemas.openxmlformats.org/drawingml/2006/main" xmlns:r="http://schemas.openxmlformats.org/officeDocument/2006/relationships" xmlns:p="http://schemas.openxmlformats.org/presentationml/2006/main">
-  <p:tag name="ALIGNMENT_TARGET_X" val="308.97637939453125"/>
+  <p:tag name="ALIGNMENT_TARGET_X" val="402.51968383789063"/>
 </p:tagLst>
 </file>
 
 <file path=ppt/tags/tag87.xml><?xml version="1.0" encoding="utf-8"?>
 <p:tagLst xmlns:a="http://schemas.openxmlformats.org/drawingml/2006/main" xmlns:r="http://schemas.openxmlformats.org/officeDocument/2006/relationships" xmlns:p="http://schemas.openxmlformats.org/presentationml/2006/main">
-  <p:tag name="ALIGNMENT_TARGET_X" val="308.97637939453125"/>
+  <p:tag name="ALIGNMENT_TARGET_X" val="496.06298828125"/>
 </p:tagLst>
 </file>
 
 <file path=ppt/tags/tag88.xml><?xml version="1.0" encoding="utf-8"?>
 <p:tagLst xmlns:a="http://schemas.openxmlformats.org/drawingml/2006/main" xmlns:r="http://schemas.openxmlformats.org/officeDocument/2006/relationships" xmlns:p="http://schemas.openxmlformats.org/presentationml/2006/main">
-  <p:tag name="ALIGNMENT_TARGET_X" val="402.51968383789063"/>
+  <p:tag name="ALIGNMENT_TARGET_X" val="496.06298828125"/>
 </p:tagLst>
 </file>
 
 <file path=ppt/tags/tag89.xml><?xml version="1.0" encoding="utf-8"?>
 <p:tagLst xmlns:a="http://schemas.openxmlformats.org/drawingml/2006/main" xmlns:r="http://schemas.openxmlformats.org/officeDocument/2006/relationships" xmlns:p="http://schemas.openxmlformats.org/presentationml/2006/main">
-  <p:tag name="ALIGNMENT_TARGET_X" val="402.51968383789063"/>
+  <p:tag name="ALIGNMENT_TARGET_X" val="589.60629272460938"/>
 </p:tagLst>
 </file>
 
 <file path=ppt/tags/tag9.xml><?xml version="1.0" encoding="utf-8"?>
 <p:tagLst xmlns:a="http://schemas.openxmlformats.org/drawingml/2006/main" xmlns:r="http://schemas.openxmlformats.org/officeDocument/2006/relationships" xmlns:p="http://schemas.openxmlformats.org/presentationml/2006/main">
-  <p:tag name="ALIGNMENT_TARGET_X" val="68.031494140625"/>
+  <p:tag name="ALIGNMENT_TARGET_X" val="595.27557373046875"/>
 </p:tagLst>
 </file>
 
 <file path=ppt/tags/tag90.xml><?xml version="1.0" encoding="utf-8"?>
 <p:tagLst xmlns:a="http://schemas.openxmlformats.org/drawingml/2006/main" xmlns:r="http://schemas.openxmlformats.org/officeDocument/2006/relationships" xmlns:p="http://schemas.openxmlformats.org/presentationml/2006/main">
-  <p:tag name="ALIGNMENT_TARGET_X" val="496.06298828125"/>
+  <p:tag name="ALIGNMENT_TARGET_X" val="589.60629272460938"/>
 </p:tagLst>
 </file>
 
 <file path=ppt/tags/tag91.xml><?xml version="1.0" encoding="utf-8"?>
 <p:tagLst xmlns:a="http://schemas.openxmlformats.org/drawingml/2006/main" xmlns:r="http://schemas.openxmlformats.org/officeDocument/2006/relationships" xmlns:p="http://schemas.openxmlformats.org/presentationml/2006/main">
-  <p:tag name="ALIGNMENT_TARGET_X" val="496.06298828125"/>
+  <p:tag name="ALIGNMENT_TARGET_X" val="683.14962768554688"/>
 </p:tagLst>
 </file>
 
 <file path=ppt/tags/tag92.xml><?xml version="1.0" encoding="utf-8"?>
 <p:tagLst xmlns:a="http://schemas.openxmlformats.org/drawingml/2006/main" xmlns:r="http://schemas.openxmlformats.org/officeDocument/2006/relationships" xmlns:p="http://schemas.openxmlformats.org/presentationml/2006/main">
-  <p:tag name="ALIGNMENT_TARGET_X" val="589.60629272460938"/>
+  <p:tag name="ALIGNMENT_TARGET_X" val="683.14962768554688"/>
 </p:tagLst>
 </file>
 
 <file path=ppt/tags/tag93.xml><?xml version="1.0" encoding="utf-8"?>
 <p:tagLst xmlns:a="http://schemas.openxmlformats.org/drawingml/2006/main" xmlns:r="http://schemas.openxmlformats.org/officeDocument/2006/relationships" xmlns:p="http://schemas.openxmlformats.org/presentationml/2006/main">
-  <p:tag name="ALIGNMENT_TARGET_X" val="589.60629272460938"/>
+  <p:tag name="ALIGNMENT_TARGET_X" val="776.69290161132813"/>
 </p:tagLst>
 </file>
 
 <file path=ppt/tags/tag94.xml><?xml version="1.0" encoding="utf-8"?>
 <p:tagLst xmlns:a="http://schemas.openxmlformats.org/drawingml/2006/main" xmlns:r="http://schemas.openxmlformats.org/officeDocument/2006/relationships" xmlns:p="http://schemas.openxmlformats.org/presentationml/2006/main">
-  <p:tag name="ALIGNMENT_TARGET_X" val="683.14962768554688"/>
+  <p:tag name="ALIGNMENT_TARGET_X" val="776.69290161132813"/>
 </p:tagLst>
 </file>
 
 <file path=ppt/tags/tag95.xml><?xml version="1.0" encoding="utf-8"?>
 <p:tagLst xmlns:a="http://schemas.openxmlformats.org/drawingml/2006/main" xmlns:r="http://schemas.openxmlformats.org/officeDocument/2006/relationships" xmlns:p="http://schemas.openxmlformats.org/presentationml/2006/main">
-  <p:tag name="ALIGNMENT_TARGET_X" val="683.14962768554688"/>
+  <p:tag name="ALIGNMENT_TARGET_X" val="975.11810302734375"/>
 </p:tagLst>
 </file>
 
 <file path=ppt/tags/tag96.xml><?xml version="1.0" encoding="utf-8"?>
-<p:tagLst xmlns:a="http://schemas.openxmlformats.org/drawingml/2006/main" xmlns:r="http://schemas.openxmlformats.org/officeDocument/2006/relationships" xmlns:p="http://schemas.openxmlformats.org/presentationml/2006/main">
-  <p:tag name="ALIGNMENT_TARGET_X" val="776.69290161132813"/>
-</p:tagLst>
-</file>
-
-<file path=ppt/tags/tag97.xml><?xml version="1.0" encoding="utf-8"?>
-<p:tagLst xmlns:a="http://schemas.openxmlformats.org/drawingml/2006/main" xmlns:r="http://schemas.openxmlformats.org/officeDocument/2006/relationships" xmlns:p="http://schemas.openxmlformats.org/presentationml/2006/main">
-  <p:tag name="ALIGNMENT_TARGET_X" val="776.69290161132813"/>
-</p:tagLst>
-</file>
-
-<file path=ppt/tags/tag98.xml><?xml version="1.0" encoding="utf-8"?>
-<p:tagLst xmlns:a="http://schemas.openxmlformats.org/drawingml/2006/main" xmlns:r="http://schemas.openxmlformats.org/officeDocument/2006/relationships" xmlns:p="http://schemas.openxmlformats.org/presentationml/2006/main">
-  <p:tag name="ALIGNMENT_TARGET_X" val="1111.1810913085938"/>
-</p:tagLst>
-</file>
-
-<file path=ppt/tags/tag99.xml><?xml version="1.0" encoding="utf-8"?>
 <p:tagLst xmlns:a="http://schemas.openxmlformats.org/drawingml/2006/main" xmlns:r="http://schemas.openxmlformats.org/officeDocument/2006/relationships" xmlns:p="http://schemas.openxmlformats.org/presentationml/2006/main">
   <p:tag name="ALIGNMENT_TARGET_X" val="595.27557373046875"/>
 </p:tagLst>

--- a/deliverables/決賽海報_AI資安框架_A2.pptx
+++ b/deliverables/決賽海報_AI資安框架_A2.pptx
@@ -4185,7 +4185,7 @@
         </p:nvSpPr>
         <p:spPr>
           <a:xfrm>
-            <a:off x="783037" y="720000"/>
+            <a:off x="765575" y="720000"/>
             <a:ext cx="13392000" cy="2556000"/>
           </a:xfrm>
           <a:prstGeom prst="rect">
@@ -4201,7 +4201,7 @@
           <a:p>
             <a:pPr algn="ctr">
               <a:lnSpc>
-                <a:spcPct val="110000"/>
+                <a:spcPct val="100000"/>
               </a:lnSpc>
               <a:spcBef>
                 <a:spcPts val="0"/>
@@ -4211,7 +4211,7 @@
               </a:spcAft>
             </a:pPr>
             <a:r>
-              <a:rPr sz="4600" b="1">
+              <a:rPr sz="5600" b="1">
                 <a:solidFill>
                   <a:srgbClr val="0B1B2E"/>
                 </a:solidFill>
@@ -4225,7 +4225,7 @@
           <a:p>
             <a:pPr algn="ctr">
               <a:lnSpc>
-                <a:spcPct val="110000"/>
+                <a:spcPct val="100000"/>
               </a:lnSpc>
               <a:spcBef>
                 <a:spcPts val="0"/>
@@ -4235,7 +4235,7 @@
               </a:spcAft>
             </a:pPr>
             <a:r>
-              <a:rPr sz="4600" b="1">
+              <a:rPr sz="5600" b="1">
                 <a:solidFill>
                   <a:srgbClr val="0B1B2E"/>
                 </a:solidFill>
@@ -4249,7 +4249,7 @@
           <a:p>
             <a:pPr algn="ctr">
               <a:lnSpc>
-                <a:spcPct val="110000"/>
+                <a:spcPct val="100000"/>
               </a:lnSpc>
               <a:spcBef>
                 <a:spcPts val="0"/>
@@ -4259,7 +4259,7 @@
               </a:spcAft>
             </a:pPr>
             <a:r>
-              <a:rPr sz="4600" b="1">
+              <a:rPr sz="5600" b="1">
                 <a:solidFill>
                   <a:srgbClr val="0B1B2E"/>
                 </a:solidFill>
@@ -4423,15 +4423,128 @@
           </a:p>
         </p:txBody>
       </p:sp>
+      <p:sp>
+        <p:nvSpPr>
+          <p:cNvPr id="9" name="Rounded Rectangle 8"/>
+          <p:cNvSpPr/>
+          <p:nvPr/>
+        </p:nvSpPr>
+        <p:spPr>
+          <a:xfrm>
+            <a:off x="2880000" y="4266000"/>
+            <a:ext cx="9360000" cy="288000"/>
+          </a:xfrm>
+          <a:prstGeom prst="roundRect">
+            <a:avLst>
+              <a:gd name="adj" fmla="val 30000"/>
+            </a:avLst>
+          </a:prstGeom>
+          <a:solidFill>
+            <a:srgbClr val="FEF3D7"/>
+          </a:solidFill>
+          <a:ln>
+            <a:noFill/>
+          </a:ln>
+          <a:effectLst/>
+        </p:spPr>
+        <p:style>
+          <a:lnRef idx="1">
+            <a:schemeClr val="accent1"/>
+          </a:lnRef>
+          <a:fillRef idx="3">
+            <a:schemeClr val="accent1"/>
+          </a:fillRef>
+          <a:effectRef idx="2">
+            <a:schemeClr val="accent1"/>
+          </a:effectRef>
+          <a:fontRef idx="minor">
+            <a:schemeClr val="lt1"/>
+          </a:fontRef>
+        </p:style>
+        <p:txBody>
+          <a:bodyPr rtlCol="0" anchor="ctr"/>
+          <a:lstStyle/>
+          <a:p>
+            <a:pPr algn="ctr"/>
+            <a:endParaRPr>
+              <a:latin typeface="Segoe UI"/>
+              <a:ea typeface="Microsoft JhengHei"/>
+              <a:cs typeface="Segoe UI"/>
+            </a:endParaRPr>
+          </a:p>
+        </p:txBody>
+      </p:sp>
+      <p:sp>
+        <p:nvSpPr>
+          <p:cNvPr id="10" name="TextBox 9"/>
+          <p:cNvSpPr txBox="1"/>
+          <p:nvPr>
+            <p:custDataLst>
+              <p:tags r:id="rId5"/>
+            </p:custDataLst>
+          </p:nvPr>
+        </p:nvSpPr>
+        <p:spPr>
+          <a:xfrm>
+            <a:off x="2855394" y="4266000"/>
+            <a:ext cx="9360000" cy="288000"/>
+          </a:xfrm>
+          <a:prstGeom prst="rect">
+            <a:avLst/>
+          </a:prstGeom>
+          <a:noFill/>
+        </p:spPr>
+        <p:txBody>
+          <a:bodyPr wrap="none" lIns="0" tIns="0" rIns="0" bIns="0" anchor="ctr">
+            <a:spAutoFit/>
+          </a:bodyPr>
+          <a:lstStyle/>
+          <a:p>
+            <a:pPr algn="ctr">
+              <a:lnSpc>
+                <a:spcPct val="110000"/>
+              </a:lnSpc>
+              <a:spcBef>
+                <a:spcPts val="0"/>
+              </a:spcBef>
+              <a:spcAft>
+                <a:spcPts val="0"/>
+              </a:spcAft>
+            </a:pPr>
+            <a:r>
+              <a:rPr sz="1400" b="1">
+                <a:solidFill>
+                  <a:srgbClr val="F59E0B"/>
+                </a:solidFill>
+                <a:latin typeface="Segoe UI"/>
+                <a:ea typeface="Microsoft JhengHei"/>
+                <a:cs typeface="Segoe UI"/>
+              </a:rPr>
+              <a:t>★ </a:t>
+            </a:r>
+            <a:r>
+              <a:rPr sz="1400" b="1">
+                <a:solidFill>
+                  <a:srgbClr val="0B1B2E"/>
+                </a:solidFill>
+                <a:latin typeface="Segoe UI"/>
+                <a:ea typeface="Microsoft JhengHei"/>
+                <a:cs typeface="Segoe UI"/>
+              </a:rPr>
+              <a:t>本團隊原創：CTBM、校準融合、任務導向檢索、本機AI稽核、受控回復　｜　引用既有：PBCNN</a:t>
+            </a:r>
+          </a:p>
+        </p:txBody>
+      </p:sp>
       <p:cxnSp>
         <p:nvCxnSpPr>
-          <p:cNvPr id="9" name="Connector 8"/>
+          <p:cNvPr id="11" name="Connector 10"/>
           <p:cNvCxnSpPr/>
           <p:nvPr/>
         </p:nvCxnSpPr>
         <p:spPr>
           <a:xfrm>
-            <a:off x="2016000" y="4896000"/>
+            <a:off x="2016000" y="5004000"/>
             <a:ext cx="11088000" cy="0"/>
           </a:xfrm>
           <a:prstGeom prst="line">
@@ -4461,13 +4574,13 @@
       </p:cxnSp>
       <p:sp>
         <p:nvSpPr>
-          <p:cNvPr id="10" name="Oval 9"/>
+          <p:cNvPr id="12" name="Oval 11"/>
           <p:cNvSpPr/>
           <p:nvPr/>
         </p:nvSpPr>
         <p:spPr>
           <a:xfrm>
-            <a:off x="1728000" y="4608000"/>
+            <a:off x="1728000" y="4716000"/>
             <a:ext cx="576000" cy="576000"/>
           </a:xfrm>
           <a:prstGeom prst="ellipse">
@@ -4512,133 +4625,7 @@
       </p:sp>
       <p:pic>
         <p:nvPicPr>
-          <p:cNvPr id="11" name="Picture 10" descr="flat-icon-2.png"/>
-          <p:cNvPicPr>
-            <a:picLocks noChangeAspect="1"/>
-          </p:cNvPicPr>
-          <p:nvPr/>
-        </p:nvPicPr>
-        <p:blipFill>
-          <a:blip r:embed="rId98"/>
-          <a:stretch>
-            <a:fillRect/>
-          </a:stretch>
-        </p:blipFill>
-        <p:spPr>
-          <a:xfrm>
-            <a:off x="1836000" y="4716000"/>
-            <a:ext cx="360000" cy="360000"/>
-          </a:xfrm>
-          <a:prstGeom prst="rect">
-            <a:avLst/>
-          </a:prstGeom>
-        </p:spPr>
-      </p:pic>
-      <p:sp>
-        <p:nvSpPr>
-          <p:cNvPr id="12" name="TextBox 11"/>
-          <p:cNvSpPr txBox="1"/>
-          <p:nvPr>
-            <p:custDataLst>
-              <p:tags r:id="rId5"/>
-            </p:custDataLst>
-          </p:nvPr>
-        </p:nvSpPr>
-        <p:spPr>
-          <a:xfrm>
-            <a:off x="1261075" y="5256000"/>
-            <a:ext cx="1440000" cy="324000"/>
-          </a:xfrm>
-          <a:prstGeom prst="rect">
-            <a:avLst/>
-          </a:prstGeom>
-          <a:noFill/>
-        </p:spPr>
-        <p:txBody>
-          <a:bodyPr wrap="none" lIns="0" tIns="0" rIns="0" bIns="0" anchor="ctr">
-            <a:spAutoFit/>
-          </a:bodyPr>
-          <a:lstStyle/>
-          <a:p>
-            <a:pPr algn="ctr">
-              <a:lnSpc>
-                <a:spcPct val="110000"/>
-              </a:lnSpc>
-              <a:spcBef>
-                <a:spcPts val="0"/>
-              </a:spcBef>
-              <a:spcAft>
-                <a:spcPts val="0"/>
-              </a:spcAft>
-            </a:pPr>
-            <a:r>
-              <a:rPr sz="2000" b="1">
-                <a:solidFill>
-                  <a:srgbClr val="0B1B2E"/>
-                </a:solidFill>
-                <a:latin typeface="Segoe UI"/>
-                <a:ea typeface="Microsoft JhengHei"/>
-                <a:cs typeface="Segoe UI"/>
-              </a:rPr>
-              <a:t>偵測</a:t>
-            </a:r>
-          </a:p>
-        </p:txBody>
-      </p:sp>
-      <p:sp>
-        <p:nvSpPr>
-          <p:cNvPr id="13" name="Oval 12"/>
-          <p:cNvSpPr/>
-          <p:nvPr/>
-        </p:nvSpPr>
-        <p:spPr>
-          <a:xfrm>
-            <a:off x="5425200" y="4608000"/>
-            <a:ext cx="576000" cy="576000"/>
-          </a:xfrm>
-          <a:prstGeom prst="ellipse">
-            <a:avLst/>
-          </a:prstGeom>
-          <a:solidFill>
-            <a:srgbClr val="FFFFFF"/>
-          </a:solidFill>
-          <a:ln w="10160">
-            <a:solidFill>
-              <a:srgbClr val="1D4ED8"/>
-            </a:solidFill>
-          </a:ln>
-          <a:effectLst/>
-        </p:spPr>
-        <p:style>
-          <a:lnRef idx="1">
-            <a:schemeClr val="accent1"/>
-          </a:lnRef>
-          <a:fillRef idx="3">
-            <a:schemeClr val="accent1"/>
-          </a:fillRef>
-          <a:effectRef idx="2">
-            <a:schemeClr val="accent1"/>
-          </a:effectRef>
-          <a:fontRef idx="minor">
-            <a:schemeClr val="lt1"/>
-          </a:fontRef>
-        </p:style>
-        <p:txBody>
-          <a:bodyPr rtlCol="0" anchor="ctr"/>
-          <a:lstStyle/>
-          <a:p>
-            <a:pPr algn="ctr"/>
-            <a:endParaRPr>
-              <a:latin typeface="Segoe UI"/>
-              <a:ea typeface="Microsoft JhengHei"/>
-              <a:cs typeface="Segoe UI"/>
-            </a:endParaRPr>
-          </a:p>
-        </p:txBody>
-      </p:sp>
-      <p:pic>
-        <p:nvPicPr>
-          <p:cNvPr id="14" name="Picture 13" descr="flat-icon-3.png"/>
+          <p:cNvPr id="13" name="Picture 12" descr="flat-icon-2.png"/>
           <p:cNvPicPr>
             <a:picLocks noChangeAspect="1"/>
           </p:cNvPicPr>
@@ -4652,7 +4639,7 @@
         </p:blipFill>
         <p:spPr>
           <a:xfrm>
-            <a:off x="5533200" y="4716000"/>
+            <a:off x="1836000" y="4824000"/>
             <a:ext cx="360000" cy="360000"/>
           </a:xfrm>
           <a:prstGeom prst="rect">
@@ -4662,7 +4649,7 @@
       </p:pic>
       <p:sp>
         <p:nvSpPr>
-          <p:cNvPr id="15" name="TextBox 14"/>
+          <p:cNvPr id="14" name="TextBox 13"/>
           <p:cNvSpPr txBox="1"/>
           <p:nvPr>
             <p:custDataLst>
@@ -4672,7 +4659,7 @@
         </p:nvSpPr>
         <p:spPr>
           <a:xfrm>
-            <a:off x="4958274" y="5256000"/>
+            <a:off x="1261075" y="5364000"/>
             <a:ext cx="1440000" cy="324000"/>
           </a:xfrm>
           <a:prstGeom prst="rect">
@@ -4706,20 +4693,20 @@
                 <a:ea typeface="Microsoft JhengHei"/>
                 <a:cs typeface="Segoe UI"/>
               </a:rPr>
-              <a:t>檢索</a:t>
-            </a:r>
-          </a:p>
-        </p:txBody>
-      </p:sp>
-      <p:sp>
-        <p:nvSpPr>
-          <p:cNvPr id="16" name="Oval 15"/>
+              <a:t>偵測</a:t>
+            </a:r>
+          </a:p>
+        </p:txBody>
+      </p:sp>
+      <p:sp>
+        <p:nvSpPr>
+          <p:cNvPr id="15" name="Oval 14"/>
           <p:cNvSpPr/>
           <p:nvPr/>
         </p:nvSpPr>
         <p:spPr>
           <a:xfrm>
-            <a:off x="9122400" y="4608000"/>
+            <a:off x="5425200" y="4716000"/>
             <a:ext cx="576000" cy="576000"/>
           </a:xfrm>
           <a:prstGeom prst="ellipse">
@@ -4762,270 +4749,9 @@
           </a:p>
         </p:txBody>
       </p:sp>
-      <p:sp>
-        <p:nvSpPr>
-          <p:cNvPr id="17" name="Rectangle 16"/>
-          <p:cNvSpPr/>
-          <p:nvPr/>
-        </p:nvSpPr>
-        <p:spPr>
-          <a:xfrm>
-            <a:off x="9295200" y="4716000"/>
-            <a:ext cx="230400" cy="360000"/>
-          </a:xfrm>
-          <a:prstGeom prst="rect">
-            <a:avLst/>
-          </a:prstGeom>
-          <a:solidFill>
-            <a:srgbClr val="FFFFFF"/>
-          </a:solidFill>
-          <a:ln w="10160">
-            <a:solidFill>
-              <a:srgbClr val="1D4ED8"/>
-            </a:solidFill>
-          </a:ln>
-          <a:effectLst/>
-        </p:spPr>
-        <p:style>
-          <a:lnRef idx="1">
-            <a:schemeClr val="accent1"/>
-          </a:lnRef>
-          <a:fillRef idx="3">
-            <a:schemeClr val="accent1"/>
-          </a:fillRef>
-          <a:effectRef idx="2">
-            <a:schemeClr val="accent1"/>
-          </a:effectRef>
-          <a:fontRef idx="minor">
-            <a:schemeClr val="lt1"/>
-          </a:fontRef>
-        </p:style>
-        <p:txBody>
-          <a:bodyPr rtlCol="0" anchor="ctr"/>
-          <a:lstStyle/>
-          <a:p>
-            <a:pPr algn="ctr"/>
-            <a:endParaRPr>
-              <a:latin typeface="Segoe UI"/>
-              <a:ea typeface="Microsoft JhengHei"/>
-              <a:cs typeface="Segoe UI"/>
-            </a:endParaRPr>
-          </a:p>
-        </p:txBody>
-      </p:sp>
-      <p:cxnSp>
-        <p:nvCxnSpPr>
-          <p:cNvPr id="18" name="Connector 17"/>
-          <p:cNvCxnSpPr/>
-          <p:nvPr/>
-        </p:nvCxnSpPr>
-        <p:spPr>
-          <a:xfrm>
-            <a:off x="9345888" y="4806000"/>
-            <a:ext cx="129024" cy="0"/>
-          </a:xfrm>
-          <a:prstGeom prst="line">
-            <a:avLst/>
-          </a:prstGeom>
-          <a:ln w="10160">
-            <a:solidFill>
-              <a:srgbClr val="1D4ED8"/>
-            </a:solidFill>
-          </a:ln>
-          <a:effectLst/>
-        </p:spPr>
-        <p:style>
-          <a:lnRef idx="2">
-            <a:schemeClr val="accent1"/>
-          </a:lnRef>
-          <a:fillRef idx="0">
-            <a:schemeClr val="accent1"/>
-          </a:fillRef>
-          <a:effectRef idx="1">
-            <a:schemeClr val="accent1"/>
-          </a:effectRef>
-          <a:fontRef idx="minor">
-            <a:schemeClr val="tx1"/>
-          </a:fontRef>
-        </p:style>
-      </p:cxnSp>
-      <p:cxnSp>
-        <p:nvCxnSpPr>
-          <p:cNvPr id="19" name="Connector 18"/>
-          <p:cNvCxnSpPr/>
-          <p:nvPr/>
-        </p:nvCxnSpPr>
-        <p:spPr>
-          <a:xfrm>
-            <a:off x="9345888" y="4896000"/>
-            <a:ext cx="129024" cy="0"/>
-          </a:xfrm>
-          <a:prstGeom prst="line">
-            <a:avLst/>
-          </a:prstGeom>
-          <a:ln w="10160">
-            <a:solidFill>
-              <a:srgbClr val="1D4ED8"/>
-            </a:solidFill>
-          </a:ln>
-          <a:effectLst/>
-        </p:spPr>
-        <p:style>
-          <a:lnRef idx="2">
-            <a:schemeClr val="accent1"/>
-          </a:lnRef>
-          <a:fillRef idx="0">
-            <a:schemeClr val="accent1"/>
-          </a:fillRef>
-          <a:effectRef idx="1">
-            <a:schemeClr val="accent1"/>
-          </a:effectRef>
-          <a:fontRef idx="minor">
-            <a:schemeClr val="tx1"/>
-          </a:fontRef>
-        </p:style>
-      </p:cxnSp>
-      <p:cxnSp>
-        <p:nvCxnSpPr>
-          <p:cNvPr id="20" name="Connector 19"/>
-          <p:cNvCxnSpPr/>
-          <p:nvPr/>
-        </p:nvCxnSpPr>
-        <p:spPr>
-          <a:xfrm>
-            <a:off x="9345888" y="4986000"/>
-            <a:ext cx="129024" cy="0"/>
-          </a:xfrm>
-          <a:prstGeom prst="line">
-            <a:avLst/>
-          </a:prstGeom>
-          <a:ln w="10160">
-            <a:solidFill>
-              <a:srgbClr val="1D4ED8"/>
-            </a:solidFill>
-          </a:ln>
-          <a:effectLst/>
-        </p:spPr>
-        <p:style>
-          <a:lnRef idx="2">
-            <a:schemeClr val="accent1"/>
-          </a:lnRef>
-          <a:fillRef idx="0">
-            <a:schemeClr val="accent1"/>
-          </a:fillRef>
-          <a:effectRef idx="1">
-            <a:schemeClr val="accent1"/>
-          </a:effectRef>
-          <a:fontRef idx="minor">
-            <a:schemeClr val="tx1"/>
-          </a:fontRef>
-        </p:style>
-      </p:cxnSp>
-      <p:sp>
-        <p:nvSpPr>
-          <p:cNvPr id="21" name="TextBox 20"/>
-          <p:cNvSpPr txBox="1"/>
-          <p:nvPr>
-            <p:custDataLst>
-              <p:tags r:id="rId7"/>
-            </p:custDataLst>
-          </p:nvPr>
-        </p:nvSpPr>
-        <p:spPr>
-          <a:xfrm>
-            <a:off x="8655475" y="5256000"/>
-            <a:ext cx="1440000" cy="324000"/>
-          </a:xfrm>
-          <a:prstGeom prst="rect">
-            <a:avLst/>
-          </a:prstGeom>
-          <a:noFill/>
-        </p:spPr>
-        <p:txBody>
-          <a:bodyPr wrap="none" lIns="0" tIns="0" rIns="0" bIns="0" anchor="ctr">
-            <a:spAutoFit/>
-          </a:bodyPr>
-          <a:lstStyle/>
-          <a:p>
-            <a:pPr algn="ctr">
-              <a:lnSpc>
-                <a:spcPct val="110000"/>
-              </a:lnSpc>
-              <a:spcBef>
-                <a:spcPts val="0"/>
-              </a:spcBef>
-              <a:spcAft>
-                <a:spcPts val="0"/>
-              </a:spcAft>
-            </a:pPr>
-            <a:r>
-              <a:rPr sz="2000" b="1">
-                <a:solidFill>
-                  <a:srgbClr val="0B1B2E"/>
-                </a:solidFill>
-                <a:latin typeface="Segoe UI"/>
-                <a:ea typeface="Microsoft JhengHei"/>
-                <a:cs typeface="Segoe UI"/>
-              </a:rPr>
-              <a:t>稽核</a:t>
-            </a:r>
-          </a:p>
-        </p:txBody>
-      </p:sp>
-      <p:sp>
-        <p:nvSpPr>
-          <p:cNvPr id="22" name="Oval 21"/>
-          <p:cNvSpPr/>
-          <p:nvPr/>
-        </p:nvSpPr>
-        <p:spPr>
-          <a:xfrm>
-            <a:off x="12819600" y="4608000"/>
-            <a:ext cx="576000" cy="576000"/>
-          </a:xfrm>
-          <a:prstGeom prst="ellipse">
-            <a:avLst/>
-          </a:prstGeom>
-          <a:solidFill>
-            <a:srgbClr val="FFFFFF"/>
-          </a:solidFill>
-          <a:ln w="10160">
-            <a:solidFill>
-              <a:srgbClr val="1D4ED8"/>
-            </a:solidFill>
-          </a:ln>
-          <a:effectLst/>
-        </p:spPr>
-        <p:style>
-          <a:lnRef idx="1">
-            <a:schemeClr val="accent1"/>
-          </a:lnRef>
-          <a:fillRef idx="3">
-            <a:schemeClr val="accent1"/>
-          </a:fillRef>
-          <a:effectRef idx="2">
-            <a:schemeClr val="accent1"/>
-          </a:effectRef>
-          <a:fontRef idx="minor">
-            <a:schemeClr val="lt1"/>
-          </a:fontRef>
-        </p:style>
-        <p:txBody>
-          <a:bodyPr rtlCol="0" anchor="ctr"/>
-          <a:lstStyle/>
-          <a:p>
-            <a:pPr algn="ctr"/>
-            <a:endParaRPr>
-              <a:latin typeface="Segoe UI"/>
-              <a:ea typeface="Microsoft JhengHei"/>
-              <a:cs typeface="Segoe UI"/>
-            </a:endParaRPr>
-          </a:p>
-        </p:txBody>
-      </p:sp>
       <p:pic>
         <p:nvPicPr>
-          <p:cNvPr id="23" name="Picture 22" descr="flat-icon-4.png"/>
+          <p:cNvPr id="16" name="Picture 15" descr="flat-icon-3.png"/>
           <p:cNvPicPr>
             <a:picLocks noChangeAspect="1"/>
           </p:cNvPicPr>
@@ -5039,7 +4765,7 @@
         </p:blipFill>
         <p:spPr>
           <a:xfrm>
-            <a:off x="12927600" y="4716000"/>
+            <a:off x="5533200" y="4824000"/>
             <a:ext cx="360000" cy="360000"/>
           </a:xfrm>
           <a:prstGeom prst="rect">
@@ -5049,17 +4775,17 @@
       </p:pic>
       <p:sp>
         <p:nvSpPr>
-          <p:cNvPr id="24" name="TextBox 23"/>
+          <p:cNvPr id="17" name="TextBox 16"/>
           <p:cNvSpPr txBox="1"/>
           <p:nvPr>
             <p:custDataLst>
-              <p:tags r:id="rId8"/>
+              <p:tags r:id="rId7"/>
             </p:custDataLst>
           </p:nvPr>
         </p:nvSpPr>
         <p:spPr>
           <a:xfrm>
-            <a:off x="12352675" y="5256000"/>
+            <a:off x="4958274" y="5364000"/>
             <a:ext cx="1440000" cy="324000"/>
           </a:xfrm>
           <a:prstGeom prst="rect">
@@ -5093,25 +4819,235 @@
                 <a:ea typeface="Microsoft JhengHei"/>
                 <a:cs typeface="Segoe UI"/>
               </a:rPr>
-              <a:t>回復</a:t>
-            </a:r>
-          </a:p>
-        </p:txBody>
-      </p:sp>
-      <p:sp>
-        <p:nvSpPr>
-          <p:cNvPr id="25" name="TextBox 24"/>
+              <a:t>檢索</a:t>
+            </a:r>
+          </a:p>
+        </p:txBody>
+      </p:sp>
+      <p:sp>
+        <p:nvSpPr>
+          <p:cNvPr id="18" name="Oval 17"/>
+          <p:cNvSpPr/>
+          <p:nvPr/>
+        </p:nvSpPr>
+        <p:spPr>
+          <a:xfrm>
+            <a:off x="9122400" y="4716000"/>
+            <a:ext cx="576000" cy="576000"/>
+          </a:xfrm>
+          <a:prstGeom prst="ellipse">
+            <a:avLst/>
+          </a:prstGeom>
+          <a:solidFill>
+            <a:srgbClr val="FFFFFF"/>
+          </a:solidFill>
+          <a:ln w="10160">
+            <a:solidFill>
+              <a:srgbClr val="1D4ED8"/>
+            </a:solidFill>
+          </a:ln>
+          <a:effectLst/>
+        </p:spPr>
+        <p:style>
+          <a:lnRef idx="1">
+            <a:schemeClr val="accent1"/>
+          </a:lnRef>
+          <a:fillRef idx="3">
+            <a:schemeClr val="accent1"/>
+          </a:fillRef>
+          <a:effectRef idx="2">
+            <a:schemeClr val="accent1"/>
+          </a:effectRef>
+          <a:fontRef idx="minor">
+            <a:schemeClr val="lt1"/>
+          </a:fontRef>
+        </p:style>
+        <p:txBody>
+          <a:bodyPr rtlCol="0" anchor="ctr"/>
+          <a:lstStyle/>
+          <a:p>
+            <a:pPr algn="ctr"/>
+            <a:endParaRPr>
+              <a:latin typeface="Segoe UI"/>
+              <a:ea typeface="Microsoft JhengHei"/>
+              <a:cs typeface="Segoe UI"/>
+            </a:endParaRPr>
+          </a:p>
+        </p:txBody>
+      </p:sp>
+      <p:sp>
+        <p:nvSpPr>
+          <p:cNvPr id="19" name="Rectangle 18"/>
+          <p:cNvSpPr/>
+          <p:nvPr/>
+        </p:nvSpPr>
+        <p:spPr>
+          <a:xfrm>
+            <a:off x="9295200" y="4824000"/>
+            <a:ext cx="230400" cy="360000"/>
+          </a:xfrm>
+          <a:prstGeom prst="rect">
+            <a:avLst/>
+          </a:prstGeom>
+          <a:solidFill>
+            <a:srgbClr val="FFFFFF"/>
+          </a:solidFill>
+          <a:ln w="10160">
+            <a:solidFill>
+              <a:srgbClr val="1D4ED8"/>
+            </a:solidFill>
+          </a:ln>
+          <a:effectLst/>
+        </p:spPr>
+        <p:style>
+          <a:lnRef idx="1">
+            <a:schemeClr val="accent1"/>
+          </a:lnRef>
+          <a:fillRef idx="3">
+            <a:schemeClr val="accent1"/>
+          </a:fillRef>
+          <a:effectRef idx="2">
+            <a:schemeClr val="accent1"/>
+          </a:effectRef>
+          <a:fontRef idx="minor">
+            <a:schemeClr val="lt1"/>
+          </a:fontRef>
+        </p:style>
+        <p:txBody>
+          <a:bodyPr rtlCol="0" anchor="ctr"/>
+          <a:lstStyle/>
+          <a:p>
+            <a:pPr algn="ctr"/>
+            <a:endParaRPr>
+              <a:latin typeface="Segoe UI"/>
+              <a:ea typeface="Microsoft JhengHei"/>
+              <a:cs typeface="Segoe UI"/>
+            </a:endParaRPr>
+          </a:p>
+        </p:txBody>
+      </p:sp>
+      <p:cxnSp>
+        <p:nvCxnSpPr>
+          <p:cNvPr id="20" name="Connector 19"/>
+          <p:cNvCxnSpPr/>
+          <p:nvPr/>
+        </p:nvCxnSpPr>
+        <p:spPr>
+          <a:xfrm>
+            <a:off x="9345888" y="4914000"/>
+            <a:ext cx="129024" cy="0"/>
+          </a:xfrm>
+          <a:prstGeom prst="line">
+            <a:avLst/>
+          </a:prstGeom>
+          <a:ln w="10160">
+            <a:solidFill>
+              <a:srgbClr val="1D4ED8"/>
+            </a:solidFill>
+          </a:ln>
+          <a:effectLst/>
+        </p:spPr>
+        <p:style>
+          <a:lnRef idx="2">
+            <a:schemeClr val="accent1"/>
+          </a:lnRef>
+          <a:fillRef idx="0">
+            <a:schemeClr val="accent1"/>
+          </a:fillRef>
+          <a:effectRef idx="1">
+            <a:schemeClr val="accent1"/>
+          </a:effectRef>
+          <a:fontRef idx="minor">
+            <a:schemeClr val="tx1"/>
+          </a:fontRef>
+        </p:style>
+      </p:cxnSp>
+      <p:cxnSp>
+        <p:nvCxnSpPr>
+          <p:cNvPr id="21" name="Connector 20"/>
+          <p:cNvCxnSpPr/>
+          <p:nvPr/>
+        </p:nvCxnSpPr>
+        <p:spPr>
+          <a:xfrm>
+            <a:off x="9345888" y="5004000"/>
+            <a:ext cx="129024" cy="0"/>
+          </a:xfrm>
+          <a:prstGeom prst="line">
+            <a:avLst/>
+          </a:prstGeom>
+          <a:ln w="10160">
+            <a:solidFill>
+              <a:srgbClr val="1D4ED8"/>
+            </a:solidFill>
+          </a:ln>
+          <a:effectLst/>
+        </p:spPr>
+        <p:style>
+          <a:lnRef idx="2">
+            <a:schemeClr val="accent1"/>
+          </a:lnRef>
+          <a:fillRef idx="0">
+            <a:schemeClr val="accent1"/>
+          </a:fillRef>
+          <a:effectRef idx="1">
+            <a:schemeClr val="accent1"/>
+          </a:effectRef>
+          <a:fontRef idx="minor">
+            <a:schemeClr val="tx1"/>
+          </a:fontRef>
+        </p:style>
+      </p:cxnSp>
+      <p:cxnSp>
+        <p:nvCxnSpPr>
+          <p:cNvPr id="22" name="Connector 21"/>
+          <p:cNvCxnSpPr/>
+          <p:nvPr/>
+        </p:nvCxnSpPr>
+        <p:spPr>
+          <a:xfrm>
+            <a:off x="9345888" y="5094000"/>
+            <a:ext cx="129024" cy="0"/>
+          </a:xfrm>
+          <a:prstGeom prst="line">
+            <a:avLst/>
+          </a:prstGeom>
+          <a:ln w="10160">
+            <a:solidFill>
+              <a:srgbClr val="1D4ED8"/>
+            </a:solidFill>
+          </a:ln>
+          <a:effectLst/>
+        </p:spPr>
+        <p:style>
+          <a:lnRef idx="2">
+            <a:schemeClr val="accent1"/>
+          </a:lnRef>
+          <a:fillRef idx="0">
+            <a:schemeClr val="accent1"/>
+          </a:fillRef>
+          <a:effectRef idx="1">
+            <a:schemeClr val="accent1"/>
+          </a:effectRef>
+          <a:fontRef idx="minor">
+            <a:schemeClr val="tx1"/>
+          </a:fontRef>
+        </p:style>
+      </p:cxnSp>
+      <p:sp>
+        <p:nvSpPr>
+          <p:cNvPr id="23" name="TextBox 22"/>
           <p:cNvSpPr txBox="1"/>
           <p:nvPr>
             <p:custDataLst>
-              <p:tags r:id="rId9"/>
+              <p:tags r:id="rId8"/>
             </p:custDataLst>
           </p:nvPr>
         </p:nvSpPr>
         <p:spPr>
           <a:xfrm>
-            <a:off x="818756" y="6030000"/>
-            <a:ext cx="13392000" cy="468000"/>
+            <a:off x="8655475" y="5364000"/>
+            <a:ext cx="1440000" cy="324000"/>
           </a:xfrm>
           <a:prstGeom prst="rect">
             <a:avLst/>
@@ -5136,6 +5072,183 @@
               </a:spcAft>
             </a:pPr>
             <a:r>
+              <a:rPr sz="2000" b="1">
+                <a:solidFill>
+                  <a:srgbClr val="0B1B2E"/>
+                </a:solidFill>
+                <a:latin typeface="Segoe UI"/>
+                <a:ea typeface="Microsoft JhengHei"/>
+                <a:cs typeface="Segoe UI"/>
+              </a:rPr>
+              <a:t>稽核</a:t>
+            </a:r>
+          </a:p>
+        </p:txBody>
+      </p:sp>
+      <p:sp>
+        <p:nvSpPr>
+          <p:cNvPr id="24" name="Oval 23"/>
+          <p:cNvSpPr/>
+          <p:nvPr/>
+        </p:nvSpPr>
+        <p:spPr>
+          <a:xfrm>
+            <a:off x="12819600" y="4716000"/>
+            <a:ext cx="576000" cy="576000"/>
+          </a:xfrm>
+          <a:prstGeom prst="ellipse">
+            <a:avLst/>
+          </a:prstGeom>
+          <a:solidFill>
+            <a:srgbClr val="FFFFFF"/>
+          </a:solidFill>
+          <a:ln w="10160">
+            <a:solidFill>
+              <a:srgbClr val="1D4ED8"/>
+            </a:solidFill>
+          </a:ln>
+          <a:effectLst/>
+        </p:spPr>
+        <p:style>
+          <a:lnRef idx="1">
+            <a:schemeClr val="accent1"/>
+          </a:lnRef>
+          <a:fillRef idx="3">
+            <a:schemeClr val="accent1"/>
+          </a:fillRef>
+          <a:effectRef idx="2">
+            <a:schemeClr val="accent1"/>
+          </a:effectRef>
+          <a:fontRef idx="minor">
+            <a:schemeClr val="lt1"/>
+          </a:fontRef>
+        </p:style>
+        <p:txBody>
+          <a:bodyPr rtlCol="0" anchor="ctr"/>
+          <a:lstStyle/>
+          <a:p>
+            <a:pPr algn="ctr"/>
+            <a:endParaRPr>
+              <a:latin typeface="Segoe UI"/>
+              <a:ea typeface="Microsoft JhengHei"/>
+              <a:cs typeface="Segoe UI"/>
+            </a:endParaRPr>
+          </a:p>
+        </p:txBody>
+      </p:sp>
+      <p:pic>
+        <p:nvPicPr>
+          <p:cNvPr id="25" name="Picture 24" descr="flat-icon-4.png"/>
+          <p:cNvPicPr>
+            <a:picLocks noChangeAspect="1"/>
+          </p:cNvPicPr>
+          <p:nvPr/>
+        </p:nvPicPr>
+        <p:blipFill>
+          <a:blip r:embed="rId101"/>
+          <a:stretch>
+            <a:fillRect/>
+          </a:stretch>
+        </p:blipFill>
+        <p:spPr>
+          <a:xfrm>
+            <a:off x="12927600" y="4824000"/>
+            <a:ext cx="360000" cy="360000"/>
+          </a:xfrm>
+          <a:prstGeom prst="rect">
+            <a:avLst/>
+          </a:prstGeom>
+        </p:spPr>
+      </p:pic>
+      <p:sp>
+        <p:nvSpPr>
+          <p:cNvPr id="26" name="TextBox 25"/>
+          <p:cNvSpPr txBox="1"/>
+          <p:nvPr>
+            <p:custDataLst>
+              <p:tags r:id="rId9"/>
+            </p:custDataLst>
+          </p:nvPr>
+        </p:nvSpPr>
+        <p:spPr>
+          <a:xfrm>
+            <a:off x="12352675" y="5364000"/>
+            <a:ext cx="1440000" cy="324000"/>
+          </a:xfrm>
+          <a:prstGeom prst="rect">
+            <a:avLst/>
+          </a:prstGeom>
+          <a:noFill/>
+        </p:spPr>
+        <p:txBody>
+          <a:bodyPr wrap="none" lIns="0" tIns="0" rIns="0" bIns="0" anchor="ctr">
+            <a:spAutoFit/>
+          </a:bodyPr>
+          <a:lstStyle/>
+          <a:p>
+            <a:pPr algn="ctr">
+              <a:lnSpc>
+                <a:spcPct val="110000"/>
+              </a:lnSpc>
+              <a:spcBef>
+                <a:spcPts val="0"/>
+              </a:spcBef>
+              <a:spcAft>
+                <a:spcPts val="0"/>
+              </a:spcAft>
+            </a:pPr>
+            <a:r>
+              <a:rPr sz="2000" b="1">
+                <a:solidFill>
+                  <a:srgbClr val="0B1B2E"/>
+                </a:solidFill>
+                <a:latin typeface="Segoe UI"/>
+                <a:ea typeface="Microsoft JhengHei"/>
+                <a:cs typeface="Segoe UI"/>
+              </a:rPr>
+              <a:t>回復</a:t>
+            </a:r>
+          </a:p>
+        </p:txBody>
+      </p:sp>
+      <p:sp>
+        <p:nvSpPr>
+          <p:cNvPr id="27" name="TextBox 26"/>
+          <p:cNvSpPr txBox="1"/>
+          <p:nvPr>
+            <p:custDataLst>
+              <p:tags r:id="rId10"/>
+            </p:custDataLst>
+          </p:nvPr>
+        </p:nvSpPr>
+        <p:spPr>
+          <a:xfrm>
+            <a:off x="818756" y="6030000"/>
+            <a:ext cx="13392000" cy="468000"/>
+          </a:xfrm>
+          <a:prstGeom prst="rect">
+            <a:avLst/>
+          </a:prstGeom>
+          <a:noFill/>
+        </p:spPr>
+        <p:txBody>
+          <a:bodyPr wrap="none" lIns="0" tIns="0" rIns="0" bIns="0" anchor="ctr">
+            <a:spAutoFit/>
+          </a:bodyPr>
+          <a:lstStyle/>
+          <a:p>
+            <a:pPr algn="ctr">
+              <a:lnSpc>
+                <a:spcPct val="110000"/>
+              </a:lnSpc>
+              <a:spcBef>
+                <a:spcPts val="0"/>
+              </a:spcBef>
+              <a:spcAft>
+                <a:spcPts val="0"/>
+              </a:spcAft>
+            </a:pPr>
+            <a:r>
               <a:rPr sz="2600" b="1">
                 <a:solidFill>
                   <a:srgbClr val="0F766E"/>
@@ -5162,7 +5275,7 @@
       </p:sp>
       <p:cxnSp>
         <p:nvCxnSpPr>
-          <p:cNvPr id="26" name="Connector 25"/>
+          <p:cNvPr id="28" name="Connector 27"/>
           <p:cNvCxnSpPr/>
           <p:nvPr/>
         </p:nvCxnSpPr>
@@ -5198,7 +5311,7 @@
       </p:cxnSp>
       <p:sp>
         <p:nvSpPr>
-          <p:cNvPr id="27" name="Rounded Rectangle 26"/>
+          <p:cNvPr id="29" name="Rounded Rectangle 28"/>
           <p:cNvSpPr/>
           <p:nvPr/>
         </p:nvSpPr>
@@ -5249,11 +5362,11 @@
       </p:sp>
       <p:sp>
         <p:nvSpPr>
-          <p:cNvPr id="28" name="TextBox 27"/>
+          <p:cNvPr id="30" name="TextBox 29"/>
           <p:cNvSpPr txBox="1"/>
           <p:nvPr>
             <p:custDataLst>
-              <p:tags r:id="rId10"/>
+              <p:tags r:id="rId11"/>
             </p:custDataLst>
           </p:nvPr>
         </p:nvSpPr>
@@ -5311,11 +5424,11 @@
       </p:sp>
       <p:sp>
         <p:nvSpPr>
-          <p:cNvPr id="29" name="TextBox 28"/>
+          <p:cNvPr id="31" name="TextBox 30"/>
           <p:cNvSpPr txBox="1"/>
           <p:nvPr>
             <p:custDataLst>
-              <p:tags r:id="rId11"/>
+              <p:tags r:id="rId12"/>
             </p:custDataLst>
           </p:nvPr>
         </p:nvSpPr>
@@ -5362,11 +5475,11 @@
       </p:sp>
       <p:sp>
         <p:nvSpPr>
-          <p:cNvPr id="30" name="TextBox 29"/>
+          <p:cNvPr id="32" name="TextBox 31"/>
           <p:cNvSpPr txBox="1"/>
           <p:nvPr>
             <p:custDataLst>
-              <p:tags r:id="rId12"/>
+              <p:tags r:id="rId13"/>
             </p:custDataLst>
           </p:nvPr>
         </p:nvSpPr>
@@ -5437,7 +5550,7 @@
       </p:sp>
       <p:sp>
         <p:nvSpPr>
-          <p:cNvPr id="31" name="Down Arrow 30"/>
+          <p:cNvPr id="33" name="Down Arrow 32"/>
           <p:cNvSpPr/>
           <p:nvPr/>
         </p:nvSpPr>
@@ -5486,7 +5599,7 @@
       </p:sp>
       <p:sp>
         <p:nvSpPr>
-          <p:cNvPr id="32" name="Rounded Rectangle 31"/>
+          <p:cNvPr id="34" name="Rounded Rectangle 33"/>
           <p:cNvSpPr/>
           <p:nvPr/>
         </p:nvSpPr>
@@ -5537,11 +5650,11 @@
       </p:sp>
       <p:sp>
         <p:nvSpPr>
-          <p:cNvPr id="33" name="TextBox 32"/>
+          <p:cNvPr id="35" name="TextBox 34"/>
           <p:cNvSpPr txBox="1"/>
           <p:nvPr>
             <p:custDataLst>
-              <p:tags r:id="rId13"/>
+              <p:tags r:id="rId14"/>
             </p:custDataLst>
           </p:nvPr>
         </p:nvSpPr>
@@ -5599,11 +5712,11 @@
       </p:sp>
       <p:sp>
         <p:nvSpPr>
-          <p:cNvPr id="34" name="TextBox 33"/>
+          <p:cNvPr id="36" name="TextBox 35"/>
           <p:cNvSpPr txBox="1"/>
           <p:nvPr>
             <p:custDataLst>
-              <p:tags r:id="rId14"/>
+              <p:tags r:id="rId15"/>
             </p:custDataLst>
           </p:nvPr>
         </p:nvSpPr>
@@ -5650,11 +5763,11 @@
       </p:sp>
       <p:sp>
         <p:nvSpPr>
-          <p:cNvPr id="35" name="TextBox 34"/>
+          <p:cNvPr id="37" name="TextBox 36"/>
           <p:cNvSpPr txBox="1"/>
           <p:nvPr>
             <p:custDataLst>
-              <p:tags r:id="rId15"/>
+              <p:tags r:id="rId16"/>
             </p:custDataLst>
           </p:nvPr>
         </p:nvSpPr>
@@ -5725,7 +5838,7 @@
       </p:sp>
       <p:sp>
         <p:nvSpPr>
-          <p:cNvPr id="36" name="Down Arrow 35"/>
+          <p:cNvPr id="38" name="Down Arrow 37"/>
           <p:cNvSpPr/>
           <p:nvPr/>
         </p:nvSpPr>
@@ -5774,7 +5887,7 @@
       </p:sp>
       <p:sp>
         <p:nvSpPr>
-          <p:cNvPr id="37" name="Rounded Rectangle 36"/>
+          <p:cNvPr id="39" name="Rounded Rectangle 38"/>
           <p:cNvSpPr/>
           <p:nvPr/>
         </p:nvSpPr>
@@ -5825,11 +5938,11 @@
       </p:sp>
       <p:sp>
         <p:nvSpPr>
-          <p:cNvPr id="38" name="TextBox 37"/>
+          <p:cNvPr id="40" name="TextBox 39"/>
           <p:cNvSpPr txBox="1"/>
           <p:nvPr>
             <p:custDataLst>
-              <p:tags r:id="rId16"/>
+              <p:tags r:id="rId17"/>
             </p:custDataLst>
           </p:nvPr>
         </p:nvSpPr>
@@ -5887,11 +6000,11 @@
       </p:sp>
       <p:sp>
         <p:nvSpPr>
-          <p:cNvPr id="39" name="TextBox 38"/>
+          <p:cNvPr id="41" name="TextBox 40"/>
           <p:cNvSpPr txBox="1"/>
           <p:nvPr>
             <p:custDataLst>
-              <p:tags r:id="rId17"/>
+              <p:tags r:id="rId18"/>
             </p:custDataLst>
           </p:nvPr>
         </p:nvSpPr>
@@ -5938,11 +6051,11 @@
       </p:sp>
       <p:sp>
         <p:nvSpPr>
-          <p:cNvPr id="40" name="TextBox 39"/>
+          <p:cNvPr id="42" name="TextBox 41"/>
           <p:cNvSpPr txBox="1"/>
           <p:nvPr>
             <p:custDataLst>
-              <p:tags r:id="rId18"/>
+              <p:tags r:id="rId19"/>
             </p:custDataLst>
           </p:nvPr>
         </p:nvSpPr>
@@ -6013,7 +6126,7 @@
       </p:sp>
       <p:sp>
         <p:nvSpPr>
-          <p:cNvPr id="41" name="Down Arrow 40"/>
+          <p:cNvPr id="43" name="Down Arrow 42"/>
           <p:cNvSpPr/>
           <p:nvPr/>
         </p:nvSpPr>
@@ -6062,7 +6175,7 @@
       </p:sp>
       <p:sp>
         <p:nvSpPr>
-          <p:cNvPr id="42" name="Rounded Rectangle 41"/>
+          <p:cNvPr id="44" name="Rounded Rectangle 43"/>
           <p:cNvSpPr/>
           <p:nvPr/>
         </p:nvSpPr>
@@ -6113,11 +6226,11 @@
       </p:sp>
       <p:sp>
         <p:nvSpPr>
-          <p:cNvPr id="43" name="TextBox 42"/>
+          <p:cNvPr id="45" name="TextBox 44"/>
           <p:cNvSpPr txBox="1"/>
           <p:nvPr>
             <p:custDataLst>
-              <p:tags r:id="rId19"/>
+              <p:tags r:id="rId20"/>
             </p:custDataLst>
           </p:nvPr>
         </p:nvSpPr>
@@ -6175,11 +6288,11 @@
       </p:sp>
       <p:sp>
         <p:nvSpPr>
-          <p:cNvPr id="44" name="TextBox 43"/>
+          <p:cNvPr id="46" name="TextBox 45"/>
           <p:cNvSpPr txBox="1"/>
           <p:nvPr>
             <p:custDataLst>
-              <p:tags r:id="rId20"/>
+              <p:tags r:id="rId21"/>
             </p:custDataLst>
           </p:nvPr>
         </p:nvSpPr>
@@ -6226,11 +6339,11 @@
       </p:sp>
       <p:sp>
         <p:nvSpPr>
-          <p:cNvPr id="45" name="TextBox 44"/>
+          <p:cNvPr id="47" name="TextBox 46"/>
           <p:cNvSpPr txBox="1"/>
           <p:nvPr>
             <p:custDataLst>
-              <p:tags r:id="rId21"/>
+              <p:tags r:id="rId22"/>
             </p:custDataLst>
           </p:nvPr>
         </p:nvSpPr>
@@ -6301,7 +6414,7 @@
       </p:sp>
       <p:sp>
         <p:nvSpPr>
-          <p:cNvPr id="46" name="Rounded Rectangle 45"/>
+          <p:cNvPr id="48" name="Rounded Rectangle 47"/>
           <p:cNvSpPr/>
           <p:nvPr/>
         </p:nvSpPr>
@@ -6354,11 +6467,11 @@
       </p:sp>
       <p:sp>
         <p:nvSpPr>
-          <p:cNvPr id="47" name="TextBox 46"/>
+          <p:cNvPr id="49" name="TextBox 48"/>
           <p:cNvSpPr txBox="1"/>
           <p:nvPr>
             <p:custDataLst>
-              <p:tags r:id="rId22"/>
+              <p:tags r:id="rId23"/>
             </p:custDataLst>
           </p:nvPr>
         </p:nvSpPr>
@@ -6405,11 +6518,11 @@
       </p:sp>
       <p:sp>
         <p:nvSpPr>
-          <p:cNvPr id="48" name="TextBox 47"/>
+          <p:cNvPr id="50" name="TextBox 49"/>
           <p:cNvSpPr txBox="1"/>
           <p:nvPr>
             <p:custDataLst>
-              <p:tags r:id="rId23"/>
+              <p:tags r:id="rId24"/>
             </p:custDataLst>
           </p:nvPr>
         </p:nvSpPr>
@@ -6456,7 +6569,7 @@
       </p:sp>
       <p:sp>
         <p:nvSpPr>
-          <p:cNvPr id="49" name="Rounded Rectangle 48"/>
+          <p:cNvPr id="51" name="Rounded Rectangle 50"/>
           <p:cNvSpPr/>
           <p:nvPr/>
         </p:nvSpPr>
@@ -6509,11 +6622,11 @@
       </p:sp>
       <p:sp>
         <p:nvSpPr>
-          <p:cNvPr id="50" name="TextBox 49"/>
+          <p:cNvPr id="52" name="TextBox 51"/>
           <p:cNvSpPr txBox="1"/>
           <p:nvPr>
             <p:custDataLst>
-              <p:tags r:id="rId24"/>
+              <p:tags r:id="rId25"/>
             </p:custDataLst>
           </p:nvPr>
         </p:nvSpPr>
@@ -6560,11 +6673,11 @@
       </p:sp>
       <p:sp>
         <p:nvSpPr>
-          <p:cNvPr id="51" name="TextBox 50"/>
+          <p:cNvPr id="53" name="TextBox 52"/>
           <p:cNvSpPr txBox="1"/>
           <p:nvPr>
             <p:custDataLst>
-              <p:tags r:id="rId25"/>
+              <p:tags r:id="rId26"/>
             </p:custDataLst>
           </p:nvPr>
         </p:nvSpPr>
@@ -6604,14 +6717,14 @@
                 <a:ea typeface="Microsoft JhengHei"/>
                 <a:cs typeface="Segoe UI"/>
               </a:rPr>
-              <a:t>短窗位元組模式</a:t>
+              <a:t>短窗位元組模式·既有模型</a:t>
             </a:r>
           </a:p>
         </p:txBody>
       </p:sp>
       <p:cxnSp>
         <p:nvCxnSpPr>
-          <p:cNvPr id="52" name="Connector 51"/>
+          <p:cNvPr id="54" name="Connector 53"/>
           <p:cNvCxnSpPr/>
           <p:nvPr/>
         </p:nvCxnSpPr>
@@ -6647,7 +6760,7 @@
       </p:cxnSp>
       <p:cxnSp>
         <p:nvCxnSpPr>
-          <p:cNvPr id="53" name="Connector 52"/>
+          <p:cNvPr id="55" name="Connector 54"/>
           <p:cNvCxnSpPr/>
           <p:nvPr/>
         </p:nvCxnSpPr>
@@ -6683,7 +6796,7 @@
       </p:cxnSp>
       <p:cxnSp>
         <p:nvCxnSpPr>
-          <p:cNvPr id="54" name="Connector 53"/>
+          <p:cNvPr id="56" name="Connector 55"/>
           <p:cNvCxnSpPr/>
           <p:nvPr/>
         </p:nvCxnSpPr>
@@ -6719,7 +6832,7 @@
       </p:cxnSp>
       <p:sp>
         <p:nvSpPr>
-          <p:cNvPr id="55" name="Right Arrow 54"/>
+          <p:cNvPr id="57" name="Right Arrow 56"/>
           <p:cNvSpPr/>
           <p:nvPr/>
         </p:nvSpPr>
@@ -6768,7 +6881,7 @@
       </p:sp>
       <p:sp>
         <p:nvSpPr>
-          <p:cNvPr id="56" name="Rounded Rectangle 55"/>
+          <p:cNvPr id="58" name="Rounded Rectangle 57"/>
           <p:cNvSpPr/>
           <p:nvPr/>
         </p:nvSpPr>
@@ -6819,11 +6932,11 @@
       </p:sp>
       <p:sp>
         <p:nvSpPr>
-          <p:cNvPr id="57" name="TextBox 56"/>
+          <p:cNvPr id="59" name="TextBox 58"/>
           <p:cNvSpPr txBox="1"/>
           <p:nvPr>
             <p:custDataLst>
-              <p:tags r:id="rId26"/>
+              <p:tags r:id="rId27"/>
             </p:custDataLst>
           </p:nvPr>
         </p:nvSpPr>
@@ -6870,11 +6983,11 @@
       </p:sp>
       <p:sp>
         <p:nvSpPr>
-          <p:cNvPr id="58" name="TextBox 57"/>
+          <p:cNvPr id="60" name="TextBox 59"/>
           <p:cNvSpPr txBox="1"/>
           <p:nvPr>
             <p:custDataLst>
-              <p:tags r:id="rId27"/>
+              <p:tags r:id="rId28"/>
             </p:custDataLst>
           </p:nvPr>
         </p:nvSpPr>
@@ -6921,7 +7034,7 @@
       </p:sp>
       <p:sp>
         <p:nvSpPr>
-          <p:cNvPr id="59" name="Right Arrow 58"/>
+          <p:cNvPr id="61" name="Right Arrow 60"/>
           <p:cNvSpPr/>
           <p:nvPr/>
         </p:nvSpPr>
@@ -6970,7 +7083,7 @@
       </p:sp>
       <p:sp>
         <p:nvSpPr>
-          <p:cNvPr id="60" name="Rounded Rectangle 59"/>
+          <p:cNvPr id="62" name="Rounded Rectangle 61"/>
           <p:cNvSpPr/>
           <p:nvPr/>
         </p:nvSpPr>
@@ -7021,11 +7134,11 @@
       </p:sp>
       <p:sp>
         <p:nvSpPr>
-          <p:cNvPr id="61" name="TextBox 60"/>
+          <p:cNvPr id="63" name="TextBox 62"/>
           <p:cNvSpPr txBox="1"/>
           <p:nvPr>
             <p:custDataLst>
-              <p:tags r:id="rId28"/>
+              <p:tags r:id="rId29"/>
             </p:custDataLst>
           </p:nvPr>
         </p:nvSpPr>
@@ -7072,11 +7185,11 @@
       </p:sp>
       <p:sp>
         <p:nvSpPr>
-          <p:cNvPr id="62" name="TextBox 61"/>
+          <p:cNvPr id="64" name="TextBox 63"/>
           <p:cNvSpPr txBox="1"/>
           <p:nvPr>
             <p:custDataLst>
-              <p:tags r:id="rId29"/>
+              <p:tags r:id="rId30"/>
             </p:custDataLst>
           </p:nvPr>
         </p:nvSpPr>
@@ -7123,7 +7236,7 @@
       </p:sp>
       <p:sp>
         <p:nvSpPr>
-          <p:cNvPr id="63" name="Rounded Rectangle 62"/>
+          <p:cNvPr id="65" name="Rounded Rectangle 64"/>
           <p:cNvSpPr/>
           <p:nvPr/>
         </p:nvSpPr>
@@ -7176,11 +7289,11 @@
       </p:sp>
       <p:sp>
         <p:nvSpPr>
-          <p:cNvPr id="64" name="TextBox 63"/>
+          <p:cNvPr id="66" name="TextBox 65"/>
           <p:cNvSpPr txBox="1"/>
           <p:nvPr>
             <p:custDataLst>
-              <p:tags r:id="rId30"/>
+              <p:tags r:id="rId31"/>
             </p:custDataLst>
           </p:nvPr>
         </p:nvSpPr>
@@ -7227,7 +7340,7 @@
       </p:sp>
       <p:sp>
         <p:nvSpPr>
-          <p:cNvPr id="65" name="Rounded Rectangle 64"/>
+          <p:cNvPr id="67" name="Rounded Rectangle 66"/>
           <p:cNvSpPr/>
           <p:nvPr/>
         </p:nvSpPr>
@@ -7280,11 +7393,11 @@
       </p:sp>
       <p:sp>
         <p:nvSpPr>
-          <p:cNvPr id="66" name="TextBox 65"/>
+          <p:cNvPr id="68" name="TextBox 67"/>
           <p:cNvSpPr txBox="1"/>
           <p:nvPr>
             <p:custDataLst>
-              <p:tags r:id="rId31"/>
+              <p:tags r:id="rId32"/>
             </p:custDataLst>
           </p:nvPr>
         </p:nvSpPr>
@@ -7331,7 +7444,7 @@
       </p:sp>
       <p:cxnSp>
         <p:nvCxnSpPr>
-          <p:cNvPr id="67" name="Connector 66"/>
+          <p:cNvPr id="69" name="Connector 68"/>
           <p:cNvCxnSpPr/>
           <p:nvPr/>
         </p:nvCxnSpPr>
@@ -7367,7 +7480,7 @@
       </p:cxnSp>
       <p:cxnSp>
         <p:nvCxnSpPr>
-          <p:cNvPr id="68" name="Connector 67"/>
+          <p:cNvPr id="70" name="Connector 69"/>
           <p:cNvCxnSpPr/>
           <p:nvPr/>
         </p:nvCxnSpPr>
@@ -7403,7 +7516,7 @@
       </p:cxnSp>
       <p:cxnSp>
         <p:nvCxnSpPr>
-          <p:cNvPr id="69" name="Connector 68"/>
+          <p:cNvPr id="71" name="Connector 70"/>
           <p:cNvCxnSpPr/>
           <p:nvPr/>
         </p:nvCxnSpPr>
@@ -7439,7 +7552,7 @@
       </p:cxnSp>
       <p:sp>
         <p:nvSpPr>
-          <p:cNvPr id="70" name="Right Arrow 69"/>
+          <p:cNvPr id="72" name="Right Arrow 71"/>
           <p:cNvSpPr/>
           <p:nvPr/>
         </p:nvSpPr>
@@ -7488,7 +7601,7 @@
       </p:sp>
       <p:sp>
         <p:nvSpPr>
-          <p:cNvPr id="71" name="Rounded Rectangle 70"/>
+          <p:cNvPr id="73" name="Rounded Rectangle 72"/>
           <p:cNvSpPr/>
           <p:nvPr/>
         </p:nvSpPr>
@@ -7539,11 +7652,11 @@
       </p:sp>
       <p:sp>
         <p:nvSpPr>
-          <p:cNvPr id="72" name="TextBox 71"/>
+          <p:cNvPr id="74" name="TextBox 73"/>
           <p:cNvSpPr txBox="1"/>
           <p:nvPr>
             <p:custDataLst>
-              <p:tags r:id="rId32"/>
+              <p:tags r:id="rId33"/>
             </p:custDataLst>
           </p:nvPr>
         </p:nvSpPr>
@@ -7590,11 +7703,11 @@
       </p:sp>
       <p:sp>
         <p:nvSpPr>
-          <p:cNvPr id="73" name="TextBox 72"/>
+          <p:cNvPr id="75" name="TextBox 74"/>
           <p:cNvSpPr txBox="1"/>
           <p:nvPr>
             <p:custDataLst>
-              <p:tags r:id="rId33"/>
+              <p:tags r:id="rId34"/>
             </p:custDataLst>
           </p:nvPr>
         </p:nvSpPr>
@@ -7641,7 +7754,7 @@
       </p:sp>
       <p:sp>
         <p:nvSpPr>
-          <p:cNvPr id="74" name="Right Arrow 73"/>
+          <p:cNvPr id="76" name="Right Arrow 75"/>
           <p:cNvSpPr/>
           <p:nvPr/>
         </p:nvSpPr>
@@ -7690,7 +7803,7 @@
       </p:sp>
       <p:sp>
         <p:nvSpPr>
-          <p:cNvPr id="75" name="Rounded Rectangle 74"/>
+          <p:cNvPr id="77" name="Rounded Rectangle 76"/>
           <p:cNvSpPr/>
           <p:nvPr/>
         </p:nvSpPr>
@@ -7741,11 +7854,11 @@
       </p:sp>
       <p:sp>
         <p:nvSpPr>
-          <p:cNvPr id="76" name="TextBox 75"/>
+          <p:cNvPr id="78" name="TextBox 77"/>
           <p:cNvSpPr txBox="1"/>
           <p:nvPr>
             <p:custDataLst>
-              <p:tags r:id="rId34"/>
+              <p:tags r:id="rId35"/>
             </p:custDataLst>
           </p:nvPr>
         </p:nvSpPr>
@@ -7792,7 +7905,7 @@
       </p:sp>
       <p:sp>
         <p:nvSpPr>
-          <p:cNvPr id="77" name="Rounded Rectangle 76"/>
+          <p:cNvPr id="79" name="Rounded Rectangle 78"/>
           <p:cNvSpPr/>
           <p:nvPr/>
         </p:nvSpPr>
@@ -7843,11 +7956,11 @@
       </p:sp>
       <p:sp>
         <p:nvSpPr>
-          <p:cNvPr id="78" name="TextBox 77"/>
+          <p:cNvPr id="80" name="TextBox 79"/>
           <p:cNvSpPr txBox="1"/>
           <p:nvPr>
             <p:custDataLst>
-              <p:tags r:id="rId35"/>
+              <p:tags r:id="rId36"/>
             </p:custDataLst>
           </p:nvPr>
         </p:nvSpPr>
@@ -7894,7 +8007,7 @@
       </p:sp>
       <p:sp>
         <p:nvSpPr>
-          <p:cNvPr id="79" name="Rounded Rectangle 78"/>
+          <p:cNvPr id="81" name="Rounded Rectangle 80"/>
           <p:cNvSpPr/>
           <p:nvPr/>
         </p:nvSpPr>
@@ -7945,11 +8058,11 @@
       </p:sp>
       <p:sp>
         <p:nvSpPr>
-          <p:cNvPr id="80" name="TextBox 79"/>
+          <p:cNvPr id="82" name="TextBox 81"/>
           <p:cNvSpPr txBox="1"/>
           <p:nvPr>
             <p:custDataLst>
-              <p:tags r:id="rId36"/>
+              <p:tags r:id="rId37"/>
             </p:custDataLst>
           </p:nvPr>
         </p:nvSpPr>
@@ -7996,7 +8109,7 @@
       </p:sp>
       <p:sp>
         <p:nvSpPr>
-          <p:cNvPr id="81" name="Rounded Rectangle 80"/>
+          <p:cNvPr id="83" name="Rounded Rectangle 82"/>
           <p:cNvSpPr/>
           <p:nvPr/>
         </p:nvSpPr>
@@ -8047,11 +8160,11 @@
       </p:sp>
       <p:sp>
         <p:nvSpPr>
-          <p:cNvPr id="82" name="TextBox 81"/>
+          <p:cNvPr id="84" name="TextBox 83"/>
           <p:cNvSpPr txBox="1"/>
           <p:nvPr>
             <p:custDataLst>
-              <p:tags r:id="rId37"/>
+              <p:tags r:id="rId38"/>
             </p:custDataLst>
           </p:nvPr>
         </p:nvSpPr>
@@ -8098,7 +8211,7 @@
       </p:sp>
       <p:sp>
         <p:nvSpPr>
-          <p:cNvPr id="83" name="Rounded Rectangle 82"/>
+          <p:cNvPr id="85" name="Rounded Rectangle 84"/>
           <p:cNvSpPr/>
           <p:nvPr/>
         </p:nvSpPr>
@@ -8149,11 +8262,11 @@
       </p:sp>
       <p:sp>
         <p:nvSpPr>
-          <p:cNvPr id="84" name="TextBox 83"/>
+          <p:cNvPr id="86" name="TextBox 85"/>
           <p:cNvSpPr txBox="1"/>
           <p:nvPr>
             <p:custDataLst>
-              <p:tags r:id="rId38"/>
+              <p:tags r:id="rId39"/>
             </p:custDataLst>
           </p:nvPr>
         </p:nvSpPr>
@@ -8200,7 +8313,7 @@
       </p:sp>
       <p:sp>
         <p:nvSpPr>
-          <p:cNvPr id="85" name="Rounded Rectangle 84"/>
+          <p:cNvPr id="87" name="Rounded Rectangle 86"/>
           <p:cNvSpPr/>
           <p:nvPr/>
         </p:nvSpPr>
@@ -8251,11 +8364,11 @@
       </p:sp>
       <p:sp>
         <p:nvSpPr>
-          <p:cNvPr id="86" name="TextBox 85"/>
+          <p:cNvPr id="88" name="TextBox 87"/>
           <p:cNvSpPr txBox="1"/>
           <p:nvPr>
             <p:custDataLst>
-              <p:tags r:id="rId39"/>
+              <p:tags r:id="rId40"/>
             </p:custDataLst>
           </p:nvPr>
         </p:nvSpPr>
@@ -8302,7 +8415,7 @@
       </p:sp>
       <p:sp>
         <p:nvSpPr>
-          <p:cNvPr id="87" name="Rounded Rectangle 86"/>
+          <p:cNvPr id="89" name="Rounded Rectangle 88"/>
           <p:cNvSpPr/>
           <p:nvPr/>
         </p:nvSpPr>
@@ -8355,11 +8468,11 @@
       </p:sp>
       <p:sp>
         <p:nvSpPr>
-          <p:cNvPr id="88" name="TextBox 87"/>
+          <p:cNvPr id="90" name="TextBox 89"/>
           <p:cNvSpPr txBox="1"/>
           <p:nvPr>
             <p:custDataLst>
-              <p:tags r:id="rId40"/>
+              <p:tags r:id="rId41"/>
             </p:custDataLst>
           </p:nvPr>
         </p:nvSpPr>
@@ -8406,7 +8519,7 @@
       </p:sp>
       <p:sp>
         <p:nvSpPr>
-          <p:cNvPr id="89" name="Rounded Rectangle 88"/>
+          <p:cNvPr id="91" name="Rounded Rectangle 90"/>
           <p:cNvSpPr/>
           <p:nvPr/>
         </p:nvSpPr>
@@ -8459,11 +8572,11 @@
       </p:sp>
       <p:sp>
         <p:nvSpPr>
-          <p:cNvPr id="90" name="TextBox 89"/>
+          <p:cNvPr id="92" name="TextBox 91"/>
           <p:cNvSpPr txBox="1"/>
           <p:nvPr>
             <p:custDataLst>
-              <p:tags r:id="rId41"/>
+              <p:tags r:id="rId42"/>
             </p:custDataLst>
           </p:nvPr>
         </p:nvSpPr>
@@ -8510,7 +8623,7 @@
       </p:sp>
       <p:cxnSp>
         <p:nvCxnSpPr>
-          <p:cNvPr id="91" name="Connector 90"/>
+          <p:cNvPr id="93" name="Connector 92"/>
           <p:cNvCxnSpPr/>
           <p:nvPr/>
         </p:nvCxnSpPr>
@@ -8546,7 +8659,7 @@
       </p:cxnSp>
       <p:cxnSp>
         <p:nvCxnSpPr>
-          <p:cNvPr id="92" name="Connector 91"/>
+          <p:cNvPr id="94" name="Connector 93"/>
           <p:cNvCxnSpPr/>
           <p:nvPr/>
         </p:nvCxnSpPr>
@@ -8582,7 +8695,7 @@
       </p:cxnSp>
       <p:cxnSp>
         <p:nvCxnSpPr>
-          <p:cNvPr id="93" name="Connector 92"/>
+          <p:cNvPr id="95" name="Connector 94"/>
           <p:cNvCxnSpPr/>
           <p:nvPr/>
         </p:nvCxnSpPr>
@@ -8618,7 +8731,7 @@
       </p:cxnSp>
       <p:sp>
         <p:nvSpPr>
-          <p:cNvPr id="94" name="Right Arrow 93"/>
+          <p:cNvPr id="96" name="Right Arrow 95"/>
           <p:cNvSpPr/>
           <p:nvPr/>
         </p:nvSpPr>
@@ -8667,7 +8780,7 @@
       </p:sp>
       <p:sp>
         <p:nvSpPr>
-          <p:cNvPr id="95" name="Rounded Rectangle 94"/>
+          <p:cNvPr id="97" name="Rounded Rectangle 96"/>
           <p:cNvSpPr/>
           <p:nvPr/>
         </p:nvSpPr>
@@ -8718,11 +8831,11 @@
       </p:sp>
       <p:sp>
         <p:nvSpPr>
-          <p:cNvPr id="96" name="TextBox 95"/>
+          <p:cNvPr id="98" name="TextBox 97"/>
           <p:cNvSpPr txBox="1"/>
           <p:nvPr>
             <p:custDataLst>
-              <p:tags r:id="rId42"/>
+              <p:tags r:id="rId43"/>
             </p:custDataLst>
           </p:nvPr>
         </p:nvSpPr>
@@ -8769,11 +8882,11 @@
       </p:sp>
       <p:sp>
         <p:nvSpPr>
-          <p:cNvPr id="97" name="TextBox 96"/>
+          <p:cNvPr id="99" name="TextBox 98"/>
           <p:cNvSpPr txBox="1"/>
           <p:nvPr>
             <p:custDataLst>
-              <p:tags r:id="rId43"/>
+              <p:tags r:id="rId44"/>
             </p:custDataLst>
           </p:nvPr>
         </p:nvSpPr>
@@ -8820,7 +8933,7 @@
       </p:sp>
       <p:sp>
         <p:nvSpPr>
-          <p:cNvPr id="98" name="Right Arrow 97"/>
+          <p:cNvPr id="100" name="Right Arrow 99"/>
           <p:cNvSpPr/>
           <p:nvPr/>
         </p:nvSpPr>
@@ -8869,7 +8982,7 @@
       </p:sp>
       <p:sp>
         <p:nvSpPr>
-          <p:cNvPr id="99" name="Rounded Rectangle 98"/>
+          <p:cNvPr id="101" name="Rounded Rectangle 100"/>
           <p:cNvSpPr/>
           <p:nvPr/>
         </p:nvSpPr>
@@ -8920,11 +9033,11 @@
       </p:sp>
       <p:sp>
         <p:nvSpPr>
-          <p:cNvPr id="100" name="TextBox 99"/>
+          <p:cNvPr id="102" name="TextBox 101"/>
           <p:cNvSpPr txBox="1"/>
           <p:nvPr>
             <p:custDataLst>
-              <p:tags r:id="rId44"/>
+              <p:tags r:id="rId45"/>
             </p:custDataLst>
           </p:nvPr>
         </p:nvSpPr>
@@ -8971,7 +9084,7 @@
       </p:sp>
       <p:sp>
         <p:nvSpPr>
-          <p:cNvPr id="101" name="Rounded Rectangle 100"/>
+          <p:cNvPr id="103" name="Rounded Rectangle 102"/>
           <p:cNvSpPr/>
           <p:nvPr/>
         </p:nvSpPr>
@@ -9022,11 +9135,11 @@
       </p:sp>
       <p:sp>
         <p:nvSpPr>
-          <p:cNvPr id="102" name="TextBox 101"/>
+          <p:cNvPr id="104" name="TextBox 103"/>
           <p:cNvSpPr txBox="1"/>
           <p:nvPr>
             <p:custDataLst>
-              <p:tags r:id="rId45"/>
+              <p:tags r:id="rId46"/>
             </p:custDataLst>
           </p:nvPr>
         </p:nvSpPr>
@@ -9073,7 +9186,7 @@
       </p:sp>
       <p:sp>
         <p:nvSpPr>
-          <p:cNvPr id="103" name="Rounded Rectangle 102"/>
+          <p:cNvPr id="105" name="Rounded Rectangle 104"/>
           <p:cNvSpPr/>
           <p:nvPr/>
         </p:nvSpPr>
@@ -9124,11 +9237,11 @@
       </p:sp>
       <p:sp>
         <p:nvSpPr>
-          <p:cNvPr id="104" name="TextBox 103"/>
+          <p:cNvPr id="106" name="TextBox 105"/>
           <p:cNvSpPr txBox="1"/>
           <p:nvPr>
             <p:custDataLst>
-              <p:tags r:id="rId46"/>
+              <p:tags r:id="rId47"/>
             </p:custDataLst>
           </p:nvPr>
         </p:nvSpPr>
@@ -9175,11 +9288,11 @@
       </p:sp>
       <p:sp>
         <p:nvSpPr>
-          <p:cNvPr id="105" name="TextBox 104"/>
+          <p:cNvPr id="107" name="TextBox 106"/>
           <p:cNvSpPr txBox="1"/>
           <p:nvPr>
             <p:custDataLst>
-              <p:tags r:id="rId47"/>
+              <p:tags r:id="rId48"/>
             </p:custDataLst>
           </p:nvPr>
         </p:nvSpPr>
@@ -9226,7 +9339,7 @@
       </p:sp>
       <p:sp>
         <p:nvSpPr>
-          <p:cNvPr id="106" name="Rounded Rectangle 105"/>
+          <p:cNvPr id="108" name="Rounded Rectangle 107"/>
           <p:cNvSpPr/>
           <p:nvPr/>
         </p:nvSpPr>
@@ -9279,11 +9392,11 @@
       </p:sp>
       <p:sp>
         <p:nvSpPr>
-          <p:cNvPr id="107" name="TextBox 106"/>
+          <p:cNvPr id="109" name="TextBox 108"/>
           <p:cNvSpPr txBox="1"/>
           <p:nvPr>
             <p:custDataLst>
-              <p:tags r:id="rId48"/>
+              <p:tags r:id="rId49"/>
             </p:custDataLst>
           </p:nvPr>
         </p:nvSpPr>
@@ -9330,7 +9443,7 @@
       </p:sp>
       <p:sp>
         <p:nvSpPr>
-          <p:cNvPr id="108" name="Right Arrow 107"/>
+          <p:cNvPr id="110" name="Right Arrow 109"/>
           <p:cNvSpPr/>
           <p:nvPr/>
         </p:nvSpPr>
@@ -9379,7 +9492,7 @@
       </p:sp>
       <p:sp>
         <p:nvSpPr>
-          <p:cNvPr id="109" name="Rounded Rectangle 108"/>
+          <p:cNvPr id="111" name="Rounded Rectangle 110"/>
           <p:cNvSpPr/>
           <p:nvPr/>
         </p:nvSpPr>
@@ -9432,11 +9545,11 @@
       </p:sp>
       <p:sp>
         <p:nvSpPr>
-          <p:cNvPr id="110" name="TextBox 109"/>
+          <p:cNvPr id="112" name="TextBox 111"/>
           <p:cNvSpPr txBox="1"/>
           <p:nvPr>
             <p:custDataLst>
-              <p:tags r:id="rId49"/>
+              <p:tags r:id="rId50"/>
             </p:custDataLst>
           </p:nvPr>
         </p:nvSpPr>
@@ -9483,7 +9596,7 @@
       </p:sp>
       <p:sp>
         <p:nvSpPr>
-          <p:cNvPr id="111" name="Right Arrow 110"/>
+          <p:cNvPr id="113" name="Right Arrow 112"/>
           <p:cNvSpPr/>
           <p:nvPr/>
         </p:nvSpPr>
@@ -9532,7 +9645,7 @@
       </p:sp>
       <p:sp>
         <p:nvSpPr>
-          <p:cNvPr id="112" name="Rounded Rectangle 111"/>
+          <p:cNvPr id="114" name="Rounded Rectangle 113"/>
           <p:cNvSpPr/>
           <p:nvPr/>
         </p:nvSpPr>
@@ -9583,11 +9696,11 @@
       </p:sp>
       <p:sp>
         <p:nvSpPr>
-          <p:cNvPr id="113" name="TextBox 112"/>
+          <p:cNvPr id="115" name="TextBox 114"/>
           <p:cNvSpPr txBox="1"/>
           <p:nvPr>
             <p:custDataLst>
-              <p:tags r:id="rId50"/>
+              <p:tags r:id="rId51"/>
             </p:custDataLst>
           </p:nvPr>
         </p:nvSpPr>
@@ -9634,11 +9747,11 @@
       </p:sp>
       <p:sp>
         <p:nvSpPr>
-          <p:cNvPr id="114" name="TextBox 113"/>
+          <p:cNvPr id="116" name="TextBox 115"/>
           <p:cNvSpPr txBox="1"/>
           <p:nvPr>
             <p:custDataLst>
-              <p:tags r:id="rId51"/>
+              <p:tags r:id="rId52"/>
             </p:custDataLst>
           </p:nvPr>
         </p:nvSpPr>
@@ -9685,7 +9798,7 @@
       </p:sp>
       <p:sp>
         <p:nvSpPr>
-          <p:cNvPr id="115" name="Rounded Rectangle 114"/>
+          <p:cNvPr id="117" name="Rounded Rectangle 116"/>
           <p:cNvSpPr/>
           <p:nvPr/>
         </p:nvSpPr>
@@ -9736,7 +9849,7 @@
       </p:sp>
       <p:sp>
         <p:nvSpPr>
-          <p:cNvPr id="116" name="Oval 115"/>
+          <p:cNvPr id="118" name="Oval 117"/>
           <p:cNvSpPr/>
           <p:nvPr/>
         </p:nvSpPr>
@@ -9785,7 +9898,7 @@
       </p:sp>
       <p:sp>
         <p:nvSpPr>
-          <p:cNvPr id="117" name="Oval 116"/>
+          <p:cNvPr id="119" name="Oval 118"/>
           <p:cNvSpPr/>
           <p:nvPr/>
         </p:nvSpPr>
@@ -9834,7 +9947,7 @@
       </p:sp>
       <p:sp>
         <p:nvSpPr>
-          <p:cNvPr id="118" name="Oval 117"/>
+          <p:cNvPr id="120" name="Oval 119"/>
           <p:cNvSpPr/>
           <p:nvPr/>
         </p:nvSpPr>
@@ -9883,7 +9996,7 @@
       </p:sp>
       <p:sp>
         <p:nvSpPr>
-          <p:cNvPr id="119" name="Oval 118"/>
+          <p:cNvPr id="121" name="Oval 120"/>
           <p:cNvSpPr/>
           <p:nvPr/>
         </p:nvSpPr>
@@ -9932,11 +10045,11 @@
       </p:sp>
       <p:sp>
         <p:nvSpPr>
-          <p:cNvPr id="120" name="TextBox 119"/>
+          <p:cNvPr id="122" name="TextBox 121"/>
           <p:cNvSpPr txBox="1"/>
           <p:nvPr>
             <p:custDataLst>
-              <p:tags r:id="rId52"/>
+              <p:tags r:id="rId53"/>
             </p:custDataLst>
           </p:nvPr>
         </p:nvSpPr>
@@ -9983,11 +10096,11 @@
       </p:sp>
       <p:sp>
         <p:nvSpPr>
-          <p:cNvPr id="121" name="TextBox 120"/>
+          <p:cNvPr id="123" name="TextBox 122"/>
           <p:cNvSpPr txBox="1"/>
           <p:nvPr>
             <p:custDataLst>
-              <p:tags r:id="rId53"/>
+              <p:tags r:id="rId54"/>
             </p:custDataLst>
           </p:nvPr>
         </p:nvSpPr>
@@ -10045,7 +10158,7 @@
       </p:sp>
       <p:cxnSp>
         <p:nvCxnSpPr>
-          <p:cNvPr id="122" name="Connector 121"/>
+          <p:cNvPr id="124" name="Connector 123"/>
           <p:cNvCxnSpPr/>
           <p:nvPr/>
         </p:nvCxnSpPr>
@@ -10081,7 +10194,7 @@
       </p:cxnSp>
       <p:sp>
         <p:nvSpPr>
-          <p:cNvPr id="123" name="Rounded Rectangle 122"/>
+          <p:cNvPr id="125" name="Rounded Rectangle 124"/>
           <p:cNvSpPr/>
           <p:nvPr/>
         </p:nvSpPr>
@@ -10134,7 +10247,7 @@
       </p:sp>
       <p:sp>
         <p:nvSpPr>
-          <p:cNvPr id="124" name="Rectangle 123"/>
+          <p:cNvPr id="126" name="Rectangle 125"/>
           <p:cNvSpPr/>
           <p:nvPr/>
         </p:nvSpPr>
@@ -10183,11 +10296,11 @@
       </p:sp>
       <p:sp>
         <p:nvSpPr>
-          <p:cNvPr id="125" name="TextBox 124"/>
+          <p:cNvPr id="127" name="TextBox 126"/>
           <p:cNvSpPr txBox="1"/>
           <p:nvPr>
             <p:custDataLst>
-              <p:tags r:id="rId54"/>
+              <p:tags r:id="rId55"/>
             </p:custDataLst>
           </p:nvPr>
         </p:nvSpPr>
@@ -10234,11 +10347,11 @@
       </p:sp>
       <p:sp>
         <p:nvSpPr>
-          <p:cNvPr id="126" name="TextBox 125"/>
+          <p:cNvPr id="128" name="TextBox 127"/>
           <p:cNvSpPr txBox="1"/>
           <p:nvPr>
             <p:custDataLst>
-              <p:tags r:id="rId55"/>
+              <p:tags r:id="rId56"/>
             </p:custDataLst>
           </p:nvPr>
         </p:nvSpPr>
@@ -10333,7 +10446,7 @@
       </p:sp>
       <p:sp>
         <p:nvSpPr>
-          <p:cNvPr id="127" name="Rounded Rectangle 126"/>
+          <p:cNvPr id="129" name="Rounded Rectangle 128"/>
           <p:cNvSpPr/>
           <p:nvPr/>
         </p:nvSpPr>
@@ -10386,7 +10499,7 @@
       </p:sp>
       <p:sp>
         <p:nvSpPr>
-          <p:cNvPr id="128" name="Rectangle 127"/>
+          <p:cNvPr id="130" name="Rectangle 129"/>
           <p:cNvSpPr/>
           <p:nvPr/>
         </p:nvSpPr>
@@ -10435,11 +10548,11 @@
       </p:sp>
       <p:sp>
         <p:nvSpPr>
-          <p:cNvPr id="129" name="TextBox 128"/>
+          <p:cNvPr id="131" name="TextBox 130"/>
           <p:cNvSpPr txBox="1"/>
           <p:nvPr>
             <p:custDataLst>
-              <p:tags r:id="rId56"/>
+              <p:tags r:id="rId57"/>
             </p:custDataLst>
           </p:nvPr>
         </p:nvSpPr>
@@ -10486,11 +10599,11 @@
       </p:sp>
       <p:sp>
         <p:nvSpPr>
-          <p:cNvPr id="130" name="TextBox 129"/>
+          <p:cNvPr id="132" name="TextBox 131"/>
           <p:cNvSpPr txBox="1"/>
           <p:nvPr>
             <p:custDataLst>
-              <p:tags r:id="rId57"/>
+              <p:tags r:id="rId58"/>
             </p:custDataLst>
           </p:nvPr>
         </p:nvSpPr>
@@ -10585,7 +10698,7 @@
       </p:sp>
       <p:sp>
         <p:nvSpPr>
-          <p:cNvPr id="131" name="Rounded Rectangle 130"/>
+          <p:cNvPr id="133" name="Rounded Rectangle 132"/>
           <p:cNvSpPr/>
           <p:nvPr/>
         </p:nvSpPr>
@@ -10638,7 +10751,7 @@
       </p:sp>
       <p:sp>
         <p:nvSpPr>
-          <p:cNvPr id="132" name="Rectangle 131"/>
+          <p:cNvPr id="134" name="Rectangle 133"/>
           <p:cNvSpPr/>
           <p:nvPr/>
         </p:nvSpPr>
@@ -10687,11 +10800,11 @@
       </p:sp>
       <p:sp>
         <p:nvSpPr>
-          <p:cNvPr id="133" name="TextBox 132"/>
+          <p:cNvPr id="135" name="TextBox 134"/>
           <p:cNvSpPr txBox="1"/>
           <p:nvPr>
             <p:custDataLst>
-              <p:tags r:id="rId58"/>
+              <p:tags r:id="rId59"/>
             </p:custDataLst>
           </p:nvPr>
         </p:nvSpPr>
@@ -10738,11 +10851,11 @@
       </p:sp>
       <p:sp>
         <p:nvSpPr>
-          <p:cNvPr id="134" name="TextBox 133"/>
+          <p:cNvPr id="136" name="TextBox 135"/>
           <p:cNvSpPr txBox="1"/>
           <p:nvPr>
             <p:custDataLst>
-              <p:tags r:id="rId59"/>
+              <p:tags r:id="rId60"/>
             </p:custDataLst>
           </p:nvPr>
         </p:nvSpPr>
@@ -10837,11 +10950,11 @@
       </p:sp>
       <p:sp>
         <p:nvSpPr>
-          <p:cNvPr id="135" name="TextBox 134"/>
+          <p:cNvPr id="137" name="TextBox 136"/>
           <p:cNvSpPr txBox="1"/>
           <p:nvPr>
             <p:custDataLst>
-              <p:tags r:id="rId60"/>
+              <p:tags r:id="rId61"/>
             </p:custDataLst>
           </p:nvPr>
         </p:nvSpPr>
@@ -10899,7 +11012,7 @@
       </p:sp>
       <p:cxnSp>
         <p:nvCxnSpPr>
-          <p:cNvPr id="136" name="Connector 135"/>
+          <p:cNvPr id="138" name="Connector 137"/>
           <p:cNvCxnSpPr/>
           <p:nvPr/>
         </p:nvCxnSpPr>
@@ -10935,11 +11048,11 @@
       </p:cxnSp>
       <p:sp>
         <p:nvSpPr>
-          <p:cNvPr id="137" name="TextBox 136"/>
+          <p:cNvPr id="139" name="TextBox 138"/>
           <p:cNvSpPr txBox="1"/>
           <p:nvPr>
             <p:custDataLst>
-              <p:tags r:id="rId61"/>
+              <p:tags r:id="rId62"/>
             </p:custDataLst>
           </p:nvPr>
         </p:nvSpPr>
@@ -10986,11 +11099,11 @@
       </p:sp>
       <p:sp>
         <p:nvSpPr>
-          <p:cNvPr id="138" name="TextBox 137"/>
+          <p:cNvPr id="140" name="TextBox 139"/>
           <p:cNvSpPr txBox="1"/>
           <p:nvPr>
             <p:custDataLst>
-              <p:tags r:id="rId62"/>
+              <p:tags r:id="rId63"/>
             </p:custDataLst>
           </p:nvPr>
         </p:nvSpPr>
@@ -11037,7 +11150,7 @@
       </p:sp>
       <p:sp>
         <p:nvSpPr>
-          <p:cNvPr id="139" name="Rectangle 138"/>
+          <p:cNvPr id="141" name="Rectangle 140"/>
           <p:cNvSpPr/>
           <p:nvPr/>
         </p:nvSpPr>
@@ -11086,7 +11199,7 @@
       </p:sp>
       <p:sp>
         <p:nvSpPr>
-          <p:cNvPr id="140" name="Rectangle 139"/>
+          <p:cNvPr id="142" name="Rectangle 141"/>
           <p:cNvSpPr/>
           <p:nvPr/>
         </p:nvSpPr>
@@ -11135,11 +11248,11 @@
       </p:sp>
       <p:sp>
         <p:nvSpPr>
-          <p:cNvPr id="141" name="TextBox 140"/>
+          <p:cNvPr id="143" name="TextBox 142"/>
           <p:cNvSpPr txBox="1"/>
           <p:nvPr>
             <p:custDataLst>
-              <p:tags r:id="rId63"/>
+              <p:tags r:id="rId64"/>
             </p:custDataLst>
           </p:nvPr>
         </p:nvSpPr>
@@ -11186,11 +11299,11 @@
       </p:sp>
       <p:sp>
         <p:nvSpPr>
-          <p:cNvPr id="142" name="TextBox 141"/>
+          <p:cNvPr id="144" name="TextBox 143"/>
           <p:cNvSpPr txBox="1"/>
           <p:nvPr>
             <p:custDataLst>
-              <p:tags r:id="rId64"/>
+              <p:tags r:id="rId65"/>
             </p:custDataLst>
           </p:nvPr>
         </p:nvSpPr>
@@ -11237,7 +11350,7 @@
       </p:sp>
       <p:sp>
         <p:nvSpPr>
-          <p:cNvPr id="143" name="Rectangle 142"/>
+          <p:cNvPr id="145" name="Rectangle 144"/>
           <p:cNvSpPr/>
           <p:nvPr/>
         </p:nvSpPr>
@@ -11286,7 +11399,7 @@
       </p:sp>
       <p:sp>
         <p:nvSpPr>
-          <p:cNvPr id="144" name="Rectangle 143"/>
+          <p:cNvPr id="146" name="Rectangle 145"/>
           <p:cNvSpPr/>
           <p:nvPr/>
         </p:nvSpPr>
@@ -11335,11 +11448,11 @@
       </p:sp>
       <p:sp>
         <p:nvSpPr>
-          <p:cNvPr id="145" name="TextBox 144"/>
+          <p:cNvPr id="147" name="TextBox 146"/>
           <p:cNvSpPr txBox="1"/>
           <p:nvPr>
             <p:custDataLst>
-              <p:tags r:id="rId65"/>
+              <p:tags r:id="rId66"/>
             </p:custDataLst>
           </p:nvPr>
         </p:nvSpPr>
@@ -11386,11 +11499,11 @@
       </p:sp>
       <p:sp>
         <p:nvSpPr>
-          <p:cNvPr id="146" name="TextBox 145"/>
+          <p:cNvPr id="148" name="TextBox 147"/>
           <p:cNvSpPr txBox="1"/>
           <p:nvPr>
             <p:custDataLst>
-              <p:tags r:id="rId66"/>
+              <p:tags r:id="rId67"/>
             </p:custDataLst>
           </p:nvPr>
         </p:nvSpPr>
@@ -11437,7 +11550,7 @@
       </p:sp>
       <p:sp>
         <p:nvSpPr>
-          <p:cNvPr id="147" name="Rectangle 146"/>
+          <p:cNvPr id="149" name="Rectangle 148"/>
           <p:cNvSpPr/>
           <p:nvPr/>
         </p:nvSpPr>
@@ -11486,7 +11599,7 @@
       </p:sp>
       <p:sp>
         <p:nvSpPr>
-          <p:cNvPr id="148" name="Rectangle 147"/>
+          <p:cNvPr id="150" name="Rectangle 149"/>
           <p:cNvSpPr/>
           <p:nvPr/>
         </p:nvSpPr>
@@ -11535,11 +11648,11 @@
       </p:sp>
       <p:sp>
         <p:nvSpPr>
-          <p:cNvPr id="149" name="TextBox 148"/>
+          <p:cNvPr id="151" name="TextBox 150"/>
           <p:cNvSpPr txBox="1"/>
           <p:nvPr>
             <p:custDataLst>
-              <p:tags r:id="rId67"/>
+              <p:tags r:id="rId68"/>
             </p:custDataLst>
           </p:nvPr>
         </p:nvSpPr>
@@ -11586,7 +11699,7 @@
       </p:sp>
       <p:cxnSp>
         <p:nvCxnSpPr>
-          <p:cNvPr id="150" name="Connector 149"/>
+          <p:cNvPr id="152" name="Connector 151"/>
           <p:cNvCxnSpPr/>
           <p:nvPr/>
         </p:nvCxnSpPr>
@@ -11622,11 +11735,11 @@
       </p:cxnSp>
       <p:sp>
         <p:nvSpPr>
-          <p:cNvPr id="151" name="TextBox 150"/>
+          <p:cNvPr id="153" name="TextBox 152"/>
           <p:cNvSpPr txBox="1"/>
           <p:nvPr>
             <p:custDataLst>
-              <p:tags r:id="rId68"/>
+              <p:tags r:id="rId69"/>
             </p:custDataLst>
           </p:nvPr>
         </p:nvSpPr>
@@ -11673,7 +11786,7 @@
       </p:sp>
       <p:cxnSp>
         <p:nvCxnSpPr>
-          <p:cNvPr id="152" name="Connector 151"/>
+          <p:cNvPr id="154" name="Connector 153"/>
           <p:cNvCxnSpPr/>
           <p:nvPr/>
         </p:nvCxnSpPr>
@@ -11709,11 +11822,11 @@
       </p:cxnSp>
       <p:sp>
         <p:nvSpPr>
-          <p:cNvPr id="153" name="TextBox 152"/>
+          <p:cNvPr id="155" name="TextBox 154"/>
           <p:cNvSpPr txBox="1"/>
           <p:nvPr>
             <p:custDataLst>
-              <p:tags r:id="rId69"/>
+              <p:tags r:id="rId70"/>
             </p:custDataLst>
           </p:nvPr>
         </p:nvSpPr>
@@ -11760,7 +11873,7 @@
       </p:sp>
       <p:cxnSp>
         <p:nvCxnSpPr>
-          <p:cNvPr id="154" name="Connector 153"/>
+          <p:cNvPr id="156" name="Connector 155"/>
           <p:cNvCxnSpPr/>
           <p:nvPr/>
         </p:nvCxnSpPr>
@@ -11796,11 +11909,11 @@
       </p:cxnSp>
       <p:sp>
         <p:nvSpPr>
-          <p:cNvPr id="155" name="TextBox 154"/>
+          <p:cNvPr id="157" name="TextBox 156"/>
           <p:cNvSpPr txBox="1"/>
           <p:nvPr>
             <p:custDataLst>
-              <p:tags r:id="rId70"/>
+              <p:tags r:id="rId71"/>
             </p:custDataLst>
           </p:nvPr>
         </p:nvSpPr>
@@ -11847,11 +11960,11 @@
       </p:sp>
       <p:sp>
         <p:nvSpPr>
-          <p:cNvPr id="156" name="TextBox 155"/>
+          <p:cNvPr id="158" name="TextBox 157"/>
           <p:cNvSpPr txBox="1"/>
           <p:nvPr>
             <p:custDataLst>
-              <p:tags r:id="rId71"/>
+              <p:tags r:id="rId72"/>
             </p:custDataLst>
           </p:nvPr>
         </p:nvSpPr>
@@ -11898,7 +12011,7 @@
       </p:sp>
       <p:cxnSp>
         <p:nvCxnSpPr>
-          <p:cNvPr id="157" name="Connector 156"/>
+          <p:cNvPr id="159" name="Connector 158"/>
           <p:cNvCxnSpPr/>
           <p:nvPr/>
         </p:nvCxnSpPr>
@@ -11934,11 +12047,11 @@
       </p:cxnSp>
       <p:sp>
         <p:nvSpPr>
-          <p:cNvPr id="158" name="TextBox 157"/>
+          <p:cNvPr id="160" name="TextBox 159"/>
           <p:cNvSpPr txBox="1"/>
           <p:nvPr>
             <p:custDataLst>
-              <p:tags r:id="rId72"/>
+              <p:tags r:id="rId73"/>
             </p:custDataLst>
           </p:nvPr>
         </p:nvSpPr>
@@ -11985,11 +12098,11 @@
       </p:sp>
       <p:sp>
         <p:nvSpPr>
-          <p:cNvPr id="159" name="TextBox 158"/>
+          <p:cNvPr id="161" name="TextBox 160"/>
           <p:cNvSpPr txBox="1"/>
           <p:nvPr>
             <p:custDataLst>
-              <p:tags r:id="rId73"/>
+              <p:tags r:id="rId74"/>
             </p:custDataLst>
           </p:nvPr>
         </p:nvSpPr>
@@ -12036,11 +12149,11 @@
       </p:sp>
       <p:sp>
         <p:nvSpPr>
-          <p:cNvPr id="160" name="TextBox 159"/>
+          <p:cNvPr id="162" name="TextBox 161"/>
           <p:cNvSpPr txBox="1"/>
           <p:nvPr>
             <p:custDataLst>
-              <p:tags r:id="rId74"/>
+              <p:tags r:id="rId75"/>
             </p:custDataLst>
           </p:nvPr>
         </p:nvSpPr>
@@ -12087,7 +12200,7 @@
       </p:sp>
       <p:sp>
         <p:nvSpPr>
-          <p:cNvPr id="161" name="Rounded Rectangle 160"/>
+          <p:cNvPr id="163" name="Rounded Rectangle 162"/>
           <p:cNvSpPr/>
           <p:nvPr/>
         </p:nvSpPr>
@@ -12138,11 +12251,11 @@
       </p:sp>
       <p:sp>
         <p:nvSpPr>
-          <p:cNvPr id="162" name="TextBox 161"/>
+          <p:cNvPr id="164" name="TextBox 163"/>
           <p:cNvSpPr txBox="1"/>
           <p:nvPr>
             <p:custDataLst>
-              <p:tags r:id="rId75"/>
+              <p:tags r:id="rId76"/>
             </p:custDataLst>
           </p:nvPr>
         </p:nvSpPr>
@@ -12189,11 +12302,11 @@
       </p:sp>
       <p:sp>
         <p:nvSpPr>
-          <p:cNvPr id="163" name="TextBox 162"/>
+          <p:cNvPr id="165" name="TextBox 164"/>
           <p:cNvSpPr txBox="1"/>
           <p:nvPr>
             <p:custDataLst>
-              <p:tags r:id="rId76"/>
+              <p:tags r:id="rId77"/>
             </p:custDataLst>
           </p:nvPr>
         </p:nvSpPr>
@@ -12240,7 +12353,7 @@
       </p:sp>
       <p:sp>
         <p:nvSpPr>
-          <p:cNvPr id="164" name="Rounded Rectangle 163"/>
+          <p:cNvPr id="166" name="Rounded Rectangle 165"/>
           <p:cNvSpPr/>
           <p:nvPr/>
         </p:nvSpPr>
@@ -12291,11 +12404,11 @@
       </p:sp>
       <p:sp>
         <p:nvSpPr>
-          <p:cNvPr id="165" name="TextBox 164"/>
+          <p:cNvPr id="167" name="TextBox 166"/>
           <p:cNvSpPr txBox="1"/>
           <p:nvPr>
             <p:custDataLst>
-              <p:tags r:id="rId77"/>
+              <p:tags r:id="rId78"/>
             </p:custDataLst>
           </p:nvPr>
         </p:nvSpPr>
@@ -12342,11 +12455,11 @@
       </p:sp>
       <p:sp>
         <p:nvSpPr>
-          <p:cNvPr id="166" name="TextBox 165"/>
+          <p:cNvPr id="168" name="TextBox 167"/>
           <p:cNvSpPr txBox="1"/>
           <p:nvPr>
             <p:custDataLst>
-              <p:tags r:id="rId78"/>
+              <p:tags r:id="rId79"/>
             </p:custDataLst>
           </p:nvPr>
         </p:nvSpPr>
@@ -12393,7 +12506,7 @@
       </p:sp>
       <p:sp>
         <p:nvSpPr>
-          <p:cNvPr id="167" name="Rounded Rectangle 166"/>
+          <p:cNvPr id="169" name="Rounded Rectangle 168"/>
           <p:cNvSpPr/>
           <p:nvPr/>
         </p:nvSpPr>
@@ -12444,11 +12557,11 @@
       </p:sp>
       <p:sp>
         <p:nvSpPr>
-          <p:cNvPr id="168" name="TextBox 167"/>
+          <p:cNvPr id="170" name="TextBox 169"/>
           <p:cNvSpPr txBox="1"/>
           <p:nvPr>
             <p:custDataLst>
-              <p:tags r:id="rId79"/>
+              <p:tags r:id="rId80"/>
             </p:custDataLst>
           </p:nvPr>
         </p:nvSpPr>
@@ -12495,11 +12608,11 @@
       </p:sp>
       <p:sp>
         <p:nvSpPr>
-          <p:cNvPr id="169" name="TextBox 168"/>
+          <p:cNvPr id="171" name="TextBox 170"/>
           <p:cNvSpPr txBox="1"/>
           <p:nvPr>
             <p:custDataLst>
-              <p:tags r:id="rId80"/>
+              <p:tags r:id="rId81"/>
             </p:custDataLst>
           </p:nvPr>
         </p:nvSpPr>
@@ -12546,11 +12659,11 @@
       </p:sp>
       <p:sp>
         <p:nvSpPr>
-          <p:cNvPr id="170" name="TextBox 169"/>
+          <p:cNvPr id="172" name="TextBox 171"/>
           <p:cNvSpPr txBox="1"/>
           <p:nvPr>
             <p:custDataLst>
-              <p:tags r:id="rId81"/>
+              <p:tags r:id="rId82"/>
             </p:custDataLst>
           </p:nvPr>
         </p:nvSpPr>
@@ -12597,7 +12710,7 @@
       </p:sp>
       <p:sp>
         <p:nvSpPr>
-          <p:cNvPr id="171" name="Rounded Rectangle 170"/>
+          <p:cNvPr id="173" name="Rounded Rectangle 172"/>
           <p:cNvSpPr/>
           <p:nvPr/>
         </p:nvSpPr>
@@ -12648,11 +12761,11 @@
       </p:sp>
       <p:sp>
         <p:nvSpPr>
-          <p:cNvPr id="172" name="TextBox 171"/>
+          <p:cNvPr id="174" name="TextBox 173"/>
           <p:cNvSpPr txBox="1"/>
           <p:nvPr>
             <p:custDataLst>
-              <p:tags r:id="rId82"/>
+              <p:tags r:id="rId83"/>
             </p:custDataLst>
           </p:nvPr>
         </p:nvSpPr>
@@ -12723,7 +12836,7 @@
       </p:sp>
       <p:sp>
         <p:nvSpPr>
-          <p:cNvPr id="173" name="Rounded Rectangle 172"/>
+          <p:cNvPr id="175" name="Rounded Rectangle 174"/>
           <p:cNvSpPr/>
           <p:nvPr/>
         </p:nvSpPr>
@@ -12776,11 +12889,11 @@
       </p:sp>
       <p:sp>
         <p:nvSpPr>
-          <p:cNvPr id="174" name="TextBox 173"/>
+          <p:cNvPr id="176" name="TextBox 175"/>
           <p:cNvSpPr txBox="1"/>
           <p:nvPr>
             <p:custDataLst>
-              <p:tags r:id="rId83"/>
+              <p:tags r:id="rId84"/>
             </p:custDataLst>
           </p:nvPr>
         </p:nvSpPr>
@@ -12827,11 +12940,11 @@
       </p:sp>
       <p:sp>
         <p:nvSpPr>
-          <p:cNvPr id="175" name="TextBox 174"/>
+          <p:cNvPr id="177" name="TextBox 176"/>
           <p:cNvSpPr txBox="1"/>
           <p:nvPr>
             <p:custDataLst>
-              <p:tags r:id="rId84"/>
+              <p:tags r:id="rId85"/>
             </p:custDataLst>
           </p:nvPr>
         </p:nvSpPr>
@@ -12878,7 +12991,7 @@
       </p:sp>
       <p:sp>
         <p:nvSpPr>
-          <p:cNvPr id="176" name="Rounded Rectangle 175"/>
+          <p:cNvPr id="178" name="Rounded Rectangle 177"/>
           <p:cNvSpPr/>
           <p:nvPr/>
         </p:nvSpPr>
@@ -12929,11 +13042,11 @@
       </p:sp>
       <p:sp>
         <p:nvSpPr>
-          <p:cNvPr id="177" name="TextBox 176"/>
+          <p:cNvPr id="179" name="TextBox 178"/>
           <p:cNvSpPr txBox="1"/>
           <p:nvPr>
             <p:custDataLst>
-              <p:tags r:id="rId85"/>
+              <p:tags r:id="rId86"/>
             </p:custDataLst>
           </p:nvPr>
         </p:nvSpPr>
@@ -12980,11 +13093,11 @@
       </p:sp>
       <p:sp>
         <p:nvSpPr>
-          <p:cNvPr id="178" name="TextBox 177"/>
+          <p:cNvPr id="180" name="TextBox 179"/>
           <p:cNvSpPr txBox="1"/>
           <p:nvPr>
             <p:custDataLst>
-              <p:tags r:id="rId86"/>
+              <p:tags r:id="rId87"/>
             </p:custDataLst>
           </p:nvPr>
         </p:nvSpPr>
@@ -13031,7 +13144,7 @@
       </p:sp>
       <p:sp>
         <p:nvSpPr>
-          <p:cNvPr id="179" name="Rounded Rectangle 178"/>
+          <p:cNvPr id="181" name="Rounded Rectangle 180"/>
           <p:cNvSpPr/>
           <p:nvPr/>
         </p:nvSpPr>
@@ -13082,11 +13195,11 @@
       </p:sp>
       <p:sp>
         <p:nvSpPr>
-          <p:cNvPr id="180" name="TextBox 179"/>
+          <p:cNvPr id="182" name="TextBox 181"/>
           <p:cNvSpPr txBox="1"/>
           <p:nvPr>
             <p:custDataLst>
-              <p:tags r:id="rId87"/>
+              <p:tags r:id="rId88"/>
             </p:custDataLst>
           </p:nvPr>
         </p:nvSpPr>
@@ -13133,11 +13246,11 @@
       </p:sp>
       <p:sp>
         <p:nvSpPr>
-          <p:cNvPr id="181" name="TextBox 180"/>
+          <p:cNvPr id="183" name="TextBox 182"/>
           <p:cNvSpPr txBox="1"/>
           <p:nvPr>
             <p:custDataLst>
-              <p:tags r:id="rId88"/>
+              <p:tags r:id="rId89"/>
             </p:custDataLst>
           </p:nvPr>
         </p:nvSpPr>
@@ -13184,7 +13297,7 @@
       </p:sp>
       <p:sp>
         <p:nvSpPr>
-          <p:cNvPr id="182" name="Rounded Rectangle 181"/>
+          <p:cNvPr id="184" name="Rounded Rectangle 183"/>
           <p:cNvSpPr/>
           <p:nvPr/>
         </p:nvSpPr>
@@ -13235,11 +13348,11 @@
       </p:sp>
       <p:sp>
         <p:nvSpPr>
-          <p:cNvPr id="183" name="TextBox 182"/>
+          <p:cNvPr id="185" name="TextBox 184"/>
           <p:cNvSpPr txBox="1"/>
           <p:nvPr>
             <p:custDataLst>
-              <p:tags r:id="rId89"/>
+              <p:tags r:id="rId90"/>
             </p:custDataLst>
           </p:nvPr>
         </p:nvSpPr>
@@ -13286,11 +13399,11 @@
       </p:sp>
       <p:sp>
         <p:nvSpPr>
-          <p:cNvPr id="184" name="TextBox 183"/>
+          <p:cNvPr id="186" name="TextBox 185"/>
           <p:cNvSpPr txBox="1"/>
           <p:nvPr>
             <p:custDataLst>
-              <p:tags r:id="rId90"/>
+              <p:tags r:id="rId91"/>
             </p:custDataLst>
           </p:nvPr>
         </p:nvSpPr>
@@ -13337,7 +13450,7 @@
       </p:sp>
       <p:sp>
         <p:nvSpPr>
-          <p:cNvPr id="185" name="Rounded Rectangle 184"/>
+          <p:cNvPr id="187" name="Rounded Rectangle 186"/>
           <p:cNvSpPr/>
           <p:nvPr/>
         </p:nvSpPr>
@@ -13390,11 +13503,11 @@
       </p:sp>
       <p:sp>
         <p:nvSpPr>
-          <p:cNvPr id="186" name="TextBox 185"/>
+          <p:cNvPr id="188" name="TextBox 187"/>
           <p:cNvSpPr txBox="1"/>
           <p:nvPr>
             <p:custDataLst>
-              <p:tags r:id="rId91"/>
+              <p:tags r:id="rId92"/>
             </p:custDataLst>
           </p:nvPr>
         </p:nvSpPr>
@@ -13441,11 +13554,11 @@
       </p:sp>
       <p:sp>
         <p:nvSpPr>
-          <p:cNvPr id="187" name="TextBox 186"/>
+          <p:cNvPr id="189" name="TextBox 188"/>
           <p:cNvSpPr txBox="1"/>
           <p:nvPr>
             <p:custDataLst>
-              <p:tags r:id="rId92"/>
+              <p:tags r:id="rId93"/>
             </p:custDataLst>
           </p:nvPr>
         </p:nvSpPr>
@@ -13492,7 +13605,7 @@
       </p:sp>
       <p:sp>
         <p:nvSpPr>
-          <p:cNvPr id="188" name="Rounded Rectangle 187"/>
+          <p:cNvPr id="190" name="Rounded Rectangle 189"/>
           <p:cNvSpPr/>
           <p:nvPr/>
         </p:nvSpPr>
@@ -13543,11 +13656,11 @@
       </p:sp>
       <p:sp>
         <p:nvSpPr>
-          <p:cNvPr id="189" name="TextBox 188"/>
+          <p:cNvPr id="191" name="TextBox 190"/>
           <p:cNvSpPr txBox="1"/>
           <p:nvPr>
             <p:custDataLst>
-              <p:tags r:id="rId93"/>
+              <p:tags r:id="rId94"/>
             </p:custDataLst>
           </p:nvPr>
         </p:nvSpPr>
@@ -13594,11 +13707,11 @@
       </p:sp>
       <p:sp>
         <p:nvSpPr>
-          <p:cNvPr id="190" name="TextBox 189"/>
+          <p:cNvPr id="192" name="TextBox 191"/>
           <p:cNvSpPr txBox="1"/>
           <p:nvPr>
             <p:custDataLst>
-              <p:tags r:id="rId94"/>
+              <p:tags r:id="rId95"/>
             </p:custDataLst>
           </p:nvPr>
         </p:nvSpPr>
@@ -13645,11 +13758,11 @@
       </p:sp>
       <p:sp>
         <p:nvSpPr>
-          <p:cNvPr id="191" name="TextBox 190"/>
+          <p:cNvPr id="193" name="TextBox 192"/>
           <p:cNvSpPr txBox="1"/>
           <p:nvPr>
             <p:custDataLst>
-              <p:tags r:id="rId95"/>
+              <p:tags r:id="rId96"/>
             </p:custDataLst>
           </p:nvPr>
         </p:nvSpPr>
@@ -13720,11 +13833,11 @@
       </p:sp>
       <p:sp>
         <p:nvSpPr>
-          <p:cNvPr id="192" name="TextBox 191"/>
+          <p:cNvPr id="194" name="TextBox 193"/>
           <p:cNvSpPr txBox="1"/>
           <p:nvPr>
             <p:custDataLst>
-              <p:tags r:id="rId96"/>
+              <p:tags r:id="rId97"/>
             </p:custDataLst>
           </p:nvPr>
         </p:nvSpPr>
@@ -13785,7 +13898,7 @@
 
 <file path=ppt/tags/tag10.xml><?xml version="1.0" encoding="utf-8"?>
 <p:tagLst xmlns:a="http://schemas.openxmlformats.org/drawingml/2006/main" xmlns:r="http://schemas.openxmlformats.org/officeDocument/2006/relationships" xmlns:p="http://schemas.openxmlformats.org/presentationml/2006/main">
-  <p:tag name="ALIGNMENT_TARGET_X" val="209.76377868652344"/>
+  <p:tag name="ALIGNMENT_TARGET_X" val="595.27557373046875"/>
 </p:tagLst>
 </file>
 
@@ -13863,7 +13976,7 @@
 
 <file path=ppt/tags/tag22.xml><?xml version="1.0" encoding="utf-8"?>
 <p:tagLst xmlns:a="http://schemas.openxmlformats.org/drawingml/2006/main" xmlns:r="http://schemas.openxmlformats.org/officeDocument/2006/relationships" xmlns:p="http://schemas.openxmlformats.org/presentationml/2006/main">
-  <p:tag name="ALIGNMENT_TARGET_X" val="467.71652221679688"/>
+  <p:tag name="ALIGNMENT_TARGET_X" val="209.76377868652344"/>
 </p:tagLst>
 </file>
 
@@ -13887,7 +14000,7 @@
 
 <file path=ppt/tags/tag26.xml><?xml version="1.0" encoding="utf-8"?>
 <p:tagLst xmlns:a="http://schemas.openxmlformats.org/drawingml/2006/main" xmlns:r="http://schemas.openxmlformats.org/officeDocument/2006/relationships" xmlns:p="http://schemas.openxmlformats.org/presentationml/2006/main">
-  <p:tag name="ALIGNMENT_TARGET_X" val="748.346435546875"/>
+  <p:tag name="ALIGNMENT_TARGET_X" val="467.71652221679688"/>
 </p:tagLst>
 </file>
 
@@ -13899,7 +14012,7 @@
 
 <file path=ppt/tags/tag28.xml><?xml version="1.0" encoding="utf-8"?>
 <p:tagLst xmlns:a="http://schemas.openxmlformats.org/drawingml/2006/main" xmlns:r="http://schemas.openxmlformats.org/officeDocument/2006/relationships" xmlns:p="http://schemas.openxmlformats.org/presentationml/2006/main">
-  <p:tag name="ALIGNMENT_TARGET_X" val="1009.1338500976563"/>
+  <p:tag name="ALIGNMENT_TARGET_X" val="748.346435546875"/>
 </p:tagLst>
 </file>
 
@@ -13917,7 +14030,7 @@
 
 <file path=ppt/tags/tag30.xml><?xml version="1.0" encoding="utf-8"?>
 <p:tagLst xmlns:a="http://schemas.openxmlformats.org/drawingml/2006/main" xmlns:r="http://schemas.openxmlformats.org/officeDocument/2006/relationships" xmlns:p="http://schemas.openxmlformats.org/presentationml/2006/main">
-  <p:tag name="ALIGNMENT_TARGET_X" val="467.71652221679688"/>
+  <p:tag name="ALIGNMENT_TARGET_X" val="1009.1338500976563"/>
 </p:tagLst>
 </file>
 
@@ -13929,7 +14042,7 @@
 
 <file path=ppt/tags/tag32.xml><?xml version="1.0" encoding="utf-8"?>
 <p:tagLst xmlns:a="http://schemas.openxmlformats.org/drawingml/2006/main" xmlns:r="http://schemas.openxmlformats.org/officeDocument/2006/relationships" xmlns:p="http://schemas.openxmlformats.org/presentationml/2006/main">
-  <p:tag name="ALIGNMENT_TARGET_X" val="748.346435546875"/>
+  <p:tag name="ALIGNMENT_TARGET_X" val="467.71652221679688"/>
 </p:tagLst>
 </file>
 
@@ -13941,37 +14054,37 @@
 
 <file path=ppt/tags/tag34.xml><?xml version="1.0" encoding="utf-8"?>
 <p:tagLst xmlns:a="http://schemas.openxmlformats.org/drawingml/2006/main" xmlns:r="http://schemas.openxmlformats.org/officeDocument/2006/relationships" xmlns:p="http://schemas.openxmlformats.org/presentationml/2006/main">
-  <p:tag name="ALIGNMENT_TARGET_X" val="1009.1338500976563"/>
+  <p:tag name="ALIGNMENT_TARGET_X" val="748.346435546875"/>
 </p:tagLst>
 </file>
 
 <file path=ppt/tags/tag35.xml><?xml version="1.0" encoding="utf-8"?>
 <p:tagLst xmlns:a="http://schemas.openxmlformats.org/drawingml/2006/main" xmlns:r="http://schemas.openxmlformats.org/officeDocument/2006/relationships" xmlns:p="http://schemas.openxmlformats.org/presentationml/2006/main">
-  <p:tag name="ALIGNMENT_TARGET_X" val="931.18112754821777"/>
+  <p:tag name="ALIGNMENT_TARGET_X" val="1009.1338500976563"/>
 </p:tagLst>
 </file>
 
 <file path=ppt/tags/tag36.xml><?xml version="1.0" encoding="utf-8"?>
 <p:tagLst xmlns:a="http://schemas.openxmlformats.org/drawingml/2006/main" xmlns:r="http://schemas.openxmlformats.org/officeDocument/2006/relationships" xmlns:p="http://schemas.openxmlformats.org/presentationml/2006/main">
-  <p:tag name="ALIGNMENT_TARGET_X" val="969.16538047790527"/>
+  <p:tag name="ALIGNMENT_TARGET_X" val="931.18112754821777"/>
 </p:tagLst>
 </file>
 
 <file path=ppt/tags/tag37.xml><?xml version="1.0" encoding="utf-8"?>
 <p:tagLst xmlns:a="http://schemas.openxmlformats.org/drawingml/2006/main" xmlns:r="http://schemas.openxmlformats.org/officeDocument/2006/relationships" xmlns:p="http://schemas.openxmlformats.org/presentationml/2006/main">
-  <p:tag name="ALIGNMENT_TARGET_X" val="1007.1496334075928"/>
+  <p:tag name="ALIGNMENT_TARGET_X" val="969.16538047790527"/>
 </p:tagLst>
 </file>
 
 <file path=ppt/tags/tag38.xml><?xml version="1.0" encoding="utf-8"?>
 <p:tagLst xmlns:a="http://schemas.openxmlformats.org/drawingml/2006/main" xmlns:r="http://schemas.openxmlformats.org/officeDocument/2006/relationships" xmlns:p="http://schemas.openxmlformats.org/presentationml/2006/main">
-  <p:tag name="ALIGNMENT_TARGET_X" val="1045.1338863372803"/>
+  <p:tag name="ALIGNMENT_TARGET_X" val="1007.1496334075928"/>
 </p:tagLst>
 </file>
 
 <file path=ppt/tags/tag39.xml><?xml version="1.0" encoding="utf-8"?>
 <p:tagLst xmlns:a="http://schemas.openxmlformats.org/drawingml/2006/main" xmlns:r="http://schemas.openxmlformats.org/officeDocument/2006/relationships" xmlns:p="http://schemas.openxmlformats.org/presentationml/2006/main">
-  <p:tag name="ALIGNMENT_TARGET_X" val="1083.1181392669678"/>
+  <p:tag name="ALIGNMENT_TARGET_X" val="1045.1338863372803"/>
 </p:tagLst>
 </file>
 
@@ -13983,7 +14096,7 @@
 
 <file path=ppt/tags/tag40.xml><?xml version="1.0" encoding="utf-8"?>
 <p:tagLst xmlns:a="http://schemas.openxmlformats.org/drawingml/2006/main" xmlns:r="http://schemas.openxmlformats.org/officeDocument/2006/relationships" xmlns:p="http://schemas.openxmlformats.org/presentationml/2006/main">
-  <p:tag name="ALIGNMENT_TARGET_X" val="467.71652221679688"/>
+  <p:tag name="ALIGNMENT_TARGET_X" val="1083.1181392669678"/>
 </p:tagLst>
 </file>
 
@@ -13995,7 +14108,7 @@
 
 <file path=ppt/tags/tag42.xml><?xml version="1.0" encoding="utf-8"?>
 <p:tagLst xmlns:a="http://schemas.openxmlformats.org/drawingml/2006/main" xmlns:r="http://schemas.openxmlformats.org/officeDocument/2006/relationships" xmlns:p="http://schemas.openxmlformats.org/presentationml/2006/main">
-  <p:tag name="ALIGNMENT_TARGET_X" val="748.346435546875"/>
+  <p:tag name="ALIGNMENT_TARGET_X" val="467.71652221679688"/>
 </p:tagLst>
 </file>
 
@@ -14007,7 +14120,7 @@
 
 <file path=ppt/tags/tag44.xml><?xml version="1.0" encoding="utf-8"?>
 <p:tagLst xmlns:a="http://schemas.openxmlformats.org/drawingml/2006/main" xmlns:r="http://schemas.openxmlformats.org/officeDocument/2006/relationships" xmlns:p="http://schemas.openxmlformats.org/presentationml/2006/main">
-  <p:tag name="ALIGNMENT_TARGET_X" val="1009.1338500976563"/>
+  <p:tag name="ALIGNMENT_TARGET_X" val="748.346435546875"/>
 </p:tagLst>
 </file>
 
@@ -14025,43 +14138,43 @@
 
 <file path=ppt/tags/tag47.xml><?xml version="1.0" encoding="utf-8"?>
 <p:tagLst xmlns:a="http://schemas.openxmlformats.org/drawingml/2006/main" xmlns:r="http://schemas.openxmlformats.org/officeDocument/2006/relationships" xmlns:p="http://schemas.openxmlformats.org/presentationml/2006/main">
-  <p:tag name="ALIGNMENT_TARGET_X" val="734.1732177734375"/>
+  <p:tag name="ALIGNMENT_TARGET_X" val="1009.1338500976563"/>
 </p:tagLst>
 </file>
 
 <file path=ppt/tags/tag48.xml><?xml version="1.0" encoding="utf-8"?>
 <p:tagLst xmlns:a="http://schemas.openxmlformats.org/drawingml/2006/main" xmlns:r="http://schemas.openxmlformats.org/officeDocument/2006/relationships" xmlns:p="http://schemas.openxmlformats.org/presentationml/2006/main">
-  <p:tag name="ALIGNMENT_TARGET_X" val="467.71652221679688"/>
+  <p:tag name="ALIGNMENT_TARGET_X" val="734.1732177734375"/>
 </p:tagLst>
 </file>
 
 <file path=ppt/tags/tag49.xml><?xml version="1.0" encoding="utf-8"?>
 <p:tagLst xmlns:a="http://schemas.openxmlformats.org/drawingml/2006/main" xmlns:r="http://schemas.openxmlformats.org/officeDocument/2006/relationships" xmlns:p="http://schemas.openxmlformats.org/presentationml/2006/main">
-  <p:tag name="ALIGNMENT_TARGET_X" val="734.17324829101563"/>
+  <p:tag name="ALIGNMENT_TARGET_X" val="467.71652221679688"/>
 </p:tagLst>
 </file>
 
 <file path=ppt/tags/tag5.xml><?xml version="1.0" encoding="utf-8"?>
 <p:tagLst xmlns:a="http://schemas.openxmlformats.org/drawingml/2006/main" xmlns:r="http://schemas.openxmlformats.org/officeDocument/2006/relationships" xmlns:p="http://schemas.openxmlformats.org/presentationml/2006/main">
-  <p:tag name="ALIGNMENT_TARGET_X" val="158.74015426635742"/>
+  <p:tag name="ALIGNMENT_TARGET_X" val="595.27558898925781"/>
 </p:tagLst>
 </file>
 
 <file path=ppt/tags/tag50.xml><?xml version="1.0" encoding="utf-8"?>
 <p:tagLst xmlns:a="http://schemas.openxmlformats.org/drawingml/2006/main" xmlns:r="http://schemas.openxmlformats.org/officeDocument/2006/relationships" xmlns:p="http://schemas.openxmlformats.org/presentationml/2006/main">
-  <p:tag name="ALIGNMENT_TARGET_X" val="1000.6299133300781"/>
+  <p:tag name="ALIGNMENT_TARGET_X" val="734.17324829101563"/>
 </p:tagLst>
 </file>
 
 <file path=ppt/tags/tag51.xml><?xml version="1.0" encoding="utf-8"?>
 <p:tagLst xmlns:a="http://schemas.openxmlformats.org/drawingml/2006/main" xmlns:r="http://schemas.openxmlformats.org/officeDocument/2006/relationships" xmlns:p="http://schemas.openxmlformats.org/presentationml/2006/main">
-  <p:tag name="ALIGNMENT_TARGET_X" val="734.1732177734375"/>
+  <p:tag name="ALIGNMENT_TARGET_X" val="1000.6299133300781"/>
 </p:tagLst>
 </file>
 
 <file path=ppt/tags/tag52.xml><?xml version="1.0" encoding="utf-8"?>
 <p:tagLst xmlns:a="http://schemas.openxmlformats.org/drawingml/2006/main" xmlns:r="http://schemas.openxmlformats.org/officeDocument/2006/relationships" xmlns:p="http://schemas.openxmlformats.org/presentationml/2006/main">
-  <p:tag name="ALIGNMENT_TARGET_X" val="595.27557373046875"/>
+  <p:tag name="ALIGNMENT_TARGET_X" val="734.1732177734375"/>
 </p:tagLst>
 </file>
 
@@ -14073,7 +14186,7 @@
 
 <file path=ppt/tags/tag54.xml><?xml version="1.0" encoding="utf-8"?>
 <p:tagLst xmlns:a="http://schemas.openxmlformats.org/drawingml/2006/main" xmlns:r="http://schemas.openxmlformats.org/officeDocument/2006/relationships" xmlns:p="http://schemas.openxmlformats.org/presentationml/2006/main">
-  <p:tag name="ALIGNMENT_TARGET_X" val="238.11023712158203"/>
+  <p:tag name="ALIGNMENT_TARGET_X" val="595.27557373046875"/>
 </p:tagLst>
 </file>
 
@@ -14085,7 +14198,7 @@
 
 <file path=ppt/tags/tag56.xml><?xml version="1.0" encoding="utf-8"?>
 <p:tagLst xmlns:a="http://schemas.openxmlformats.org/drawingml/2006/main" xmlns:r="http://schemas.openxmlformats.org/officeDocument/2006/relationships" xmlns:p="http://schemas.openxmlformats.org/presentationml/2006/main">
-  <p:tag name="ALIGNMENT_TARGET_X" val="595.27558898925781"/>
+  <p:tag name="ALIGNMENT_TARGET_X" val="238.11023712158203"/>
 </p:tagLst>
 </file>
 
@@ -14097,7 +14210,7 @@
 
 <file path=ppt/tags/tag58.xml><?xml version="1.0" encoding="utf-8"?>
 <p:tagLst xmlns:a="http://schemas.openxmlformats.org/drawingml/2006/main" xmlns:r="http://schemas.openxmlformats.org/officeDocument/2006/relationships" xmlns:p="http://schemas.openxmlformats.org/presentationml/2006/main">
-  <p:tag name="ALIGNMENT_TARGET_X" val="952.44096374511719"/>
+  <p:tag name="ALIGNMENT_TARGET_X" val="595.27558898925781"/>
 </p:tagLst>
 </file>
 
@@ -14109,91 +14222,91 @@
 
 <file path=ppt/tags/tag6.xml><?xml version="1.0" encoding="utf-8"?>
 <p:tagLst xmlns:a="http://schemas.openxmlformats.org/drawingml/2006/main" xmlns:r="http://schemas.openxmlformats.org/officeDocument/2006/relationships" xmlns:p="http://schemas.openxmlformats.org/presentationml/2006/main">
-  <p:tag name="ALIGNMENT_TARGET_X" val="449.85825729370117"/>
+  <p:tag name="ALIGNMENT_TARGET_X" val="158.74015426635742"/>
 </p:tagLst>
 </file>
 
 <file path=ppt/tags/tag60.xml><?xml version="1.0" encoding="utf-8"?>
 <p:tagLst xmlns:a="http://schemas.openxmlformats.org/drawingml/2006/main" xmlns:r="http://schemas.openxmlformats.org/officeDocument/2006/relationships" xmlns:p="http://schemas.openxmlformats.org/presentationml/2006/main">
-  <p:tag name="ALIGNMENT_TARGET_X" val="595.27557373046875"/>
+  <p:tag name="ALIGNMENT_TARGET_X" val="952.44096374511719"/>
 </p:tagLst>
 </file>
 
 <file path=ppt/tags/tag61.xml><?xml version="1.0" encoding="utf-8"?>
 <p:tagLst xmlns:a="http://schemas.openxmlformats.org/drawingml/2006/main" xmlns:r="http://schemas.openxmlformats.org/officeDocument/2006/relationships" xmlns:p="http://schemas.openxmlformats.org/presentationml/2006/main">
-  <p:tag name="ALIGNMENT_TARGET_X" val="328.81890869140625"/>
+  <p:tag name="ALIGNMENT_TARGET_X" val="595.27557373046875"/>
 </p:tagLst>
 </file>
 
 <file path=ppt/tags/tag62.xml><?xml version="1.0" encoding="utf-8"?>
 <p:tagLst xmlns:a="http://schemas.openxmlformats.org/drawingml/2006/main" xmlns:r="http://schemas.openxmlformats.org/officeDocument/2006/relationships" xmlns:p="http://schemas.openxmlformats.org/presentationml/2006/main">
-  <p:tag name="ALIGNMENT_TARGET_X" val="68.031494140625"/>
+  <p:tag name="ALIGNMENT_TARGET_X" val="328.81890869140625"/>
 </p:tagLst>
 </file>
 
 <file path=ppt/tags/tag63.xml><?xml version="1.0" encoding="utf-8"?>
 <p:tagLst xmlns:a="http://schemas.openxmlformats.org/drawingml/2006/main" xmlns:r="http://schemas.openxmlformats.org/officeDocument/2006/relationships" xmlns:p="http://schemas.openxmlformats.org/presentationml/2006/main">
-  <p:tag name="ALIGNMENT_TARGET_X" val="583.93700408935547"/>
+  <p:tag name="ALIGNMENT_TARGET_X" val="68.031494140625"/>
 </p:tagLst>
 </file>
 
 <file path=ppt/tags/tag64.xml><?xml version="1.0" encoding="utf-8"?>
 <p:tagLst xmlns:a="http://schemas.openxmlformats.org/drawingml/2006/main" xmlns:r="http://schemas.openxmlformats.org/officeDocument/2006/relationships" xmlns:p="http://schemas.openxmlformats.org/presentationml/2006/main">
-  <p:tag name="ALIGNMENT_TARGET_X" val="68.031494140625"/>
+  <p:tag name="ALIGNMENT_TARGET_X" val="583.93700408935547"/>
 </p:tagLst>
 </file>
 
 <file path=ppt/tags/tag65.xml><?xml version="1.0" encoding="utf-8"?>
 <p:tagLst xmlns:a="http://schemas.openxmlformats.org/drawingml/2006/main" xmlns:r="http://schemas.openxmlformats.org/officeDocument/2006/relationships" xmlns:p="http://schemas.openxmlformats.org/presentationml/2006/main">
-  <p:tag name="ALIGNMENT_TARGET_X" val="583.93700408935547"/>
+  <p:tag name="ALIGNMENT_TARGET_X" val="68.031494140625"/>
 </p:tagLst>
 </file>
 
 <file path=ppt/tags/tag66.xml><?xml version="1.0" encoding="utf-8"?>
 <p:tagLst xmlns:a="http://schemas.openxmlformats.org/drawingml/2006/main" xmlns:r="http://schemas.openxmlformats.org/officeDocument/2006/relationships" xmlns:p="http://schemas.openxmlformats.org/presentationml/2006/main">
-  <p:tag name="ALIGNMENT_TARGET_X" val="68.031494140625"/>
+  <p:tag name="ALIGNMENT_TARGET_X" val="583.93700408935547"/>
 </p:tagLst>
 </file>
 
 <file path=ppt/tags/tag67.xml><?xml version="1.0" encoding="utf-8"?>
 <p:tagLst xmlns:a="http://schemas.openxmlformats.org/drawingml/2006/main" xmlns:r="http://schemas.openxmlformats.org/officeDocument/2006/relationships" xmlns:p="http://schemas.openxmlformats.org/presentationml/2006/main">
-  <p:tag name="ALIGNMENT_TARGET_X" val="583.93700408935547"/>
+  <p:tag name="ALIGNMENT_TARGET_X" val="68.031494140625"/>
 </p:tagLst>
 </file>
 
 <file path=ppt/tags/tag68.xml><?xml version="1.0" encoding="utf-8"?>
 <p:tagLst xmlns:a="http://schemas.openxmlformats.org/drawingml/2006/main" xmlns:r="http://schemas.openxmlformats.org/officeDocument/2006/relationships" xmlns:p="http://schemas.openxmlformats.org/presentationml/2006/main">
-  <p:tag name="ALIGNMENT_TARGET_X" val="187.08660888671875"/>
+  <p:tag name="ALIGNMENT_TARGET_X" val="583.93700408935547"/>
 </p:tagLst>
 </file>
 
 <file path=ppt/tags/tag69.xml><?xml version="1.0" encoding="utf-8"?>
 <p:tagLst xmlns:a="http://schemas.openxmlformats.org/drawingml/2006/main" xmlns:r="http://schemas.openxmlformats.org/officeDocument/2006/relationships" xmlns:p="http://schemas.openxmlformats.org/presentationml/2006/main">
-  <p:tag name="ALIGNMENT_TARGET_X" val="320.31497192382813"/>
+  <p:tag name="ALIGNMENT_TARGET_X" val="187.08660888671875"/>
 </p:tagLst>
 </file>
 
 <file path=ppt/tags/tag7.xml><?xml version="1.0" encoding="utf-8"?>
 <p:tagLst xmlns:a="http://schemas.openxmlformats.org/drawingml/2006/main" xmlns:r="http://schemas.openxmlformats.org/officeDocument/2006/relationships" xmlns:p="http://schemas.openxmlformats.org/presentationml/2006/main">
-  <p:tag name="ALIGNMENT_TARGET_X" val="740.97636032104492"/>
+  <p:tag name="ALIGNMENT_TARGET_X" val="449.85825729370117"/>
 </p:tagLst>
 </file>
 
 <file path=ppt/tags/tag70.xml><?xml version="1.0" encoding="utf-8"?>
 <p:tagLst xmlns:a="http://schemas.openxmlformats.org/drawingml/2006/main" xmlns:r="http://schemas.openxmlformats.org/officeDocument/2006/relationships" xmlns:p="http://schemas.openxmlformats.org/presentationml/2006/main">
-  <p:tag name="ALIGNMENT_TARGET_X" val="453.54330444335938"/>
+  <p:tag name="ALIGNMENT_TARGET_X" val="320.31497192382813"/>
 </p:tagLst>
 </file>
 
 <file path=ppt/tags/tag71.xml><?xml version="1.0" encoding="utf-8"?>
 <p:tagLst xmlns:a="http://schemas.openxmlformats.org/drawingml/2006/main" xmlns:r="http://schemas.openxmlformats.org/officeDocument/2006/relationships" xmlns:p="http://schemas.openxmlformats.org/presentationml/2006/main">
-  <p:tag name="ALIGNMENT_TARGET_X" val="328.81890869140625"/>
+  <p:tag name="ALIGNMENT_TARGET_X" val="453.54330444335938"/>
 </p:tagLst>
 </file>
 
 <file path=ppt/tags/tag72.xml><?xml version="1.0" encoding="utf-8"?>
 <p:tagLst xmlns:a="http://schemas.openxmlformats.org/drawingml/2006/main" xmlns:r="http://schemas.openxmlformats.org/officeDocument/2006/relationships" xmlns:p="http://schemas.openxmlformats.org/presentationml/2006/main">
-  <p:tag name="ALIGNMENT_TARGET_X" val="873.07089233398438"/>
+  <p:tag name="ALIGNMENT_TARGET_X" val="328.81890869140625"/>
 </p:tagLst>
 </file>
 
@@ -14211,7 +14324,7 @@
 
 <file path=ppt/tags/tag75.xml><?xml version="1.0" encoding="utf-8"?>
 <p:tagLst xmlns:a="http://schemas.openxmlformats.org/drawingml/2006/main" xmlns:r="http://schemas.openxmlformats.org/officeDocument/2006/relationships" xmlns:p="http://schemas.openxmlformats.org/presentationml/2006/main">
-  <p:tag name="ALIGNMENT_TARGET_X" val="701.5748291015625"/>
+  <p:tag name="ALIGNMENT_TARGET_X" val="873.07089233398438"/>
 </p:tagLst>
 </file>
 
@@ -14223,7 +14336,7 @@
 
 <file path=ppt/tags/tag77.xml><?xml version="1.0" encoding="utf-8"?>
 <p:tagLst xmlns:a="http://schemas.openxmlformats.org/drawingml/2006/main" xmlns:r="http://schemas.openxmlformats.org/officeDocument/2006/relationships" xmlns:p="http://schemas.openxmlformats.org/presentationml/2006/main">
-  <p:tag name="ALIGNMENT_TARGET_X" val="869.6693115234375"/>
+  <p:tag name="ALIGNMENT_TARGET_X" val="701.5748291015625"/>
 </p:tagLst>
 </file>
 
@@ -14235,13 +14348,13 @@
 
 <file path=ppt/tags/tag79.xml><?xml version="1.0" encoding="utf-8"?>
 <p:tagLst xmlns:a="http://schemas.openxmlformats.org/drawingml/2006/main" xmlns:r="http://schemas.openxmlformats.org/officeDocument/2006/relationships" xmlns:p="http://schemas.openxmlformats.org/presentationml/2006/main">
-  <p:tag name="ALIGNMENT_TARGET_X" val="1037.7637939453125"/>
+  <p:tag name="ALIGNMENT_TARGET_X" val="869.6693115234375"/>
 </p:tagLst>
 </file>
 
 <file path=ppt/tags/tag8.xml><?xml version="1.0" encoding="utf-8"?>
 <p:tagLst xmlns:a="http://schemas.openxmlformats.org/drawingml/2006/main" xmlns:r="http://schemas.openxmlformats.org/officeDocument/2006/relationships" xmlns:p="http://schemas.openxmlformats.org/presentationml/2006/main">
-  <p:tag name="ALIGNMENT_TARGET_X" val="1032.0944633483887"/>
+  <p:tag name="ALIGNMENT_TARGET_X" val="740.97636032104492"/>
 </p:tagLst>
 </file>
 
@@ -14253,19 +14366,19 @@
 
 <file path=ppt/tags/tag81.xml><?xml version="1.0" encoding="utf-8"?>
 <p:tagLst xmlns:a="http://schemas.openxmlformats.org/drawingml/2006/main" xmlns:r="http://schemas.openxmlformats.org/officeDocument/2006/relationships" xmlns:p="http://schemas.openxmlformats.org/presentationml/2006/main">
-  <p:tag name="ALIGNMENT_TARGET_X" val="873.07089233398438"/>
+  <p:tag name="ALIGNMENT_TARGET_X" val="1037.7637939453125"/>
 </p:tagLst>
 </file>
 
 <file path=ppt/tags/tag82.xml><?xml version="1.0" encoding="utf-8"?>
 <p:tagLst xmlns:a="http://schemas.openxmlformats.org/drawingml/2006/main" xmlns:r="http://schemas.openxmlformats.org/officeDocument/2006/relationships" xmlns:p="http://schemas.openxmlformats.org/presentationml/2006/main">
-  <p:tag name="ALIGNMENT_TARGET_X" val="170.07874298095703"/>
+  <p:tag name="ALIGNMENT_TARGET_X" val="873.07089233398438"/>
 </p:tagLst>
 </file>
 
 <file path=ppt/tags/tag83.xml><?xml version="1.0" encoding="utf-8"?>
 <p:tagLst xmlns:a="http://schemas.openxmlformats.org/drawingml/2006/main" xmlns:r="http://schemas.openxmlformats.org/officeDocument/2006/relationships" xmlns:p="http://schemas.openxmlformats.org/presentationml/2006/main">
-  <p:tag name="ALIGNMENT_TARGET_X" val="308.97637939453125"/>
+  <p:tag name="ALIGNMENT_TARGET_X" val="170.07874298095703"/>
 </p:tagLst>
 </file>
 
@@ -14277,7 +14390,7 @@
 
 <file path=ppt/tags/tag85.xml><?xml version="1.0" encoding="utf-8"?>
 <p:tagLst xmlns:a="http://schemas.openxmlformats.org/drawingml/2006/main" xmlns:r="http://schemas.openxmlformats.org/officeDocument/2006/relationships" xmlns:p="http://schemas.openxmlformats.org/presentationml/2006/main">
-  <p:tag name="ALIGNMENT_TARGET_X" val="402.51968383789063"/>
+  <p:tag name="ALIGNMENT_TARGET_X" val="308.97637939453125"/>
 </p:tagLst>
 </file>
 
@@ -14289,7 +14402,7 @@
 
 <file path=ppt/tags/tag87.xml><?xml version="1.0" encoding="utf-8"?>
 <p:tagLst xmlns:a="http://schemas.openxmlformats.org/drawingml/2006/main" xmlns:r="http://schemas.openxmlformats.org/officeDocument/2006/relationships" xmlns:p="http://schemas.openxmlformats.org/presentationml/2006/main">
-  <p:tag name="ALIGNMENT_TARGET_X" val="496.06298828125"/>
+  <p:tag name="ALIGNMENT_TARGET_X" val="402.51968383789063"/>
 </p:tagLst>
 </file>
 
@@ -14301,13 +14414,13 @@
 
 <file path=ppt/tags/tag89.xml><?xml version="1.0" encoding="utf-8"?>
 <p:tagLst xmlns:a="http://schemas.openxmlformats.org/drawingml/2006/main" xmlns:r="http://schemas.openxmlformats.org/officeDocument/2006/relationships" xmlns:p="http://schemas.openxmlformats.org/presentationml/2006/main">
-  <p:tag name="ALIGNMENT_TARGET_X" val="589.60629272460938"/>
+  <p:tag name="ALIGNMENT_TARGET_X" val="496.06298828125"/>
 </p:tagLst>
 </file>
 
 <file path=ppt/tags/tag9.xml><?xml version="1.0" encoding="utf-8"?>
 <p:tagLst xmlns:a="http://schemas.openxmlformats.org/drawingml/2006/main" xmlns:r="http://schemas.openxmlformats.org/officeDocument/2006/relationships" xmlns:p="http://schemas.openxmlformats.org/presentationml/2006/main">
-  <p:tag name="ALIGNMENT_TARGET_X" val="595.27557373046875"/>
+  <p:tag name="ALIGNMENT_TARGET_X" val="1032.0944633483887"/>
 </p:tagLst>
 </file>
 
@@ -14319,7 +14432,7 @@
 
 <file path=ppt/tags/tag91.xml><?xml version="1.0" encoding="utf-8"?>
 <p:tagLst xmlns:a="http://schemas.openxmlformats.org/drawingml/2006/main" xmlns:r="http://schemas.openxmlformats.org/officeDocument/2006/relationships" xmlns:p="http://schemas.openxmlformats.org/presentationml/2006/main">
-  <p:tag name="ALIGNMENT_TARGET_X" val="683.14962768554688"/>
+  <p:tag name="ALIGNMENT_TARGET_X" val="589.60629272460938"/>
 </p:tagLst>
 </file>
 
@@ -14331,7 +14444,7 @@
 
 <file path=ppt/tags/tag93.xml><?xml version="1.0" encoding="utf-8"?>
 <p:tagLst xmlns:a="http://schemas.openxmlformats.org/drawingml/2006/main" xmlns:r="http://schemas.openxmlformats.org/officeDocument/2006/relationships" xmlns:p="http://schemas.openxmlformats.org/presentationml/2006/main">
-  <p:tag name="ALIGNMENT_TARGET_X" val="776.69290161132813"/>
+  <p:tag name="ALIGNMENT_TARGET_X" val="683.14962768554688"/>
 </p:tagLst>
 </file>
 
@@ -14343,11 +14456,17 @@
 
 <file path=ppt/tags/tag95.xml><?xml version="1.0" encoding="utf-8"?>
 <p:tagLst xmlns:a="http://schemas.openxmlformats.org/drawingml/2006/main" xmlns:r="http://schemas.openxmlformats.org/officeDocument/2006/relationships" xmlns:p="http://schemas.openxmlformats.org/presentationml/2006/main">
+  <p:tag name="ALIGNMENT_TARGET_X" val="776.69290161132813"/>
+</p:tagLst>
+</file>
+
+<file path=ppt/tags/tag96.xml><?xml version="1.0" encoding="utf-8"?>
+<p:tagLst xmlns:a="http://schemas.openxmlformats.org/drawingml/2006/main" xmlns:r="http://schemas.openxmlformats.org/officeDocument/2006/relationships" xmlns:p="http://schemas.openxmlformats.org/presentationml/2006/main">
   <p:tag name="ALIGNMENT_TARGET_X" val="975.11810302734375"/>
 </p:tagLst>
 </file>
 
-<file path=ppt/tags/tag96.xml><?xml version="1.0" encoding="utf-8"?>
+<file path=ppt/tags/tag97.xml><?xml version="1.0" encoding="utf-8"?>
 <p:tagLst xmlns:a="http://schemas.openxmlformats.org/drawingml/2006/main" xmlns:r="http://schemas.openxmlformats.org/officeDocument/2006/relationships" xmlns:p="http://schemas.openxmlformats.org/presentationml/2006/main">
   <p:tag name="ALIGNMENT_TARGET_X" val="595.27557373046875"/>
 </p:tagLst>

--- a/deliverables/決賽海報_AI資安框架_A2.pptx
+++ b/deliverables/決賽海報_AI資安框架_A2.pptx
@@ -4185,7 +4185,7 @@
         </p:nvSpPr>
         <p:spPr>
           <a:xfrm>
-            <a:off x="765575" y="720000"/>
+            <a:off x="763987" y="720000"/>
             <a:ext cx="13392000" cy="2556000"/>
           </a:xfrm>
           <a:prstGeom prst="rect">
@@ -4201,7 +4201,7 @@
           <a:p>
             <a:pPr algn="ctr">
               <a:lnSpc>
-                <a:spcPct val="100000"/>
+                <a:spcPct val="110000"/>
               </a:lnSpc>
               <a:spcBef>
                 <a:spcPts val="0"/>
@@ -4211,7 +4211,7 @@
               </a:spcAft>
             </a:pPr>
             <a:r>
-              <a:rPr sz="5600" b="1">
+              <a:rPr sz="5700" b="1">
                 <a:solidFill>
                   <a:srgbClr val="0B1B2E"/>
                 </a:solidFill>
@@ -4219,13 +4219,13 @@
                 <a:ea typeface="Microsoft JhengHei"/>
                 <a:cs typeface="Segoe UI"/>
               </a:rPr>
-              <a:t>融合新型內容相依時序方向模型</a:t>
+              <a:t>融合新型內容相依時序方向模型入侵偵測</a:t>
             </a:r>
           </a:p>
           <a:p>
             <a:pPr algn="ctr">
               <a:lnSpc>
-                <a:spcPct val="100000"/>
+                <a:spcPct val="110000"/>
               </a:lnSpc>
               <a:spcBef>
                 <a:spcPts val="0"/>
@@ -4235,7 +4235,7 @@
               </a:spcAft>
             </a:pPr>
             <a:r>
-              <a:rPr sz="5600" b="1">
+              <a:rPr sz="5700" b="1">
                 <a:solidFill>
                   <a:srgbClr val="0B1B2E"/>
                 </a:solidFill>
@@ -4243,31 +4243,7 @@
                 <a:ea typeface="Microsoft JhengHei"/>
                 <a:cs typeface="Segoe UI"/>
               </a:rPr>
-              <a:t>入侵偵測與任務導向檢索增強稽核</a:t>
-            </a:r>
-          </a:p>
-          <a:p>
-            <a:pPr algn="ctr">
-              <a:lnSpc>
-                <a:spcPct val="100000"/>
-              </a:lnSpc>
-              <a:spcBef>
-                <a:spcPts val="0"/>
-              </a:spcBef>
-              <a:spcAft>
-                <a:spcPts val="0"/>
-              </a:spcAft>
-            </a:pPr>
-            <a:r>
-              <a:rPr sz="5600" b="1">
-                <a:solidFill>
-                  <a:srgbClr val="0B1B2E"/>
-                </a:solidFill>
-                <a:latin typeface="Segoe UI"/>
-                <a:ea typeface="Microsoft JhengHei"/>
-                <a:cs typeface="Segoe UI"/>
-              </a:rPr>
-              <a:t>之 AI 資安框架</a:t>
+              <a:t>與任務導向檢索增強稽核之 AI 資安框架</a:t>
             </a:r>
           </a:p>
         </p:txBody>

--- a/deliverables/決賽海報_AI資安框架_A2.pptx
+++ b/deliverables/決賽海報_AI資安框架_A2.pptx
@@ -4407,8 +4407,8 @@
         </p:nvSpPr>
         <p:spPr>
           <a:xfrm>
-            <a:off x="2880000" y="4266000"/>
-            <a:ext cx="9360000" cy="288000"/>
+            <a:off x="1800000" y="4266000"/>
+            <a:ext cx="11520000" cy="288000"/>
           </a:xfrm>
           <a:prstGeom prst="roundRect">
             <a:avLst>
@@ -4462,8 +4462,8 @@
         </p:nvSpPr>
         <p:spPr>
           <a:xfrm>
-            <a:off x="2855394" y="4266000"/>
-            <a:ext cx="9360000" cy="288000"/>
+            <a:off x="1775394" y="4266000"/>
+            <a:ext cx="11520000" cy="288000"/>
           </a:xfrm>
           <a:prstGeom prst="rect">
             <a:avLst/>
@@ -4507,7 +4507,7 @@
                 <a:ea typeface="Microsoft JhengHei"/>
                 <a:cs typeface="Segoe UI"/>
               </a:rPr>
-              <a:t>本團隊原創：CTBM、校準融合、任務導向檢索、本機AI稽核、受控回復　｜　引用既有：PBCNN</a:t>
+              <a:t>本團隊原創：CTBM、校準融合、任務導向檢索、本機AI稽核、受控回復　｜　引用既有：PBCNN（Yu et al., 2021）</a:t>
             </a:r>
           </a:p>
         </p:txBody>
